--- a/Gracenote报告解读_课堂汇报.pptx
+++ b/Gracenote报告解读_课堂汇报.pptx
@@ -120,13 +120,13 @@
   <p:extLst>
     <p:ext uri="{521415D9-36F7-43E2-AB2F-B90AF26B5E84}">
       <p14:sectionLst xmlns:p14="http://schemas.microsoft.com/office/powerpoint/2010/main">
-        <p14:section name="开场" id="{6d2b9a57-c96a-ff0a-4dd6-c1b172ace300}">
+        <p14:section name="开场" id="{6d9f39e4-3985-8b7e-da85-a9c10d230e8f}">
           <p14:sldIdLst>
             <p14:sldId id="256"/>
             <p14:sldId id="257"/>
           </p14:sldIdLst>
         </p14:section>
-        <p14:section name="报告介绍" id="{de5f52f3-458a-d51f-cb1e-2a2f6de6e17c}">
+        <p14:section name="报告介绍" id="{b7582475-0380-d696-5d7c-b9b9ea37b213}">
           <p14:sldIdLst>
             <p14:sldId id="258"/>
             <p14:sldId id="259"/>
@@ -134,7 +134,7 @@
             <p14:sldId id="261"/>
           </p14:sldIdLst>
         </p14:section>
-        <p14:section name="方法评价" id="{18d7fba7-8f6c-a4f5-65a9-480f34b1b131}">
+        <p14:section name="方法评价" id="{62a34f20-8d61-e00a-eac1-c71f4a17625f}">
           <p14:sldIdLst>
             <p14:sldId id="262"/>
             <p14:sldId id="263"/>
@@ -143,12 +143,12 @@
             <p14:sldId id="266"/>
           </p14:sldIdLst>
         </p14:section>
-        <p14:section name="总结" id="{696348cc-a504-4ced-90e1-99cfee7af2eb}">
+        <p14:section name="总结" id="{325d7e52-5a4a-d9d7-0464-aaca59efa6c4}">
           <p14:sldIdLst>
             <p14:sldId id="267"/>
           </p14:sldIdLst>
         </p14:section>
-        <p14:section name="附录（备问）" id="{c592c07e-c550-a0de-8760-e7fac75f76fc}">
+        <p14:section name="附录（备问）" id="{e1cc1a14-9c81-94a3-3526-d664bd9b71bc}">
           <p14:sldIdLst>
             <p14:sldId id="268"/>
             <p14:sldId id="269"/>
@@ -1005,7 +1005,7 @@
           <a:p>
             <a:r>
               <a:rPr lang="en-US" dirty="0"/>
-              <a:t>【约 30 秒】维度三，调查时间。报告将皮尤 2025 年秋的 30% 与自身 2026 年初的 54% 对比，称使用“正在加速”。但两者分母不同：皮尤是全体青少年，同为 13 至 14 岁仅 24%。统一为使用者口径后，差距约 10 个百分点，不足以说明“加速”。</a:t>
+              <a:t>【约 25 秒】维度三，调查时间：两项调查分母不同，“加速”的结论不成立。报告将皮尤 2025 年秋的 30% 与自身 2026 年初的 54% 对比；但皮尤是全体青少年，同为 13 至 14 岁仅 24%。统一为使用者口径后，差距约 10 个百分点。</a:t>
             </a:r>
             <a:endParaRPr lang="en-US" dirty="0"/>
           </a:p>
@@ -1093,7 +1093,7 @@
           <a:p>
             <a:r>
               <a:rPr lang="en-US" dirty="0"/>
-              <a:t>【约 20 秒】维度四，研究方法。“检索困难导致退订”由四类数据支撑：退订意向、行业退订率、市场预测和 AI 测试。它们对象和性质各不相同，又无追踪或实验设计，只能提示可能相关，不能证明因果。</a:t>
+              <a:t>【约 20 秒】维度四，研究方法：四类异质数据不足以证明“检索困难导致退订”。这四类是退订意向、行业退订率、市场预测和 AI 测试，对象和性质各不相同，又无追踪或实验设计，只能提示可能相关。</a:t>
             </a:r>
             <a:endParaRPr lang="en-US" dirty="0"/>
           </a:p>
@@ -1181,7 +1181,7 @@
           <a:p>
             <a:r>
               <a:rPr lang="en-US" dirty="0"/>
-              <a:t>【约 25 秒】回到论证链：前两环方向成立，但只适用于 AI 用户；第三环口径混用、因果未证；第四环尚未检验。因此，报告可作为趋势参考，不宜作为精确估计或因果证据。最后提出一个问题：如何设计调查，才能检验“检索困难导致退订”？谢谢。</a:t>
+              <a:t>【约 30 秒】回到论证链：两环部分成立，两环证据不足。前两环只适用于 AI 用户；第三环口径混用、因果未证；第四环尚未检验。因此，报告可作为趋势参考，不宜作为精确估计或因果证据。最后提出一个问题：如何设计调查，才能检验“检索困难导致退订”？谢谢。</a:t>
             </a:r>
             <a:endParaRPr lang="en-US" dirty="0"/>
           </a:p>
@@ -1621,7 +1621,7 @@
           <a:p>
             <a:r>
               <a:rPr lang="en-US" dirty="0"/>
-              <a:t>【约 25 秒】报告主要依据两项线上问卷。调查一于 2026 年初进行，对象是 4003 名 13 至 79 岁的美国 AI 聊天机器人用户；调查二于 2025 年夏季进行，覆盖六国，每国 500 名流媒体用户。两项调查均未公开抽样框、加权方法和应答率。</a:t>
+              <a:t>【约 25 秒】报告的结论依赖两项线上问卷，且两者均未公开抽样框、加权方法和应答率。调查一于 2026 年初进行，对象是 4003 名 13 至 79 岁的美国 AI 聊天机器人用户；调查二于 2025 年夏季进行，覆盖六国，每国 500 名流媒体用户。</a:t>
             </a:r>
             <a:endParaRPr lang="en-US" dirty="0"/>
           </a:p>
@@ -1973,7 +1973,7 @@
           <a:p>
             <a:r>
               <a:rPr lang="en-US" dirty="0"/>
-              <a:t>【约 30 秒】维度一，调查对象。事实是，样本只包括 AI 聊天机器人用户，报告却表述为“美国人”。原因是线上样本以使用 AI 为筛选条件，抽样方式也未公开。因此，54% 和 75% 只能理解为 AI 用户中的比例，这与课上 Durex 网络调查的问题相同。</a:t>
+              <a:t>【约 25 秒】维度一，调查对象：样本仅为 AI 用户，结论却推及“美国人”。原因是线上样本以使用 AI 为筛选条件，抽样方式也未公开。因此，54% 和 75% 只能理解为 AI 用户中的比例，这与课上 Durex 网络调查的问题相同。</a:t>
             </a:r>
             <a:endParaRPr lang="en-US" dirty="0"/>
           </a:p>
@@ -2061,7 +2061,7 @@
           <a:p>
             <a:r>
               <a:rPr lang="en-US" dirty="0"/>
-              <a:t>【约 20 秒】维度二，研究总体。“平均 14 分钟”来自六国调查，是六国简单平均；美国受访者是 12 分钟，法国的 26 分钟拉高了均值。报告却把它放进描述美国收视的图表，会使读者高估美国用户的检索困难。</a:t>
+              <a:t>【约 20 秒】维度二，研究总体：“14 分钟”是六国均值，美国实为 12 分钟。它是六国简单平均，法国的 26 分钟拉高了均值；报告却把它放进描述美国收视的图表，会使读者高估美国用户的检索困难。</a:t>
             </a:r>
             <a:endParaRPr lang="en-US" dirty="0"/>
           </a:p>
@@ -2277,8 +2277,8 @@
         </p:nvSpPr>
         <p:spPr>
           <a:xfrm>
-            <a:off x="731520" y="502920"/>
-            <a:ext cx="10698480" cy="868680"/>
+            <a:off x="731520" y="594360"/>
+            <a:ext cx="10698480" cy="822960"/>
           </a:xfrm>
           <a:prstGeom prst="rect">
             <a:avLst/>
@@ -2291,7 +2291,7 @@
           <a:lstStyle>
             <a:lvl1pPr algn="l" indent="0" marL="0">
               <a:buNone/>
-              <a:defRPr lang="en-US" sz="3000" b="1" dirty="0">
+              <a:defRPr lang="en-US" sz="2800" b="1" dirty="0">
                 <a:solidFill>
                   <a:schemeClr val="bg1"/>
                 </a:solidFill>
@@ -2302,7 +2302,7 @@
             <a:pPr algn="l" indent="0" marL="0">
               <a:buNone/>
             </a:pPr>
-            <a:endParaRPr lang="en-US" sz="3000" dirty="0"/>
+            <a:endParaRPr lang="en-US" sz="2800" dirty="0"/>
           </a:p>
         </p:txBody>
       </p:sp>
@@ -2393,8 +2393,8 @@
         </p:nvSpPr>
         <p:spPr>
           <a:xfrm>
-            <a:off x="548640" y="365760"/>
-            <a:ext cx="7406640" cy="777240"/>
+            <a:off x="548640" y="502920"/>
+            <a:ext cx="7452360" cy="685800"/>
           </a:xfrm>
           <a:prstGeom prst="rect">
             <a:avLst/>
@@ -2407,7 +2407,7 @@
           <a:lstStyle>
             <a:lvl1pPr algn="l" indent="0" marL="0">
               <a:buNone/>
-              <a:defRPr lang="en-US" sz="2800" b="1" dirty="0">
+              <a:defRPr lang="en-US" sz="2600" b="1" dirty="0">
                 <a:solidFill>
                   <a:schemeClr val="tx2"/>
                 </a:solidFill>
@@ -2418,7 +2418,7 @@
             <a:pPr algn="l" indent="0" marL="0">
               <a:buNone/>
             </a:pPr>
-            <a:endParaRPr lang="en-US" sz="2800" dirty="0"/>
+            <a:endParaRPr lang="en-US" sz="2600" dirty="0"/>
           </a:p>
         </p:txBody>
       </p:sp>
@@ -3154,8 +3154,8 @@
         </p:nvSpPr>
         <p:spPr>
           <a:xfrm>
-            <a:off x="548640" y="365760"/>
-            <a:ext cx="7406640" cy="777240"/>
+            <a:off x="548640" y="502920"/>
+            <a:ext cx="7452360" cy="685800"/>
           </a:xfrm>
           <a:prstGeom prst="rect">
             <a:avLst/>
@@ -3171,20 +3171,56 @@
               <a:buNone/>
             </a:pPr>
             <a:r>
-              <a:rPr lang="en-US" sz="2800" b="1" dirty="0">
+              <a:rPr lang="en-US" sz="2600" b="1" dirty="0">
                 <a:solidFill>
                   <a:schemeClr val="tx2"/>
                 </a:solidFill>
               </a:rPr>
-              <a:t>维度三 · 调查时间：比较口径不一致</a:t>
-            </a:r>
-            <a:endParaRPr lang="en-US" sz="2800" dirty="0"/>
-          </a:p>
-        </p:txBody>
-      </p:sp>
-      <p:sp>
-        <p:nvSpPr>
-          <p:cNvPr id="3" name="进度1"/>
+              <a:t>两项调查分母不同，“加速”结论不成立</a:t>
+            </a:r>
+            <a:endParaRPr lang="en-US" sz="2600" dirty="0"/>
+          </a:p>
+        </p:txBody>
+      </p:sp>
+      <p:sp>
+        <p:nvSpPr>
+          <p:cNvPr id="3" name="章节标签"/>
+          <p:cNvSpPr txBox="1"/>
+          <p:nvPr/>
+        </p:nvSpPr>
+        <p:spPr>
+          <a:xfrm>
+            <a:off x="548640" y="256032"/>
+            <a:ext cx="7315200" cy="292608"/>
+          </a:xfrm>
+          <a:prstGeom prst="rect">
+            <a:avLst/>
+          </a:prstGeom>
+          <a:noFill/>
+          <a:ln/>
+        </p:spPr>
+        <p:txBody>
+          <a:bodyPr wrap="square" lIns="0" tIns="0" rIns="0" bIns="0" rtlCol="0" anchor="ctr"/>
+          <a:lstStyle/>
+          <a:p>
+            <a:pPr indent="0" marL="0">
+              <a:buNone/>
+            </a:pPr>
+            <a:r>
+              <a:rPr lang="en-US" sz="1200" b="1" dirty="0">
+                <a:solidFill>
+                  <a:schemeClr val="accent1"/>
+                </a:solidFill>
+              </a:rPr>
+              <a:t>四、方法评价 · 维度三  调查时间</a:t>
+            </a:r>
+            <a:endParaRPr lang="en-US" sz="1200" dirty="0"/>
+          </a:p>
+        </p:txBody>
+      </p:sp>
+      <p:sp>
+        <p:nvSpPr>
+          <p:cNvPr id="4" name="进度1"/>
           <p:cNvSpPr/>
           <p:nvPr/>
         </p:nvSpPr>
@@ -3211,7 +3247,7 @@
       </p:sp>
       <p:sp>
         <p:nvSpPr>
-          <p:cNvPr id="4" name="进度文字1"/>
+          <p:cNvPr id="5" name="进度文字1"/>
           <p:cNvSpPr txBox="1"/>
           <p:nvPr/>
         </p:nvSpPr>
@@ -3247,7 +3283,7 @@
       </p:sp>
       <p:sp>
         <p:nvSpPr>
-          <p:cNvPr id="5" name="进度2"/>
+          <p:cNvPr id="6" name="进度2"/>
           <p:cNvSpPr/>
           <p:nvPr/>
         </p:nvSpPr>
@@ -3274,7 +3310,7 @@
       </p:sp>
       <p:sp>
         <p:nvSpPr>
-          <p:cNvPr id="6" name="进度文字2"/>
+          <p:cNvPr id="7" name="进度文字2"/>
           <p:cNvSpPr txBox="1"/>
           <p:nvPr/>
         </p:nvSpPr>
@@ -3310,7 +3346,7 @@
       </p:sp>
       <p:sp>
         <p:nvSpPr>
-          <p:cNvPr id="7" name="进度3"/>
+          <p:cNvPr id="8" name="进度3"/>
           <p:cNvSpPr/>
           <p:nvPr/>
         </p:nvSpPr>
@@ -3337,7 +3373,7 @@
       </p:sp>
       <p:sp>
         <p:nvSpPr>
-          <p:cNvPr id="8" name="进度文字3"/>
+          <p:cNvPr id="9" name="进度文字3"/>
           <p:cNvSpPr txBox="1"/>
           <p:nvPr/>
         </p:nvSpPr>
@@ -3373,7 +3409,7 @@
       </p:sp>
       <p:sp>
         <p:nvSpPr>
-          <p:cNvPr id="9" name="进度4"/>
+          <p:cNvPr id="10" name="进度4"/>
           <p:cNvSpPr/>
           <p:nvPr/>
         </p:nvSpPr>
@@ -3400,7 +3436,7 @@
       </p:sp>
       <p:sp>
         <p:nvSpPr>
-          <p:cNvPr id="10" name="进度文字4"/>
+          <p:cNvPr id="11" name="进度文字4"/>
           <p:cNvSpPr txBox="1"/>
           <p:nvPr/>
         </p:nvSpPr>
@@ -3436,7 +3472,7 @@
       </p:sp>
       <p:sp>
         <p:nvSpPr>
-          <p:cNvPr id="11" name="进度5"/>
+          <p:cNvPr id="12" name="进度5"/>
           <p:cNvSpPr/>
           <p:nvPr/>
         </p:nvSpPr>
@@ -3463,7 +3499,7 @@
       </p:sp>
       <p:sp>
         <p:nvSpPr>
-          <p:cNvPr id="12" name="进度文字5"/>
+          <p:cNvPr id="13" name="进度文字5"/>
           <p:cNvSpPr txBox="1"/>
           <p:nvPr/>
         </p:nvSpPr>
@@ -3499,7 +3535,7 @@
       </p:sp>
       <p:sp>
         <p:nvSpPr>
-          <p:cNvPr id="13" name="对比卡1"/>
+          <p:cNvPr id="14" name="对比卡1"/>
           <p:cNvSpPr/>
           <p:nvPr/>
         </p:nvSpPr>
@@ -3526,7 +3562,7 @@
       </p:sp>
       <p:sp>
         <p:nvSpPr>
-          <p:cNvPr id="14" name="对比机构1"/>
+          <p:cNvPr id="15" name="对比机构1"/>
           <p:cNvSpPr txBox="1"/>
           <p:nvPr/>
         </p:nvSpPr>
@@ -3562,7 +3598,7 @@
       </p:sp>
       <p:sp>
         <p:nvSpPr>
-          <p:cNvPr id="15" name="对比数字1"/>
+          <p:cNvPr id="16" name="对比数字1"/>
           <p:cNvSpPr txBox="1"/>
           <p:nvPr/>
         </p:nvSpPr>
@@ -3612,7 +3648,7 @@
       </p:sp>
       <p:sp>
         <p:nvSpPr>
-          <p:cNvPr id="16" name="对比说明1"/>
+          <p:cNvPr id="17" name="对比说明1"/>
           <p:cNvSpPr txBox="1"/>
           <p:nvPr/>
         </p:nvSpPr>
@@ -3648,7 +3684,7 @@
       </p:sp>
       <p:sp>
         <p:nvSpPr>
-          <p:cNvPr id="17" name="对比卡2"/>
+          <p:cNvPr id="18" name="对比卡2"/>
           <p:cNvSpPr/>
           <p:nvPr/>
         </p:nvSpPr>
@@ -3675,7 +3711,7 @@
       </p:sp>
       <p:sp>
         <p:nvSpPr>
-          <p:cNvPr id="18" name="对比机构2"/>
+          <p:cNvPr id="19" name="对比机构2"/>
           <p:cNvSpPr txBox="1"/>
           <p:nvPr/>
         </p:nvSpPr>
@@ -3711,7 +3747,7 @@
       </p:sp>
       <p:sp>
         <p:nvSpPr>
-          <p:cNvPr id="19" name="对比数字2"/>
+          <p:cNvPr id="20" name="对比数字2"/>
           <p:cNvSpPr txBox="1"/>
           <p:nvPr/>
         </p:nvSpPr>
@@ -3761,7 +3797,7 @@
       </p:sp>
       <p:sp>
         <p:nvSpPr>
-          <p:cNvPr id="20" name="对比说明2"/>
+          <p:cNvPr id="21" name="对比说明2"/>
           <p:cNvSpPr txBox="1"/>
           <p:nvPr/>
         </p:nvSpPr>
@@ -3797,7 +3833,7 @@
       </p:sp>
       <p:sp>
         <p:nvSpPr>
-          <p:cNvPr id="21" name="事实卡"/>
+          <p:cNvPr id="22" name="事实卡"/>
           <p:cNvSpPr/>
           <p:nvPr/>
         </p:nvSpPr>
@@ -3824,7 +3860,7 @@
       </p:sp>
       <p:sp>
         <p:nvSpPr>
-          <p:cNvPr id="22" name="事实标签"/>
+          <p:cNvPr id="23" name="事实标签"/>
           <p:cNvSpPr/>
           <p:nvPr/>
         </p:nvSpPr>
@@ -3851,7 +3887,7 @@
       </p:sp>
       <p:sp>
         <p:nvSpPr>
-          <p:cNvPr id="23" name="事实标签文字"/>
+          <p:cNvPr id="24" name="事实标签文字"/>
           <p:cNvSpPr txBox="1"/>
           <p:nvPr/>
         </p:nvSpPr>
@@ -3887,7 +3923,7 @@
       </p:sp>
       <p:sp>
         <p:nvSpPr>
-          <p:cNvPr id="24" name="事实内容"/>
+          <p:cNvPr id="25" name="事实内容"/>
           <p:cNvSpPr txBox="1"/>
           <p:nvPr/>
         </p:nvSpPr>
@@ -3915,7 +3951,7 @@
                   <a:schemeClr val="tx1"/>
                 </a:solidFill>
               </a:rPr>
-              <a:t>报告将皮尤 2025 年秋季的 30% 与自身 2026 年初的 54% 对比，认为使用频率“正在加速”。</a:t>
+              <a:t>以皮尤 2025 年秋的 30% 对比本报告 2026 年初的 54%，称使用“正在加速”。</a:t>
             </a:r>
             <a:endParaRPr lang="en-US" sz="1400" dirty="0"/>
           </a:p>
@@ -3923,7 +3959,7 @@
       </p:sp>
       <p:sp>
         <p:nvSpPr>
-          <p:cNvPr id="25" name="下箭头"/>
+          <p:cNvPr id="26" name="下箭头"/>
           <p:cNvSpPr txBox="1"/>
           <p:nvPr/>
         </p:nvSpPr>
@@ -3959,7 +3995,7 @@
       </p:sp>
       <p:sp>
         <p:nvSpPr>
-          <p:cNvPr id="26" name="原因卡"/>
+          <p:cNvPr id="27" name="原因卡"/>
           <p:cNvSpPr/>
           <p:nvPr/>
         </p:nvSpPr>
@@ -3986,7 +4022,7 @@
       </p:sp>
       <p:sp>
         <p:nvSpPr>
-          <p:cNvPr id="27" name="原因标签"/>
+          <p:cNvPr id="28" name="原因标签"/>
           <p:cNvSpPr/>
           <p:nvPr/>
         </p:nvSpPr>
@@ -4013,7 +4049,7 @@
       </p:sp>
       <p:sp>
         <p:nvSpPr>
-          <p:cNvPr id="28" name="原因标签文字"/>
+          <p:cNvPr id="29" name="原因标签文字"/>
           <p:cNvSpPr txBox="1"/>
           <p:nvPr/>
         </p:nvSpPr>
@@ -4049,7 +4085,7 @@
       </p:sp>
       <p:sp>
         <p:nvSpPr>
-          <p:cNvPr id="29" name="原因内容"/>
+          <p:cNvPr id="30" name="原因内容"/>
           <p:cNvSpPr txBox="1"/>
           <p:nvPr/>
         </p:nvSpPr>
@@ -4077,7 +4113,7 @@
                   <a:schemeClr val="tx1"/>
                 </a:solidFill>
               </a:rPr>
-              <a:t>两项调查的分母不同（全体青少年 vs AI 用户），抽样方法与年龄范围也不同；同为 13–14 岁，皮尤仅为 24%。</a:t>
+              <a:t>分母不同：皮尤为全体青少年（13–14 岁仅 24%），本报告仅含 AI 用户。</a:t>
             </a:r>
             <a:endParaRPr lang="en-US" sz="1400" dirty="0"/>
           </a:p>
@@ -4085,7 +4121,7 @@
       </p:sp>
       <p:sp>
         <p:nvSpPr>
-          <p:cNvPr id="30" name="下箭头"/>
+          <p:cNvPr id="31" name="下箭头"/>
           <p:cNvSpPr txBox="1"/>
           <p:nvPr/>
         </p:nvSpPr>
@@ -4121,7 +4157,7 @@
       </p:sp>
       <p:sp>
         <p:nvSpPr>
-          <p:cNvPr id="31" name="影响卡"/>
+          <p:cNvPr id="32" name="影响卡"/>
           <p:cNvSpPr/>
           <p:nvPr/>
         </p:nvSpPr>
@@ -4148,7 +4184,7 @@
       </p:sp>
       <p:sp>
         <p:nvSpPr>
-          <p:cNvPr id="32" name="影响标签"/>
+          <p:cNvPr id="33" name="影响标签"/>
           <p:cNvSpPr/>
           <p:nvPr/>
         </p:nvSpPr>
@@ -4175,7 +4211,7 @@
       </p:sp>
       <p:sp>
         <p:nvSpPr>
-          <p:cNvPr id="33" name="影响标签文字"/>
+          <p:cNvPr id="34" name="影响标签文字"/>
           <p:cNvSpPr txBox="1"/>
           <p:nvPr/>
         </p:nvSpPr>
@@ -4211,7 +4247,7 @@
       </p:sp>
       <p:sp>
         <p:nvSpPr>
-          <p:cNvPr id="34" name="影响内容"/>
+          <p:cNvPr id="35" name="影响内容"/>
           <p:cNvSpPr txBox="1"/>
           <p:nvPr/>
         </p:nvSpPr>
@@ -4239,7 +4275,7 @@
                   <a:schemeClr val="tx1"/>
                 </a:solidFill>
               </a:rPr>
-              <a:t>统一为“使用者”口径后，皮尤为 44%，差距约 10 个百分点，不足以推断使用频率上升。</a:t>
+              <a:t>统一为使用者口径后皮尤为 44%，差距约 10 个百分点，不足以推断“加速”。</a:t>
             </a:r>
             <a:endParaRPr lang="en-US" sz="1400" dirty="0"/>
           </a:p>
@@ -4247,7 +4283,7 @@
       </p:sp>
       <p:sp>
         <p:nvSpPr>
-          <p:cNvPr id="35" name="来源说明"/>
+          <p:cNvPr id="36" name="来源说明"/>
           <p:cNvSpPr txBox="1"/>
           <p:nvPr/>
         </p:nvSpPr>
@@ -4361,8 +4397,8 @@
         </p:nvSpPr>
         <p:spPr>
           <a:xfrm>
-            <a:off x="548640" y="365760"/>
-            <a:ext cx="7406640" cy="777240"/>
+            <a:off x="548640" y="502920"/>
+            <a:ext cx="7452360" cy="685800"/>
           </a:xfrm>
           <a:prstGeom prst="rect">
             <a:avLst/>
@@ -4378,20 +4414,56 @@
               <a:buNone/>
             </a:pPr>
             <a:r>
-              <a:rPr lang="en-US" sz="2800" b="1" dirty="0">
+              <a:rPr lang="en-US" sz="2600" b="1" dirty="0">
                 <a:solidFill>
                   <a:schemeClr val="tx2"/>
                 </a:solidFill>
               </a:rPr>
-              <a:t>维度四 · 研究方法：因果推断依据不足</a:t>
-            </a:r>
-            <a:endParaRPr lang="en-US" sz="2800" dirty="0"/>
-          </a:p>
-        </p:txBody>
-      </p:sp>
-      <p:sp>
-        <p:nvSpPr>
-          <p:cNvPr id="3" name="进度1"/>
+              <a:t>四类异质数据不足以证明“检索困难导致退订”</a:t>
+            </a:r>
+            <a:endParaRPr lang="en-US" sz="2600" dirty="0"/>
+          </a:p>
+        </p:txBody>
+      </p:sp>
+      <p:sp>
+        <p:nvSpPr>
+          <p:cNvPr id="3" name="章节标签"/>
+          <p:cNvSpPr txBox="1"/>
+          <p:nvPr/>
+        </p:nvSpPr>
+        <p:spPr>
+          <a:xfrm>
+            <a:off x="548640" y="256032"/>
+            <a:ext cx="7315200" cy="292608"/>
+          </a:xfrm>
+          <a:prstGeom prst="rect">
+            <a:avLst/>
+          </a:prstGeom>
+          <a:noFill/>
+          <a:ln/>
+        </p:spPr>
+        <p:txBody>
+          <a:bodyPr wrap="square" lIns="0" tIns="0" rIns="0" bIns="0" rtlCol="0" anchor="ctr"/>
+          <a:lstStyle/>
+          <a:p>
+            <a:pPr indent="0" marL="0">
+              <a:buNone/>
+            </a:pPr>
+            <a:r>
+              <a:rPr lang="en-US" sz="1200" b="1" dirty="0">
+                <a:solidFill>
+                  <a:schemeClr val="accent1"/>
+                </a:solidFill>
+              </a:rPr>
+              <a:t>四、方法评价 · 维度四  研究方法</a:t>
+            </a:r>
+            <a:endParaRPr lang="en-US" sz="1200" dirty="0"/>
+          </a:p>
+        </p:txBody>
+      </p:sp>
+      <p:sp>
+        <p:nvSpPr>
+          <p:cNvPr id="4" name="进度1"/>
           <p:cNvSpPr/>
           <p:nvPr/>
         </p:nvSpPr>
@@ -4418,7 +4490,7 @@
       </p:sp>
       <p:sp>
         <p:nvSpPr>
-          <p:cNvPr id="4" name="进度文字1"/>
+          <p:cNvPr id="5" name="进度文字1"/>
           <p:cNvSpPr txBox="1"/>
           <p:nvPr/>
         </p:nvSpPr>
@@ -4454,7 +4526,7 @@
       </p:sp>
       <p:sp>
         <p:nvSpPr>
-          <p:cNvPr id="5" name="进度2"/>
+          <p:cNvPr id="6" name="进度2"/>
           <p:cNvSpPr/>
           <p:nvPr/>
         </p:nvSpPr>
@@ -4481,7 +4553,7 @@
       </p:sp>
       <p:sp>
         <p:nvSpPr>
-          <p:cNvPr id="6" name="进度文字2"/>
+          <p:cNvPr id="7" name="进度文字2"/>
           <p:cNvSpPr txBox="1"/>
           <p:nvPr/>
         </p:nvSpPr>
@@ -4517,7 +4589,7 @@
       </p:sp>
       <p:sp>
         <p:nvSpPr>
-          <p:cNvPr id="7" name="进度3"/>
+          <p:cNvPr id="8" name="进度3"/>
           <p:cNvSpPr/>
           <p:nvPr/>
         </p:nvSpPr>
@@ -4544,7 +4616,7 @@
       </p:sp>
       <p:sp>
         <p:nvSpPr>
-          <p:cNvPr id="8" name="进度文字3"/>
+          <p:cNvPr id="9" name="进度文字3"/>
           <p:cNvSpPr txBox="1"/>
           <p:nvPr/>
         </p:nvSpPr>
@@ -4580,7 +4652,7 @@
       </p:sp>
       <p:sp>
         <p:nvSpPr>
-          <p:cNvPr id="9" name="进度4"/>
+          <p:cNvPr id="10" name="进度4"/>
           <p:cNvSpPr/>
           <p:nvPr/>
         </p:nvSpPr>
@@ -4607,7 +4679,7 @@
       </p:sp>
       <p:sp>
         <p:nvSpPr>
-          <p:cNvPr id="10" name="进度文字4"/>
+          <p:cNvPr id="11" name="进度文字4"/>
           <p:cNvSpPr txBox="1"/>
           <p:nvPr/>
         </p:nvSpPr>
@@ -4643,7 +4715,7 @@
       </p:sp>
       <p:sp>
         <p:nvSpPr>
-          <p:cNvPr id="11" name="进度5"/>
+          <p:cNvPr id="12" name="进度5"/>
           <p:cNvSpPr/>
           <p:nvPr/>
         </p:nvSpPr>
@@ -4670,7 +4742,7 @@
       </p:sp>
       <p:sp>
         <p:nvSpPr>
-          <p:cNvPr id="12" name="进度文字5"/>
+          <p:cNvPr id="13" name="进度文字5"/>
           <p:cNvSpPr txBox="1"/>
           <p:nvPr/>
         </p:nvSpPr>
@@ -4706,7 +4778,7 @@
       </p:sp>
       <p:sp>
         <p:nvSpPr>
-          <p:cNvPr id="13" name="数据类型卡1"/>
+          <p:cNvPr id="14" name="数据类型卡1"/>
           <p:cNvSpPr/>
           <p:nvPr/>
         </p:nvSpPr>
@@ -4733,7 +4805,7 @@
       </p:sp>
       <p:sp>
         <p:nvSpPr>
-          <p:cNvPr id="14" name="数据类型1"/>
+          <p:cNvPr id="15" name="数据类型1"/>
           <p:cNvSpPr txBox="1"/>
           <p:nvPr/>
         </p:nvSpPr>
@@ -4769,7 +4841,7 @@
       </p:sp>
       <p:sp>
         <p:nvSpPr>
-          <p:cNvPr id="15" name="数据类型数字1"/>
+          <p:cNvPr id="16" name="数据类型数字1"/>
           <p:cNvSpPr txBox="1"/>
           <p:nvPr/>
         </p:nvSpPr>
@@ -4805,7 +4877,7 @@
       </p:sp>
       <p:sp>
         <p:nvSpPr>
-          <p:cNvPr id="16" name="数据类型说明1"/>
+          <p:cNvPr id="17" name="数据类型说明1"/>
           <p:cNvSpPr txBox="1"/>
           <p:nvPr/>
         </p:nvSpPr>
@@ -4841,7 +4913,7 @@
       </p:sp>
       <p:sp>
         <p:nvSpPr>
-          <p:cNvPr id="17" name="数据类型卡2"/>
+          <p:cNvPr id="18" name="数据类型卡2"/>
           <p:cNvSpPr/>
           <p:nvPr/>
         </p:nvSpPr>
@@ -4868,7 +4940,7 @@
       </p:sp>
       <p:sp>
         <p:nvSpPr>
-          <p:cNvPr id="18" name="数据类型2"/>
+          <p:cNvPr id="19" name="数据类型2"/>
           <p:cNvSpPr txBox="1"/>
           <p:nvPr/>
         </p:nvSpPr>
@@ -4904,7 +4976,7 @@
       </p:sp>
       <p:sp>
         <p:nvSpPr>
-          <p:cNvPr id="19" name="数据类型数字2"/>
+          <p:cNvPr id="20" name="数据类型数字2"/>
           <p:cNvSpPr txBox="1"/>
           <p:nvPr/>
         </p:nvSpPr>
@@ -4940,7 +5012,7 @@
       </p:sp>
       <p:sp>
         <p:nvSpPr>
-          <p:cNvPr id="20" name="数据类型说明2"/>
+          <p:cNvPr id="21" name="数据类型说明2"/>
           <p:cNvSpPr txBox="1"/>
           <p:nvPr/>
         </p:nvSpPr>
@@ -4976,7 +5048,7 @@
       </p:sp>
       <p:sp>
         <p:nvSpPr>
-          <p:cNvPr id="21" name="数据类型卡3"/>
+          <p:cNvPr id="22" name="数据类型卡3"/>
           <p:cNvSpPr/>
           <p:nvPr/>
         </p:nvSpPr>
@@ -5003,7 +5075,7 @@
       </p:sp>
       <p:sp>
         <p:nvSpPr>
-          <p:cNvPr id="22" name="数据类型3"/>
+          <p:cNvPr id="23" name="数据类型3"/>
           <p:cNvSpPr txBox="1"/>
           <p:nvPr/>
         </p:nvSpPr>
@@ -5039,7 +5111,7 @@
       </p:sp>
       <p:sp>
         <p:nvSpPr>
-          <p:cNvPr id="23" name="数据类型数字3"/>
+          <p:cNvPr id="24" name="数据类型数字3"/>
           <p:cNvSpPr txBox="1"/>
           <p:nvPr/>
         </p:nvSpPr>
@@ -5075,7 +5147,7 @@
       </p:sp>
       <p:sp>
         <p:nvSpPr>
-          <p:cNvPr id="24" name="数据类型说明3"/>
+          <p:cNvPr id="25" name="数据类型说明3"/>
           <p:cNvSpPr txBox="1"/>
           <p:nvPr/>
         </p:nvSpPr>
@@ -5111,7 +5183,7 @@
       </p:sp>
       <p:sp>
         <p:nvSpPr>
-          <p:cNvPr id="25" name="数据类型卡4"/>
+          <p:cNvPr id="26" name="数据类型卡4"/>
           <p:cNvSpPr/>
           <p:nvPr/>
         </p:nvSpPr>
@@ -5138,7 +5210,7 @@
       </p:sp>
       <p:sp>
         <p:nvSpPr>
-          <p:cNvPr id="26" name="数据类型4"/>
+          <p:cNvPr id="27" name="数据类型4"/>
           <p:cNvSpPr txBox="1"/>
           <p:nvPr/>
         </p:nvSpPr>
@@ -5174,7 +5246,7 @@
       </p:sp>
       <p:sp>
         <p:nvSpPr>
-          <p:cNvPr id="27" name="数据类型数字4"/>
+          <p:cNvPr id="28" name="数据类型数字4"/>
           <p:cNvSpPr txBox="1"/>
           <p:nvPr/>
         </p:nvSpPr>
@@ -5210,7 +5282,7 @@
       </p:sp>
       <p:sp>
         <p:nvSpPr>
-          <p:cNvPr id="28" name="数据类型说明4"/>
+          <p:cNvPr id="29" name="数据类型说明4"/>
           <p:cNvSpPr txBox="1"/>
           <p:nvPr/>
         </p:nvSpPr>
@@ -5246,7 +5318,7 @@
       </p:sp>
       <p:sp>
         <p:nvSpPr>
-          <p:cNvPr id="29" name="事实卡"/>
+          <p:cNvPr id="30" name="事实卡"/>
           <p:cNvSpPr/>
           <p:nvPr/>
         </p:nvSpPr>
@@ -5273,7 +5345,7 @@
       </p:sp>
       <p:sp>
         <p:nvSpPr>
-          <p:cNvPr id="30" name="事实标签"/>
+          <p:cNvPr id="31" name="事实标签"/>
           <p:cNvSpPr/>
           <p:nvPr/>
         </p:nvSpPr>
@@ -5300,7 +5372,7 @@
       </p:sp>
       <p:sp>
         <p:nvSpPr>
-          <p:cNvPr id="31" name="事实标签文字"/>
+          <p:cNvPr id="32" name="事实标签文字"/>
           <p:cNvSpPr txBox="1"/>
           <p:nvPr/>
         </p:nvSpPr>
@@ -5336,7 +5408,7 @@
       </p:sp>
       <p:sp>
         <p:nvSpPr>
-          <p:cNvPr id="32" name="事实内容"/>
+          <p:cNvPr id="33" name="事实内容"/>
           <p:cNvSpPr txBox="1"/>
           <p:nvPr/>
         </p:nvSpPr>
@@ -5364,7 +5436,7 @@
                   <a:schemeClr val="tx1"/>
                 </a:solidFill>
               </a:rPr>
-              <a:t>“检索困难导致退订”由四类数据支撑：问卷中的退订意向、行业退订率、市场预测与 AI 测试。</a:t>
+              <a:t>“检索困难导致退订”由意向、行为、预测、测试四类数据支撑。</a:t>
             </a:r>
             <a:endParaRPr lang="en-US" sz="1400" dirty="0"/>
           </a:p>
@@ -5372,7 +5444,7 @@
       </p:sp>
       <p:sp>
         <p:nvSpPr>
-          <p:cNvPr id="33" name="下箭头"/>
+          <p:cNvPr id="34" name="下箭头"/>
           <p:cNvSpPr txBox="1"/>
           <p:nvPr/>
         </p:nvSpPr>
@@ -5408,7 +5480,7 @@
       </p:sp>
       <p:sp>
         <p:nvSpPr>
-          <p:cNvPr id="34" name="原因卡"/>
+          <p:cNvPr id="35" name="原因卡"/>
           <p:cNvSpPr/>
           <p:nvPr/>
         </p:nvSpPr>
@@ -5435,7 +5507,7 @@
       </p:sp>
       <p:sp>
         <p:nvSpPr>
-          <p:cNvPr id="35" name="原因标签"/>
+          <p:cNvPr id="36" name="原因标签"/>
           <p:cNvSpPr/>
           <p:nvPr/>
         </p:nvSpPr>
@@ -5462,7 +5534,7 @@
       </p:sp>
       <p:sp>
         <p:nvSpPr>
-          <p:cNvPr id="36" name="原因标签文字"/>
+          <p:cNvPr id="37" name="原因标签文字"/>
           <p:cNvSpPr txBox="1"/>
           <p:nvPr/>
         </p:nvSpPr>
@@ -5498,7 +5570,7 @@
       </p:sp>
       <p:sp>
         <p:nvSpPr>
-          <p:cNvPr id="37" name="原因内容"/>
+          <p:cNvPr id="38" name="原因内容"/>
           <p:cNvSpPr txBox="1"/>
           <p:nvPr/>
         </p:nvSpPr>
@@ -5526,7 +5598,7 @@
                   <a:schemeClr val="tx1"/>
                 </a:solidFill>
               </a:rPr>
-              <a:t>四类数据的对象、国家与性质各不相同（意向≠行为，预测≠测量），且缺乏追踪设计或实验设计。</a:t>
+              <a:t>四类数据的对象、国家与性质不同，且缺乏追踪设计或实验设计。</a:t>
             </a:r>
             <a:endParaRPr lang="en-US" sz="1400" dirty="0"/>
           </a:p>
@@ -5534,7 +5606,7 @@
       </p:sp>
       <p:sp>
         <p:nvSpPr>
-          <p:cNvPr id="38" name="下箭头"/>
+          <p:cNvPr id="39" name="下箭头"/>
           <p:cNvSpPr txBox="1"/>
           <p:nvPr/>
         </p:nvSpPr>
@@ -5570,7 +5642,7 @@
       </p:sp>
       <p:sp>
         <p:nvSpPr>
-          <p:cNvPr id="39" name="影响卡"/>
+          <p:cNvPr id="40" name="影响卡"/>
           <p:cNvSpPr/>
           <p:nvPr/>
         </p:nvSpPr>
@@ -5597,7 +5669,7 @@
       </p:sp>
       <p:sp>
         <p:nvSpPr>
-          <p:cNvPr id="40" name="影响标签"/>
+          <p:cNvPr id="41" name="影响标签"/>
           <p:cNvSpPr/>
           <p:nvPr/>
         </p:nvSpPr>
@@ -5624,7 +5696,7 @@
       </p:sp>
       <p:sp>
         <p:nvSpPr>
-          <p:cNvPr id="41" name="影响标签文字"/>
+          <p:cNvPr id="42" name="影响标签文字"/>
           <p:cNvSpPr txBox="1"/>
           <p:nvPr/>
         </p:nvSpPr>
@@ -5660,7 +5732,7 @@
       </p:sp>
       <p:sp>
         <p:nvSpPr>
-          <p:cNvPr id="42" name="影响内容"/>
+          <p:cNvPr id="43" name="影响内容"/>
           <p:cNvSpPr txBox="1"/>
           <p:nvPr/>
         </p:nvSpPr>
@@ -5688,7 +5760,7 @@
                   <a:schemeClr val="tx1"/>
                 </a:solidFill>
               </a:rPr>
-              <a:t>只能提示二者可能相关，不能证明因果；报告方案（AI 接入行业数据）亦未经检验。</a:t>
+              <a:t>只能提示相关，不能证明因果；报告方案（AI 接入行业数据）亦未经检验。</a:t>
             </a:r>
             <a:endParaRPr lang="en-US" sz="1400" dirty="0"/>
           </a:p>
@@ -5696,7 +5768,7 @@
       </p:sp>
       <p:sp>
         <p:nvSpPr>
-          <p:cNvPr id="43" name="来源说明"/>
+          <p:cNvPr id="44" name="来源说明"/>
           <p:cNvSpPr txBox="1"/>
           <p:nvPr/>
         </p:nvSpPr>
@@ -5810,8 +5882,8 @@
         </p:nvSpPr>
         <p:spPr>
           <a:xfrm>
-            <a:off x="731520" y="502920"/>
-            <a:ext cx="10698480" cy="868680"/>
+            <a:off x="731520" y="594360"/>
+            <a:ext cx="10698480" cy="822960"/>
           </a:xfrm>
           <a:prstGeom prst="rect">
             <a:avLst/>
@@ -5827,20 +5899,56 @@
               <a:buNone/>
             </a:pPr>
             <a:r>
-              <a:rPr lang="en-US" sz="3000" b="1" dirty="0">
+              <a:rPr lang="en-US" sz="2800" b="1" dirty="0">
                 <a:solidFill>
                   <a:schemeClr val="bg1"/>
                 </a:solidFill>
               </a:rPr>
-              <a:t>五、总结与启示：逐环判断</a:t>
-            </a:r>
-            <a:endParaRPr lang="en-US" sz="3000" dirty="0"/>
-          </a:p>
-        </p:txBody>
-      </p:sp>
-      <p:sp>
-        <p:nvSpPr>
-          <p:cNvPr id="3" name="判断行1"/>
+              <a:t>两环部分成立、两环证据不足：结论应限于 AI 用户</a:t>
+            </a:r>
+            <a:endParaRPr lang="en-US" sz="2800" dirty="0"/>
+          </a:p>
+        </p:txBody>
+      </p:sp>
+      <p:sp>
+        <p:nvSpPr>
+          <p:cNvPr id="3" name="章节标签"/>
+          <p:cNvSpPr txBox="1"/>
+          <p:nvPr/>
+        </p:nvSpPr>
+        <p:spPr>
+          <a:xfrm>
+            <a:off x="731520" y="320040"/>
+            <a:ext cx="7315200" cy="292608"/>
+          </a:xfrm>
+          <a:prstGeom prst="rect">
+            <a:avLst/>
+          </a:prstGeom>
+          <a:noFill/>
+          <a:ln/>
+        </p:spPr>
+        <p:txBody>
+          <a:bodyPr wrap="square" lIns="0" tIns="0" rIns="0" bIns="0" rtlCol="0" anchor="ctr"/>
+          <a:lstStyle/>
+          <a:p>
+            <a:pPr indent="0" marL="0">
+              <a:buNone/>
+            </a:pPr>
+            <a:r>
+              <a:rPr lang="en-US" sz="1200" b="1" dirty="0">
+                <a:solidFill>
+                  <a:schemeClr val="accent4"/>
+                </a:solidFill>
+              </a:rPr>
+              <a:t>五、总结与启示</a:t>
+            </a:r>
+            <a:endParaRPr lang="en-US" sz="1200" dirty="0"/>
+          </a:p>
+        </p:txBody>
+      </p:sp>
+      <p:sp>
+        <p:nvSpPr>
+          <p:cNvPr id="4" name="判断行1"/>
           <p:cNvSpPr/>
           <p:nvPr/>
         </p:nvSpPr>
@@ -5867,7 +5975,7 @@
       </p:sp>
       <p:sp>
         <p:nvSpPr>
-          <p:cNvPr id="4" name="判断环节1"/>
+          <p:cNvPr id="5" name="判断环节1"/>
           <p:cNvSpPr txBox="1"/>
           <p:nvPr/>
         </p:nvSpPr>
@@ -5903,7 +6011,7 @@
       </p:sp>
       <p:sp>
         <p:nvSpPr>
-          <p:cNvPr id="5" name="判断说明1"/>
+          <p:cNvPr id="6" name="判断说明1"/>
           <p:cNvSpPr txBox="1"/>
           <p:nvPr/>
         </p:nvSpPr>
@@ -5939,7 +6047,7 @@
       </p:sp>
       <p:sp>
         <p:nvSpPr>
-          <p:cNvPr id="6" name="判断标签1"/>
+          <p:cNvPr id="7" name="判断标签1"/>
           <p:cNvSpPr/>
           <p:nvPr/>
         </p:nvSpPr>
@@ -5966,7 +6074,7 @@
       </p:sp>
       <p:sp>
         <p:nvSpPr>
-          <p:cNvPr id="7" name="判断标签文字1"/>
+          <p:cNvPr id="8" name="判断标签文字1"/>
           <p:cNvSpPr txBox="1"/>
           <p:nvPr/>
         </p:nvSpPr>
@@ -6002,7 +6110,7 @@
       </p:sp>
       <p:sp>
         <p:nvSpPr>
-          <p:cNvPr id="8" name="判断行2"/>
+          <p:cNvPr id="9" name="判断行2"/>
           <p:cNvSpPr/>
           <p:nvPr/>
         </p:nvSpPr>
@@ -6029,7 +6137,7 @@
       </p:sp>
       <p:sp>
         <p:nvSpPr>
-          <p:cNvPr id="9" name="判断环节2"/>
+          <p:cNvPr id="10" name="判断环节2"/>
           <p:cNvSpPr txBox="1"/>
           <p:nvPr/>
         </p:nvSpPr>
@@ -6065,7 +6173,7 @@
       </p:sp>
       <p:sp>
         <p:nvSpPr>
-          <p:cNvPr id="10" name="判断说明2"/>
+          <p:cNvPr id="11" name="判断说明2"/>
           <p:cNvSpPr txBox="1"/>
           <p:nvPr/>
         </p:nvSpPr>
@@ -6101,7 +6209,7 @@
       </p:sp>
       <p:sp>
         <p:nvSpPr>
-          <p:cNvPr id="11" name="判断标签2"/>
+          <p:cNvPr id="12" name="判断标签2"/>
           <p:cNvSpPr/>
           <p:nvPr/>
         </p:nvSpPr>
@@ -6128,7 +6236,7 @@
       </p:sp>
       <p:sp>
         <p:nvSpPr>
-          <p:cNvPr id="12" name="判断标签文字2"/>
+          <p:cNvPr id="13" name="判断标签文字2"/>
           <p:cNvSpPr txBox="1"/>
           <p:nvPr/>
         </p:nvSpPr>
@@ -6164,7 +6272,7 @@
       </p:sp>
       <p:sp>
         <p:nvSpPr>
-          <p:cNvPr id="13" name="判断行3"/>
+          <p:cNvPr id="14" name="判断行3"/>
           <p:cNvSpPr/>
           <p:nvPr/>
         </p:nvSpPr>
@@ -6191,7 +6299,7 @@
       </p:sp>
       <p:sp>
         <p:nvSpPr>
-          <p:cNvPr id="14" name="判断环节3"/>
+          <p:cNvPr id="15" name="判断环节3"/>
           <p:cNvSpPr txBox="1"/>
           <p:nvPr/>
         </p:nvSpPr>
@@ -6227,7 +6335,7 @@
       </p:sp>
       <p:sp>
         <p:nvSpPr>
-          <p:cNvPr id="15" name="判断说明3"/>
+          <p:cNvPr id="16" name="判断说明3"/>
           <p:cNvSpPr txBox="1"/>
           <p:nvPr/>
         </p:nvSpPr>
@@ -6263,7 +6371,7 @@
       </p:sp>
       <p:sp>
         <p:nvSpPr>
-          <p:cNvPr id="16" name="判断标签3"/>
+          <p:cNvPr id="17" name="判断标签3"/>
           <p:cNvSpPr/>
           <p:nvPr/>
         </p:nvSpPr>
@@ -6290,7 +6398,7 @@
       </p:sp>
       <p:sp>
         <p:nvSpPr>
-          <p:cNvPr id="17" name="判断标签文字3"/>
+          <p:cNvPr id="18" name="判断标签文字3"/>
           <p:cNvSpPr txBox="1"/>
           <p:nvPr/>
         </p:nvSpPr>
@@ -6326,7 +6434,7 @@
       </p:sp>
       <p:sp>
         <p:nvSpPr>
-          <p:cNvPr id="18" name="判断行4"/>
+          <p:cNvPr id="19" name="判断行4"/>
           <p:cNvSpPr/>
           <p:nvPr/>
         </p:nvSpPr>
@@ -6353,7 +6461,7 @@
       </p:sp>
       <p:sp>
         <p:nvSpPr>
-          <p:cNvPr id="19" name="判断环节4"/>
+          <p:cNvPr id="20" name="判断环节4"/>
           <p:cNvSpPr txBox="1"/>
           <p:nvPr/>
         </p:nvSpPr>
@@ -6389,7 +6497,7 @@
       </p:sp>
       <p:sp>
         <p:nvSpPr>
-          <p:cNvPr id="20" name="判断说明4"/>
+          <p:cNvPr id="21" name="判断说明4"/>
           <p:cNvSpPr txBox="1"/>
           <p:nvPr/>
         </p:nvSpPr>
@@ -6425,7 +6533,7 @@
       </p:sp>
       <p:sp>
         <p:nvSpPr>
-          <p:cNvPr id="21" name="判断标签4"/>
+          <p:cNvPr id="22" name="判断标签4"/>
           <p:cNvSpPr/>
           <p:nvPr/>
         </p:nvSpPr>
@@ -6452,7 +6560,7 @@
       </p:sp>
       <p:sp>
         <p:nvSpPr>
-          <p:cNvPr id="22" name="判断标签文字4"/>
+          <p:cNvPr id="23" name="判断标签文字4"/>
           <p:cNvSpPr txBox="1"/>
           <p:nvPr/>
         </p:nvSpPr>
@@ -6488,7 +6596,7 @@
       </p:sp>
       <p:sp>
         <p:nvSpPr>
-          <p:cNvPr id="23" name="研究价值卡"/>
+          <p:cNvPr id="24" name="研究价值卡"/>
           <p:cNvSpPr/>
           <p:nvPr/>
         </p:nvSpPr>
@@ -6515,7 +6623,7 @@
       </p:sp>
       <p:sp>
         <p:nvSpPr>
-          <p:cNvPr id="24" name="研究价值"/>
+          <p:cNvPr id="25" name="研究价值"/>
           <p:cNvSpPr txBox="1"/>
           <p:nvPr/>
         </p:nvSpPr>
@@ -6571,7 +6679,7 @@
       </p:sp>
       <p:sp>
         <p:nvSpPr>
-          <p:cNvPr id="25" name="讨论卡"/>
+          <p:cNvPr id="26" name="讨论卡"/>
           <p:cNvSpPr/>
           <p:nvPr/>
         </p:nvSpPr>
@@ -6598,7 +6706,7 @@
       </p:sp>
       <p:sp>
         <p:nvSpPr>
-          <p:cNvPr id="26" name="讨论问题"/>
+          <p:cNvPr id="27" name="讨论问题"/>
           <p:cNvSpPr txBox="1"/>
           <p:nvPr/>
         </p:nvSpPr>
@@ -6671,7 +6779,7 @@
       </p:sp>
       <p:sp>
         <p:nvSpPr>
-          <p:cNvPr id="27" name="利益关系说明"/>
+          <p:cNvPr id="28" name="利益关系说明"/>
           <p:cNvSpPr txBox="1"/>
           <p:nvPr/>
         </p:nvSpPr>
@@ -6785,8 +6893,8 @@
         </p:nvSpPr>
         <p:spPr>
           <a:xfrm>
-            <a:off x="548640" y="365760"/>
-            <a:ext cx="7406640" cy="777240"/>
+            <a:off x="548640" y="502920"/>
+            <a:ext cx="7452360" cy="685800"/>
           </a:xfrm>
           <a:prstGeom prst="rect">
             <a:avLst/>
@@ -6802,20 +6910,56 @@
               <a:buNone/>
             </a:pPr>
             <a:r>
-              <a:rPr lang="en-US" sz="2800" b="1" dirty="0">
+              <a:rPr lang="en-US" sz="2600" b="1" dirty="0">
                 <a:solidFill>
                   <a:schemeClr val="tx2"/>
                 </a:solidFill>
               </a:rPr>
-              <a:t>附录一：11 个数据来源的方法公开程度</a:t>
-            </a:r>
-            <a:endParaRPr lang="en-US" sz="2800" dirty="0"/>
-          </a:p>
-        </p:txBody>
-      </p:sp>
-      <p:sp>
-        <p:nvSpPr>
-          <p:cNvPr id="3" name="来源卡1"/>
+              <a:t>11 个数据来源中，核心两项问卷最不透明</a:t>
+            </a:r>
+            <a:endParaRPr lang="en-US" sz="2600" dirty="0"/>
+          </a:p>
+        </p:txBody>
+      </p:sp>
+      <p:sp>
+        <p:nvSpPr>
+          <p:cNvPr id="3" name="章节标签"/>
+          <p:cNvSpPr txBox="1"/>
+          <p:nvPr/>
+        </p:nvSpPr>
+        <p:spPr>
+          <a:xfrm>
+            <a:off x="548640" y="256032"/>
+            <a:ext cx="7315200" cy="292608"/>
+          </a:xfrm>
+          <a:prstGeom prst="rect">
+            <a:avLst/>
+          </a:prstGeom>
+          <a:noFill/>
+          <a:ln/>
+        </p:spPr>
+        <p:txBody>
+          <a:bodyPr wrap="square" lIns="0" tIns="0" rIns="0" bIns="0" rtlCol="0" anchor="ctr"/>
+          <a:lstStyle/>
+          <a:p>
+            <a:pPr indent="0" marL="0">
+              <a:buNone/>
+            </a:pPr>
+            <a:r>
+              <a:rPr lang="en-US" sz="1200" b="1" dirty="0">
+                <a:solidFill>
+                  <a:schemeClr val="accent1"/>
+                </a:solidFill>
+              </a:rPr>
+              <a:t>附录（备问）</a:t>
+            </a:r>
+            <a:endParaRPr lang="en-US" sz="1200" dirty="0"/>
+          </a:p>
+        </p:txBody>
+      </p:sp>
+      <p:sp>
+        <p:nvSpPr>
+          <p:cNvPr id="4" name="来源卡1"/>
           <p:cNvSpPr/>
           <p:nvPr/>
         </p:nvSpPr>
@@ -6842,7 +6986,7 @@
       </p:sp>
       <p:sp>
         <p:nvSpPr>
-          <p:cNvPr id="4" name="状态点1"/>
+          <p:cNvPr id="5" name="状态点1"/>
           <p:cNvSpPr/>
           <p:nvPr/>
         </p:nvSpPr>
@@ -6867,7 +7011,7 @@
       </p:sp>
       <p:sp>
         <p:nvSpPr>
-          <p:cNvPr id="5" name="来源类型1"/>
+          <p:cNvPr id="6" name="来源类型1"/>
           <p:cNvSpPr txBox="1"/>
           <p:nvPr/>
         </p:nvSpPr>
@@ -6914,7 +7058,7 @@
       </p:sp>
       <p:sp>
         <p:nvSpPr>
-          <p:cNvPr id="6" name="来源说明1"/>
+          <p:cNvPr id="7" name="来源说明1"/>
           <p:cNvSpPr txBox="1"/>
           <p:nvPr/>
         </p:nvSpPr>
@@ -6970,7 +7114,7 @@
       </p:sp>
       <p:sp>
         <p:nvSpPr>
-          <p:cNvPr id="7" name="来源卡2"/>
+          <p:cNvPr id="8" name="来源卡2"/>
           <p:cNvSpPr/>
           <p:nvPr/>
         </p:nvSpPr>
@@ -6997,7 +7141,7 @@
       </p:sp>
       <p:sp>
         <p:nvSpPr>
-          <p:cNvPr id="8" name="状态点2"/>
+          <p:cNvPr id="9" name="状态点2"/>
           <p:cNvSpPr/>
           <p:nvPr/>
         </p:nvSpPr>
@@ -7022,7 +7166,7 @@
       </p:sp>
       <p:sp>
         <p:nvSpPr>
-          <p:cNvPr id="9" name="来源类型2"/>
+          <p:cNvPr id="10" name="来源类型2"/>
           <p:cNvSpPr txBox="1"/>
           <p:nvPr/>
         </p:nvSpPr>
@@ -7069,7 +7213,7 @@
       </p:sp>
       <p:sp>
         <p:nvSpPr>
-          <p:cNvPr id="10" name="来源说明2"/>
+          <p:cNvPr id="11" name="来源说明2"/>
           <p:cNvSpPr txBox="1"/>
           <p:nvPr/>
         </p:nvSpPr>
@@ -7125,7 +7269,7 @@
       </p:sp>
       <p:sp>
         <p:nvSpPr>
-          <p:cNvPr id="11" name="来源卡3"/>
+          <p:cNvPr id="12" name="来源卡3"/>
           <p:cNvSpPr/>
           <p:nvPr/>
         </p:nvSpPr>
@@ -7152,7 +7296,7 @@
       </p:sp>
       <p:sp>
         <p:nvSpPr>
-          <p:cNvPr id="12" name="状态点3"/>
+          <p:cNvPr id="13" name="状态点3"/>
           <p:cNvSpPr/>
           <p:nvPr/>
         </p:nvSpPr>
@@ -7177,7 +7321,7 @@
       </p:sp>
       <p:sp>
         <p:nvSpPr>
-          <p:cNvPr id="13" name="来源类型3"/>
+          <p:cNvPr id="14" name="来源类型3"/>
           <p:cNvSpPr txBox="1"/>
           <p:nvPr/>
         </p:nvSpPr>
@@ -7224,7 +7368,7 @@
       </p:sp>
       <p:sp>
         <p:nvSpPr>
-          <p:cNvPr id="14" name="来源说明3"/>
+          <p:cNvPr id="15" name="来源说明3"/>
           <p:cNvSpPr txBox="1"/>
           <p:nvPr/>
         </p:nvSpPr>
@@ -7280,7 +7424,7 @@
       </p:sp>
       <p:sp>
         <p:nvSpPr>
-          <p:cNvPr id="15" name="来源卡4"/>
+          <p:cNvPr id="16" name="来源卡4"/>
           <p:cNvSpPr/>
           <p:nvPr/>
         </p:nvSpPr>
@@ -7307,7 +7451,7 @@
       </p:sp>
       <p:sp>
         <p:nvSpPr>
-          <p:cNvPr id="16" name="状态点4"/>
+          <p:cNvPr id="17" name="状态点4"/>
           <p:cNvSpPr/>
           <p:nvPr/>
         </p:nvSpPr>
@@ -7332,7 +7476,7 @@
       </p:sp>
       <p:sp>
         <p:nvSpPr>
-          <p:cNvPr id="17" name="来源类型4"/>
+          <p:cNvPr id="18" name="来源类型4"/>
           <p:cNvSpPr txBox="1"/>
           <p:nvPr/>
         </p:nvSpPr>
@@ -7379,7 +7523,7 @@
       </p:sp>
       <p:sp>
         <p:nvSpPr>
-          <p:cNvPr id="18" name="来源说明4"/>
+          <p:cNvPr id="19" name="来源说明4"/>
           <p:cNvSpPr txBox="1"/>
           <p:nvPr/>
         </p:nvSpPr>
@@ -7435,7 +7579,7 @@
       </p:sp>
       <p:sp>
         <p:nvSpPr>
-          <p:cNvPr id="19" name="来源卡5"/>
+          <p:cNvPr id="20" name="来源卡5"/>
           <p:cNvSpPr/>
           <p:nvPr/>
         </p:nvSpPr>
@@ -7462,7 +7606,7 @@
       </p:sp>
       <p:sp>
         <p:nvSpPr>
-          <p:cNvPr id="20" name="状态点5"/>
+          <p:cNvPr id="21" name="状态点5"/>
           <p:cNvSpPr/>
           <p:nvPr/>
         </p:nvSpPr>
@@ -7487,7 +7631,7 @@
       </p:sp>
       <p:sp>
         <p:nvSpPr>
-          <p:cNvPr id="21" name="来源类型5"/>
+          <p:cNvPr id="22" name="来源类型5"/>
           <p:cNvSpPr txBox="1"/>
           <p:nvPr/>
         </p:nvSpPr>
@@ -7534,7 +7678,7 @@
       </p:sp>
       <p:sp>
         <p:nvSpPr>
-          <p:cNvPr id="22" name="来源说明5"/>
+          <p:cNvPr id="23" name="来源说明5"/>
           <p:cNvSpPr txBox="1"/>
           <p:nvPr/>
         </p:nvSpPr>
@@ -7590,7 +7734,7 @@
       </p:sp>
       <p:sp>
         <p:nvSpPr>
-          <p:cNvPr id="23" name="来源卡6"/>
+          <p:cNvPr id="24" name="来源卡6"/>
           <p:cNvSpPr/>
           <p:nvPr/>
         </p:nvSpPr>
@@ -7617,7 +7761,7 @@
       </p:sp>
       <p:sp>
         <p:nvSpPr>
-          <p:cNvPr id="24" name="状态点6"/>
+          <p:cNvPr id="25" name="状态点6"/>
           <p:cNvSpPr/>
           <p:nvPr/>
         </p:nvSpPr>
@@ -7642,7 +7786,7 @@
       </p:sp>
       <p:sp>
         <p:nvSpPr>
-          <p:cNvPr id="25" name="来源类型6"/>
+          <p:cNvPr id="26" name="来源类型6"/>
           <p:cNvSpPr txBox="1"/>
           <p:nvPr/>
         </p:nvSpPr>
@@ -7689,7 +7833,7 @@
       </p:sp>
       <p:sp>
         <p:nvSpPr>
-          <p:cNvPr id="26" name="来源说明6"/>
+          <p:cNvPr id="27" name="来源说明6"/>
           <p:cNvSpPr txBox="1"/>
           <p:nvPr/>
         </p:nvSpPr>
@@ -7745,7 +7889,7 @@
       </p:sp>
       <p:sp>
         <p:nvSpPr>
-          <p:cNvPr id="27" name="来源卡7"/>
+          <p:cNvPr id="28" name="来源卡7"/>
           <p:cNvSpPr/>
           <p:nvPr/>
         </p:nvSpPr>
@@ -7772,7 +7916,7 @@
       </p:sp>
       <p:sp>
         <p:nvSpPr>
-          <p:cNvPr id="28" name="状态点7"/>
+          <p:cNvPr id="29" name="状态点7"/>
           <p:cNvSpPr/>
           <p:nvPr/>
         </p:nvSpPr>
@@ -7797,7 +7941,7 @@
       </p:sp>
       <p:sp>
         <p:nvSpPr>
-          <p:cNvPr id="29" name="来源类型7"/>
+          <p:cNvPr id="30" name="来源类型7"/>
           <p:cNvSpPr txBox="1"/>
           <p:nvPr/>
         </p:nvSpPr>
@@ -7844,7 +7988,7 @@
       </p:sp>
       <p:sp>
         <p:nvSpPr>
-          <p:cNvPr id="30" name="来源说明7"/>
+          <p:cNvPr id="31" name="来源说明7"/>
           <p:cNvSpPr txBox="1"/>
           <p:nvPr/>
         </p:nvSpPr>
@@ -7900,7 +8044,7 @@
       </p:sp>
       <p:sp>
         <p:nvSpPr>
-          <p:cNvPr id="31" name="来源卡8"/>
+          <p:cNvPr id="32" name="来源卡8"/>
           <p:cNvSpPr/>
           <p:nvPr/>
         </p:nvSpPr>
@@ -7927,7 +8071,7 @@
       </p:sp>
       <p:sp>
         <p:nvSpPr>
-          <p:cNvPr id="32" name="状态点8"/>
+          <p:cNvPr id="33" name="状态点8"/>
           <p:cNvSpPr/>
           <p:nvPr/>
         </p:nvSpPr>
@@ -7952,7 +8096,7 @@
       </p:sp>
       <p:sp>
         <p:nvSpPr>
-          <p:cNvPr id="33" name="来源类型8"/>
+          <p:cNvPr id="34" name="来源类型8"/>
           <p:cNvSpPr txBox="1"/>
           <p:nvPr/>
         </p:nvSpPr>
@@ -7999,7 +8143,7 @@
       </p:sp>
       <p:sp>
         <p:nvSpPr>
-          <p:cNvPr id="34" name="来源说明8"/>
+          <p:cNvPr id="35" name="来源说明8"/>
           <p:cNvSpPr txBox="1"/>
           <p:nvPr/>
         </p:nvSpPr>
@@ -8055,7 +8199,7 @@
       </p:sp>
       <p:sp>
         <p:nvSpPr>
-          <p:cNvPr id="35" name="来源卡9"/>
+          <p:cNvPr id="36" name="来源卡9"/>
           <p:cNvSpPr/>
           <p:nvPr/>
         </p:nvSpPr>
@@ -8082,7 +8226,7 @@
       </p:sp>
       <p:sp>
         <p:nvSpPr>
-          <p:cNvPr id="36" name="状态点9"/>
+          <p:cNvPr id="37" name="状态点9"/>
           <p:cNvSpPr/>
           <p:nvPr/>
         </p:nvSpPr>
@@ -8107,7 +8251,7 @@
       </p:sp>
       <p:sp>
         <p:nvSpPr>
-          <p:cNvPr id="37" name="来源类型9"/>
+          <p:cNvPr id="38" name="来源类型9"/>
           <p:cNvSpPr txBox="1"/>
           <p:nvPr/>
         </p:nvSpPr>
@@ -8154,7 +8298,7 @@
       </p:sp>
       <p:sp>
         <p:nvSpPr>
-          <p:cNvPr id="38" name="来源说明9"/>
+          <p:cNvPr id="39" name="来源说明9"/>
           <p:cNvSpPr txBox="1"/>
           <p:nvPr/>
         </p:nvSpPr>
@@ -8210,7 +8354,7 @@
       </p:sp>
       <p:sp>
         <p:nvSpPr>
-          <p:cNvPr id="39" name="来源卡10"/>
+          <p:cNvPr id="40" name="来源卡10"/>
           <p:cNvSpPr/>
           <p:nvPr/>
         </p:nvSpPr>
@@ -8237,7 +8381,7 @@
       </p:sp>
       <p:sp>
         <p:nvSpPr>
-          <p:cNvPr id="40" name="状态点10"/>
+          <p:cNvPr id="41" name="状态点10"/>
           <p:cNvSpPr/>
           <p:nvPr/>
         </p:nvSpPr>
@@ -8262,7 +8406,7 @@
       </p:sp>
       <p:sp>
         <p:nvSpPr>
-          <p:cNvPr id="41" name="来源类型10"/>
+          <p:cNvPr id="42" name="来源类型10"/>
           <p:cNvSpPr txBox="1"/>
           <p:nvPr/>
         </p:nvSpPr>
@@ -8309,7 +8453,7 @@
       </p:sp>
       <p:sp>
         <p:nvSpPr>
-          <p:cNvPr id="42" name="来源说明10"/>
+          <p:cNvPr id="43" name="来源说明10"/>
           <p:cNvSpPr txBox="1"/>
           <p:nvPr/>
         </p:nvSpPr>
@@ -8365,7 +8509,7 @@
       </p:sp>
       <p:sp>
         <p:nvSpPr>
-          <p:cNvPr id="43" name="来源卡11"/>
+          <p:cNvPr id="44" name="来源卡11"/>
           <p:cNvSpPr/>
           <p:nvPr/>
         </p:nvSpPr>
@@ -8392,7 +8536,7 @@
       </p:sp>
       <p:sp>
         <p:nvSpPr>
-          <p:cNvPr id="44" name="状态点11"/>
+          <p:cNvPr id="45" name="状态点11"/>
           <p:cNvSpPr/>
           <p:nvPr/>
         </p:nvSpPr>
@@ -8417,7 +8561,7 @@
       </p:sp>
       <p:sp>
         <p:nvSpPr>
-          <p:cNvPr id="45" name="来源类型11"/>
+          <p:cNvPr id="46" name="来源类型11"/>
           <p:cNvSpPr txBox="1"/>
           <p:nvPr/>
         </p:nvSpPr>
@@ -8464,7 +8608,7 @@
       </p:sp>
       <p:sp>
         <p:nvSpPr>
-          <p:cNvPr id="46" name="来源说明11"/>
+          <p:cNvPr id="47" name="来源说明11"/>
           <p:cNvSpPr txBox="1"/>
           <p:nvPr/>
         </p:nvSpPr>
@@ -8520,7 +8664,7 @@
       </p:sp>
       <p:sp>
         <p:nvSpPr>
-          <p:cNvPr id="47" name="来源小结卡"/>
+          <p:cNvPr id="48" name="来源小结卡"/>
           <p:cNvSpPr/>
           <p:nvPr/>
         </p:nvSpPr>
@@ -8547,7 +8691,7 @@
       </p:sp>
       <p:sp>
         <p:nvSpPr>
-          <p:cNvPr id="48" name="来源小结"/>
+          <p:cNvPr id="49" name="来源小结"/>
           <p:cNvSpPr txBox="1"/>
           <p:nvPr/>
         </p:nvSpPr>
@@ -8583,7 +8727,7 @@
       </p:sp>
       <p:sp>
         <p:nvSpPr>
-          <p:cNvPr id="49" name="来源说明"/>
+          <p:cNvPr id="50" name="来源说明"/>
           <p:cNvSpPr txBox="1"/>
           <p:nvPr/>
         </p:nvSpPr>
@@ -8697,8 +8841,8 @@
         </p:nvSpPr>
         <p:spPr>
           <a:xfrm>
-            <a:off x="548640" y="365760"/>
-            <a:ext cx="7406640" cy="777240"/>
+            <a:off x="548640" y="502920"/>
+            <a:ext cx="7452360" cy="685800"/>
           </a:xfrm>
           <a:prstGeom prst="rect">
             <a:avLst/>
@@ -8714,14 +8858,50 @@
               <a:buNone/>
             </a:pPr>
             <a:r>
-              <a:rPr lang="en-US" sz="2800" b="1" dirty="0">
+              <a:rPr lang="en-US" sz="2600" b="1" dirty="0">
                 <a:solidFill>
                   <a:schemeClr val="tx2"/>
                 </a:solidFill>
               </a:rPr>
-              <a:t>附录二：引用与数据口径核对</a:t>
-            </a:r>
-            <a:endParaRPr lang="en-US" sz="2800" dirty="0"/>
+              <a:t>多处引用与原始来源的口径不一致</a:t>
+            </a:r>
+            <a:endParaRPr lang="en-US" sz="2600" dirty="0"/>
+          </a:p>
+        </p:txBody>
+      </p:sp>
+      <p:sp>
+        <p:nvSpPr>
+          <p:cNvPr id="3" name="章节标签"/>
+          <p:cNvSpPr txBox="1"/>
+          <p:nvPr/>
+        </p:nvSpPr>
+        <p:spPr>
+          <a:xfrm>
+            <a:off x="548640" y="256032"/>
+            <a:ext cx="7315200" cy="292608"/>
+          </a:xfrm>
+          <a:prstGeom prst="rect">
+            <a:avLst/>
+          </a:prstGeom>
+          <a:noFill/>
+          <a:ln/>
+        </p:spPr>
+        <p:txBody>
+          <a:bodyPr wrap="square" lIns="0" tIns="0" rIns="0" bIns="0" rtlCol="0" anchor="ctr"/>
+          <a:lstStyle/>
+          <a:p>
+            <a:pPr indent="0" marL="0">
+              <a:buNone/>
+            </a:pPr>
+            <a:r>
+              <a:rPr lang="en-US" sz="1200" b="1" dirty="0">
+                <a:solidFill>
+                  <a:schemeClr val="accent1"/>
+                </a:solidFill>
+              </a:rPr>
+              <a:t>附录（备问）</a:t>
+            </a:r>
+            <a:endParaRPr lang="en-US" sz="1200" dirty="0"/>
           </a:p>
         </p:txBody>
       </p:sp>
@@ -9749,7 +9929,7 @@
       </p:graphicFrame>
       <p:sp>
         <p:nvSpPr>
-          <p:cNvPr id="4" name="来源说明"/>
+          <p:cNvPr id="5" name="来源说明"/>
           <p:cNvSpPr txBox="1"/>
           <p:nvPr/>
         </p:nvSpPr>
@@ -9863,8 +10043,8 @@
         </p:nvSpPr>
         <p:spPr>
           <a:xfrm>
-            <a:off x="548640" y="365760"/>
-            <a:ext cx="7406640" cy="777240"/>
+            <a:off x="548640" y="502920"/>
+            <a:ext cx="7452360" cy="685800"/>
           </a:xfrm>
           <a:prstGeom prst="rect">
             <a:avLst/>
@@ -9880,20 +10060,56 @@
               <a:buNone/>
             </a:pPr>
             <a:r>
-              <a:rPr lang="en-US" sz="2800" b="1" dirty="0">
+              <a:rPr lang="en-US" sz="2600" b="1" dirty="0">
                 <a:solidFill>
                   <a:schemeClr val="tx2"/>
                 </a:solidFill>
               </a:rPr>
+              <a:t>趋势可参考，但论证链关键环节证据不足</a:t>
+            </a:r>
+            <a:endParaRPr lang="en-US" sz="2600" dirty="0"/>
+          </a:p>
+        </p:txBody>
+      </p:sp>
+      <p:sp>
+        <p:nvSpPr>
+          <p:cNvPr id="3" name="章节标签"/>
+          <p:cNvSpPr txBox="1"/>
+          <p:nvPr/>
+        </p:nvSpPr>
+        <p:spPr>
+          <a:xfrm>
+            <a:off x="548640" y="256032"/>
+            <a:ext cx="7315200" cy="292608"/>
+          </a:xfrm>
+          <a:prstGeom prst="rect">
+            <a:avLst/>
+          </a:prstGeom>
+          <a:noFill/>
+          <a:ln/>
+        </p:spPr>
+        <p:txBody>
+          <a:bodyPr wrap="square" lIns="0" tIns="0" rIns="0" bIns="0" rtlCol="0" anchor="ctr"/>
+          <a:lstStyle/>
+          <a:p>
+            <a:pPr indent="0" marL="0">
+              <a:buNone/>
+            </a:pPr>
+            <a:r>
+              <a:rPr lang="en-US" sz="1200" b="1" dirty="0">
+                <a:solidFill>
+                  <a:schemeClr val="accent1"/>
+                </a:solidFill>
+              </a:rPr>
               <a:t>汇报框架与核心观点</a:t>
             </a:r>
-            <a:endParaRPr lang="en-US" sz="2800" dirty="0"/>
-          </a:p>
-        </p:txBody>
-      </p:sp>
-      <p:sp>
-        <p:nvSpPr>
-          <p:cNvPr id="3" name="框架行1"/>
+            <a:endParaRPr lang="en-US" sz="1200" dirty="0"/>
+          </a:p>
+        </p:txBody>
+      </p:sp>
+      <p:sp>
+        <p:nvSpPr>
+          <p:cNvPr id="4" name="框架行1"/>
           <p:cNvSpPr/>
           <p:nvPr/>
         </p:nvSpPr>
@@ -9920,7 +10136,7 @@
       </p:sp>
       <p:sp>
         <p:nvSpPr>
-          <p:cNvPr id="4" name="序号底1"/>
+          <p:cNvPr id="5" name="序号底1"/>
           <p:cNvSpPr/>
           <p:nvPr/>
         </p:nvSpPr>
@@ -9945,7 +10161,7 @@
       </p:sp>
       <p:sp>
         <p:nvSpPr>
-          <p:cNvPr id="5" name="序号1"/>
+          <p:cNvPr id="6" name="序号1"/>
           <p:cNvSpPr txBox="1"/>
           <p:nvPr/>
         </p:nvSpPr>
@@ -9981,7 +10197,7 @@
       </p:sp>
       <p:sp>
         <p:nvSpPr>
-          <p:cNvPr id="6" name="框架名1"/>
+          <p:cNvPr id="7" name="框架名1"/>
           <p:cNvSpPr txBox="1"/>
           <p:nvPr/>
         </p:nvSpPr>
@@ -10017,7 +10233,7 @@
       </p:sp>
       <p:sp>
         <p:nvSpPr>
-          <p:cNvPr id="7" name="框架说明1"/>
+          <p:cNvPr id="8" name="框架说明1"/>
           <p:cNvSpPr txBox="1"/>
           <p:nvPr/>
         </p:nvSpPr>
@@ -10053,7 +10269,7 @@
       </p:sp>
       <p:sp>
         <p:nvSpPr>
-          <p:cNvPr id="8" name="框架行2"/>
+          <p:cNvPr id="9" name="框架行2"/>
           <p:cNvSpPr/>
           <p:nvPr/>
         </p:nvSpPr>
@@ -10080,7 +10296,7 @@
       </p:sp>
       <p:sp>
         <p:nvSpPr>
-          <p:cNvPr id="9" name="序号底2"/>
+          <p:cNvPr id="10" name="序号底2"/>
           <p:cNvSpPr/>
           <p:nvPr/>
         </p:nvSpPr>
@@ -10105,7 +10321,7 @@
       </p:sp>
       <p:sp>
         <p:nvSpPr>
-          <p:cNvPr id="10" name="序号2"/>
+          <p:cNvPr id="11" name="序号2"/>
           <p:cNvSpPr txBox="1"/>
           <p:nvPr/>
         </p:nvSpPr>
@@ -10141,7 +10357,7 @@
       </p:sp>
       <p:sp>
         <p:nvSpPr>
-          <p:cNvPr id="11" name="框架名2"/>
+          <p:cNvPr id="12" name="框架名2"/>
           <p:cNvSpPr txBox="1"/>
           <p:nvPr/>
         </p:nvSpPr>
@@ -10177,7 +10393,7 @@
       </p:sp>
       <p:sp>
         <p:nvSpPr>
-          <p:cNvPr id="12" name="框架说明2"/>
+          <p:cNvPr id="13" name="框架说明2"/>
           <p:cNvSpPr txBox="1"/>
           <p:nvPr/>
         </p:nvSpPr>
@@ -10213,7 +10429,7 @@
       </p:sp>
       <p:sp>
         <p:nvSpPr>
-          <p:cNvPr id="13" name="框架行3"/>
+          <p:cNvPr id="14" name="框架行3"/>
           <p:cNvSpPr/>
           <p:nvPr/>
         </p:nvSpPr>
@@ -10240,7 +10456,7 @@
       </p:sp>
       <p:sp>
         <p:nvSpPr>
-          <p:cNvPr id="14" name="序号底3"/>
+          <p:cNvPr id="15" name="序号底3"/>
           <p:cNvSpPr/>
           <p:nvPr/>
         </p:nvSpPr>
@@ -10265,7 +10481,7 @@
       </p:sp>
       <p:sp>
         <p:nvSpPr>
-          <p:cNvPr id="15" name="序号3"/>
+          <p:cNvPr id="16" name="序号3"/>
           <p:cNvSpPr txBox="1"/>
           <p:nvPr/>
         </p:nvSpPr>
@@ -10301,7 +10517,7 @@
       </p:sp>
       <p:sp>
         <p:nvSpPr>
-          <p:cNvPr id="16" name="框架名3"/>
+          <p:cNvPr id="17" name="框架名3"/>
           <p:cNvSpPr txBox="1"/>
           <p:nvPr/>
         </p:nvSpPr>
@@ -10337,7 +10553,7 @@
       </p:sp>
       <p:sp>
         <p:nvSpPr>
-          <p:cNvPr id="17" name="框架说明3"/>
+          <p:cNvPr id="18" name="框架说明3"/>
           <p:cNvSpPr txBox="1"/>
           <p:nvPr/>
         </p:nvSpPr>
@@ -10373,7 +10589,7 @@
       </p:sp>
       <p:sp>
         <p:nvSpPr>
-          <p:cNvPr id="18" name="框架行4"/>
+          <p:cNvPr id="19" name="框架行4"/>
           <p:cNvSpPr/>
           <p:nvPr/>
         </p:nvSpPr>
@@ -10400,7 +10616,7 @@
       </p:sp>
       <p:sp>
         <p:nvSpPr>
-          <p:cNvPr id="19" name="序号底4"/>
+          <p:cNvPr id="20" name="序号底4"/>
           <p:cNvSpPr/>
           <p:nvPr/>
         </p:nvSpPr>
@@ -10425,7 +10641,7 @@
       </p:sp>
       <p:sp>
         <p:nvSpPr>
-          <p:cNvPr id="20" name="序号4"/>
+          <p:cNvPr id="21" name="序号4"/>
           <p:cNvSpPr txBox="1"/>
           <p:nvPr/>
         </p:nvSpPr>
@@ -10461,7 +10677,7 @@
       </p:sp>
       <p:sp>
         <p:nvSpPr>
-          <p:cNvPr id="21" name="框架名4"/>
+          <p:cNvPr id="22" name="框架名4"/>
           <p:cNvSpPr txBox="1"/>
           <p:nvPr/>
         </p:nvSpPr>
@@ -10497,7 +10713,7 @@
       </p:sp>
       <p:sp>
         <p:nvSpPr>
-          <p:cNvPr id="22" name="框架说明4"/>
+          <p:cNvPr id="23" name="框架说明4"/>
           <p:cNvSpPr txBox="1"/>
           <p:nvPr/>
         </p:nvSpPr>
@@ -10533,7 +10749,7 @@
       </p:sp>
       <p:sp>
         <p:nvSpPr>
-          <p:cNvPr id="23" name="框架行5"/>
+          <p:cNvPr id="24" name="框架行5"/>
           <p:cNvSpPr/>
           <p:nvPr/>
         </p:nvSpPr>
@@ -10560,7 +10776,7 @@
       </p:sp>
       <p:sp>
         <p:nvSpPr>
-          <p:cNvPr id="24" name="序号底5"/>
+          <p:cNvPr id="25" name="序号底5"/>
           <p:cNvSpPr/>
           <p:nvPr/>
         </p:nvSpPr>
@@ -10585,7 +10801,7 @@
       </p:sp>
       <p:sp>
         <p:nvSpPr>
-          <p:cNvPr id="25" name="序号5"/>
+          <p:cNvPr id="26" name="序号5"/>
           <p:cNvSpPr txBox="1"/>
           <p:nvPr/>
         </p:nvSpPr>
@@ -10621,7 +10837,7 @@
       </p:sp>
       <p:sp>
         <p:nvSpPr>
-          <p:cNvPr id="26" name="框架名5"/>
+          <p:cNvPr id="27" name="框架名5"/>
           <p:cNvSpPr txBox="1"/>
           <p:nvPr/>
         </p:nvSpPr>
@@ -10657,7 +10873,7 @@
       </p:sp>
       <p:sp>
         <p:nvSpPr>
-          <p:cNvPr id="27" name="框架说明5"/>
+          <p:cNvPr id="28" name="框架说明5"/>
           <p:cNvSpPr txBox="1"/>
           <p:nvPr/>
         </p:nvSpPr>
@@ -10693,7 +10909,7 @@
       </p:sp>
       <p:sp>
         <p:nvSpPr>
-          <p:cNvPr id="28" name="核心观点卡"/>
+          <p:cNvPr id="29" name="核心观点卡"/>
           <p:cNvSpPr/>
           <p:nvPr/>
         </p:nvSpPr>
@@ -10720,7 +10936,7 @@
       </p:sp>
       <p:sp>
         <p:nvSpPr>
-          <p:cNvPr id="29" name="核心观点"/>
+          <p:cNvPr id="30" name="核心观点"/>
           <p:cNvSpPr txBox="1"/>
           <p:nvPr/>
         </p:nvSpPr>
@@ -10871,8 +11087,8 @@
         </p:nvSpPr>
         <p:spPr>
           <a:xfrm>
-            <a:off x="548640" y="365760"/>
-            <a:ext cx="7406640" cy="777240"/>
+            <a:off x="548640" y="502920"/>
+            <a:ext cx="7452360" cy="685800"/>
           </a:xfrm>
           <a:prstGeom prst="rect">
             <a:avLst/>
@@ -10888,20 +11104,56 @@
               <a:buNone/>
             </a:pPr>
             <a:r>
-              <a:rPr lang="en-US" sz="2800" b="1" dirty="0">
+              <a:rPr lang="en-US" sz="2600" b="1" dirty="0">
                 <a:solidFill>
                   <a:schemeClr val="tx2"/>
                 </a:solidFill>
               </a:rPr>
+              <a:t>内容分散使检索变难，AI 能否成为新入口？</a:t>
+            </a:r>
+            <a:endParaRPr lang="en-US" sz="2600" dirty="0"/>
+          </a:p>
+        </p:txBody>
+      </p:sp>
+      <p:sp>
+        <p:nvSpPr>
+          <p:cNvPr id="3" name="章节标签"/>
+          <p:cNvSpPr txBox="1"/>
+          <p:nvPr/>
+        </p:nvSpPr>
+        <p:spPr>
+          <a:xfrm>
+            <a:off x="548640" y="256032"/>
+            <a:ext cx="7315200" cy="292608"/>
+          </a:xfrm>
+          <a:prstGeom prst="rect">
+            <a:avLst/>
+          </a:prstGeom>
+          <a:noFill/>
+          <a:ln/>
+        </p:spPr>
+        <p:txBody>
+          <a:bodyPr wrap="square" lIns="0" tIns="0" rIns="0" bIns="0" rtlCol="0" anchor="ctr"/>
+          <a:lstStyle/>
+          <a:p>
+            <a:pPr indent="0" marL="0">
+              <a:buNone/>
+            </a:pPr>
+            <a:r>
+              <a:rPr lang="en-US" sz="1200" b="1" dirty="0">
+                <a:solidFill>
+                  <a:schemeClr val="accent1"/>
+                </a:solidFill>
+              </a:rPr>
               <a:t>一、研究背景与研究问题</a:t>
             </a:r>
-            <a:endParaRPr lang="en-US" sz="2800" dirty="0"/>
-          </a:p>
-        </p:txBody>
-      </p:sp>
-      <p:sp>
-        <p:nvSpPr>
-          <p:cNvPr id="3" name="进度1"/>
+            <a:endParaRPr lang="en-US" sz="1200" dirty="0"/>
+          </a:p>
+        </p:txBody>
+      </p:sp>
+      <p:sp>
+        <p:nvSpPr>
+          <p:cNvPr id="4" name="进度1"/>
           <p:cNvSpPr/>
           <p:nvPr/>
         </p:nvSpPr>
@@ -10928,7 +11180,7 @@
       </p:sp>
       <p:sp>
         <p:nvSpPr>
-          <p:cNvPr id="4" name="进度文字1"/>
+          <p:cNvPr id="5" name="进度文字1"/>
           <p:cNvSpPr txBox="1"/>
           <p:nvPr/>
         </p:nvSpPr>
@@ -10964,7 +11216,7 @@
       </p:sp>
       <p:sp>
         <p:nvSpPr>
-          <p:cNvPr id="5" name="进度2"/>
+          <p:cNvPr id="6" name="进度2"/>
           <p:cNvSpPr/>
           <p:nvPr/>
         </p:nvSpPr>
@@ -10991,7 +11243,7 @@
       </p:sp>
       <p:sp>
         <p:nvSpPr>
-          <p:cNvPr id="6" name="进度文字2"/>
+          <p:cNvPr id="7" name="进度文字2"/>
           <p:cNvSpPr txBox="1"/>
           <p:nvPr/>
         </p:nvSpPr>
@@ -11027,7 +11279,7 @@
       </p:sp>
       <p:sp>
         <p:nvSpPr>
-          <p:cNvPr id="7" name="进度3"/>
+          <p:cNvPr id="8" name="进度3"/>
           <p:cNvSpPr/>
           <p:nvPr/>
         </p:nvSpPr>
@@ -11054,7 +11306,7 @@
       </p:sp>
       <p:sp>
         <p:nvSpPr>
-          <p:cNvPr id="8" name="进度文字3"/>
+          <p:cNvPr id="9" name="进度文字3"/>
           <p:cNvSpPr txBox="1"/>
           <p:nvPr/>
         </p:nvSpPr>
@@ -11090,7 +11342,7 @@
       </p:sp>
       <p:sp>
         <p:nvSpPr>
-          <p:cNvPr id="9" name="进度4"/>
+          <p:cNvPr id="10" name="进度4"/>
           <p:cNvSpPr/>
           <p:nvPr/>
         </p:nvSpPr>
@@ -11117,7 +11369,7 @@
       </p:sp>
       <p:sp>
         <p:nvSpPr>
-          <p:cNvPr id="10" name="进度文字4"/>
+          <p:cNvPr id="11" name="进度文字4"/>
           <p:cNvSpPr txBox="1"/>
           <p:nvPr/>
         </p:nvSpPr>
@@ -11153,7 +11405,7 @@
       </p:sp>
       <p:sp>
         <p:nvSpPr>
-          <p:cNvPr id="11" name="进度5"/>
+          <p:cNvPr id="12" name="进度5"/>
           <p:cNvSpPr/>
           <p:nvPr/>
         </p:nvSpPr>
@@ -11180,7 +11432,7 @@
       </p:sp>
       <p:sp>
         <p:nvSpPr>
-          <p:cNvPr id="12" name="进度文字5"/>
+          <p:cNvPr id="13" name="进度文字5"/>
           <p:cNvSpPr txBox="1"/>
           <p:nvPr/>
         </p:nvSpPr>
@@ -11216,7 +11468,7 @@
       </p:sp>
       <p:sp>
         <p:nvSpPr>
-          <p:cNvPr id="13" name="研究背景"/>
+          <p:cNvPr id="14" name="研究背景"/>
           <p:cNvSpPr txBox="1"/>
           <p:nvPr/>
         </p:nvSpPr>
@@ -11263,7 +11515,7 @@
       </p:sp>
       <p:sp>
         <p:nvSpPr>
-          <p:cNvPr id="14" name="问题卡1"/>
+          <p:cNvPr id="15" name="问题卡1"/>
           <p:cNvSpPr/>
           <p:nvPr/>
         </p:nvSpPr>
@@ -11290,7 +11542,7 @@
       </p:sp>
       <p:sp>
         <p:nvSpPr>
-          <p:cNvPr id="15" name="图标底"/>
+          <p:cNvPr id="16" name="图标底"/>
           <p:cNvSpPr/>
           <p:nvPr/>
         </p:nvSpPr>
@@ -11315,7 +11567,7 @@
       </p:sp>
       <p:pic>
         <p:nvPicPr>
-          <p:cNvPr id="16" name="图标" descr="preencoded.png">    </p:cNvPr>
+          <p:cNvPr id="17" name="图标" descr="preencoded.png">    </p:cNvPr>
           <p:cNvPicPr>
             <a:picLocks noChangeAspect="1"/>
           </p:cNvPicPr>
@@ -11339,7 +11591,7 @@
       </p:pic>
       <p:sp>
         <p:nvSpPr>
-          <p:cNvPr id="17" name="问题标题1"/>
+          <p:cNvPr id="18" name="问题标题1"/>
           <p:cNvSpPr txBox="1"/>
           <p:nvPr/>
         </p:nvSpPr>
@@ -11375,7 +11627,7 @@
       </p:sp>
       <p:sp>
         <p:nvSpPr>
-          <p:cNvPr id="18" name="问题内容1"/>
+          <p:cNvPr id="19" name="问题内容1"/>
           <p:cNvSpPr txBox="1"/>
           <p:nvPr/>
         </p:nvSpPr>
@@ -11411,7 +11663,7 @@
       </p:sp>
       <p:sp>
         <p:nvSpPr>
-          <p:cNvPr id="19" name="问题卡2"/>
+          <p:cNvPr id="20" name="问题卡2"/>
           <p:cNvSpPr/>
           <p:nvPr/>
         </p:nvSpPr>
@@ -11438,7 +11690,7 @@
       </p:sp>
       <p:sp>
         <p:nvSpPr>
-          <p:cNvPr id="20" name="图标底"/>
+          <p:cNvPr id="21" name="图标底"/>
           <p:cNvSpPr/>
           <p:nvPr/>
         </p:nvSpPr>
@@ -11463,7 +11715,7 @@
       </p:sp>
       <p:pic>
         <p:nvPicPr>
-          <p:cNvPr id="21" name="图标" descr="preencoded.png">    </p:cNvPr>
+          <p:cNvPr id="22" name="图标" descr="preencoded.png">    </p:cNvPr>
           <p:cNvPicPr>
             <a:picLocks noChangeAspect="1"/>
           </p:cNvPicPr>
@@ -11487,7 +11739,7 @@
       </p:pic>
       <p:sp>
         <p:nvSpPr>
-          <p:cNvPr id="22" name="问题标题2"/>
+          <p:cNvPr id="23" name="问题标题2"/>
           <p:cNvSpPr txBox="1"/>
           <p:nvPr/>
         </p:nvSpPr>
@@ -11523,7 +11775,7 @@
       </p:sp>
       <p:sp>
         <p:nvSpPr>
-          <p:cNvPr id="23" name="问题内容2"/>
+          <p:cNvPr id="24" name="问题内容2"/>
           <p:cNvSpPr txBox="1"/>
           <p:nvPr/>
         </p:nvSpPr>
@@ -11559,7 +11811,7 @@
       </p:sp>
       <p:sp>
         <p:nvSpPr>
-          <p:cNvPr id="24" name="问题卡3"/>
+          <p:cNvPr id="25" name="问题卡3"/>
           <p:cNvSpPr/>
           <p:nvPr/>
         </p:nvSpPr>
@@ -11586,7 +11838,7 @@
       </p:sp>
       <p:sp>
         <p:nvSpPr>
-          <p:cNvPr id="25" name="图标底"/>
+          <p:cNvPr id="26" name="图标底"/>
           <p:cNvSpPr/>
           <p:nvPr/>
         </p:nvSpPr>
@@ -11611,7 +11863,7 @@
       </p:sp>
       <p:pic>
         <p:nvPicPr>
-          <p:cNvPr id="26" name="图标" descr="preencoded.png">    </p:cNvPr>
+          <p:cNvPr id="27" name="图标" descr="preencoded.png">    </p:cNvPr>
           <p:cNvPicPr>
             <a:picLocks noChangeAspect="1"/>
           </p:cNvPicPr>
@@ -11635,7 +11887,7 @@
       </p:pic>
       <p:sp>
         <p:nvSpPr>
-          <p:cNvPr id="27" name="问题标题3"/>
+          <p:cNvPr id="28" name="问题标题3"/>
           <p:cNvSpPr txBox="1"/>
           <p:nvPr/>
         </p:nvSpPr>
@@ -11671,7 +11923,7 @@
       </p:sp>
       <p:sp>
         <p:nvSpPr>
-          <p:cNvPr id="28" name="问题内容3"/>
+          <p:cNvPr id="29" name="问题内容3"/>
           <p:cNvSpPr txBox="1"/>
           <p:nvPr/>
         </p:nvSpPr>
@@ -11707,7 +11959,7 @@
       </p:sp>
       <p:sp>
         <p:nvSpPr>
-          <p:cNvPr id="29" name="机构与主张"/>
+          <p:cNvPr id="30" name="机构与主张"/>
           <p:cNvSpPr/>
           <p:nvPr/>
         </p:nvSpPr>
@@ -11734,7 +11986,7 @@
       </p:sp>
       <p:sp>
         <p:nvSpPr>
-          <p:cNvPr id="30" name="图标底"/>
+          <p:cNvPr id="31" name="图标底"/>
           <p:cNvSpPr/>
           <p:nvPr/>
         </p:nvSpPr>
@@ -11759,7 +12011,7 @@
       </p:sp>
       <p:pic>
         <p:nvPicPr>
-          <p:cNvPr id="31" name="图标" descr="preencoded.png">    </p:cNvPr>
+          <p:cNvPr id="32" name="图标" descr="preencoded.png">    </p:cNvPr>
           <p:cNvPicPr>
             <a:picLocks noChangeAspect="1"/>
           </p:cNvPicPr>
@@ -11783,7 +12035,7 @@
       </p:pic>
       <p:sp>
         <p:nvSpPr>
-          <p:cNvPr id="32" name="研究机构"/>
+          <p:cNvPr id="33" name="研究机构"/>
           <p:cNvSpPr txBox="1"/>
           <p:nvPr/>
         </p:nvSpPr>
@@ -11839,7 +12091,7 @@
       </p:sp>
       <p:sp>
         <p:nvSpPr>
-          <p:cNvPr id="33" name="图标底"/>
+          <p:cNvPr id="34" name="图标底"/>
           <p:cNvSpPr/>
           <p:nvPr/>
         </p:nvSpPr>
@@ -11864,7 +12116,7 @@
       </p:sp>
       <p:pic>
         <p:nvPicPr>
-          <p:cNvPr id="34" name="图标" descr="preencoded.png">    </p:cNvPr>
+          <p:cNvPr id="35" name="图标" descr="preencoded.png">    </p:cNvPr>
           <p:cNvPicPr>
             <a:picLocks noChangeAspect="1"/>
           </p:cNvPicPr>
@@ -11888,7 +12140,7 @@
       </p:pic>
       <p:sp>
         <p:nvSpPr>
-          <p:cNvPr id="35" name="报告主张"/>
+          <p:cNvPr id="36" name="报告主张"/>
           <p:cNvSpPr txBox="1"/>
           <p:nvPr/>
         </p:nvSpPr>
@@ -12022,8 +12274,8 @@
         </p:nvSpPr>
         <p:spPr>
           <a:xfrm>
-            <a:off x="548640" y="365760"/>
-            <a:ext cx="7406640" cy="777240"/>
+            <a:off x="548640" y="502920"/>
+            <a:ext cx="7452360" cy="685800"/>
           </a:xfrm>
           <a:prstGeom prst="rect">
             <a:avLst/>
@@ -12039,20 +12291,56 @@
               <a:buNone/>
             </a:pPr>
             <a:r>
-              <a:rPr lang="en-US" sz="2800" b="1" dirty="0">
+              <a:rPr lang="en-US" sz="2600" b="1" dirty="0">
                 <a:solidFill>
                   <a:schemeClr val="tx2"/>
                 </a:solidFill>
               </a:rPr>
-              <a:t>二、研究设计：两项核心问卷调查</a:t>
-            </a:r>
-            <a:endParaRPr lang="en-US" sz="2800" dirty="0"/>
-          </a:p>
-        </p:txBody>
-      </p:sp>
-      <p:sp>
-        <p:nvSpPr>
-          <p:cNvPr id="3" name="进度1"/>
+              <a:t>结论依赖两项线上问卷，抽样方式均未公开</a:t>
+            </a:r>
+            <a:endParaRPr lang="en-US" sz="2600" dirty="0"/>
+          </a:p>
+        </p:txBody>
+      </p:sp>
+      <p:sp>
+        <p:nvSpPr>
+          <p:cNvPr id="3" name="章节标签"/>
+          <p:cNvSpPr txBox="1"/>
+          <p:nvPr/>
+        </p:nvSpPr>
+        <p:spPr>
+          <a:xfrm>
+            <a:off x="548640" y="256032"/>
+            <a:ext cx="7315200" cy="292608"/>
+          </a:xfrm>
+          <a:prstGeom prst="rect">
+            <a:avLst/>
+          </a:prstGeom>
+          <a:noFill/>
+          <a:ln/>
+        </p:spPr>
+        <p:txBody>
+          <a:bodyPr wrap="square" lIns="0" tIns="0" rIns="0" bIns="0" rtlCol="0" anchor="ctr"/>
+          <a:lstStyle/>
+          <a:p>
+            <a:pPr indent="0" marL="0">
+              <a:buNone/>
+            </a:pPr>
+            <a:r>
+              <a:rPr lang="en-US" sz="1200" b="1" dirty="0">
+                <a:solidFill>
+                  <a:schemeClr val="accent1"/>
+                </a:solidFill>
+              </a:rPr>
+              <a:t>二、研究设计</a:t>
+            </a:r>
+            <a:endParaRPr lang="en-US" sz="1200" dirty="0"/>
+          </a:p>
+        </p:txBody>
+      </p:sp>
+      <p:sp>
+        <p:nvSpPr>
+          <p:cNvPr id="4" name="进度1"/>
           <p:cNvSpPr/>
           <p:nvPr/>
         </p:nvSpPr>
@@ -12079,7 +12367,7 @@
       </p:sp>
       <p:sp>
         <p:nvSpPr>
-          <p:cNvPr id="4" name="进度文字1"/>
+          <p:cNvPr id="5" name="进度文字1"/>
           <p:cNvSpPr txBox="1"/>
           <p:nvPr/>
         </p:nvSpPr>
@@ -12115,7 +12403,7 @@
       </p:sp>
       <p:sp>
         <p:nvSpPr>
-          <p:cNvPr id="5" name="进度2"/>
+          <p:cNvPr id="6" name="进度2"/>
           <p:cNvSpPr/>
           <p:nvPr/>
         </p:nvSpPr>
@@ -12142,7 +12430,7 @@
       </p:sp>
       <p:sp>
         <p:nvSpPr>
-          <p:cNvPr id="6" name="进度文字2"/>
+          <p:cNvPr id="7" name="进度文字2"/>
           <p:cNvSpPr txBox="1"/>
           <p:nvPr/>
         </p:nvSpPr>
@@ -12178,7 +12466,7 @@
       </p:sp>
       <p:sp>
         <p:nvSpPr>
-          <p:cNvPr id="7" name="进度3"/>
+          <p:cNvPr id="8" name="进度3"/>
           <p:cNvSpPr/>
           <p:nvPr/>
         </p:nvSpPr>
@@ -12205,7 +12493,7 @@
       </p:sp>
       <p:sp>
         <p:nvSpPr>
-          <p:cNvPr id="8" name="进度文字3"/>
+          <p:cNvPr id="9" name="进度文字3"/>
           <p:cNvSpPr txBox="1"/>
           <p:nvPr/>
         </p:nvSpPr>
@@ -12241,7 +12529,7 @@
       </p:sp>
       <p:sp>
         <p:nvSpPr>
-          <p:cNvPr id="9" name="进度4"/>
+          <p:cNvPr id="10" name="进度4"/>
           <p:cNvSpPr/>
           <p:nvPr/>
         </p:nvSpPr>
@@ -12268,7 +12556,7 @@
       </p:sp>
       <p:sp>
         <p:nvSpPr>
-          <p:cNvPr id="10" name="进度文字4"/>
+          <p:cNvPr id="11" name="进度文字4"/>
           <p:cNvSpPr txBox="1"/>
           <p:nvPr/>
         </p:nvSpPr>
@@ -12304,7 +12592,7 @@
       </p:sp>
       <p:sp>
         <p:nvSpPr>
-          <p:cNvPr id="11" name="进度5"/>
+          <p:cNvPr id="12" name="进度5"/>
           <p:cNvSpPr/>
           <p:nvPr/>
         </p:nvSpPr>
@@ -12331,7 +12619,7 @@
       </p:sp>
       <p:sp>
         <p:nvSpPr>
-          <p:cNvPr id="12" name="进度文字5"/>
+          <p:cNvPr id="13" name="进度文字5"/>
           <p:cNvSpPr txBox="1"/>
           <p:nvPr/>
         </p:nvSpPr>
@@ -12367,7 +12655,7 @@
       </p:sp>
       <p:sp>
         <p:nvSpPr>
-          <p:cNvPr id="13" name="问卷卡1"/>
+          <p:cNvPr id="14" name="问卷卡1"/>
           <p:cNvSpPr/>
           <p:nvPr/>
         </p:nvSpPr>
@@ -12394,7 +12682,7 @@
       </p:sp>
       <p:sp>
         <p:nvSpPr>
-          <p:cNvPr id="14" name="问卷名1"/>
+          <p:cNvPr id="15" name="问卷名1"/>
           <p:cNvSpPr txBox="1"/>
           <p:nvPr/>
         </p:nvSpPr>
@@ -12444,7 +12732,7 @@
       </p:sp>
       <p:sp>
         <p:nvSpPr>
-          <p:cNvPr id="15" name="设计项1-1"/>
+          <p:cNvPr id="16" name="设计项1-1"/>
           <p:cNvSpPr txBox="1"/>
           <p:nvPr/>
         </p:nvSpPr>
@@ -12480,7 +12768,7 @@
       </p:sp>
       <p:sp>
         <p:nvSpPr>
-          <p:cNvPr id="16" name="设计值1-1"/>
+          <p:cNvPr id="17" name="设计值1-1"/>
           <p:cNvSpPr txBox="1"/>
           <p:nvPr/>
         </p:nvSpPr>
@@ -12516,7 +12804,7 @@
       </p:sp>
       <p:sp>
         <p:nvSpPr>
-          <p:cNvPr id="17" name="设计项1-2"/>
+          <p:cNvPr id="18" name="设计项1-2"/>
           <p:cNvSpPr txBox="1"/>
           <p:nvPr/>
         </p:nvSpPr>
@@ -12552,7 +12840,7 @@
       </p:sp>
       <p:sp>
         <p:nvSpPr>
-          <p:cNvPr id="18" name="设计值1-2"/>
+          <p:cNvPr id="19" name="设计值1-2"/>
           <p:cNvSpPr txBox="1"/>
           <p:nvPr/>
         </p:nvSpPr>
@@ -12588,7 +12876,7 @@
       </p:sp>
       <p:sp>
         <p:nvSpPr>
-          <p:cNvPr id="19" name="设计项1-3"/>
+          <p:cNvPr id="20" name="设计项1-3"/>
           <p:cNvSpPr txBox="1"/>
           <p:nvPr/>
         </p:nvSpPr>
@@ -12624,7 +12912,7 @@
       </p:sp>
       <p:sp>
         <p:nvSpPr>
-          <p:cNvPr id="20" name="设计值1-3"/>
+          <p:cNvPr id="21" name="设计值1-3"/>
           <p:cNvSpPr txBox="1"/>
           <p:nvPr/>
         </p:nvSpPr>
@@ -12660,7 +12948,7 @@
       </p:sp>
       <p:sp>
         <p:nvSpPr>
-          <p:cNvPr id="21" name="设计项1-4"/>
+          <p:cNvPr id="22" name="设计项1-4"/>
           <p:cNvSpPr txBox="1"/>
           <p:nvPr/>
         </p:nvSpPr>
@@ -12696,7 +12984,7 @@
       </p:sp>
       <p:sp>
         <p:nvSpPr>
-          <p:cNvPr id="22" name="设计值1-4"/>
+          <p:cNvPr id="23" name="设计值1-4"/>
           <p:cNvSpPr txBox="1"/>
           <p:nvPr/>
         </p:nvSpPr>
@@ -12732,7 +13020,7 @@
       </p:sp>
       <p:sp>
         <p:nvSpPr>
-          <p:cNvPr id="23" name="未公开底"/>
+          <p:cNvPr id="24" name="未公开底"/>
           <p:cNvSpPr/>
           <p:nvPr/>
         </p:nvSpPr>
@@ -12759,7 +13047,7 @@
       </p:sp>
       <p:sp>
         <p:nvSpPr>
-          <p:cNvPr id="24" name="设计项1-5"/>
+          <p:cNvPr id="25" name="设计项1-5"/>
           <p:cNvSpPr txBox="1"/>
           <p:nvPr/>
         </p:nvSpPr>
@@ -12795,7 +13083,7 @@
       </p:sp>
       <p:sp>
         <p:nvSpPr>
-          <p:cNvPr id="25" name="设计值1-5"/>
+          <p:cNvPr id="26" name="设计值1-5"/>
           <p:cNvSpPr txBox="1"/>
           <p:nvPr/>
         </p:nvSpPr>
@@ -12831,7 +13119,7 @@
       </p:sp>
       <p:sp>
         <p:nvSpPr>
-          <p:cNvPr id="26" name="问卷卡2"/>
+          <p:cNvPr id="27" name="问卷卡2"/>
           <p:cNvSpPr/>
           <p:nvPr/>
         </p:nvSpPr>
@@ -12858,7 +13146,7 @@
       </p:sp>
       <p:sp>
         <p:nvSpPr>
-          <p:cNvPr id="27" name="问卷名2"/>
+          <p:cNvPr id="28" name="问卷名2"/>
           <p:cNvSpPr txBox="1"/>
           <p:nvPr/>
         </p:nvSpPr>
@@ -12908,7 +13196,7 @@
       </p:sp>
       <p:sp>
         <p:nvSpPr>
-          <p:cNvPr id="28" name="设计项2-1"/>
+          <p:cNvPr id="29" name="设计项2-1"/>
           <p:cNvSpPr txBox="1"/>
           <p:nvPr/>
         </p:nvSpPr>
@@ -12944,7 +13232,7 @@
       </p:sp>
       <p:sp>
         <p:nvSpPr>
-          <p:cNvPr id="29" name="设计值2-1"/>
+          <p:cNvPr id="30" name="设计值2-1"/>
           <p:cNvSpPr txBox="1"/>
           <p:nvPr/>
         </p:nvSpPr>
@@ -12980,7 +13268,7 @@
       </p:sp>
       <p:sp>
         <p:nvSpPr>
-          <p:cNvPr id="30" name="设计项2-2"/>
+          <p:cNvPr id="31" name="设计项2-2"/>
           <p:cNvSpPr txBox="1"/>
           <p:nvPr/>
         </p:nvSpPr>
@@ -13016,7 +13304,7 @@
       </p:sp>
       <p:sp>
         <p:nvSpPr>
-          <p:cNvPr id="31" name="设计值2-2"/>
+          <p:cNvPr id="32" name="设计值2-2"/>
           <p:cNvSpPr txBox="1"/>
           <p:nvPr/>
         </p:nvSpPr>
@@ -13052,7 +13340,7 @@
       </p:sp>
       <p:sp>
         <p:nvSpPr>
-          <p:cNvPr id="32" name="设计项2-3"/>
+          <p:cNvPr id="33" name="设计项2-3"/>
           <p:cNvSpPr txBox="1"/>
           <p:nvPr/>
         </p:nvSpPr>
@@ -13088,7 +13376,7 @@
       </p:sp>
       <p:sp>
         <p:nvSpPr>
-          <p:cNvPr id="33" name="设计值2-3"/>
+          <p:cNvPr id="34" name="设计值2-3"/>
           <p:cNvSpPr txBox="1"/>
           <p:nvPr/>
         </p:nvSpPr>
@@ -13124,7 +13412,7 @@
       </p:sp>
       <p:sp>
         <p:nvSpPr>
-          <p:cNvPr id="34" name="设计项2-4"/>
+          <p:cNvPr id="35" name="设计项2-4"/>
           <p:cNvSpPr txBox="1"/>
           <p:nvPr/>
         </p:nvSpPr>
@@ -13160,7 +13448,7 @@
       </p:sp>
       <p:sp>
         <p:nvSpPr>
-          <p:cNvPr id="35" name="设计值2-4"/>
+          <p:cNvPr id="36" name="设计值2-4"/>
           <p:cNvSpPr txBox="1"/>
           <p:nvPr/>
         </p:nvSpPr>
@@ -13196,7 +13484,7 @@
       </p:sp>
       <p:sp>
         <p:nvSpPr>
-          <p:cNvPr id="36" name="未公开底"/>
+          <p:cNvPr id="37" name="未公开底"/>
           <p:cNvSpPr/>
           <p:nvPr/>
         </p:nvSpPr>
@@ -13223,7 +13511,7 @@
       </p:sp>
       <p:sp>
         <p:nvSpPr>
-          <p:cNvPr id="37" name="设计项2-5"/>
+          <p:cNvPr id="38" name="设计项2-5"/>
           <p:cNvSpPr txBox="1"/>
           <p:nvPr/>
         </p:nvSpPr>
@@ -13259,7 +13547,7 @@
       </p:sp>
       <p:sp>
         <p:nvSpPr>
-          <p:cNvPr id="38" name="设计值2-5"/>
+          <p:cNvPr id="39" name="设计值2-5"/>
           <p:cNvSpPr txBox="1"/>
           <p:nvPr/>
         </p:nvSpPr>
@@ -13295,7 +13583,7 @@
       </p:sp>
       <p:sp>
         <p:nvSpPr>
-          <p:cNvPr id="39" name="其他来源"/>
+          <p:cNvPr id="40" name="其他来源"/>
           <p:cNvSpPr txBox="1"/>
           <p:nvPr/>
         </p:nvSpPr>
@@ -13331,7 +13619,7 @@
       </p:sp>
       <p:sp>
         <p:nvSpPr>
-          <p:cNvPr id="40" name="来源说明"/>
+          <p:cNvPr id="41" name="来源说明"/>
           <p:cNvSpPr txBox="1"/>
           <p:nvPr/>
         </p:nvSpPr>
@@ -13445,8 +13733,8 @@
         </p:nvSpPr>
         <p:spPr>
           <a:xfrm>
-            <a:off x="548640" y="365760"/>
-            <a:ext cx="7406640" cy="777240"/>
+            <a:off x="548640" y="502920"/>
+            <a:ext cx="7452360" cy="685800"/>
           </a:xfrm>
           <a:prstGeom prst="rect">
             <a:avLst/>
@@ -13462,20 +13750,56 @@
               <a:buNone/>
             </a:pPr>
             <a:r>
-              <a:rPr lang="en-US" sz="2800" b="1" dirty="0">
+              <a:rPr lang="en-US" sz="2600" b="1" dirty="0">
                 <a:solidFill>
                   <a:schemeClr val="tx2"/>
                 </a:solidFill>
               </a:rPr>
-              <a:t>三、报告内容（一）：AI 使用增加，信任不足</a:t>
-            </a:r>
-            <a:endParaRPr lang="en-US" sz="2800" dirty="0"/>
-          </a:p>
-        </p:txBody>
-      </p:sp>
-      <p:sp>
-        <p:nvSpPr>
-          <p:cNvPr id="3" name="进度1"/>
+              <a:t>报告发现：年轻用户依赖 AI，但信任不足</a:t>
+            </a:r>
+            <a:endParaRPr lang="en-US" sz="2600" dirty="0"/>
+          </a:p>
+        </p:txBody>
+      </p:sp>
+      <p:sp>
+        <p:nvSpPr>
+          <p:cNvPr id="3" name="章节标签"/>
+          <p:cNvSpPr txBox="1"/>
+          <p:nvPr/>
+        </p:nvSpPr>
+        <p:spPr>
+          <a:xfrm>
+            <a:off x="548640" y="256032"/>
+            <a:ext cx="7315200" cy="292608"/>
+          </a:xfrm>
+          <a:prstGeom prst="rect">
+            <a:avLst/>
+          </a:prstGeom>
+          <a:noFill/>
+          <a:ln/>
+        </p:spPr>
+        <p:txBody>
+          <a:bodyPr wrap="square" lIns="0" tIns="0" rIns="0" bIns="0" rtlCol="0" anchor="ctr"/>
+          <a:lstStyle/>
+          <a:p>
+            <a:pPr indent="0" marL="0">
+              <a:buNone/>
+            </a:pPr>
+            <a:r>
+              <a:rPr lang="en-US" sz="1200" b="1" dirty="0">
+                <a:solidFill>
+                  <a:schemeClr val="accent1"/>
+                </a:solidFill>
+              </a:rPr>
+              <a:t>三、报告内容（一）</a:t>
+            </a:r>
+            <a:endParaRPr lang="en-US" sz="1200" dirty="0"/>
+          </a:p>
+        </p:txBody>
+      </p:sp>
+      <p:sp>
+        <p:nvSpPr>
+          <p:cNvPr id="4" name="进度1"/>
           <p:cNvSpPr/>
           <p:nvPr/>
         </p:nvSpPr>
@@ -13502,7 +13826,7 @@
       </p:sp>
       <p:sp>
         <p:nvSpPr>
-          <p:cNvPr id="4" name="进度文字1"/>
+          <p:cNvPr id="5" name="进度文字1"/>
           <p:cNvSpPr txBox="1"/>
           <p:nvPr/>
         </p:nvSpPr>
@@ -13538,7 +13862,7 @@
       </p:sp>
       <p:sp>
         <p:nvSpPr>
-          <p:cNvPr id="5" name="进度2"/>
+          <p:cNvPr id="6" name="进度2"/>
           <p:cNvSpPr/>
           <p:nvPr/>
         </p:nvSpPr>
@@ -13565,7 +13889,7 @@
       </p:sp>
       <p:sp>
         <p:nvSpPr>
-          <p:cNvPr id="6" name="进度文字2"/>
+          <p:cNvPr id="7" name="进度文字2"/>
           <p:cNvSpPr txBox="1"/>
           <p:nvPr/>
         </p:nvSpPr>
@@ -13601,7 +13925,7 @@
       </p:sp>
       <p:sp>
         <p:nvSpPr>
-          <p:cNvPr id="7" name="进度3"/>
+          <p:cNvPr id="8" name="进度3"/>
           <p:cNvSpPr/>
           <p:nvPr/>
         </p:nvSpPr>
@@ -13628,7 +13952,7 @@
       </p:sp>
       <p:sp>
         <p:nvSpPr>
-          <p:cNvPr id="8" name="进度文字3"/>
+          <p:cNvPr id="9" name="进度文字3"/>
           <p:cNvSpPr txBox="1"/>
           <p:nvPr/>
         </p:nvSpPr>
@@ -13664,7 +13988,7 @@
       </p:sp>
       <p:sp>
         <p:nvSpPr>
-          <p:cNvPr id="9" name="进度4"/>
+          <p:cNvPr id="10" name="进度4"/>
           <p:cNvSpPr/>
           <p:nvPr/>
         </p:nvSpPr>
@@ -13691,7 +14015,7 @@
       </p:sp>
       <p:sp>
         <p:nvSpPr>
-          <p:cNvPr id="10" name="进度文字4"/>
+          <p:cNvPr id="11" name="进度文字4"/>
           <p:cNvSpPr txBox="1"/>
           <p:nvPr/>
         </p:nvSpPr>
@@ -13727,7 +14051,7 @@
       </p:sp>
       <p:sp>
         <p:nvSpPr>
-          <p:cNvPr id="11" name="进度5"/>
+          <p:cNvPr id="12" name="进度5"/>
           <p:cNvSpPr/>
           <p:nvPr/>
         </p:nvSpPr>
@@ -13754,7 +14078,7 @@
       </p:sp>
       <p:sp>
         <p:nvSpPr>
-          <p:cNvPr id="12" name="进度文字5"/>
+          <p:cNvPr id="13" name="进度文字5"/>
           <p:cNvSpPr txBox="1"/>
           <p:nvPr/>
         </p:nvSpPr>
@@ -13790,7 +14114,7 @@
       </p:sp>
       <p:sp>
         <p:nvSpPr>
-          <p:cNvPr id="13" name="数据卡1"/>
+          <p:cNvPr id="14" name="数据卡1"/>
           <p:cNvSpPr/>
           <p:nvPr/>
         </p:nvSpPr>
@@ -13817,7 +14141,7 @@
       </p:sp>
       <p:sp>
         <p:nvSpPr>
-          <p:cNvPr id="14" name="数据1"/>
+          <p:cNvPr id="15" name="数据1"/>
           <p:cNvSpPr txBox="1"/>
           <p:nvPr/>
         </p:nvSpPr>
@@ -13856,7 +14180,7 @@
       </p:sp>
       <p:sp>
         <p:nvSpPr>
-          <p:cNvPr id="15" name="数据说明1"/>
+          <p:cNvPr id="16" name="数据说明1"/>
           <p:cNvSpPr txBox="1"/>
           <p:nvPr/>
         </p:nvSpPr>
@@ -13892,7 +14216,7 @@
       </p:sp>
       <p:sp>
         <p:nvSpPr>
-          <p:cNvPr id="16" name="数据卡2"/>
+          <p:cNvPr id="17" name="数据卡2"/>
           <p:cNvSpPr/>
           <p:nvPr/>
         </p:nvSpPr>
@@ -13919,7 +14243,7 @@
       </p:sp>
       <p:sp>
         <p:nvSpPr>
-          <p:cNvPr id="17" name="数据2"/>
+          <p:cNvPr id="18" name="数据2"/>
           <p:cNvSpPr txBox="1"/>
           <p:nvPr/>
         </p:nvSpPr>
@@ -13958,7 +14282,7 @@
       </p:sp>
       <p:sp>
         <p:nvSpPr>
-          <p:cNvPr id="18" name="数据说明2"/>
+          <p:cNvPr id="19" name="数据说明2"/>
           <p:cNvSpPr txBox="1"/>
           <p:nvPr/>
         </p:nvSpPr>
@@ -13994,7 +14318,7 @@
       </p:sp>
       <p:sp>
         <p:nvSpPr>
-          <p:cNvPr id="19" name="数据卡3"/>
+          <p:cNvPr id="20" name="数据卡3"/>
           <p:cNvSpPr/>
           <p:nvPr/>
         </p:nvSpPr>
@@ -14021,7 +14345,7 @@
       </p:sp>
       <p:sp>
         <p:nvSpPr>
-          <p:cNvPr id="20" name="数据3"/>
+          <p:cNvPr id="21" name="数据3"/>
           <p:cNvSpPr txBox="1"/>
           <p:nvPr/>
         </p:nvSpPr>
@@ -14060,7 +14384,7 @@
       </p:sp>
       <p:sp>
         <p:nvSpPr>
-          <p:cNvPr id="21" name="数据说明3"/>
+          <p:cNvPr id="22" name="数据说明3"/>
           <p:cNvSpPr txBox="1"/>
           <p:nvPr/>
         </p:nvSpPr>
@@ -14096,7 +14420,7 @@
       </p:sp>
       <p:sp>
         <p:nvSpPr>
-          <p:cNvPr id="22" name="数据卡4"/>
+          <p:cNvPr id="23" name="数据卡4"/>
           <p:cNvSpPr/>
           <p:nvPr/>
         </p:nvSpPr>
@@ -14123,7 +14447,7 @@
       </p:sp>
       <p:sp>
         <p:nvSpPr>
-          <p:cNvPr id="23" name="数据4"/>
+          <p:cNvPr id="24" name="数据4"/>
           <p:cNvSpPr txBox="1"/>
           <p:nvPr/>
         </p:nvSpPr>
@@ -14162,7 +14486,7 @@
       </p:sp>
       <p:sp>
         <p:nvSpPr>
-          <p:cNvPr id="24" name="数据说明4"/>
+          <p:cNvPr id="25" name="数据说明4"/>
           <p:cNvSpPr txBox="1"/>
           <p:nvPr/>
         </p:nvSpPr>
@@ -14198,7 +14522,7 @@
       </p:sp>
       <p:sp>
         <p:nvSpPr>
-          <p:cNvPr id="25" name="报告解释卡"/>
+          <p:cNvPr id="26" name="报告解释卡"/>
           <p:cNvSpPr/>
           <p:nvPr/>
         </p:nvSpPr>
@@ -14225,7 +14549,7 @@
       </p:sp>
       <p:sp>
         <p:nvSpPr>
-          <p:cNvPr id="26" name="解释标题"/>
+          <p:cNvPr id="27" name="解释标题"/>
           <p:cNvSpPr txBox="1"/>
           <p:nvPr/>
         </p:nvSpPr>
@@ -14261,7 +14585,7 @@
       </p:sp>
       <p:sp>
         <p:nvSpPr>
-          <p:cNvPr id="27" name="解释1"/>
+          <p:cNvPr id="28" name="解释1"/>
           <p:cNvSpPr txBox="1"/>
           <p:nvPr/>
         </p:nvSpPr>
@@ -14317,7 +14641,7 @@
       </p:sp>
       <p:sp>
         <p:nvSpPr>
-          <p:cNvPr id="28" name="解释2"/>
+          <p:cNvPr id="29" name="解释2"/>
           <p:cNvSpPr txBox="1"/>
           <p:nvPr/>
         </p:nvSpPr>
@@ -14373,7 +14697,7 @@
       </p:sp>
       <p:sp>
         <p:nvSpPr>
-          <p:cNvPr id="29" name="解释3"/>
+          <p:cNvPr id="30" name="解释3"/>
           <p:cNvSpPr txBox="1"/>
           <p:nvPr/>
         </p:nvSpPr>
@@ -14429,7 +14753,7 @@
       </p:sp>
       <p:sp>
         <p:nvSpPr>
-          <p:cNvPr id="30" name="来源说明"/>
+          <p:cNvPr id="31" name="来源说明"/>
           <p:cNvSpPr txBox="1"/>
           <p:nvPr/>
         </p:nvSpPr>
@@ -14543,8 +14867,8 @@
         </p:nvSpPr>
         <p:spPr>
           <a:xfrm>
-            <a:off x="548640" y="365760"/>
-            <a:ext cx="7406640" cy="777240"/>
+            <a:off x="548640" y="502920"/>
+            <a:ext cx="7452360" cy="685800"/>
           </a:xfrm>
           <a:prstGeom prst="rect">
             <a:avLst/>
@@ -14560,20 +14884,56 @@
               <a:buNone/>
             </a:pPr>
             <a:r>
-              <a:rPr lang="en-US" sz="2800" b="1" dirty="0">
+              <a:rPr lang="en-US" sz="2600" b="1" dirty="0">
                 <a:solidFill>
                   <a:schemeClr val="tx2"/>
                 </a:solidFill>
               </a:rPr>
-              <a:t>三、报告内容（二）：内容分散，检索困难</a:t>
-            </a:r>
-            <a:endParaRPr lang="en-US" sz="2800" dirty="0"/>
-          </a:p>
-        </p:txBody>
-      </p:sp>
-      <p:sp>
-        <p:nvSpPr>
-          <p:cNvPr id="3" name="进度1"/>
+              <a:t>报告认为：内容分散致退订，AI 须接入可信数据</a:t>
+            </a:r>
+            <a:endParaRPr lang="en-US" sz="2600" dirty="0"/>
+          </a:p>
+        </p:txBody>
+      </p:sp>
+      <p:sp>
+        <p:nvSpPr>
+          <p:cNvPr id="3" name="章节标签"/>
+          <p:cNvSpPr txBox="1"/>
+          <p:nvPr/>
+        </p:nvSpPr>
+        <p:spPr>
+          <a:xfrm>
+            <a:off x="548640" y="256032"/>
+            <a:ext cx="7315200" cy="292608"/>
+          </a:xfrm>
+          <a:prstGeom prst="rect">
+            <a:avLst/>
+          </a:prstGeom>
+          <a:noFill/>
+          <a:ln/>
+        </p:spPr>
+        <p:txBody>
+          <a:bodyPr wrap="square" lIns="0" tIns="0" rIns="0" bIns="0" rtlCol="0" anchor="ctr"/>
+          <a:lstStyle/>
+          <a:p>
+            <a:pPr indent="0" marL="0">
+              <a:buNone/>
+            </a:pPr>
+            <a:r>
+              <a:rPr lang="en-US" sz="1200" b="1" dirty="0">
+                <a:solidFill>
+                  <a:schemeClr val="accent1"/>
+                </a:solidFill>
+              </a:rPr>
+              <a:t>三、报告内容（二）</a:t>
+            </a:r>
+            <a:endParaRPr lang="en-US" sz="1200" dirty="0"/>
+          </a:p>
+        </p:txBody>
+      </p:sp>
+      <p:sp>
+        <p:nvSpPr>
+          <p:cNvPr id="4" name="进度1"/>
           <p:cNvSpPr/>
           <p:nvPr/>
         </p:nvSpPr>
@@ -14600,7 +14960,7 @@
       </p:sp>
       <p:sp>
         <p:nvSpPr>
-          <p:cNvPr id="4" name="进度文字1"/>
+          <p:cNvPr id="5" name="进度文字1"/>
           <p:cNvSpPr txBox="1"/>
           <p:nvPr/>
         </p:nvSpPr>
@@ -14636,7 +14996,7 @@
       </p:sp>
       <p:sp>
         <p:nvSpPr>
-          <p:cNvPr id="5" name="进度2"/>
+          <p:cNvPr id="6" name="进度2"/>
           <p:cNvSpPr/>
           <p:nvPr/>
         </p:nvSpPr>
@@ -14663,7 +15023,7 @@
       </p:sp>
       <p:sp>
         <p:nvSpPr>
-          <p:cNvPr id="6" name="进度文字2"/>
+          <p:cNvPr id="7" name="进度文字2"/>
           <p:cNvSpPr txBox="1"/>
           <p:nvPr/>
         </p:nvSpPr>
@@ -14699,7 +15059,7 @@
       </p:sp>
       <p:sp>
         <p:nvSpPr>
-          <p:cNvPr id="7" name="进度3"/>
+          <p:cNvPr id="8" name="进度3"/>
           <p:cNvSpPr/>
           <p:nvPr/>
         </p:nvSpPr>
@@ -14726,7 +15086,7 @@
       </p:sp>
       <p:sp>
         <p:nvSpPr>
-          <p:cNvPr id="8" name="进度文字3"/>
+          <p:cNvPr id="9" name="进度文字3"/>
           <p:cNvSpPr txBox="1"/>
           <p:nvPr/>
         </p:nvSpPr>
@@ -14762,7 +15122,7 @@
       </p:sp>
       <p:sp>
         <p:nvSpPr>
-          <p:cNvPr id="9" name="进度4"/>
+          <p:cNvPr id="10" name="进度4"/>
           <p:cNvSpPr/>
           <p:nvPr/>
         </p:nvSpPr>
@@ -14789,7 +15149,7 @@
       </p:sp>
       <p:sp>
         <p:nvSpPr>
-          <p:cNvPr id="10" name="进度文字4"/>
+          <p:cNvPr id="11" name="进度文字4"/>
           <p:cNvSpPr txBox="1"/>
           <p:nvPr/>
         </p:nvSpPr>
@@ -14825,7 +15185,7 @@
       </p:sp>
       <p:sp>
         <p:nvSpPr>
-          <p:cNvPr id="11" name="进度5"/>
+          <p:cNvPr id="12" name="进度5"/>
           <p:cNvSpPr/>
           <p:nvPr/>
         </p:nvSpPr>
@@ -14852,7 +15212,7 @@
       </p:sp>
       <p:sp>
         <p:nvSpPr>
-          <p:cNvPr id="12" name="进度文字5"/>
+          <p:cNvPr id="13" name="进度文字5"/>
           <p:cNvSpPr txBox="1"/>
           <p:nvPr/>
         </p:nvSpPr>
@@ -14888,7 +15248,7 @@
       </p:sp>
       <p:sp>
         <p:nvSpPr>
-          <p:cNvPr id="13" name="数据卡1"/>
+          <p:cNvPr id="14" name="数据卡1"/>
           <p:cNvSpPr/>
           <p:nvPr/>
         </p:nvSpPr>
@@ -14915,7 +15275,7 @@
       </p:sp>
       <p:sp>
         <p:nvSpPr>
-          <p:cNvPr id="14" name="数据1"/>
+          <p:cNvPr id="15" name="数据1"/>
           <p:cNvSpPr txBox="1"/>
           <p:nvPr/>
         </p:nvSpPr>
@@ -14954,7 +15314,7 @@
       </p:sp>
       <p:sp>
         <p:nvSpPr>
-          <p:cNvPr id="15" name="数据说明1"/>
+          <p:cNvPr id="16" name="数据说明1"/>
           <p:cNvSpPr txBox="1"/>
           <p:nvPr/>
         </p:nvSpPr>
@@ -14990,7 +15350,7 @@
       </p:sp>
       <p:sp>
         <p:nvSpPr>
-          <p:cNvPr id="16" name="数据卡2"/>
+          <p:cNvPr id="17" name="数据卡2"/>
           <p:cNvSpPr/>
           <p:nvPr/>
         </p:nvSpPr>
@@ -15017,7 +15377,7 @@
       </p:sp>
       <p:sp>
         <p:nvSpPr>
-          <p:cNvPr id="17" name="数据2"/>
+          <p:cNvPr id="18" name="数据2"/>
           <p:cNvSpPr txBox="1"/>
           <p:nvPr/>
         </p:nvSpPr>
@@ -15056,7 +15416,7 @@
       </p:sp>
       <p:sp>
         <p:nvSpPr>
-          <p:cNvPr id="18" name="数据说明2"/>
+          <p:cNvPr id="19" name="数据说明2"/>
           <p:cNvSpPr txBox="1"/>
           <p:nvPr/>
         </p:nvSpPr>
@@ -15092,7 +15452,7 @@
       </p:sp>
       <p:sp>
         <p:nvSpPr>
-          <p:cNvPr id="19" name="数据卡3"/>
+          <p:cNvPr id="20" name="数据卡3"/>
           <p:cNvSpPr/>
           <p:nvPr/>
         </p:nvSpPr>
@@ -15119,7 +15479,7 @@
       </p:sp>
       <p:sp>
         <p:nvSpPr>
-          <p:cNvPr id="20" name="数据3"/>
+          <p:cNvPr id="21" name="数据3"/>
           <p:cNvSpPr txBox="1"/>
           <p:nvPr/>
         </p:nvSpPr>
@@ -15158,7 +15518,7 @@
       </p:sp>
       <p:sp>
         <p:nvSpPr>
-          <p:cNvPr id="21" name="数据说明3"/>
+          <p:cNvPr id="22" name="数据说明3"/>
           <p:cNvSpPr txBox="1"/>
           <p:nvPr/>
         </p:nvSpPr>
@@ -15194,7 +15554,7 @@
       </p:sp>
       <p:sp>
         <p:nvSpPr>
-          <p:cNvPr id="22" name="数据卡4"/>
+          <p:cNvPr id="23" name="数据卡4"/>
           <p:cNvSpPr/>
           <p:nvPr/>
         </p:nvSpPr>
@@ -15221,7 +15581,7 @@
       </p:sp>
       <p:sp>
         <p:nvSpPr>
-          <p:cNvPr id="23" name="数据4"/>
+          <p:cNvPr id="24" name="数据4"/>
           <p:cNvSpPr txBox="1"/>
           <p:nvPr/>
         </p:nvSpPr>
@@ -15260,7 +15620,7 @@
       </p:sp>
       <p:sp>
         <p:nvSpPr>
-          <p:cNvPr id="24" name="数据说明4"/>
+          <p:cNvPr id="25" name="数据说明4"/>
           <p:cNvSpPr txBox="1"/>
           <p:nvPr/>
         </p:nvSpPr>
@@ -15296,7 +15656,7 @@
       </p:sp>
       <p:sp>
         <p:nvSpPr>
-          <p:cNvPr id="25" name="报告论证卡"/>
+          <p:cNvPr id="26" name="报告论证卡"/>
           <p:cNvSpPr/>
           <p:nvPr/>
         </p:nvSpPr>
@@ -15323,7 +15683,7 @@
       </p:sp>
       <p:sp>
         <p:nvSpPr>
-          <p:cNvPr id="26" name="论证标题"/>
+          <p:cNvPr id="27" name="论证标题"/>
           <p:cNvSpPr txBox="1"/>
           <p:nvPr/>
         </p:nvSpPr>
@@ -15359,7 +15719,7 @@
       </p:sp>
       <p:sp>
         <p:nvSpPr>
-          <p:cNvPr id="27" name="论证环1"/>
+          <p:cNvPr id="28" name="论证环1"/>
           <p:cNvSpPr/>
           <p:nvPr/>
         </p:nvSpPr>
@@ -15386,7 +15746,7 @@
       </p:sp>
       <p:sp>
         <p:nvSpPr>
-          <p:cNvPr id="28" name="论证环文字1"/>
+          <p:cNvPr id="29" name="论证环文字1"/>
           <p:cNvSpPr txBox="1"/>
           <p:nvPr/>
         </p:nvSpPr>
@@ -15422,7 +15782,7 @@
       </p:sp>
       <p:sp>
         <p:nvSpPr>
-          <p:cNvPr id="29" name="论证说明1"/>
+          <p:cNvPr id="30" name="论证说明1"/>
           <p:cNvSpPr txBox="1"/>
           <p:nvPr/>
         </p:nvSpPr>
@@ -15458,7 +15818,7 @@
       </p:sp>
       <p:sp>
         <p:nvSpPr>
-          <p:cNvPr id="30" name="论证箭头1"/>
+          <p:cNvPr id="31" name="论证箭头1"/>
           <p:cNvSpPr txBox="1"/>
           <p:nvPr/>
         </p:nvSpPr>
@@ -15494,7 +15854,7 @@
       </p:sp>
       <p:sp>
         <p:nvSpPr>
-          <p:cNvPr id="31" name="论证环2"/>
+          <p:cNvPr id="32" name="论证环2"/>
           <p:cNvSpPr/>
           <p:nvPr/>
         </p:nvSpPr>
@@ -15521,7 +15881,7 @@
       </p:sp>
       <p:sp>
         <p:nvSpPr>
-          <p:cNvPr id="32" name="论证环文字2"/>
+          <p:cNvPr id="33" name="论证环文字2"/>
           <p:cNvSpPr txBox="1"/>
           <p:nvPr/>
         </p:nvSpPr>
@@ -15557,7 +15917,7 @@
       </p:sp>
       <p:sp>
         <p:nvSpPr>
-          <p:cNvPr id="33" name="论证说明2"/>
+          <p:cNvPr id="34" name="论证说明2"/>
           <p:cNvSpPr txBox="1"/>
           <p:nvPr/>
         </p:nvSpPr>
@@ -15593,7 +15953,7 @@
       </p:sp>
       <p:sp>
         <p:nvSpPr>
-          <p:cNvPr id="34" name="论证箭头2"/>
+          <p:cNvPr id="35" name="论证箭头2"/>
           <p:cNvSpPr txBox="1"/>
           <p:nvPr/>
         </p:nvSpPr>
@@ -15629,7 +15989,7 @@
       </p:sp>
       <p:sp>
         <p:nvSpPr>
-          <p:cNvPr id="35" name="论证环3"/>
+          <p:cNvPr id="36" name="论证环3"/>
           <p:cNvSpPr/>
           <p:nvPr/>
         </p:nvSpPr>
@@ -15656,7 +16016,7 @@
       </p:sp>
       <p:sp>
         <p:nvSpPr>
-          <p:cNvPr id="36" name="论证环文字3"/>
+          <p:cNvPr id="37" name="论证环文字3"/>
           <p:cNvSpPr txBox="1"/>
           <p:nvPr/>
         </p:nvSpPr>
@@ -15692,7 +16052,7 @@
       </p:sp>
       <p:sp>
         <p:nvSpPr>
-          <p:cNvPr id="37" name="论证说明3"/>
+          <p:cNvPr id="38" name="论证说明3"/>
           <p:cNvSpPr txBox="1"/>
           <p:nvPr/>
         </p:nvSpPr>
@@ -15728,7 +16088,7 @@
       </p:sp>
       <p:sp>
         <p:nvSpPr>
-          <p:cNvPr id="38" name="论证箭头3"/>
+          <p:cNvPr id="39" name="论证箭头3"/>
           <p:cNvSpPr txBox="1"/>
           <p:nvPr/>
         </p:nvSpPr>
@@ -15764,7 +16124,7 @@
       </p:sp>
       <p:sp>
         <p:nvSpPr>
-          <p:cNvPr id="39" name="论证环4"/>
+          <p:cNvPr id="40" name="论证环4"/>
           <p:cNvSpPr/>
           <p:nvPr/>
         </p:nvSpPr>
@@ -15791,7 +16151,7 @@
       </p:sp>
       <p:sp>
         <p:nvSpPr>
-          <p:cNvPr id="40" name="论证环文字4"/>
+          <p:cNvPr id="41" name="论证环文字4"/>
           <p:cNvSpPr txBox="1"/>
           <p:nvPr/>
         </p:nvSpPr>
@@ -15827,7 +16187,7 @@
       </p:sp>
       <p:sp>
         <p:nvSpPr>
-          <p:cNvPr id="41" name="论证说明4"/>
+          <p:cNvPr id="42" name="论证说明4"/>
           <p:cNvSpPr txBox="1"/>
           <p:nvPr/>
         </p:nvSpPr>
@@ -15863,7 +16223,7 @@
       </p:sp>
       <p:sp>
         <p:nvSpPr>
-          <p:cNvPr id="42" name="来源说明"/>
+          <p:cNvPr id="43" name="来源说明"/>
           <p:cNvSpPr txBox="1"/>
           <p:nvPr/>
         </p:nvSpPr>
@@ -15977,8 +16337,8 @@
         </p:nvSpPr>
         <p:spPr>
           <a:xfrm>
-            <a:off x="548640" y="365760"/>
-            <a:ext cx="7406640" cy="777240"/>
+            <a:off x="548640" y="502920"/>
+            <a:ext cx="7452360" cy="685800"/>
           </a:xfrm>
           <a:prstGeom prst="rect">
             <a:avLst/>
@@ -15994,20 +16354,56 @@
               <a:buNone/>
             </a:pPr>
             <a:r>
-              <a:rPr lang="en-US" sz="2800" b="1" dirty="0">
+              <a:rPr lang="en-US" sz="2600" b="1" dirty="0">
                 <a:solidFill>
                   <a:schemeClr val="tx2"/>
                 </a:solidFill>
               </a:rPr>
-              <a:t>四、方法评价：沿论证链逐环检验</a:t>
-            </a:r>
-            <a:endParaRPr lang="en-US" sz="2800" dirty="0"/>
-          </a:p>
-        </p:txBody>
-      </p:sp>
-      <p:sp>
-        <p:nvSpPr>
-          <p:cNvPr id="3" name="进度1"/>
+              <a:t>报告的四环论证，可按课上四个维度逐环检验</a:t>
+            </a:r>
+            <a:endParaRPr lang="en-US" sz="2600" dirty="0"/>
+          </a:p>
+        </p:txBody>
+      </p:sp>
+      <p:sp>
+        <p:nvSpPr>
+          <p:cNvPr id="3" name="章节标签"/>
+          <p:cNvSpPr txBox="1"/>
+          <p:nvPr/>
+        </p:nvSpPr>
+        <p:spPr>
+          <a:xfrm>
+            <a:off x="548640" y="256032"/>
+            <a:ext cx="7315200" cy="292608"/>
+          </a:xfrm>
+          <a:prstGeom prst="rect">
+            <a:avLst/>
+          </a:prstGeom>
+          <a:noFill/>
+          <a:ln/>
+        </p:spPr>
+        <p:txBody>
+          <a:bodyPr wrap="square" lIns="0" tIns="0" rIns="0" bIns="0" rtlCol="0" anchor="ctr"/>
+          <a:lstStyle/>
+          <a:p>
+            <a:pPr indent="0" marL="0">
+              <a:buNone/>
+            </a:pPr>
+            <a:r>
+              <a:rPr lang="en-US" sz="1200" b="1" dirty="0">
+                <a:solidFill>
+                  <a:schemeClr val="accent1"/>
+                </a:solidFill>
+              </a:rPr>
+              <a:t>四、方法评价 · 总览</a:t>
+            </a:r>
+            <a:endParaRPr lang="en-US" sz="1200" dirty="0"/>
+          </a:p>
+        </p:txBody>
+      </p:sp>
+      <p:sp>
+        <p:nvSpPr>
+          <p:cNvPr id="4" name="进度1"/>
           <p:cNvSpPr/>
           <p:nvPr/>
         </p:nvSpPr>
@@ -16034,7 +16430,7 @@
       </p:sp>
       <p:sp>
         <p:nvSpPr>
-          <p:cNvPr id="4" name="进度文字1"/>
+          <p:cNvPr id="5" name="进度文字1"/>
           <p:cNvSpPr txBox="1"/>
           <p:nvPr/>
         </p:nvSpPr>
@@ -16070,7 +16466,7 @@
       </p:sp>
       <p:sp>
         <p:nvSpPr>
-          <p:cNvPr id="5" name="进度2"/>
+          <p:cNvPr id="6" name="进度2"/>
           <p:cNvSpPr/>
           <p:nvPr/>
         </p:nvSpPr>
@@ -16097,7 +16493,7 @@
       </p:sp>
       <p:sp>
         <p:nvSpPr>
-          <p:cNvPr id="6" name="进度文字2"/>
+          <p:cNvPr id="7" name="进度文字2"/>
           <p:cNvSpPr txBox="1"/>
           <p:nvPr/>
         </p:nvSpPr>
@@ -16133,7 +16529,7 @@
       </p:sp>
       <p:sp>
         <p:nvSpPr>
-          <p:cNvPr id="7" name="进度3"/>
+          <p:cNvPr id="8" name="进度3"/>
           <p:cNvSpPr/>
           <p:nvPr/>
         </p:nvSpPr>
@@ -16160,7 +16556,7 @@
       </p:sp>
       <p:sp>
         <p:nvSpPr>
-          <p:cNvPr id="8" name="进度文字3"/>
+          <p:cNvPr id="9" name="进度文字3"/>
           <p:cNvSpPr txBox="1"/>
           <p:nvPr/>
         </p:nvSpPr>
@@ -16196,7 +16592,7 @@
       </p:sp>
       <p:sp>
         <p:nvSpPr>
-          <p:cNvPr id="9" name="进度4"/>
+          <p:cNvPr id="10" name="进度4"/>
           <p:cNvSpPr/>
           <p:nvPr/>
         </p:nvSpPr>
@@ -16223,7 +16619,7 @@
       </p:sp>
       <p:sp>
         <p:nvSpPr>
-          <p:cNvPr id="10" name="进度文字4"/>
+          <p:cNvPr id="11" name="进度文字4"/>
           <p:cNvSpPr txBox="1"/>
           <p:nvPr/>
         </p:nvSpPr>
@@ -16259,7 +16655,7 @@
       </p:sp>
       <p:sp>
         <p:nvSpPr>
-          <p:cNvPr id="11" name="进度5"/>
+          <p:cNvPr id="12" name="进度5"/>
           <p:cNvSpPr/>
           <p:nvPr/>
         </p:nvSpPr>
@@ -16286,7 +16682,7 @@
       </p:sp>
       <p:sp>
         <p:nvSpPr>
-          <p:cNvPr id="12" name="进度文字5"/>
+          <p:cNvPr id="13" name="进度文字5"/>
           <p:cNvSpPr txBox="1"/>
           <p:nvPr/>
         </p:nvSpPr>
@@ -16322,7 +16718,7 @@
       </p:sp>
       <p:sp>
         <p:nvSpPr>
-          <p:cNvPr id="13" name="评价引言"/>
+          <p:cNvPr id="14" name="评价引言"/>
           <p:cNvSpPr txBox="1"/>
           <p:nvPr/>
         </p:nvSpPr>
@@ -16350,7 +16746,7 @@
                   <a:schemeClr val="tx2"/>
                 </a:solidFill>
               </a:rPr>
-              <a:t>参照课上春晚满意度调查案例（央视 81.6% 与新浪网 11.5%）：调查对象、研究总体、调查时间与研究方法不同，结论必然不同。</a:t>
+              <a:t>依据：课上春晚满意度调查案例（央视 81.6% 与新浪网 11.5%）——调查对象、研究总体、调查时间与研究方法不同，结论必然不同。</a:t>
             </a:r>
             <a:endParaRPr lang="en-US" sz="1400" dirty="0"/>
           </a:p>
@@ -16358,7 +16754,7 @@
       </p:sp>
       <p:sp>
         <p:nvSpPr>
-          <p:cNvPr id="14" name="行标签1"/>
+          <p:cNvPr id="15" name="行标签1"/>
           <p:cNvSpPr txBox="1"/>
           <p:nvPr/>
         </p:nvSpPr>
@@ -16394,7 +16790,7 @@
       </p:sp>
       <p:sp>
         <p:nvSpPr>
-          <p:cNvPr id="15" name="行标签2"/>
+          <p:cNvPr id="16" name="行标签2"/>
           <p:cNvSpPr txBox="1"/>
           <p:nvPr/>
         </p:nvSpPr>
@@ -16430,7 +16826,7 @@
       </p:sp>
       <p:sp>
         <p:nvSpPr>
-          <p:cNvPr id="16" name="行标签3"/>
+          <p:cNvPr id="17" name="行标签3"/>
           <p:cNvSpPr txBox="1"/>
           <p:nvPr/>
         </p:nvSpPr>
@@ -16466,7 +16862,7 @@
       </p:sp>
       <p:sp>
         <p:nvSpPr>
-          <p:cNvPr id="17" name="环节1"/>
+          <p:cNvPr id="18" name="环节1"/>
           <p:cNvSpPr/>
           <p:nvPr/>
         </p:nvSpPr>
@@ -16493,7 +16889,7 @@
       </p:sp>
       <p:sp>
         <p:nvSpPr>
-          <p:cNvPr id="18" name="环节文字1"/>
+          <p:cNvPr id="19" name="环节文字1"/>
           <p:cNvSpPr txBox="1"/>
           <p:nvPr/>
         </p:nvSpPr>
@@ -16529,7 +16925,7 @@
       </p:sp>
       <p:sp>
         <p:nvSpPr>
-          <p:cNvPr id="19" name="环节箭头1"/>
+          <p:cNvPr id="20" name="环节箭头1"/>
           <p:cNvSpPr txBox="1"/>
           <p:nvPr/>
         </p:nvSpPr>
@@ -16565,7 +16961,7 @@
       </p:sp>
       <p:sp>
         <p:nvSpPr>
-          <p:cNvPr id="20" name="证据1"/>
+          <p:cNvPr id="21" name="证据1"/>
           <p:cNvSpPr/>
           <p:nvPr/>
         </p:nvSpPr>
@@ -16592,7 +16988,7 @@
       </p:sp>
       <p:sp>
         <p:nvSpPr>
-          <p:cNvPr id="21" name="证据文字1"/>
+          <p:cNvPr id="22" name="证据文字1"/>
           <p:cNvSpPr txBox="1"/>
           <p:nvPr/>
         </p:nvSpPr>
@@ -16628,7 +17024,7 @@
       </p:sp>
       <p:sp>
         <p:nvSpPr>
-          <p:cNvPr id="22" name="检验1"/>
+          <p:cNvPr id="23" name="检验1"/>
           <p:cNvSpPr/>
           <p:nvPr/>
         </p:nvSpPr>
@@ -16655,7 +17051,7 @@
       </p:sp>
       <p:sp>
         <p:nvSpPr>
-          <p:cNvPr id="23" name="检验文字1"/>
+          <p:cNvPr id="24" name="检验文字1"/>
           <p:cNvSpPr txBox="1"/>
           <p:nvPr/>
         </p:nvSpPr>
@@ -16705,7 +17101,7 @@
       </p:sp>
       <p:sp>
         <p:nvSpPr>
-          <p:cNvPr id="24" name="环节2"/>
+          <p:cNvPr id="25" name="环节2"/>
           <p:cNvSpPr/>
           <p:nvPr/>
         </p:nvSpPr>
@@ -16732,7 +17128,7 @@
       </p:sp>
       <p:sp>
         <p:nvSpPr>
-          <p:cNvPr id="25" name="环节文字2"/>
+          <p:cNvPr id="26" name="环节文字2"/>
           <p:cNvSpPr txBox="1"/>
           <p:nvPr/>
         </p:nvSpPr>
@@ -16768,7 +17164,7 @@
       </p:sp>
       <p:sp>
         <p:nvSpPr>
-          <p:cNvPr id="26" name="环节箭头2"/>
+          <p:cNvPr id="27" name="环节箭头2"/>
           <p:cNvSpPr txBox="1"/>
           <p:nvPr/>
         </p:nvSpPr>
@@ -16804,7 +17200,7 @@
       </p:sp>
       <p:sp>
         <p:nvSpPr>
-          <p:cNvPr id="27" name="证据2"/>
+          <p:cNvPr id="28" name="证据2"/>
           <p:cNvSpPr/>
           <p:nvPr/>
         </p:nvSpPr>
@@ -16831,7 +17227,7 @@
       </p:sp>
       <p:sp>
         <p:nvSpPr>
-          <p:cNvPr id="28" name="证据文字2"/>
+          <p:cNvPr id="29" name="证据文字2"/>
           <p:cNvSpPr txBox="1"/>
           <p:nvPr/>
         </p:nvSpPr>
@@ -16867,7 +17263,7 @@
       </p:sp>
       <p:sp>
         <p:nvSpPr>
-          <p:cNvPr id="29" name="检验2"/>
+          <p:cNvPr id="30" name="检验2"/>
           <p:cNvSpPr/>
           <p:nvPr/>
         </p:nvSpPr>
@@ -16894,7 +17290,7 @@
       </p:sp>
       <p:sp>
         <p:nvSpPr>
-          <p:cNvPr id="30" name="检验文字2"/>
+          <p:cNvPr id="31" name="检验文字2"/>
           <p:cNvSpPr txBox="1"/>
           <p:nvPr/>
         </p:nvSpPr>
@@ -16930,7 +17326,7 @@
       </p:sp>
       <p:sp>
         <p:nvSpPr>
-          <p:cNvPr id="31" name="环节3"/>
+          <p:cNvPr id="32" name="环节3"/>
           <p:cNvSpPr/>
           <p:nvPr/>
         </p:nvSpPr>
@@ -16957,7 +17353,7 @@
       </p:sp>
       <p:sp>
         <p:nvSpPr>
-          <p:cNvPr id="32" name="环节文字3"/>
+          <p:cNvPr id="33" name="环节文字3"/>
           <p:cNvSpPr txBox="1"/>
           <p:nvPr/>
         </p:nvSpPr>
@@ -16993,7 +17389,7 @@
       </p:sp>
       <p:sp>
         <p:nvSpPr>
-          <p:cNvPr id="33" name="环节箭头3"/>
+          <p:cNvPr id="34" name="环节箭头3"/>
           <p:cNvSpPr txBox="1"/>
           <p:nvPr/>
         </p:nvSpPr>
@@ -17029,7 +17425,7 @@
       </p:sp>
       <p:sp>
         <p:nvSpPr>
-          <p:cNvPr id="34" name="证据3"/>
+          <p:cNvPr id="35" name="证据3"/>
           <p:cNvSpPr/>
           <p:nvPr/>
         </p:nvSpPr>
@@ -17056,7 +17452,7 @@
       </p:sp>
       <p:sp>
         <p:nvSpPr>
-          <p:cNvPr id="35" name="证据文字3"/>
+          <p:cNvPr id="36" name="证据文字3"/>
           <p:cNvSpPr txBox="1"/>
           <p:nvPr/>
         </p:nvSpPr>
@@ -17092,7 +17488,7 @@
       </p:sp>
       <p:sp>
         <p:nvSpPr>
-          <p:cNvPr id="36" name="检验3"/>
+          <p:cNvPr id="37" name="检验3"/>
           <p:cNvSpPr/>
           <p:nvPr/>
         </p:nvSpPr>
@@ -17119,7 +17515,7 @@
       </p:sp>
       <p:sp>
         <p:nvSpPr>
-          <p:cNvPr id="37" name="检验文字3"/>
+          <p:cNvPr id="38" name="检验文字3"/>
           <p:cNvSpPr txBox="1"/>
           <p:nvPr/>
         </p:nvSpPr>
@@ -17169,7 +17565,7 @@
       </p:sp>
       <p:sp>
         <p:nvSpPr>
-          <p:cNvPr id="38" name="环节4"/>
+          <p:cNvPr id="39" name="环节4"/>
           <p:cNvSpPr/>
           <p:nvPr/>
         </p:nvSpPr>
@@ -17196,7 +17592,7 @@
       </p:sp>
       <p:sp>
         <p:nvSpPr>
-          <p:cNvPr id="39" name="环节文字4"/>
+          <p:cNvPr id="40" name="环节文字4"/>
           <p:cNvSpPr txBox="1"/>
           <p:nvPr/>
         </p:nvSpPr>
@@ -17232,7 +17628,7 @@
       </p:sp>
       <p:sp>
         <p:nvSpPr>
-          <p:cNvPr id="40" name="证据4"/>
+          <p:cNvPr id="41" name="证据4"/>
           <p:cNvSpPr/>
           <p:nvPr/>
         </p:nvSpPr>
@@ -17259,7 +17655,7 @@
       </p:sp>
       <p:sp>
         <p:nvSpPr>
-          <p:cNvPr id="41" name="证据文字4"/>
+          <p:cNvPr id="42" name="证据文字4"/>
           <p:cNvSpPr txBox="1"/>
           <p:nvPr/>
         </p:nvSpPr>
@@ -17295,7 +17691,7 @@
       </p:sp>
       <p:sp>
         <p:nvSpPr>
-          <p:cNvPr id="42" name="检验4"/>
+          <p:cNvPr id="43" name="检验4"/>
           <p:cNvSpPr/>
           <p:nvPr/>
         </p:nvSpPr>
@@ -17322,7 +17718,7 @@
       </p:sp>
       <p:sp>
         <p:nvSpPr>
-          <p:cNvPr id="43" name="检验文字4"/>
+          <p:cNvPr id="44" name="检验文字4"/>
           <p:cNvSpPr txBox="1"/>
           <p:nvPr/>
         </p:nvSpPr>
@@ -17372,7 +17768,7 @@
       </p:sp>
       <p:sp>
         <p:nvSpPr>
-          <p:cNvPr id="44" name="来源说明"/>
+          <p:cNvPr id="45" name="来源说明"/>
           <p:cNvSpPr txBox="1"/>
           <p:nvPr/>
         </p:nvSpPr>
@@ -17486,8 +17882,8 @@
         </p:nvSpPr>
         <p:spPr>
           <a:xfrm>
-            <a:off x="548640" y="365760"/>
-            <a:ext cx="7406640" cy="777240"/>
+            <a:off x="548640" y="502920"/>
+            <a:ext cx="7452360" cy="685800"/>
           </a:xfrm>
           <a:prstGeom prst="rect">
             <a:avLst/>
@@ -17503,20 +17899,56 @@
               <a:buNone/>
             </a:pPr>
             <a:r>
-              <a:rPr lang="en-US" sz="2800" b="1" dirty="0">
+              <a:rPr lang="en-US" sz="2600" b="1" dirty="0">
                 <a:solidFill>
                   <a:schemeClr val="tx2"/>
                 </a:solidFill>
               </a:rPr>
-              <a:t>维度一 · 调查对象：样本代表性存疑</a:t>
-            </a:r>
-            <a:endParaRPr lang="en-US" sz="2800" dirty="0"/>
-          </a:p>
-        </p:txBody>
-      </p:sp>
-      <p:sp>
-        <p:nvSpPr>
-          <p:cNvPr id="3" name="进度1"/>
+              <a:t>样本仅为 AI 用户，结论却推及“美国人”</a:t>
+            </a:r>
+            <a:endParaRPr lang="en-US" sz="2600" dirty="0"/>
+          </a:p>
+        </p:txBody>
+      </p:sp>
+      <p:sp>
+        <p:nvSpPr>
+          <p:cNvPr id="3" name="章节标签"/>
+          <p:cNvSpPr txBox="1"/>
+          <p:nvPr/>
+        </p:nvSpPr>
+        <p:spPr>
+          <a:xfrm>
+            <a:off x="548640" y="256032"/>
+            <a:ext cx="7315200" cy="292608"/>
+          </a:xfrm>
+          <a:prstGeom prst="rect">
+            <a:avLst/>
+          </a:prstGeom>
+          <a:noFill/>
+          <a:ln/>
+        </p:spPr>
+        <p:txBody>
+          <a:bodyPr wrap="square" lIns="0" tIns="0" rIns="0" bIns="0" rtlCol="0" anchor="ctr"/>
+          <a:lstStyle/>
+          <a:p>
+            <a:pPr indent="0" marL="0">
+              <a:buNone/>
+            </a:pPr>
+            <a:r>
+              <a:rPr lang="en-US" sz="1200" b="1" dirty="0">
+                <a:solidFill>
+                  <a:schemeClr val="accent1"/>
+                </a:solidFill>
+              </a:rPr>
+              <a:t>四、方法评价 · 维度一  调查对象</a:t>
+            </a:r>
+            <a:endParaRPr lang="en-US" sz="1200" dirty="0"/>
+          </a:p>
+        </p:txBody>
+      </p:sp>
+      <p:sp>
+        <p:nvSpPr>
+          <p:cNvPr id="4" name="进度1"/>
           <p:cNvSpPr/>
           <p:nvPr/>
         </p:nvSpPr>
@@ -17543,7 +17975,7 @@
       </p:sp>
       <p:sp>
         <p:nvSpPr>
-          <p:cNvPr id="4" name="进度文字1"/>
+          <p:cNvPr id="5" name="进度文字1"/>
           <p:cNvSpPr txBox="1"/>
           <p:nvPr/>
         </p:nvSpPr>
@@ -17579,7 +18011,7 @@
       </p:sp>
       <p:sp>
         <p:nvSpPr>
-          <p:cNvPr id="5" name="进度2"/>
+          <p:cNvPr id="6" name="进度2"/>
           <p:cNvSpPr/>
           <p:nvPr/>
         </p:nvSpPr>
@@ -17606,7 +18038,7 @@
       </p:sp>
       <p:sp>
         <p:nvSpPr>
-          <p:cNvPr id="6" name="进度文字2"/>
+          <p:cNvPr id="7" name="进度文字2"/>
           <p:cNvSpPr txBox="1"/>
           <p:nvPr/>
         </p:nvSpPr>
@@ -17642,7 +18074,7 @@
       </p:sp>
       <p:sp>
         <p:nvSpPr>
-          <p:cNvPr id="7" name="进度3"/>
+          <p:cNvPr id="8" name="进度3"/>
           <p:cNvSpPr/>
           <p:nvPr/>
         </p:nvSpPr>
@@ -17669,7 +18101,7 @@
       </p:sp>
       <p:sp>
         <p:nvSpPr>
-          <p:cNvPr id="8" name="进度文字3"/>
+          <p:cNvPr id="9" name="进度文字3"/>
           <p:cNvSpPr txBox="1"/>
           <p:nvPr/>
         </p:nvSpPr>
@@ -17705,7 +18137,7 @@
       </p:sp>
       <p:sp>
         <p:nvSpPr>
-          <p:cNvPr id="9" name="进度4"/>
+          <p:cNvPr id="10" name="进度4"/>
           <p:cNvSpPr/>
           <p:nvPr/>
         </p:nvSpPr>
@@ -17732,7 +18164,7 @@
       </p:sp>
       <p:sp>
         <p:nvSpPr>
-          <p:cNvPr id="10" name="进度文字4"/>
+          <p:cNvPr id="11" name="进度文字4"/>
           <p:cNvSpPr txBox="1"/>
           <p:nvPr/>
         </p:nvSpPr>
@@ -17768,7 +18200,7 @@
       </p:sp>
       <p:sp>
         <p:nvSpPr>
-          <p:cNvPr id="11" name="进度5"/>
+          <p:cNvPr id="12" name="进度5"/>
           <p:cNvSpPr/>
           <p:nvPr/>
         </p:nvSpPr>
@@ -17795,7 +18227,7 @@
       </p:sp>
       <p:sp>
         <p:nvSpPr>
-          <p:cNvPr id="12" name="进度文字5"/>
+          <p:cNvPr id="13" name="进度文字5"/>
           <p:cNvSpPr txBox="1"/>
           <p:nvPr/>
         </p:nvSpPr>
@@ -17831,7 +18263,7 @@
       </p:sp>
       <p:sp>
         <p:nvSpPr>
-          <p:cNvPr id="13" name="总体圈1"/>
+          <p:cNvPr id="14" name="总体圈1"/>
           <p:cNvSpPr/>
           <p:nvPr/>
         </p:nvSpPr>
@@ -17856,7 +18288,7 @@
       </p:sp>
       <p:sp>
         <p:nvSpPr>
-          <p:cNvPr id="14" name="总体标签1"/>
+          <p:cNvPr id="15" name="总体标签1"/>
           <p:cNvSpPr txBox="1"/>
           <p:nvPr/>
         </p:nvSpPr>
@@ -17892,7 +18324,7 @@
       </p:sp>
       <p:sp>
         <p:nvSpPr>
-          <p:cNvPr id="15" name="总体圈2"/>
+          <p:cNvPr id="16" name="总体圈2"/>
           <p:cNvSpPr/>
           <p:nvPr/>
         </p:nvSpPr>
@@ -17917,7 +18349,7 @@
       </p:sp>
       <p:sp>
         <p:nvSpPr>
-          <p:cNvPr id="16" name="总体标签2"/>
+          <p:cNvPr id="17" name="总体标签2"/>
           <p:cNvSpPr txBox="1"/>
           <p:nvPr/>
         </p:nvSpPr>
@@ -17953,7 +18385,7 @@
       </p:sp>
       <p:sp>
         <p:nvSpPr>
-          <p:cNvPr id="17" name="总体圈3"/>
+          <p:cNvPr id="18" name="总体圈3"/>
           <p:cNvSpPr/>
           <p:nvPr/>
         </p:nvSpPr>
@@ -17978,7 +18410,7 @@
       </p:sp>
       <p:sp>
         <p:nvSpPr>
-          <p:cNvPr id="18" name="总体标签3"/>
+          <p:cNvPr id="19" name="总体标签3"/>
           <p:cNvSpPr txBox="1"/>
           <p:nvPr/>
         </p:nvSpPr>
@@ -18014,7 +18446,7 @@
       </p:sp>
       <p:sp>
         <p:nvSpPr>
-          <p:cNvPr id="19" name="总体圈4"/>
+          <p:cNvPr id="20" name="总体圈4"/>
           <p:cNvSpPr/>
           <p:nvPr/>
         </p:nvSpPr>
@@ -18039,7 +18471,7 @@
       </p:sp>
       <p:sp>
         <p:nvSpPr>
-          <p:cNvPr id="20" name="样本标签"/>
+          <p:cNvPr id="21" name="样本标签"/>
           <p:cNvSpPr txBox="1"/>
           <p:nvPr/>
         </p:nvSpPr>
@@ -18092,7 +18524,7 @@
       </p:sp>
       <p:sp>
         <p:nvSpPr>
-          <p:cNvPr id="21" name="事实卡"/>
+          <p:cNvPr id="22" name="事实卡"/>
           <p:cNvSpPr/>
           <p:nvPr/>
         </p:nvSpPr>
@@ -18119,7 +18551,7 @@
       </p:sp>
       <p:sp>
         <p:nvSpPr>
-          <p:cNvPr id="22" name="事实标签"/>
+          <p:cNvPr id="23" name="事实标签"/>
           <p:cNvSpPr/>
           <p:nvPr/>
         </p:nvSpPr>
@@ -18146,7 +18578,7 @@
       </p:sp>
       <p:sp>
         <p:nvSpPr>
-          <p:cNvPr id="23" name="事实标签文字"/>
+          <p:cNvPr id="24" name="事实标签文字"/>
           <p:cNvSpPr txBox="1"/>
           <p:nvPr/>
         </p:nvSpPr>
@@ -18182,7 +18614,7 @@
       </p:sp>
       <p:sp>
         <p:nvSpPr>
-          <p:cNvPr id="24" name="事实内容"/>
+          <p:cNvPr id="25" name="事实内容"/>
           <p:cNvSpPr txBox="1"/>
           <p:nvPr/>
         </p:nvSpPr>
@@ -18210,7 +18642,7 @@
                   <a:schemeClr val="tx1"/>
                 </a:solidFill>
               </a:rPr>
-              <a:t>样本仅为 AI 聊天机器人用户，报告却多处将结论表述为“美国人”；所称“Alpha 世代”仅含 13–14 岁受访者。</a:t>
+              <a:t>样本仅为 AI 聊天机器人用户，结论却表述为“美国人”；“Alpha 世代”仅含 13–14 岁。</a:t>
             </a:r>
             <a:endParaRPr lang="en-US" sz="1400" dirty="0"/>
           </a:p>
@@ -18218,7 +18650,7 @@
       </p:sp>
       <p:sp>
         <p:nvSpPr>
-          <p:cNvPr id="25" name="下箭头"/>
+          <p:cNvPr id="26" name="下箭头"/>
           <p:cNvSpPr txBox="1"/>
           <p:nvPr/>
         </p:nvSpPr>
@@ -18254,7 +18686,7 @@
       </p:sp>
       <p:sp>
         <p:nvSpPr>
-          <p:cNvPr id="26" name="原因卡"/>
+          <p:cNvPr id="27" name="原因卡"/>
           <p:cNvSpPr/>
           <p:nvPr/>
         </p:nvSpPr>
@@ -18281,7 +18713,7 @@
       </p:sp>
       <p:sp>
         <p:nvSpPr>
-          <p:cNvPr id="27" name="原因标签"/>
+          <p:cNvPr id="28" name="原因标签"/>
           <p:cNvSpPr/>
           <p:nvPr/>
         </p:nvSpPr>
@@ -18308,7 +18740,7 @@
       </p:sp>
       <p:sp>
         <p:nvSpPr>
-          <p:cNvPr id="28" name="原因标签文字"/>
+          <p:cNvPr id="29" name="原因标签文字"/>
           <p:cNvSpPr txBox="1"/>
           <p:nvPr/>
         </p:nvSpPr>
@@ -18344,7 +18776,7 @@
       </p:sp>
       <p:sp>
         <p:nvSpPr>
-          <p:cNvPr id="29" name="原因内容"/>
+          <p:cNvPr id="30" name="原因内容"/>
           <p:cNvSpPr txBox="1"/>
           <p:nvPr/>
         </p:nvSpPr>
@@ -18372,7 +18804,7 @@
                   <a:schemeClr val="tx1"/>
                 </a:solidFill>
               </a:rPr>
-              <a:t>线上样本以“使用 AI”为筛选条件，抽样框、加权方法与应答率均未公开，调查总体小于报告推论的总体。</a:t>
+              <a:t>以“使用 AI”为筛选条件的线上样本；抽样框、加权、应答率均未公开。</a:t>
             </a:r>
             <a:endParaRPr lang="en-US" sz="1400" dirty="0"/>
           </a:p>
@@ -18380,7 +18812,7 @@
       </p:sp>
       <p:sp>
         <p:nvSpPr>
-          <p:cNvPr id="30" name="下箭头"/>
+          <p:cNvPr id="31" name="下箭头"/>
           <p:cNvSpPr txBox="1"/>
           <p:nvPr/>
         </p:nvSpPr>
@@ -18416,7 +18848,7 @@
       </p:sp>
       <p:sp>
         <p:nvSpPr>
-          <p:cNvPr id="31" name="影响卡"/>
+          <p:cNvPr id="32" name="影响卡"/>
           <p:cNvSpPr/>
           <p:nvPr/>
         </p:nvSpPr>
@@ -18443,7 +18875,7 @@
       </p:sp>
       <p:sp>
         <p:nvSpPr>
-          <p:cNvPr id="32" name="影响标签"/>
+          <p:cNvPr id="33" name="影响标签"/>
           <p:cNvSpPr/>
           <p:nvPr/>
         </p:nvSpPr>
@@ -18470,7 +18902,7 @@
       </p:sp>
       <p:sp>
         <p:nvSpPr>
-          <p:cNvPr id="33" name="影响标签文字"/>
+          <p:cNvPr id="34" name="影响标签文字"/>
           <p:cNvSpPr txBox="1"/>
           <p:nvPr/>
         </p:nvSpPr>
@@ -18506,7 +18938,7 @@
       </p:sp>
       <p:sp>
         <p:nvSpPr>
-          <p:cNvPr id="34" name="影响内容"/>
+          <p:cNvPr id="35" name="影响内容"/>
           <p:cNvSpPr txBox="1"/>
           <p:nvPr/>
         </p:nvSpPr>
@@ -18534,7 +18966,7 @@
                   <a:schemeClr val="tx1"/>
                 </a:solidFill>
               </a:rPr>
-              <a:t>54%、75% 等数据只能解释为“美国 AI 用户中”的比例；与课上 Durex 网络调查同属覆盖偏差问题。</a:t>
+              <a:t>54%、75% 只代表美国 AI 用户；与课上 Durex 网络调查同属覆盖偏差。</a:t>
             </a:r>
             <a:endParaRPr lang="en-US" sz="1400" dirty="0"/>
           </a:p>
@@ -18542,7 +18974,7 @@
       </p:sp>
       <p:sp>
         <p:nvSpPr>
-          <p:cNvPr id="35" name="来源说明"/>
+          <p:cNvPr id="36" name="来源说明"/>
           <p:cNvSpPr txBox="1"/>
           <p:nvPr/>
         </p:nvSpPr>
@@ -18656,8 +19088,8 @@
         </p:nvSpPr>
         <p:spPr>
           <a:xfrm>
-            <a:off x="548640" y="365760"/>
-            <a:ext cx="7406640" cy="777240"/>
+            <a:off x="548640" y="502920"/>
+            <a:ext cx="7452360" cy="685800"/>
           </a:xfrm>
           <a:prstGeom prst="rect">
             <a:avLst/>
@@ -18673,20 +19105,56 @@
               <a:buNone/>
             </a:pPr>
             <a:r>
-              <a:rPr lang="en-US" sz="2800" b="1" dirty="0">
+              <a:rPr lang="en-US" sz="2600" b="1" dirty="0">
                 <a:solidFill>
                   <a:schemeClr val="tx2"/>
                 </a:solidFill>
               </a:rPr>
-              <a:t>维度二 · 研究总体：六国均值用于美国</a:t>
-            </a:r>
-            <a:endParaRPr lang="en-US" sz="2800" dirty="0"/>
-          </a:p>
-        </p:txBody>
-      </p:sp>
-      <p:sp>
-        <p:nvSpPr>
-          <p:cNvPr id="3" name="进度1"/>
+              <a:t>“14 分钟”是六国均值，美国实为 12 分钟</a:t>
+            </a:r>
+            <a:endParaRPr lang="en-US" sz="2600" dirty="0"/>
+          </a:p>
+        </p:txBody>
+      </p:sp>
+      <p:sp>
+        <p:nvSpPr>
+          <p:cNvPr id="3" name="章节标签"/>
+          <p:cNvSpPr txBox="1"/>
+          <p:nvPr/>
+        </p:nvSpPr>
+        <p:spPr>
+          <a:xfrm>
+            <a:off x="548640" y="256032"/>
+            <a:ext cx="7315200" cy="292608"/>
+          </a:xfrm>
+          <a:prstGeom prst="rect">
+            <a:avLst/>
+          </a:prstGeom>
+          <a:noFill/>
+          <a:ln/>
+        </p:spPr>
+        <p:txBody>
+          <a:bodyPr wrap="square" lIns="0" tIns="0" rIns="0" bIns="0" rtlCol="0" anchor="ctr"/>
+          <a:lstStyle/>
+          <a:p>
+            <a:pPr indent="0" marL="0">
+              <a:buNone/>
+            </a:pPr>
+            <a:r>
+              <a:rPr lang="en-US" sz="1200" b="1" dirty="0">
+                <a:solidFill>
+                  <a:schemeClr val="accent1"/>
+                </a:solidFill>
+              </a:rPr>
+              <a:t>四、方法评价 · 维度二  研究总体</a:t>
+            </a:r>
+            <a:endParaRPr lang="en-US" sz="1200" dirty="0"/>
+          </a:p>
+        </p:txBody>
+      </p:sp>
+      <p:sp>
+        <p:nvSpPr>
+          <p:cNvPr id="4" name="进度1"/>
           <p:cNvSpPr/>
           <p:nvPr/>
         </p:nvSpPr>
@@ -18713,7 +19181,7 @@
       </p:sp>
       <p:sp>
         <p:nvSpPr>
-          <p:cNvPr id="4" name="进度文字1"/>
+          <p:cNvPr id="5" name="进度文字1"/>
           <p:cNvSpPr txBox="1"/>
           <p:nvPr/>
         </p:nvSpPr>
@@ -18749,7 +19217,7 @@
       </p:sp>
       <p:sp>
         <p:nvSpPr>
-          <p:cNvPr id="5" name="进度2"/>
+          <p:cNvPr id="6" name="进度2"/>
           <p:cNvSpPr/>
           <p:nvPr/>
         </p:nvSpPr>
@@ -18776,7 +19244,7 @@
       </p:sp>
       <p:sp>
         <p:nvSpPr>
-          <p:cNvPr id="6" name="进度文字2"/>
+          <p:cNvPr id="7" name="进度文字2"/>
           <p:cNvSpPr txBox="1"/>
           <p:nvPr/>
         </p:nvSpPr>
@@ -18812,7 +19280,7 @@
       </p:sp>
       <p:sp>
         <p:nvSpPr>
-          <p:cNvPr id="7" name="进度3"/>
+          <p:cNvPr id="8" name="进度3"/>
           <p:cNvSpPr/>
           <p:nvPr/>
         </p:nvSpPr>
@@ -18839,7 +19307,7 @@
       </p:sp>
       <p:sp>
         <p:nvSpPr>
-          <p:cNvPr id="8" name="进度文字3"/>
+          <p:cNvPr id="9" name="进度文字3"/>
           <p:cNvSpPr txBox="1"/>
           <p:nvPr/>
         </p:nvSpPr>
@@ -18875,7 +19343,7 @@
       </p:sp>
       <p:sp>
         <p:nvSpPr>
-          <p:cNvPr id="9" name="进度4"/>
+          <p:cNvPr id="10" name="进度4"/>
           <p:cNvSpPr/>
           <p:nvPr/>
         </p:nvSpPr>
@@ -18902,7 +19370,7 @@
       </p:sp>
       <p:sp>
         <p:nvSpPr>
-          <p:cNvPr id="10" name="进度文字4"/>
+          <p:cNvPr id="11" name="进度文字4"/>
           <p:cNvSpPr txBox="1"/>
           <p:nvPr/>
         </p:nvSpPr>
@@ -18938,7 +19406,7 @@
       </p:sp>
       <p:sp>
         <p:nvSpPr>
-          <p:cNvPr id="11" name="进度5"/>
+          <p:cNvPr id="12" name="进度5"/>
           <p:cNvSpPr/>
           <p:nvPr/>
         </p:nvSpPr>
@@ -18965,7 +19433,7 @@
       </p:sp>
       <p:sp>
         <p:nvSpPr>
-          <p:cNvPr id="12" name="进度文字5"/>
+          <p:cNvPr id="13" name="进度文字5"/>
           <p:cNvSpPr txBox="1"/>
           <p:nvPr/>
         </p:nvSpPr>
@@ -19001,7 +19469,7 @@
       </p:sp>
       <p:graphicFrame>
         <p:nvGraphicFramePr>
-          <p:cNvPr id="13" name="分国家寻找时长图" descr=""/>
+          <p:cNvPr id="14" name="分国家寻找时长图" descr=""/>
           <p:cNvGraphicFramePr/>
           <p:nvPr/>
         </p:nvGraphicFramePr>
@@ -19017,7 +19485,7 @@
       </p:graphicFrame>
       <p:sp>
         <p:nvSpPr>
-          <p:cNvPr id="14" name="事实卡"/>
+          <p:cNvPr id="15" name="事实卡"/>
           <p:cNvSpPr/>
           <p:nvPr/>
         </p:nvSpPr>
@@ -19044,7 +19512,7 @@
       </p:sp>
       <p:sp>
         <p:nvSpPr>
-          <p:cNvPr id="15" name="事实标签"/>
+          <p:cNvPr id="16" name="事实标签"/>
           <p:cNvSpPr/>
           <p:nvPr/>
         </p:nvSpPr>
@@ -19071,7 +19539,7 @@
       </p:sp>
       <p:sp>
         <p:nvSpPr>
-          <p:cNvPr id="16" name="事实标签文字"/>
+          <p:cNvPr id="17" name="事实标签文字"/>
           <p:cNvSpPr txBox="1"/>
           <p:nvPr/>
         </p:nvSpPr>
@@ -19107,7 +19575,7 @@
       </p:sp>
       <p:sp>
         <p:nvSpPr>
-          <p:cNvPr id="17" name="事实内容"/>
+          <p:cNvPr id="18" name="事实内容"/>
           <p:cNvSpPr txBox="1"/>
           <p:nvPr/>
         </p:nvSpPr>
@@ -19135,7 +19603,7 @@
                   <a:schemeClr val="tx1"/>
                 </a:solidFill>
               </a:rPr>
-              <a:t>“平均 14 分钟”“54% 可能退订”均来自六国调查；报告将 14 分钟置于描述美国收视情况的图表中。</a:t>
+              <a:t>“14 分钟”“54% 可能退订”均为六国数据，却置于美国收视图表中。</a:t>
             </a:r>
             <a:endParaRPr lang="en-US" sz="1400" dirty="0"/>
           </a:p>
@@ -19143,7 +19611,7 @@
       </p:sp>
       <p:sp>
         <p:nvSpPr>
-          <p:cNvPr id="18" name="下箭头"/>
+          <p:cNvPr id="19" name="下箭头"/>
           <p:cNvSpPr txBox="1"/>
           <p:nvPr/>
         </p:nvSpPr>
@@ -19179,7 +19647,7 @@
       </p:sp>
       <p:sp>
         <p:nvSpPr>
-          <p:cNvPr id="19" name="原因卡"/>
+          <p:cNvPr id="20" name="原因卡"/>
           <p:cNvSpPr/>
           <p:nvPr/>
         </p:nvSpPr>
@@ -19206,7 +19674,7 @@
       </p:sp>
       <p:sp>
         <p:nvSpPr>
-          <p:cNvPr id="20" name="原因标签"/>
+          <p:cNvPr id="21" name="原因标签"/>
           <p:cNvSpPr/>
           <p:nvPr/>
         </p:nvSpPr>
@@ -19233,7 +19701,7 @@
       </p:sp>
       <p:sp>
         <p:nvSpPr>
-          <p:cNvPr id="21" name="原因标签文字"/>
+          <p:cNvPr id="22" name="原因标签文字"/>
           <p:cNvSpPr txBox="1"/>
           <p:nvPr/>
         </p:nvSpPr>
@@ -19269,7 +19737,7 @@
       </p:sp>
       <p:sp>
         <p:nvSpPr>
-          <p:cNvPr id="22" name="原因内容"/>
+          <p:cNvPr id="23" name="原因内容"/>
           <p:cNvSpPr txBox="1"/>
           <p:nvPr/>
         </p:nvSpPr>
@@ -19297,7 +19765,7 @@
                   <a:schemeClr val="tx1"/>
                 </a:solidFill>
               </a:rPr>
-              <a:t>14 分钟为六国简单平均（每国 500 人、等权）；美国为 12 分钟，法国的 26 分钟拉高了均值。报告未标明国家口径。</a:t>
+              <a:t>14 分钟为六国等权简单平均；法国 26 分钟拉高均值，美国为 12 分钟。</a:t>
             </a:r>
             <a:endParaRPr lang="en-US" sz="1400" dirty="0"/>
           </a:p>
@@ -19305,7 +19773,7 @@
       </p:sp>
       <p:sp>
         <p:nvSpPr>
-          <p:cNvPr id="23" name="下箭头"/>
+          <p:cNvPr id="24" name="下箭头"/>
           <p:cNvSpPr txBox="1"/>
           <p:nvPr/>
         </p:nvSpPr>
@@ -19341,7 +19809,7 @@
       </p:sp>
       <p:sp>
         <p:nvSpPr>
-          <p:cNvPr id="24" name="影响卡"/>
+          <p:cNvPr id="25" name="影响卡"/>
           <p:cNvSpPr/>
           <p:nvPr/>
         </p:nvSpPr>
@@ -19368,7 +19836,7 @@
       </p:sp>
       <p:sp>
         <p:nvSpPr>
-          <p:cNvPr id="25" name="影响标签"/>
+          <p:cNvPr id="26" name="影响标签"/>
           <p:cNvSpPr/>
           <p:nvPr/>
         </p:nvSpPr>
@@ -19395,7 +19863,7 @@
       </p:sp>
       <p:sp>
         <p:nvSpPr>
-          <p:cNvPr id="26" name="影响标签文字"/>
+          <p:cNvPr id="27" name="影响标签文字"/>
           <p:cNvSpPr txBox="1"/>
           <p:nvPr/>
         </p:nvSpPr>
@@ -19431,7 +19899,7 @@
       </p:sp>
       <p:sp>
         <p:nvSpPr>
-          <p:cNvPr id="27" name="影响内容"/>
+          <p:cNvPr id="28" name="影响内容"/>
           <p:cNvSpPr txBox="1"/>
           <p:nvPr/>
         </p:nvSpPr>
@@ -19459,7 +19927,7 @@
                   <a:schemeClr val="tx1"/>
                 </a:solidFill>
               </a:rPr>
-              <a:t>读者会高估美国用户的检索困难；“50% 的美国观众考虑退订”在原始报告中仅见六国均值 49%。</a:t>
+              <a:t>高估美国用户的检索困难；“50% 美国观众考虑退订”原文仅见六国 49%。</a:t>
             </a:r>
             <a:endParaRPr lang="en-US" sz="1400" dirty="0"/>
           </a:p>
@@ -19467,7 +19935,7 @@
       </p:sp>
       <p:sp>
         <p:nvSpPr>
-          <p:cNvPr id="28" name="来源说明"/>
+          <p:cNvPr id="29" name="来源说明"/>
           <p:cNvSpPr txBox="1"/>
           <p:nvPr/>
         </p:nvSpPr>

--- a/Gracenote报告解读_课堂汇报.pptx
+++ b/Gracenote报告解读_课堂汇报.pptx
@@ -120,13 +120,13 @@
   <p:extLst>
     <p:ext uri="{521415D9-36F7-43E2-AB2F-B90AF26B5E84}">
       <p14:sectionLst xmlns:p14="http://schemas.microsoft.com/office/powerpoint/2010/main">
-        <p14:section name="开场" id="{4f627cb9-d809-8f6f-e1c3-1c9d89cf9fb2}">
+        <p14:section name="开场" id="{ae1897af-1cd9-c287-f9c3-001bdc18e597}">
           <p14:sldIdLst>
             <p14:sldId id="256"/>
             <p14:sldId id="257"/>
           </p14:sldIdLst>
         </p14:section>
-        <p14:section name="报告介绍" id="{99f81809-54be-4ea0-971a-0082ebf230f4}">
+        <p14:section name="报告介绍" id="{afa19afb-e8fc-dc17-ef62-8025774af16b}">
           <p14:sldIdLst>
             <p14:sldId id="258"/>
             <p14:sldId id="259"/>
@@ -134,7 +134,7 @@
             <p14:sldId id="261"/>
           </p14:sldIdLst>
         </p14:section>
-        <p14:section name="方法评价" id="{416134a8-8737-1f41-7fdb-f8afd7f563e6}">
+        <p14:section name="方法评价" id="{8fca11d5-64a1-f392-853a-581e5e94b38a}">
           <p14:sldIdLst>
             <p14:sldId id="262"/>
             <p14:sldId id="263"/>
@@ -143,12 +143,12 @@
             <p14:sldId id="266"/>
           </p14:sldIdLst>
         </p14:section>
-        <p14:section name="总结" id="{e8d22a79-b18f-928f-fbe6-e4747363fd09}">
+        <p14:section name="总结" id="{71a53c45-c2c8-630a-07d4-4192f3b8e689}">
           <p14:sldIdLst>
             <p14:sldId id="267"/>
           </p14:sldIdLst>
         </p14:section>
-        <p14:section name="附录（备问）" id="{9241cb5f-220d-0e2c-d48f-c6c176bc0de3}">
+        <p14:section name="附录（备问）" id="{eceb5e98-d75d-d3c8-9602-5ef0f73d470d}">
           <p14:sldIdLst>
             <p14:sldId id="268"/>
             <p14:sldId id="269"/>
@@ -917,7 +917,7 @@
           <a:p>
             <a:r>
               <a:rPr lang="en-US" dirty="0"/>
-              <a:t>【约 25 秒】各位同学好。我汇报的是尼尔森旗下 Gracenote 公司 2026 年的报告《AI 时代的电视搜索与内容发现》。报告称 54% 的 13 至 14 岁受访者每天使用 AI。这一数据代表哪类人群，是本次汇报的出发点。</a:t>
+              <a:t>【约 20 秒】大家好。我读的是尼尔森旗下 Gracenote 今年 4 月的一份报告。里面有个很醒目的数字：13 到 14 岁的受访者，54% 每天都用 AI。我想从这个数字出发，看看它到底代表了哪些人。</a:t>
             </a:r>
             <a:endParaRPr lang="en-US" dirty="0"/>
           </a:p>
@@ -1005,7 +1005,7 @@
           <a:p>
             <a:r>
               <a:rPr lang="en-US" dirty="0"/>
-              <a:t>【约 25 秒】维度三，调查时间：两项调查分母不同，“加速”的结论不成立。报告将皮尤 2025 年秋的 30% 与自身 2026 年初的 54% 对比；但皮尤是全体青少年，同为 13 至 14 岁仅 24%。统一为使用者口径后，差距约 10 个百分点。</a:t>
+              <a:t>【约 25 秒】第三，比较的时间和对象。报告拿皮尤去年秋天的 30%，比自己今年初的 54%，说使用在“加速”。可皮尤问的是全体青少年，同样 13 到 14 岁只有 24%；报告只问了 AI 用户。分母统一后，差距约 10 个百分点。</a:t>
             </a:r>
             <a:endParaRPr lang="en-US" dirty="0"/>
           </a:p>
@@ -1093,7 +1093,7 @@
           <a:p>
             <a:r>
               <a:rPr lang="en-US" dirty="0"/>
-              <a:t>【约 20 秒】维度四，研究方法：四类异质数据不足以证明“检索困难导致退订”。这四类是退订意向、行业退订率、市场预测和 AI 测试，对象和性质各不相同，又无追踪或实验设计，只能提示可能相关。</a:t>
+              <a:t>【约 20 秒】最后是方法。“找不到就退订”这一环，靠的是四种性质不同的数据：有的是想法，有的是实际行为，有的只是预测。报告也没有跟踪同一批人，所以这些数据能说明两件事相关，说明不了谁导致了谁。</a:t>
             </a:r>
             <a:endParaRPr lang="en-US" dirty="0"/>
           </a:p>
@@ -1181,7 +1181,7 @@
           <a:p>
             <a:r>
               <a:rPr lang="en-US" dirty="0"/>
-              <a:t>【约 30 秒】回到论证链：两环部分成立，两环证据不足。前两环只适用于 AI 用户；第三环口径混用、因果未证；第四环尚未检验。因此，报告可作为趋势参考，不宜作为精确估计或因果证据。最后提出一个问题：如何设计调查，才能检验“检索困难导致退订”？谢谢。</a:t>
+              <a:t>【约 30 秒】回到这条推理链：前两环大体成立，但只适用于 AI 用户；后两环证据还不够。报告把样本量和时间交代得很清楚，数字也经得起复算；只是一个醒目的数字，常常把它怎么测出来的省略了。最后留个问题：要验证“找不到就退订”，调查该怎么设计？谢谢。</a:t>
             </a:r>
             <a:endParaRPr lang="en-US" dirty="0"/>
           </a:p>
@@ -1445,7 +1445,7 @@
           <a:p>
             <a:r>
               <a:rPr lang="en-US" dirty="0"/>
-              <a:t>【约 10 秒】汇报分为五部分。核心观点是：报告的趋势判断有参考价值，但论证链的关键环节证据不足。</a:t>
+              <a:t>【约 15 秒】我的看法先放在前面：报告看到的趋势大体可信，但它把一群 AI 用户的回答，推成了更大人群的结论。下面按背景、设计、内容、评价、总结五部分展开。</a:t>
             </a:r>
             <a:endParaRPr lang="en-US" dirty="0"/>
           </a:p>
@@ -1533,7 +1533,7 @@
           <a:p>
             <a:r>
               <a:rPr lang="en-US" dirty="0"/>
-              <a:t>【约 30 秒】研究背景是：流媒体平台增多、内容分散，用户检索节目的难度上升，AI 也成为新的检索工具。报告由此提出三个问题：用户如何使用 AI、检索困难是否影响订阅、用户是否信任 AI。另需注意，Gracenote 的主营业务正是节目数据服务。</a:t>
+              <a:t>【约 20 秒】先说背景。平台越来越多，节目越来越难找，不少人干脆直接问 AI。报告想回答三件事：怎么用 AI 找信息，找不到节目会不会退订，信不信 AI。另外，Gracenote 本身就做节目数据。</a:t>
             </a:r>
             <a:endParaRPr lang="en-US" dirty="0"/>
           </a:p>
@@ -1621,7 +1621,7 @@
           <a:p>
             <a:r>
               <a:rPr lang="en-US" dirty="0"/>
-              <a:t>【约 25 秒】报告的结论主要来自两项线上问卷。调查一于 2026 年初进行，对象是 4003 名 13 至 79 岁的美国 AI 聊天机器人用户；调查二于 2025 年夏季进行，覆盖六国，每国 500 名流媒体用户。两项调查均未公开抽样方式。</a:t>
+              <a:t>【约 20 秒】报告的大部分结论来自两份线上问卷：一份今年年初问了 4003 名美国 AI 用户，13 到 79 岁；另一份去年夏天在六个国家各问了 500 名流媒体用户。样本怎么抽的，两份都没有交代。</a:t>
             </a:r>
             <a:endParaRPr lang="en-US" dirty="0"/>
           </a:p>
@@ -1709,7 +1709,7 @@
           <a:p>
             <a:r>
               <a:rPr lang="en-US" dirty="0"/>
-              <a:t>【约 30 秒】第一组发现是 AI 使用增加、信任不足：13 至 14 岁的 AI 用户中 54% 每天使用，但 75% 的受访者会核查 AI 的回答。报告的解释是：AI 能给出直接、完整的答案，因而受到偏好；但大模型可能生成看似合理的错误信息，因而难以被完全信任。</a:t>
+              <a:t>【约 25 秒】第一组发现：年轻人越来越依赖 AI，却不完全信任它。13 到 14 岁的 AI 用户里，54% 每天都用，但也有 75% 的人会回头核对。报告的解释是，AI 回答直接，所以受欢迎；可它也会给出看似合理的错误答案，所以还得再查一遍。</a:t>
             </a:r>
             <a:endParaRPr lang="en-US" dirty="0"/>
           </a:p>
@@ -1797,7 +1797,7 @@
           <a:p>
             <a:r>
               <a:rPr lang="en-US" dirty="0"/>
-              <a:t>【约 25 秒】第二组发现是内容分散导致检索困难：联网电视已占美国电视时长的 54%，用户平均花 14 分钟找节目，18 至 34 岁中 54% 表示可能因此退订，而 AI 只答对约三分之二的播出平台。报告据此主张 AI 须接入可信的行业数据。</a:t>
+              <a:t>【约 25 秒】第二组发现是一条推理链：内容分散，用户平均要花 14 分钟找节目；18 到 34 岁的人里，54% 说找不到可能会退订；而 AI 只能答对约三分之二的播出平台。所以报告主张，AI 需要接入可靠的行业数据。</a:t>
             </a:r>
             <a:endParaRPr lang="en-US" dirty="0"/>
           </a:p>
@@ -1885,7 +1885,7 @@
           <a:p>
             <a:r>
               <a:rPr lang="en-US" dirty="0"/>
-              <a:t>【约 15 秒】报告的论证可以整理为一条链：依赖 AI、不信任 AI、检索困难导致退订、AI 须接入可信数据。下面参照课上春晚案例的四个维度，逐环检验。</a:t>
+              <a:t>【约 15 秒】这条推理有四个环节。同一个问题，问的是谁、问哪里的人、什么时候问、怎么问，答案都可能不一样。我就从这四个角度，逐环看证据站不站得住。</a:t>
             </a:r>
             <a:endParaRPr lang="en-US" dirty="0"/>
           </a:p>
@@ -1973,7 +1973,7 @@
           <a:p>
             <a:r>
               <a:rPr lang="en-US" dirty="0"/>
-              <a:t>【约 25 秒】维度一，调查对象：样本仅为 AI 用户，结论却推及“美国人”。原因是样本以“使用 AI”为筛选条件。因此，54% 和 75% 只能理解为 AI 用户中的比例，这与课上 Durex 网络调查的问题相同。</a:t>
+              <a:t>【约 20 秒】先看问的是谁。4003 名受访者都是 AI 聊天机器人用户，样本本身就偏向会用 AI 的人，报告却常把结论说成“美国人”。网络样本的结构不等于总体，54% 和 75% 只能算 AI 用户内部的比例。</a:t>
             </a:r>
             <a:endParaRPr lang="en-US" dirty="0"/>
           </a:p>
@@ -2061,7 +2061,7 @@
           <a:p>
             <a:r>
               <a:rPr lang="en-US" dirty="0"/>
-              <a:t>【约 20 秒】维度二，研究总体：“14 分钟”是六国均值，美国实为 12 分钟。它是六国简单平均，法国的 26 分钟拉高了均值；报告却把它放进描述美国收视的图表，会使读者高估美国用户的检索困难。</a:t>
+              <a:t>【约 20 秒】再看是哪里的人。“平均 14 分钟”其实来自六国调查，是六个国家直接平均出来的；美国是 12 分钟，法国是 26 分钟。报告把它放进一张讲美国收视的图里，读者很容易以为美国人也要找 14 分钟。</a:t>
             </a:r>
             <a:endParaRPr lang="en-US" dirty="0"/>
           </a:p>
@@ -3160,7 +3160,7 @@
                   <a:schemeClr val="accent3"/>
                 </a:solidFill>
               </a:rPr>
-              <a:t>04  方法评价 · 维度三  调查时间</a:t>
+              <a:t>04  方法评价 · 调查时间</a:t>
             </a:r>
             <a:endParaRPr lang="en-US" sz="1400" dirty="0"/>
           </a:p>
@@ -3198,7 +3198,7 @@
                   <a:schemeClr val="tx2"/>
                 </a:solidFill>
               </a:rPr>
-              <a:t>两项调查分母不同，“加速”结论不成立</a:t>
+              <a:t>分母不一样，“加速”也就无从谈起</a:t>
             </a:r>
             <a:endParaRPr lang="en-US" sz="3000" dirty="0"/>
           </a:p>
@@ -3628,7 +3628,21 @@
                   <a:schemeClr val="tx1"/>
                 </a:solidFill>
               </a:rPr>
-              <a:t>以皮尤 30% 对比本报告 54%，称使用“加速”</a:t>
+              <a:t>拿皮尤去年秋的 30%，</a:t>
+            </a:r>
+            <a:endParaRPr lang="en-US" sz="1800" dirty="0"/>
+          </a:p>
+          <a:p>
+            <a:pPr indent="0" marL="0">
+              <a:buNone/>
+            </a:pPr>
+            <a:r>
+              <a:rPr lang="en-US" sz="1800" dirty="0">
+                <a:solidFill>
+                  <a:schemeClr val="tx1"/>
+                </a:solidFill>
+              </a:rPr>
+              <a:t>比本报告今年初的 54%</a:t>
             </a:r>
             <a:endParaRPr lang="en-US" sz="1800" dirty="0"/>
           </a:p>
@@ -3754,7 +3768,21 @@
                   <a:schemeClr val="tx1"/>
                 </a:solidFill>
               </a:rPr>
-              <a:t>分母不同：全体青少年 vs AI 用户</a:t>
+              <a:t>皮尤问全体青少年，</a:t>
+            </a:r>
+            <a:endParaRPr lang="en-US" sz="1800" dirty="0"/>
+          </a:p>
+          <a:p>
+            <a:pPr indent="0" marL="0">
+              <a:buNone/>
+            </a:pPr>
+            <a:r>
+              <a:rPr lang="en-US" sz="1800" dirty="0">
+                <a:solidFill>
+                  <a:schemeClr val="tx1"/>
+                </a:solidFill>
+              </a:rPr>
+              <a:t>本报告只问 AI 用户</a:t>
             </a:r>
             <a:endParaRPr lang="en-US" sz="1800" dirty="0"/>
           </a:p>
@@ -3880,7 +3908,21 @@
                   <a:schemeClr val="tx1"/>
                 </a:solidFill>
               </a:rPr>
-              <a:t>同一口径下差距仅约 10 个百分点</a:t>
+              <a:t>分母统一后，</a:t>
+            </a:r>
+            <a:endParaRPr lang="en-US" sz="1800" dirty="0"/>
+          </a:p>
+          <a:p>
+            <a:pPr indent="0" marL="0">
+              <a:buNone/>
+            </a:pPr>
+            <a:r>
+              <a:rPr lang="en-US" sz="1800" dirty="0">
+                <a:solidFill>
+                  <a:schemeClr val="tx1"/>
+                </a:solidFill>
+              </a:rPr>
+              <a:t>差距只剩约 10 个百分点</a:t>
             </a:r>
             <a:endParaRPr lang="en-US" sz="1800" dirty="0"/>
           </a:p>
@@ -4022,7 +4064,7 @@
                   <a:schemeClr val="accent3"/>
                 </a:solidFill>
               </a:rPr>
-              <a:t>04  方法评价 · 维度四  研究方法</a:t>
+              <a:t>04  方法评价 · 研究方法</a:t>
             </a:r>
             <a:endParaRPr lang="en-US" sz="1400" dirty="0"/>
           </a:p>
@@ -4060,7 +4102,7 @@
                   <a:schemeClr val="tx2"/>
                 </a:solidFill>
               </a:rPr>
-              <a:t>四类数据不足以证明“检索困难导致退订”</a:t>
+              <a:t>几类不同的数据，拼不出“找不到就退订”</a:t>
             </a:r>
             <a:endParaRPr lang="en-US" sz="3000" dirty="0"/>
           </a:p>
@@ -4594,7 +4636,21 @@
                   <a:schemeClr val="tx1"/>
                 </a:solidFill>
               </a:rPr>
-              <a:t>因果链由四类不同数据拼接而成</a:t>
+              <a:t>意愿、退订率、预测、测试</a:t>
+            </a:r>
+            <a:endParaRPr lang="en-US" sz="1800" dirty="0"/>
+          </a:p>
+          <a:p>
+            <a:pPr indent="0" marL="0">
+              <a:buNone/>
+            </a:pPr>
+            <a:r>
+              <a:rPr lang="en-US" sz="1800" dirty="0">
+                <a:solidFill>
+                  <a:schemeClr val="tx1"/>
+                </a:solidFill>
+              </a:rPr>
+              <a:t>被串成一条链</a:t>
             </a:r>
             <a:endParaRPr lang="en-US" sz="1800" dirty="0"/>
           </a:p>
@@ -4720,7 +4776,21 @@
                   <a:schemeClr val="tx1"/>
                 </a:solidFill>
               </a:rPr>
-              <a:t>数据性质不同，且无追踪或实验</a:t>
+              <a:t>有的是想法，有的是行为，</a:t>
+            </a:r>
+            <a:endParaRPr lang="en-US" sz="1800" dirty="0"/>
+          </a:p>
+          <a:p>
+            <a:pPr indent="0" marL="0">
+              <a:buNone/>
+            </a:pPr>
+            <a:r>
+              <a:rPr lang="en-US" sz="1800" dirty="0">
+                <a:solidFill>
+                  <a:schemeClr val="tx1"/>
+                </a:solidFill>
+              </a:rPr>
+              <a:t>有的只是预测</a:t>
             </a:r>
             <a:endParaRPr lang="en-US" sz="1800" dirty="0"/>
           </a:p>
@@ -4846,7 +4916,21 @@
                   <a:schemeClr val="tx1"/>
                 </a:solidFill>
               </a:rPr>
-              <a:t>只能提示相关，不能证明因果</a:t>
+              <a:t>能说明相关，</a:t>
+            </a:r>
+            <a:endParaRPr lang="en-US" sz="1800" dirty="0"/>
+          </a:p>
+          <a:p>
+            <a:pPr indent="0" marL="0">
+              <a:buNone/>
+            </a:pPr>
+            <a:r>
+              <a:rPr lang="en-US" sz="1800" dirty="0">
+                <a:solidFill>
+                  <a:schemeClr val="tx1"/>
+                </a:solidFill>
+              </a:rPr>
+              <a:t>说明不了谁导致了谁</a:t>
             </a:r>
             <a:endParaRPr lang="en-US" sz="1800" dirty="0"/>
           </a:p>
@@ -5026,7 +5110,7 @@
                   <a:schemeClr val="bg1"/>
                 </a:solidFill>
               </a:rPr>
-              <a:t>两环部分成立、两环证据不足：结论应限于 AI 用户</a:t>
+              <a:t>趋势可以参考，结论需要收窄</a:t>
             </a:r>
             <a:endParaRPr lang="en-US" sz="3000" dirty="0"/>
           </a:p>
@@ -5341,7 +5425,7 @@
                   <a:schemeClr val="bg1"/>
                 </a:solidFill>
               </a:rPr>
-              <a:t>③ 检索难致退订</a:t>
+              <a:t>③ 难找致退订</a:t>
             </a:r>
             <a:endParaRPr lang="en-US" sz="2000" dirty="0"/>
           </a:p>
@@ -5467,7 +5551,7 @@
                   <a:schemeClr val="bg1"/>
                 </a:solidFill>
               </a:rPr>
-              <a:t>④ 接入可信数据</a:t>
+              <a:t>④ 接入可靠数据</a:t>
             </a:r>
             <a:endParaRPr lang="en-US" sz="2000" dirty="0"/>
           </a:p>
@@ -5566,7 +5650,7 @@
                   <a:schemeClr val="accent4"/>
                 </a:solidFill>
               </a:rPr>
-              <a:t>优点：</a:t>
+              <a:t>可取之处：</a:t>
             </a:r>
             <a:pPr indent="0" marL="0">
               <a:buNone/>
@@ -5577,7 +5661,7 @@
                   <a:schemeClr val="accent6"/>
                 </a:solidFill>
               </a:rPr>
-              <a:t>公开了样本量、时间与年龄范围，图表数据经复核基本一致。</a:t>
+              <a:t>样本量、时间、年龄都交代清楚，图里的数字经得起复算。</a:t>
             </a:r>
             <a:endParaRPr lang="en-US" sz="1600" dirty="0"/>
           </a:p>
@@ -5643,7 +5727,7 @@
                   <a:schemeClr val="accent3"/>
                 </a:solidFill>
               </a:rPr>
-              <a:t>讨论问题</a:t>
+              <a:t>留给大家</a:t>
             </a:r>
             <a:endParaRPr lang="en-US" sz="1600" dirty="0"/>
           </a:p>
@@ -5660,7 +5744,7 @@
                   <a:schemeClr val="tx2"/>
                 </a:solidFill>
               </a:rPr>
-              <a:t>如何设计调查，才能检验“检索困难导致退订”？</a:t>
+              <a:t>要验证“找不到就退订”，调查该怎么设计？</a:t>
             </a:r>
             <a:endParaRPr lang="en-US" sz="1600" dirty="0"/>
           </a:p>
@@ -5804,7 +5888,7 @@
                   <a:schemeClr val="tx2"/>
                 </a:solidFill>
               </a:rPr>
-              <a:t>11 个数据来源中，核心两项问卷最不透明</a:t>
+              <a:t>11 个来源里，报告自己的两份问卷最不透明</a:t>
             </a:r>
             <a:endParaRPr lang="en-US" sz="3000" dirty="0"/>
           </a:p>
@@ -7293,7 +7377,7 @@
                   <a:schemeClr val="tx2"/>
                 </a:solidFill>
               </a:rPr>
-              <a:t>多处引用与原始来源的口径不一致</a:t>
+              <a:t>几处引用，和原始来源的说法并不一致</a:t>
             </a:r>
             <a:endParaRPr lang="en-US" sz="3000" dirty="0"/>
           </a:p>
@@ -8371,7 +8455,7 @@
                   <a:schemeClr val="tx2"/>
                 </a:solidFill>
               </a:rPr>
-              <a:t>趋势可参考，但论证链关键环节证据不足</a:t>
+              <a:t>趋势大体可信，但结论推得太远</a:t>
             </a:r>
             <a:endParaRPr lang="en-US" sz="3000" dirty="0"/>
           </a:p>
@@ -8947,7 +9031,7 @@
                   <a:schemeClr val="accent4"/>
                 </a:solidFill>
               </a:rPr>
-              <a:t>核心观点</a:t>
+              <a:t>我的判断</a:t>
             </a:r>
             <a:endParaRPr lang="en-US" sz="1600" dirty="0"/>
           </a:p>
@@ -8964,7 +9048,7 @@
                   <a:schemeClr val="bg1"/>
                 </a:solidFill>
               </a:rPr>
-              <a:t>报告的趋势判断有参考价值；但论证的关键环节证据不足，结论应限于调查对象。</a:t>
+              <a:t>报告看到的趋势大体可信；问题在于，它把一群 AI 用户的回答，推成了更大人群的结论。</a:t>
             </a:r>
             <a:endParaRPr lang="en-US" sz="1600" dirty="0"/>
           </a:p>
@@ -9108,7 +9192,7 @@
                   <a:schemeClr val="tx2"/>
                 </a:solidFill>
               </a:rPr>
-              <a:t>内容分散使检索变难，AI 能否成为新入口？</a:t>
+              <a:t>节目越来越难找，AI 会不会成为新的入口？</a:t>
             </a:r>
             <a:endParaRPr lang="en-US" sz="3000" dirty="0"/>
           </a:p>
@@ -9207,7 +9291,7 @@
                   <a:schemeClr val="tx2"/>
                 </a:solidFill>
               </a:rPr>
-              <a:t>使用行为</a:t>
+              <a:t>怎么用 AI</a:t>
             </a:r>
             <a:endParaRPr lang="en-US" sz="2600" dirty="0"/>
           </a:p>
@@ -9243,7 +9327,7 @@
                   <a:schemeClr val="tx1"/>
                 </a:solidFill>
               </a:rPr>
-              <a:t>各年龄群体如何用 AI 检索信息？</a:t>
+              <a:t>不同年龄的人，如何用 AI 找信息？</a:t>
             </a:r>
             <a:endParaRPr lang="en-US" sz="1800" dirty="0"/>
           </a:p>
@@ -9342,7 +9426,7 @@
                   <a:schemeClr val="tx2"/>
                 </a:solidFill>
               </a:rPr>
-              <a:t>检索困难</a:t>
+              <a:t>找不到会怎样</a:t>
             </a:r>
             <a:endParaRPr lang="en-US" sz="2600" dirty="0"/>
           </a:p>
@@ -9378,7 +9462,7 @@
                   <a:schemeClr val="tx1"/>
                 </a:solidFill>
               </a:rPr>
-              <a:t>内容分散是否影响订阅？</a:t>
+              <a:t>节目难找，会不会让人退订？</a:t>
             </a:r>
             <a:endParaRPr lang="en-US" sz="1800" dirty="0"/>
           </a:p>
@@ -9477,7 +9561,7 @@
                   <a:schemeClr val="tx2"/>
                 </a:solidFill>
               </a:rPr>
-              <a:t>信任程度</a:t>
+              <a:t>信不信 AI</a:t>
             </a:r>
             <a:endParaRPr lang="en-US" sz="2600" dirty="0"/>
           </a:p>
@@ -9513,7 +9597,7 @@
                   <a:schemeClr val="tx1"/>
                 </a:solidFill>
               </a:rPr>
-              <a:t>用户是否信任 AI 的回答？</a:t>
+              <a:t>人们是否相信 AI 给的答案？</a:t>
             </a:r>
             <a:endParaRPr lang="en-US" sz="1800" dirty="0"/>
           </a:p>
@@ -9587,7 +9671,7 @@
                   <a:schemeClr val="bg1"/>
                 </a:solidFill>
               </a:rPr>
-              <a:t>Gracenote，尼尔森旗下，主营节目数据服务——与报告主张直接相关。</a:t>
+              <a:t>Gracenote 隶属尼尔森，本身就做节目数据；报告最后的建议，恰好落在它自己的业务上。</a:t>
             </a:r>
             <a:endParaRPr lang="en-US" sz="1600" dirty="0"/>
           </a:p>
@@ -9731,7 +9815,7 @@
                   <a:schemeClr val="tx2"/>
                 </a:solidFill>
               </a:rPr>
-              <a:t>报告结论主要来自两项线上问卷</a:t>
+              <a:t>两份线上问卷，撑起了报告的大部分结论</a:t>
             </a:r>
             <a:endParaRPr lang="en-US" sz="3000" dirty="0"/>
           </a:p>
@@ -10541,7 +10625,7 @@
                   <a:schemeClr val="tx1"/>
                 </a:solidFill>
               </a:rPr>
-              <a:t>两项调查均未公开抽样方式。另引用尼尔森、皮尤等共 11 个来源（见附录）。</a:t>
+              <a:t>样本如何抽取，两份调查都没有交代。另引用尼尔森、皮尤等共 11 个来源（见附录）。</a:t>
             </a:r>
             <a:endParaRPr lang="en-US" sz="1800" dirty="0"/>
           </a:p>
@@ -10685,7 +10769,7 @@
                   <a:schemeClr val="tx2"/>
                 </a:solidFill>
               </a:rPr>
-              <a:t>报告发现：年轻用户依赖 AI，但信任不足</a:t>
+              <a:t>年轻人越来越依赖 AI，却并不完全信任它</a:t>
             </a:r>
             <a:endParaRPr lang="en-US" sz="3000" dirty="0"/>
           </a:p>
@@ -10801,7 +10885,7 @@
                   <a:schemeClr val="tx1"/>
                 </a:solidFill>
               </a:rPr>
-              <a:t>每天使用</a:t>
+              <a:t>每天都用</a:t>
             </a:r>
             <a:endParaRPr lang="en-US" sz="2000" dirty="0"/>
           </a:p>
@@ -10903,7 +10987,7 @@
                   <a:schemeClr val="tx1"/>
                 </a:solidFill>
               </a:rPr>
-              <a:t>受访者会核查</a:t>
+              <a:t>受访者会回头</a:t>
             </a:r>
             <a:endParaRPr lang="en-US" sz="2000" dirty="0"/>
           </a:p>
@@ -10917,7 +11001,7 @@
                   <a:schemeClr val="tx1"/>
                 </a:solidFill>
               </a:rPr>
-              <a:t>AI 的回答</a:t>
+              <a:t>核对 AI 的答案</a:t>
             </a:r>
             <a:endParaRPr lang="en-US" sz="2000" dirty="0"/>
           </a:p>
@@ -11016,7 +11100,7 @@
                   <a:schemeClr val="tx1"/>
                 </a:solidFill>
               </a:rPr>
-              <a:t>AI 回答直接、完整、可追问</a:t>
+              <a:t>AI 能直接给出答案，还能接着追问</a:t>
             </a:r>
             <a:endParaRPr lang="en-US" sz="1800" dirty="0"/>
           </a:p>
@@ -11060,7 +11144,7 @@
       </p:sp>
       <p:sp>
         <p:nvSpPr>
-          <p:cNvPr id="14" name="标签：用户偏好 AI"/>
+          <p:cNvPr id="14" name="标签：所以受欢迎"/>
           <p:cNvSpPr/>
           <p:nvPr/>
         </p:nvSpPr>
@@ -11087,7 +11171,7 @@
       </p:sp>
       <p:sp>
         <p:nvSpPr>
-          <p:cNvPr id="15" name="标签文字：用户偏好 AI"/>
+          <p:cNvPr id="15" name="标签文字：所以受欢迎"/>
           <p:cNvSpPr txBox="1"/>
           <p:nvPr/>
         </p:nvSpPr>
@@ -11115,7 +11199,7 @@
                   <a:schemeClr val="bg1"/>
                 </a:solidFill>
               </a:rPr>
-              <a:t>用户偏好 AI</a:t>
+              <a:t>所以受欢迎</a:t>
             </a:r>
             <a:endParaRPr lang="en-US" sz="1700" dirty="0"/>
           </a:p>
@@ -11178,7 +11262,7 @@
                   <a:schemeClr val="tx1"/>
                 </a:solidFill>
               </a:rPr>
-              <a:t>大模型可能生成看似合理的错误信息</a:t>
+              <a:t>但它也会给出看似合理的错误答案</a:t>
             </a:r>
             <a:endParaRPr lang="en-US" sz="1800" dirty="0"/>
           </a:p>
@@ -11222,7 +11306,7 @@
       </p:sp>
       <p:sp>
         <p:nvSpPr>
-          <p:cNvPr id="19" name="标签：用户难以完全信任"/>
+          <p:cNvPr id="19" name="标签：所以还要再核对"/>
           <p:cNvSpPr/>
           <p:nvPr/>
         </p:nvSpPr>
@@ -11249,7 +11333,7 @@
       </p:sp>
       <p:sp>
         <p:nvSpPr>
-          <p:cNvPr id="20" name="标签文字：用户难以完全信任"/>
+          <p:cNvPr id="20" name="标签文字：所以还要再核对"/>
           <p:cNvSpPr txBox="1"/>
           <p:nvPr/>
         </p:nvSpPr>
@@ -11277,7 +11361,7 @@
                   <a:schemeClr val="bg1"/>
                 </a:solidFill>
               </a:rPr>
-              <a:t>用户难以完全信任</a:t>
+              <a:t>所以还要再核对</a:t>
             </a:r>
             <a:endParaRPr lang="en-US" sz="1700" dirty="0"/>
           </a:p>
@@ -11421,7 +11505,7 @@
                   <a:schemeClr val="tx2"/>
                 </a:solidFill>
               </a:rPr>
-              <a:t>报告认为：内容分散导致退订，AI 须接入可信数据</a:t>
+              <a:t>从内容分散到用户流失，报告这样推理</a:t>
             </a:r>
             <a:endParaRPr lang="en-US" sz="3000" dirty="0"/>
           </a:p>
@@ -11595,7 +11679,21 @@
                   <a:schemeClr val="tx1"/>
                 </a:solidFill>
               </a:rPr>
-              <a:t>美国电视时长来自联网电视</a:t>
+              <a:t>联网电视占</a:t>
+            </a:r>
+            <a:endParaRPr lang="en-US" sz="1600" dirty="0"/>
+          </a:p>
+          <a:p>
+            <a:pPr indent="0" marL="0">
+              <a:buNone/>
+            </a:pPr>
+            <a:r>
+              <a:rPr lang="en-US" sz="1600" dirty="0">
+                <a:solidFill>
+                  <a:schemeClr val="tx1"/>
+                </a:solidFill>
+              </a:rPr>
+              <a:t>美国电视时长</a:t>
             </a:r>
             <a:endParaRPr lang="en-US" sz="1600" dirty="0"/>
           </a:p>
@@ -11730,7 +11828,7 @@
                   <a:schemeClr val="tx2"/>
                 </a:solidFill>
               </a:rPr>
-              <a:t>检索变难</a:t>
+              <a:t>找起来费时</a:t>
             </a:r>
             <a:endParaRPr lang="en-US" sz="2100" dirty="0"/>
           </a:p>
@@ -11805,7 +11903,7 @@
                   <a:schemeClr val="tx1"/>
                 </a:solidFill>
               </a:rPr>
-              <a:t>平均寻找节目时长</a:t>
+              <a:t>平均找一个节目</a:t>
             </a:r>
             <a:endParaRPr lang="en-US" sz="1600" dirty="0"/>
           </a:p>
@@ -11940,7 +12038,7 @@
                   <a:schemeClr val="tx2"/>
                 </a:solidFill>
               </a:rPr>
-              <a:t>退订风险</a:t>
+              <a:t>可能退订</a:t>
             </a:r>
             <a:endParaRPr lang="en-US" sz="2100" dirty="0"/>
           </a:p>
@@ -12015,7 +12113,7 @@
                   <a:schemeClr val="tx1"/>
                 </a:solidFill>
               </a:rPr>
-              <a:t>18–34 岁表示可能退订</a:t>
+              <a:t>18–34 岁说可能退订</a:t>
             </a:r>
             <a:endParaRPr lang="en-US" sz="1600" dirty="0"/>
           </a:p>
@@ -12150,7 +12248,7 @@
                   <a:schemeClr val="bg1"/>
                 </a:solidFill>
               </a:rPr>
-              <a:t>接入可信数据</a:t>
+              <a:t>接入可靠数据</a:t>
             </a:r>
             <a:endParaRPr lang="en-US" sz="2100" dirty="0"/>
           </a:p>
@@ -12225,7 +12323,7 @@
                   <a:schemeClr val="accent6"/>
                 </a:solidFill>
               </a:rPr>
-              <a:t>AI 答对播出平台</a:t>
+              <a:t>AI 能答对的播出平台</a:t>
             </a:r>
             <a:endParaRPr lang="en-US" sz="1600" dirty="0"/>
           </a:p>
@@ -12405,7 +12503,7 @@
                   <a:schemeClr val="tx2"/>
                 </a:solidFill>
               </a:rPr>
-              <a:t>用课上四个维度，逐环检验报告的论证</a:t>
+              <a:t>沿着这条推理，逐环看证据站不站得住</a:t>
             </a:r>
             <a:endParaRPr lang="en-US" sz="3000" dirty="0"/>
           </a:p>
@@ -12594,38 +12692,38 @@
           <a:bodyPr wrap="square" lIns="0" tIns="0" rIns="0" bIns="0" rtlCol="0" anchor="ctr"/>
           <a:lstStyle/>
           <a:p>
-            <a:pPr indent="0" marL="0">
+            <a:pPr algn="ctr" indent="0" marL="0">
               <a:spcAft>
                 <a:spcPts val="600"/>
               </a:spcAft>
               <a:buNone/>
             </a:pPr>
             <a:r>
-              <a:rPr lang="en-US" sz="1800" b="1" dirty="0">
+              <a:rPr lang="en-US" sz="2000" b="1" dirty="0">
                 <a:solidFill>
                   <a:schemeClr val="accent1"/>
                 </a:solidFill>
               </a:rPr>
-              <a:t>维度一  调查对象</a:t>
-            </a:r>
-            <a:endParaRPr lang="en-US" sz="1800" dirty="0"/>
-          </a:p>
-          <a:p>
-            <a:pPr indent="0" marL="0">
+              <a:t>调查对象</a:t>
+            </a:r>
+            <a:endParaRPr lang="en-US" sz="2000" dirty="0"/>
+          </a:p>
+          <a:p>
+            <a:pPr algn="ctr" indent="0" marL="0">
               <a:spcAft>
                 <a:spcPts val="600"/>
               </a:spcAft>
               <a:buNone/>
             </a:pPr>
             <a:r>
-              <a:rPr lang="en-US" sz="1800" b="1" dirty="0">
+              <a:rPr lang="en-US" sz="2000" b="1" dirty="0">
                 <a:solidFill>
                   <a:schemeClr val="accent1"/>
                 </a:solidFill>
               </a:rPr>
-              <a:t>维度三  调查时间</a:t>
-            </a:r>
-            <a:endParaRPr lang="en-US" sz="1800" dirty="0"/>
+              <a:t>调查时间</a:t>
+            </a:r>
+            <a:endParaRPr lang="en-US" sz="2000" dirty="0"/>
           </a:p>
         </p:txBody>
       </p:sp>
@@ -12812,21 +12910,21 @@
           <a:bodyPr wrap="square" lIns="0" tIns="0" rIns="0" bIns="0" rtlCol="0" anchor="ctr"/>
           <a:lstStyle/>
           <a:p>
-            <a:pPr indent="0" marL="0">
+            <a:pPr algn="ctr" indent="0" marL="0">
               <a:spcAft>
                 <a:spcPts val="600"/>
               </a:spcAft>
               <a:buNone/>
             </a:pPr>
             <a:r>
-              <a:rPr lang="en-US" sz="1800" b="1" dirty="0">
+              <a:rPr lang="en-US" sz="2000" b="1" dirty="0">
                 <a:solidFill>
                   <a:schemeClr val="accent1"/>
                 </a:solidFill>
               </a:rPr>
-              <a:t>维度一  调查对象</a:t>
-            </a:r>
-            <a:endParaRPr lang="en-US" sz="1800" dirty="0"/>
+              <a:t>调查对象</a:t>
+            </a:r>
+            <a:endParaRPr lang="en-US" sz="2000" dirty="0"/>
           </a:p>
         </p:txBody>
       </p:sp>
@@ -12887,7 +12985,7 @@
                   <a:schemeClr val="bg1"/>
                 </a:solidFill>
               </a:rPr>
-              <a:t>③ 检索难致退订</a:t>
+              <a:t>③ 难找致退订</a:t>
             </a:r>
             <a:endParaRPr lang="en-US" sz="2000" dirty="0"/>
           </a:p>
@@ -13013,38 +13111,38 @@
           <a:bodyPr wrap="square" lIns="0" tIns="0" rIns="0" bIns="0" rtlCol="0" anchor="ctr"/>
           <a:lstStyle/>
           <a:p>
-            <a:pPr indent="0" marL="0">
+            <a:pPr algn="ctr" indent="0" marL="0">
               <a:spcAft>
                 <a:spcPts val="600"/>
               </a:spcAft>
               <a:buNone/>
             </a:pPr>
             <a:r>
-              <a:rPr lang="en-US" sz="1800" b="1" dirty="0">
+              <a:rPr lang="en-US" sz="2000" b="1" dirty="0">
                 <a:solidFill>
                   <a:schemeClr val="accent1"/>
                 </a:solidFill>
               </a:rPr>
-              <a:t>维度二  研究总体</a:t>
-            </a:r>
-            <a:endParaRPr lang="en-US" sz="1800" dirty="0"/>
-          </a:p>
-          <a:p>
-            <a:pPr indent="0" marL="0">
+              <a:t>研究总体</a:t>
+            </a:r>
+            <a:endParaRPr lang="en-US" sz="2000" dirty="0"/>
+          </a:p>
+          <a:p>
+            <a:pPr algn="ctr" indent="0" marL="0">
               <a:spcAft>
                 <a:spcPts val="600"/>
               </a:spcAft>
               <a:buNone/>
             </a:pPr>
             <a:r>
-              <a:rPr lang="en-US" sz="1800" b="1" dirty="0">
+              <a:rPr lang="en-US" sz="2000" b="1" dirty="0">
                 <a:solidFill>
                   <a:schemeClr val="accent1"/>
                 </a:solidFill>
               </a:rPr>
-              <a:t>维度四  研究方法</a:t>
-            </a:r>
-            <a:endParaRPr lang="en-US" sz="1800" dirty="0"/>
+              <a:t>研究方法</a:t>
+            </a:r>
+            <a:endParaRPr lang="en-US" sz="2000" dirty="0"/>
           </a:p>
         </p:txBody>
       </p:sp>
@@ -13105,7 +13203,7 @@
                   <a:schemeClr val="bg1"/>
                 </a:solidFill>
               </a:rPr>
-              <a:t>④ 接入可信数据</a:t>
+              <a:t>④ 接入可靠数据</a:t>
             </a:r>
             <a:endParaRPr lang="en-US" sz="2000" dirty="0"/>
           </a:p>
@@ -13195,21 +13293,21 @@
           <a:bodyPr wrap="square" lIns="0" tIns="0" rIns="0" bIns="0" rtlCol="0" anchor="ctr"/>
           <a:lstStyle/>
           <a:p>
-            <a:pPr indent="0" marL="0">
+            <a:pPr algn="ctr" indent="0" marL="0">
               <a:spcAft>
                 <a:spcPts val="600"/>
               </a:spcAft>
               <a:buNone/>
             </a:pPr>
             <a:r>
-              <a:rPr lang="en-US" sz="1800" b="1" dirty="0">
+              <a:rPr lang="en-US" sz="2000" b="1" dirty="0">
                 <a:solidFill>
                   <a:schemeClr val="accent1"/>
                 </a:solidFill>
               </a:rPr>
-              <a:t>维度四  研究方法</a:t>
-            </a:r>
-            <a:endParaRPr lang="en-US" sz="1800" dirty="0"/>
+              <a:t>研究方法</a:t>
+            </a:r>
+            <a:endParaRPr lang="en-US" sz="2000" dirty="0"/>
           </a:p>
         </p:txBody>
       </p:sp>
@@ -13270,7 +13368,7 @@
                   <a:schemeClr val="accent3"/>
                 </a:solidFill>
               </a:rPr>
-              <a:t>依据：</a:t>
+              <a:t>为什么看这四处：</a:t>
             </a:r>
             <a:pPr indent="0" marL="0">
               <a:buNone/>
@@ -13281,7 +13379,7 @@
                   <a:schemeClr val="tx1"/>
                 </a:solidFill>
               </a:rPr>
-              <a:t>课上春晚满意度调查案例——对象、总体、时间、方法不同，结论不同。</a:t>
+              <a:t>同一个问题，问谁、问哪里的人、什么时候问、怎么问，得到的答案都可能不同。</a:t>
             </a:r>
             <a:endParaRPr lang="en-US" sz="1800" dirty="0"/>
           </a:p>
@@ -13387,7 +13485,7 @@
                   <a:schemeClr val="accent3"/>
                 </a:solidFill>
               </a:rPr>
-              <a:t>04  方法评价 · 维度一  调查对象</a:t>
+              <a:t>04  方法评价 · 调查对象</a:t>
             </a:r>
             <a:endParaRPr lang="en-US" sz="1400" dirty="0"/>
           </a:p>
@@ -13425,7 +13523,7 @@
                   <a:schemeClr val="tx2"/>
                 </a:solidFill>
               </a:rPr>
-              <a:t>样本仅为 AI 用户，结论却推及“美国人”</a:t>
+              <a:t>问的是 AI 用户，说的却是“美国人”</a:t>
             </a:r>
             <a:endParaRPr lang="en-US" sz="3000" dirty="0"/>
           </a:p>
@@ -13812,7 +13910,21 @@
                   <a:schemeClr val="tx1"/>
                 </a:solidFill>
               </a:rPr>
-              <a:t>样本是 4,003 名 AI 聊天机器人用户</a:t>
+              <a:t>4,003 名受访者</a:t>
+            </a:r>
+            <a:endParaRPr lang="en-US" sz="1800" dirty="0"/>
+          </a:p>
+          <a:p>
+            <a:pPr indent="0" marL="0">
+              <a:buNone/>
+            </a:pPr>
+            <a:r>
+              <a:rPr lang="en-US" sz="1800" dirty="0">
+                <a:solidFill>
+                  <a:schemeClr val="tx1"/>
+                </a:solidFill>
+              </a:rPr>
+              <a:t>全是 AI 聊天机器人用户</a:t>
             </a:r>
             <a:endParaRPr lang="en-US" sz="1800" dirty="0"/>
           </a:p>
@@ -13938,7 +14050,21 @@
                   <a:schemeClr val="tx1"/>
                 </a:solidFill>
               </a:rPr>
-              <a:t>以“使用 AI”为条件筛选的线上样本</a:t>
+              <a:t>按“用不用 AI”筛选，</a:t>
+            </a:r>
+            <a:endParaRPr lang="en-US" sz="1800" dirty="0"/>
+          </a:p>
+          <a:p>
+            <a:pPr indent="0" marL="0">
+              <a:buNone/>
+            </a:pPr>
+            <a:r>
+              <a:rPr lang="en-US" sz="1800" dirty="0">
+                <a:solidFill>
+                  <a:schemeClr val="tx1"/>
+                </a:solidFill>
+              </a:rPr>
+              <a:t>样本偏向会用的人</a:t>
             </a:r>
             <a:endParaRPr lang="en-US" sz="1800" dirty="0"/>
           </a:p>
@@ -14064,7 +14190,21 @@
                   <a:schemeClr val="tx1"/>
                 </a:solidFill>
               </a:rPr>
-              <a:t>结论只适用于 AI 用户，与课上 Durex 案例同类</a:t>
+              <a:t>网络样本不等于总体，</a:t>
+            </a:r>
+            <a:endParaRPr lang="en-US" sz="1800" dirty="0"/>
+          </a:p>
+          <a:p>
+            <a:pPr indent="0" marL="0">
+              <a:buNone/>
+            </a:pPr>
+            <a:r>
+              <a:rPr lang="en-US" sz="1800" dirty="0">
+                <a:solidFill>
+                  <a:schemeClr val="tx1"/>
+                </a:solidFill>
+              </a:rPr>
+              <a:t>结论只适用于 AI 用户</a:t>
             </a:r>
             <a:endParaRPr lang="en-US" sz="1800" dirty="0"/>
           </a:p>
@@ -14206,7 +14346,7 @@
                   <a:schemeClr val="accent3"/>
                 </a:solidFill>
               </a:rPr>
-              <a:t>04  方法评价 · 维度二  研究总体</a:t>
+              <a:t>04  方法评价 · 研究总体</a:t>
             </a:r>
             <a:endParaRPr lang="en-US" sz="1400" dirty="0"/>
           </a:p>
@@ -14244,7 +14384,7 @@
                   <a:schemeClr val="tx2"/>
                 </a:solidFill>
               </a:rPr>
-              <a:t>“14 分钟”是六国均值，美国实为 12 分钟</a:t>
+              <a:t>“14 分钟”其实是六国平均，美国是 12 分钟</a:t>
             </a:r>
             <a:endParaRPr lang="en-US" sz="3000" dirty="0"/>
           </a:p>
@@ -14386,7 +14526,21 @@
                   <a:schemeClr val="tx1"/>
                 </a:solidFill>
               </a:rPr>
-              <a:t>六国均值被放进美国收视图表</a:t>
+              <a:t>图里的“14 分钟”，</a:t>
+            </a:r>
+            <a:endParaRPr lang="en-US" sz="1800" dirty="0"/>
+          </a:p>
+          <a:p>
+            <a:pPr indent="0" marL="0">
+              <a:buNone/>
+            </a:pPr>
+            <a:r>
+              <a:rPr lang="en-US" sz="1800" dirty="0">
+                <a:solidFill>
+                  <a:schemeClr val="tx1"/>
+                </a:solidFill>
+              </a:rPr>
+              <a:t>是六个国家的平均</a:t>
             </a:r>
             <a:endParaRPr lang="en-US" sz="1800" dirty="0"/>
           </a:p>
@@ -14512,7 +14666,21 @@
                   <a:schemeClr val="tx1"/>
                 </a:solidFill>
               </a:rPr>
-              <a:t>法国 26 分钟拉高了等权均值</a:t>
+              <a:t>六国直接平均，</a:t>
+            </a:r>
+            <a:endParaRPr lang="en-US" sz="1800" dirty="0"/>
+          </a:p>
+          <a:p>
+            <a:pPr indent="0" marL="0">
+              <a:buNone/>
+            </a:pPr>
+            <a:r>
+              <a:rPr lang="en-US" sz="1800" dirty="0">
+                <a:solidFill>
+                  <a:schemeClr val="tx1"/>
+                </a:solidFill>
+              </a:rPr>
+              <a:t>法国的 26 分钟拉高了它</a:t>
             </a:r>
             <a:endParaRPr lang="en-US" sz="1800" dirty="0"/>
           </a:p>
@@ -14638,7 +14806,21 @@
                   <a:schemeClr val="tx1"/>
                 </a:solidFill>
               </a:rPr>
-              <a:t>高估美国用户的检索困难</a:t>
+              <a:t>放进美国收视图里，</a:t>
+            </a:r>
+            <a:endParaRPr lang="en-US" sz="1800" dirty="0"/>
+          </a:p>
+          <a:p>
+            <a:pPr indent="0" marL="0">
+              <a:buNone/>
+            </a:pPr>
+            <a:r>
+              <a:rPr lang="en-US" sz="1800" dirty="0">
+                <a:solidFill>
+                  <a:schemeClr val="tx1"/>
+                </a:solidFill>
+              </a:rPr>
+              <a:t>容易高估美国的困难</a:t>
             </a:r>
             <a:endParaRPr lang="en-US" sz="1800" dirty="0"/>
           </a:p>

--- a/Gracenote报告解读_课堂汇报.pptx
+++ b/Gracenote报告解读_课堂汇报.pptx
@@ -120,13 +120,13 @@
   <p:extLst>
     <p:ext uri="{521415D9-36F7-43E2-AB2F-B90AF26B5E84}">
       <p14:sectionLst xmlns:p14="http://schemas.microsoft.com/office/powerpoint/2010/main">
-        <p14:section name="开场" id="{ae1897af-1cd9-c287-f9c3-001bdc18e597}">
+        <p14:section name="开场" id="{7236708e-6632-68ed-795b-be9b9dc6b72f}">
           <p14:sldIdLst>
             <p14:sldId id="256"/>
             <p14:sldId id="257"/>
           </p14:sldIdLst>
         </p14:section>
-        <p14:section name="报告介绍" id="{afa19afb-e8fc-dc17-ef62-8025774af16b}">
+        <p14:section name="报告介绍" id="{b403a56f-1af2-5158-c7b4-106d3ceb85cd}">
           <p14:sldIdLst>
             <p14:sldId id="258"/>
             <p14:sldId id="259"/>
@@ -134,7 +134,7 @@
             <p14:sldId id="261"/>
           </p14:sldIdLst>
         </p14:section>
-        <p14:section name="方法评价" id="{8fca11d5-64a1-f392-853a-581e5e94b38a}">
+        <p14:section name="方法评价" id="{6ea40926-f546-cbdd-c379-2fea83c8c218}">
           <p14:sldIdLst>
             <p14:sldId id="262"/>
             <p14:sldId id="263"/>
@@ -143,12 +143,12 @@
             <p14:sldId id="266"/>
           </p14:sldIdLst>
         </p14:section>
-        <p14:section name="总结" id="{71a53c45-c2c8-630a-07d4-4192f3b8e689}">
+        <p14:section name="总结" id="{c95d22b6-39ab-a8e2-d737-0778e6a3556e}">
           <p14:sldIdLst>
             <p14:sldId id="267"/>
           </p14:sldIdLst>
         </p14:section>
-        <p14:section name="附录（备问）" id="{eceb5e98-d75d-d3c8-9602-5ef0f73d470d}">
+        <p14:section name="附录（备问）" id="{c70fcf27-1e1c-f053-6bb2-b798cc6c6e9f}">
           <p14:sldIdLst>
             <p14:sldId id="268"/>
             <p14:sldId id="269"/>
@@ -917,7 +917,7 @@
           <a:p>
             <a:r>
               <a:rPr lang="en-US" dirty="0"/>
-              <a:t>【约 20 秒】大家好。我读的是尼尔森旗下 Gracenote 今年 4 月的一份报告。里面有个很醒目的数字：13 到 14 岁的受访者，54% 每天都用 AI。我想从这个数字出发，看看它到底代表了哪些人。</a:t>
+              <a:t>【约 25 秒】大家好，我汇报的是尼尔森旗下 Gracenote 今年 4 月发布的一份报告，讲 AI 时代人们怎样找电视节目。报告提到，13 到 14 岁的受访者中有 54% 每天使用 AI。我想先弄清楚，这个比例是在哪些人中得出的。</a:t>
             </a:r>
             <a:endParaRPr lang="en-US" dirty="0"/>
           </a:p>
@@ -1005,7 +1005,7 @@
           <a:p>
             <a:r>
               <a:rPr lang="en-US" dirty="0"/>
-              <a:t>【约 25 秒】第三，比较的时间和对象。报告拿皮尤去年秋天的 30%，比自己今年初的 54%，说使用在“加速”。可皮尤问的是全体青少年，同样 13 到 14 岁只有 24%；报告只问了 AI 用户。分母统一后，差距约 10 个百分点。</a:t>
+              <a:t>【约 25 秒】第三是调查时间和比较对象。报告用皮尤去年秋天的 30% 对比自己今年初的 54%，认为使用在加速。但皮尤调查的是全体青少年，同样 13 到 14 岁只有 24%；本报告只调查 AI 用户。换成相同分母，两者只差约 10 个百分点。</a:t>
             </a:r>
             <a:endParaRPr lang="en-US" dirty="0"/>
           </a:p>
@@ -1093,7 +1093,7 @@
           <a:p>
             <a:r>
               <a:rPr lang="en-US" dirty="0"/>
-              <a:t>【约 20 秒】最后是方法。“找不到就退订”这一环，靠的是四种性质不同的数据：有的是想法，有的是实际行为，有的只是预测。报告也没有跟踪同一批人，所以这些数据能说明两件事相关，说明不了谁导致了谁。</a:t>
+              <a:t>【约 25 秒】第四是方法。报告用来说明“节目难找导致退订”的，是四种性质不同的数据：退订意愿、实际退订率、市场预测和 AI 测试。报告也没有追踪同一批用户，所以这些数据只能说明两者有关，不能说明前者导致后者。</a:t>
             </a:r>
             <a:endParaRPr lang="en-US" dirty="0"/>
           </a:p>
@@ -1181,7 +1181,7 @@
           <a:p>
             <a:r>
               <a:rPr lang="en-US" dirty="0"/>
-              <a:t>【约 30 秒】回到这条推理链：前两环大体成立，但只适用于 AI 用户；后两环证据还不够。报告把样本量和时间交代得很清楚，数字也经得起复算；只是一个醒目的数字，常常把它怎么测出来的省略了。最后留个问题：要验证“找不到就退订”，调查该怎么设计？谢谢。</a:t>
+              <a:t>【约 25 秒】总的来看，前两步在 AI 用户中基本成立，后两步证据不够。报告的样本量、调查时间和年龄范围写得很清楚，图里的数字也能复算。最后想请大家想一想：要验证节目难找会不会导致退订，调查应该怎么设计？谢谢。</a:t>
             </a:r>
             <a:endParaRPr lang="en-US" dirty="0"/>
           </a:p>
@@ -1445,7 +1445,7 @@
           <a:p>
             <a:r>
               <a:rPr lang="en-US" dirty="0"/>
-              <a:t>【约 15 秒】我的看法先放在前面：报告看到的趋势大体可信，但它把一群 AI 用户的回答，推成了更大人群的结论。下面按背景、设计、内容、评价、总结五部分展开。</a:t>
+              <a:t>【约 15 秒】我的看法是，这份报告说明了 AI 用户的一些变化，这部分可以参考；但它常把这群用户的回答，写成美国人整体的情况。汇报分五个部分。</a:t>
             </a:r>
             <a:endParaRPr lang="en-US" dirty="0"/>
           </a:p>
@@ -1533,7 +1533,7 @@
           <a:p>
             <a:r>
               <a:rPr lang="en-US" dirty="0"/>
-              <a:t>【约 20 秒】先说背景。平台越来越多，节目越来越难找，不少人干脆直接问 AI。报告想回答三件事：怎么用 AI 找信息，找不到节目会不会退订，信不信 AI。另外，Gracenote 本身就做节目数据。</a:t>
+              <a:t>【约 25 秒】先介绍背景。平台越来越多，找节目变得费时，不少人开始直接问 AI。报告关心三个问题：人们怎样用 AI 找信息，找节目难不难、会不会因此退订，以及是否相信 AI 的答案。另外，Gracenote 本身做节目数据。</a:t>
             </a:r>
             <a:endParaRPr lang="en-US" dirty="0"/>
           </a:p>
@@ -1621,7 +1621,7 @@
           <a:p>
             <a:r>
               <a:rPr lang="en-US" dirty="0"/>
-              <a:t>【约 20 秒】报告的大部分结论来自两份线上问卷：一份今年年初问了 4003 名美国 AI 用户，13 到 79 岁；另一份去年夏天在六个国家各问了 500 名流媒体用户。样本怎么抽的，两份都没有交代。</a:t>
+              <a:t>【约 25 秒】报告的数据主要来自两份线上问卷。第一份在今年一到二月，调查了 4003 名 13 到 79 岁的美国 AI 聊天机器人用户；第二份在去年夏天，调查了六个国家的流媒体用户，每国 500 人。两份调查都没有说明样本是怎么抽取的。</a:t>
             </a:r>
             <a:endParaRPr lang="en-US" dirty="0"/>
           </a:p>
@@ -1709,7 +1709,7 @@
           <a:p>
             <a:r>
               <a:rPr lang="en-US" dirty="0"/>
-              <a:t>【约 25 秒】第一组发现：年轻人越来越依赖 AI，却不完全信任它。13 到 14 岁的 AI 用户里，54% 每天都用，但也有 75% 的人会回头核对。报告的解释是，AI 回答直接，所以受欢迎；可它也会给出看似合理的错误答案，所以还得再查一遍。</a:t>
+              <a:t>【约 25 秒】报告的第一组发现是，13 到 14 岁的 AI 用户中有 54% 每天使用；同时 75% 的受访者会核对 AI 的答案。报告认为，AI 回答直接、可以追问，所以用得越来越多；但它有时会给出错误信息，所以多数人还会再核对。</a:t>
             </a:r>
             <a:endParaRPr lang="en-US" dirty="0"/>
           </a:p>
@@ -1797,7 +1797,7 @@
           <a:p>
             <a:r>
               <a:rPr lang="en-US" dirty="0"/>
-              <a:t>【约 25 秒】第二组发现是一条推理链：内容分散，用户平均要花 14 分钟找节目；18 到 34 岁的人里，54% 说找不到可能会退订；而 AI 只能答对约三分之二的播出平台。所以报告主张，AI 需要接入可靠的行业数据。</a:t>
+              <a:t>【约 25 秒】第二组发现与找节目有关。用户平均要花 14 分钟找节目，18 到 34 岁的受访者中有 54% 表示可能因此退订，而 AI 只能答对约三分之二节目的播出平台。报告据此建议，AI 应该接入可靠的行业数据。</a:t>
             </a:r>
             <a:endParaRPr lang="en-US" dirty="0"/>
           </a:p>
@@ -1885,7 +1885,7 @@
           <a:p>
             <a:r>
               <a:rPr lang="en-US" dirty="0"/>
-              <a:t>【约 15 秒】这条推理有四个环节。同一个问题，问的是谁、问哪里的人、什么时候问、怎么问，答案都可能不一样。我就从这四个角度，逐环看证据站不站得住。</a:t>
+              <a:t>【约 10 秒】这条推理可以分成四步。调查结果会随调查对象、范围、时间和方法而变化，所以我从这四个方面分别检查。</a:t>
             </a:r>
             <a:endParaRPr lang="en-US" dirty="0"/>
           </a:p>
@@ -1973,7 +1973,7 @@
           <a:p>
             <a:r>
               <a:rPr lang="en-US" dirty="0"/>
-              <a:t>【约 20 秒】先看问的是谁。4003 名受访者都是 AI 聊天机器人用户，样本本身就偏向会用 AI 的人，报告却常把结论说成“美国人”。网络样本的结构不等于总体，54% 和 75% 只能算 AI 用户内部的比例。</a:t>
+              <a:t>【约 20 秒】第一是调查对象。这 4003 名受访者都是 AI 聊天机器人用户，没有包括不用 AI 的人。线上样本的构成和总体不同，所以 54% 和 75% 只能说明 AI 用户的情况，不能直接推到全体美国人。</a:t>
             </a:r>
             <a:endParaRPr lang="en-US" dirty="0"/>
           </a:p>
@@ -2061,7 +2061,7 @@
           <a:p>
             <a:r>
               <a:rPr lang="en-US" dirty="0"/>
-              <a:t>【约 20 秒】再看是哪里的人。“平均 14 分钟”其实来自六国调查，是六个国家直接平均出来的；美国是 12 分钟，法国是 26 分钟。报告把它放进一张讲美国收视的图里，读者很容易以为美国人也要找 14 分钟。</a:t>
+              <a:t>【约 20 秒】第二是调查范围。“平均 14 分钟”来自六国调查，是六个国家的平均值；美国是 12 分钟，法国是 26 分钟。报告把这个数字放在一张讲美国收视的图里，读者容易以为美国人也要找 14 分钟。</a:t>
             </a:r>
             <a:endParaRPr lang="en-US" dirty="0"/>
           </a:p>
@@ -3099,7 +3099,7 @@
                   <a:schemeClr val="tx2"/>
                 </a:solidFill>
               </a:rPr>
-              <a:t>该数据代表哪类人群？</a:t>
+              <a:t>这个比例来自哪些人？</a:t>
             </a:r>
             <a:endParaRPr lang="en-US" sz="1800" dirty="0"/>
           </a:p>
@@ -3198,7 +3198,7 @@
                   <a:schemeClr val="tx2"/>
                 </a:solidFill>
               </a:rPr>
-              <a:t>分母不一样，“加速”也就无从谈起</a:t>
+              <a:t>两项调查的分母不同，不能说明使用在“加速”</a:t>
             </a:r>
             <a:endParaRPr lang="en-US" sz="3000" dirty="0"/>
           </a:p>
@@ -3628,7 +3628,7 @@
                   <a:schemeClr val="tx1"/>
                 </a:solidFill>
               </a:rPr>
-              <a:t>拿皮尤去年秋的 30%，</a:t>
+              <a:t>报告用皮尤去年秋的 30%</a:t>
             </a:r>
             <a:endParaRPr lang="en-US" sz="1800" dirty="0"/>
           </a:p>
@@ -3642,7 +3642,7 @@
                   <a:schemeClr val="tx1"/>
                 </a:solidFill>
               </a:rPr>
-              <a:t>比本报告今年初的 54%</a:t>
+              <a:t>对比自己今年初的 54%</a:t>
             </a:r>
             <a:endParaRPr lang="en-US" sz="1800" dirty="0"/>
           </a:p>
@@ -3768,7 +3768,7 @@
                   <a:schemeClr val="tx1"/>
                 </a:solidFill>
               </a:rPr>
-              <a:t>皮尤问全体青少年，</a:t>
+              <a:t>皮尤调查全体青少年，</a:t>
             </a:r>
             <a:endParaRPr lang="en-US" sz="1800" dirty="0"/>
           </a:p>
@@ -3782,7 +3782,7 @@
                   <a:schemeClr val="tx1"/>
                 </a:solidFill>
               </a:rPr>
-              <a:t>本报告只问 AI 用户</a:t>
+              <a:t>本报告只调查 AI 用户</a:t>
             </a:r>
             <a:endParaRPr lang="en-US" sz="1800" dirty="0"/>
           </a:p>
@@ -3908,7 +3908,7 @@
                   <a:schemeClr val="tx1"/>
                 </a:solidFill>
               </a:rPr>
-              <a:t>分母统一后，</a:t>
+              <a:t>换成相同分母后，</a:t>
             </a:r>
             <a:endParaRPr lang="en-US" sz="1800" dirty="0"/>
           </a:p>
@@ -3922,7 +3922,7 @@
                   <a:schemeClr val="tx1"/>
                 </a:solidFill>
               </a:rPr>
-              <a:t>差距只剩约 10 个百分点</a:t>
+              <a:t>两者只差约 10 个百分点</a:t>
             </a:r>
             <a:endParaRPr lang="en-US" sz="1800" dirty="0"/>
           </a:p>
@@ -4102,7 +4102,7 @@
                   <a:schemeClr val="tx2"/>
                 </a:solidFill>
               </a:rPr>
-              <a:t>几类不同的数据，拼不出“找不到就退订”</a:t>
+              <a:t>现有数据不足以证明节目难找会导致退订</a:t>
             </a:r>
             <a:endParaRPr lang="en-US" sz="3000" dirty="0"/>
           </a:p>
@@ -4636,7 +4636,7 @@
                   <a:schemeClr val="tx1"/>
                 </a:solidFill>
               </a:rPr>
-              <a:t>意愿、退订率、预测、测试</a:t>
+              <a:t>报告把退订意愿、退订率、</a:t>
             </a:r>
             <a:endParaRPr lang="en-US" sz="1800" dirty="0"/>
           </a:p>
@@ -4650,7 +4650,7 @@
                   <a:schemeClr val="tx1"/>
                 </a:solidFill>
               </a:rPr>
-              <a:t>被串成一条链</a:t>
+              <a:t>市场预测和 AI 测试放在一起</a:t>
             </a:r>
             <a:endParaRPr lang="en-US" sz="1800" dirty="0"/>
           </a:p>
@@ -4776,7 +4776,7 @@
                   <a:schemeClr val="tx1"/>
                 </a:solidFill>
               </a:rPr>
-              <a:t>有的是想法，有的是行为，</a:t>
+              <a:t>这些数据性质不同，</a:t>
             </a:r>
             <a:endParaRPr lang="en-US" sz="1800" dirty="0"/>
           </a:p>
@@ -4790,7 +4790,7 @@
                   <a:schemeClr val="tx1"/>
                 </a:solidFill>
               </a:rPr>
-              <a:t>有的只是预测</a:t>
+              <a:t>也没有追踪同一批人</a:t>
             </a:r>
             <a:endParaRPr lang="en-US" sz="1800" dirty="0"/>
           </a:p>
@@ -4916,7 +4916,7 @@
                   <a:schemeClr val="tx1"/>
                 </a:solidFill>
               </a:rPr>
-              <a:t>能说明相关，</a:t>
+              <a:t>只能说明两者有关，</a:t>
             </a:r>
             <a:endParaRPr lang="en-US" sz="1800" dirty="0"/>
           </a:p>
@@ -4930,7 +4930,7 @@
                   <a:schemeClr val="tx1"/>
                 </a:solidFill>
               </a:rPr>
-              <a:t>说明不了谁导致了谁</a:t>
+              <a:t>不能说明前者导致后者</a:t>
             </a:r>
             <a:endParaRPr lang="en-US" sz="1800" dirty="0"/>
           </a:p>
@@ -5110,7 +5110,7 @@
                   <a:schemeClr val="bg1"/>
                 </a:solidFill>
               </a:rPr>
-              <a:t>趋势可以参考，结论需要收窄</a:t>
+              <a:t>报告的结论，更适合用来描述 AI 用户群体</a:t>
             </a:r>
             <a:endParaRPr lang="en-US" sz="3000" dirty="0"/>
           </a:p>
@@ -5425,7 +5425,7 @@
                   <a:schemeClr val="bg1"/>
                 </a:solidFill>
               </a:rPr>
-              <a:t>③ 难找致退订</a:t>
+              <a:t>③ 难找导致退订</a:t>
             </a:r>
             <a:endParaRPr lang="en-US" sz="2000" dirty="0"/>
           </a:p>
@@ -5551,7 +5551,7 @@
                   <a:schemeClr val="bg1"/>
                 </a:solidFill>
               </a:rPr>
-              <a:t>④ 接入可靠数据</a:t>
+              <a:t>④ 接入行业数据</a:t>
             </a:r>
             <a:endParaRPr lang="en-US" sz="2000" dirty="0"/>
           </a:p>
@@ -5645,23 +5645,12 @@
               <a:buNone/>
             </a:pPr>
             <a:r>
-              <a:rPr lang="en-US" sz="1600" b="1" dirty="0">
-                <a:solidFill>
-                  <a:schemeClr val="accent4"/>
-                </a:solidFill>
-              </a:rPr>
-              <a:t>可取之处：</a:t>
-            </a:r>
-            <a:pPr indent="0" marL="0">
-              <a:buNone/>
-            </a:pPr>
-            <a:r>
               <a:rPr lang="en-US" sz="1600" dirty="0">
                 <a:solidFill>
                   <a:schemeClr val="accent6"/>
                 </a:solidFill>
               </a:rPr>
-              <a:t>样本量、时间、年龄都交代清楚，图里的数字经得起复算。</a:t>
+              <a:t>报告的样本量、调查时间和年龄范围写得很清楚，图里的数字也能复算。</a:t>
             </a:r>
             <a:endParaRPr lang="en-US" sz="1600" dirty="0"/>
           </a:p>
@@ -5727,7 +5716,7 @@
                   <a:schemeClr val="accent3"/>
                 </a:solidFill>
               </a:rPr>
-              <a:t>留给大家</a:t>
+              <a:t>讨论</a:t>
             </a:r>
             <a:endParaRPr lang="en-US" sz="1600" dirty="0"/>
           </a:p>
@@ -5744,7 +5733,41 @@
                   <a:schemeClr val="tx2"/>
                 </a:solidFill>
               </a:rPr>
-              <a:t>要验证“找不到就退订”，调查该怎么设计？</a:t>
+              <a:t>要验证节目难找</a:t>
+            </a:r>
+            <a:endParaRPr lang="en-US" sz="1600" dirty="0"/>
+          </a:p>
+          <a:p>
+            <a:pPr indent="0" marL="0">
+              <a:spcAft>
+                <a:spcPts val="1400"/>
+              </a:spcAft>
+              <a:buNone/>
+            </a:pPr>
+            <a:r>
+              <a:rPr lang="en-US" sz="2200" b="1" dirty="0">
+                <a:solidFill>
+                  <a:schemeClr val="tx2"/>
+                </a:solidFill>
+              </a:rPr>
+              <a:t>会不会导致退订，</a:t>
+            </a:r>
+            <a:endParaRPr lang="en-US" sz="1600" dirty="0"/>
+          </a:p>
+          <a:p>
+            <a:pPr indent="0" marL="0">
+              <a:spcAft>
+                <a:spcPts val="1400"/>
+              </a:spcAft>
+              <a:buNone/>
+            </a:pPr>
+            <a:r>
+              <a:rPr lang="en-US" sz="2200" b="1" dirty="0">
+                <a:solidFill>
+                  <a:schemeClr val="tx2"/>
+                </a:solidFill>
+              </a:rPr>
+              <a:t>调查应该怎么设计？</a:t>
             </a:r>
             <a:endParaRPr lang="en-US" sz="1600" dirty="0"/>
           </a:p>
@@ -5888,7 +5911,7 @@
                   <a:schemeClr val="tx2"/>
                 </a:solidFill>
               </a:rPr>
-              <a:t>11 个来源里，报告自己的两份问卷最不透明</a:t>
+              <a:t>各数据来源的方法说明情况</a:t>
             </a:r>
             <a:endParaRPr lang="en-US" sz="3000" dirty="0"/>
           </a:p>
@@ -7377,7 +7400,7 @@
                   <a:schemeClr val="tx2"/>
                 </a:solidFill>
               </a:rPr>
-              <a:t>几处引用，和原始来源的说法并不一致</a:t>
+              <a:t>部分引用与原始来源不一致</a:t>
             </a:r>
             <a:endParaRPr lang="en-US" sz="3000" dirty="0"/>
           </a:p>
@@ -8455,7 +8478,7 @@
                   <a:schemeClr val="tx2"/>
                 </a:solidFill>
               </a:rPr>
-              <a:t>趋势大体可信，但结论推得太远</a:t>
+              <a:t>报告反映的趋势有参考价值，但不少结论超出了样本范围</a:t>
             </a:r>
             <a:endParaRPr lang="en-US" sz="3000" dirty="0"/>
           </a:p>
@@ -8863,7 +8886,7 @@
                   <a:schemeClr val="tx2"/>
                 </a:solidFill>
               </a:rPr>
-              <a:t>方法评价（重点）</a:t>
+              <a:t>方法评价</a:t>
             </a:r>
             <a:endParaRPr lang="en-US" sz="2000" dirty="0"/>
           </a:p>
@@ -9031,7 +9054,7 @@
                   <a:schemeClr val="accent4"/>
                 </a:solidFill>
               </a:rPr>
-              <a:t>我的判断</a:t>
+              <a:t>我的看法</a:t>
             </a:r>
             <a:endParaRPr lang="en-US" sz="1600" dirty="0"/>
           </a:p>
@@ -9043,12 +9066,12 @@
               <a:buNone/>
             </a:pPr>
             <a:r>
-              <a:rPr lang="en-US" sz="2400" b="1" dirty="0">
+              <a:rPr lang="en-US" sz="2200" b="1" dirty="0">
                 <a:solidFill>
                   <a:schemeClr val="bg1"/>
                 </a:solidFill>
               </a:rPr>
-              <a:t>报告看到的趋势大体可信；问题在于，它把一群 AI 用户的回答，推成了更大人群的结论。</a:t>
+              <a:t>这份报告说明了 AI 用户的一些变化，这部分可以参考；但它常把这群用户的回答，写成美国人整体的情况。</a:t>
             </a:r>
             <a:endParaRPr lang="en-US" sz="1600" dirty="0"/>
           </a:p>
@@ -9192,7 +9215,7 @@
                   <a:schemeClr val="tx2"/>
                 </a:solidFill>
               </a:rPr>
-              <a:t>节目越来越难找，AI 会不会成为新的入口？</a:t>
+              <a:t>报告关心人们怎样用 AI 找电视节目</a:t>
             </a:r>
             <a:endParaRPr lang="en-US" sz="3000" dirty="0"/>
           </a:p>
@@ -9291,7 +9314,7 @@
                   <a:schemeClr val="tx2"/>
                 </a:solidFill>
               </a:rPr>
-              <a:t>怎么用 AI</a:t>
+              <a:t>使用情况</a:t>
             </a:r>
             <a:endParaRPr lang="en-US" sz="2600" dirty="0"/>
           </a:p>
@@ -9327,7 +9350,7 @@
                   <a:schemeClr val="tx1"/>
                 </a:solidFill>
               </a:rPr>
-              <a:t>不同年龄的人，如何用 AI 找信息？</a:t>
+              <a:t>不同年龄的人用 AI 找信息的频率</a:t>
             </a:r>
             <a:endParaRPr lang="en-US" sz="1800" dirty="0"/>
           </a:p>
@@ -9426,7 +9449,7 @@
                   <a:schemeClr val="tx2"/>
                 </a:solidFill>
               </a:rPr>
-              <a:t>找不到会怎样</a:t>
+              <a:t>找节目的难度</a:t>
             </a:r>
             <a:endParaRPr lang="en-US" sz="2600" dirty="0"/>
           </a:p>
@@ -9462,7 +9485,7 @@
                   <a:schemeClr val="tx1"/>
                 </a:solidFill>
               </a:rPr>
-              <a:t>节目难找，会不会让人退订？</a:t>
+              <a:t>找节目要花多久，会不会因此退订</a:t>
             </a:r>
             <a:endParaRPr lang="en-US" sz="1800" dirty="0"/>
           </a:p>
@@ -9561,7 +9584,7 @@
                   <a:schemeClr val="tx2"/>
                 </a:solidFill>
               </a:rPr>
-              <a:t>信不信 AI</a:t>
+              <a:t>对 AI 的信任</a:t>
             </a:r>
             <a:endParaRPr lang="en-US" sz="2600" dirty="0"/>
           </a:p>
@@ -9597,7 +9620,7 @@
                   <a:schemeClr val="tx1"/>
                 </a:solidFill>
               </a:rPr>
-              <a:t>人们是否相信 AI 给的答案？</a:t>
+              <a:t>人们是否会核对 AI 给出的答案</a:t>
             </a:r>
             <a:endParaRPr lang="en-US" sz="1800" dirty="0"/>
           </a:p>
@@ -9671,7 +9694,7 @@
                   <a:schemeClr val="bg1"/>
                 </a:solidFill>
               </a:rPr>
-              <a:t>Gracenote 隶属尼尔森，本身就做节目数据；报告最后的建议，恰好落在它自己的业务上。</a:t>
+              <a:t>Gracenote 是尼尔森旗下的节目数据公司；报告建议平台接入行业数据，这也是它的业务。</a:t>
             </a:r>
             <a:endParaRPr lang="en-US" sz="1600" dirty="0"/>
           </a:p>
@@ -9815,7 +9838,7 @@
                   <a:schemeClr val="tx2"/>
                 </a:solidFill>
               </a:rPr>
-              <a:t>两份线上问卷，撑起了报告的大部分结论</a:t>
+              <a:t>报告的数据主要来自两份线上问卷</a:t>
             </a:r>
             <a:endParaRPr lang="en-US" sz="3000" dirty="0"/>
           </a:p>
@@ -10625,7 +10648,7 @@
                   <a:schemeClr val="tx1"/>
                 </a:solidFill>
               </a:rPr>
-              <a:t>样本如何抽取，两份调查都没有交代。另引用尼尔森、皮尤等共 11 个来源（见附录）。</a:t>
+              <a:t>两份调查都没有说明样本是怎么抽取的。报告还引用了尼尔森、皮尤等共 11 个来源（见附录）。</a:t>
             </a:r>
             <a:endParaRPr lang="en-US" sz="1800" dirty="0"/>
           </a:p>
@@ -10769,7 +10792,7 @@
                   <a:schemeClr val="tx2"/>
                 </a:solidFill>
               </a:rPr>
-              <a:t>年轻人越来越依赖 AI，却并不完全信任它</a:t>
+              <a:t>年轻用户常用 AI，但多数受访者会核对它的答案</a:t>
             </a:r>
             <a:endParaRPr lang="en-US" sz="3000" dirty="0"/>
           </a:p>
@@ -10885,7 +10908,7 @@
                   <a:schemeClr val="tx1"/>
                 </a:solidFill>
               </a:rPr>
-              <a:t>每天都用</a:t>
+              <a:t>每天使用</a:t>
             </a:r>
             <a:endParaRPr lang="en-US" sz="2000" dirty="0"/>
           </a:p>
@@ -10987,7 +11010,7 @@
                   <a:schemeClr val="tx1"/>
                 </a:solidFill>
               </a:rPr>
-              <a:t>受访者会回头</a:t>
+              <a:t>受访者会核对</a:t>
             </a:r>
             <a:endParaRPr lang="en-US" sz="2000" dirty="0"/>
           </a:p>
@@ -11001,7 +11024,7 @@
                   <a:schemeClr val="tx1"/>
                 </a:solidFill>
               </a:rPr>
-              <a:t>核对 AI 的答案</a:t>
+              <a:t>AI 的答案</a:t>
             </a:r>
             <a:endParaRPr lang="en-US" sz="2000" dirty="0"/>
           </a:p>
@@ -11100,7 +11123,7 @@
                   <a:schemeClr val="tx1"/>
                 </a:solidFill>
               </a:rPr>
-              <a:t>AI 能直接给出答案，还能接着追问</a:t>
+              <a:t>回答直接，可以继续追问</a:t>
             </a:r>
             <a:endParaRPr lang="en-US" sz="1800" dirty="0"/>
           </a:p>
@@ -11144,7 +11167,7 @@
       </p:sp>
       <p:sp>
         <p:nvSpPr>
-          <p:cNvPr id="14" name="标签：所以受欢迎"/>
+          <p:cNvPr id="14" name="标签：使用增加"/>
           <p:cNvSpPr/>
           <p:nvPr/>
         </p:nvSpPr>
@@ -11171,7 +11194,7 @@
       </p:sp>
       <p:sp>
         <p:nvSpPr>
-          <p:cNvPr id="15" name="标签文字：所以受欢迎"/>
+          <p:cNvPr id="15" name="标签文字：使用增加"/>
           <p:cNvSpPr txBox="1"/>
           <p:nvPr/>
         </p:nvSpPr>
@@ -11199,7 +11222,7 @@
                   <a:schemeClr val="bg1"/>
                 </a:solidFill>
               </a:rPr>
-              <a:t>所以受欢迎</a:t>
+              <a:t>使用增加</a:t>
             </a:r>
             <a:endParaRPr lang="en-US" sz="1700" dirty="0"/>
           </a:p>
@@ -11262,7 +11285,7 @@
                   <a:schemeClr val="tx1"/>
                 </a:solidFill>
               </a:rPr>
-              <a:t>但它也会给出看似合理的错误答案</a:t>
+              <a:t>有时会给出看似合理的错误信息</a:t>
             </a:r>
             <a:endParaRPr lang="en-US" sz="1800" dirty="0"/>
           </a:p>
@@ -11306,7 +11329,7 @@
       </p:sp>
       <p:sp>
         <p:nvSpPr>
-          <p:cNvPr id="19" name="标签：所以还要再核对"/>
+          <p:cNvPr id="19" name="标签：需要核对"/>
           <p:cNvSpPr/>
           <p:nvPr/>
         </p:nvSpPr>
@@ -11333,7 +11356,7 @@
       </p:sp>
       <p:sp>
         <p:nvSpPr>
-          <p:cNvPr id="20" name="标签文字：所以还要再核对"/>
+          <p:cNvPr id="20" name="标签文字：需要核对"/>
           <p:cNvSpPr txBox="1"/>
           <p:nvPr/>
         </p:nvSpPr>
@@ -11361,7 +11384,7 @@
                   <a:schemeClr val="bg1"/>
                 </a:solidFill>
               </a:rPr>
-              <a:t>所以还要再核对</a:t>
+              <a:t>需要核对</a:t>
             </a:r>
             <a:endParaRPr lang="en-US" sz="1700" dirty="0"/>
           </a:p>
@@ -11505,7 +11528,7 @@
                   <a:schemeClr val="tx2"/>
                 </a:solidFill>
               </a:rPr>
-              <a:t>从内容分散到用户流失，报告这样推理</a:t>
+              <a:t>报告认为，节目难找会让用户退订</a:t>
             </a:r>
             <a:endParaRPr lang="en-US" sz="3000" dirty="0"/>
           </a:p>
@@ -11828,7 +11851,7 @@
                   <a:schemeClr val="tx2"/>
                 </a:solidFill>
               </a:rPr>
-              <a:t>找起来费时</a:t>
+              <a:t>找节目费时</a:t>
             </a:r>
             <a:endParaRPr lang="en-US" sz="2100" dirty="0"/>
           </a:p>
@@ -12113,7 +12136,21 @@
                   <a:schemeClr val="tx1"/>
                 </a:solidFill>
               </a:rPr>
-              <a:t>18–34 岁说可能退订</a:t>
+              <a:t>18–34 岁表示</a:t>
+            </a:r>
+            <a:endParaRPr lang="en-US" sz="1600" dirty="0"/>
+          </a:p>
+          <a:p>
+            <a:pPr indent="0" marL="0">
+              <a:buNone/>
+            </a:pPr>
+            <a:r>
+              <a:rPr lang="en-US" sz="1600" dirty="0">
+                <a:solidFill>
+                  <a:schemeClr val="tx1"/>
+                </a:solidFill>
+              </a:rPr>
+              <a:t>可能退订</a:t>
             </a:r>
             <a:endParaRPr lang="en-US" sz="1600" dirty="0"/>
           </a:p>
@@ -12248,7 +12285,7 @@
                   <a:schemeClr val="bg1"/>
                 </a:solidFill>
               </a:rPr>
-              <a:t>接入可靠数据</a:t>
+              <a:t>接入行业数据</a:t>
             </a:r>
             <a:endParaRPr lang="en-US" sz="2100" dirty="0"/>
           </a:p>
@@ -12323,7 +12360,21 @@
                   <a:schemeClr val="accent6"/>
                 </a:solidFill>
               </a:rPr>
-              <a:t>AI 能答对的播出平台</a:t>
+              <a:t>AI 能答对的</a:t>
+            </a:r>
+            <a:endParaRPr lang="en-US" sz="1600" dirty="0"/>
+          </a:p>
+          <a:p>
+            <a:pPr indent="0" marL="0">
+              <a:buNone/>
+            </a:pPr>
+            <a:r>
+              <a:rPr lang="en-US" sz="1600" dirty="0">
+                <a:solidFill>
+                  <a:schemeClr val="accent6"/>
+                </a:solidFill>
+              </a:rPr>
+              <a:t>播出平台</a:t>
             </a:r>
             <a:endParaRPr lang="en-US" sz="1600" dirty="0"/>
           </a:p>
@@ -12503,7 +12554,7 @@
                   <a:schemeClr val="tx2"/>
                 </a:solidFill>
               </a:rPr>
-              <a:t>沿着这条推理，逐环看证据站不站得住</a:t>
+              <a:t>从四个方面检查每一步的证据</a:t>
             </a:r>
             <a:endParaRPr lang="en-US" sz="3000" dirty="0"/>
           </a:p>
@@ -12985,7 +13036,7 @@
                   <a:schemeClr val="bg1"/>
                 </a:solidFill>
               </a:rPr>
-              <a:t>③ 难找致退订</a:t>
+              <a:t>③ 难找导致退订</a:t>
             </a:r>
             <a:endParaRPr lang="en-US" sz="2000" dirty="0"/>
           </a:p>
@@ -13123,7 +13174,7 @@
                   <a:schemeClr val="accent1"/>
                 </a:solidFill>
               </a:rPr>
-              <a:t>研究总体</a:t>
+              <a:t>调查范围</a:t>
             </a:r>
             <a:endParaRPr lang="en-US" sz="2000" dirty="0"/>
           </a:p>
@@ -13203,7 +13254,7 @@
                   <a:schemeClr val="bg1"/>
                 </a:solidFill>
               </a:rPr>
-              <a:t>④ 接入可靠数据</a:t>
+              <a:t>④ 接入行业数据</a:t>
             </a:r>
             <a:endParaRPr lang="en-US" sz="2000" dirty="0"/>
           </a:p>
@@ -13363,23 +13414,12 @@
               <a:buNone/>
             </a:pPr>
             <a:r>
-              <a:rPr lang="en-US" sz="1800" b="1" dirty="0">
-                <a:solidFill>
-                  <a:schemeClr val="accent3"/>
-                </a:solidFill>
-              </a:rPr>
-              <a:t>为什么看这四处：</a:t>
-            </a:r>
-            <a:pPr indent="0" marL="0">
-              <a:buNone/>
-            </a:pPr>
-            <a:r>
               <a:rPr lang="en-US" sz="1800" dirty="0">
                 <a:solidFill>
                   <a:schemeClr val="tx1"/>
                 </a:solidFill>
               </a:rPr>
-              <a:t>同一个问题，问谁、问哪里的人、什么时候问、怎么问，得到的答案都可能不同。</a:t>
+              <a:t>调查结果会随调查对象、范围、时间和方法而变化，所以分别从这四个方面检查。</a:t>
             </a:r>
             <a:endParaRPr lang="en-US" sz="1800" dirty="0"/>
           </a:p>
@@ -13523,7 +13563,7 @@
                   <a:schemeClr val="tx2"/>
                 </a:solidFill>
               </a:rPr>
-              <a:t>问的是 AI 用户，说的却是“美国人”</a:t>
+              <a:t>样本都是 AI 用户，不能直接代表美国人</a:t>
             </a:r>
             <a:endParaRPr lang="en-US" sz="3000" dirty="0"/>
           </a:p>
@@ -13924,7 +13964,7 @@
                   <a:schemeClr val="tx1"/>
                 </a:solidFill>
               </a:rPr>
-              <a:t>全是 AI 聊天机器人用户</a:t>
+              <a:t>都是 AI 聊天机器人用户</a:t>
             </a:r>
             <a:endParaRPr lang="en-US" sz="1800" dirty="0"/>
           </a:p>
@@ -14050,7 +14090,7 @@
                   <a:schemeClr val="tx1"/>
                 </a:solidFill>
               </a:rPr>
-              <a:t>按“用不用 AI”筛选，</a:t>
+              <a:t>调查只问了用 AI 的人，</a:t>
             </a:r>
             <a:endParaRPr lang="en-US" sz="1800" dirty="0"/>
           </a:p>
@@ -14064,7 +14104,7 @@
                   <a:schemeClr val="tx1"/>
                 </a:solidFill>
               </a:rPr>
-              <a:t>样本偏向会用的人</a:t>
+              <a:t>没有包括不用的人</a:t>
             </a:r>
             <a:endParaRPr lang="en-US" sz="1800" dirty="0"/>
           </a:p>
@@ -14190,7 +14230,7 @@
                   <a:schemeClr val="tx1"/>
                 </a:solidFill>
               </a:rPr>
-              <a:t>网络样本不等于总体，</a:t>
+              <a:t>线上样本和总体构成不同，</a:t>
             </a:r>
             <a:endParaRPr lang="en-US" sz="1800" dirty="0"/>
           </a:p>
@@ -14204,7 +14244,7 @@
                   <a:schemeClr val="tx1"/>
                 </a:solidFill>
               </a:rPr>
-              <a:t>结论只适用于 AI 用户</a:t>
+              <a:t>比例只能代表 AI 用户</a:t>
             </a:r>
             <a:endParaRPr lang="en-US" sz="1800" dirty="0"/>
           </a:p>
@@ -14346,7 +14386,7 @@
                   <a:schemeClr val="accent3"/>
                 </a:solidFill>
               </a:rPr>
-              <a:t>04  方法评价 · 研究总体</a:t>
+              <a:t>04  方法评价 · 调查范围</a:t>
             </a:r>
             <a:endParaRPr lang="en-US" sz="1400" dirty="0"/>
           </a:p>
@@ -14384,7 +14424,7 @@
                   <a:schemeClr val="tx2"/>
                 </a:solidFill>
               </a:rPr>
-              <a:t>“14 分钟”其实是六国平均，美国是 12 分钟</a:t>
+              <a:t>“14 分钟”是六国平均值，美国是 12 分钟</a:t>
             </a:r>
             <a:endParaRPr lang="en-US" sz="3000" dirty="0"/>
           </a:p>
@@ -14526,7 +14566,7 @@
                   <a:schemeClr val="tx1"/>
                 </a:solidFill>
               </a:rPr>
-              <a:t>图里的“14 分钟”，</a:t>
+              <a:t>报告把六国平均值</a:t>
             </a:r>
             <a:endParaRPr lang="en-US" sz="1800" dirty="0"/>
           </a:p>
@@ -14540,7 +14580,7 @@
                   <a:schemeClr val="tx1"/>
                 </a:solidFill>
               </a:rPr>
-              <a:t>是六个国家的平均</a:t>
+              <a:t>放在了美国收视的图里</a:t>
             </a:r>
             <a:endParaRPr lang="en-US" sz="1800" dirty="0"/>
           </a:p>
@@ -14666,7 +14706,7 @@
                   <a:schemeClr val="tx1"/>
                 </a:solidFill>
               </a:rPr>
-              <a:t>六国直接平均，</a:t>
+              <a:t>六国按同等权重平均，</a:t>
             </a:r>
             <a:endParaRPr lang="en-US" sz="1800" dirty="0"/>
           </a:p>
@@ -14680,7 +14720,7 @@
                   <a:schemeClr val="tx1"/>
                 </a:solidFill>
               </a:rPr>
-              <a:t>法国的 26 分钟拉高了它</a:t>
+              <a:t>法国的 26 分钟抬高了均值</a:t>
             </a:r>
             <a:endParaRPr lang="en-US" sz="1800" dirty="0"/>
           </a:p>
@@ -14806,7 +14846,7 @@
                   <a:schemeClr val="tx1"/>
                 </a:solidFill>
               </a:rPr>
-              <a:t>放进美国收视图里，</a:t>
+              <a:t>读者容易以为</a:t>
             </a:r>
             <a:endParaRPr lang="en-US" sz="1800" dirty="0"/>
           </a:p>
@@ -14820,7 +14860,7 @@
                   <a:schemeClr val="tx1"/>
                 </a:solidFill>
               </a:rPr>
-              <a:t>容易高估美国的困难</a:t>
+              <a:t>美国人也要找 14 分钟</a:t>
             </a:r>
             <a:endParaRPr lang="en-US" sz="1800" dirty="0"/>
           </a:p>

--- a/Gracenote报告解读_课堂汇报.pptx
+++ b/Gracenote报告解读_课堂汇报.pptx
@@ -120,13 +120,13 @@
   <p:extLst>
     <p:ext uri="{521415D9-36F7-43E2-AB2F-B90AF26B5E84}">
       <p14:sectionLst xmlns:p14="http://schemas.microsoft.com/office/powerpoint/2010/main">
-        <p14:section name="开场" id="{8ddb8e42-d955-15ed-0cfc-18ade258b697}">
+        <p14:section name="开场" id="{9959ab7c-4826-208a-3f8f-76541efbd0ce}">
           <p14:sldIdLst>
             <p14:sldId id="256"/>
             <p14:sldId id="257"/>
           </p14:sldIdLst>
         </p14:section>
-        <p14:section name="报告介绍" id="{2281cdfa-d88f-c72c-3f05-003993a7ff03}">
+        <p14:section name="报告介绍" id="{f55b9de3-9361-a72f-6b24-31b381687060}">
           <p14:sldIdLst>
             <p14:sldId id="258"/>
             <p14:sldId id="259"/>
@@ -134,7 +134,7 @@
             <p14:sldId id="261"/>
           </p14:sldIdLst>
         </p14:section>
-        <p14:section name="方法评价" id="{94be0154-8ef7-c04c-6143-ebf562626050}">
+        <p14:section name="方法评价" id="{31b874d5-82f1-013e-058a-6f3a52288bf3}">
           <p14:sldIdLst>
             <p14:sldId id="262"/>
             <p14:sldId id="263"/>
@@ -143,12 +143,12 @@
             <p14:sldId id="266"/>
           </p14:sldIdLst>
         </p14:section>
-        <p14:section name="结论" id="{e2bc6846-180b-010c-6a6f-08d2d818f699}">
+        <p14:section name="结论" id="{1846122c-dd50-fd44-a3a3-fa189c562ee0}">
           <p14:sldIdLst>
             <p14:sldId id="267"/>
           </p14:sldIdLst>
         </p14:section>
-        <p14:section name="附录（备问）" id="{1ae18802-e9b4-84f1-4976-b0d47a6dbd19}">
+        <p14:section name="附录（备问）" id="{91233d5b-ebe3-d90f-bc6f-d82a39b05f19}">
           <p14:sldIdLst>
             <p14:sldId id="268"/>
             <p14:sldId id="269"/>
@@ -161,365 +161,6 @@
     </p:ext>
   </p:extLst>
 </p:presentation>
-</file>
-
-<file path=ppt/charts/chart1.xml><?xml version="1.0" encoding="utf-8"?>
-<c:chartSpace xmlns:c="http://schemas.openxmlformats.org/drawingml/2006/chart" xmlns:a="http://schemas.openxmlformats.org/drawingml/2006/main" xmlns:r="http://schemas.openxmlformats.org/officeDocument/2006/relationships">
-  <c:date1904 val="0"/>
-  <c:roundedCorners val="1"/>
-  <c:chart>
-    <c:title>
-      <c:tx>
-        <c:rich>
-          <a:bodyPr/>
-          <a:lstStyle/>
-          <a:p>
-            <a:pPr>
-              <a:defRPr sz="1500" b="0" i="0" u="none" strike="noStrike">
-                <a:solidFill>
-                  <a:srgbClr val="6B7280"/>
-                </a:solidFill>
-                <a:latin typeface="+mn-lt"/>
-              </a:defRPr>
-            </a:pPr>
-            <a:r>
-              <a:rPr sz="1500" b="0" i="0" u="none" strike="noStrike">
-                <a:solidFill>
-                  <a:srgbClr val="6B7280"/>
-                </a:solidFill>
-                <a:latin typeface="+mn-lt"/>
-              </a:rPr>
-              <a:t>平均检索时长（分钟）</a:t>
-            </a:r>
-          </a:p>
-        </c:rich>
-      </c:tx>
-      <c:layout/>
-      <c:overlay val="0"/>
-    </c:title>
-    <c:autoTitleDeleted val="0"/>
-    <c:plotArea>
-      <c:layout/>
-      <c:barChart>
-        <c:barDir val="bar"/>
-        <c:grouping val="clustered"/>
-        <c:varyColors val="0"/>
-        <c:ser>
-          <c:idx val="0"/>
-          <c:order val="0"/>
-          <c:tx>
-            <c:strRef>
-              <c:f>Sheet1!$B$1</c:f>
-              <c:strCache>
-                <c:ptCount val="1"/>
-                <c:pt idx="0">
-                  <c:v>检索时长</c:v>
-                </c:pt>
-              </c:strCache>
-            </c:strRef>
-          </c:tx>
-          <c:spPr>
-            <a:solidFill>
-              <a:srgbClr val="C9CED6"/>
-            </a:solidFill>
-            <a:effectLst/>
-          </c:spPr>
-          <c:invertIfNegative val="0"/>
-          <c:dLbls>
-            <c:numFmt formatCode="#,##0" sourceLinked="0"/>
-            <c:txPr>
-              <a:bodyPr/>
-              <a:lstStyle/>
-              <a:p>
-                <a:pPr>
-                  <a:defRPr b="0" i="0" strike="noStrike" sz="1500" u="none">
-                    <a:solidFill>
-                      <a:srgbClr val="1F2937"/>
-                    </a:solidFill>
-                    <a:latin typeface="+mn-lt"/>
-                  </a:defRPr>
-                </a:pPr>
-              </a:p>
-            </c:txPr>
-            <c:showLegendKey val="0"/>
-            <c:showVal val="1"/>
-            <c:showCatName val="0"/>
-            <c:showSerName val="0"/>
-            <c:showPercent val="0"/>
-            <c:showBubbleSize val="0"/>
-            <c:showLeaderLines val="0"/>
-          </c:dLbls>
-          <c:dPt>
-            <c:idx val="0"/>
-            <c:invertIfNegative val="0"/>
-            <c:bubble3D val="0"/>
-            <c:spPr>
-              <a:solidFill>
-                <a:srgbClr val="C9CED6"/>
-              </a:solidFill>
-              <a:effectLst/>
-            </c:spPr>
-          </c:dPt>
-          <c:dPt>
-            <c:idx val="1"/>
-            <c:invertIfNegative val="0"/>
-            <c:bubble3D val="0"/>
-            <c:spPr>
-              <a:solidFill>
-                <a:srgbClr val="C9CED6"/>
-              </a:solidFill>
-              <a:effectLst/>
-            </c:spPr>
-          </c:dPt>
-          <c:dPt>
-            <c:idx val="2"/>
-            <c:invertIfNegative val="0"/>
-            <c:bubble3D val="0"/>
-            <c:spPr>
-              <a:solidFill>
-                <a:srgbClr val="C9CED6"/>
-              </a:solidFill>
-              <a:effectLst/>
-            </c:spPr>
-          </c:dPt>
-          <c:dPt>
-            <c:idx val="3"/>
-            <c:invertIfNegative val="0"/>
-            <c:bubble3D val="0"/>
-            <c:spPr>
-              <a:solidFill>
-                <a:srgbClr val="C9CED6"/>
-              </a:solidFill>
-              <a:effectLst/>
-            </c:spPr>
-          </c:dPt>
-          <c:dPt>
-            <c:idx val="4"/>
-            <c:invertIfNegative val="0"/>
-            <c:bubble3D val="0"/>
-            <c:spPr>
-              <a:solidFill>
-                <a:srgbClr val="C9CED6"/>
-              </a:solidFill>
-              <a:effectLst/>
-            </c:spPr>
-          </c:dPt>
-          <c:dPt>
-            <c:idx val="5"/>
-            <c:invertIfNegative val="0"/>
-            <c:bubble3D val="0"/>
-            <c:spPr>
-              <a:solidFill>
-                <a:srgbClr val="2F6690"/>
-              </a:solidFill>
-              <a:effectLst/>
-            </c:spPr>
-          </c:dPt>
-          <c:dPt>
-            <c:idx val="6"/>
-            <c:invertIfNegative val="0"/>
-            <c:bubble3D val="0"/>
-            <c:spPr>
-              <a:solidFill>
-                <a:srgbClr val="D9542B"/>
-              </a:solidFill>
-              <a:effectLst/>
-            </c:spPr>
-          </c:dPt>
-          <c:cat>
-            <c:multiLvlStrRef>
-              <c:f>Sheet1!$A$2:$A$8</c:f>
-              <c:multiLvlStrCache>
-                <c:ptCount val="7"/>
-                <c:lvl>
-                  <c:pt idx="0">
-                    <c:v>巴西</c:v>
-                  </c:pt>
-                  <c:pt idx="1">
-                    <c:v>法国</c:v>
-                  </c:pt>
-                  <c:pt idx="2">
-                    <c:v>德国</c:v>
-                  </c:pt>
-                  <c:pt idx="3">
-                    <c:v>墨西哥</c:v>
-                  </c:pt>
-                  <c:pt idx="4">
-                    <c:v>英国</c:v>
-                  </c:pt>
-                  <c:pt idx="5">
-                    <c:v>美国</c:v>
-                  </c:pt>
-                  <c:pt idx="6">
-                    <c:v>六国均值</c:v>
-                  </c:pt>
-                </c:lvl>
-              </c:multiLvlStrCache>
-            </c:multiLvlStrRef>
-          </c:cat>
-          <c:val>
-            <c:numRef>
-              <c:f>Sheet1!$B$2:$B$8</c:f>
-              <c:numCache>
-                <c:formatCode>General</c:formatCode>
-                <c:ptCount val="7"/>
-                <c:pt idx="0">
-                  <c:v>12</c:v>
-                </c:pt>
-                <c:pt idx="1">
-                  <c:v>26</c:v>
-                </c:pt>
-                <c:pt idx="2">
-                  <c:v>11</c:v>
-                </c:pt>
-                <c:pt idx="3">
-                  <c:v>11</c:v>
-                </c:pt>
-                <c:pt idx="4">
-                  <c:v>12</c:v>
-                </c:pt>
-                <c:pt idx="5">
-                  <c:v>12</c:v>
-                </c:pt>
-                <c:pt idx="6">
-                  <c:v>14</c:v>
-                </c:pt>
-              </c:numCache>
-            </c:numRef>
-          </c:val>
-        </c:ser>
-        <c:dLbls>
-          <c:numFmt formatCode="#,##0" sourceLinked="0"/>
-          <c:txPr>
-            <a:bodyPr/>
-            <a:lstStyle/>
-            <a:p>
-              <a:pPr>
-                <a:defRPr b="0" i="0" strike="noStrike" sz="1500" u="none">
-                  <a:solidFill>
-                    <a:srgbClr val="1F2937"/>
-                  </a:solidFill>
-                  <a:latin typeface="+mn-lt"/>
-                </a:defRPr>
-              </a:pPr>
-            </a:p>
-          </c:txPr>
-          <c:showLegendKey val="0"/>
-          <c:showVal val="1"/>
-          <c:showCatName val="0"/>
-          <c:showSerName val="0"/>
-          <c:showPercent val="0"/>
-          <c:showBubbleSize val="0"/>
-          <c:showLeaderLines val="0"/>
-        </c:dLbls>
-        <c:gapWidth val="45"/>
-        <c:overlap val="0"/>
-        <c:axId val="2094734554"/>
-        <c:axId val="2094734552"/>
-        <c:axId val="2094734556"/>
-      </c:barChart>
-      <c:catAx>
-        <c:axId val="2094734554"/>
-        <c:scaling>
-          <c:orientation val="maxMin"/>
-        </c:scaling>
-        <c:delete val="0"/>
-        <c:axPos val="l"/>
-        <c:numFmt formatCode="General" sourceLinked="1"/>
-        <c:majorTickMark val="out"/>
-        <c:minorTickMark val="none"/>
-        <c:tickLblPos val="nextTo"/>
-        <c:spPr>
-          <a:ln w="12700" cap="flat">
-            <a:noFill/>
-            <a:prstDash val="solid"/>
-            <a:round/>
-          </a:ln>
-        </c:spPr>
-        <c:txPr>
-          <a:bodyPr/>
-          <a:lstStyle/>
-          <a:p>
-            <a:pPr>
-              <a:defRPr sz="1600" b="0" i="0" u="none" strike="noStrike">
-                <a:solidFill>
-                  <a:srgbClr val="1F2937"/>
-                </a:solidFill>
-                <a:latin typeface="+mn-lt"/>
-              </a:defRPr>
-            </a:pPr>
-            <a:endParaRPr lang="en-US"/>
-          </a:p>
-        </c:txPr>
-        <c:crossAx val="2094734552"/>
-        <c:crosses val="autoZero"/>
-        <c:auto val="1"/>
-        <c:lblAlgn val="ctr"/>
-        <c:noMultiLvlLbl val="1"/>
-      </c:catAx>
-      <c:valAx>
-        <c:axId val="2094734552"/>
-        <c:scaling>
-          <c:orientation val="minMax"/>
-          <c:max val="30"/>
-          <c:min val="0"/>
-        </c:scaling>
-        <c:delete val="1"/>
-        <c:axPos val="b"/>
-        <c:numFmt formatCode="General" sourceLinked="0"/>
-        <c:majorTickMark val="out"/>
-        <c:minorTickMark val="none"/>
-        <c:tickLblPos val="low"/>
-        <c:spPr>
-          <a:ln w="12700" cap="flat">
-            <a:solidFill>
-              <a:srgbClr val="888888"/>
-            </a:solidFill>
-            <a:prstDash val="solid"/>
-            <a:round/>
-          </a:ln>
-        </c:spPr>
-        <c:txPr>
-          <a:bodyPr/>
-          <a:lstStyle/>
-          <a:p>
-            <a:pPr>
-              <a:defRPr sz="1200" b="0" i="0" u="none" strike="noStrike">
-                <a:solidFill>
-                  <a:srgbClr val="000000"/>
-                </a:solidFill>
-                <a:latin typeface="Arial"/>
-              </a:defRPr>
-            </a:pPr>
-            <a:endParaRPr lang="en-US"/>
-          </a:p>
-        </c:txPr>
-        <c:crossAx val="2094734554"/>
-        <c:crosses val="autoZero"/>
-        <c:crossBetween val="between"/>
-      </c:valAx>
-      <c:spPr>
-        <a:noFill/>
-        <a:ln>
-          <a:noFill/>
-        </a:ln>
-        <a:effectLst/>
-      </c:spPr>
-    </c:plotArea>
-    <c:plotVisOnly val="1"/>
-    <c:dispBlanksAs val="span"/>
-  </c:chart>
-  <c:spPr>
-    <a:noFill/>
-    <a:ln>
-      <a:noFill/>
-    </a:ln>
-    <a:effectLst/>
-  </c:spPr>
-  <c:externalData r:id="rId1">
-    <c:autoUpdate val="0"/>
-  </c:externalData>
-</c:chartSpace>
 </file>
 
 <file path=ppt/notesMasters/notesMaster1.xml><?xml version="1.0" encoding="utf-8"?>
@@ -2167,8 +1808,8 @@
         </p:nvSpPr>
         <p:spPr>
           <a:xfrm>
-            <a:off x="731520" y="1828800"/>
-            <a:ext cx="6583680" cy="1645920"/>
+            <a:off x="731520" y="1325880"/>
+            <a:ext cx="5394960" cy="1600200"/>
           </a:xfrm>
           <a:prstGeom prst="rect">
             <a:avLst/>
@@ -2206,8 +1847,8 @@
         </p:nvSpPr>
         <p:spPr>
           <a:xfrm>
-            <a:off x="731520" y="3703320"/>
-            <a:ext cx="6583680" cy="548640"/>
+            <a:off x="731520" y="3063240"/>
+            <a:ext cx="5394960" cy="457200"/>
           </a:xfrm>
           <a:prstGeom prst="rect">
             <a:avLst/>
@@ -2817,16 +2458,40 @@
           <a:chExt cx="0" cy="0"/>
         </a:xfrm>
       </p:grpSpPr>
-      <p:sp>
-        <p:nvSpPr>
-          <p:cNvPr id="2" name="课程名"/>
+      <p:pic>
+        <p:nvPicPr>
+          <p:cNvPr id="2" name="封面图" descr="/home/user/ppt/build/assets/cover_hero.jpg">    </p:cNvPr>
+          <p:cNvPicPr>
+            <a:picLocks noChangeAspect="1"/>
+          </p:cNvPicPr>
+          <p:nvPr/>
+        </p:nvPicPr>
+        <p:blipFill>
+          <a:blip r:embed="rId1"/>
+          <a:stretch>
+            <a:fillRect/>
+          </a:stretch>
+        </p:blipFill>
+        <p:spPr>
+          <a:xfrm>
+            <a:off x="6400800" y="0"/>
+            <a:ext cx="5790895" cy="6858000"/>
+          </a:xfrm>
+          <a:prstGeom prst="rect">
+            <a:avLst/>
+          </a:prstGeom>
+        </p:spPr>
+      </p:pic>
+      <p:sp>
+        <p:nvSpPr>
+          <p:cNvPr id="3" name="课程名"/>
           <p:cNvSpPr txBox="1"/>
           <p:nvPr/>
         </p:nvSpPr>
         <p:spPr>
           <a:xfrm>
-            <a:off x="731520" y="1188720"/>
-            <a:ext cx="6583680" cy="365760"/>
+            <a:off x="731520" y="868680"/>
+            <a:ext cx="5394960" cy="365760"/>
           </a:xfrm>
           <a:prstGeom prst="rect">
             <a:avLst/>
@@ -2855,7 +2520,7 @@
       </p:sp>
       <p:sp>
         <p:nvSpPr>
-          <p:cNvPr id="3" name="Text 0"/>
+          <p:cNvPr id="4" name="Text 0"/>
           <p:cNvSpPr/>
           <p:nvPr>
             <p:ph idx="100" type="title" hasCustomPrompt="1"/>
@@ -2863,8 +2528,8 @@
         </p:nvSpPr>
         <p:spPr>
           <a:xfrm>
-            <a:off x="731520" y="1828800"/>
-            <a:ext cx="6583680" cy="1645920"/>
+            <a:off x="731520" y="1325880"/>
+            <a:ext cx="5394960" cy="1600200"/>
           </a:xfrm>
           <a:prstGeom prst="rect">
             <a:avLst/>
@@ -2907,7 +2572,7 @@
       </p:sp>
       <p:sp>
         <p:nvSpPr>
-          <p:cNvPr id="4" name="Text 0"/>
+          <p:cNvPr id="5" name="Text 0"/>
           <p:cNvSpPr/>
           <p:nvPr>
             <p:ph idx="101" type="body" hasCustomPrompt="1"/>
@@ -2915,8 +2580,8 @@
         </p:nvSpPr>
         <p:spPr>
           <a:xfrm>
-            <a:off x="731520" y="3703320"/>
-            <a:ext cx="6583680" cy="548640"/>
+            <a:off x="731520" y="3063240"/>
+            <a:ext cx="5394960" cy="457200"/>
           </a:xfrm>
           <a:prstGeom prst="rect">
             <a:avLst/>
@@ -2945,14 +2610,14 @@
       </p:sp>
       <p:sp>
         <p:nvSpPr>
-          <p:cNvPr id="5" name="封面分隔线"/>
+          <p:cNvPr id="6" name="封面分隔线"/>
           <p:cNvSpPr/>
           <p:nvPr/>
         </p:nvSpPr>
         <p:spPr>
           <a:xfrm>
-            <a:off x="8138160" y="1737360"/>
-            <a:ext cx="3291840" cy="0"/>
+            <a:off x="731520" y="4160520"/>
+            <a:ext cx="5120640" cy="0"/>
           </a:xfrm>
           <a:prstGeom prst="line">
             <a:avLst/>
@@ -2968,14 +2633,14 @@
       </p:sp>
       <p:sp>
         <p:nvSpPr>
-          <p:cNvPr id="6" name="封面数字"/>
+          <p:cNvPr id="7" name="封面数字"/>
           <p:cNvSpPr txBox="1"/>
           <p:nvPr/>
         </p:nvSpPr>
         <p:spPr>
           <a:xfrm>
-            <a:off x="8138160" y="1874520"/>
-            <a:ext cx="3291840" cy="1463040"/>
+            <a:off x="731520" y="4343400"/>
+            <a:ext cx="1828800" cy="914400"/>
           </a:xfrm>
           <a:prstGeom prst="rect">
             <a:avLst/>
@@ -2991,7 +2656,7 @@
               <a:buNone/>
             </a:pPr>
             <a:r>
-              <a:rPr lang="en-US" sz="9600" b="1" dirty="0">
+              <a:rPr lang="en-US" sz="4800" b="1" dirty="0">
                 <a:solidFill>
                   <a:schemeClr val="accent4"/>
                 </a:solidFill>
@@ -3001,20 +2666,20 @@
               </a:rPr>
               <a:t>54%</a:t>
             </a:r>
-            <a:endParaRPr lang="en-US" sz="9600" dirty="0"/>
-          </a:p>
-        </p:txBody>
-      </p:sp>
-      <p:sp>
-        <p:nvSpPr>
-          <p:cNvPr id="7" name="封面数字说明"/>
+            <a:endParaRPr lang="en-US" sz="4800" dirty="0"/>
+          </a:p>
+        </p:txBody>
+      </p:sp>
+      <p:sp>
+        <p:nvSpPr>
+          <p:cNvPr id="8" name="封面问题"/>
           <p:cNvSpPr txBox="1"/>
           <p:nvPr/>
         </p:nvSpPr>
         <p:spPr>
           <a:xfrm>
-            <a:off x="8138160" y="3383280"/>
-            <a:ext cx="3291840" cy="365760"/>
+            <a:off x="2651760" y="4343400"/>
+            <a:ext cx="3291840" cy="914400"/>
           </a:xfrm>
           <a:prstGeom prst="rect">
             <a:avLst/>
@@ -3027,6 +2692,9 @@
           <a:lstStyle/>
           <a:p>
             <a:pPr indent="0" marL="0">
+              <a:spcAft>
+                <a:spcPts val="400"/>
+              </a:spcAft>
               <a:buNone/>
             </a:pPr>
             <a:r>
@@ -3039,53 +2707,11 @@
             </a:r>
             <a:endParaRPr lang="en-US" sz="1600" dirty="0"/>
           </a:p>
-        </p:txBody>
-      </p:sp>
-      <p:sp>
-        <p:nvSpPr>
-          <p:cNvPr id="8" name="封面分隔线"/>
-          <p:cNvSpPr/>
-          <p:nvPr/>
-        </p:nvSpPr>
-        <p:spPr>
-          <a:xfrm>
-            <a:off x="8138160" y="3977640"/>
-            <a:ext cx="3291840" cy="0"/>
-          </a:xfrm>
-          <a:prstGeom prst="line">
-            <a:avLst/>
-          </a:prstGeom>
-          <a:noFill/>
-          <a:ln w="9525">
-            <a:solidFill>
-              <a:srgbClr val="3A4766"/>
-            </a:solidFill>
-            <a:prstDash val="solid"/>
-          </a:ln>
-        </p:spPr>
-      </p:sp>
-      <p:sp>
-        <p:nvSpPr>
-          <p:cNvPr id="9" name="封面问题"/>
-          <p:cNvSpPr txBox="1"/>
-          <p:nvPr/>
-        </p:nvSpPr>
-        <p:spPr>
-          <a:xfrm>
-            <a:off x="8138160" y="4114800"/>
-            <a:ext cx="3291840" cy="411480"/>
-          </a:xfrm>
-          <a:prstGeom prst="rect">
-            <a:avLst/>
-          </a:prstGeom>
-          <a:noFill/>
-          <a:ln/>
-        </p:spPr>
-        <p:txBody>
-          <a:bodyPr wrap="square" lIns="0" tIns="0" rIns="0" bIns="0" rtlCol="0" anchor="ctr"/>
-          <a:lstStyle/>
           <a:p>
             <a:pPr indent="0" marL="0">
+              <a:spcAft>
+                <a:spcPts val="400"/>
+              </a:spcAft>
               <a:buNone/>
             </a:pPr>
             <a:r>
@@ -3105,6 +2731,205 @@
   <p:clrMapOvr>
     <a:masterClrMapping/>
   </p:clrMapOvr>
+  <p:transition spd="med">
+    <p:fade/>
+  </p:transition>
+  <p:timing>
+    <p:tnLst>
+      <p:par>
+        <p:cTn id="1" dur="indefinite" restart="never" nodeType="tmRoot">
+          <p:childTnLst>
+            <p:seq concurrent="1" nextAc="seek">
+              <p:cTn id="2" dur="indefinite" nodeType="mainSeq">
+                <p:childTnLst>
+                  <p:par>
+                    <p:cTn id="3" fill="hold">
+                      <p:stCondLst>
+                        <p:cond delay="indefinite"/>
+                        <p:cond evt="onBegin" delay="0">
+                          <p:tn val="2"/>
+                        </p:cond>
+                      </p:stCondLst>
+                      <p:childTnLst>
+                        <p:par>
+                          <p:cTn id="16" fill="hold">
+                            <p:stCondLst>
+                              <p:cond delay="0"/>
+                            </p:stCondLst>
+                            <p:childTnLst>
+                              <p:par>
+                                <p:cTn id="4" presetID="10" presetClass="entr" presetSubtype="0" fill="hold" grpId="0" nodeType="withEffect">
+                                  <p:stCondLst>
+                                    <p:cond delay="200"/>
+                                  </p:stCondLst>
+                                  <p:childTnLst>
+                                    <p:set>
+                                      <p:cBhvr>
+                                        <p:cTn id="5" dur="1" fill="hold">
+                                          <p:stCondLst>
+                                            <p:cond delay="0"/>
+                                          </p:stCondLst>
+                                        </p:cTn>
+                                        <p:tgtEl>
+                                          <p:spTgt spid="2"/>
+                                        </p:tgtEl>
+                                        <p:attrNameLst>
+                                          <p:attrName>style.visibility</p:attrName>
+                                        </p:attrNameLst>
+                                      </p:cBhvr>
+                                      <p:to>
+                                        <p:strVal val="visible"/>
+                                      </p:to>
+                                    </p:set>
+                                    <p:animEffect transition="in" filter="fade">
+                                      <p:cBhvr>
+                                        <p:cTn id="6" dur="900"/>
+                                        <p:tgtEl>
+                                          <p:spTgt spid="2"/>
+                                        </p:tgtEl>
+                                      </p:cBhvr>
+                                    </p:animEffect>
+                                  </p:childTnLst>
+                                </p:cTn>
+                              </p:par>
+                              <p:par>
+                                <p:cTn id="7" presetID="10" presetClass="entr" presetSubtype="0" fill="hold" grpId="0" nodeType="withEffect">
+                                  <p:stCondLst>
+                                    <p:cond delay="550"/>
+                                  </p:stCondLst>
+                                  <p:childTnLst>
+                                    <p:set>
+                                      <p:cBhvr>
+                                        <p:cTn id="8" dur="1" fill="hold">
+                                          <p:stCondLst>
+                                            <p:cond delay="0"/>
+                                          </p:stCondLst>
+                                        </p:cTn>
+                                        <p:tgtEl>
+                                          <p:spTgt spid="6"/>
+                                        </p:tgtEl>
+                                        <p:attrNameLst>
+                                          <p:attrName>style.visibility</p:attrName>
+                                        </p:attrNameLst>
+                                      </p:cBhvr>
+                                      <p:to>
+                                        <p:strVal val="visible"/>
+                                      </p:to>
+                                    </p:set>
+                                    <p:animEffect transition="in" filter="fade">
+                                      <p:cBhvr>
+                                        <p:cTn id="9" dur="500"/>
+                                        <p:tgtEl>
+                                          <p:spTgt spid="6"/>
+                                        </p:tgtEl>
+                                      </p:cBhvr>
+                                    </p:animEffect>
+                                  </p:childTnLst>
+                                </p:cTn>
+                              </p:par>
+                              <p:par>
+                                <p:cTn id="10" presetID="10" presetClass="entr" presetSubtype="0" fill="hold" grpId="0" nodeType="withEffect">
+                                  <p:stCondLst>
+                                    <p:cond delay="550"/>
+                                  </p:stCondLst>
+                                  <p:childTnLst>
+                                    <p:set>
+                                      <p:cBhvr>
+                                        <p:cTn id="11" dur="1" fill="hold">
+                                          <p:stCondLst>
+                                            <p:cond delay="0"/>
+                                          </p:stCondLst>
+                                        </p:cTn>
+                                        <p:tgtEl>
+                                          <p:spTgt spid="7"/>
+                                        </p:tgtEl>
+                                        <p:attrNameLst>
+                                          <p:attrName>style.visibility</p:attrName>
+                                        </p:attrNameLst>
+                                      </p:cBhvr>
+                                      <p:to>
+                                        <p:strVal val="visible"/>
+                                      </p:to>
+                                    </p:set>
+                                    <p:animEffect transition="in" filter="fade">
+                                      <p:cBhvr>
+                                        <p:cTn id="12" dur="500"/>
+                                        <p:tgtEl>
+                                          <p:spTgt spid="7"/>
+                                        </p:tgtEl>
+                                      </p:cBhvr>
+                                    </p:animEffect>
+                                  </p:childTnLst>
+                                </p:cTn>
+                              </p:par>
+                              <p:par>
+                                <p:cTn id="13" presetID="10" presetClass="entr" presetSubtype="0" fill="hold" grpId="0" nodeType="withEffect">
+                                  <p:stCondLst>
+                                    <p:cond delay="550"/>
+                                  </p:stCondLst>
+                                  <p:childTnLst>
+                                    <p:set>
+                                      <p:cBhvr>
+                                        <p:cTn id="14" dur="1" fill="hold">
+                                          <p:stCondLst>
+                                            <p:cond delay="0"/>
+                                          </p:stCondLst>
+                                        </p:cTn>
+                                        <p:tgtEl>
+                                          <p:spTgt spid="8"/>
+                                        </p:tgtEl>
+                                        <p:attrNameLst>
+                                          <p:attrName>style.visibility</p:attrName>
+                                        </p:attrNameLst>
+                                      </p:cBhvr>
+                                      <p:to>
+                                        <p:strVal val="visible"/>
+                                      </p:to>
+                                    </p:set>
+                                    <p:animEffect transition="in" filter="fade">
+                                      <p:cBhvr>
+                                        <p:cTn id="15" dur="500"/>
+                                        <p:tgtEl>
+                                          <p:spTgt spid="8"/>
+                                        </p:tgtEl>
+                                      </p:cBhvr>
+                                    </p:animEffect>
+                                  </p:childTnLst>
+                                </p:cTn>
+                              </p:par>
+                            </p:childTnLst>
+                          </p:cTn>
+                        </p:par>
+                      </p:childTnLst>
+                    </p:cTn>
+                  </p:par>
+                </p:childTnLst>
+              </p:cTn>
+              <p:prevCondLst>
+                <p:cond evt="onPrev" delay="0">
+                  <p:tgtEl>
+                    <p:sldTgt/>
+                  </p:tgtEl>
+                </p:cond>
+              </p:prevCondLst>
+              <p:nextCondLst>
+                <p:cond evt="onNext" delay="0">
+                  <p:tgtEl>
+                    <p:sldTgt/>
+                  </p:tgtEl>
+                </p:cond>
+              </p:nextCondLst>
+            </p:seq>
+          </p:childTnLst>
+        </p:cTn>
+      </p:par>
+    </p:tnLst>
+    <p:bldLst>
+      <p:bldP spid="6" grpId="0" animBg="1"/>
+      <p:bldP spid="7" grpId="0" animBg="1"/>
+      <p:bldP spid="8" grpId="0" animBg="1"/>
+    </p:bldLst>
+  </p:timing>
 </p:sld>
 </file>
 
@@ -3939,6 +3764,566 @@
   <p:clrMapOvr>
     <a:masterClrMapping/>
   </p:clrMapOvr>
+  <p:transition spd="med">
+    <p:fade/>
+  </p:transition>
+  <p:timing>
+    <p:tnLst>
+      <p:par>
+        <p:cTn id="1" dur="indefinite" restart="never" nodeType="tmRoot">
+          <p:childTnLst>
+            <p:seq concurrent="1" nextAc="seek">
+              <p:cTn id="2" dur="indefinite" nodeType="mainSeq">
+                <p:childTnLst>
+                  <p:par>
+                    <p:cTn id="3" fill="hold">
+                      <p:stCondLst>
+                        <p:cond delay="indefinite"/>
+                        <p:cond evt="onBegin" delay="0">
+                          <p:tn val="2"/>
+                        </p:cond>
+                      </p:stCondLst>
+                      <p:childTnLst>
+                        <p:par>
+                          <p:cTn id="46" fill="hold">
+                            <p:stCondLst>
+                              <p:cond delay="0"/>
+                            </p:stCondLst>
+                            <p:childTnLst>
+                              <p:par>
+                                <p:cTn id="4" presetID="10" presetClass="entr" presetSubtype="0" fill="hold" grpId="0" nodeType="withEffect">
+                                  <p:stCondLst>
+                                    <p:cond delay="200"/>
+                                  </p:stCondLst>
+                                  <p:childTnLst>
+                                    <p:set>
+                                      <p:cBhvr>
+                                        <p:cTn id="5" dur="1" fill="hold">
+                                          <p:stCondLst>
+                                            <p:cond delay="0"/>
+                                          </p:stCondLst>
+                                        </p:cTn>
+                                        <p:tgtEl>
+                                          <p:spTgt spid="4"/>
+                                        </p:tgtEl>
+                                        <p:attrNameLst>
+                                          <p:attrName>style.visibility</p:attrName>
+                                        </p:attrNameLst>
+                                      </p:cBhvr>
+                                      <p:to>
+                                        <p:strVal val="visible"/>
+                                      </p:to>
+                                    </p:set>
+                                    <p:animEffect transition="in" filter="fade">
+                                      <p:cBhvr>
+                                        <p:cTn id="6" dur="500"/>
+                                        <p:tgtEl>
+                                          <p:spTgt spid="4"/>
+                                        </p:tgtEl>
+                                      </p:cBhvr>
+                                    </p:animEffect>
+                                  </p:childTnLst>
+                                </p:cTn>
+                              </p:par>
+                              <p:par>
+                                <p:cTn id="7" presetID="10" presetClass="entr" presetSubtype="0" fill="hold" grpId="0" nodeType="withEffect">
+                                  <p:stCondLst>
+                                    <p:cond delay="200"/>
+                                  </p:stCondLst>
+                                  <p:childTnLst>
+                                    <p:set>
+                                      <p:cBhvr>
+                                        <p:cTn id="8" dur="1" fill="hold">
+                                          <p:stCondLst>
+                                            <p:cond delay="0"/>
+                                          </p:stCondLst>
+                                        </p:cTn>
+                                        <p:tgtEl>
+                                          <p:spTgt spid="5"/>
+                                        </p:tgtEl>
+                                        <p:attrNameLst>
+                                          <p:attrName>style.visibility</p:attrName>
+                                        </p:attrNameLst>
+                                      </p:cBhvr>
+                                      <p:to>
+                                        <p:strVal val="visible"/>
+                                      </p:to>
+                                    </p:set>
+                                    <p:animEffect transition="in" filter="fade">
+                                      <p:cBhvr>
+                                        <p:cTn id="9" dur="500"/>
+                                        <p:tgtEl>
+                                          <p:spTgt spid="5"/>
+                                        </p:tgtEl>
+                                      </p:cBhvr>
+                                    </p:animEffect>
+                                  </p:childTnLst>
+                                </p:cTn>
+                              </p:par>
+                              <p:par>
+                                <p:cTn id="10" presetID="10" presetClass="entr" presetSubtype="0" fill="hold" grpId="0" nodeType="withEffect">
+                                  <p:stCondLst>
+                                    <p:cond delay="200"/>
+                                  </p:stCondLst>
+                                  <p:childTnLst>
+                                    <p:set>
+                                      <p:cBhvr>
+                                        <p:cTn id="11" dur="1" fill="hold">
+                                          <p:stCondLst>
+                                            <p:cond delay="0"/>
+                                          </p:stCondLst>
+                                        </p:cTn>
+                                        <p:tgtEl>
+                                          <p:spTgt spid="6"/>
+                                        </p:tgtEl>
+                                        <p:attrNameLst>
+                                          <p:attrName>style.visibility</p:attrName>
+                                        </p:attrNameLst>
+                                      </p:cBhvr>
+                                      <p:to>
+                                        <p:strVal val="visible"/>
+                                      </p:to>
+                                    </p:set>
+                                    <p:animEffect transition="in" filter="fade">
+                                      <p:cBhvr>
+                                        <p:cTn id="12" dur="500"/>
+                                        <p:tgtEl>
+                                          <p:spTgt spid="6"/>
+                                        </p:tgtEl>
+                                      </p:cBhvr>
+                                    </p:animEffect>
+                                  </p:childTnLst>
+                                </p:cTn>
+                              </p:par>
+                              <p:par>
+                                <p:cTn id="13" presetID="10" presetClass="entr" presetSubtype="0" fill="hold" grpId="0" nodeType="withEffect">
+                                  <p:stCondLst>
+                                    <p:cond delay="200"/>
+                                  </p:stCondLst>
+                                  <p:childTnLst>
+                                    <p:set>
+                                      <p:cBhvr>
+                                        <p:cTn id="14" dur="1" fill="hold">
+                                          <p:stCondLst>
+                                            <p:cond delay="0"/>
+                                          </p:stCondLst>
+                                        </p:cTn>
+                                        <p:tgtEl>
+                                          <p:spTgt spid="7"/>
+                                        </p:tgtEl>
+                                        <p:attrNameLst>
+                                          <p:attrName>style.visibility</p:attrName>
+                                        </p:attrNameLst>
+                                      </p:cBhvr>
+                                      <p:to>
+                                        <p:strVal val="visible"/>
+                                      </p:to>
+                                    </p:set>
+                                    <p:animEffect transition="in" filter="fade">
+                                      <p:cBhvr>
+                                        <p:cTn id="15" dur="500"/>
+                                        <p:tgtEl>
+                                          <p:spTgt spid="7"/>
+                                        </p:tgtEl>
+                                      </p:cBhvr>
+                                    </p:animEffect>
+                                  </p:childTnLst>
+                                </p:cTn>
+                              </p:par>
+                              <p:par>
+                                <p:cTn id="16" presetID="10" presetClass="entr" presetSubtype="0" fill="hold" grpId="0" nodeType="withEffect">
+                                  <p:stCondLst>
+                                    <p:cond delay="550"/>
+                                  </p:stCondLst>
+                                  <p:childTnLst>
+                                    <p:set>
+                                      <p:cBhvr>
+                                        <p:cTn id="17" dur="1" fill="hold">
+                                          <p:stCondLst>
+                                            <p:cond delay="0"/>
+                                          </p:stCondLst>
+                                        </p:cTn>
+                                        <p:tgtEl>
+                                          <p:spTgt spid="8"/>
+                                        </p:tgtEl>
+                                        <p:attrNameLst>
+                                          <p:attrName>style.visibility</p:attrName>
+                                        </p:attrNameLst>
+                                      </p:cBhvr>
+                                      <p:to>
+                                        <p:strVal val="visible"/>
+                                      </p:to>
+                                    </p:set>
+                                    <p:animEffect transition="in" filter="fade">
+                                      <p:cBhvr>
+                                        <p:cTn id="18" dur="500"/>
+                                        <p:tgtEl>
+                                          <p:spTgt spid="8"/>
+                                        </p:tgtEl>
+                                      </p:cBhvr>
+                                    </p:animEffect>
+                                  </p:childTnLst>
+                                </p:cTn>
+                              </p:par>
+                              <p:par>
+                                <p:cTn id="19" presetID="10" presetClass="entr" presetSubtype="0" fill="hold" grpId="0" nodeType="withEffect">
+                                  <p:stCondLst>
+                                    <p:cond delay="550"/>
+                                  </p:stCondLst>
+                                  <p:childTnLst>
+                                    <p:set>
+                                      <p:cBhvr>
+                                        <p:cTn id="20" dur="1" fill="hold">
+                                          <p:stCondLst>
+                                            <p:cond delay="0"/>
+                                          </p:stCondLst>
+                                        </p:cTn>
+                                        <p:tgtEl>
+                                          <p:spTgt spid="9"/>
+                                        </p:tgtEl>
+                                        <p:attrNameLst>
+                                          <p:attrName>style.visibility</p:attrName>
+                                        </p:attrNameLst>
+                                      </p:cBhvr>
+                                      <p:to>
+                                        <p:strVal val="visible"/>
+                                      </p:to>
+                                    </p:set>
+                                    <p:animEffect transition="in" filter="fade">
+                                      <p:cBhvr>
+                                        <p:cTn id="21" dur="500"/>
+                                        <p:tgtEl>
+                                          <p:spTgt spid="9"/>
+                                        </p:tgtEl>
+                                      </p:cBhvr>
+                                    </p:animEffect>
+                                  </p:childTnLst>
+                                </p:cTn>
+                              </p:par>
+                              <p:par>
+                                <p:cTn id="22" presetID="10" presetClass="entr" presetSubtype="0" fill="hold" grpId="0" nodeType="withEffect">
+                                  <p:stCondLst>
+                                    <p:cond delay="550"/>
+                                  </p:stCondLst>
+                                  <p:childTnLst>
+                                    <p:set>
+                                      <p:cBhvr>
+                                        <p:cTn id="23" dur="1" fill="hold">
+                                          <p:stCondLst>
+                                            <p:cond delay="0"/>
+                                          </p:stCondLst>
+                                        </p:cTn>
+                                        <p:tgtEl>
+                                          <p:spTgt spid="10"/>
+                                        </p:tgtEl>
+                                        <p:attrNameLst>
+                                          <p:attrName>style.visibility</p:attrName>
+                                        </p:attrNameLst>
+                                      </p:cBhvr>
+                                      <p:to>
+                                        <p:strVal val="visible"/>
+                                      </p:to>
+                                    </p:set>
+                                    <p:animEffect transition="in" filter="fade">
+                                      <p:cBhvr>
+                                        <p:cTn id="24" dur="500"/>
+                                        <p:tgtEl>
+                                          <p:spTgt spid="10"/>
+                                        </p:tgtEl>
+                                      </p:cBhvr>
+                                    </p:animEffect>
+                                  </p:childTnLst>
+                                </p:cTn>
+                              </p:par>
+                              <p:par>
+                                <p:cTn id="25" presetID="10" presetClass="entr" presetSubtype="0" fill="hold" grpId="0" nodeType="withEffect">
+                                  <p:stCondLst>
+                                    <p:cond delay="550"/>
+                                  </p:stCondLst>
+                                  <p:childTnLst>
+                                    <p:set>
+                                      <p:cBhvr>
+                                        <p:cTn id="26" dur="1" fill="hold">
+                                          <p:stCondLst>
+                                            <p:cond delay="0"/>
+                                          </p:stCondLst>
+                                        </p:cTn>
+                                        <p:tgtEl>
+                                          <p:spTgt spid="11"/>
+                                        </p:tgtEl>
+                                        <p:attrNameLst>
+                                          <p:attrName>style.visibility</p:attrName>
+                                        </p:attrNameLst>
+                                      </p:cBhvr>
+                                      <p:to>
+                                        <p:strVal val="visible"/>
+                                      </p:to>
+                                    </p:set>
+                                    <p:animEffect transition="in" filter="fade">
+                                      <p:cBhvr>
+                                        <p:cTn id="27" dur="500"/>
+                                        <p:tgtEl>
+                                          <p:spTgt spid="11"/>
+                                        </p:tgtEl>
+                                      </p:cBhvr>
+                                    </p:animEffect>
+                                  </p:childTnLst>
+                                </p:cTn>
+                              </p:par>
+                              <p:par>
+                                <p:cTn id="28" presetID="10" presetClass="entr" presetSubtype="0" fill="hold" grpId="0" nodeType="withEffect">
+                                  <p:stCondLst>
+                                    <p:cond delay="900"/>
+                                  </p:stCondLst>
+                                  <p:childTnLst>
+                                    <p:set>
+                                      <p:cBhvr>
+                                        <p:cTn id="29" dur="1" fill="hold">
+                                          <p:stCondLst>
+                                            <p:cond delay="0"/>
+                                          </p:stCondLst>
+                                        </p:cTn>
+                                        <p:tgtEl>
+                                          <p:spTgt spid="13"/>
+                                        </p:tgtEl>
+                                        <p:attrNameLst>
+                                          <p:attrName>style.visibility</p:attrName>
+                                        </p:attrNameLst>
+                                      </p:cBhvr>
+                                      <p:to>
+                                        <p:strVal val="visible"/>
+                                      </p:to>
+                                    </p:set>
+                                    <p:animEffect transition="in" filter="fade">
+                                      <p:cBhvr>
+                                        <p:cTn id="30" dur="500"/>
+                                        <p:tgtEl>
+                                          <p:spTgt spid="13"/>
+                                        </p:tgtEl>
+                                      </p:cBhvr>
+                                    </p:animEffect>
+                                  </p:childTnLst>
+                                </p:cTn>
+                              </p:par>
+                              <p:par>
+                                <p:cTn id="31" presetID="10" presetClass="entr" presetSubtype="0" fill="hold" grpId="0" nodeType="withEffect">
+                                  <p:stCondLst>
+                                    <p:cond delay="900"/>
+                                  </p:stCondLst>
+                                  <p:childTnLst>
+                                    <p:set>
+                                      <p:cBhvr>
+                                        <p:cTn id="32" dur="1" fill="hold">
+                                          <p:stCondLst>
+                                            <p:cond delay="0"/>
+                                          </p:stCondLst>
+                                        </p:cTn>
+                                        <p:tgtEl>
+                                          <p:spTgt spid="14"/>
+                                        </p:tgtEl>
+                                        <p:attrNameLst>
+                                          <p:attrName>style.visibility</p:attrName>
+                                        </p:attrNameLst>
+                                      </p:cBhvr>
+                                      <p:to>
+                                        <p:strVal val="visible"/>
+                                      </p:to>
+                                    </p:set>
+                                    <p:animEffect transition="in" filter="fade">
+                                      <p:cBhvr>
+                                        <p:cTn id="33" dur="500"/>
+                                        <p:tgtEl>
+                                          <p:spTgt spid="14"/>
+                                        </p:tgtEl>
+                                      </p:cBhvr>
+                                    </p:animEffect>
+                                  </p:childTnLst>
+                                </p:cTn>
+                              </p:par>
+                              <p:par>
+                                <p:cTn id="34" presetID="10" presetClass="entr" presetSubtype="0" fill="hold" grpId="0" nodeType="withEffect">
+                                  <p:stCondLst>
+                                    <p:cond delay="1250"/>
+                                  </p:stCondLst>
+                                  <p:childTnLst>
+                                    <p:set>
+                                      <p:cBhvr>
+                                        <p:cTn id="35" dur="1" fill="hold">
+                                          <p:stCondLst>
+                                            <p:cond delay="0"/>
+                                          </p:stCondLst>
+                                        </p:cTn>
+                                        <p:tgtEl>
+                                          <p:spTgt spid="16"/>
+                                        </p:tgtEl>
+                                        <p:attrNameLst>
+                                          <p:attrName>style.visibility</p:attrName>
+                                        </p:attrNameLst>
+                                      </p:cBhvr>
+                                      <p:to>
+                                        <p:strVal val="visible"/>
+                                      </p:to>
+                                    </p:set>
+                                    <p:animEffect transition="in" filter="fade">
+                                      <p:cBhvr>
+                                        <p:cTn id="36" dur="500"/>
+                                        <p:tgtEl>
+                                          <p:spTgt spid="16"/>
+                                        </p:tgtEl>
+                                      </p:cBhvr>
+                                    </p:animEffect>
+                                  </p:childTnLst>
+                                </p:cTn>
+                              </p:par>
+                              <p:par>
+                                <p:cTn id="37" presetID="10" presetClass="entr" presetSubtype="0" fill="hold" grpId="0" nodeType="withEffect">
+                                  <p:stCondLst>
+                                    <p:cond delay="1250"/>
+                                  </p:stCondLst>
+                                  <p:childTnLst>
+                                    <p:set>
+                                      <p:cBhvr>
+                                        <p:cTn id="38" dur="1" fill="hold">
+                                          <p:stCondLst>
+                                            <p:cond delay="0"/>
+                                          </p:stCondLst>
+                                        </p:cTn>
+                                        <p:tgtEl>
+                                          <p:spTgt spid="17"/>
+                                        </p:tgtEl>
+                                        <p:attrNameLst>
+                                          <p:attrName>style.visibility</p:attrName>
+                                        </p:attrNameLst>
+                                      </p:cBhvr>
+                                      <p:to>
+                                        <p:strVal val="visible"/>
+                                      </p:to>
+                                    </p:set>
+                                    <p:animEffect transition="in" filter="fade">
+                                      <p:cBhvr>
+                                        <p:cTn id="39" dur="500"/>
+                                        <p:tgtEl>
+                                          <p:spTgt spid="17"/>
+                                        </p:tgtEl>
+                                      </p:cBhvr>
+                                    </p:animEffect>
+                                  </p:childTnLst>
+                                </p:cTn>
+                              </p:par>
+                              <p:par>
+                                <p:cTn id="40" presetID="10" presetClass="entr" presetSubtype="0" fill="hold" grpId="0" nodeType="withEffect">
+                                  <p:stCondLst>
+                                    <p:cond delay="1600"/>
+                                  </p:stCondLst>
+                                  <p:childTnLst>
+                                    <p:set>
+                                      <p:cBhvr>
+                                        <p:cTn id="41" dur="1" fill="hold">
+                                          <p:stCondLst>
+                                            <p:cond delay="0"/>
+                                          </p:stCondLst>
+                                        </p:cTn>
+                                        <p:tgtEl>
+                                          <p:spTgt spid="19"/>
+                                        </p:tgtEl>
+                                        <p:attrNameLst>
+                                          <p:attrName>style.visibility</p:attrName>
+                                        </p:attrNameLst>
+                                      </p:cBhvr>
+                                      <p:to>
+                                        <p:strVal val="visible"/>
+                                      </p:to>
+                                    </p:set>
+                                    <p:animEffect transition="in" filter="fade">
+                                      <p:cBhvr>
+                                        <p:cTn id="42" dur="500"/>
+                                        <p:tgtEl>
+                                          <p:spTgt spid="19"/>
+                                        </p:tgtEl>
+                                      </p:cBhvr>
+                                    </p:animEffect>
+                                  </p:childTnLst>
+                                </p:cTn>
+                              </p:par>
+                              <p:par>
+                                <p:cTn id="43" presetID="10" presetClass="entr" presetSubtype="0" fill="hold" grpId="0" nodeType="withEffect">
+                                  <p:stCondLst>
+                                    <p:cond delay="1600"/>
+                                  </p:stCondLst>
+                                  <p:childTnLst>
+                                    <p:set>
+                                      <p:cBhvr>
+                                        <p:cTn id="44" dur="1" fill="hold">
+                                          <p:stCondLst>
+                                            <p:cond delay="0"/>
+                                          </p:stCondLst>
+                                        </p:cTn>
+                                        <p:tgtEl>
+                                          <p:spTgt spid="20"/>
+                                        </p:tgtEl>
+                                        <p:attrNameLst>
+                                          <p:attrName>style.visibility</p:attrName>
+                                        </p:attrNameLst>
+                                      </p:cBhvr>
+                                      <p:to>
+                                        <p:strVal val="visible"/>
+                                      </p:to>
+                                    </p:set>
+                                    <p:animEffect transition="in" filter="fade">
+                                      <p:cBhvr>
+                                        <p:cTn id="45" dur="500"/>
+                                        <p:tgtEl>
+                                          <p:spTgt spid="20"/>
+                                        </p:tgtEl>
+                                      </p:cBhvr>
+                                    </p:animEffect>
+                                  </p:childTnLst>
+                                </p:cTn>
+                              </p:par>
+                            </p:childTnLst>
+                          </p:cTn>
+                        </p:par>
+                      </p:childTnLst>
+                    </p:cTn>
+                  </p:par>
+                </p:childTnLst>
+              </p:cTn>
+              <p:prevCondLst>
+                <p:cond evt="onPrev" delay="0">
+                  <p:tgtEl>
+                    <p:sldTgt/>
+                  </p:tgtEl>
+                </p:cond>
+              </p:prevCondLst>
+              <p:nextCondLst>
+                <p:cond evt="onNext" delay="0">
+                  <p:tgtEl>
+                    <p:sldTgt/>
+                  </p:tgtEl>
+                </p:cond>
+              </p:nextCondLst>
+            </p:seq>
+          </p:childTnLst>
+        </p:cTn>
+      </p:par>
+    </p:tnLst>
+    <p:bldLst>
+      <p:bldP spid="4" grpId="0" animBg="1"/>
+      <p:bldP spid="5" grpId="0" animBg="1"/>
+      <p:bldP spid="6" grpId="0" animBg="1"/>
+      <p:bldP spid="7" grpId="0" animBg="1"/>
+      <p:bldP spid="8" grpId="0" animBg="1"/>
+      <p:bldP spid="9" grpId="0" animBg="1"/>
+      <p:bldP spid="10" grpId="0" animBg="1"/>
+      <p:bldP spid="11" grpId="0" animBg="1"/>
+      <p:bldP spid="13" grpId="0" animBg="1"/>
+      <p:bldP spid="14" grpId="0" animBg="1"/>
+      <p:bldP spid="16" grpId="0" animBg="1"/>
+      <p:bldP spid="17" grpId="0" animBg="1"/>
+      <p:bldP spid="19" grpId="0" animBg="1"/>
+      <p:bldP spid="20" grpId="0" animBg="1"/>
+    </p:bldLst>
+  </p:timing>
 </p:sld>
 </file>
 
@@ -4877,6 +5262,710 @@
   <p:clrMapOvr>
     <a:masterClrMapping/>
   </p:clrMapOvr>
+  <p:transition spd="med">
+    <p:fade/>
+  </p:transition>
+  <p:timing>
+    <p:tnLst>
+      <p:par>
+        <p:cTn id="1" dur="indefinite" restart="never" nodeType="tmRoot">
+          <p:childTnLst>
+            <p:seq concurrent="1" nextAc="seek">
+              <p:cTn id="2" dur="indefinite" nodeType="mainSeq">
+                <p:childTnLst>
+                  <p:par>
+                    <p:cTn id="3" fill="hold">
+                      <p:stCondLst>
+                        <p:cond delay="indefinite"/>
+                        <p:cond evt="onBegin" delay="0">
+                          <p:tn val="2"/>
+                        </p:cond>
+                      </p:stCondLst>
+                      <p:childTnLst>
+                        <p:par>
+                          <p:cTn id="58" fill="hold">
+                            <p:stCondLst>
+                              <p:cond delay="0"/>
+                            </p:stCondLst>
+                            <p:childTnLst>
+                              <p:par>
+                                <p:cTn id="4" presetID="10" presetClass="entr" presetSubtype="0" fill="hold" grpId="0" nodeType="withEffect">
+                                  <p:stCondLst>
+                                    <p:cond delay="200"/>
+                                  </p:stCondLst>
+                                  <p:childTnLst>
+                                    <p:set>
+                                      <p:cBhvr>
+                                        <p:cTn id="5" dur="1" fill="hold">
+                                          <p:stCondLst>
+                                            <p:cond delay="0"/>
+                                          </p:stCondLst>
+                                        </p:cTn>
+                                        <p:tgtEl>
+                                          <p:spTgt spid="4"/>
+                                        </p:tgtEl>
+                                        <p:attrNameLst>
+                                          <p:attrName>style.visibility</p:attrName>
+                                        </p:attrNameLst>
+                                      </p:cBhvr>
+                                      <p:to>
+                                        <p:strVal val="visible"/>
+                                      </p:to>
+                                    </p:set>
+                                    <p:animEffect transition="in" filter="fade">
+                                      <p:cBhvr>
+                                        <p:cTn id="6" dur="500"/>
+                                        <p:tgtEl>
+                                          <p:spTgt spid="4"/>
+                                        </p:tgtEl>
+                                      </p:cBhvr>
+                                    </p:animEffect>
+                                  </p:childTnLst>
+                                </p:cTn>
+                              </p:par>
+                              <p:par>
+                                <p:cTn id="7" presetID="10" presetClass="entr" presetSubtype="0" fill="hold" grpId="0" nodeType="withEffect">
+                                  <p:stCondLst>
+                                    <p:cond delay="200"/>
+                                  </p:stCondLst>
+                                  <p:childTnLst>
+                                    <p:set>
+                                      <p:cBhvr>
+                                        <p:cTn id="8" dur="1" fill="hold">
+                                          <p:stCondLst>
+                                            <p:cond delay="0"/>
+                                          </p:stCondLst>
+                                        </p:cTn>
+                                        <p:tgtEl>
+                                          <p:spTgt spid="7"/>
+                                        </p:tgtEl>
+                                        <p:attrNameLst>
+                                          <p:attrName>style.visibility</p:attrName>
+                                        </p:attrNameLst>
+                                      </p:cBhvr>
+                                      <p:to>
+                                        <p:strVal val="visible"/>
+                                      </p:to>
+                                    </p:set>
+                                    <p:animEffect transition="in" filter="fade">
+                                      <p:cBhvr>
+                                        <p:cTn id="9" dur="500"/>
+                                        <p:tgtEl>
+                                          <p:spTgt spid="7"/>
+                                        </p:tgtEl>
+                                      </p:cBhvr>
+                                    </p:animEffect>
+                                  </p:childTnLst>
+                                </p:cTn>
+                              </p:par>
+                              <p:par>
+                                <p:cTn id="10" presetID="10" presetClass="entr" presetSubtype="0" fill="hold" grpId="0" nodeType="withEffect">
+                                  <p:stCondLst>
+                                    <p:cond delay="200"/>
+                                  </p:stCondLst>
+                                  <p:childTnLst>
+                                    <p:set>
+                                      <p:cBhvr>
+                                        <p:cTn id="11" dur="1" fill="hold">
+                                          <p:stCondLst>
+                                            <p:cond delay="0"/>
+                                          </p:stCondLst>
+                                        </p:cTn>
+                                        <p:tgtEl>
+                                          <p:spTgt spid="10"/>
+                                        </p:tgtEl>
+                                        <p:attrNameLst>
+                                          <p:attrName>style.visibility</p:attrName>
+                                        </p:attrNameLst>
+                                      </p:cBhvr>
+                                      <p:to>
+                                        <p:strVal val="visible"/>
+                                      </p:to>
+                                    </p:set>
+                                    <p:animEffect transition="in" filter="fade">
+                                      <p:cBhvr>
+                                        <p:cTn id="12" dur="500"/>
+                                        <p:tgtEl>
+                                          <p:spTgt spid="10"/>
+                                        </p:tgtEl>
+                                      </p:cBhvr>
+                                    </p:animEffect>
+                                  </p:childTnLst>
+                                </p:cTn>
+                              </p:par>
+                              <p:par>
+                                <p:cTn id="13" presetID="10" presetClass="entr" presetSubtype="0" fill="hold" grpId="0" nodeType="withEffect">
+                                  <p:stCondLst>
+                                    <p:cond delay="200"/>
+                                  </p:stCondLst>
+                                  <p:childTnLst>
+                                    <p:set>
+                                      <p:cBhvr>
+                                        <p:cTn id="14" dur="1" fill="hold">
+                                          <p:stCondLst>
+                                            <p:cond delay="0"/>
+                                          </p:stCondLst>
+                                        </p:cTn>
+                                        <p:tgtEl>
+                                          <p:spTgt spid="13"/>
+                                        </p:tgtEl>
+                                        <p:attrNameLst>
+                                          <p:attrName>style.visibility</p:attrName>
+                                        </p:attrNameLst>
+                                      </p:cBhvr>
+                                      <p:to>
+                                        <p:strVal val="visible"/>
+                                      </p:to>
+                                    </p:set>
+                                    <p:animEffect transition="in" filter="fade">
+                                      <p:cBhvr>
+                                        <p:cTn id="15" dur="500"/>
+                                        <p:tgtEl>
+                                          <p:spTgt spid="13"/>
+                                        </p:tgtEl>
+                                      </p:cBhvr>
+                                    </p:animEffect>
+                                  </p:childTnLst>
+                                </p:cTn>
+                              </p:par>
+                              <p:par>
+                                <p:cTn id="16" presetID="10" presetClass="entr" presetSubtype="0" fill="hold" grpId="0" nodeType="withEffect">
+                                  <p:stCondLst>
+                                    <p:cond delay="200"/>
+                                  </p:stCondLst>
+                                  <p:childTnLst>
+                                    <p:set>
+                                      <p:cBhvr>
+                                        <p:cTn id="17" dur="1" fill="hold">
+                                          <p:stCondLst>
+                                            <p:cond delay="0"/>
+                                          </p:stCondLst>
+                                        </p:cTn>
+                                        <p:tgtEl>
+                                          <p:spTgt spid="5"/>
+                                        </p:tgtEl>
+                                        <p:attrNameLst>
+                                          <p:attrName>style.visibility</p:attrName>
+                                        </p:attrNameLst>
+                                      </p:cBhvr>
+                                      <p:to>
+                                        <p:strVal val="visible"/>
+                                      </p:to>
+                                    </p:set>
+                                    <p:animEffect transition="in" filter="fade">
+                                      <p:cBhvr>
+                                        <p:cTn id="18" dur="500"/>
+                                        <p:tgtEl>
+                                          <p:spTgt spid="5"/>
+                                        </p:tgtEl>
+                                      </p:cBhvr>
+                                    </p:animEffect>
+                                  </p:childTnLst>
+                                </p:cTn>
+                              </p:par>
+                              <p:par>
+                                <p:cTn id="19" presetID="10" presetClass="entr" presetSubtype="0" fill="hold" grpId="0" nodeType="withEffect">
+                                  <p:stCondLst>
+                                    <p:cond delay="200"/>
+                                  </p:stCondLst>
+                                  <p:childTnLst>
+                                    <p:set>
+                                      <p:cBhvr>
+                                        <p:cTn id="20" dur="1" fill="hold">
+                                          <p:stCondLst>
+                                            <p:cond delay="0"/>
+                                          </p:stCondLst>
+                                        </p:cTn>
+                                        <p:tgtEl>
+                                          <p:spTgt spid="8"/>
+                                        </p:tgtEl>
+                                        <p:attrNameLst>
+                                          <p:attrName>style.visibility</p:attrName>
+                                        </p:attrNameLst>
+                                      </p:cBhvr>
+                                      <p:to>
+                                        <p:strVal val="visible"/>
+                                      </p:to>
+                                    </p:set>
+                                    <p:animEffect transition="in" filter="fade">
+                                      <p:cBhvr>
+                                        <p:cTn id="21" dur="500"/>
+                                        <p:tgtEl>
+                                          <p:spTgt spid="8"/>
+                                        </p:tgtEl>
+                                      </p:cBhvr>
+                                    </p:animEffect>
+                                  </p:childTnLst>
+                                </p:cTn>
+                              </p:par>
+                              <p:par>
+                                <p:cTn id="22" presetID="10" presetClass="entr" presetSubtype="0" fill="hold" grpId="0" nodeType="withEffect">
+                                  <p:stCondLst>
+                                    <p:cond delay="200"/>
+                                  </p:stCondLst>
+                                  <p:childTnLst>
+                                    <p:set>
+                                      <p:cBhvr>
+                                        <p:cTn id="23" dur="1" fill="hold">
+                                          <p:stCondLst>
+                                            <p:cond delay="0"/>
+                                          </p:stCondLst>
+                                        </p:cTn>
+                                        <p:tgtEl>
+                                          <p:spTgt spid="11"/>
+                                        </p:tgtEl>
+                                        <p:attrNameLst>
+                                          <p:attrName>style.visibility</p:attrName>
+                                        </p:attrNameLst>
+                                      </p:cBhvr>
+                                      <p:to>
+                                        <p:strVal val="visible"/>
+                                      </p:to>
+                                    </p:set>
+                                    <p:animEffect transition="in" filter="fade">
+                                      <p:cBhvr>
+                                        <p:cTn id="24" dur="500"/>
+                                        <p:tgtEl>
+                                          <p:spTgt spid="11"/>
+                                        </p:tgtEl>
+                                      </p:cBhvr>
+                                    </p:animEffect>
+                                  </p:childTnLst>
+                                </p:cTn>
+                              </p:par>
+                              <p:par>
+                                <p:cTn id="25" presetID="10" presetClass="entr" presetSubtype="0" fill="hold" grpId="0" nodeType="withEffect">
+                                  <p:stCondLst>
+                                    <p:cond delay="200"/>
+                                  </p:stCondLst>
+                                  <p:childTnLst>
+                                    <p:set>
+                                      <p:cBhvr>
+                                        <p:cTn id="26" dur="1" fill="hold">
+                                          <p:stCondLst>
+                                            <p:cond delay="0"/>
+                                          </p:stCondLst>
+                                        </p:cTn>
+                                        <p:tgtEl>
+                                          <p:spTgt spid="14"/>
+                                        </p:tgtEl>
+                                        <p:attrNameLst>
+                                          <p:attrName>style.visibility</p:attrName>
+                                        </p:attrNameLst>
+                                      </p:cBhvr>
+                                      <p:to>
+                                        <p:strVal val="visible"/>
+                                      </p:to>
+                                    </p:set>
+                                    <p:animEffect transition="in" filter="fade">
+                                      <p:cBhvr>
+                                        <p:cTn id="27" dur="500"/>
+                                        <p:tgtEl>
+                                          <p:spTgt spid="14"/>
+                                        </p:tgtEl>
+                                      </p:cBhvr>
+                                    </p:animEffect>
+                                  </p:childTnLst>
+                                </p:cTn>
+                              </p:par>
+                              <p:par>
+                                <p:cTn id="28" presetID="10" presetClass="entr" presetSubtype="0" fill="hold" grpId="0" nodeType="withEffect">
+                                  <p:stCondLst>
+                                    <p:cond delay="200"/>
+                                  </p:stCondLst>
+                                  <p:childTnLst>
+                                    <p:set>
+                                      <p:cBhvr>
+                                        <p:cTn id="29" dur="1" fill="hold">
+                                          <p:stCondLst>
+                                            <p:cond delay="0"/>
+                                          </p:stCondLst>
+                                        </p:cTn>
+                                        <p:tgtEl>
+                                          <p:spTgt spid="6"/>
+                                        </p:tgtEl>
+                                        <p:attrNameLst>
+                                          <p:attrName>style.visibility</p:attrName>
+                                        </p:attrNameLst>
+                                      </p:cBhvr>
+                                      <p:to>
+                                        <p:strVal val="visible"/>
+                                      </p:to>
+                                    </p:set>
+                                    <p:animEffect transition="in" filter="fade">
+                                      <p:cBhvr>
+                                        <p:cTn id="30" dur="500"/>
+                                        <p:tgtEl>
+                                          <p:spTgt spid="6"/>
+                                        </p:tgtEl>
+                                      </p:cBhvr>
+                                    </p:animEffect>
+                                  </p:childTnLst>
+                                </p:cTn>
+                              </p:par>
+                              <p:par>
+                                <p:cTn id="31" presetID="10" presetClass="entr" presetSubtype="0" fill="hold" grpId="0" nodeType="withEffect">
+                                  <p:stCondLst>
+                                    <p:cond delay="200"/>
+                                  </p:stCondLst>
+                                  <p:childTnLst>
+                                    <p:set>
+                                      <p:cBhvr>
+                                        <p:cTn id="32" dur="1" fill="hold">
+                                          <p:stCondLst>
+                                            <p:cond delay="0"/>
+                                          </p:stCondLst>
+                                        </p:cTn>
+                                        <p:tgtEl>
+                                          <p:spTgt spid="9"/>
+                                        </p:tgtEl>
+                                        <p:attrNameLst>
+                                          <p:attrName>style.visibility</p:attrName>
+                                        </p:attrNameLst>
+                                      </p:cBhvr>
+                                      <p:to>
+                                        <p:strVal val="visible"/>
+                                      </p:to>
+                                    </p:set>
+                                    <p:animEffect transition="in" filter="fade">
+                                      <p:cBhvr>
+                                        <p:cTn id="33" dur="500"/>
+                                        <p:tgtEl>
+                                          <p:spTgt spid="9"/>
+                                        </p:tgtEl>
+                                      </p:cBhvr>
+                                    </p:animEffect>
+                                  </p:childTnLst>
+                                </p:cTn>
+                              </p:par>
+                              <p:par>
+                                <p:cTn id="34" presetID="10" presetClass="entr" presetSubtype="0" fill="hold" grpId="0" nodeType="withEffect">
+                                  <p:stCondLst>
+                                    <p:cond delay="200"/>
+                                  </p:stCondLst>
+                                  <p:childTnLst>
+                                    <p:set>
+                                      <p:cBhvr>
+                                        <p:cTn id="35" dur="1" fill="hold">
+                                          <p:stCondLst>
+                                            <p:cond delay="0"/>
+                                          </p:stCondLst>
+                                        </p:cTn>
+                                        <p:tgtEl>
+                                          <p:spTgt spid="12"/>
+                                        </p:tgtEl>
+                                        <p:attrNameLst>
+                                          <p:attrName>style.visibility</p:attrName>
+                                        </p:attrNameLst>
+                                      </p:cBhvr>
+                                      <p:to>
+                                        <p:strVal val="visible"/>
+                                      </p:to>
+                                    </p:set>
+                                    <p:animEffect transition="in" filter="fade">
+                                      <p:cBhvr>
+                                        <p:cTn id="36" dur="500"/>
+                                        <p:tgtEl>
+                                          <p:spTgt spid="12"/>
+                                        </p:tgtEl>
+                                      </p:cBhvr>
+                                    </p:animEffect>
+                                  </p:childTnLst>
+                                </p:cTn>
+                              </p:par>
+                              <p:par>
+                                <p:cTn id="37" presetID="10" presetClass="entr" presetSubtype="0" fill="hold" grpId="0" nodeType="withEffect">
+                                  <p:stCondLst>
+                                    <p:cond delay="200"/>
+                                  </p:stCondLst>
+                                  <p:childTnLst>
+                                    <p:set>
+                                      <p:cBhvr>
+                                        <p:cTn id="38" dur="1" fill="hold">
+                                          <p:stCondLst>
+                                            <p:cond delay="0"/>
+                                          </p:stCondLst>
+                                        </p:cTn>
+                                        <p:tgtEl>
+                                          <p:spTgt spid="15"/>
+                                        </p:tgtEl>
+                                        <p:attrNameLst>
+                                          <p:attrName>style.visibility</p:attrName>
+                                        </p:attrNameLst>
+                                      </p:cBhvr>
+                                      <p:to>
+                                        <p:strVal val="visible"/>
+                                      </p:to>
+                                    </p:set>
+                                    <p:animEffect transition="in" filter="fade">
+                                      <p:cBhvr>
+                                        <p:cTn id="39" dur="500"/>
+                                        <p:tgtEl>
+                                          <p:spTgt spid="15"/>
+                                        </p:tgtEl>
+                                      </p:cBhvr>
+                                    </p:animEffect>
+                                  </p:childTnLst>
+                                </p:cTn>
+                              </p:par>
+                              <p:par>
+                                <p:cTn id="40" presetID="10" presetClass="entr" presetSubtype="0" fill="hold" grpId="0" nodeType="withEffect">
+                                  <p:stCondLst>
+                                    <p:cond delay="550"/>
+                                  </p:stCondLst>
+                                  <p:childTnLst>
+                                    <p:set>
+                                      <p:cBhvr>
+                                        <p:cTn id="41" dur="1" fill="hold">
+                                          <p:stCondLst>
+                                            <p:cond delay="0"/>
+                                          </p:stCondLst>
+                                        </p:cTn>
+                                        <p:tgtEl>
+                                          <p:spTgt spid="17"/>
+                                        </p:tgtEl>
+                                        <p:attrNameLst>
+                                          <p:attrName>style.visibility</p:attrName>
+                                        </p:attrNameLst>
+                                      </p:cBhvr>
+                                      <p:to>
+                                        <p:strVal val="visible"/>
+                                      </p:to>
+                                    </p:set>
+                                    <p:animEffect transition="in" filter="fade">
+                                      <p:cBhvr>
+                                        <p:cTn id="42" dur="500"/>
+                                        <p:tgtEl>
+                                          <p:spTgt spid="17"/>
+                                        </p:tgtEl>
+                                      </p:cBhvr>
+                                    </p:animEffect>
+                                  </p:childTnLst>
+                                </p:cTn>
+                              </p:par>
+                              <p:par>
+                                <p:cTn id="43" presetID="10" presetClass="entr" presetSubtype="0" fill="hold" grpId="0" nodeType="withEffect">
+                                  <p:stCondLst>
+                                    <p:cond delay="550"/>
+                                  </p:stCondLst>
+                                  <p:childTnLst>
+                                    <p:set>
+                                      <p:cBhvr>
+                                        <p:cTn id="44" dur="1" fill="hold">
+                                          <p:stCondLst>
+                                            <p:cond delay="0"/>
+                                          </p:stCondLst>
+                                        </p:cTn>
+                                        <p:tgtEl>
+                                          <p:spTgt spid="18"/>
+                                        </p:tgtEl>
+                                        <p:attrNameLst>
+                                          <p:attrName>style.visibility</p:attrName>
+                                        </p:attrNameLst>
+                                      </p:cBhvr>
+                                      <p:to>
+                                        <p:strVal val="visible"/>
+                                      </p:to>
+                                    </p:set>
+                                    <p:animEffect transition="in" filter="fade">
+                                      <p:cBhvr>
+                                        <p:cTn id="45" dur="500"/>
+                                        <p:tgtEl>
+                                          <p:spTgt spid="18"/>
+                                        </p:tgtEl>
+                                      </p:cBhvr>
+                                    </p:animEffect>
+                                  </p:childTnLst>
+                                </p:cTn>
+                              </p:par>
+                              <p:par>
+                                <p:cTn id="46" presetID="10" presetClass="entr" presetSubtype="0" fill="hold" grpId="0" nodeType="withEffect">
+                                  <p:stCondLst>
+                                    <p:cond delay="900"/>
+                                  </p:stCondLst>
+                                  <p:childTnLst>
+                                    <p:set>
+                                      <p:cBhvr>
+                                        <p:cTn id="47" dur="1" fill="hold">
+                                          <p:stCondLst>
+                                            <p:cond delay="0"/>
+                                          </p:stCondLst>
+                                        </p:cTn>
+                                        <p:tgtEl>
+                                          <p:spTgt spid="20"/>
+                                        </p:tgtEl>
+                                        <p:attrNameLst>
+                                          <p:attrName>style.visibility</p:attrName>
+                                        </p:attrNameLst>
+                                      </p:cBhvr>
+                                      <p:to>
+                                        <p:strVal val="visible"/>
+                                      </p:to>
+                                    </p:set>
+                                    <p:animEffect transition="in" filter="fade">
+                                      <p:cBhvr>
+                                        <p:cTn id="48" dur="500"/>
+                                        <p:tgtEl>
+                                          <p:spTgt spid="20"/>
+                                        </p:tgtEl>
+                                      </p:cBhvr>
+                                    </p:animEffect>
+                                  </p:childTnLst>
+                                </p:cTn>
+                              </p:par>
+                              <p:par>
+                                <p:cTn id="49" presetID="10" presetClass="entr" presetSubtype="0" fill="hold" grpId="0" nodeType="withEffect">
+                                  <p:stCondLst>
+                                    <p:cond delay="900"/>
+                                  </p:stCondLst>
+                                  <p:childTnLst>
+                                    <p:set>
+                                      <p:cBhvr>
+                                        <p:cTn id="50" dur="1" fill="hold">
+                                          <p:stCondLst>
+                                            <p:cond delay="0"/>
+                                          </p:stCondLst>
+                                        </p:cTn>
+                                        <p:tgtEl>
+                                          <p:spTgt spid="21"/>
+                                        </p:tgtEl>
+                                        <p:attrNameLst>
+                                          <p:attrName>style.visibility</p:attrName>
+                                        </p:attrNameLst>
+                                      </p:cBhvr>
+                                      <p:to>
+                                        <p:strVal val="visible"/>
+                                      </p:to>
+                                    </p:set>
+                                    <p:animEffect transition="in" filter="fade">
+                                      <p:cBhvr>
+                                        <p:cTn id="51" dur="500"/>
+                                        <p:tgtEl>
+                                          <p:spTgt spid="21"/>
+                                        </p:tgtEl>
+                                      </p:cBhvr>
+                                    </p:animEffect>
+                                  </p:childTnLst>
+                                </p:cTn>
+                              </p:par>
+                              <p:par>
+                                <p:cTn id="52" presetID="10" presetClass="entr" presetSubtype="0" fill="hold" grpId="0" nodeType="withEffect">
+                                  <p:stCondLst>
+                                    <p:cond delay="1250"/>
+                                  </p:stCondLst>
+                                  <p:childTnLst>
+                                    <p:set>
+                                      <p:cBhvr>
+                                        <p:cTn id="53" dur="1" fill="hold">
+                                          <p:stCondLst>
+                                            <p:cond delay="0"/>
+                                          </p:stCondLst>
+                                        </p:cTn>
+                                        <p:tgtEl>
+                                          <p:spTgt spid="23"/>
+                                        </p:tgtEl>
+                                        <p:attrNameLst>
+                                          <p:attrName>style.visibility</p:attrName>
+                                        </p:attrNameLst>
+                                      </p:cBhvr>
+                                      <p:to>
+                                        <p:strVal val="visible"/>
+                                      </p:to>
+                                    </p:set>
+                                    <p:animEffect transition="in" filter="fade">
+                                      <p:cBhvr>
+                                        <p:cTn id="54" dur="500"/>
+                                        <p:tgtEl>
+                                          <p:spTgt spid="23"/>
+                                        </p:tgtEl>
+                                      </p:cBhvr>
+                                    </p:animEffect>
+                                  </p:childTnLst>
+                                </p:cTn>
+                              </p:par>
+                              <p:par>
+                                <p:cTn id="55" presetID="10" presetClass="entr" presetSubtype="0" fill="hold" grpId="0" nodeType="withEffect">
+                                  <p:stCondLst>
+                                    <p:cond delay="1250"/>
+                                  </p:stCondLst>
+                                  <p:childTnLst>
+                                    <p:set>
+                                      <p:cBhvr>
+                                        <p:cTn id="56" dur="1" fill="hold">
+                                          <p:stCondLst>
+                                            <p:cond delay="0"/>
+                                          </p:stCondLst>
+                                        </p:cTn>
+                                        <p:tgtEl>
+                                          <p:spTgt spid="24"/>
+                                        </p:tgtEl>
+                                        <p:attrNameLst>
+                                          <p:attrName>style.visibility</p:attrName>
+                                        </p:attrNameLst>
+                                      </p:cBhvr>
+                                      <p:to>
+                                        <p:strVal val="visible"/>
+                                      </p:to>
+                                    </p:set>
+                                    <p:animEffect transition="in" filter="fade">
+                                      <p:cBhvr>
+                                        <p:cTn id="57" dur="500"/>
+                                        <p:tgtEl>
+                                          <p:spTgt spid="24"/>
+                                        </p:tgtEl>
+                                      </p:cBhvr>
+                                    </p:animEffect>
+                                  </p:childTnLst>
+                                </p:cTn>
+                              </p:par>
+                            </p:childTnLst>
+                          </p:cTn>
+                        </p:par>
+                      </p:childTnLst>
+                    </p:cTn>
+                  </p:par>
+                </p:childTnLst>
+              </p:cTn>
+              <p:prevCondLst>
+                <p:cond evt="onPrev" delay="0">
+                  <p:tgtEl>
+                    <p:sldTgt/>
+                  </p:tgtEl>
+                </p:cond>
+              </p:prevCondLst>
+              <p:nextCondLst>
+                <p:cond evt="onNext" delay="0">
+                  <p:tgtEl>
+                    <p:sldTgt/>
+                  </p:tgtEl>
+                </p:cond>
+              </p:nextCondLst>
+            </p:seq>
+          </p:childTnLst>
+        </p:cTn>
+      </p:par>
+    </p:tnLst>
+    <p:bldLst>
+      <p:bldP spid="4" grpId="0" animBg="1"/>
+      <p:bldP spid="7" grpId="0" animBg="1"/>
+      <p:bldP spid="10" grpId="0" animBg="1"/>
+      <p:bldP spid="13" grpId="0" animBg="1"/>
+      <p:bldP spid="5" grpId="0" animBg="1"/>
+      <p:bldP spid="8" grpId="0" animBg="1"/>
+      <p:bldP spid="11" grpId="0" animBg="1"/>
+      <p:bldP spid="14" grpId="0" animBg="1"/>
+      <p:bldP spid="6" grpId="0" animBg="1"/>
+      <p:bldP spid="9" grpId="0" animBg="1"/>
+      <p:bldP spid="12" grpId="0" animBg="1"/>
+      <p:bldP spid="15" grpId="0" animBg="1"/>
+      <p:bldP spid="17" grpId="0" animBg="1"/>
+      <p:bldP spid="18" grpId="0" animBg="1"/>
+      <p:bldP spid="20" grpId="0" animBg="1"/>
+      <p:bldP spid="21" grpId="0" animBg="1"/>
+      <p:bldP spid="23" grpId="0" animBg="1"/>
+      <p:bldP spid="24" grpId="0" animBg="1"/>
+    </p:bldLst>
+  </p:timing>
 </p:sld>
 </file>
 
@@ -5685,6 +6774,602 @@
   <p:clrMapOvr>
     <a:masterClrMapping/>
   </p:clrMapOvr>
+  <p:transition spd="med">
+    <p:fade/>
+  </p:transition>
+  <p:timing>
+    <p:tnLst>
+      <p:par>
+        <p:cTn id="1" dur="indefinite" restart="never" nodeType="tmRoot">
+          <p:childTnLst>
+            <p:seq concurrent="1" nextAc="seek">
+              <p:cTn id="2" dur="indefinite" nodeType="mainSeq">
+                <p:childTnLst>
+                  <p:par>
+                    <p:cTn id="3" fill="hold">
+                      <p:stCondLst>
+                        <p:cond delay="indefinite"/>
+                        <p:cond evt="onBegin" delay="0">
+                          <p:tn val="2"/>
+                        </p:cond>
+                      </p:stCondLst>
+                      <p:childTnLst>
+                        <p:par>
+                          <p:cTn id="49" fill="hold">
+                            <p:stCondLst>
+                              <p:cond delay="0"/>
+                            </p:stCondLst>
+                            <p:childTnLst>
+                              <p:par>
+                                <p:cTn id="4" presetID="10" presetClass="entr" presetSubtype="0" fill="hold" grpId="0" nodeType="withEffect">
+                                  <p:stCondLst>
+                                    <p:cond delay="200"/>
+                                  </p:stCondLst>
+                                  <p:childTnLst>
+                                    <p:set>
+                                      <p:cBhvr>
+                                        <p:cTn id="5" dur="1" fill="hold">
+                                          <p:stCondLst>
+                                            <p:cond delay="0"/>
+                                          </p:stCondLst>
+                                        </p:cTn>
+                                        <p:tgtEl>
+                                          <p:spTgt spid="5"/>
+                                        </p:tgtEl>
+                                        <p:attrNameLst>
+                                          <p:attrName>style.visibility</p:attrName>
+                                        </p:attrNameLst>
+                                      </p:cBhvr>
+                                      <p:to>
+                                        <p:strVal val="visible"/>
+                                      </p:to>
+                                    </p:set>
+                                    <p:animEffect transition="in" filter="fade">
+                                      <p:cBhvr>
+                                        <p:cTn id="6" dur="500"/>
+                                        <p:tgtEl>
+                                          <p:spTgt spid="5"/>
+                                        </p:tgtEl>
+                                      </p:cBhvr>
+                                    </p:animEffect>
+                                  </p:childTnLst>
+                                </p:cTn>
+                              </p:par>
+                              <p:par>
+                                <p:cTn id="7" presetID="10" presetClass="entr" presetSubtype="0" fill="hold" grpId="0" nodeType="withEffect">
+                                  <p:stCondLst>
+                                    <p:cond delay="200"/>
+                                  </p:stCondLst>
+                                  <p:childTnLst>
+                                    <p:set>
+                                      <p:cBhvr>
+                                        <p:cTn id="8" dur="1" fill="hold">
+                                          <p:stCondLst>
+                                            <p:cond delay="0"/>
+                                          </p:stCondLst>
+                                        </p:cTn>
+                                        <p:tgtEl>
+                                          <p:spTgt spid="6"/>
+                                        </p:tgtEl>
+                                        <p:attrNameLst>
+                                          <p:attrName>style.visibility</p:attrName>
+                                        </p:attrNameLst>
+                                      </p:cBhvr>
+                                      <p:to>
+                                        <p:strVal val="visible"/>
+                                      </p:to>
+                                    </p:set>
+                                    <p:animEffect transition="in" filter="fade">
+                                      <p:cBhvr>
+                                        <p:cTn id="9" dur="500"/>
+                                        <p:tgtEl>
+                                          <p:spTgt spid="6"/>
+                                        </p:tgtEl>
+                                      </p:cBhvr>
+                                    </p:animEffect>
+                                  </p:childTnLst>
+                                </p:cTn>
+                              </p:par>
+                              <p:par>
+                                <p:cTn id="10" presetID="10" presetClass="entr" presetSubtype="0" fill="hold" grpId="0" nodeType="withEffect">
+                                  <p:stCondLst>
+                                    <p:cond delay="200"/>
+                                  </p:stCondLst>
+                                  <p:childTnLst>
+                                    <p:set>
+                                      <p:cBhvr>
+                                        <p:cTn id="11" dur="1" fill="hold">
+                                          <p:stCondLst>
+                                            <p:cond delay="0"/>
+                                          </p:stCondLst>
+                                        </p:cTn>
+                                        <p:tgtEl>
+                                          <p:spTgt spid="7"/>
+                                        </p:tgtEl>
+                                        <p:attrNameLst>
+                                          <p:attrName>style.visibility</p:attrName>
+                                        </p:attrNameLst>
+                                      </p:cBhvr>
+                                      <p:to>
+                                        <p:strVal val="visible"/>
+                                      </p:to>
+                                    </p:set>
+                                    <p:animEffect transition="in" filter="fade">
+                                      <p:cBhvr>
+                                        <p:cTn id="12" dur="500"/>
+                                        <p:tgtEl>
+                                          <p:spTgt spid="7"/>
+                                        </p:tgtEl>
+                                      </p:cBhvr>
+                                    </p:animEffect>
+                                  </p:childTnLst>
+                                </p:cTn>
+                              </p:par>
+                              <p:par>
+                                <p:cTn id="13" presetID="10" presetClass="entr" presetSubtype="0" fill="hold" grpId="0" nodeType="withEffect">
+                                  <p:stCondLst>
+                                    <p:cond delay="550"/>
+                                  </p:stCondLst>
+                                  <p:childTnLst>
+                                    <p:set>
+                                      <p:cBhvr>
+                                        <p:cTn id="14" dur="1" fill="hold">
+                                          <p:stCondLst>
+                                            <p:cond delay="0"/>
+                                          </p:stCondLst>
+                                        </p:cTn>
+                                        <p:tgtEl>
+                                          <p:spTgt spid="9"/>
+                                        </p:tgtEl>
+                                        <p:attrNameLst>
+                                          <p:attrName>style.visibility</p:attrName>
+                                        </p:attrNameLst>
+                                      </p:cBhvr>
+                                      <p:to>
+                                        <p:strVal val="visible"/>
+                                      </p:to>
+                                    </p:set>
+                                    <p:animEffect transition="in" filter="fade">
+                                      <p:cBhvr>
+                                        <p:cTn id="15" dur="500"/>
+                                        <p:tgtEl>
+                                          <p:spTgt spid="9"/>
+                                        </p:tgtEl>
+                                      </p:cBhvr>
+                                    </p:animEffect>
+                                  </p:childTnLst>
+                                </p:cTn>
+                              </p:par>
+                              <p:par>
+                                <p:cTn id="16" presetID="10" presetClass="entr" presetSubtype="0" fill="hold" grpId="0" nodeType="withEffect">
+                                  <p:stCondLst>
+                                    <p:cond delay="550"/>
+                                  </p:stCondLst>
+                                  <p:childTnLst>
+                                    <p:set>
+                                      <p:cBhvr>
+                                        <p:cTn id="17" dur="1" fill="hold">
+                                          <p:stCondLst>
+                                            <p:cond delay="0"/>
+                                          </p:stCondLst>
+                                        </p:cTn>
+                                        <p:tgtEl>
+                                          <p:spTgt spid="10"/>
+                                        </p:tgtEl>
+                                        <p:attrNameLst>
+                                          <p:attrName>style.visibility</p:attrName>
+                                        </p:attrNameLst>
+                                      </p:cBhvr>
+                                      <p:to>
+                                        <p:strVal val="visible"/>
+                                      </p:to>
+                                    </p:set>
+                                    <p:animEffect transition="in" filter="fade">
+                                      <p:cBhvr>
+                                        <p:cTn id="18" dur="500"/>
+                                        <p:tgtEl>
+                                          <p:spTgt spid="10"/>
+                                        </p:tgtEl>
+                                      </p:cBhvr>
+                                    </p:animEffect>
+                                  </p:childTnLst>
+                                </p:cTn>
+                              </p:par>
+                              <p:par>
+                                <p:cTn id="19" presetID="10" presetClass="entr" presetSubtype="0" fill="hold" grpId="0" nodeType="withEffect">
+                                  <p:stCondLst>
+                                    <p:cond delay="550"/>
+                                  </p:stCondLst>
+                                  <p:childTnLst>
+                                    <p:set>
+                                      <p:cBhvr>
+                                        <p:cTn id="20" dur="1" fill="hold">
+                                          <p:stCondLst>
+                                            <p:cond delay="0"/>
+                                          </p:stCondLst>
+                                        </p:cTn>
+                                        <p:tgtEl>
+                                          <p:spTgt spid="11"/>
+                                        </p:tgtEl>
+                                        <p:attrNameLst>
+                                          <p:attrName>style.visibility</p:attrName>
+                                        </p:attrNameLst>
+                                      </p:cBhvr>
+                                      <p:to>
+                                        <p:strVal val="visible"/>
+                                      </p:to>
+                                    </p:set>
+                                    <p:animEffect transition="in" filter="fade">
+                                      <p:cBhvr>
+                                        <p:cTn id="21" dur="500"/>
+                                        <p:tgtEl>
+                                          <p:spTgt spid="11"/>
+                                        </p:tgtEl>
+                                      </p:cBhvr>
+                                    </p:animEffect>
+                                  </p:childTnLst>
+                                </p:cTn>
+                              </p:par>
+                              <p:par>
+                                <p:cTn id="22" presetID="10" presetClass="entr" presetSubtype="0" fill="hold" grpId="0" nodeType="withEffect">
+                                  <p:stCondLst>
+                                    <p:cond delay="900"/>
+                                  </p:stCondLst>
+                                  <p:childTnLst>
+                                    <p:set>
+                                      <p:cBhvr>
+                                        <p:cTn id="23" dur="1" fill="hold">
+                                          <p:stCondLst>
+                                            <p:cond delay="0"/>
+                                          </p:stCondLst>
+                                        </p:cTn>
+                                        <p:tgtEl>
+                                          <p:spTgt spid="13"/>
+                                        </p:tgtEl>
+                                        <p:attrNameLst>
+                                          <p:attrName>style.visibility</p:attrName>
+                                        </p:attrNameLst>
+                                      </p:cBhvr>
+                                      <p:to>
+                                        <p:strVal val="visible"/>
+                                      </p:to>
+                                    </p:set>
+                                    <p:animEffect transition="in" filter="fade">
+                                      <p:cBhvr>
+                                        <p:cTn id="24" dur="500"/>
+                                        <p:tgtEl>
+                                          <p:spTgt spid="13"/>
+                                        </p:tgtEl>
+                                      </p:cBhvr>
+                                    </p:animEffect>
+                                  </p:childTnLst>
+                                </p:cTn>
+                              </p:par>
+                              <p:par>
+                                <p:cTn id="25" presetID="10" presetClass="entr" presetSubtype="0" fill="hold" grpId="0" nodeType="withEffect">
+                                  <p:stCondLst>
+                                    <p:cond delay="900"/>
+                                  </p:stCondLst>
+                                  <p:childTnLst>
+                                    <p:set>
+                                      <p:cBhvr>
+                                        <p:cTn id="26" dur="1" fill="hold">
+                                          <p:stCondLst>
+                                            <p:cond delay="0"/>
+                                          </p:stCondLst>
+                                        </p:cTn>
+                                        <p:tgtEl>
+                                          <p:spTgt spid="14"/>
+                                        </p:tgtEl>
+                                        <p:attrNameLst>
+                                          <p:attrName>style.visibility</p:attrName>
+                                        </p:attrNameLst>
+                                      </p:cBhvr>
+                                      <p:to>
+                                        <p:strVal val="visible"/>
+                                      </p:to>
+                                    </p:set>
+                                    <p:animEffect transition="in" filter="fade">
+                                      <p:cBhvr>
+                                        <p:cTn id="27" dur="500"/>
+                                        <p:tgtEl>
+                                          <p:spTgt spid="14"/>
+                                        </p:tgtEl>
+                                      </p:cBhvr>
+                                    </p:animEffect>
+                                  </p:childTnLst>
+                                </p:cTn>
+                              </p:par>
+                              <p:par>
+                                <p:cTn id="28" presetID="10" presetClass="entr" presetSubtype="0" fill="hold" grpId="0" nodeType="withEffect">
+                                  <p:stCondLst>
+                                    <p:cond delay="900"/>
+                                  </p:stCondLst>
+                                  <p:childTnLst>
+                                    <p:set>
+                                      <p:cBhvr>
+                                        <p:cTn id="29" dur="1" fill="hold">
+                                          <p:stCondLst>
+                                            <p:cond delay="0"/>
+                                          </p:stCondLst>
+                                        </p:cTn>
+                                        <p:tgtEl>
+                                          <p:spTgt spid="15"/>
+                                        </p:tgtEl>
+                                        <p:attrNameLst>
+                                          <p:attrName>style.visibility</p:attrName>
+                                        </p:attrNameLst>
+                                      </p:cBhvr>
+                                      <p:to>
+                                        <p:strVal val="visible"/>
+                                      </p:to>
+                                    </p:set>
+                                    <p:animEffect transition="in" filter="fade">
+                                      <p:cBhvr>
+                                        <p:cTn id="30" dur="500"/>
+                                        <p:tgtEl>
+                                          <p:spTgt spid="15"/>
+                                        </p:tgtEl>
+                                      </p:cBhvr>
+                                    </p:animEffect>
+                                  </p:childTnLst>
+                                </p:cTn>
+                              </p:par>
+                              <p:par>
+                                <p:cTn id="31" presetID="10" presetClass="entr" presetSubtype="0" fill="hold" grpId="0" nodeType="withEffect">
+                                  <p:stCondLst>
+                                    <p:cond delay="1250"/>
+                                  </p:stCondLst>
+                                  <p:childTnLst>
+                                    <p:set>
+                                      <p:cBhvr>
+                                        <p:cTn id="32" dur="1" fill="hold">
+                                          <p:stCondLst>
+                                            <p:cond delay="0"/>
+                                          </p:stCondLst>
+                                        </p:cTn>
+                                        <p:tgtEl>
+                                          <p:spTgt spid="17"/>
+                                        </p:tgtEl>
+                                        <p:attrNameLst>
+                                          <p:attrName>style.visibility</p:attrName>
+                                        </p:attrNameLst>
+                                      </p:cBhvr>
+                                      <p:to>
+                                        <p:strVal val="visible"/>
+                                      </p:to>
+                                    </p:set>
+                                    <p:animEffect transition="in" filter="fade">
+                                      <p:cBhvr>
+                                        <p:cTn id="33" dur="500"/>
+                                        <p:tgtEl>
+                                          <p:spTgt spid="17"/>
+                                        </p:tgtEl>
+                                      </p:cBhvr>
+                                    </p:animEffect>
+                                  </p:childTnLst>
+                                </p:cTn>
+                              </p:par>
+                              <p:par>
+                                <p:cTn id="34" presetID="10" presetClass="entr" presetSubtype="0" fill="hold" grpId="0" nodeType="withEffect">
+                                  <p:stCondLst>
+                                    <p:cond delay="1250"/>
+                                  </p:stCondLst>
+                                  <p:childTnLst>
+                                    <p:set>
+                                      <p:cBhvr>
+                                        <p:cTn id="35" dur="1" fill="hold">
+                                          <p:stCondLst>
+                                            <p:cond delay="0"/>
+                                          </p:stCondLst>
+                                        </p:cTn>
+                                        <p:tgtEl>
+                                          <p:spTgt spid="18"/>
+                                        </p:tgtEl>
+                                        <p:attrNameLst>
+                                          <p:attrName>style.visibility</p:attrName>
+                                        </p:attrNameLst>
+                                      </p:cBhvr>
+                                      <p:to>
+                                        <p:strVal val="visible"/>
+                                      </p:to>
+                                    </p:set>
+                                    <p:animEffect transition="in" filter="fade">
+                                      <p:cBhvr>
+                                        <p:cTn id="36" dur="500"/>
+                                        <p:tgtEl>
+                                          <p:spTgt spid="18"/>
+                                        </p:tgtEl>
+                                      </p:cBhvr>
+                                    </p:animEffect>
+                                  </p:childTnLst>
+                                </p:cTn>
+                              </p:par>
+                              <p:par>
+                                <p:cTn id="37" presetID="10" presetClass="entr" presetSubtype="0" fill="hold" grpId="0" nodeType="withEffect">
+                                  <p:stCondLst>
+                                    <p:cond delay="1250"/>
+                                  </p:stCondLst>
+                                  <p:childTnLst>
+                                    <p:set>
+                                      <p:cBhvr>
+                                        <p:cTn id="38" dur="1" fill="hold">
+                                          <p:stCondLst>
+                                            <p:cond delay="0"/>
+                                          </p:stCondLst>
+                                        </p:cTn>
+                                        <p:tgtEl>
+                                          <p:spTgt spid="19"/>
+                                        </p:tgtEl>
+                                        <p:attrNameLst>
+                                          <p:attrName>style.visibility</p:attrName>
+                                        </p:attrNameLst>
+                                      </p:cBhvr>
+                                      <p:to>
+                                        <p:strVal val="visible"/>
+                                      </p:to>
+                                    </p:set>
+                                    <p:animEffect transition="in" filter="fade">
+                                      <p:cBhvr>
+                                        <p:cTn id="39" dur="500"/>
+                                        <p:tgtEl>
+                                          <p:spTgt spid="19"/>
+                                        </p:tgtEl>
+                                      </p:cBhvr>
+                                    </p:animEffect>
+                                  </p:childTnLst>
+                                </p:cTn>
+                              </p:par>
+                              <p:par>
+                                <p:cTn id="40" presetID="10" presetClass="entr" presetSubtype="0" fill="hold" grpId="0" nodeType="withEffect">
+                                  <p:stCondLst>
+                                    <p:cond delay="1600"/>
+                                  </p:stCondLst>
+                                  <p:childTnLst>
+                                    <p:set>
+                                      <p:cBhvr>
+                                        <p:cTn id="41" dur="1" fill="hold">
+                                          <p:stCondLst>
+                                            <p:cond delay="0"/>
+                                          </p:stCondLst>
+                                        </p:cTn>
+                                        <p:tgtEl>
+                                          <p:spTgt spid="22"/>
+                                        </p:tgtEl>
+                                        <p:attrNameLst>
+                                          <p:attrName>style.visibility</p:attrName>
+                                        </p:attrNameLst>
+                                      </p:cBhvr>
+                                      <p:to>
+                                        <p:strVal val="visible"/>
+                                      </p:to>
+                                    </p:set>
+                                    <p:animEffect transition="in" filter="fade">
+                                      <p:cBhvr>
+                                        <p:cTn id="42" dur="500"/>
+                                        <p:tgtEl>
+                                          <p:spTgt spid="22"/>
+                                        </p:tgtEl>
+                                      </p:cBhvr>
+                                    </p:animEffect>
+                                  </p:childTnLst>
+                                </p:cTn>
+                              </p:par>
+                              <p:par>
+                                <p:cTn id="43" presetID="10" presetClass="entr" presetSubtype="0" fill="hold" grpId="0" nodeType="withEffect">
+                                  <p:stCondLst>
+                                    <p:cond delay="1600"/>
+                                  </p:stCondLst>
+                                  <p:childTnLst>
+                                    <p:set>
+                                      <p:cBhvr>
+                                        <p:cTn id="44" dur="1" fill="hold">
+                                          <p:stCondLst>
+                                            <p:cond delay="0"/>
+                                          </p:stCondLst>
+                                        </p:cTn>
+                                        <p:tgtEl>
+                                          <p:spTgt spid="23"/>
+                                        </p:tgtEl>
+                                        <p:attrNameLst>
+                                          <p:attrName>style.visibility</p:attrName>
+                                        </p:attrNameLst>
+                                      </p:cBhvr>
+                                      <p:to>
+                                        <p:strVal val="visible"/>
+                                      </p:to>
+                                    </p:set>
+                                    <p:animEffect transition="in" filter="fade">
+                                      <p:cBhvr>
+                                        <p:cTn id="45" dur="500"/>
+                                        <p:tgtEl>
+                                          <p:spTgt spid="23"/>
+                                        </p:tgtEl>
+                                      </p:cBhvr>
+                                    </p:animEffect>
+                                  </p:childTnLst>
+                                </p:cTn>
+                              </p:par>
+                              <p:par>
+                                <p:cTn id="46" presetID="10" presetClass="entr" presetSubtype="0" fill="hold" grpId="0" nodeType="withEffect">
+                                  <p:stCondLst>
+                                    <p:cond delay="1950"/>
+                                  </p:stCondLst>
+                                  <p:childTnLst>
+                                    <p:set>
+                                      <p:cBhvr>
+                                        <p:cTn id="47" dur="1" fill="hold">
+                                          <p:stCondLst>
+                                            <p:cond delay="0"/>
+                                          </p:stCondLst>
+                                        </p:cTn>
+                                        <p:tgtEl>
+                                          <p:spTgt spid="21"/>
+                                        </p:tgtEl>
+                                        <p:attrNameLst>
+                                          <p:attrName>style.visibility</p:attrName>
+                                        </p:attrNameLst>
+                                      </p:cBhvr>
+                                      <p:to>
+                                        <p:strVal val="visible"/>
+                                      </p:to>
+                                    </p:set>
+                                    <p:animEffect transition="in" filter="fade">
+                                      <p:cBhvr>
+                                        <p:cTn id="48" dur="500"/>
+                                        <p:tgtEl>
+                                          <p:spTgt spid="21"/>
+                                        </p:tgtEl>
+                                      </p:cBhvr>
+                                    </p:animEffect>
+                                  </p:childTnLst>
+                                </p:cTn>
+                              </p:par>
+                            </p:childTnLst>
+                          </p:cTn>
+                        </p:par>
+                      </p:childTnLst>
+                    </p:cTn>
+                  </p:par>
+                </p:childTnLst>
+              </p:cTn>
+              <p:prevCondLst>
+                <p:cond evt="onPrev" delay="0">
+                  <p:tgtEl>
+                    <p:sldTgt/>
+                  </p:tgtEl>
+                </p:cond>
+              </p:prevCondLst>
+              <p:nextCondLst>
+                <p:cond evt="onNext" delay="0">
+                  <p:tgtEl>
+                    <p:sldTgt/>
+                  </p:tgtEl>
+                </p:cond>
+              </p:nextCondLst>
+            </p:seq>
+          </p:childTnLst>
+        </p:cTn>
+      </p:par>
+    </p:tnLst>
+    <p:bldLst>
+      <p:bldP spid="5" grpId="0" animBg="1"/>
+      <p:bldP spid="6" grpId="0" animBg="1"/>
+      <p:bldP spid="7" grpId="0" animBg="1"/>
+      <p:bldP spid="9" grpId="0" animBg="1"/>
+      <p:bldP spid="10" grpId="0" animBg="1"/>
+      <p:bldP spid="11" grpId="0" animBg="1"/>
+      <p:bldP spid="13" grpId="0" animBg="1"/>
+      <p:bldP spid="14" grpId="0" animBg="1"/>
+      <p:bldP spid="15" grpId="0" animBg="1"/>
+      <p:bldP spid="17" grpId="0" animBg="1"/>
+      <p:bldP spid="18" grpId="0" animBg="1"/>
+      <p:bldP spid="19" grpId="0" animBg="1"/>
+      <p:bldP spid="22" grpId="0" animBg="1"/>
+      <p:bldP spid="23" grpId="0" animBg="1"/>
+      <p:bldP spid="21" grpId="0" animBg="1"/>
+    </p:bldLst>
+  </p:timing>
 </p:sld>
 </file>
 
@@ -7174,6 +8859,9 @@
   <p:clrMapOvr>
     <a:masterClrMapping/>
   </p:clrMapOvr>
+  <p:transition spd="med">
+    <p:fade/>
+  </p:transition>
 </p:sld>
 </file>
 
@@ -8000,6 +9688,9 @@
   <p:clrMapOvr>
     <a:masterClrMapping/>
   </p:clrMapOvr>
+  <p:transition spd="med">
+    <p:fade/>
+  </p:transition>
 </p:sld>
 </file>
 
@@ -8740,6 +10431,494 @@
   <p:clrMapOvr>
     <a:masterClrMapping/>
   </p:clrMapOvr>
+  <p:transition spd="med">
+    <p:fade/>
+  </p:transition>
+  <p:timing>
+    <p:tnLst>
+      <p:par>
+        <p:cTn id="1" dur="indefinite" restart="never" nodeType="tmRoot">
+          <p:childTnLst>
+            <p:seq concurrent="1" nextAc="seek">
+              <p:cTn id="2" dur="indefinite" nodeType="mainSeq">
+                <p:childTnLst>
+                  <p:par>
+                    <p:cTn id="3" fill="hold">
+                      <p:stCondLst>
+                        <p:cond delay="indefinite"/>
+                        <p:cond evt="onBegin" delay="0">
+                          <p:tn val="2"/>
+                        </p:cond>
+                      </p:stCondLst>
+                      <p:childTnLst>
+                        <p:par>
+                          <p:cTn id="40" fill="hold">
+                            <p:stCondLst>
+                              <p:cond delay="0"/>
+                            </p:stCondLst>
+                            <p:childTnLst>
+                              <p:par>
+                                <p:cTn id="4" presetID="10" presetClass="entr" presetSubtype="0" fill="hold" grpId="0" nodeType="withEffect">
+                                  <p:stCondLst>
+                                    <p:cond delay="200"/>
+                                  </p:stCondLst>
+                                  <p:childTnLst>
+                                    <p:set>
+                                      <p:cBhvr>
+                                        <p:cTn id="5" dur="1" fill="hold">
+                                          <p:stCondLst>
+                                            <p:cond delay="0"/>
+                                          </p:stCondLst>
+                                        </p:cTn>
+                                        <p:tgtEl>
+                                          <p:spTgt spid="5"/>
+                                        </p:tgtEl>
+                                        <p:attrNameLst>
+                                          <p:attrName>style.visibility</p:attrName>
+                                        </p:attrNameLst>
+                                      </p:cBhvr>
+                                      <p:to>
+                                        <p:strVal val="visible"/>
+                                      </p:to>
+                                    </p:set>
+                                    <p:animEffect transition="in" filter="fade">
+                                      <p:cBhvr>
+                                        <p:cTn id="6" dur="500"/>
+                                        <p:tgtEl>
+                                          <p:spTgt spid="5"/>
+                                        </p:tgtEl>
+                                      </p:cBhvr>
+                                    </p:animEffect>
+                                  </p:childTnLst>
+                                </p:cTn>
+                              </p:par>
+                              <p:par>
+                                <p:cTn id="7" presetID="10" presetClass="entr" presetSubtype="0" fill="hold" grpId="0" nodeType="withEffect">
+                                  <p:stCondLst>
+                                    <p:cond delay="200"/>
+                                  </p:stCondLst>
+                                  <p:childTnLst>
+                                    <p:set>
+                                      <p:cBhvr>
+                                        <p:cTn id="8" dur="1" fill="hold">
+                                          <p:stCondLst>
+                                            <p:cond delay="0"/>
+                                          </p:stCondLst>
+                                        </p:cTn>
+                                        <p:tgtEl>
+                                          <p:spTgt spid="6"/>
+                                        </p:tgtEl>
+                                        <p:attrNameLst>
+                                          <p:attrName>style.visibility</p:attrName>
+                                        </p:attrNameLst>
+                                      </p:cBhvr>
+                                      <p:to>
+                                        <p:strVal val="visible"/>
+                                      </p:to>
+                                    </p:set>
+                                    <p:animEffect transition="in" filter="fade">
+                                      <p:cBhvr>
+                                        <p:cTn id="9" dur="500"/>
+                                        <p:tgtEl>
+                                          <p:spTgt spid="6"/>
+                                        </p:tgtEl>
+                                      </p:cBhvr>
+                                    </p:animEffect>
+                                  </p:childTnLst>
+                                </p:cTn>
+                              </p:par>
+                              <p:par>
+                                <p:cTn id="10" presetID="10" presetClass="entr" presetSubtype="0" fill="hold" grpId="0" nodeType="withEffect">
+                                  <p:stCondLst>
+                                    <p:cond delay="550"/>
+                                  </p:stCondLst>
+                                  <p:childTnLst>
+                                    <p:set>
+                                      <p:cBhvr>
+                                        <p:cTn id="11" dur="1" fill="hold">
+                                          <p:stCondLst>
+                                            <p:cond delay="0"/>
+                                          </p:stCondLst>
+                                        </p:cTn>
+                                        <p:tgtEl>
+                                          <p:spTgt spid="8"/>
+                                        </p:tgtEl>
+                                        <p:attrNameLst>
+                                          <p:attrName>style.visibility</p:attrName>
+                                        </p:attrNameLst>
+                                      </p:cBhvr>
+                                      <p:to>
+                                        <p:strVal val="visible"/>
+                                      </p:to>
+                                    </p:set>
+                                    <p:animEffect transition="in" filter="fade">
+                                      <p:cBhvr>
+                                        <p:cTn id="12" dur="500"/>
+                                        <p:tgtEl>
+                                          <p:spTgt spid="8"/>
+                                        </p:tgtEl>
+                                      </p:cBhvr>
+                                    </p:animEffect>
+                                  </p:childTnLst>
+                                </p:cTn>
+                              </p:par>
+                              <p:par>
+                                <p:cTn id="13" presetID="10" presetClass="entr" presetSubtype="0" fill="hold" grpId="0" nodeType="withEffect">
+                                  <p:stCondLst>
+                                    <p:cond delay="550"/>
+                                  </p:stCondLst>
+                                  <p:childTnLst>
+                                    <p:set>
+                                      <p:cBhvr>
+                                        <p:cTn id="14" dur="1" fill="hold">
+                                          <p:stCondLst>
+                                            <p:cond delay="0"/>
+                                          </p:stCondLst>
+                                        </p:cTn>
+                                        <p:tgtEl>
+                                          <p:spTgt spid="9"/>
+                                        </p:tgtEl>
+                                        <p:attrNameLst>
+                                          <p:attrName>style.visibility</p:attrName>
+                                        </p:attrNameLst>
+                                      </p:cBhvr>
+                                      <p:to>
+                                        <p:strVal val="visible"/>
+                                      </p:to>
+                                    </p:set>
+                                    <p:animEffect transition="in" filter="fade">
+                                      <p:cBhvr>
+                                        <p:cTn id="15" dur="500"/>
+                                        <p:tgtEl>
+                                          <p:spTgt spid="9"/>
+                                        </p:tgtEl>
+                                      </p:cBhvr>
+                                    </p:animEffect>
+                                  </p:childTnLst>
+                                </p:cTn>
+                              </p:par>
+                              <p:par>
+                                <p:cTn id="16" presetID="10" presetClass="entr" presetSubtype="0" fill="hold" grpId="0" nodeType="withEffect">
+                                  <p:stCondLst>
+                                    <p:cond delay="900"/>
+                                  </p:stCondLst>
+                                  <p:childTnLst>
+                                    <p:set>
+                                      <p:cBhvr>
+                                        <p:cTn id="17" dur="1" fill="hold">
+                                          <p:stCondLst>
+                                            <p:cond delay="0"/>
+                                          </p:stCondLst>
+                                        </p:cTn>
+                                        <p:tgtEl>
+                                          <p:spTgt spid="11"/>
+                                        </p:tgtEl>
+                                        <p:attrNameLst>
+                                          <p:attrName>style.visibility</p:attrName>
+                                        </p:attrNameLst>
+                                      </p:cBhvr>
+                                      <p:to>
+                                        <p:strVal val="visible"/>
+                                      </p:to>
+                                    </p:set>
+                                    <p:animEffect transition="in" filter="fade">
+                                      <p:cBhvr>
+                                        <p:cTn id="18" dur="500"/>
+                                        <p:tgtEl>
+                                          <p:spTgt spid="11"/>
+                                        </p:tgtEl>
+                                      </p:cBhvr>
+                                    </p:animEffect>
+                                  </p:childTnLst>
+                                </p:cTn>
+                              </p:par>
+                              <p:par>
+                                <p:cTn id="19" presetID="10" presetClass="entr" presetSubtype="0" fill="hold" grpId="0" nodeType="withEffect">
+                                  <p:stCondLst>
+                                    <p:cond delay="900"/>
+                                  </p:stCondLst>
+                                  <p:childTnLst>
+                                    <p:set>
+                                      <p:cBhvr>
+                                        <p:cTn id="20" dur="1" fill="hold">
+                                          <p:stCondLst>
+                                            <p:cond delay="0"/>
+                                          </p:stCondLst>
+                                        </p:cTn>
+                                        <p:tgtEl>
+                                          <p:spTgt spid="12"/>
+                                        </p:tgtEl>
+                                        <p:attrNameLst>
+                                          <p:attrName>style.visibility</p:attrName>
+                                        </p:attrNameLst>
+                                      </p:cBhvr>
+                                      <p:to>
+                                        <p:strVal val="visible"/>
+                                      </p:to>
+                                    </p:set>
+                                    <p:animEffect transition="in" filter="fade">
+                                      <p:cBhvr>
+                                        <p:cTn id="21" dur="500"/>
+                                        <p:tgtEl>
+                                          <p:spTgt spid="12"/>
+                                        </p:tgtEl>
+                                      </p:cBhvr>
+                                    </p:animEffect>
+                                  </p:childTnLst>
+                                </p:cTn>
+                              </p:par>
+                              <p:par>
+                                <p:cTn id="22" presetID="10" presetClass="entr" presetSubtype="0" fill="hold" grpId="0" nodeType="withEffect">
+                                  <p:stCondLst>
+                                    <p:cond delay="1250"/>
+                                  </p:stCondLst>
+                                  <p:childTnLst>
+                                    <p:set>
+                                      <p:cBhvr>
+                                        <p:cTn id="23" dur="1" fill="hold">
+                                          <p:stCondLst>
+                                            <p:cond delay="0"/>
+                                          </p:stCondLst>
+                                        </p:cTn>
+                                        <p:tgtEl>
+                                          <p:spTgt spid="14"/>
+                                        </p:tgtEl>
+                                        <p:attrNameLst>
+                                          <p:attrName>style.visibility</p:attrName>
+                                        </p:attrNameLst>
+                                      </p:cBhvr>
+                                      <p:to>
+                                        <p:strVal val="visible"/>
+                                      </p:to>
+                                    </p:set>
+                                    <p:animEffect transition="in" filter="fade">
+                                      <p:cBhvr>
+                                        <p:cTn id="24" dur="500"/>
+                                        <p:tgtEl>
+                                          <p:spTgt spid="14"/>
+                                        </p:tgtEl>
+                                      </p:cBhvr>
+                                    </p:animEffect>
+                                  </p:childTnLst>
+                                </p:cTn>
+                              </p:par>
+                              <p:par>
+                                <p:cTn id="25" presetID="10" presetClass="entr" presetSubtype="0" fill="hold" grpId="0" nodeType="withEffect">
+                                  <p:stCondLst>
+                                    <p:cond delay="1250"/>
+                                  </p:stCondLst>
+                                  <p:childTnLst>
+                                    <p:set>
+                                      <p:cBhvr>
+                                        <p:cTn id="26" dur="1" fill="hold">
+                                          <p:stCondLst>
+                                            <p:cond delay="0"/>
+                                          </p:stCondLst>
+                                        </p:cTn>
+                                        <p:tgtEl>
+                                          <p:spTgt spid="15"/>
+                                        </p:tgtEl>
+                                        <p:attrNameLst>
+                                          <p:attrName>style.visibility</p:attrName>
+                                        </p:attrNameLst>
+                                      </p:cBhvr>
+                                      <p:to>
+                                        <p:strVal val="visible"/>
+                                      </p:to>
+                                    </p:set>
+                                    <p:animEffect transition="in" filter="fade">
+                                      <p:cBhvr>
+                                        <p:cTn id="27" dur="500"/>
+                                        <p:tgtEl>
+                                          <p:spTgt spid="15"/>
+                                        </p:tgtEl>
+                                      </p:cBhvr>
+                                    </p:animEffect>
+                                  </p:childTnLst>
+                                </p:cTn>
+                              </p:par>
+                              <p:par>
+                                <p:cTn id="28" presetID="10" presetClass="entr" presetSubtype="0" fill="hold" grpId="0" nodeType="withEffect">
+                                  <p:stCondLst>
+                                    <p:cond delay="1600"/>
+                                  </p:stCondLst>
+                                  <p:childTnLst>
+                                    <p:set>
+                                      <p:cBhvr>
+                                        <p:cTn id="29" dur="1" fill="hold">
+                                          <p:stCondLst>
+                                            <p:cond delay="0"/>
+                                          </p:stCondLst>
+                                        </p:cTn>
+                                        <p:tgtEl>
+                                          <p:spTgt spid="17"/>
+                                        </p:tgtEl>
+                                        <p:attrNameLst>
+                                          <p:attrName>style.visibility</p:attrName>
+                                        </p:attrNameLst>
+                                      </p:cBhvr>
+                                      <p:to>
+                                        <p:strVal val="visible"/>
+                                      </p:to>
+                                    </p:set>
+                                    <p:animEffect transition="in" filter="fade">
+                                      <p:cBhvr>
+                                        <p:cTn id="30" dur="500"/>
+                                        <p:tgtEl>
+                                          <p:spTgt spid="17"/>
+                                        </p:tgtEl>
+                                      </p:cBhvr>
+                                    </p:animEffect>
+                                  </p:childTnLst>
+                                </p:cTn>
+                              </p:par>
+                              <p:par>
+                                <p:cTn id="31" presetID="10" presetClass="entr" presetSubtype="0" fill="hold" grpId="0" nodeType="withEffect">
+                                  <p:stCondLst>
+                                    <p:cond delay="1600"/>
+                                  </p:stCondLst>
+                                  <p:childTnLst>
+                                    <p:set>
+                                      <p:cBhvr>
+                                        <p:cTn id="32" dur="1" fill="hold">
+                                          <p:stCondLst>
+                                            <p:cond delay="0"/>
+                                          </p:stCondLst>
+                                        </p:cTn>
+                                        <p:tgtEl>
+                                          <p:spTgt spid="18"/>
+                                        </p:tgtEl>
+                                        <p:attrNameLst>
+                                          <p:attrName>style.visibility</p:attrName>
+                                        </p:attrNameLst>
+                                      </p:cBhvr>
+                                      <p:to>
+                                        <p:strVal val="visible"/>
+                                      </p:to>
+                                    </p:set>
+                                    <p:animEffect transition="in" filter="fade">
+                                      <p:cBhvr>
+                                        <p:cTn id="33" dur="500"/>
+                                        <p:tgtEl>
+                                          <p:spTgt spid="18"/>
+                                        </p:tgtEl>
+                                      </p:cBhvr>
+                                    </p:animEffect>
+                                  </p:childTnLst>
+                                </p:cTn>
+                              </p:par>
+                              <p:par>
+                                <p:cTn id="34" presetID="10" presetClass="entr" presetSubtype="0" fill="hold" grpId="0" nodeType="withEffect">
+                                  <p:stCondLst>
+                                    <p:cond delay="1950"/>
+                                  </p:stCondLst>
+                                  <p:childTnLst>
+                                    <p:set>
+                                      <p:cBhvr>
+                                        <p:cTn id="35" dur="1" fill="hold">
+                                          <p:stCondLst>
+                                            <p:cond delay="0"/>
+                                          </p:stCondLst>
+                                        </p:cTn>
+                                        <p:tgtEl>
+                                          <p:spTgt spid="20"/>
+                                        </p:tgtEl>
+                                        <p:attrNameLst>
+                                          <p:attrName>style.visibility</p:attrName>
+                                        </p:attrNameLst>
+                                      </p:cBhvr>
+                                      <p:to>
+                                        <p:strVal val="visible"/>
+                                      </p:to>
+                                    </p:set>
+                                    <p:animEffect transition="in" filter="fade">
+                                      <p:cBhvr>
+                                        <p:cTn id="36" dur="500"/>
+                                        <p:tgtEl>
+                                          <p:spTgt spid="20"/>
+                                        </p:tgtEl>
+                                      </p:cBhvr>
+                                    </p:animEffect>
+                                  </p:childTnLst>
+                                </p:cTn>
+                              </p:par>
+                              <p:par>
+                                <p:cTn id="37" presetID="10" presetClass="entr" presetSubtype="0" fill="hold" grpId="0" nodeType="withEffect">
+                                  <p:stCondLst>
+                                    <p:cond delay="1950"/>
+                                  </p:stCondLst>
+                                  <p:childTnLst>
+                                    <p:set>
+                                      <p:cBhvr>
+                                        <p:cTn id="38" dur="1" fill="hold">
+                                          <p:stCondLst>
+                                            <p:cond delay="0"/>
+                                          </p:stCondLst>
+                                        </p:cTn>
+                                        <p:tgtEl>
+                                          <p:spTgt spid="21"/>
+                                        </p:tgtEl>
+                                        <p:attrNameLst>
+                                          <p:attrName>style.visibility</p:attrName>
+                                        </p:attrNameLst>
+                                      </p:cBhvr>
+                                      <p:to>
+                                        <p:strVal val="visible"/>
+                                      </p:to>
+                                    </p:set>
+                                    <p:animEffect transition="in" filter="fade">
+                                      <p:cBhvr>
+                                        <p:cTn id="39" dur="500"/>
+                                        <p:tgtEl>
+                                          <p:spTgt spid="21"/>
+                                        </p:tgtEl>
+                                      </p:cBhvr>
+                                    </p:animEffect>
+                                  </p:childTnLst>
+                                </p:cTn>
+                              </p:par>
+                            </p:childTnLst>
+                          </p:cTn>
+                        </p:par>
+                      </p:childTnLst>
+                    </p:cTn>
+                  </p:par>
+                </p:childTnLst>
+              </p:cTn>
+              <p:prevCondLst>
+                <p:cond evt="onPrev" delay="0">
+                  <p:tgtEl>
+                    <p:sldTgt/>
+                  </p:tgtEl>
+                </p:cond>
+              </p:prevCondLst>
+              <p:nextCondLst>
+                <p:cond evt="onNext" delay="0">
+                  <p:tgtEl>
+                    <p:sldTgt/>
+                  </p:tgtEl>
+                </p:cond>
+              </p:nextCondLst>
+            </p:seq>
+          </p:childTnLst>
+        </p:cTn>
+      </p:par>
+    </p:tnLst>
+    <p:bldLst>
+      <p:bldP spid="5" grpId="0" animBg="1"/>
+      <p:bldP spid="6" grpId="0" animBg="1"/>
+      <p:bldP spid="8" grpId="0" animBg="1"/>
+      <p:bldP spid="9" grpId="0" animBg="1"/>
+      <p:bldP spid="11" grpId="0" animBg="1"/>
+      <p:bldP spid="12" grpId="0" animBg="1"/>
+      <p:bldP spid="14" grpId="0" animBg="1"/>
+      <p:bldP spid="15" grpId="0" animBg="1"/>
+      <p:bldP spid="17" grpId="0" animBg="1"/>
+      <p:bldP spid="18" grpId="0" animBg="1"/>
+      <p:bldP spid="20" grpId="0" animBg="1"/>
+      <p:bldP spid="21" grpId="0" animBg="1"/>
+    </p:bldLst>
+  </p:timing>
 </p:sld>
 </file>
 
@@ -8842,8 +11021,8 @@
         </p:nvSpPr>
         <p:spPr>
           <a:xfrm>
-            <a:off x="548640" y="1508760"/>
-            <a:ext cx="11064240" cy="457200"/>
+            <a:off x="548640" y="1554480"/>
+            <a:ext cx="6583680" cy="731520"/>
           </a:xfrm>
           <a:prstGeom prst="rect">
             <a:avLst/>
@@ -8872,419 +11051,14 @@
       </p:sp>
       <p:sp>
         <p:nvSpPr>
-          <p:cNvPr id="5" name="问题卡1"/>
+          <p:cNvPr id="5" name="分隔线"/>
           <p:cNvSpPr/>
           <p:nvPr/>
         </p:nvSpPr>
         <p:spPr>
           <a:xfrm>
-            <a:off x="548640" y="2240280"/>
-            <a:ext cx="3474720" cy="2011680"/>
-          </a:xfrm>
-          <a:prstGeom prst="roundRect">
-            <a:avLst>
-              <a:gd name="adj" fmla="val 2273"/>
-            </a:avLst>
-          </a:prstGeom>
-          <a:solidFill>
-            <a:schemeClr val="bg2"/>
-          </a:solidFill>
-          <a:ln w="12700">
-            <a:solidFill>
-              <a:schemeClr val="bg2"/>
-            </a:solidFill>
-            <a:prstDash val="solid"/>
-          </a:ln>
-        </p:spPr>
-      </p:sp>
-      <p:sp>
-        <p:nvSpPr>
-          <p:cNvPr id="6" name="问题编号1"/>
-          <p:cNvSpPr txBox="1"/>
-          <p:nvPr/>
-        </p:nvSpPr>
-        <p:spPr>
-          <a:xfrm>
-            <a:off x="868680" y="2423160"/>
-            <a:ext cx="2834640" cy="320040"/>
-          </a:xfrm>
-          <a:prstGeom prst="rect">
-            <a:avLst/>
-          </a:prstGeom>
-          <a:noFill/>
-          <a:ln/>
-        </p:spPr>
-        <p:txBody>
-          <a:bodyPr wrap="square" lIns="0" tIns="0" rIns="0" bIns="0" rtlCol="0" anchor="ctr"/>
-          <a:lstStyle/>
-          <a:p>
-            <a:pPr indent="0" marL="0">
-              <a:buNone/>
-            </a:pPr>
-            <a:r>
-              <a:rPr lang="en-US" sz="1400" b="1" dirty="0">
-                <a:solidFill>
-                  <a:schemeClr val="accent5"/>
-                </a:solidFill>
-              </a:rPr>
-              <a:t>问题一</a:t>
-            </a:r>
-            <a:endParaRPr lang="en-US" sz="1400" dirty="0"/>
-          </a:p>
-        </p:txBody>
-      </p:sp>
-      <p:sp>
-        <p:nvSpPr>
-          <p:cNvPr id="7" name="问题名1"/>
-          <p:cNvSpPr txBox="1"/>
-          <p:nvPr/>
-        </p:nvSpPr>
-        <p:spPr>
-          <a:xfrm>
-            <a:off x="868680" y="2788920"/>
-            <a:ext cx="2834640" cy="548640"/>
-          </a:xfrm>
-          <a:prstGeom prst="rect">
-            <a:avLst/>
-          </a:prstGeom>
-          <a:noFill/>
-          <a:ln/>
-        </p:spPr>
-        <p:txBody>
-          <a:bodyPr wrap="square" lIns="0" tIns="0" rIns="0" bIns="0" rtlCol="0" anchor="ctr"/>
-          <a:lstStyle/>
-          <a:p>
-            <a:pPr indent="0" marL="0">
-              <a:buNone/>
-            </a:pPr>
-            <a:r>
-              <a:rPr lang="en-US" sz="2400" b="1" dirty="0">
-                <a:solidFill>
-                  <a:schemeClr val="tx2"/>
-                </a:solidFill>
-              </a:rPr>
-              <a:t>使用频率</a:t>
-            </a:r>
-            <a:endParaRPr lang="en-US" sz="2400" dirty="0"/>
-          </a:p>
-        </p:txBody>
-      </p:sp>
-      <p:sp>
-        <p:nvSpPr>
-          <p:cNvPr id="8" name="问题内容1"/>
-          <p:cNvSpPr txBox="1"/>
-          <p:nvPr/>
-        </p:nvSpPr>
-        <p:spPr>
-          <a:xfrm>
-            <a:off x="868680" y="3429000"/>
-            <a:ext cx="2834640" cy="548640"/>
-          </a:xfrm>
-          <a:prstGeom prst="rect">
-            <a:avLst/>
-          </a:prstGeom>
-          <a:noFill/>
-          <a:ln/>
-        </p:spPr>
-        <p:txBody>
-          <a:bodyPr wrap="square" lIns="0" tIns="0" rIns="0" bIns="0" rtlCol="0" anchor="t"/>
-          <a:lstStyle/>
-          <a:p>
-            <a:pPr indent="0" marL="0">
-              <a:buNone/>
-            </a:pPr>
-            <a:r>
-              <a:rPr lang="en-US" sz="1700" dirty="0">
-                <a:solidFill>
-                  <a:schemeClr val="tx1"/>
-                </a:solidFill>
-              </a:rPr>
-              <a:t>各年龄层 AI 使用频率</a:t>
-            </a:r>
-            <a:endParaRPr lang="en-US" sz="1700" dirty="0"/>
-          </a:p>
-        </p:txBody>
-      </p:sp>
-      <p:sp>
-        <p:nvSpPr>
-          <p:cNvPr id="9" name="问题卡2"/>
-          <p:cNvSpPr/>
-          <p:nvPr/>
-        </p:nvSpPr>
-        <p:spPr>
-          <a:xfrm>
-            <a:off x="4297680" y="2240280"/>
-            <a:ext cx="3474720" cy="2011680"/>
-          </a:xfrm>
-          <a:prstGeom prst="roundRect">
-            <a:avLst>
-              <a:gd name="adj" fmla="val 2273"/>
-            </a:avLst>
-          </a:prstGeom>
-          <a:solidFill>
-            <a:schemeClr val="bg2"/>
-          </a:solidFill>
-          <a:ln w="12700">
-            <a:solidFill>
-              <a:schemeClr val="bg2"/>
-            </a:solidFill>
-            <a:prstDash val="solid"/>
-          </a:ln>
-        </p:spPr>
-      </p:sp>
-      <p:sp>
-        <p:nvSpPr>
-          <p:cNvPr id="10" name="问题编号2"/>
-          <p:cNvSpPr txBox="1"/>
-          <p:nvPr/>
-        </p:nvSpPr>
-        <p:spPr>
-          <a:xfrm>
-            <a:off x="4617720" y="2423160"/>
-            <a:ext cx="2834640" cy="320040"/>
-          </a:xfrm>
-          <a:prstGeom prst="rect">
-            <a:avLst/>
-          </a:prstGeom>
-          <a:noFill/>
-          <a:ln/>
-        </p:spPr>
-        <p:txBody>
-          <a:bodyPr wrap="square" lIns="0" tIns="0" rIns="0" bIns="0" rtlCol="0" anchor="ctr"/>
-          <a:lstStyle/>
-          <a:p>
-            <a:pPr indent="0" marL="0">
-              <a:buNone/>
-            </a:pPr>
-            <a:r>
-              <a:rPr lang="en-US" sz="1400" b="1" dirty="0">
-                <a:solidFill>
-                  <a:schemeClr val="accent5"/>
-                </a:solidFill>
-              </a:rPr>
-              <a:t>问题二</a:t>
-            </a:r>
-            <a:endParaRPr lang="en-US" sz="1400" dirty="0"/>
-          </a:p>
-        </p:txBody>
-      </p:sp>
-      <p:sp>
-        <p:nvSpPr>
-          <p:cNvPr id="11" name="问题名2"/>
-          <p:cNvSpPr txBox="1"/>
-          <p:nvPr/>
-        </p:nvSpPr>
-        <p:spPr>
-          <a:xfrm>
-            <a:off x="4617720" y="2788920"/>
-            <a:ext cx="2834640" cy="548640"/>
-          </a:xfrm>
-          <a:prstGeom prst="rect">
-            <a:avLst/>
-          </a:prstGeom>
-          <a:noFill/>
-          <a:ln/>
-        </p:spPr>
-        <p:txBody>
-          <a:bodyPr wrap="square" lIns="0" tIns="0" rIns="0" bIns="0" rtlCol="0" anchor="ctr"/>
-          <a:lstStyle/>
-          <a:p>
-            <a:pPr indent="0" marL="0">
-              <a:buNone/>
-            </a:pPr>
-            <a:r>
-              <a:rPr lang="en-US" sz="2400" b="1" dirty="0">
-                <a:solidFill>
-                  <a:schemeClr val="tx2"/>
-                </a:solidFill>
-              </a:rPr>
-              <a:t>检索难度</a:t>
-            </a:r>
-            <a:endParaRPr lang="en-US" sz="2400" dirty="0"/>
-          </a:p>
-        </p:txBody>
-      </p:sp>
-      <p:sp>
-        <p:nvSpPr>
-          <p:cNvPr id="12" name="问题内容2"/>
-          <p:cNvSpPr txBox="1"/>
-          <p:nvPr/>
-        </p:nvSpPr>
-        <p:spPr>
-          <a:xfrm>
-            <a:off x="4617720" y="3429000"/>
-            <a:ext cx="2834640" cy="548640"/>
-          </a:xfrm>
-          <a:prstGeom prst="rect">
-            <a:avLst/>
-          </a:prstGeom>
-          <a:noFill/>
-          <a:ln/>
-        </p:spPr>
-        <p:txBody>
-          <a:bodyPr wrap="square" lIns="0" tIns="0" rIns="0" bIns="0" rtlCol="0" anchor="t"/>
-          <a:lstStyle/>
-          <a:p>
-            <a:pPr indent="0" marL="0">
-              <a:buNone/>
-            </a:pPr>
-            <a:r>
-              <a:rPr lang="en-US" sz="1700" dirty="0">
-                <a:solidFill>
-                  <a:schemeClr val="tx1"/>
-                </a:solidFill>
-              </a:rPr>
-              <a:t>检索耗时与退订意向</a:t>
-            </a:r>
-            <a:endParaRPr lang="en-US" sz="1700" dirty="0"/>
-          </a:p>
-        </p:txBody>
-      </p:sp>
-      <p:sp>
-        <p:nvSpPr>
-          <p:cNvPr id="13" name="问题卡3"/>
-          <p:cNvSpPr/>
-          <p:nvPr/>
-        </p:nvSpPr>
-        <p:spPr>
-          <a:xfrm>
-            <a:off x="8046720" y="2240280"/>
-            <a:ext cx="3474720" cy="2011680"/>
-          </a:xfrm>
-          <a:prstGeom prst="roundRect">
-            <a:avLst>
-              <a:gd name="adj" fmla="val 2273"/>
-            </a:avLst>
-          </a:prstGeom>
-          <a:solidFill>
-            <a:schemeClr val="bg2"/>
-          </a:solidFill>
-          <a:ln w="12700">
-            <a:solidFill>
-              <a:schemeClr val="bg2"/>
-            </a:solidFill>
-            <a:prstDash val="solid"/>
-          </a:ln>
-        </p:spPr>
-      </p:sp>
-      <p:sp>
-        <p:nvSpPr>
-          <p:cNvPr id="14" name="问题编号3"/>
-          <p:cNvSpPr txBox="1"/>
-          <p:nvPr/>
-        </p:nvSpPr>
-        <p:spPr>
-          <a:xfrm>
-            <a:off x="8366760" y="2423160"/>
-            <a:ext cx="2834640" cy="320040"/>
-          </a:xfrm>
-          <a:prstGeom prst="rect">
-            <a:avLst/>
-          </a:prstGeom>
-          <a:noFill/>
-          <a:ln/>
-        </p:spPr>
-        <p:txBody>
-          <a:bodyPr wrap="square" lIns="0" tIns="0" rIns="0" bIns="0" rtlCol="0" anchor="ctr"/>
-          <a:lstStyle/>
-          <a:p>
-            <a:pPr indent="0" marL="0">
-              <a:buNone/>
-            </a:pPr>
-            <a:r>
-              <a:rPr lang="en-US" sz="1400" b="1" dirty="0">
-                <a:solidFill>
-                  <a:schemeClr val="accent5"/>
-                </a:solidFill>
-              </a:rPr>
-              <a:t>问题三</a:t>
-            </a:r>
-            <a:endParaRPr lang="en-US" sz="1400" dirty="0"/>
-          </a:p>
-        </p:txBody>
-      </p:sp>
-      <p:sp>
-        <p:nvSpPr>
-          <p:cNvPr id="15" name="问题名3"/>
-          <p:cNvSpPr txBox="1"/>
-          <p:nvPr/>
-        </p:nvSpPr>
-        <p:spPr>
-          <a:xfrm>
-            <a:off x="8366760" y="2788920"/>
-            <a:ext cx="2834640" cy="548640"/>
-          </a:xfrm>
-          <a:prstGeom prst="rect">
-            <a:avLst/>
-          </a:prstGeom>
-          <a:noFill/>
-          <a:ln/>
-        </p:spPr>
-        <p:txBody>
-          <a:bodyPr wrap="square" lIns="0" tIns="0" rIns="0" bIns="0" rtlCol="0" anchor="ctr"/>
-          <a:lstStyle/>
-          <a:p>
-            <a:pPr indent="0" marL="0">
-              <a:buNone/>
-            </a:pPr>
-            <a:r>
-              <a:rPr lang="en-US" sz="2400" b="1" dirty="0">
-                <a:solidFill>
-                  <a:schemeClr val="tx2"/>
-                </a:solidFill>
-              </a:rPr>
-              <a:t>信任程度</a:t>
-            </a:r>
-            <a:endParaRPr lang="en-US" sz="2400" dirty="0"/>
-          </a:p>
-        </p:txBody>
-      </p:sp>
-      <p:sp>
-        <p:nvSpPr>
-          <p:cNvPr id="16" name="问题内容3"/>
-          <p:cNvSpPr txBox="1"/>
-          <p:nvPr/>
-        </p:nvSpPr>
-        <p:spPr>
-          <a:xfrm>
-            <a:off x="8366760" y="3429000"/>
-            <a:ext cx="2834640" cy="548640"/>
-          </a:xfrm>
-          <a:prstGeom prst="rect">
-            <a:avLst/>
-          </a:prstGeom>
-          <a:noFill/>
-          <a:ln/>
-        </p:spPr>
-        <p:txBody>
-          <a:bodyPr wrap="square" lIns="0" tIns="0" rIns="0" bIns="0" rtlCol="0" anchor="t"/>
-          <a:lstStyle/>
-          <a:p>
-            <a:pPr indent="0" marL="0">
-              <a:buNone/>
-            </a:pPr>
-            <a:r>
-              <a:rPr lang="en-US" sz="1700" dirty="0">
-                <a:solidFill>
-                  <a:schemeClr val="tx1"/>
-                </a:solidFill>
-              </a:rPr>
-              <a:t>对 AI 回答的核查</a:t>
-            </a:r>
-            <a:endParaRPr lang="en-US" sz="1700" dirty="0"/>
-          </a:p>
-        </p:txBody>
-      </p:sp>
-      <p:sp>
-        <p:nvSpPr>
-          <p:cNvPr id="17" name="分隔线"/>
-          <p:cNvSpPr/>
-          <p:nvPr/>
-        </p:nvSpPr>
-        <p:spPr>
-          <a:xfrm>
-            <a:off x="548640" y="4663440"/>
-            <a:ext cx="11064240" cy="0"/>
+            <a:off x="548640" y="2514600"/>
+            <a:ext cx="6583680" cy="0"/>
           </a:xfrm>
           <a:prstGeom prst="line">
             <a:avLst/>
@@ -9300,14 +11074,407 @@
       </p:sp>
       <p:sp>
         <p:nvSpPr>
+          <p:cNvPr id="6" name="问题编号1"/>
+          <p:cNvSpPr txBox="1"/>
+          <p:nvPr/>
+        </p:nvSpPr>
+        <p:spPr>
+          <a:xfrm>
+            <a:off x="548640" y="2514600"/>
+            <a:ext cx="914400" cy="777240"/>
+          </a:xfrm>
+          <a:prstGeom prst="rect">
+            <a:avLst/>
+          </a:prstGeom>
+          <a:noFill/>
+          <a:ln/>
+        </p:spPr>
+        <p:txBody>
+          <a:bodyPr wrap="square" lIns="0" tIns="0" rIns="0" bIns="0" rtlCol="0" anchor="ctr"/>
+          <a:lstStyle/>
+          <a:p>
+            <a:pPr indent="0" marL="0">
+              <a:buNone/>
+            </a:pPr>
+            <a:r>
+              <a:rPr lang="en-US" sz="1400" b="1" dirty="0">
+                <a:solidFill>
+                  <a:schemeClr val="accent5"/>
+                </a:solidFill>
+              </a:rPr>
+              <a:t>问题一</a:t>
+            </a:r>
+            <a:endParaRPr lang="en-US" sz="1400" dirty="0"/>
+          </a:p>
+        </p:txBody>
+      </p:sp>
+      <p:sp>
+        <p:nvSpPr>
+          <p:cNvPr id="7" name="问题名1"/>
+          <p:cNvSpPr txBox="1"/>
+          <p:nvPr/>
+        </p:nvSpPr>
+        <p:spPr>
+          <a:xfrm>
+            <a:off x="1508760" y="2514600"/>
+            <a:ext cx="2011680" cy="777240"/>
+          </a:xfrm>
+          <a:prstGeom prst="rect">
+            <a:avLst/>
+          </a:prstGeom>
+          <a:noFill/>
+          <a:ln/>
+        </p:spPr>
+        <p:txBody>
+          <a:bodyPr wrap="square" lIns="0" tIns="0" rIns="0" bIns="0" rtlCol="0" anchor="ctr"/>
+          <a:lstStyle/>
+          <a:p>
+            <a:pPr indent="0" marL="0">
+              <a:buNone/>
+            </a:pPr>
+            <a:r>
+              <a:rPr lang="en-US" sz="2100" b="1" dirty="0">
+                <a:solidFill>
+                  <a:schemeClr val="tx2"/>
+                </a:solidFill>
+              </a:rPr>
+              <a:t>使用频率</a:t>
+            </a:r>
+            <a:endParaRPr lang="en-US" sz="2100" dirty="0"/>
+          </a:p>
+        </p:txBody>
+      </p:sp>
+      <p:sp>
+        <p:nvSpPr>
+          <p:cNvPr id="8" name="问题内容1"/>
+          <p:cNvSpPr txBox="1"/>
+          <p:nvPr/>
+        </p:nvSpPr>
+        <p:spPr>
+          <a:xfrm>
+            <a:off x="3611880" y="2514600"/>
+            <a:ext cx="3520440" cy="777240"/>
+          </a:xfrm>
+          <a:prstGeom prst="rect">
+            <a:avLst/>
+          </a:prstGeom>
+          <a:noFill/>
+          <a:ln/>
+        </p:spPr>
+        <p:txBody>
+          <a:bodyPr wrap="square" lIns="0" tIns="0" rIns="0" bIns="0" rtlCol="0" anchor="ctr"/>
+          <a:lstStyle/>
+          <a:p>
+            <a:pPr indent="0" marL="0">
+              <a:buNone/>
+            </a:pPr>
+            <a:r>
+              <a:rPr lang="en-US" sz="1800" dirty="0">
+                <a:solidFill>
+                  <a:schemeClr val="tx1"/>
+                </a:solidFill>
+              </a:rPr>
+              <a:t>各年龄层 AI 使用频率</a:t>
+            </a:r>
+            <a:endParaRPr lang="en-US" sz="1800" dirty="0"/>
+          </a:p>
+        </p:txBody>
+      </p:sp>
+      <p:sp>
+        <p:nvSpPr>
+          <p:cNvPr id="9" name="分隔线"/>
+          <p:cNvSpPr/>
+          <p:nvPr/>
+        </p:nvSpPr>
+        <p:spPr>
+          <a:xfrm>
+            <a:off x="548640" y="3291840"/>
+            <a:ext cx="6583680" cy="0"/>
+          </a:xfrm>
+          <a:prstGeom prst="line">
+            <a:avLst/>
+          </a:prstGeom>
+          <a:noFill/>
+          <a:ln w="9525">
+            <a:solidFill>
+              <a:srgbClr val="D5DAE1"/>
+            </a:solidFill>
+            <a:prstDash val="solid"/>
+          </a:ln>
+        </p:spPr>
+      </p:sp>
+      <p:sp>
+        <p:nvSpPr>
+          <p:cNvPr id="10" name="问题编号2"/>
+          <p:cNvSpPr txBox="1"/>
+          <p:nvPr/>
+        </p:nvSpPr>
+        <p:spPr>
+          <a:xfrm>
+            <a:off x="548640" y="3291840"/>
+            <a:ext cx="914400" cy="777240"/>
+          </a:xfrm>
+          <a:prstGeom prst="rect">
+            <a:avLst/>
+          </a:prstGeom>
+          <a:noFill/>
+          <a:ln/>
+        </p:spPr>
+        <p:txBody>
+          <a:bodyPr wrap="square" lIns="0" tIns="0" rIns="0" bIns="0" rtlCol="0" anchor="ctr"/>
+          <a:lstStyle/>
+          <a:p>
+            <a:pPr indent="0" marL="0">
+              <a:buNone/>
+            </a:pPr>
+            <a:r>
+              <a:rPr lang="en-US" sz="1400" b="1" dirty="0">
+                <a:solidFill>
+                  <a:schemeClr val="accent5"/>
+                </a:solidFill>
+              </a:rPr>
+              <a:t>问题二</a:t>
+            </a:r>
+            <a:endParaRPr lang="en-US" sz="1400" dirty="0"/>
+          </a:p>
+        </p:txBody>
+      </p:sp>
+      <p:sp>
+        <p:nvSpPr>
+          <p:cNvPr id="11" name="问题名2"/>
+          <p:cNvSpPr txBox="1"/>
+          <p:nvPr/>
+        </p:nvSpPr>
+        <p:spPr>
+          <a:xfrm>
+            <a:off x="1508760" y="3291840"/>
+            <a:ext cx="2011680" cy="777240"/>
+          </a:xfrm>
+          <a:prstGeom prst="rect">
+            <a:avLst/>
+          </a:prstGeom>
+          <a:noFill/>
+          <a:ln/>
+        </p:spPr>
+        <p:txBody>
+          <a:bodyPr wrap="square" lIns="0" tIns="0" rIns="0" bIns="0" rtlCol="0" anchor="ctr"/>
+          <a:lstStyle/>
+          <a:p>
+            <a:pPr indent="0" marL="0">
+              <a:buNone/>
+            </a:pPr>
+            <a:r>
+              <a:rPr lang="en-US" sz="2100" b="1" dirty="0">
+                <a:solidFill>
+                  <a:schemeClr val="tx2"/>
+                </a:solidFill>
+              </a:rPr>
+              <a:t>检索难度</a:t>
+            </a:r>
+            <a:endParaRPr lang="en-US" sz="2100" dirty="0"/>
+          </a:p>
+        </p:txBody>
+      </p:sp>
+      <p:sp>
+        <p:nvSpPr>
+          <p:cNvPr id="12" name="问题内容2"/>
+          <p:cNvSpPr txBox="1"/>
+          <p:nvPr/>
+        </p:nvSpPr>
+        <p:spPr>
+          <a:xfrm>
+            <a:off x="3611880" y="3291840"/>
+            <a:ext cx="3520440" cy="777240"/>
+          </a:xfrm>
+          <a:prstGeom prst="rect">
+            <a:avLst/>
+          </a:prstGeom>
+          <a:noFill/>
+          <a:ln/>
+        </p:spPr>
+        <p:txBody>
+          <a:bodyPr wrap="square" lIns="0" tIns="0" rIns="0" bIns="0" rtlCol="0" anchor="ctr"/>
+          <a:lstStyle/>
+          <a:p>
+            <a:pPr indent="0" marL="0">
+              <a:buNone/>
+            </a:pPr>
+            <a:r>
+              <a:rPr lang="en-US" sz="1800" dirty="0">
+                <a:solidFill>
+                  <a:schemeClr val="tx1"/>
+                </a:solidFill>
+              </a:rPr>
+              <a:t>检索耗时与退订意向</a:t>
+            </a:r>
+            <a:endParaRPr lang="en-US" sz="1800" dirty="0"/>
+          </a:p>
+        </p:txBody>
+      </p:sp>
+      <p:sp>
+        <p:nvSpPr>
+          <p:cNvPr id="13" name="分隔线"/>
+          <p:cNvSpPr/>
+          <p:nvPr/>
+        </p:nvSpPr>
+        <p:spPr>
+          <a:xfrm>
+            <a:off x="548640" y="4069080"/>
+            <a:ext cx="6583680" cy="0"/>
+          </a:xfrm>
+          <a:prstGeom prst="line">
+            <a:avLst/>
+          </a:prstGeom>
+          <a:noFill/>
+          <a:ln w="9525">
+            <a:solidFill>
+              <a:srgbClr val="D5DAE1"/>
+            </a:solidFill>
+            <a:prstDash val="solid"/>
+          </a:ln>
+        </p:spPr>
+      </p:sp>
+      <p:sp>
+        <p:nvSpPr>
+          <p:cNvPr id="14" name="问题编号3"/>
+          <p:cNvSpPr txBox="1"/>
+          <p:nvPr/>
+        </p:nvSpPr>
+        <p:spPr>
+          <a:xfrm>
+            <a:off x="548640" y="4069080"/>
+            <a:ext cx="914400" cy="777240"/>
+          </a:xfrm>
+          <a:prstGeom prst="rect">
+            <a:avLst/>
+          </a:prstGeom>
+          <a:noFill/>
+          <a:ln/>
+        </p:spPr>
+        <p:txBody>
+          <a:bodyPr wrap="square" lIns="0" tIns="0" rIns="0" bIns="0" rtlCol="0" anchor="ctr"/>
+          <a:lstStyle/>
+          <a:p>
+            <a:pPr indent="0" marL="0">
+              <a:buNone/>
+            </a:pPr>
+            <a:r>
+              <a:rPr lang="en-US" sz="1400" b="1" dirty="0">
+                <a:solidFill>
+                  <a:schemeClr val="accent5"/>
+                </a:solidFill>
+              </a:rPr>
+              <a:t>问题三</a:t>
+            </a:r>
+            <a:endParaRPr lang="en-US" sz="1400" dirty="0"/>
+          </a:p>
+        </p:txBody>
+      </p:sp>
+      <p:sp>
+        <p:nvSpPr>
+          <p:cNvPr id="15" name="问题名3"/>
+          <p:cNvSpPr txBox="1"/>
+          <p:nvPr/>
+        </p:nvSpPr>
+        <p:spPr>
+          <a:xfrm>
+            <a:off x="1508760" y="4069080"/>
+            <a:ext cx="2011680" cy="777240"/>
+          </a:xfrm>
+          <a:prstGeom prst="rect">
+            <a:avLst/>
+          </a:prstGeom>
+          <a:noFill/>
+          <a:ln/>
+        </p:spPr>
+        <p:txBody>
+          <a:bodyPr wrap="square" lIns="0" tIns="0" rIns="0" bIns="0" rtlCol="0" anchor="ctr"/>
+          <a:lstStyle/>
+          <a:p>
+            <a:pPr indent="0" marL="0">
+              <a:buNone/>
+            </a:pPr>
+            <a:r>
+              <a:rPr lang="en-US" sz="2100" b="1" dirty="0">
+                <a:solidFill>
+                  <a:schemeClr val="tx2"/>
+                </a:solidFill>
+              </a:rPr>
+              <a:t>信任程度</a:t>
+            </a:r>
+            <a:endParaRPr lang="en-US" sz="2100" dirty="0"/>
+          </a:p>
+        </p:txBody>
+      </p:sp>
+      <p:sp>
+        <p:nvSpPr>
+          <p:cNvPr id="16" name="问题内容3"/>
+          <p:cNvSpPr txBox="1"/>
+          <p:nvPr/>
+        </p:nvSpPr>
+        <p:spPr>
+          <a:xfrm>
+            <a:off x="3611880" y="4069080"/>
+            <a:ext cx="3520440" cy="777240"/>
+          </a:xfrm>
+          <a:prstGeom prst="rect">
+            <a:avLst/>
+          </a:prstGeom>
+          <a:noFill/>
+          <a:ln/>
+        </p:spPr>
+        <p:txBody>
+          <a:bodyPr wrap="square" lIns="0" tIns="0" rIns="0" bIns="0" rtlCol="0" anchor="ctr"/>
+          <a:lstStyle/>
+          <a:p>
+            <a:pPr indent="0" marL="0">
+              <a:buNone/>
+            </a:pPr>
+            <a:r>
+              <a:rPr lang="en-US" sz="1800" dirty="0">
+                <a:solidFill>
+                  <a:schemeClr val="tx1"/>
+                </a:solidFill>
+              </a:rPr>
+              <a:t>对 AI 回答的核查</a:t>
+            </a:r>
+            <a:endParaRPr lang="en-US" sz="1800" dirty="0"/>
+          </a:p>
+        </p:txBody>
+      </p:sp>
+      <p:sp>
+        <p:nvSpPr>
+          <p:cNvPr id="17" name="分隔线"/>
+          <p:cNvSpPr/>
+          <p:nvPr/>
+        </p:nvSpPr>
+        <p:spPr>
+          <a:xfrm>
+            <a:off x="548640" y="4846320"/>
+            <a:ext cx="6583680" cy="0"/>
+          </a:xfrm>
+          <a:prstGeom prst="line">
+            <a:avLst/>
+          </a:prstGeom>
+          <a:noFill/>
+          <a:ln w="9525">
+            <a:solidFill>
+              <a:srgbClr val="D5DAE1"/>
+            </a:solidFill>
+            <a:prstDash val="solid"/>
+          </a:ln>
+        </p:spPr>
+      </p:sp>
+      <p:sp>
+        <p:nvSpPr>
           <p:cNvPr id="18" name="研究机构"/>
           <p:cNvSpPr txBox="1"/>
           <p:nvPr/>
         </p:nvSpPr>
         <p:spPr>
           <a:xfrm>
-            <a:off x="548640" y="4800600"/>
-            <a:ext cx="11064240" cy="640080"/>
+            <a:off x="548640" y="4983480"/>
+            <a:ext cx="6583680" cy="777240"/>
           </a:xfrm>
           <a:prstGeom prst="rect">
             <a:avLst/>
@@ -9323,7 +11490,7 @@
               <a:buNone/>
             </a:pPr>
             <a:r>
-              <a:rPr lang="en-US" sz="1800" b="1" dirty="0">
+              <a:rPr lang="en-US" sz="1700" b="1" dirty="0">
                 <a:solidFill>
                   <a:schemeClr val="accent3"/>
                 </a:solidFill>
@@ -9334,14 +11501,106 @@
               <a:buNone/>
             </a:pPr>
             <a:r>
-              <a:rPr lang="en-US" sz="1800" dirty="0">
+              <a:rPr lang="en-US" sz="1700" dirty="0">
                 <a:solidFill>
                   <a:schemeClr val="tx1"/>
                 </a:solidFill>
               </a:rPr>
               <a:t>Gracenote，尼尔森旗下节目数据公司。报告建议接入的行业数据，即其主营业务。</a:t>
             </a:r>
-            <a:endParaRPr lang="en-US" sz="1800" dirty="0"/>
+            <a:endParaRPr lang="en-US" sz="1700" dirty="0"/>
+          </a:p>
+        </p:txBody>
+      </p:sp>
+      <p:sp>
+        <p:nvSpPr>
+          <p:cNvPr id="19" name="报告封面阴影"/>
+          <p:cNvSpPr/>
+          <p:nvPr/>
+        </p:nvSpPr>
+        <p:spPr>
+          <a:xfrm>
+            <a:off x="7635240" y="2514600"/>
+            <a:ext cx="3977640" cy="2414016"/>
+          </a:xfrm>
+          <a:prstGeom prst="rect">
+            <a:avLst/>
+          </a:prstGeom>
+          <a:solidFill>
+            <a:srgbClr val="FFFFFF"/>
+          </a:solidFill>
+          <a:ln w="6350">
+            <a:solidFill>
+              <a:srgbClr val="E3E7EC"/>
+            </a:solidFill>
+            <a:prstDash val="solid"/>
+          </a:ln>
+          <a:effectLst>
+            <a:outerShdw sx="100000" sy="100000" kx="0" ky="0" algn="bl" rotWithShape="0" blurRad="177800" dist="50800" dir="5400000">
+              <a:srgbClr val="1F2A44">
+                <a:alpha val="18000"/>
+              </a:srgbClr>
+            </a:outerShdw>
+          </a:effectLst>
+        </p:spPr>
+      </p:sp>
+      <p:pic>
+        <p:nvPicPr>
+          <p:cNvPr id="20" name="报告封面" descr="/home/user/ppt/build/assets/report_cover.jpg">    </p:cNvPr>
+          <p:cNvPicPr>
+            <a:picLocks noChangeAspect="1"/>
+          </p:cNvPicPr>
+          <p:nvPr/>
+        </p:nvPicPr>
+        <p:blipFill>
+          <a:blip r:embed="rId1"/>
+          <a:stretch>
+            <a:fillRect/>
+          </a:stretch>
+        </p:blipFill>
+        <p:spPr>
+          <a:xfrm>
+            <a:off x="7635240" y="2514600"/>
+            <a:ext cx="3977640" cy="2414016"/>
+          </a:xfrm>
+          <a:prstGeom prst="rect">
+            <a:avLst/>
+          </a:prstGeom>
+        </p:spPr>
+      </p:pic>
+      <p:sp>
+        <p:nvSpPr>
+          <p:cNvPr id="21" name="封面图注"/>
+          <p:cNvSpPr txBox="1"/>
+          <p:nvPr/>
+        </p:nvSpPr>
+        <p:spPr>
+          <a:xfrm>
+            <a:off x="7635240" y="5074920"/>
+            <a:ext cx="3977640" cy="320040"/>
+          </a:xfrm>
+          <a:prstGeom prst="rect">
+            <a:avLst/>
+          </a:prstGeom>
+          <a:noFill/>
+          <a:ln/>
+        </p:spPr>
+        <p:txBody>
+          <a:bodyPr wrap="square" lIns="0" tIns="0" rIns="0" bIns="0" rtlCol="0" anchor="ctr"/>
+          <a:lstStyle/>
+          <a:p>
+            <a:pPr indent="0" marL="0">
+              <a:buNone/>
+            </a:pPr>
+            <a:r>
+              <a:rPr lang="en-US" sz="1300" dirty="0">
+                <a:solidFill>
+                  <a:schemeClr val="accent5"/>
+                </a:solidFill>
+              </a:rPr>
+              <a:t>报告封面 · Gracenote，2026 年 4 月</a:t>
+            </a:r>
+            <a:endParaRPr lang="en-US" sz="1300" dirty="0"/>
           </a:p>
         </p:txBody>
       </p:sp>
@@ -9395,6 +11654,565 @@
   <p:clrMapOvr>
     <a:masterClrMapping/>
   </p:clrMapOvr>
+  <p:transition spd="med">
+    <p:fade/>
+  </p:transition>
+  <p:timing>
+    <p:tnLst>
+      <p:par>
+        <p:cTn id="1" dur="indefinite" restart="never" nodeType="tmRoot">
+          <p:childTnLst>
+            <p:seq concurrent="1" nextAc="seek">
+              <p:cTn id="2" dur="indefinite" nodeType="mainSeq">
+                <p:childTnLst>
+                  <p:par>
+                    <p:cTn id="3" fill="hold">
+                      <p:stCondLst>
+                        <p:cond delay="indefinite"/>
+                        <p:cond evt="onBegin" delay="0">
+                          <p:tn val="2"/>
+                        </p:cond>
+                      </p:stCondLst>
+                      <p:childTnLst>
+                        <p:par>
+                          <p:cTn id="46" fill="hold">
+                            <p:stCondLst>
+                              <p:cond delay="0"/>
+                            </p:stCondLst>
+                            <p:childTnLst>
+                              <p:par>
+                                <p:cTn id="4" presetID="10" presetClass="entr" presetSubtype="0" fill="hold" grpId="0" nodeType="withEffect">
+                                  <p:stCondLst>
+                                    <p:cond delay="200"/>
+                                  </p:stCondLst>
+                                  <p:childTnLst>
+                                    <p:set>
+                                      <p:cBhvr>
+                                        <p:cTn id="5" dur="1" fill="hold">
+                                          <p:stCondLst>
+                                            <p:cond delay="0"/>
+                                          </p:stCondLst>
+                                        </p:cTn>
+                                        <p:tgtEl>
+                                          <p:spTgt spid="4"/>
+                                        </p:tgtEl>
+                                        <p:attrNameLst>
+                                          <p:attrName>style.visibility</p:attrName>
+                                        </p:attrNameLst>
+                                      </p:cBhvr>
+                                      <p:to>
+                                        <p:strVal val="visible"/>
+                                      </p:to>
+                                    </p:set>
+                                    <p:animEffect transition="in" filter="fade">
+                                      <p:cBhvr>
+                                        <p:cTn id="6" dur="500"/>
+                                        <p:tgtEl>
+                                          <p:spTgt spid="4"/>
+                                        </p:tgtEl>
+                                      </p:cBhvr>
+                                    </p:animEffect>
+                                  </p:childTnLst>
+                                </p:cTn>
+                              </p:par>
+                              <p:par>
+                                <p:cTn id="7" presetID="10" presetClass="entr" presetSubtype="0" fill="hold" grpId="0" nodeType="withEffect">
+                                  <p:stCondLst>
+                                    <p:cond delay="550"/>
+                                  </p:stCondLst>
+                                  <p:childTnLst>
+                                    <p:set>
+                                      <p:cBhvr>
+                                        <p:cTn id="8" dur="1" fill="hold">
+                                          <p:stCondLst>
+                                            <p:cond delay="0"/>
+                                          </p:stCondLst>
+                                        </p:cTn>
+                                        <p:tgtEl>
+                                          <p:spTgt spid="6"/>
+                                        </p:tgtEl>
+                                        <p:attrNameLst>
+                                          <p:attrName>style.visibility</p:attrName>
+                                        </p:attrNameLst>
+                                      </p:cBhvr>
+                                      <p:to>
+                                        <p:strVal val="visible"/>
+                                      </p:to>
+                                    </p:set>
+                                    <p:animEffect transition="in" filter="fade">
+                                      <p:cBhvr>
+                                        <p:cTn id="9" dur="500"/>
+                                        <p:tgtEl>
+                                          <p:spTgt spid="6"/>
+                                        </p:tgtEl>
+                                      </p:cBhvr>
+                                    </p:animEffect>
+                                  </p:childTnLst>
+                                </p:cTn>
+                              </p:par>
+                              <p:par>
+                                <p:cTn id="10" presetID="10" presetClass="entr" presetSubtype="0" fill="hold" grpId="0" nodeType="withEffect">
+                                  <p:stCondLst>
+                                    <p:cond delay="550"/>
+                                  </p:stCondLst>
+                                  <p:childTnLst>
+                                    <p:set>
+                                      <p:cBhvr>
+                                        <p:cTn id="11" dur="1" fill="hold">
+                                          <p:stCondLst>
+                                            <p:cond delay="0"/>
+                                          </p:stCondLst>
+                                        </p:cTn>
+                                        <p:tgtEl>
+                                          <p:spTgt spid="7"/>
+                                        </p:tgtEl>
+                                        <p:attrNameLst>
+                                          <p:attrName>style.visibility</p:attrName>
+                                        </p:attrNameLst>
+                                      </p:cBhvr>
+                                      <p:to>
+                                        <p:strVal val="visible"/>
+                                      </p:to>
+                                    </p:set>
+                                    <p:animEffect transition="in" filter="fade">
+                                      <p:cBhvr>
+                                        <p:cTn id="12" dur="500"/>
+                                        <p:tgtEl>
+                                          <p:spTgt spid="7"/>
+                                        </p:tgtEl>
+                                      </p:cBhvr>
+                                    </p:animEffect>
+                                  </p:childTnLst>
+                                </p:cTn>
+                              </p:par>
+                              <p:par>
+                                <p:cTn id="13" presetID="10" presetClass="entr" presetSubtype="0" fill="hold" grpId="0" nodeType="withEffect">
+                                  <p:stCondLst>
+                                    <p:cond delay="550"/>
+                                  </p:stCondLst>
+                                  <p:childTnLst>
+                                    <p:set>
+                                      <p:cBhvr>
+                                        <p:cTn id="14" dur="1" fill="hold">
+                                          <p:stCondLst>
+                                            <p:cond delay="0"/>
+                                          </p:stCondLst>
+                                        </p:cTn>
+                                        <p:tgtEl>
+                                          <p:spTgt spid="8"/>
+                                        </p:tgtEl>
+                                        <p:attrNameLst>
+                                          <p:attrName>style.visibility</p:attrName>
+                                        </p:attrNameLst>
+                                      </p:cBhvr>
+                                      <p:to>
+                                        <p:strVal val="visible"/>
+                                      </p:to>
+                                    </p:set>
+                                    <p:animEffect transition="in" filter="fade">
+                                      <p:cBhvr>
+                                        <p:cTn id="15" dur="500"/>
+                                        <p:tgtEl>
+                                          <p:spTgt spid="8"/>
+                                        </p:tgtEl>
+                                      </p:cBhvr>
+                                    </p:animEffect>
+                                  </p:childTnLst>
+                                </p:cTn>
+                              </p:par>
+                              <p:par>
+                                <p:cTn id="16" presetID="10" presetClass="entr" presetSubtype="0" fill="hold" grpId="0" nodeType="withEffect">
+                                  <p:stCondLst>
+                                    <p:cond delay="900"/>
+                                  </p:stCondLst>
+                                  <p:childTnLst>
+                                    <p:set>
+                                      <p:cBhvr>
+                                        <p:cTn id="17" dur="1" fill="hold">
+                                          <p:stCondLst>
+                                            <p:cond delay="0"/>
+                                          </p:stCondLst>
+                                        </p:cTn>
+                                        <p:tgtEl>
+                                          <p:spTgt spid="10"/>
+                                        </p:tgtEl>
+                                        <p:attrNameLst>
+                                          <p:attrName>style.visibility</p:attrName>
+                                        </p:attrNameLst>
+                                      </p:cBhvr>
+                                      <p:to>
+                                        <p:strVal val="visible"/>
+                                      </p:to>
+                                    </p:set>
+                                    <p:animEffect transition="in" filter="fade">
+                                      <p:cBhvr>
+                                        <p:cTn id="18" dur="500"/>
+                                        <p:tgtEl>
+                                          <p:spTgt spid="10"/>
+                                        </p:tgtEl>
+                                      </p:cBhvr>
+                                    </p:animEffect>
+                                  </p:childTnLst>
+                                </p:cTn>
+                              </p:par>
+                              <p:par>
+                                <p:cTn id="19" presetID="10" presetClass="entr" presetSubtype="0" fill="hold" grpId="0" nodeType="withEffect">
+                                  <p:stCondLst>
+                                    <p:cond delay="900"/>
+                                  </p:stCondLst>
+                                  <p:childTnLst>
+                                    <p:set>
+                                      <p:cBhvr>
+                                        <p:cTn id="20" dur="1" fill="hold">
+                                          <p:stCondLst>
+                                            <p:cond delay="0"/>
+                                          </p:stCondLst>
+                                        </p:cTn>
+                                        <p:tgtEl>
+                                          <p:spTgt spid="11"/>
+                                        </p:tgtEl>
+                                        <p:attrNameLst>
+                                          <p:attrName>style.visibility</p:attrName>
+                                        </p:attrNameLst>
+                                      </p:cBhvr>
+                                      <p:to>
+                                        <p:strVal val="visible"/>
+                                      </p:to>
+                                    </p:set>
+                                    <p:animEffect transition="in" filter="fade">
+                                      <p:cBhvr>
+                                        <p:cTn id="21" dur="500"/>
+                                        <p:tgtEl>
+                                          <p:spTgt spid="11"/>
+                                        </p:tgtEl>
+                                      </p:cBhvr>
+                                    </p:animEffect>
+                                  </p:childTnLst>
+                                </p:cTn>
+                              </p:par>
+                              <p:par>
+                                <p:cTn id="22" presetID="10" presetClass="entr" presetSubtype="0" fill="hold" grpId="0" nodeType="withEffect">
+                                  <p:stCondLst>
+                                    <p:cond delay="900"/>
+                                  </p:stCondLst>
+                                  <p:childTnLst>
+                                    <p:set>
+                                      <p:cBhvr>
+                                        <p:cTn id="23" dur="1" fill="hold">
+                                          <p:stCondLst>
+                                            <p:cond delay="0"/>
+                                          </p:stCondLst>
+                                        </p:cTn>
+                                        <p:tgtEl>
+                                          <p:spTgt spid="12"/>
+                                        </p:tgtEl>
+                                        <p:attrNameLst>
+                                          <p:attrName>style.visibility</p:attrName>
+                                        </p:attrNameLst>
+                                      </p:cBhvr>
+                                      <p:to>
+                                        <p:strVal val="visible"/>
+                                      </p:to>
+                                    </p:set>
+                                    <p:animEffect transition="in" filter="fade">
+                                      <p:cBhvr>
+                                        <p:cTn id="24" dur="500"/>
+                                        <p:tgtEl>
+                                          <p:spTgt spid="12"/>
+                                        </p:tgtEl>
+                                      </p:cBhvr>
+                                    </p:animEffect>
+                                  </p:childTnLst>
+                                </p:cTn>
+                              </p:par>
+                              <p:par>
+                                <p:cTn id="25" presetID="10" presetClass="entr" presetSubtype="0" fill="hold" grpId="0" nodeType="withEffect">
+                                  <p:stCondLst>
+                                    <p:cond delay="1250"/>
+                                  </p:stCondLst>
+                                  <p:childTnLst>
+                                    <p:set>
+                                      <p:cBhvr>
+                                        <p:cTn id="26" dur="1" fill="hold">
+                                          <p:stCondLst>
+                                            <p:cond delay="0"/>
+                                          </p:stCondLst>
+                                        </p:cTn>
+                                        <p:tgtEl>
+                                          <p:spTgt spid="14"/>
+                                        </p:tgtEl>
+                                        <p:attrNameLst>
+                                          <p:attrName>style.visibility</p:attrName>
+                                        </p:attrNameLst>
+                                      </p:cBhvr>
+                                      <p:to>
+                                        <p:strVal val="visible"/>
+                                      </p:to>
+                                    </p:set>
+                                    <p:animEffect transition="in" filter="fade">
+                                      <p:cBhvr>
+                                        <p:cTn id="27" dur="500"/>
+                                        <p:tgtEl>
+                                          <p:spTgt spid="14"/>
+                                        </p:tgtEl>
+                                      </p:cBhvr>
+                                    </p:animEffect>
+                                  </p:childTnLst>
+                                </p:cTn>
+                              </p:par>
+                              <p:par>
+                                <p:cTn id="28" presetID="10" presetClass="entr" presetSubtype="0" fill="hold" grpId="0" nodeType="withEffect">
+                                  <p:stCondLst>
+                                    <p:cond delay="1250"/>
+                                  </p:stCondLst>
+                                  <p:childTnLst>
+                                    <p:set>
+                                      <p:cBhvr>
+                                        <p:cTn id="29" dur="1" fill="hold">
+                                          <p:stCondLst>
+                                            <p:cond delay="0"/>
+                                          </p:stCondLst>
+                                        </p:cTn>
+                                        <p:tgtEl>
+                                          <p:spTgt spid="15"/>
+                                        </p:tgtEl>
+                                        <p:attrNameLst>
+                                          <p:attrName>style.visibility</p:attrName>
+                                        </p:attrNameLst>
+                                      </p:cBhvr>
+                                      <p:to>
+                                        <p:strVal val="visible"/>
+                                      </p:to>
+                                    </p:set>
+                                    <p:animEffect transition="in" filter="fade">
+                                      <p:cBhvr>
+                                        <p:cTn id="30" dur="500"/>
+                                        <p:tgtEl>
+                                          <p:spTgt spid="15"/>
+                                        </p:tgtEl>
+                                      </p:cBhvr>
+                                    </p:animEffect>
+                                  </p:childTnLst>
+                                </p:cTn>
+                              </p:par>
+                              <p:par>
+                                <p:cTn id="31" presetID="10" presetClass="entr" presetSubtype="0" fill="hold" grpId="0" nodeType="withEffect">
+                                  <p:stCondLst>
+                                    <p:cond delay="1250"/>
+                                  </p:stCondLst>
+                                  <p:childTnLst>
+                                    <p:set>
+                                      <p:cBhvr>
+                                        <p:cTn id="32" dur="1" fill="hold">
+                                          <p:stCondLst>
+                                            <p:cond delay="0"/>
+                                          </p:stCondLst>
+                                        </p:cTn>
+                                        <p:tgtEl>
+                                          <p:spTgt spid="16"/>
+                                        </p:tgtEl>
+                                        <p:attrNameLst>
+                                          <p:attrName>style.visibility</p:attrName>
+                                        </p:attrNameLst>
+                                      </p:cBhvr>
+                                      <p:to>
+                                        <p:strVal val="visible"/>
+                                      </p:to>
+                                    </p:set>
+                                    <p:animEffect transition="in" filter="fade">
+                                      <p:cBhvr>
+                                        <p:cTn id="33" dur="500"/>
+                                        <p:tgtEl>
+                                          <p:spTgt spid="16"/>
+                                        </p:tgtEl>
+                                      </p:cBhvr>
+                                    </p:animEffect>
+                                  </p:childTnLst>
+                                </p:cTn>
+                              </p:par>
+                              <p:par>
+                                <p:cTn id="34" presetID="10" presetClass="entr" presetSubtype="0" fill="hold" grpId="0" nodeType="withEffect">
+                                  <p:stCondLst>
+                                    <p:cond delay="1600"/>
+                                  </p:stCondLst>
+                                  <p:childTnLst>
+                                    <p:set>
+                                      <p:cBhvr>
+                                        <p:cTn id="35" dur="1" fill="hold">
+                                          <p:stCondLst>
+                                            <p:cond delay="0"/>
+                                          </p:stCondLst>
+                                        </p:cTn>
+                                        <p:tgtEl>
+                                          <p:spTgt spid="19"/>
+                                        </p:tgtEl>
+                                        <p:attrNameLst>
+                                          <p:attrName>style.visibility</p:attrName>
+                                        </p:attrNameLst>
+                                      </p:cBhvr>
+                                      <p:to>
+                                        <p:strVal val="visible"/>
+                                      </p:to>
+                                    </p:set>
+                                    <p:animEffect transition="in" filter="fade">
+                                      <p:cBhvr>
+                                        <p:cTn id="36" dur="500"/>
+                                        <p:tgtEl>
+                                          <p:spTgt spid="19"/>
+                                        </p:tgtEl>
+                                      </p:cBhvr>
+                                    </p:animEffect>
+                                  </p:childTnLst>
+                                </p:cTn>
+                              </p:par>
+                              <p:par>
+                                <p:cTn id="37" presetID="10" presetClass="entr" presetSubtype="0" fill="hold" grpId="0" nodeType="withEffect">
+                                  <p:stCondLst>
+                                    <p:cond delay="1600"/>
+                                  </p:stCondLst>
+                                  <p:childTnLst>
+                                    <p:set>
+                                      <p:cBhvr>
+                                        <p:cTn id="38" dur="1" fill="hold">
+                                          <p:stCondLst>
+                                            <p:cond delay="0"/>
+                                          </p:stCondLst>
+                                        </p:cTn>
+                                        <p:tgtEl>
+                                          <p:spTgt spid="20"/>
+                                        </p:tgtEl>
+                                        <p:attrNameLst>
+                                          <p:attrName>style.visibility</p:attrName>
+                                        </p:attrNameLst>
+                                      </p:cBhvr>
+                                      <p:to>
+                                        <p:strVal val="visible"/>
+                                      </p:to>
+                                    </p:set>
+                                    <p:animEffect transition="in" filter="fade">
+                                      <p:cBhvr>
+                                        <p:cTn id="39" dur="500"/>
+                                        <p:tgtEl>
+                                          <p:spTgt spid="20"/>
+                                        </p:tgtEl>
+                                      </p:cBhvr>
+                                    </p:animEffect>
+                                  </p:childTnLst>
+                                </p:cTn>
+                              </p:par>
+                              <p:par>
+                                <p:cTn id="40" presetID="10" presetClass="entr" presetSubtype="0" fill="hold" grpId="0" nodeType="withEffect">
+                                  <p:stCondLst>
+                                    <p:cond delay="1600"/>
+                                  </p:stCondLst>
+                                  <p:childTnLst>
+                                    <p:set>
+                                      <p:cBhvr>
+                                        <p:cTn id="41" dur="1" fill="hold">
+                                          <p:stCondLst>
+                                            <p:cond delay="0"/>
+                                          </p:stCondLst>
+                                        </p:cTn>
+                                        <p:tgtEl>
+                                          <p:spTgt spid="21"/>
+                                        </p:tgtEl>
+                                        <p:attrNameLst>
+                                          <p:attrName>style.visibility</p:attrName>
+                                        </p:attrNameLst>
+                                      </p:cBhvr>
+                                      <p:to>
+                                        <p:strVal val="visible"/>
+                                      </p:to>
+                                    </p:set>
+                                    <p:animEffect transition="in" filter="fade">
+                                      <p:cBhvr>
+                                        <p:cTn id="42" dur="500"/>
+                                        <p:tgtEl>
+                                          <p:spTgt spid="21"/>
+                                        </p:tgtEl>
+                                      </p:cBhvr>
+                                    </p:animEffect>
+                                  </p:childTnLst>
+                                </p:cTn>
+                              </p:par>
+                              <p:par>
+                                <p:cTn id="43" presetID="10" presetClass="entr" presetSubtype="0" fill="hold" grpId="0" nodeType="withEffect">
+                                  <p:stCondLst>
+                                    <p:cond delay="1950"/>
+                                  </p:stCondLst>
+                                  <p:childTnLst>
+                                    <p:set>
+                                      <p:cBhvr>
+                                        <p:cTn id="44" dur="1" fill="hold">
+                                          <p:stCondLst>
+                                            <p:cond delay="0"/>
+                                          </p:stCondLst>
+                                        </p:cTn>
+                                        <p:tgtEl>
+                                          <p:spTgt spid="18"/>
+                                        </p:tgtEl>
+                                        <p:attrNameLst>
+                                          <p:attrName>style.visibility</p:attrName>
+                                        </p:attrNameLst>
+                                      </p:cBhvr>
+                                      <p:to>
+                                        <p:strVal val="visible"/>
+                                      </p:to>
+                                    </p:set>
+                                    <p:animEffect transition="in" filter="fade">
+                                      <p:cBhvr>
+                                        <p:cTn id="45" dur="500"/>
+                                        <p:tgtEl>
+                                          <p:spTgt spid="18"/>
+                                        </p:tgtEl>
+                                      </p:cBhvr>
+                                    </p:animEffect>
+                                  </p:childTnLst>
+                                </p:cTn>
+                              </p:par>
+                            </p:childTnLst>
+                          </p:cTn>
+                        </p:par>
+                      </p:childTnLst>
+                    </p:cTn>
+                  </p:par>
+                </p:childTnLst>
+              </p:cTn>
+              <p:prevCondLst>
+                <p:cond evt="onPrev" delay="0">
+                  <p:tgtEl>
+                    <p:sldTgt/>
+                  </p:tgtEl>
+                </p:cond>
+              </p:prevCondLst>
+              <p:nextCondLst>
+                <p:cond evt="onNext" delay="0">
+                  <p:tgtEl>
+                    <p:sldTgt/>
+                  </p:tgtEl>
+                </p:cond>
+              </p:nextCondLst>
+            </p:seq>
+          </p:childTnLst>
+        </p:cTn>
+      </p:par>
+    </p:tnLst>
+    <p:bldLst>
+      <p:bldP spid="4" grpId="0" animBg="1"/>
+      <p:bldP spid="6" grpId="0" animBg="1"/>
+      <p:bldP spid="7" grpId="0" animBg="1"/>
+      <p:bldP spid="8" grpId="0" animBg="1"/>
+      <p:bldP spid="10" grpId="0" animBg="1"/>
+      <p:bldP spid="11" grpId="0" animBg="1"/>
+      <p:bldP spid="12" grpId="0" animBg="1"/>
+      <p:bldP spid="14" grpId="0" animBg="1"/>
+      <p:bldP spid="15" grpId="0" animBg="1"/>
+      <p:bldP spid="16" grpId="0" animBg="1"/>
+      <p:bldP spid="19" grpId="0" animBg="1"/>
+      <p:bldP spid="21" grpId="0" animBg="1"/>
+      <p:bldP spid="18" grpId="0" animBg="1"/>
+    </p:bldLst>
+  </p:timing>
 </p:sld>
 </file>
 
@@ -10264,6 +13082,98 @@
   <p:clrMapOvr>
     <a:masterClrMapping/>
   </p:clrMapOvr>
+  <p:transition spd="med">
+    <p:fade/>
+  </p:transition>
+  <p:timing>
+    <p:tnLst>
+      <p:par>
+        <p:cTn id="1" dur="indefinite" restart="never" nodeType="tmRoot">
+          <p:childTnLst>
+            <p:seq concurrent="1" nextAc="seek">
+              <p:cTn id="2" dur="indefinite" nodeType="mainSeq">
+                <p:childTnLst>
+                  <p:par>
+                    <p:cTn id="3" fill="hold">
+                      <p:stCondLst>
+                        <p:cond delay="indefinite"/>
+                        <p:cond evt="onBegin" delay="0">
+                          <p:tn val="2"/>
+                        </p:cond>
+                      </p:stCondLst>
+                      <p:childTnLst>
+                        <p:par>
+                          <p:cTn id="7" fill="hold">
+                            <p:stCondLst>
+                              <p:cond delay="0"/>
+                            </p:stCondLst>
+                            <p:childTnLst>
+                              <p:par>
+                                <p:cTn id="4" presetID="10" presetClass="entr" presetSubtype="0" fill="hold" grpId="0" nodeType="withEffect">
+                                  <p:stCondLst>
+                                    <p:cond delay="200"/>
+                                  </p:stCondLst>
+                                  <p:childTnLst>
+                                    <p:set>
+                                      <p:cBhvr>
+                                        <p:cTn id="5" dur="1" fill="hold">
+                                          <p:stCondLst>
+                                            <p:cond delay="0"/>
+                                          </p:stCondLst>
+                                        </p:cTn>
+                                        <p:tgtEl>
+                                          <p:spTgt spid="5"/>
+                                        </p:tgtEl>
+                                        <p:attrNameLst>
+                                          <p:attrName>style.visibility</p:attrName>
+                                        </p:attrNameLst>
+                                      </p:cBhvr>
+                                      <p:to>
+                                        <p:strVal val="visible"/>
+                                      </p:to>
+                                    </p:set>
+                                    <p:animEffect transition="in" filter="fade">
+                                      <p:cBhvr>
+                                        <p:cTn id="6" dur="500"/>
+                                        <p:tgtEl>
+                                          <p:spTgt spid="5"/>
+                                        </p:tgtEl>
+                                      </p:cBhvr>
+                                    </p:animEffect>
+                                  </p:childTnLst>
+                                </p:cTn>
+                              </p:par>
+                            </p:childTnLst>
+                          </p:cTn>
+                        </p:par>
+                      </p:childTnLst>
+                    </p:cTn>
+                  </p:par>
+                </p:childTnLst>
+              </p:cTn>
+              <p:prevCondLst>
+                <p:cond evt="onPrev" delay="0">
+                  <p:tgtEl>
+                    <p:sldTgt/>
+                  </p:tgtEl>
+                </p:cond>
+              </p:prevCondLst>
+              <p:nextCondLst>
+                <p:cond evt="onNext" delay="0">
+                  <p:tgtEl>
+                    <p:sldTgt/>
+                  </p:tgtEl>
+                </p:cond>
+              </p:nextCondLst>
+            </p:seq>
+          </p:childTnLst>
+        </p:cTn>
+      </p:par>
+    </p:tnLst>
+    <p:bldLst>
+      <p:bldP spid="5" grpId="0" animBg="1"/>
+    </p:bldLst>
+  </p:timing>
 </p:sld>
 </file>
 
@@ -10687,7 +13597,7 @@
       </p:sp>
       <p:sp>
         <p:nvSpPr>
-          <p:cNvPr id="13" name="箭头"/>
+          <p:cNvPr id="13" name="箭头1"/>
           <p:cNvSpPr txBox="1"/>
           <p:nvPr/>
         </p:nvSpPr>
@@ -10818,7 +13728,7 @@
       </p:sp>
       <p:sp>
         <p:nvSpPr>
-          <p:cNvPr id="17" name="箭头"/>
+          <p:cNvPr id="17" name="箭头2"/>
           <p:cNvSpPr txBox="1"/>
           <p:nvPr/>
         </p:nvSpPr>
@@ -10961,6 +13871,530 @@
   <p:clrMapOvr>
     <a:masterClrMapping/>
   </p:clrMapOvr>
+  <p:transition spd="med">
+    <p:fade/>
+  </p:transition>
+  <p:timing>
+    <p:tnLst>
+      <p:par>
+        <p:cTn id="1" dur="indefinite" restart="never" nodeType="tmRoot">
+          <p:childTnLst>
+            <p:seq concurrent="1" nextAc="seek">
+              <p:cTn id="2" dur="indefinite" nodeType="mainSeq">
+                <p:childTnLst>
+                  <p:par>
+                    <p:cTn id="3" fill="hold">
+                      <p:stCondLst>
+                        <p:cond delay="indefinite"/>
+                        <p:cond evt="onBegin" delay="0">
+                          <p:tn val="2"/>
+                        </p:cond>
+                      </p:stCondLst>
+                      <p:childTnLst>
+                        <p:par>
+                          <p:cTn id="43" fill="hold">
+                            <p:stCondLst>
+                              <p:cond delay="0"/>
+                            </p:stCondLst>
+                            <p:childTnLst>
+                              <p:par>
+                                <p:cTn id="4" presetID="10" presetClass="entr" presetSubtype="0" fill="hold" grpId="0" nodeType="withEffect">
+                                  <p:stCondLst>
+                                    <p:cond delay="200"/>
+                                  </p:stCondLst>
+                                  <p:childTnLst>
+                                    <p:set>
+                                      <p:cBhvr>
+                                        <p:cTn id="5" dur="1" fill="hold">
+                                          <p:stCondLst>
+                                            <p:cond delay="0"/>
+                                          </p:stCondLst>
+                                        </p:cTn>
+                                        <p:tgtEl>
+                                          <p:spTgt spid="4"/>
+                                        </p:tgtEl>
+                                        <p:attrNameLst>
+                                          <p:attrName>style.visibility</p:attrName>
+                                        </p:attrNameLst>
+                                      </p:cBhvr>
+                                      <p:to>
+                                        <p:strVal val="visible"/>
+                                      </p:to>
+                                    </p:set>
+                                    <p:animEffect transition="in" filter="fade">
+                                      <p:cBhvr>
+                                        <p:cTn id="6" dur="500"/>
+                                        <p:tgtEl>
+                                          <p:spTgt spid="4"/>
+                                        </p:tgtEl>
+                                      </p:cBhvr>
+                                    </p:animEffect>
+                                  </p:childTnLst>
+                                </p:cTn>
+                              </p:par>
+                              <p:par>
+                                <p:cTn id="7" presetID="10" presetClass="entr" presetSubtype="0" fill="hold" grpId="0" nodeType="withEffect">
+                                  <p:stCondLst>
+                                    <p:cond delay="200"/>
+                                  </p:stCondLst>
+                                  <p:childTnLst>
+                                    <p:set>
+                                      <p:cBhvr>
+                                        <p:cTn id="8" dur="1" fill="hold">
+                                          <p:stCondLst>
+                                            <p:cond delay="0"/>
+                                          </p:stCondLst>
+                                        </p:cTn>
+                                        <p:tgtEl>
+                                          <p:spTgt spid="5"/>
+                                        </p:tgtEl>
+                                        <p:attrNameLst>
+                                          <p:attrName>style.visibility</p:attrName>
+                                        </p:attrNameLst>
+                                      </p:cBhvr>
+                                      <p:to>
+                                        <p:strVal val="visible"/>
+                                      </p:to>
+                                    </p:set>
+                                    <p:animEffect transition="in" filter="fade">
+                                      <p:cBhvr>
+                                        <p:cTn id="9" dur="500"/>
+                                        <p:tgtEl>
+                                          <p:spTgt spid="5"/>
+                                        </p:tgtEl>
+                                      </p:cBhvr>
+                                    </p:animEffect>
+                                  </p:childTnLst>
+                                </p:cTn>
+                              </p:par>
+                              <p:par>
+                                <p:cTn id="10" presetID="10" presetClass="entr" presetSubtype="0" fill="hold" grpId="0" nodeType="withEffect">
+                                  <p:stCondLst>
+                                    <p:cond delay="200"/>
+                                  </p:stCondLst>
+                                  <p:childTnLst>
+                                    <p:set>
+                                      <p:cBhvr>
+                                        <p:cTn id="11" dur="1" fill="hold">
+                                          <p:stCondLst>
+                                            <p:cond delay="0"/>
+                                          </p:stCondLst>
+                                        </p:cTn>
+                                        <p:tgtEl>
+                                          <p:spTgt spid="6"/>
+                                        </p:tgtEl>
+                                        <p:attrNameLst>
+                                          <p:attrName>style.visibility</p:attrName>
+                                        </p:attrNameLst>
+                                      </p:cBhvr>
+                                      <p:to>
+                                        <p:strVal val="visible"/>
+                                      </p:to>
+                                    </p:set>
+                                    <p:animEffect transition="in" filter="fade">
+                                      <p:cBhvr>
+                                        <p:cTn id="12" dur="500"/>
+                                        <p:tgtEl>
+                                          <p:spTgt spid="6"/>
+                                        </p:tgtEl>
+                                      </p:cBhvr>
+                                    </p:animEffect>
+                                  </p:childTnLst>
+                                </p:cTn>
+                              </p:par>
+                              <p:par>
+                                <p:cTn id="13" presetID="10" presetClass="entr" presetSubtype="0" fill="hold" grpId="0" nodeType="withEffect">
+                                  <p:stCondLst>
+                                    <p:cond delay="550"/>
+                                  </p:stCondLst>
+                                  <p:childTnLst>
+                                    <p:set>
+                                      <p:cBhvr>
+                                        <p:cTn id="14" dur="1" fill="hold">
+                                          <p:stCondLst>
+                                            <p:cond delay="0"/>
+                                          </p:stCondLst>
+                                        </p:cTn>
+                                        <p:tgtEl>
+                                          <p:spTgt spid="7"/>
+                                        </p:tgtEl>
+                                        <p:attrNameLst>
+                                          <p:attrName>style.visibility</p:attrName>
+                                        </p:attrNameLst>
+                                      </p:cBhvr>
+                                      <p:to>
+                                        <p:strVal val="visible"/>
+                                      </p:to>
+                                    </p:set>
+                                    <p:animEffect transition="in" filter="fade">
+                                      <p:cBhvr>
+                                        <p:cTn id="15" dur="500"/>
+                                        <p:tgtEl>
+                                          <p:spTgt spid="7"/>
+                                        </p:tgtEl>
+                                      </p:cBhvr>
+                                    </p:animEffect>
+                                  </p:childTnLst>
+                                </p:cTn>
+                              </p:par>
+                              <p:par>
+                                <p:cTn id="16" presetID="10" presetClass="entr" presetSubtype="0" fill="hold" grpId="0" nodeType="withEffect">
+                                  <p:stCondLst>
+                                    <p:cond delay="550"/>
+                                  </p:stCondLst>
+                                  <p:childTnLst>
+                                    <p:set>
+                                      <p:cBhvr>
+                                        <p:cTn id="17" dur="1" fill="hold">
+                                          <p:stCondLst>
+                                            <p:cond delay="0"/>
+                                          </p:stCondLst>
+                                        </p:cTn>
+                                        <p:tgtEl>
+                                          <p:spTgt spid="8"/>
+                                        </p:tgtEl>
+                                        <p:attrNameLst>
+                                          <p:attrName>style.visibility</p:attrName>
+                                        </p:attrNameLst>
+                                      </p:cBhvr>
+                                      <p:to>
+                                        <p:strVal val="visible"/>
+                                      </p:to>
+                                    </p:set>
+                                    <p:animEffect transition="in" filter="fade">
+                                      <p:cBhvr>
+                                        <p:cTn id="18" dur="500"/>
+                                        <p:tgtEl>
+                                          <p:spTgt spid="8"/>
+                                        </p:tgtEl>
+                                      </p:cBhvr>
+                                    </p:animEffect>
+                                  </p:childTnLst>
+                                </p:cTn>
+                              </p:par>
+                              <p:par>
+                                <p:cTn id="19" presetID="10" presetClass="entr" presetSubtype="0" fill="hold" grpId="0" nodeType="withEffect">
+                                  <p:stCondLst>
+                                    <p:cond delay="550"/>
+                                  </p:stCondLst>
+                                  <p:childTnLst>
+                                    <p:set>
+                                      <p:cBhvr>
+                                        <p:cTn id="20" dur="1" fill="hold">
+                                          <p:stCondLst>
+                                            <p:cond delay="0"/>
+                                          </p:stCondLst>
+                                        </p:cTn>
+                                        <p:tgtEl>
+                                          <p:spTgt spid="9"/>
+                                        </p:tgtEl>
+                                        <p:attrNameLst>
+                                          <p:attrName>style.visibility</p:attrName>
+                                        </p:attrNameLst>
+                                      </p:cBhvr>
+                                      <p:to>
+                                        <p:strVal val="visible"/>
+                                      </p:to>
+                                    </p:set>
+                                    <p:animEffect transition="in" filter="fade">
+                                      <p:cBhvr>
+                                        <p:cTn id="21" dur="500"/>
+                                        <p:tgtEl>
+                                          <p:spTgt spid="9"/>
+                                        </p:tgtEl>
+                                      </p:cBhvr>
+                                    </p:animEffect>
+                                  </p:childTnLst>
+                                </p:cTn>
+                              </p:par>
+                              <p:par>
+                                <p:cTn id="22" presetID="10" presetClass="entr" presetSubtype="0" fill="hold" grpId="0" nodeType="withEffect">
+                                  <p:stCondLst>
+                                    <p:cond delay="900"/>
+                                  </p:stCondLst>
+                                  <p:childTnLst>
+                                    <p:set>
+                                      <p:cBhvr>
+                                        <p:cTn id="23" dur="1" fill="hold">
+                                          <p:stCondLst>
+                                            <p:cond delay="0"/>
+                                          </p:stCondLst>
+                                        </p:cTn>
+                                        <p:tgtEl>
+                                          <p:spTgt spid="10"/>
+                                        </p:tgtEl>
+                                        <p:attrNameLst>
+                                          <p:attrName>style.visibility</p:attrName>
+                                        </p:attrNameLst>
+                                      </p:cBhvr>
+                                      <p:to>
+                                        <p:strVal val="visible"/>
+                                      </p:to>
+                                    </p:set>
+                                    <p:animEffect transition="in" filter="fade">
+                                      <p:cBhvr>
+                                        <p:cTn id="24" dur="500"/>
+                                        <p:tgtEl>
+                                          <p:spTgt spid="10"/>
+                                        </p:tgtEl>
+                                      </p:cBhvr>
+                                    </p:animEffect>
+                                  </p:childTnLst>
+                                </p:cTn>
+                              </p:par>
+                              <p:par>
+                                <p:cTn id="25" presetID="10" presetClass="entr" presetSubtype="0" fill="hold" grpId="0" nodeType="withEffect">
+                                  <p:stCondLst>
+                                    <p:cond delay="900"/>
+                                  </p:stCondLst>
+                                  <p:childTnLst>
+                                    <p:set>
+                                      <p:cBhvr>
+                                        <p:cTn id="26" dur="1" fill="hold">
+                                          <p:stCondLst>
+                                            <p:cond delay="0"/>
+                                          </p:stCondLst>
+                                        </p:cTn>
+                                        <p:tgtEl>
+                                          <p:spTgt spid="12"/>
+                                        </p:tgtEl>
+                                        <p:attrNameLst>
+                                          <p:attrName>style.visibility</p:attrName>
+                                        </p:attrNameLst>
+                                      </p:cBhvr>
+                                      <p:to>
+                                        <p:strVal val="visible"/>
+                                      </p:to>
+                                    </p:set>
+                                    <p:animEffect transition="in" filter="fade">
+                                      <p:cBhvr>
+                                        <p:cTn id="27" dur="500"/>
+                                        <p:tgtEl>
+                                          <p:spTgt spid="12"/>
+                                        </p:tgtEl>
+                                      </p:cBhvr>
+                                    </p:animEffect>
+                                  </p:childTnLst>
+                                </p:cTn>
+                              </p:par>
+                              <p:par>
+                                <p:cTn id="28" presetID="10" presetClass="entr" presetSubtype="0" fill="hold" grpId="0" nodeType="withEffect">
+                                  <p:stCondLst>
+                                    <p:cond delay="900"/>
+                                  </p:stCondLst>
+                                  <p:childTnLst>
+                                    <p:set>
+                                      <p:cBhvr>
+                                        <p:cTn id="29" dur="1" fill="hold">
+                                          <p:stCondLst>
+                                            <p:cond delay="0"/>
+                                          </p:stCondLst>
+                                        </p:cTn>
+                                        <p:tgtEl>
+                                          <p:spTgt spid="13"/>
+                                        </p:tgtEl>
+                                        <p:attrNameLst>
+                                          <p:attrName>style.visibility</p:attrName>
+                                        </p:attrNameLst>
+                                      </p:cBhvr>
+                                      <p:to>
+                                        <p:strVal val="visible"/>
+                                      </p:to>
+                                    </p:set>
+                                    <p:animEffect transition="in" filter="fade">
+                                      <p:cBhvr>
+                                        <p:cTn id="30" dur="500"/>
+                                        <p:tgtEl>
+                                          <p:spTgt spid="13"/>
+                                        </p:tgtEl>
+                                      </p:cBhvr>
+                                    </p:animEffect>
+                                  </p:childTnLst>
+                                </p:cTn>
+                              </p:par>
+                              <p:par>
+                                <p:cTn id="31" presetID="10" presetClass="entr" presetSubtype="0" fill="hold" grpId="0" nodeType="withEffect">
+                                  <p:stCondLst>
+                                    <p:cond delay="900"/>
+                                  </p:stCondLst>
+                                  <p:childTnLst>
+                                    <p:set>
+                                      <p:cBhvr>
+                                        <p:cTn id="32" dur="1" fill="hold">
+                                          <p:stCondLst>
+                                            <p:cond delay="0"/>
+                                          </p:stCondLst>
+                                        </p:cTn>
+                                        <p:tgtEl>
+                                          <p:spTgt spid="14"/>
+                                        </p:tgtEl>
+                                        <p:attrNameLst>
+                                          <p:attrName>style.visibility</p:attrName>
+                                        </p:attrNameLst>
+                                      </p:cBhvr>
+                                      <p:to>
+                                        <p:strVal val="visible"/>
+                                      </p:to>
+                                    </p:set>
+                                    <p:animEffect transition="in" filter="fade">
+                                      <p:cBhvr>
+                                        <p:cTn id="33" dur="500"/>
+                                        <p:tgtEl>
+                                          <p:spTgt spid="14"/>
+                                        </p:tgtEl>
+                                      </p:cBhvr>
+                                    </p:animEffect>
+                                  </p:childTnLst>
+                                </p:cTn>
+                              </p:par>
+                              <p:par>
+                                <p:cTn id="34" presetID="10" presetClass="entr" presetSubtype="0" fill="hold" grpId="0" nodeType="withEffect">
+                                  <p:stCondLst>
+                                    <p:cond delay="1250"/>
+                                  </p:stCondLst>
+                                  <p:childTnLst>
+                                    <p:set>
+                                      <p:cBhvr>
+                                        <p:cTn id="35" dur="1" fill="hold">
+                                          <p:stCondLst>
+                                            <p:cond delay="0"/>
+                                          </p:stCondLst>
+                                        </p:cTn>
+                                        <p:tgtEl>
+                                          <p:spTgt spid="16"/>
+                                        </p:tgtEl>
+                                        <p:attrNameLst>
+                                          <p:attrName>style.visibility</p:attrName>
+                                        </p:attrNameLst>
+                                      </p:cBhvr>
+                                      <p:to>
+                                        <p:strVal val="visible"/>
+                                      </p:to>
+                                    </p:set>
+                                    <p:animEffect transition="in" filter="fade">
+                                      <p:cBhvr>
+                                        <p:cTn id="36" dur="500"/>
+                                        <p:tgtEl>
+                                          <p:spTgt spid="16"/>
+                                        </p:tgtEl>
+                                      </p:cBhvr>
+                                    </p:animEffect>
+                                  </p:childTnLst>
+                                </p:cTn>
+                              </p:par>
+                              <p:par>
+                                <p:cTn id="37" presetID="10" presetClass="entr" presetSubtype="0" fill="hold" grpId="0" nodeType="withEffect">
+                                  <p:stCondLst>
+                                    <p:cond delay="1250"/>
+                                  </p:stCondLst>
+                                  <p:childTnLst>
+                                    <p:set>
+                                      <p:cBhvr>
+                                        <p:cTn id="38" dur="1" fill="hold">
+                                          <p:stCondLst>
+                                            <p:cond delay="0"/>
+                                          </p:stCondLst>
+                                        </p:cTn>
+                                        <p:tgtEl>
+                                          <p:spTgt spid="17"/>
+                                        </p:tgtEl>
+                                        <p:attrNameLst>
+                                          <p:attrName>style.visibility</p:attrName>
+                                        </p:attrNameLst>
+                                      </p:cBhvr>
+                                      <p:to>
+                                        <p:strVal val="visible"/>
+                                      </p:to>
+                                    </p:set>
+                                    <p:animEffect transition="in" filter="fade">
+                                      <p:cBhvr>
+                                        <p:cTn id="39" dur="500"/>
+                                        <p:tgtEl>
+                                          <p:spTgt spid="17"/>
+                                        </p:tgtEl>
+                                      </p:cBhvr>
+                                    </p:animEffect>
+                                  </p:childTnLst>
+                                </p:cTn>
+                              </p:par>
+                              <p:par>
+                                <p:cTn id="40" presetID="10" presetClass="entr" presetSubtype="0" fill="hold" grpId="0" nodeType="withEffect">
+                                  <p:stCondLst>
+                                    <p:cond delay="1250"/>
+                                  </p:stCondLst>
+                                  <p:childTnLst>
+                                    <p:set>
+                                      <p:cBhvr>
+                                        <p:cTn id="41" dur="1" fill="hold">
+                                          <p:stCondLst>
+                                            <p:cond delay="0"/>
+                                          </p:stCondLst>
+                                        </p:cTn>
+                                        <p:tgtEl>
+                                          <p:spTgt spid="18"/>
+                                        </p:tgtEl>
+                                        <p:attrNameLst>
+                                          <p:attrName>style.visibility</p:attrName>
+                                        </p:attrNameLst>
+                                      </p:cBhvr>
+                                      <p:to>
+                                        <p:strVal val="visible"/>
+                                      </p:to>
+                                    </p:set>
+                                    <p:animEffect transition="in" filter="fade">
+                                      <p:cBhvr>
+                                        <p:cTn id="42" dur="500"/>
+                                        <p:tgtEl>
+                                          <p:spTgt spid="18"/>
+                                        </p:tgtEl>
+                                      </p:cBhvr>
+                                    </p:animEffect>
+                                  </p:childTnLst>
+                                </p:cTn>
+                              </p:par>
+                            </p:childTnLst>
+                          </p:cTn>
+                        </p:par>
+                      </p:childTnLst>
+                    </p:cTn>
+                  </p:par>
+                </p:childTnLst>
+              </p:cTn>
+              <p:prevCondLst>
+                <p:cond evt="onPrev" delay="0">
+                  <p:tgtEl>
+                    <p:sldTgt/>
+                  </p:tgtEl>
+                </p:cond>
+              </p:prevCondLst>
+              <p:nextCondLst>
+                <p:cond evt="onNext" delay="0">
+                  <p:tgtEl>
+                    <p:sldTgt/>
+                  </p:tgtEl>
+                </p:cond>
+              </p:nextCondLst>
+            </p:seq>
+          </p:childTnLst>
+        </p:cTn>
+      </p:par>
+    </p:tnLst>
+    <p:bldLst>
+      <p:bldP spid="4" grpId="0" animBg="1"/>
+      <p:bldP spid="5" grpId="0" animBg="1"/>
+      <p:bldP spid="6" grpId="0" animBg="1"/>
+      <p:bldP spid="7" grpId="0" animBg="1"/>
+      <p:bldP spid="8" grpId="0" animBg="1"/>
+      <p:bldP spid="9" grpId="0" animBg="1"/>
+      <p:bldP spid="10" grpId="0" animBg="1"/>
+      <p:bldP spid="12" grpId="0" animBg="1"/>
+      <p:bldP spid="13" grpId="0" animBg="1"/>
+      <p:bldP spid="14" grpId="0" animBg="1"/>
+      <p:bldP spid="16" grpId="0" animBg="1"/>
+      <p:bldP spid="17" grpId="0" animBg="1"/>
+      <p:bldP spid="18" grpId="0" animBg="1"/>
+    </p:bldLst>
+  </p:timing>
 </p:sld>
 </file>
 
@@ -11209,7 +14643,7 @@
       </p:sp>
       <p:sp>
         <p:nvSpPr>
-          <p:cNvPr id="8" name="箭头"/>
+          <p:cNvPr id="8" name="链箭头1"/>
           <p:cNvSpPr txBox="1"/>
           <p:nvPr/>
         </p:nvSpPr>
@@ -11383,7 +14817,7 @@
       </p:sp>
       <p:sp>
         <p:nvSpPr>
-          <p:cNvPr id="13" name="箭头"/>
+          <p:cNvPr id="13" name="链箭头2"/>
           <p:cNvSpPr txBox="1"/>
           <p:nvPr/>
         </p:nvSpPr>
@@ -11571,7 +15005,7 @@
       </p:sp>
       <p:sp>
         <p:nvSpPr>
-          <p:cNvPr id="18" name="箭头"/>
+          <p:cNvPr id="18" name="链箭头3"/>
           <p:cNvSpPr txBox="1"/>
           <p:nvPr/>
         </p:nvSpPr>
@@ -11843,6 +15277,746 @@
   <p:clrMapOvr>
     <a:masterClrMapping/>
   </p:clrMapOvr>
+  <p:transition spd="med">
+    <p:fade/>
+  </p:transition>
+  <p:timing>
+    <p:tnLst>
+      <p:par>
+        <p:cTn id="1" dur="indefinite" restart="never" nodeType="tmRoot">
+          <p:childTnLst>
+            <p:seq concurrent="1" nextAc="seek">
+              <p:cTn id="2" dur="indefinite" nodeType="mainSeq">
+                <p:childTnLst>
+                  <p:par>
+                    <p:cTn id="3" fill="hold">
+                      <p:stCondLst>
+                        <p:cond delay="indefinite"/>
+                        <p:cond evt="onBegin" delay="0">
+                          <p:tn val="2"/>
+                        </p:cond>
+                      </p:stCondLst>
+                      <p:childTnLst>
+                        <p:par>
+                          <p:cTn id="61" fill="hold">
+                            <p:stCondLst>
+                              <p:cond delay="0"/>
+                            </p:stCondLst>
+                            <p:childTnLst>
+                              <p:par>
+                                <p:cTn id="4" presetID="10" presetClass="entr" presetSubtype="0" fill="hold" grpId="0" nodeType="withEffect">
+                                  <p:stCondLst>
+                                    <p:cond delay="200"/>
+                                  </p:stCondLst>
+                                  <p:childTnLst>
+                                    <p:set>
+                                      <p:cBhvr>
+                                        <p:cTn id="5" dur="1" fill="hold">
+                                          <p:stCondLst>
+                                            <p:cond delay="0"/>
+                                          </p:stCondLst>
+                                        </p:cTn>
+                                        <p:tgtEl>
+                                          <p:spTgt spid="4"/>
+                                        </p:tgtEl>
+                                        <p:attrNameLst>
+                                          <p:attrName>style.visibility</p:attrName>
+                                        </p:attrNameLst>
+                                      </p:cBhvr>
+                                      <p:to>
+                                        <p:strVal val="visible"/>
+                                      </p:to>
+                                    </p:set>
+                                    <p:animEffect transition="in" filter="fade">
+                                      <p:cBhvr>
+                                        <p:cTn id="6" dur="500"/>
+                                        <p:tgtEl>
+                                          <p:spTgt spid="4"/>
+                                        </p:tgtEl>
+                                      </p:cBhvr>
+                                    </p:animEffect>
+                                  </p:childTnLst>
+                                </p:cTn>
+                              </p:par>
+                              <p:par>
+                                <p:cTn id="7" presetID="10" presetClass="entr" presetSubtype="0" fill="hold" grpId="0" nodeType="withEffect">
+                                  <p:stCondLst>
+                                    <p:cond delay="200"/>
+                                  </p:stCondLst>
+                                  <p:childTnLst>
+                                    <p:set>
+                                      <p:cBhvr>
+                                        <p:cTn id="8" dur="1" fill="hold">
+                                          <p:stCondLst>
+                                            <p:cond delay="0"/>
+                                          </p:stCondLst>
+                                        </p:cTn>
+                                        <p:tgtEl>
+                                          <p:spTgt spid="5"/>
+                                        </p:tgtEl>
+                                        <p:attrNameLst>
+                                          <p:attrName>style.visibility</p:attrName>
+                                        </p:attrNameLst>
+                                      </p:cBhvr>
+                                      <p:to>
+                                        <p:strVal val="visible"/>
+                                      </p:to>
+                                    </p:set>
+                                    <p:animEffect transition="in" filter="fade">
+                                      <p:cBhvr>
+                                        <p:cTn id="9" dur="500"/>
+                                        <p:tgtEl>
+                                          <p:spTgt spid="5"/>
+                                        </p:tgtEl>
+                                      </p:cBhvr>
+                                    </p:animEffect>
+                                  </p:childTnLst>
+                                </p:cTn>
+                              </p:par>
+                              <p:par>
+                                <p:cTn id="10" presetID="10" presetClass="entr" presetSubtype="0" fill="hold" grpId="0" nodeType="withEffect">
+                                  <p:stCondLst>
+                                    <p:cond delay="200"/>
+                                  </p:stCondLst>
+                                  <p:childTnLst>
+                                    <p:set>
+                                      <p:cBhvr>
+                                        <p:cTn id="11" dur="1" fill="hold">
+                                          <p:stCondLst>
+                                            <p:cond delay="0"/>
+                                          </p:stCondLst>
+                                        </p:cTn>
+                                        <p:tgtEl>
+                                          <p:spTgt spid="6"/>
+                                        </p:tgtEl>
+                                        <p:attrNameLst>
+                                          <p:attrName>style.visibility</p:attrName>
+                                        </p:attrNameLst>
+                                      </p:cBhvr>
+                                      <p:to>
+                                        <p:strVal val="visible"/>
+                                      </p:to>
+                                    </p:set>
+                                    <p:animEffect transition="in" filter="fade">
+                                      <p:cBhvr>
+                                        <p:cTn id="12" dur="500"/>
+                                        <p:tgtEl>
+                                          <p:spTgt spid="6"/>
+                                        </p:tgtEl>
+                                      </p:cBhvr>
+                                    </p:animEffect>
+                                  </p:childTnLst>
+                                </p:cTn>
+                              </p:par>
+                              <p:par>
+                                <p:cTn id="13" presetID="10" presetClass="entr" presetSubtype="0" fill="hold" grpId="0" nodeType="withEffect">
+                                  <p:stCondLst>
+                                    <p:cond delay="200"/>
+                                  </p:stCondLst>
+                                  <p:childTnLst>
+                                    <p:set>
+                                      <p:cBhvr>
+                                        <p:cTn id="14" dur="1" fill="hold">
+                                          <p:stCondLst>
+                                            <p:cond delay="0"/>
+                                          </p:stCondLst>
+                                        </p:cTn>
+                                        <p:tgtEl>
+                                          <p:spTgt spid="7"/>
+                                        </p:tgtEl>
+                                        <p:attrNameLst>
+                                          <p:attrName>style.visibility</p:attrName>
+                                        </p:attrNameLst>
+                                      </p:cBhvr>
+                                      <p:to>
+                                        <p:strVal val="visible"/>
+                                      </p:to>
+                                    </p:set>
+                                    <p:animEffect transition="in" filter="fade">
+                                      <p:cBhvr>
+                                        <p:cTn id="15" dur="500"/>
+                                        <p:tgtEl>
+                                          <p:spTgt spid="7"/>
+                                        </p:tgtEl>
+                                      </p:cBhvr>
+                                    </p:animEffect>
+                                  </p:childTnLst>
+                                </p:cTn>
+                              </p:par>
+                              <p:par>
+                                <p:cTn id="16" presetID="10" presetClass="entr" presetSubtype="0" fill="hold" grpId="0" nodeType="withEffect">
+                                  <p:stCondLst>
+                                    <p:cond delay="550"/>
+                                  </p:stCondLst>
+                                  <p:childTnLst>
+                                    <p:set>
+                                      <p:cBhvr>
+                                        <p:cTn id="17" dur="1" fill="hold">
+                                          <p:stCondLst>
+                                            <p:cond delay="0"/>
+                                          </p:stCondLst>
+                                        </p:cTn>
+                                        <p:tgtEl>
+                                          <p:spTgt spid="9"/>
+                                        </p:tgtEl>
+                                        <p:attrNameLst>
+                                          <p:attrName>style.visibility</p:attrName>
+                                        </p:attrNameLst>
+                                      </p:cBhvr>
+                                      <p:to>
+                                        <p:strVal val="visible"/>
+                                      </p:to>
+                                    </p:set>
+                                    <p:animEffect transition="in" filter="fade">
+                                      <p:cBhvr>
+                                        <p:cTn id="18" dur="500"/>
+                                        <p:tgtEl>
+                                          <p:spTgt spid="9"/>
+                                        </p:tgtEl>
+                                      </p:cBhvr>
+                                    </p:animEffect>
+                                  </p:childTnLst>
+                                </p:cTn>
+                              </p:par>
+                              <p:par>
+                                <p:cTn id="19" presetID="10" presetClass="entr" presetSubtype="0" fill="hold" grpId="0" nodeType="withEffect">
+                                  <p:stCondLst>
+                                    <p:cond delay="550"/>
+                                  </p:stCondLst>
+                                  <p:childTnLst>
+                                    <p:set>
+                                      <p:cBhvr>
+                                        <p:cTn id="20" dur="1" fill="hold">
+                                          <p:stCondLst>
+                                            <p:cond delay="0"/>
+                                          </p:stCondLst>
+                                        </p:cTn>
+                                        <p:tgtEl>
+                                          <p:spTgt spid="10"/>
+                                        </p:tgtEl>
+                                        <p:attrNameLst>
+                                          <p:attrName>style.visibility</p:attrName>
+                                        </p:attrNameLst>
+                                      </p:cBhvr>
+                                      <p:to>
+                                        <p:strVal val="visible"/>
+                                      </p:to>
+                                    </p:set>
+                                    <p:animEffect transition="in" filter="fade">
+                                      <p:cBhvr>
+                                        <p:cTn id="21" dur="500"/>
+                                        <p:tgtEl>
+                                          <p:spTgt spid="10"/>
+                                        </p:tgtEl>
+                                      </p:cBhvr>
+                                    </p:animEffect>
+                                  </p:childTnLst>
+                                </p:cTn>
+                              </p:par>
+                              <p:par>
+                                <p:cTn id="22" presetID="10" presetClass="entr" presetSubtype="0" fill="hold" grpId="0" nodeType="withEffect">
+                                  <p:stCondLst>
+                                    <p:cond delay="550"/>
+                                  </p:stCondLst>
+                                  <p:childTnLst>
+                                    <p:set>
+                                      <p:cBhvr>
+                                        <p:cTn id="23" dur="1" fill="hold">
+                                          <p:stCondLst>
+                                            <p:cond delay="0"/>
+                                          </p:stCondLst>
+                                        </p:cTn>
+                                        <p:tgtEl>
+                                          <p:spTgt spid="11"/>
+                                        </p:tgtEl>
+                                        <p:attrNameLst>
+                                          <p:attrName>style.visibility</p:attrName>
+                                        </p:attrNameLst>
+                                      </p:cBhvr>
+                                      <p:to>
+                                        <p:strVal val="visible"/>
+                                      </p:to>
+                                    </p:set>
+                                    <p:animEffect transition="in" filter="fade">
+                                      <p:cBhvr>
+                                        <p:cTn id="24" dur="500"/>
+                                        <p:tgtEl>
+                                          <p:spTgt spid="11"/>
+                                        </p:tgtEl>
+                                      </p:cBhvr>
+                                    </p:animEffect>
+                                  </p:childTnLst>
+                                </p:cTn>
+                              </p:par>
+                              <p:par>
+                                <p:cTn id="25" presetID="10" presetClass="entr" presetSubtype="0" fill="hold" grpId="0" nodeType="withEffect">
+                                  <p:stCondLst>
+                                    <p:cond delay="550"/>
+                                  </p:stCondLst>
+                                  <p:childTnLst>
+                                    <p:set>
+                                      <p:cBhvr>
+                                        <p:cTn id="26" dur="1" fill="hold">
+                                          <p:stCondLst>
+                                            <p:cond delay="0"/>
+                                          </p:stCondLst>
+                                        </p:cTn>
+                                        <p:tgtEl>
+                                          <p:spTgt spid="12"/>
+                                        </p:tgtEl>
+                                        <p:attrNameLst>
+                                          <p:attrName>style.visibility</p:attrName>
+                                        </p:attrNameLst>
+                                      </p:cBhvr>
+                                      <p:to>
+                                        <p:strVal val="visible"/>
+                                      </p:to>
+                                    </p:set>
+                                    <p:animEffect transition="in" filter="fade">
+                                      <p:cBhvr>
+                                        <p:cTn id="27" dur="500"/>
+                                        <p:tgtEl>
+                                          <p:spTgt spid="12"/>
+                                        </p:tgtEl>
+                                      </p:cBhvr>
+                                    </p:animEffect>
+                                  </p:childTnLst>
+                                </p:cTn>
+                              </p:par>
+                              <p:par>
+                                <p:cTn id="28" presetID="10" presetClass="entr" presetSubtype="0" fill="hold" grpId="0" nodeType="withEffect">
+                                  <p:stCondLst>
+                                    <p:cond delay="550"/>
+                                  </p:stCondLst>
+                                  <p:childTnLst>
+                                    <p:set>
+                                      <p:cBhvr>
+                                        <p:cTn id="29" dur="1" fill="hold">
+                                          <p:stCondLst>
+                                            <p:cond delay="0"/>
+                                          </p:stCondLst>
+                                        </p:cTn>
+                                        <p:tgtEl>
+                                          <p:spTgt spid="8"/>
+                                        </p:tgtEl>
+                                        <p:attrNameLst>
+                                          <p:attrName>style.visibility</p:attrName>
+                                        </p:attrNameLst>
+                                      </p:cBhvr>
+                                      <p:to>
+                                        <p:strVal val="visible"/>
+                                      </p:to>
+                                    </p:set>
+                                    <p:animEffect transition="in" filter="fade">
+                                      <p:cBhvr>
+                                        <p:cTn id="30" dur="500"/>
+                                        <p:tgtEl>
+                                          <p:spTgt spid="8"/>
+                                        </p:tgtEl>
+                                      </p:cBhvr>
+                                    </p:animEffect>
+                                  </p:childTnLst>
+                                </p:cTn>
+                              </p:par>
+                              <p:par>
+                                <p:cTn id="31" presetID="10" presetClass="entr" presetSubtype="0" fill="hold" grpId="0" nodeType="withEffect">
+                                  <p:stCondLst>
+                                    <p:cond delay="900"/>
+                                  </p:stCondLst>
+                                  <p:childTnLst>
+                                    <p:set>
+                                      <p:cBhvr>
+                                        <p:cTn id="32" dur="1" fill="hold">
+                                          <p:stCondLst>
+                                            <p:cond delay="0"/>
+                                          </p:stCondLst>
+                                        </p:cTn>
+                                        <p:tgtEl>
+                                          <p:spTgt spid="14"/>
+                                        </p:tgtEl>
+                                        <p:attrNameLst>
+                                          <p:attrName>style.visibility</p:attrName>
+                                        </p:attrNameLst>
+                                      </p:cBhvr>
+                                      <p:to>
+                                        <p:strVal val="visible"/>
+                                      </p:to>
+                                    </p:set>
+                                    <p:animEffect transition="in" filter="fade">
+                                      <p:cBhvr>
+                                        <p:cTn id="33" dur="500"/>
+                                        <p:tgtEl>
+                                          <p:spTgt spid="14"/>
+                                        </p:tgtEl>
+                                      </p:cBhvr>
+                                    </p:animEffect>
+                                  </p:childTnLst>
+                                </p:cTn>
+                              </p:par>
+                              <p:par>
+                                <p:cTn id="34" presetID="10" presetClass="entr" presetSubtype="0" fill="hold" grpId="0" nodeType="withEffect">
+                                  <p:stCondLst>
+                                    <p:cond delay="900"/>
+                                  </p:stCondLst>
+                                  <p:childTnLst>
+                                    <p:set>
+                                      <p:cBhvr>
+                                        <p:cTn id="35" dur="1" fill="hold">
+                                          <p:stCondLst>
+                                            <p:cond delay="0"/>
+                                          </p:stCondLst>
+                                        </p:cTn>
+                                        <p:tgtEl>
+                                          <p:spTgt spid="15"/>
+                                        </p:tgtEl>
+                                        <p:attrNameLst>
+                                          <p:attrName>style.visibility</p:attrName>
+                                        </p:attrNameLst>
+                                      </p:cBhvr>
+                                      <p:to>
+                                        <p:strVal val="visible"/>
+                                      </p:to>
+                                    </p:set>
+                                    <p:animEffect transition="in" filter="fade">
+                                      <p:cBhvr>
+                                        <p:cTn id="36" dur="500"/>
+                                        <p:tgtEl>
+                                          <p:spTgt spid="15"/>
+                                        </p:tgtEl>
+                                      </p:cBhvr>
+                                    </p:animEffect>
+                                  </p:childTnLst>
+                                </p:cTn>
+                              </p:par>
+                              <p:par>
+                                <p:cTn id="37" presetID="10" presetClass="entr" presetSubtype="0" fill="hold" grpId="0" nodeType="withEffect">
+                                  <p:stCondLst>
+                                    <p:cond delay="900"/>
+                                  </p:stCondLst>
+                                  <p:childTnLst>
+                                    <p:set>
+                                      <p:cBhvr>
+                                        <p:cTn id="38" dur="1" fill="hold">
+                                          <p:stCondLst>
+                                            <p:cond delay="0"/>
+                                          </p:stCondLst>
+                                        </p:cTn>
+                                        <p:tgtEl>
+                                          <p:spTgt spid="16"/>
+                                        </p:tgtEl>
+                                        <p:attrNameLst>
+                                          <p:attrName>style.visibility</p:attrName>
+                                        </p:attrNameLst>
+                                      </p:cBhvr>
+                                      <p:to>
+                                        <p:strVal val="visible"/>
+                                      </p:to>
+                                    </p:set>
+                                    <p:animEffect transition="in" filter="fade">
+                                      <p:cBhvr>
+                                        <p:cTn id="39" dur="500"/>
+                                        <p:tgtEl>
+                                          <p:spTgt spid="16"/>
+                                        </p:tgtEl>
+                                      </p:cBhvr>
+                                    </p:animEffect>
+                                  </p:childTnLst>
+                                </p:cTn>
+                              </p:par>
+                              <p:par>
+                                <p:cTn id="40" presetID="10" presetClass="entr" presetSubtype="0" fill="hold" grpId="0" nodeType="withEffect">
+                                  <p:stCondLst>
+                                    <p:cond delay="900"/>
+                                  </p:stCondLst>
+                                  <p:childTnLst>
+                                    <p:set>
+                                      <p:cBhvr>
+                                        <p:cTn id="41" dur="1" fill="hold">
+                                          <p:stCondLst>
+                                            <p:cond delay="0"/>
+                                          </p:stCondLst>
+                                        </p:cTn>
+                                        <p:tgtEl>
+                                          <p:spTgt spid="17"/>
+                                        </p:tgtEl>
+                                        <p:attrNameLst>
+                                          <p:attrName>style.visibility</p:attrName>
+                                        </p:attrNameLst>
+                                      </p:cBhvr>
+                                      <p:to>
+                                        <p:strVal val="visible"/>
+                                      </p:to>
+                                    </p:set>
+                                    <p:animEffect transition="in" filter="fade">
+                                      <p:cBhvr>
+                                        <p:cTn id="42" dur="500"/>
+                                        <p:tgtEl>
+                                          <p:spTgt spid="17"/>
+                                        </p:tgtEl>
+                                      </p:cBhvr>
+                                    </p:animEffect>
+                                  </p:childTnLst>
+                                </p:cTn>
+                              </p:par>
+                              <p:par>
+                                <p:cTn id="43" presetID="10" presetClass="entr" presetSubtype="0" fill="hold" grpId="0" nodeType="withEffect">
+                                  <p:stCondLst>
+                                    <p:cond delay="900"/>
+                                  </p:stCondLst>
+                                  <p:childTnLst>
+                                    <p:set>
+                                      <p:cBhvr>
+                                        <p:cTn id="44" dur="1" fill="hold">
+                                          <p:stCondLst>
+                                            <p:cond delay="0"/>
+                                          </p:stCondLst>
+                                        </p:cTn>
+                                        <p:tgtEl>
+                                          <p:spTgt spid="13"/>
+                                        </p:tgtEl>
+                                        <p:attrNameLst>
+                                          <p:attrName>style.visibility</p:attrName>
+                                        </p:attrNameLst>
+                                      </p:cBhvr>
+                                      <p:to>
+                                        <p:strVal val="visible"/>
+                                      </p:to>
+                                    </p:set>
+                                    <p:animEffect transition="in" filter="fade">
+                                      <p:cBhvr>
+                                        <p:cTn id="45" dur="500"/>
+                                        <p:tgtEl>
+                                          <p:spTgt spid="13"/>
+                                        </p:tgtEl>
+                                      </p:cBhvr>
+                                    </p:animEffect>
+                                  </p:childTnLst>
+                                </p:cTn>
+                              </p:par>
+                              <p:par>
+                                <p:cTn id="46" presetID="10" presetClass="entr" presetSubtype="0" fill="hold" grpId="0" nodeType="withEffect">
+                                  <p:stCondLst>
+                                    <p:cond delay="1250"/>
+                                  </p:stCondLst>
+                                  <p:childTnLst>
+                                    <p:set>
+                                      <p:cBhvr>
+                                        <p:cTn id="47" dur="1" fill="hold">
+                                          <p:stCondLst>
+                                            <p:cond delay="0"/>
+                                          </p:stCondLst>
+                                        </p:cTn>
+                                        <p:tgtEl>
+                                          <p:spTgt spid="19"/>
+                                        </p:tgtEl>
+                                        <p:attrNameLst>
+                                          <p:attrName>style.visibility</p:attrName>
+                                        </p:attrNameLst>
+                                      </p:cBhvr>
+                                      <p:to>
+                                        <p:strVal val="visible"/>
+                                      </p:to>
+                                    </p:set>
+                                    <p:animEffect transition="in" filter="fade">
+                                      <p:cBhvr>
+                                        <p:cTn id="48" dur="500"/>
+                                        <p:tgtEl>
+                                          <p:spTgt spid="19"/>
+                                        </p:tgtEl>
+                                      </p:cBhvr>
+                                    </p:animEffect>
+                                  </p:childTnLst>
+                                </p:cTn>
+                              </p:par>
+                              <p:par>
+                                <p:cTn id="49" presetID="10" presetClass="entr" presetSubtype="0" fill="hold" grpId="0" nodeType="withEffect">
+                                  <p:stCondLst>
+                                    <p:cond delay="1250"/>
+                                  </p:stCondLst>
+                                  <p:childTnLst>
+                                    <p:set>
+                                      <p:cBhvr>
+                                        <p:cTn id="50" dur="1" fill="hold">
+                                          <p:stCondLst>
+                                            <p:cond delay="0"/>
+                                          </p:stCondLst>
+                                        </p:cTn>
+                                        <p:tgtEl>
+                                          <p:spTgt spid="20"/>
+                                        </p:tgtEl>
+                                        <p:attrNameLst>
+                                          <p:attrName>style.visibility</p:attrName>
+                                        </p:attrNameLst>
+                                      </p:cBhvr>
+                                      <p:to>
+                                        <p:strVal val="visible"/>
+                                      </p:to>
+                                    </p:set>
+                                    <p:animEffect transition="in" filter="fade">
+                                      <p:cBhvr>
+                                        <p:cTn id="51" dur="500"/>
+                                        <p:tgtEl>
+                                          <p:spTgt spid="20"/>
+                                        </p:tgtEl>
+                                      </p:cBhvr>
+                                    </p:animEffect>
+                                  </p:childTnLst>
+                                </p:cTn>
+                              </p:par>
+                              <p:par>
+                                <p:cTn id="52" presetID="10" presetClass="entr" presetSubtype="0" fill="hold" grpId="0" nodeType="withEffect">
+                                  <p:stCondLst>
+                                    <p:cond delay="1250"/>
+                                  </p:stCondLst>
+                                  <p:childTnLst>
+                                    <p:set>
+                                      <p:cBhvr>
+                                        <p:cTn id="53" dur="1" fill="hold">
+                                          <p:stCondLst>
+                                            <p:cond delay="0"/>
+                                          </p:stCondLst>
+                                        </p:cTn>
+                                        <p:tgtEl>
+                                          <p:spTgt spid="21"/>
+                                        </p:tgtEl>
+                                        <p:attrNameLst>
+                                          <p:attrName>style.visibility</p:attrName>
+                                        </p:attrNameLst>
+                                      </p:cBhvr>
+                                      <p:to>
+                                        <p:strVal val="visible"/>
+                                      </p:to>
+                                    </p:set>
+                                    <p:animEffect transition="in" filter="fade">
+                                      <p:cBhvr>
+                                        <p:cTn id="54" dur="500"/>
+                                        <p:tgtEl>
+                                          <p:spTgt spid="21"/>
+                                        </p:tgtEl>
+                                      </p:cBhvr>
+                                    </p:animEffect>
+                                  </p:childTnLst>
+                                </p:cTn>
+                              </p:par>
+                              <p:par>
+                                <p:cTn id="55" presetID="10" presetClass="entr" presetSubtype="0" fill="hold" grpId="0" nodeType="withEffect">
+                                  <p:stCondLst>
+                                    <p:cond delay="1250"/>
+                                  </p:stCondLst>
+                                  <p:childTnLst>
+                                    <p:set>
+                                      <p:cBhvr>
+                                        <p:cTn id="56" dur="1" fill="hold">
+                                          <p:stCondLst>
+                                            <p:cond delay="0"/>
+                                          </p:stCondLst>
+                                        </p:cTn>
+                                        <p:tgtEl>
+                                          <p:spTgt spid="22"/>
+                                        </p:tgtEl>
+                                        <p:attrNameLst>
+                                          <p:attrName>style.visibility</p:attrName>
+                                        </p:attrNameLst>
+                                      </p:cBhvr>
+                                      <p:to>
+                                        <p:strVal val="visible"/>
+                                      </p:to>
+                                    </p:set>
+                                    <p:animEffect transition="in" filter="fade">
+                                      <p:cBhvr>
+                                        <p:cTn id="57" dur="500"/>
+                                        <p:tgtEl>
+                                          <p:spTgt spid="22"/>
+                                        </p:tgtEl>
+                                      </p:cBhvr>
+                                    </p:animEffect>
+                                  </p:childTnLst>
+                                </p:cTn>
+                              </p:par>
+                              <p:par>
+                                <p:cTn id="58" presetID="10" presetClass="entr" presetSubtype="0" fill="hold" grpId="0" nodeType="withEffect">
+                                  <p:stCondLst>
+                                    <p:cond delay="1250"/>
+                                  </p:stCondLst>
+                                  <p:childTnLst>
+                                    <p:set>
+                                      <p:cBhvr>
+                                        <p:cTn id="59" dur="1" fill="hold">
+                                          <p:stCondLst>
+                                            <p:cond delay="0"/>
+                                          </p:stCondLst>
+                                        </p:cTn>
+                                        <p:tgtEl>
+                                          <p:spTgt spid="18"/>
+                                        </p:tgtEl>
+                                        <p:attrNameLst>
+                                          <p:attrName>style.visibility</p:attrName>
+                                        </p:attrNameLst>
+                                      </p:cBhvr>
+                                      <p:to>
+                                        <p:strVal val="visible"/>
+                                      </p:to>
+                                    </p:set>
+                                    <p:animEffect transition="in" filter="fade">
+                                      <p:cBhvr>
+                                        <p:cTn id="60" dur="500"/>
+                                        <p:tgtEl>
+                                          <p:spTgt spid="18"/>
+                                        </p:tgtEl>
+                                      </p:cBhvr>
+                                    </p:animEffect>
+                                  </p:childTnLst>
+                                </p:cTn>
+                              </p:par>
+                            </p:childTnLst>
+                          </p:cTn>
+                        </p:par>
+                      </p:childTnLst>
+                    </p:cTn>
+                  </p:par>
+                </p:childTnLst>
+              </p:cTn>
+              <p:prevCondLst>
+                <p:cond evt="onPrev" delay="0">
+                  <p:tgtEl>
+                    <p:sldTgt/>
+                  </p:tgtEl>
+                </p:cond>
+              </p:prevCondLst>
+              <p:nextCondLst>
+                <p:cond evt="onNext" delay="0">
+                  <p:tgtEl>
+                    <p:sldTgt/>
+                  </p:tgtEl>
+                </p:cond>
+              </p:nextCondLst>
+            </p:seq>
+          </p:childTnLst>
+        </p:cTn>
+      </p:par>
+    </p:tnLst>
+    <p:bldLst>
+      <p:bldP spid="4" grpId="0" animBg="1"/>
+      <p:bldP spid="5" grpId="0" animBg="1"/>
+      <p:bldP spid="6" grpId="0" animBg="1"/>
+      <p:bldP spid="7" grpId="0" animBg="1"/>
+      <p:bldP spid="9" grpId="0" animBg="1"/>
+      <p:bldP spid="10" grpId="0" animBg="1"/>
+      <p:bldP spid="11" grpId="0" animBg="1"/>
+      <p:bldP spid="12" grpId="0" animBg="1"/>
+      <p:bldP spid="8" grpId="0" animBg="1"/>
+      <p:bldP spid="14" grpId="0" animBg="1"/>
+      <p:bldP spid="15" grpId="0" animBg="1"/>
+      <p:bldP spid="16" grpId="0" animBg="1"/>
+      <p:bldP spid="17" grpId="0" animBg="1"/>
+      <p:bldP spid="13" grpId="0" animBg="1"/>
+      <p:bldP spid="19" grpId="0" animBg="1"/>
+      <p:bldP spid="20" grpId="0" animBg="1"/>
+      <p:bldP spid="21" grpId="0" animBg="1"/>
+      <p:bldP spid="22" grpId="0" animBg="1"/>
+      <p:bldP spid="18" grpId="0" animBg="1"/>
+    </p:bldLst>
+  </p:timing>
 </p:sld>
 </file>
 
@@ -12002,7 +16176,7 @@
       </p:sp>
       <p:sp>
         <p:nvSpPr>
-          <p:cNvPr id="6" name="箭头"/>
+          <p:cNvPr id="6" name="环节箭头1"/>
           <p:cNvSpPr txBox="1"/>
           <p:nvPr/>
         </p:nvSpPr>
@@ -12233,7 +16407,7 @@
       </p:sp>
       <p:sp>
         <p:nvSpPr>
-          <p:cNvPr id="13" name="箭头"/>
+          <p:cNvPr id="13" name="环节箭头2"/>
           <p:cNvSpPr txBox="1"/>
           <p:nvPr/>
         </p:nvSpPr>
@@ -12450,7 +16624,7 @@
       </p:sp>
       <p:sp>
         <p:nvSpPr>
-          <p:cNvPr id="20" name="箭头"/>
+          <p:cNvPr id="20" name="环节箭头3"/>
           <p:cNvSpPr txBox="1"/>
           <p:nvPr/>
         </p:nvSpPr>
@@ -12883,6 +17057,782 @@
   <p:clrMapOvr>
     <a:masterClrMapping/>
   </p:clrMapOvr>
+  <p:transition spd="med">
+    <p:fade/>
+  </p:transition>
+  <p:timing>
+    <p:tnLst>
+      <p:par>
+        <p:cTn id="1" dur="indefinite" restart="never" nodeType="tmRoot">
+          <p:childTnLst>
+            <p:seq concurrent="1" nextAc="seek">
+              <p:cTn id="2" dur="indefinite" nodeType="mainSeq">
+                <p:childTnLst>
+                  <p:par>
+                    <p:cTn id="3" fill="hold">
+                      <p:stCondLst>
+                        <p:cond delay="indefinite"/>
+                        <p:cond evt="onBegin" delay="0">
+                          <p:tn val="2"/>
+                        </p:cond>
+                      </p:stCondLst>
+                      <p:childTnLst>
+                        <p:par>
+                          <p:cTn id="64" fill="hold">
+                            <p:stCondLst>
+                              <p:cond delay="0"/>
+                            </p:stCondLst>
+                            <p:childTnLst>
+                              <p:par>
+                                <p:cTn id="4" presetID="10" presetClass="entr" presetSubtype="0" fill="hold" grpId="0" nodeType="withEffect">
+                                  <p:stCondLst>
+                                    <p:cond delay="200"/>
+                                  </p:stCondLst>
+                                  <p:childTnLst>
+                                    <p:set>
+                                      <p:cBhvr>
+                                        <p:cTn id="5" dur="1" fill="hold">
+                                          <p:stCondLst>
+                                            <p:cond delay="0"/>
+                                          </p:stCondLst>
+                                        </p:cTn>
+                                        <p:tgtEl>
+                                          <p:spTgt spid="4"/>
+                                        </p:tgtEl>
+                                        <p:attrNameLst>
+                                          <p:attrName>style.visibility</p:attrName>
+                                        </p:attrNameLst>
+                                      </p:cBhvr>
+                                      <p:to>
+                                        <p:strVal val="visible"/>
+                                      </p:to>
+                                    </p:set>
+                                    <p:animEffect transition="in" filter="fade">
+                                      <p:cBhvr>
+                                        <p:cTn id="6" dur="500"/>
+                                        <p:tgtEl>
+                                          <p:spTgt spid="4"/>
+                                        </p:tgtEl>
+                                      </p:cBhvr>
+                                    </p:animEffect>
+                                  </p:childTnLst>
+                                </p:cTn>
+                              </p:par>
+                              <p:par>
+                                <p:cTn id="7" presetID="10" presetClass="entr" presetSubtype="0" fill="hold" grpId="0" nodeType="withEffect">
+                                  <p:stCondLst>
+                                    <p:cond delay="200"/>
+                                  </p:stCondLst>
+                                  <p:childTnLst>
+                                    <p:set>
+                                      <p:cBhvr>
+                                        <p:cTn id="8" dur="1" fill="hold">
+                                          <p:stCondLst>
+                                            <p:cond delay="0"/>
+                                          </p:stCondLst>
+                                        </p:cTn>
+                                        <p:tgtEl>
+                                          <p:spTgt spid="5"/>
+                                        </p:tgtEl>
+                                        <p:attrNameLst>
+                                          <p:attrName>style.visibility</p:attrName>
+                                        </p:attrNameLst>
+                                      </p:cBhvr>
+                                      <p:to>
+                                        <p:strVal val="visible"/>
+                                      </p:to>
+                                    </p:set>
+                                    <p:animEffect transition="in" filter="fade">
+                                      <p:cBhvr>
+                                        <p:cTn id="9" dur="500"/>
+                                        <p:tgtEl>
+                                          <p:spTgt spid="5"/>
+                                        </p:tgtEl>
+                                      </p:cBhvr>
+                                    </p:animEffect>
+                                  </p:childTnLst>
+                                </p:cTn>
+                              </p:par>
+                              <p:par>
+                                <p:cTn id="10" presetID="10" presetClass="entr" presetSubtype="0" fill="hold" grpId="0" nodeType="withEffect">
+                                  <p:stCondLst>
+                                    <p:cond delay="200"/>
+                                  </p:stCondLst>
+                                  <p:childTnLst>
+                                    <p:set>
+                                      <p:cBhvr>
+                                        <p:cTn id="11" dur="1" fill="hold">
+                                          <p:stCondLst>
+                                            <p:cond delay="0"/>
+                                          </p:stCondLst>
+                                        </p:cTn>
+                                        <p:tgtEl>
+                                          <p:spTgt spid="7"/>
+                                        </p:tgtEl>
+                                        <p:attrNameLst>
+                                          <p:attrName>style.visibility</p:attrName>
+                                        </p:attrNameLst>
+                                      </p:cBhvr>
+                                      <p:to>
+                                        <p:strVal val="visible"/>
+                                      </p:to>
+                                    </p:set>
+                                    <p:animEffect transition="in" filter="fade">
+                                      <p:cBhvr>
+                                        <p:cTn id="12" dur="500"/>
+                                        <p:tgtEl>
+                                          <p:spTgt spid="7"/>
+                                        </p:tgtEl>
+                                      </p:cBhvr>
+                                    </p:animEffect>
+                                  </p:childTnLst>
+                                </p:cTn>
+                              </p:par>
+                              <p:par>
+                                <p:cTn id="13" presetID="10" presetClass="entr" presetSubtype="0" fill="hold" grpId="0" nodeType="withEffect">
+                                  <p:stCondLst>
+                                    <p:cond delay="200"/>
+                                  </p:stCondLst>
+                                  <p:childTnLst>
+                                    <p:set>
+                                      <p:cBhvr>
+                                        <p:cTn id="14" dur="1" fill="hold">
+                                          <p:stCondLst>
+                                            <p:cond delay="0"/>
+                                          </p:stCondLst>
+                                        </p:cTn>
+                                        <p:tgtEl>
+                                          <p:spTgt spid="9"/>
+                                        </p:tgtEl>
+                                        <p:attrNameLst>
+                                          <p:attrName>style.visibility</p:attrName>
+                                        </p:attrNameLst>
+                                      </p:cBhvr>
+                                      <p:to>
+                                        <p:strVal val="visible"/>
+                                      </p:to>
+                                    </p:set>
+                                    <p:animEffect transition="in" filter="fade">
+                                      <p:cBhvr>
+                                        <p:cTn id="15" dur="500"/>
+                                        <p:tgtEl>
+                                          <p:spTgt spid="9"/>
+                                        </p:tgtEl>
+                                      </p:cBhvr>
+                                    </p:animEffect>
+                                  </p:childTnLst>
+                                </p:cTn>
+                              </p:par>
+                              <p:par>
+                                <p:cTn id="16" presetID="10" presetClass="entr" presetSubtype="0" fill="hold" grpId="0" nodeType="withEffect">
+                                  <p:stCondLst>
+                                    <p:cond delay="550"/>
+                                  </p:stCondLst>
+                                  <p:childTnLst>
+                                    <p:set>
+                                      <p:cBhvr>
+                                        <p:cTn id="17" dur="1" fill="hold">
+                                          <p:stCondLst>
+                                            <p:cond delay="0"/>
+                                          </p:stCondLst>
+                                        </p:cTn>
+                                        <p:tgtEl>
+                                          <p:spTgt spid="11"/>
+                                        </p:tgtEl>
+                                        <p:attrNameLst>
+                                          <p:attrName>style.visibility</p:attrName>
+                                        </p:attrNameLst>
+                                      </p:cBhvr>
+                                      <p:to>
+                                        <p:strVal val="visible"/>
+                                      </p:to>
+                                    </p:set>
+                                    <p:animEffect transition="in" filter="fade">
+                                      <p:cBhvr>
+                                        <p:cTn id="18" dur="500"/>
+                                        <p:tgtEl>
+                                          <p:spTgt spid="11"/>
+                                        </p:tgtEl>
+                                      </p:cBhvr>
+                                    </p:animEffect>
+                                  </p:childTnLst>
+                                </p:cTn>
+                              </p:par>
+                              <p:par>
+                                <p:cTn id="19" presetID="10" presetClass="entr" presetSubtype="0" fill="hold" grpId="0" nodeType="withEffect">
+                                  <p:stCondLst>
+                                    <p:cond delay="550"/>
+                                  </p:stCondLst>
+                                  <p:childTnLst>
+                                    <p:set>
+                                      <p:cBhvr>
+                                        <p:cTn id="20" dur="1" fill="hold">
+                                          <p:stCondLst>
+                                            <p:cond delay="0"/>
+                                          </p:stCondLst>
+                                        </p:cTn>
+                                        <p:tgtEl>
+                                          <p:spTgt spid="12"/>
+                                        </p:tgtEl>
+                                        <p:attrNameLst>
+                                          <p:attrName>style.visibility</p:attrName>
+                                        </p:attrNameLst>
+                                      </p:cBhvr>
+                                      <p:to>
+                                        <p:strVal val="visible"/>
+                                      </p:to>
+                                    </p:set>
+                                    <p:animEffect transition="in" filter="fade">
+                                      <p:cBhvr>
+                                        <p:cTn id="21" dur="500"/>
+                                        <p:tgtEl>
+                                          <p:spTgt spid="12"/>
+                                        </p:tgtEl>
+                                      </p:cBhvr>
+                                    </p:animEffect>
+                                  </p:childTnLst>
+                                </p:cTn>
+                              </p:par>
+                              <p:par>
+                                <p:cTn id="22" presetID="10" presetClass="entr" presetSubtype="0" fill="hold" grpId="0" nodeType="withEffect">
+                                  <p:stCondLst>
+                                    <p:cond delay="550"/>
+                                  </p:stCondLst>
+                                  <p:childTnLst>
+                                    <p:set>
+                                      <p:cBhvr>
+                                        <p:cTn id="23" dur="1" fill="hold">
+                                          <p:stCondLst>
+                                            <p:cond delay="0"/>
+                                          </p:stCondLst>
+                                        </p:cTn>
+                                        <p:tgtEl>
+                                          <p:spTgt spid="6"/>
+                                        </p:tgtEl>
+                                        <p:attrNameLst>
+                                          <p:attrName>style.visibility</p:attrName>
+                                        </p:attrNameLst>
+                                      </p:cBhvr>
+                                      <p:to>
+                                        <p:strVal val="visible"/>
+                                      </p:to>
+                                    </p:set>
+                                    <p:animEffect transition="in" filter="fade">
+                                      <p:cBhvr>
+                                        <p:cTn id="24" dur="500"/>
+                                        <p:tgtEl>
+                                          <p:spTgt spid="6"/>
+                                        </p:tgtEl>
+                                      </p:cBhvr>
+                                    </p:animEffect>
+                                  </p:childTnLst>
+                                </p:cTn>
+                              </p:par>
+                              <p:par>
+                                <p:cTn id="25" presetID="10" presetClass="entr" presetSubtype="0" fill="hold" grpId="0" nodeType="withEffect">
+                                  <p:stCondLst>
+                                    <p:cond delay="550"/>
+                                  </p:stCondLst>
+                                  <p:childTnLst>
+                                    <p:set>
+                                      <p:cBhvr>
+                                        <p:cTn id="26" dur="1" fill="hold">
+                                          <p:stCondLst>
+                                            <p:cond delay="0"/>
+                                          </p:stCondLst>
+                                        </p:cTn>
+                                        <p:tgtEl>
+                                          <p:spTgt spid="14"/>
+                                        </p:tgtEl>
+                                        <p:attrNameLst>
+                                          <p:attrName>style.visibility</p:attrName>
+                                        </p:attrNameLst>
+                                      </p:cBhvr>
+                                      <p:to>
+                                        <p:strVal val="visible"/>
+                                      </p:to>
+                                    </p:set>
+                                    <p:animEffect transition="in" filter="fade">
+                                      <p:cBhvr>
+                                        <p:cTn id="27" dur="500"/>
+                                        <p:tgtEl>
+                                          <p:spTgt spid="14"/>
+                                        </p:tgtEl>
+                                      </p:cBhvr>
+                                    </p:animEffect>
+                                  </p:childTnLst>
+                                </p:cTn>
+                              </p:par>
+                              <p:par>
+                                <p:cTn id="28" presetID="10" presetClass="entr" presetSubtype="0" fill="hold" grpId="0" nodeType="withEffect">
+                                  <p:stCondLst>
+                                    <p:cond delay="550"/>
+                                  </p:stCondLst>
+                                  <p:childTnLst>
+                                    <p:set>
+                                      <p:cBhvr>
+                                        <p:cTn id="29" dur="1" fill="hold">
+                                          <p:stCondLst>
+                                            <p:cond delay="0"/>
+                                          </p:stCondLst>
+                                        </p:cTn>
+                                        <p:tgtEl>
+                                          <p:spTgt spid="16"/>
+                                        </p:tgtEl>
+                                        <p:attrNameLst>
+                                          <p:attrName>style.visibility</p:attrName>
+                                        </p:attrNameLst>
+                                      </p:cBhvr>
+                                      <p:to>
+                                        <p:strVal val="visible"/>
+                                      </p:to>
+                                    </p:set>
+                                    <p:animEffect transition="in" filter="fade">
+                                      <p:cBhvr>
+                                        <p:cTn id="30" dur="500"/>
+                                        <p:tgtEl>
+                                          <p:spTgt spid="16"/>
+                                        </p:tgtEl>
+                                      </p:cBhvr>
+                                    </p:animEffect>
+                                  </p:childTnLst>
+                                </p:cTn>
+                              </p:par>
+                              <p:par>
+                                <p:cTn id="31" presetID="10" presetClass="entr" presetSubtype="0" fill="hold" grpId="0" nodeType="withEffect">
+                                  <p:stCondLst>
+                                    <p:cond delay="900"/>
+                                  </p:stCondLst>
+                                  <p:childTnLst>
+                                    <p:set>
+                                      <p:cBhvr>
+                                        <p:cTn id="32" dur="1" fill="hold">
+                                          <p:stCondLst>
+                                            <p:cond delay="0"/>
+                                          </p:stCondLst>
+                                        </p:cTn>
+                                        <p:tgtEl>
+                                          <p:spTgt spid="18"/>
+                                        </p:tgtEl>
+                                        <p:attrNameLst>
+                                          <p:attrName>style.visibility</p:attrName>
+                                        </p:attrNameLst>
+                                      </p:cBhvr>
+                                      <p:to>
+                                        <p:strVal val="visible"/>
+                                      </p:to>
+                                    </p:set>
+                                    <p:animEffect transition="in" filter="fade">
+                                      <p:cBhvr>
+                                        <p:cTn id="33" dur="500"/>
+                                        <p:tgtEl>
+                                          <p:spTgt spid="18"/>
+                                        </p:tgtEl>
+                                      </p:cBhvr>
+                                    </p:animEffect>
+                                  </p:childTnLst>
+                                </p:cTn>
+                              </p:par>
+                              <p:par>
+                                <p:cTn id="34" presetID="10" presetClass="entr" presetSubtype="0" fill="hold" grpId="0" nodeType="withEffect">
+                                  <p:stCondLst>
+                                    <p:cond delay="900"/>
+                                  </p:stCondLst>
+                                  <p:childTnLst>
+                                    <p:set>
+                                      <p:cBhvr>
+                                        <p:cTn id="35" dur="1" fill="hold">
+                                          <p:stCondLst>
+                                            <p:cond delay="0"/>
+                                          </p:stCondLst>
+                                        </p:cTn>
+                                        <p:tgtEl>
+                                          <p:spTgt spid="19"/>
+                                        </p:tgtEl>
+                                        <p:attrNameLst>
+                                          <p:attrName>style.visibility</p:attrName>
+                                        </p:attrNameLst>
+                                      </p:cBhvr>
+                                      <p:to>
+                                        <p:strVal val="visible"/>
+                                      </p:to>
+                                    </p:set>
+                                    <p:animEffect transition="in" filter="fade">
+                                      <p:cBhvr>
+                                        <p:cTn id="36" dur="500"/>
+                                        <p:tgtEl>
+                                          <p:spTgt spid="19"/>
+                                        </p:tgtEl>
+                                      </p:cBhvr>
+                                    </p:animEffect>
+                                  </p:childTnLst>
+                                </p:cTn>
+                              </p:par>
+                              <p:par>
+                                <p:cTn id="37" presetID="10" presetClass="entr" presetSubtype="0" fill="hold" grpId="0" nodeType="withEffect">
+                                  <p:stCondLst>
+                                    <p:cond delay="900"/>
+                                  </p:stCondLst>
+                                  <p:childTnLst>
+                                    <p:set>
+                                      <p:cBhvr>
+                                        <p:cTn id="38" dur="1" fill="hold">
+                                          <p:stCondLst>
+                                            <p:cond delay="0"/>
+                                          </p:stCondLst>
+                                        </p:cTn>
+                                        <p:tgtEl>
+                                          <p:spTgt spid="13"/>
+                                        </p:tgtEl>
+                                        <p:attrNameLst>
+                                          <p:attrName>style.visibility</p:attrName>
+                                        </p:attrNameLst>
+                                      </p:cBhvr>
+                                      <p:to>
+                                        <p:strVal val="visible"/>
+                                      </p:to>
+                                    </p:set>
+                                    <p:animEffect transition="in" filter="fade">
+                                      <p:cBhvr>
+                                        <p:cTn id="39" dur="500"/>
+                                        <p:tgtEl>
+                                          <p:spTgt spid="13"/>
+                                        </p:tgtEl>
+                                      </p:cBhvr>
+                                    </p:animEffect>
+                                  </p:childTnLst>
+                                </p:cTn>
+                              </p:par>
+                              <p:par>
+                                <p:cTn id="40" presetID="10" presetClass="entr" presetSubtype="0" fill="hold" grpId="0" nodeType="withEffect">
+                                  <p:stCondLst>
+                                    <p:cond delay="900"/>
+                                  </p:stCondLst>
+                                  <p:childTnLst>
+                                    <p:set>
+                                      <p:cBhvr>
+                                        <p:cTn id="41" dur="1" fill="hold">
+                                          <p:stCondLst>
+                                            <p:cond delay="0"/>
+                                          </p:stCondLst>
+                                        </p:cTn>
+                                        <p:tgtEl>
+                                          <p:spTgt spid="21"/>
+                                        </p:tgtEl>
+                                        <p:attrNameLst>
+                                          <p:attrName>style.visibility</p:attrName>
+                                        </p:attrNameLst>
+                                      </p:cBhvr>
+                                      <p:to>
+                                        <p:strVal val="visible"/>
+                                      </p:to>
+                                    </p:set>
+                                    <p:animEffect transition="in" filter="fade">
+                                      <p:cBhvr>
+                                        <p:cTn id="42" dur="500"/>
+                                        <p:tgtEl>
+                                          <p:spTgt spid="21"/>
+                                        </p:tgtEl>
+                                      </p:cBhvr>
+                                    </p:animEffect>
+                                  </p:childTnLst>
+                                </p:cTn>
+                              </p:par>
+                              <p:par>
+                                <p:cTn id="43" presetID="10" presetClass="entr" presetSubtype="0" fill="hold" grpId="0" nodeType="withEffect">
+                                  <p:stCondLst>
+                                    <p:cond delay="900"/>
+                                  </p:stCondLst>
+                                  <p:childTnLst>
+                                    <p:set>
+                                      <p:cBhvr>
+                                        <p:cTn id="44" dur="1" fill="hold">
+                                          <p:stCondLst>
+                                            <p:cond delay="0"/>
+                                          </p:stCondLst>
+                                        </p:cTn>
+                                        <p:tgtEl>
+                                          <p:spTgt spid="23"/>
+                                        </p:tgtEl>
+                                        <p:attrNameLst>
+                                          <p:attrName>style.visibility</p:attrName>
+                                        </p:attrNameLst>
+                                      </p:cBhvr>
+                                      <p:to>
+                                        <p:strVal val="visible"/>
+                                      </p:to>
+                                    </p:set>
+                                    <p:animEffect transition="in" filter="fade">
+                                      <p:cBhvr>
+                                        <p:cTn id="45" dur="500"/>
+                                        <p:tgtEl>
+                                          <p:spTgt spid="23"/>
+                                        </p:tgtEl>
+                                      </p:cBhvr>
+                                    </p:animEffect>
+                                  </p:childTnLst>
+                                </p:cTn>
+                              </p:par>
+                              <p:par>
+                                <p:cTn id="46" presetID="10" presetClass="entr" presetSubtype="0" fill="hold" grpId="0" nodeType="withEffect">
+                                  <p:stCondLst>
+                                    <p:cond delay="1250"/>
+                                  </p:stCondLst>
+                                  <p:childTnLst>
+                                    <p:set>
+                                      <p:cBhvr>
+                                        <p:cTn id="47" dur="1" fill="hold">
+                                          <p:stCondLst>
+                                            <p:cond delay="0"/>
+                                          </p:stCondLst>
+                                        </p:cTn>
+                                        <p:tgtEl>
+                                          <p:spTgt spid="25"/>
+                                        </p:tgtEl>
+                                        <p:attrNameLst>
+                                          <p:attrName>style.visibility</p:attrName>
+                                        </p:attrNameLst>
+                                      </p:cBhvr>
+                                      <p:to>
+                                        <p:strVal val="visible"/>
+                                      </p:to>
+                                    </p:set>
+                                    <p:animEffect transition="in" filter="fade">
+                                      <p:cBhvr>
+                                        <p:cTn id="48" dur="500"/>
+                                        <p:tgtEl>
+                                          <p:spTgt spid="25"/>
+                                        </p:tgtEl>
+                                      </p:cBhvr>
+                                    </p:animEffect>
+                                  </p:childTnLst>
+                                </p:cTn>
+                              </p:par>
+                              <p:par>
+                                <p:cTn id="49" presetID="10" presetClass="entr" presetSubtype="0" fill="hold" grpId="0" nodeType="withEffect">
+                                  <p:stCondLst>
+                                    <p:cond delay="1250"/>
+                                  </p:stCondLst>
+                                  <p:childTnLst>
+                                    <p:set>
+                                      <p:cBhvr>
+                                        <p:cTn id="50" dur="1" fill="hold">
+                                          <p:stCondLst>
+                                            <p:cond delay="0"/>
+                                          </p:stCondLst>
+                                        </p:cTn>
+                                        <p:tgtEl>
+                                          <p:spTgt spid="26"/>
+                                        </p:tgtEl>
+                                        <p:attrNameLst>
+                                          <p:attrName>style.visibility</p:attrName>
+                                        </p:attrNameLst>
+                                      </p:cBhvr>
+                                      <p:to>
+                                        <p:strVal val="visible"/>
+                                      </p:to>
+                                    </p:set>
+                                    <p:animEffect transition="in" filter="fade">
+                                      <p:cBhvr>
+                                        <p:cTn id="51" dur="500"/>
+                                        <p:tgtEl>
+                                          <p:spTgt spid="26"/>
+                                        </p:tgtEl>
+                                      </p:cBhvr>
+                                    </p:animEffect>
+                                  </p:childTnLst>
+                                </p:cTn>
+                              </p:par>
+                              <p:par>
+                                <p:cTn id="52" presetID="10" presetClass="entr" presetSubtype="0" fill="hold" grpId="0" nodeType="withEffect">
+                                  <p:stCondLst>
+                                    <p:cond delay="1250"/>
+                                  </p:stCondLst>
+                                  <p:childTnLst>
+                                    <p:set>
+                                      <p:cBhvr>
+                                        <p:cTn id="53" dur="1" fill="hold">
+                                          <p:stCondLst>
+                                            <p:cond delay="0"/>
+                                          </p:stCondLst>
+                                        </p:cTn>
+                                        <p:tgtEl>
+                                          <p:spTgt spid="20"/>
+                                        </p:tgtEl>
+                                        <p:attrNameLst>
+                                          <p:attrName>style.visibility</p:attrName>
+                                        </p:attrNameLst>
+                                      </p:cBhvr>
+                                      <p:to>
+                                        <p:strVal val="visible"/>
+                                      </p:to>
+                                    </p:set>
+                                    <p:animEffect transition="in" filter="fade">
+                                      <p:cBhvr>
+                                        <p:cTn id="54" dur="500"/>
+                                        <p:tgtEl>
+                                          <p:spTgt spid="20"/>
+                                        </p:tgtEl>
+                                      </p:cBhvr>
+                                    </p:animEffect>
+                                  </p:childTnLst>
+                                </p:cTn>
+                              </p:par>
+                              <p:par>
+                                <p:cTn id="55" presetID="10" presetClass="entr" presetSubtype="0" fill="hold" grpId="0" nodeType="withEffect">
+                                  <p:stCondLst>
+                                    <p:cond delay="1250"/>
+                                  </p:stCondLst>
+                                  <p:childTnLst>
+                                    <p:set>
+                                      <p:cBhvr>
+                                        <p:cTn id="56" dur="1" fill="hold">
+                                          <p:stCondLst>
+                                            <p:cond delay="0"/>
+                                          </p:stCondLst>
+                                        </p:cTn>
+                                        <p:tgtEl>
+                                          <p:spTgt spid="27"/>
+                                        </p:tgtEl>
+                                        <p:attrNameLst>
+                                          <p:attrName>style.visibility</p:attrName>
+                                        </p:attrNameLst>
+                                      </p:cBhvr>
+                                      <p:to>
+                                        <p:strVal val="visible"/>
+                                      </p:to>
+                                    </p:set>
+                                    <p:animEffect transition="in" filter="fade">
+                                      <p:cBhvr>
+                                        <p:cTn id="57" dur="500"/>
+                                        <p:tgtEl>
+                                          <p:spTgt spid="27"/>
+                                        </p:tgtEl>
+                                      </p:cBhvr>
+                                    </p:animEffect>
+                                  </p:childTnLst>
+                                </p:cTn>
+                              </p:par>
+                              <p:par>
+                                <p:cTn id="58" presetID="10" presetClass="entr" presetSubtype="0" fill="hold" grpId="0" nodeType="withEffect">
+                                  <p:stCondLst>
+                                    <p:cond delay="1250"/>
+                                  </p:stCondLst>
+                                  <p:childTnLst>
+                                    <p:set>
+                                      <p:cBhvr>
+                                        <p:cTn id="59" dur="1" fill="hold">
+                                          <p:stCondLst>
+                                            <p:cond delay="0"/>
+                                          </p:stCondLst>
+                                        </p:cTn>
+                                        <p:tgtEl>
+                                          <p:spTgt spid="29"/>
+                                        </p:tgtEl>
+                                        <p:attrNameLst>
+                                          <p:attrName>style.visibility</p:attrName>
+                                        </p:attrNameLst>
+                                      </p:cBhvr>
+                                      <p:to>
+                                        <p:strVal val="visible"/>
+                                      </p:to>
+                                    </p:set>
+                                    <p:animEffect transition="in" filter="fade">
+                                      <p:cBhvr>
+                                        <p:cTn id="60" dur="500"/>
+                                        <p:tgtEl>
+                                          <p:spTgt spid="29"/>
+                                        </p:tgtEl>
+                                      </p:cBhvr>
+                                    </p:animEffect>
+                                  </p:childTnLst>
+                                </p:cTn>
+                              </p:par>
+                              <p:par>
+                                <p:cTn id="61" presetID="10" presetClass="entr" presetSubtype="0" fill="hold" grpId="0" nodeType="withEffect">
+                                  <p:stCondLst>
+                                    <p:cond delay="1600"/>
+                                  </p:stCondLst>
+                                  <p:childTnLst>
+                                    <p:set>
+                                      <p:cBhvr>
+                                        <p:cTn id="62" dur="1" fill="hold">
+                                          <p:stCondLst>
+                                            <p:cond delay="0"/>
+                                          </p:stCondLst>
+                                        </p:cTn>
+                                        <p:tgtEl>
+                                          <p:spTgt spid="31"/>
+                                        </p:tgtEl>
+                                        <p:attrNameLst>
+                                          <p:attrName>style.visibility</p:attrName>
+                                        </p:attrNameLst>
+                                      </p:cBhvr>
+                                      <p:to>
+                                        <p:strVal val="visible"/>
+                                      </p:to>
+                                    </p:set>
+                                    <p:animEffect transition="in" filter="fade">
+                                      <p:cBhvr>
+                                        <p:cTn id="63" dur="500"/>
+                                        <p:tgtEl>
+                                          <p:spTgt spid="31"/>
+                                        </p:tgtEl>
+                                      </p:cBhvr>
+                                    </p:animEffect>
+                                  </p:childTnLst>
+                                </p:cTn>
+                              </p:par>
+                            </p:childTnLst>
+                          </p:cTn>
+                        </p:par>
+                      </p:childTnLst>
+                    </p:cTn>
+                  </p:par>
+                </p:childTnLst>
+              </p:cTn>
+              <p:prevCondLst>
+                <p:cond evt="onPrev" delay="0">
+                  <p:tgtEl>
+                    <p:sldTgt/>
+                  </p:tgtEl>
+                </p:cond>
+              </p:prevCondLst>
+              <p:nextCondLst>
+                <p:cond evt="onNext" delay="0">
+                  <p:tgtEl>
+                    <p:sldTgt/>
+                  </p:tgtEl>
+                </p:cond>
+              </p:nextCondLst>
+            </p:seq>
+          </p:childTnLst>
+        </p:cTn>
+      </p:par>
+    </p:tnLst>
+    <p:bldLst>
+      <p:bldP spid="4" grpId="0" animBg="1"/>
+      <p:bldP spid="5" grpId="0" animBg="1"/>
+      <p:bldP spid="7" grpId="0" animBg="1"/>
+      <p:bldP spid="9" grpId="0" animBg="1"/>
+      <p:bldP spid="11" grpId="0" animBg="1"/>
+      <p:bldP spid="12" grpId="0" animBg="1"/>
+      <p:bldP spid="6" grpId="0" animBg="1"/>
+      <p:bldP spid="14" grpId="0" animBg="1"/>
+      <p:bldP spid="16" grpId="0" animBg="1"/>
+      <p:bldP spid="18" grpId="0" animBg="1"/>
+      <p:bldP spid="19" grpId="0" animBg="1"/>
+      <p:bldP spid="13" grpId="0" animBg="1"/>
+      <p:bldP spid="21" grpId="0" animBg="1"/>
+      <p:bldP spid="23" grpId="0" animBg="1"/>
+      <p:bldP spid="25" grpId="0" animBg="1"/>
+      <p:bldP spid="26" grpId="0" animBg="1"/>
+      <p:bldP spid="20" grpId="0" animBg="1"/>
+      <p:bldP spid="27" grpId="0" animBg="1"/>
+      <p:bldP spid="29" grpId="0" animBg="1"/>
+      <p:bldP spid="31" grpId="0" animBg="1"/>
+    </p:bldLst>
+  </p:timing>
 </p:sld>
 </file>
 
@@ -13674,6 +18624,566 @@
   <p:clrMapOvr>
     <a:masterClrMapping/>
   </p:clrMapOvr>
+  <p:transition spd="med">
+    <p:fade/>
+  </p:transition>
+  <p:timing>
+    <p:tnLst>
+      <p:par>
+        <p:cTn id="1" dur="indefinite" restart="never" nodeType="tmRoot">
+          <p:childTnLst>
+            <p:seq concurrent="1" nextAc="seek">
+              <p:cTn id="2" dur="indefinite" nodeType="mainSeq">
+                <p:childTnLst>
+                  <p:par>
+                    <p:cTn id="3" fill="hold">
+                      <p:stCondLst>
+                        <p:cond delay="indefinite"/>
+                        <p:cond evt="onBegin" delay="0">
+                          <p:tn val="2"/>
+                        </p:cond>
+                      </p:stCondLst>
+                      <p:childTnLst>
+                        <p:par>
+                          <p:cTn id="46" fill="hold">
+                            <p:stCondLst>
+                              <p:cond delay="0"/>
+                            </p:stCondLst>
+                            <p:childTnLst>
+                              <p:par>
+                                <p:cTn id="4" presetID="10" presetClass="entr" presetSubtype="0" fill="hold" grpId="0" nodeType="withEffect">
+                                  <p:stCondLst>
+                                    <p:cond delay="200"/>
+                                  </p:stCondLst>
+                                  <p:childTnLst>
+                                    <p:set>
+                                      <p:cBhvr>
+                                        <p:cTn id="5" dur="1" fill="hold">
+                                          <p:stCondLst>
+                                            <p:cond delay="0"/>
+                                          </p:stCondLst>
+                                        </p:cTn>
+                                        <p:tgtEl>
+                                          <p:spTgt spid="4"/>
+                                        </p:tgtEl>
+                                        <p:attrNameLst>
+                                          <p:attrName>style.visibility</p:attrName>
+                                        </p:attrNameLst>
+                                      </p:cBhvr>
+                                      <p:to>
+                                        <p:strVal val="visible"/>
+                                      </p:to>
+                                    </p:set>
+                                    <p:animEffect transition="in" filter="fade">
+                                      <p:cBhvr>
+                                        <p:cTn id="6" dur="500"/>
+                                        <p:tgtEl>
+                                          <p:spTgt spid="4"/>
+                                        </p:tgtEl>
+                                      </p:cBhvr>
+                                    </p:animEffect>
+                                  </p:childTnLst>
+                                </p:cTn>
+                              </p:par>
+                              <p:par>
+                                <p:cTn id="7" presetID="10" presetClass="entr" presetSubtype="0" fill="hold" grpId="0" nodeType="withEffect">
+                                  <p:stCondLst>
+                                    <p:cond delay="200"/>
+                                  </p:stCondLst>
+                                  <p:childTnLst>
+                                    <p:set>
+                                      <p:cBhvr>
+                                        <p:cTn id="8" dur="1" fill="hold">
+                                          <p:stCondLst>
+                                            <p:cond delay="0"/>
+                                          </p:stCondLst>
+                                        </p:cTn>
+                                        <p:tgtEl>
+                                          <p:spTgt spid="6"/>
+                                        </p:tgtEl>
+                                        <p:attrNameLst>
+                                          <p:attrName>style.visibility</p:attrName>
+                                        </p:attrNameLst>
+                                      </p:cBhvr>
+                                      <p:to>
+                                        <p:strVal val="visible"/>
+                                      </p:to>
+                                    </p:set>
+                                    <p:animEffect transition="in" filter="fade">
+                                      <p:cBhvr>
+                                        <p:cTn id="9" dur="500"/>
+                                        <p:tgtEl>
+                                          <p:spTgt spid="6"/>
+                                        </p:tgtEl>
+                                      </p:cBhvr>
+                                    </p:animEffect>
+                                  </p:childTnLst>
+                                </p:cTn>
+                              </p:par>
+                              <p:par>
+                                <p:cTn id="10" presetID="10" presetClass="entr" presetSubtype="0" fill="hold" grpId="0" nodeType="withEffect">
+                                  <p:stCondLst>
+                                    <p:cond delay="200"/>
+                                  </p:stCondLst>
+                                  <p:childTnLst>
+                                    <p:set>
+                                      <p:cBhvr>
+                                        <p:cTn id="11" dur="1" fill="hold">
+                                          <p:stCondLst>
+                                            <p:cond delay="0"/>
+                                          </p:stCondLst>
+                                        </p:cTn>
+                                        <p:tgtEl>
+                                          <p:spTgt spid="8"/>
+                                        </p:tgtEl>
+                                        <p:attrNameLst>
+                                          <p:attrName>style.visibility</p:attrName>
+                                        </p:attrNameLst>
+                                      </p:cBhvr>
+                                      <p:to>
+                                        <p:strVal val="visible"/>
+                                      </p:to>
+                                    </p:set>
+                                    <p:animEffect transition="in" filter="fade">
+                                      <p:cBhvr>
+                                        <p:cTn id="12" dur="500"/>
+                                        <p:tgtEl>
+                                          <p:spTgt spid="8"/>
+                                        </p:tgtEl>
+                                      </p:cBhvr>
+                                    </p:animEffect>
+                                  </p:childTnLst>
+                                </p:cTn>
+                              </p:par>
+                              <p:par>
+                                <p:cTn id="13" presetID="10" presetClass="entr" presetSubtype="0" fill="hold" grpId="0" nodeType="withEffect">
+                                  <p:stCondLst>
+                                    <p:cond delay="200"/>
+                                  </p:stCondLst>
+                                  <p:childTnLst>
+                                    <p:set>
+                                      <p:cBhvr>
+                                        <p:cTn id="14" dur="1" fill="hold">
+                                          <p:stCondLst>
+                                            <p:cond delay="0"/>
+                                          </p:stCondLst>
+                                        </p:cTn>
+                                        <p:tgtEl>
+                                          <p:spTgt spid="10"/>
+                                        </p:tgtEl>
+                                        <p:attrNameLst>
+                                          <p:attrName>style.visibility</p:attrName>
+                                        </p:attrNameLst>
+                                      </p:cBhvr>
+                                      <p:to>
+                                        <p:strVal val="visible"/>
+                                      </p:to>
+                                    </p:set>
+                                    <p:animEffect transition="in" filter="fade">
+                                      <p:cBhvr>
+                                        <p:cTn id="15" dur="500"/>
+                                        <p:tgtEl>
+                                          <p:spTgt spid="10"/>
+                                        </p:tgtEl>
+                                      </p:cBhvr>
+                                    </p:animEffect>
+                                  </p:childTnLst>
+                                </p:cTn>
+                              </p:par>
+                              <p:par>
+                                <p:cTn id="16" presetID="10" presetClass="entr" presetSubtype="0" fill="hold" grpId="0" nodeType="withEffect">
+                                  <p:stCondLst>
+                                    <p:cond delay="200"/>
+                                  </p:stCondLst>
+                                  <p:childTnLst>
+                                    <p:set>
+                                      <p:cBhvr>
+                                        <p:cTn id="17" dur="1" fill="hold">
+                                          <p:stCondLst>
+                                            <p:cond delay="0"/>
+                                          </p:stCondLst>
+                                        </p:cTn>
+                                        <p:tgtEl>
+                                          <p:spTgt spid="5"/>
+                                        </p:tgtEl>
+                                        <p:attrNameLst>
+                                          <p:attrName>style.visibility</p:attrName>
+                                        </p:attrNameLst>
+                                      </p:cBhvr>
+                                      <p:to>
+                                        <p:strVal val="visible"/>
+                                      </p:to>
+                                    </p:set>
+                                    <p:animEffect transition="in" filter="fade">
+                                      <p:cBhvr>
+                                        <p:cTn id="18" dur="500"/>
+                                        <p:tgtEl>
+                                          <p:spTgt spid="5"/>
+                                        </p:tgtEl>
+                                      </p:cBhvr>
+                                    </p:animEffect>
+                                  </p:childTnLst>
+                                </p:cTn>
+                              </p:par>
+                              <p:par>
+                                <p:cTn id="19" presetID="10" presetClass="entr" presetSubtype="0" fill="hold" grpId="0" nodeType="withEffect">
+                                  <p:stCondLst>
+                                    <p:cond delay="200"/>
+                                  </p:stCondLst>
+                                  <p:childTnLst>
+                                    <p:set>
+                                      <p:cBhvr>
+                                        <p:cTn id="20" dur="1" fill="hold">
+                                          <p:stCondLst>
+                                            <p:cond delay="0"/>
+                                          </p:stCondLst>
+                                        </p:cTn>
+                                        <p:tgtEl>
+                                          <p:spTgt spid="7"/>
+                                        </p:tgtEl>
+                                        <p:attrNameLst>
+                                          <p:attrName>style.visibility</p:attrName>
+                                        </p:attrNameLst>
+                                      </p:cBhvr>
+                                      <p:to>
+                                        <p:strVal val="visible"/>
+                                      </p:to>
+                                    </p:set>
+                                    <p:animEffect transition="in" filter="fade">
+                                      <p:cBhvr>
+                                        <p:cTn id="21" dur="500"/>
+                                        <p:tgtEl>
+                                          <p:spTgt spid="7"/>
+                                        </p:tgtEl>
+                                      </p:cBhvr>
+                                    </p:animEffect>
+                                  </p:childTnLst>
+                                </p:cTn>
+                              </p:par>
+                              <p:par>
+                                <p:cTn id="22" presetID="10" presetClass="entr" presetSubtype="0" fill="hold" grpId="0" nodeType="withEffect">
+                                  <p:stCondLst>
+                                    <p:cond delay="200"/>
+                                  </p:stCondLst>
+                                  <p:childTnLst>
+                                    <p:set>
+                                      <p:cBhvr>
+                                        <p:cTn id="23" dur="1" fill="hold">
+                                          <p:stCondLst>
+                                            <p:cond delay="0"/>
+                                          </p:stCondLst>
+                                        </p:cTn>
+                                        <p:tgtEl>
+                                          <p:spTgt spid="9"/>
+                                        </p:tgtEl>
+                                        <p:attrNameLst>
+                                          <p:attrName>style.visibility</p:attrName>
+                                        </p:attrNameLst>
+                                      </p:cBhvr>
+                                      <p:to>
+                                        <p:strVal val="visible"/>
+                                      </p:to>
+                                    </p:set>
+                                    <p:animEffect transition="in" filter="fade">
+                                      <p:cBhvr>
+                                        <p:cTn id="24" dur="500"/>
+                                        <p:tgtEl>
+                                          <p:spTgt spid="9"/>
+                                        </p:tgtEl>
+                                      </p:cBhvr>
+                                    </p:animEffect>
+                                  </p:childTnLst>
+                                </p:cTn>
+                              </p:par>
+                              <p:par>
+                                <p:cTn id="25" presetID="10" presetClass="entr" presetSubtype="0" fill="hold" grpId="0" nodeType="withEffect">
+                                  <p:stCondLst>
+                                    <p:cond delay="200"/>
+                                  </p:stCondLst>
+                                  <p:childTnLst>
+                                    <p:set>
+                                      <p:cBhvr>
+                                        <p:cTn id="26" dur="1" fill="hold">
+                                          <p:stCondLst>
+                                            <p:cond delay="0"/>
+                                          </p:stCondLst>
+                                        </p:cTn>
+                                        <p:tgtEl>
+                                          <p:spTgt spid="11"/>
+                                        </p:tgtEl>
+                                        <p:attrNameLst>
+                                          <p:attrName>style.visibility</p:attrName>
+                                        </p:attrNameLst>
+                                      </p:cBhvr>
+                                      <p:to>
+                                        <p:strVal val="visible"/>
+                                      </p:to>
+                                    </p:set>
+                                    <p:animEffect transition="in" filter="fade">
+                                      <p:cBhvr>
+                                        <p:cTn id="27" dur="500"/>
+                                        <p:tgtEl>
+                                          <p:spTgt spid="11"/>
+                                        </p:tgtEl>
+                                      </p:cBhvr>
+                                    </p:animEffect>
+                                  </p:childTnLst>
+                                </p:cTn>
+                              </p:par>
+                              <p:par>
+                                <p:cTn id="28" presetID="10" presetClass="entr" presetSubtype="0" fill="hold" grpId="0" nodeType="withEffect">
+                                  <p:stCondLst>
+                                    <p:cond delay="550"/>
+                                  </p:stCondLst>
+                                  <p:childTnLst>
+                                    <p:set>
+                                      <p:cBhvr>
+                                        <p:cTn id="29" dur="1" fill="hold">
+                                          <p:stCondLst>
+                                            <p:cond delay="0"/>
+                                          </p:stCondLst>
+                                        </p:cTn>
+                                        <p:tgtEl>
+                                          <p:spTgt spid="13"/>
+                                        </p:tgtEl>
+                                        <p:attrNameLst>
+                                          <p:attrName>style.visibility</p:attrName>
+                                        </p:attrNameLst>
+                                      </p:cBhvr>
+                                      <p:to>
+                                        <p:strVal val="visible"/>
+                                      </p:to>
+                                    </p:set>
+                                    <p:animEffect transition="in" filter="fade">
+                                      <p:cBhvr>
+                                        <p:cTn id="30" dur="500"/>
+                                        <p:tgtEl>
+                                          <p:spTgt spid="13"/>
+                                        </p:tgtEl>
+                                      </p:cBhvr>
+                                    </p:animEffect>
+                                  </p:childTnLst>
+                                </p:cTn>
+                              </p:par>
+                              <p:par>
+                                <p:cTn id="31" presetID="10" presetClass="entr" presetSubtype="0" fill="hold" grpId="0" nodeType="withEffect">
+                                  <p:stCondLst>
+                                    <p:cond delay="550"/>
+                                  </p:stCondLst>
+                                  <p:childTnLst>
+                                    <p:set>
+                                      <p:cBhvr>
+                                        <p:cTn id="32" dur="1" fill="hold">
+                                          <p:stCondLst>
+                                            <p:cond delay="0"/>
+                                          </p:stCondLst>
+                                        </p:cTn>
+                                        <p:tgtEl>
+                                          <p:spTgt spid="14"/>
+                                        </p:tgtEl>
+                                        <p:attrNameLst>
+                                          <p:attrName>style.visibility</p:attrName>
+                                        </p:attrNameLst>
+                                      </p:cBhvr>
+                                      <p:to>
+                                        <p:strVal val="visible"/>
+                                      </p:to>
+                                    </p:set>
+                                    <p:animEffect transition="in" filter="fade">
+                                      <p:cBhvr>
+                                        <p:cTn id="33" dur="500"/>
+                                        <p:tgtEl>
+                                          <p:spTgt spid="14"/>
+                                        </p:tgtEl>
+                                      </p:cBhvr>
+                                    </p:animEffect>
+                                  </p:childTnLst>
+                                </p:cTn>
+                              </p:par>
+                              <p:par>
+                                <p:cTn id="34" presetID="10" presetClass="entr" presetSubtype="0" fill="hold" grpId="0" nodeType="withEffect">
+                                  <p:stCondLst>
+                                    <p:cond delay="900"/>
+                                  </p:stCondLst>
+                                  <p:childTnLst>
+                                    <p:set>
+                                      <p:cBhvr>
+                                        <p:cTn id="35" dur="1" fill="hold">
+                                          <p:stCondLst>
+                                            <p:cond delay="0"/>
+                                          </p:stCondLst>
+                                        </p:cTn>
+                                        <p:tgtEl>
+                                          <p:spTgt spid="16"/>
+                                        </p:tgtEl>
+                                        <p:attrNameLst>
+                                          <p:attrName>style.visibility</p:attrName>
+                                        </p:attrNameLst>
+                                      </p:cBhvr>
+                                      <p:to>
+                                        <p:strVal val="visible"/>
+                                      </p:to>
+                                    </p:set>
+                                    <p:animEffect transition="in" filter="fade">
+                                      <p:cBhvr>
+                                        <p:cTn id="36" dur="500"/>
+                                        <p:tgtEl>
+                                          <p:spTgt spid="16"/>
+                                        </p:tgtEl>
+                                      </p:cBhvr>
+                                    </p:animEffect>
+                                  </p:childTnLst>
+                                </p:cTn>
+                              </p:par>
+                              <p:par>
+                                <p:cTn id="37" presetID="10" presetClass="entr" presetSubtype="0" fill="hold" grpId="0" nodeType="withEffect">
+                                  <p:stCondLst>
+                                    <p:cond delay="900"/>
+                                  </p:stCondLst>
+                                  <p:childTnLst>
+                                    <p:set>
+                                      <p:cBhvr>
+                                        <p:cTn id="38" dur="1" fill="hold">
+                                          <p:stCondLst>
+                                            <p:cond delay="0"/>
+                                          </p:stCondLst>
+                                        </p:cTn>
+                                        <p:tgtEl>
+                                          <p:spTgt spid="17"/>
+                                        </p:tgtEl>
+                                        <p:attrNameLst>
+                                          <p:attrName>style.visibility</p:attrName>
+                                        </p:attrNameLst>
+                                      </p:cBhvr>
+                                      <p:to>
+                                        <p:strVal val="visible"/>
+                                      </p:to>
+                                    </p:set>
+                                    <p:animEffect transition="in" filter="fade">
+                                      <p:cBhvr>
+                                        <p:cTn id="39" dur="500"/>
+                                        <p:tgtEl>
+                                          <p:spTgt spid="17"/>
+                                        </p:tgtEl>
+                                      </p:cBhvr>
+                                    </p:animEffect>
+                                  </p:childTnLst>
+                                </p:cTn>
+                              </p:par>
+                              <p:par>
+                                <p:cTn id="40" presetID="10" presetClass="entr" presetSubtype="0" fill="hold" grpId="0" nodeType="withEffect">
+                                  <p:stCondLst>
+                                    <p:cond delay="1250"/>
+                                  </p:stCondLst>
+                                  <p:childTnLst>
+                                    <p:set>
+                                      <p:cBhvr>
+                                        <p:cTn id="41" dur="1" fill="hold">
+                                          <p:stCondLst>
+                                            <p:cond delay="0"/>
+                                          </p:stCondLst>
+                                        </p:cTn>
+                                        <p:tgtEl>
+                                          <p:spTgt spid="19"/>
+                                        </p:tgtEl>
+                                        <p:attrNameLst>
+                                          <p:attrName>style.visibility</p:attrName>
+                                        </p:attrNameLst>
+                                      </p:cBhvr>
+                                      <p:to>
+                                        <p:strVal val="visible"/>
+                                      </p:to>
+                                    </p:set>
+                                    <p:animEffect transition="in" filter="fade">
+                                      <p:cBhvr>
+                                        <p:cTn id="42" dur="500"/>
+                                        <p:tgtEl>
+                                          <p:spTgt spid="19"/>
+                                        </p:tgtEl>
+                                      </p:cBhvr>
+                                    </p:animEffect>
+                                  </p:childTnLst>
+                                </p:cTn>
+                              </p:par>
+                              <p:par>
+                                <p:cTn id="43" presetID="10" presetClass="entr" presetSubtype="0" fill="hold" grpId="0" nodeType="withEffect">
+                                  <p:stCondLst>
+                                    <p:cond delay="1250"/>
+                                  </p:stCondLst>
+                                  <p:childTnLst>
+                                    <p:set>
+                                      <p:cBhvr>
+                                        <p:cTn id="44" dur="1" fill="hold">
+                                          <p:stCondLst>
+                                            <p:cond delay="0"/>
+                                          </p:stCondLst>
+                                        </p:cTn>
+                                        <p:tgtEl>
+                                          <p:spTgt spid="20"/>
+                                        </p:tgtEl>
+                                        <p:attrNameLst>
+                                          <p:attrName>style.visibility</p:attrName>
+                                        </p:attrNameLst>
+                                      </p:cBhvr>
+                                      <p:to>
+                                        <p:strVal val="visible"/>
+                                      </p:to>
+                                    </p:set>
+                                    <p:animEffect transition="in" filter="fade">
+                                      <p:cBhvr>
+                                        <p:cTn id="45" dur="500"/>
+                                        <p:tgtEl>
+                                          <p:spTgt spid="20"/>
+                                        </p:tgtEl>
+                                      </p:cBhvr>
+                                    </p:animEffect>
+                                  </p:childTnLst>
+                                </p:cTn>
+                              </p:par>
+                            </p:childTnLst>
+                          </p:cTn>
+                        </p:par>
+                      </p:childTnLst>
+                    </p:cTn>
+                  </p:par>
+                </p:childTnLst>
+              </p:cTn>
+              <p:prevCondLst>
+                <p:cond evt="onPrev" delay="0">
+                  <p:tgtEl>
+                    <p:sldTgt/>
+                  </p:tgtEl>
+                </p:cond>
+              </p:prevCondLst>
+              <p:nextCondLst>
+                <p:cond evt="onNext" delay="0">
+                  <p:tgtEl>
+                    <p:sldTgt/>
+                  </p:tgtEl>
+                </p:cond>
+              </p:nextCondLst>
+            </p:seq>
+          </p:childTnLst>
+        </p:cTn>
+      </p:par>
+    </p:tnLst>
+    <p:bldLst>
+      <p:bldP spid="4" grpId="0" animBg="1"/>
+      <p:bldP spid="6" grpId="0" animBg="1"/>
+      <p:bldP spid="8" grpId="0" animBg="1"/>
+      <p:bldP spid="10" grpId="0" animBg="1"/>
+      <p:bldP spid="5" grpId="0" animBg="1"/>
+      <p:bldP spid="7" grpId="0" animBg="1"/>
+      <p:bldP spid="9" grpId="0" animBg="1"/>
+      <p:bldP spid="11" grpId="0" animBg="1"/>
+      <p:bldP spid="13" grpId="0" animBg="1"/>
+      <p:bldP spid="14" grpId="0" animBg="1"/>
+      <p:bldP spid="16" grpId="0" animBg="1"/>
+      <p:bldP spid="17" grpId="0" animBg="1"/>
+      <p:bldP spid="19" grpId="0" animBg="1"/>
+      <p:bldP spid="20" grpId="0" animBg="1"/>
+    </p:bldLst>
+  </p:timing>
 </p:sld>
 </file>
 
@@ -13768,25 +19278,203 @@
           </a:p>
         </p:txBody>
       </p:sp>
-      <p:graphicFrame>
-        <p:nvGraphicFramePr>
-          <p:cNvPr id="4" name="分国家检索时长图" descr=""/>
-          <p:cNvGraphicFramePr/>
-          <p:nvPr/>
-        </p:nvGraphicFramePr>
-        <p:xfrm>
-          <a:off x="548640" y="1554480"/>
-          <a:ext cx="5486400" cy="4297680"/>
-        </p:xfrm>
-        <a:graphic xmlns:a="http://schemas.openxmlformats.org/drawingml/2006/main">
-          <a:graphicData uri="http://schemas.openxmlformats.org/drawingml/2006/chart">
-            <c:chart xmlns:c="http://schemas.openxmlformats.org/drawingml/2006/chart" r:id="rId1"/>
-          </a:graphicData>
-        </a:graphic>
-      </p:graphicFrame>
-      <p:sp>
-        <p:nvSpPr>
-          <p:cNvPr id="5" name="分隔线"/>
+      <p:sp>
+        <p:nvSpPr>
+          <p:cNvPr id="4" name="原图阴影"/>
+          <p:cNvSpPr/>
+          <p:nvPr/>
+        </p:nvSpPr>
+        <p:spPr>
+          <a:xfrm>
+            <a:off x="548640" y="1645920"/>
+            <a:ext cx="5486400" cy="3191256"/>
+          </a:xfrm>
+          <a:prstGeom prst="rect">
+            <a:avLst/>
+          </a:prstGeom>
+          <a:solidFill>
+            <a:srgbClr val="FFFFFF"/>
+          </a:solidFill>
+          <a:ln w="6350">
+            <a:solidFill>
+              <a:srgbClr val="E3E7EC"/>
+            </a:solidFill>
+            <a:prstDash val="solid"/>
+          </a:ln>
+          <a:effectLst>
+            <a:outerShdw sx="100000" sy="100000" kx="0" ky="0" algn="bl" rotWithShape="0" blurRad="177800" dist="50800" dir="5400000">
+              <a:srgbClr val="1F2A44">
+                <a:alpha val="18000"/>
+              </a:srgbClr>
+            </a:outerShdw>
+          </a:effectLst>
+        </p:spPr>
+      </p:sp>
+      <p:pic>
+        <p:nvPicPr>
+          <p:cNvPr id="5" name="原图" descr="/home/user/ppt/build/assets/daily_tv_usage_marked.jpg">    </p:cNvPr>
+          <p:cNvPicPr>
+            <a:picLocks noChangeAspect="1"/>
+          </p:cNvPicPr>
+          <p:nvPr/>
+        </p:nvPicPr>
+        <p:blipFill>
+          <a:blip r:embed="rId1"/>
+          <a:stretch>
+            <a:fillRect/>
+          </a:stretch>
+        </p:blipFill>
+        <p:spPr>
+          <a:xfrm>
+            <a:off x="548640" y="1645920"/>
+            <a:ext cx="5486400" cy="3191256"/>
+          </a:xfrm>
+          <a:prstGeom prst="rect">
+            <a:avLst/>
+          </a:prstGeom>
+        </p:spPr>
+      </p:pic>
+      <p:sp>
+        <p:nvSpPr>
+          <p:cNvPr id="6" name="原图说明"/>
+          <p:cNvSpPr txBox="1"/>
+          <p:nvPr/>
+        </p:nvSpPr>
+        <p:spPr>
+          <a:xfrm>
+            <a:off x="548640" y="4937760"/>
+            <a:ext cx="5486400" cy="320040"/>
+          </a:xfrm>
+          <a:prstGeom prst="rect">
+            <a:avLst/>
+          </a:prstGeom>
+          <a:noFill/>
+          <a:ln/>
+        </p:spPr>
+        <p:txBody>
+          <a:bodyPr wrap="square" lIns="0" tIns="0" rIns="0" bIns="0" rtlCol="0" anchor="ctr"/>
+          <a:lstStyle/>
+          <a:p>
+            <a:pPr indent="0" marL="0">
+              <a:buNone/>
+            </a:pPr>
+            <a:r>
+              <a:rPr lang="en-US" sz="1300" dirty="0">
+                <a:solidFill>
+                  <a:schemeClr val="accent5"/>
+                </a:solidFill>
+              </a:rPr>
+              <a:t>报告原图：橙框为六国均值，与尼尔森美国收视数据并列</a:t>
+            </a:r>
+            <a:endParaRPr lang="en-US" sz="1300" dirty="0"/>
+          </a:p>
+        </p:txBody>
+      </p:sp>
+      <p:sp>
+        <p:nvSpPr>
+          <p:cNvPr id="7" name="对比条"/>
+          <p:cNvSpPr txBox="1"/>
+          <p:nvPr/>
+        </p:nvSpPr>
+        <p:spPr>
+          <a:xfrm>
+            <a:off x="548640" y="5303520"/>
+            <a:ext cx="5486400" cy="457200"/>
+          </a:xfrm>
+          <a:prstGeom prst="rect">
+            <a:avLst/>
+          </a:prstGeom>
+          <a:noFill/>
+          <a:ln/>
+        </p:spPr>
+        <p:txBody>
+          <a:bodyPr wrap="square" lIns="0" tIns="0" rIns="0" bIns="0" rtlCol="0" anchor="ctr"/>
+          <a:lstStyle/>
+          <a:p>
+            <a:pPr indent="0" marL="0">
+              <a:buNone/>
+            </a:pPr>
+            <a:r>
+              <a:rPr lang="en-US" sz="1800" dirty="0">
+                <a:solidFill>
+                  <a:schemeClr val="tx1"/>
+                </a:solidFill>
+              </a:rPr>
+              <a:t>美国 </a:t>
+            </a:r>
+            <a:pPr indent="0" marL="0">
+              <a:buNone/>
+            </a:pPr>
+            <a:r>
+              <a:rPr lang="en-US" sz="1800" b="1" dirty="0">
+                <a:solidFill>
+                  <a:schemeClr val="accent1"/>
+                </a:solidFill>
+              </a:rPr>
+              <a:t>12</a:t>
+            </a:r>
+            <a:pPr indent="0" marL="0">
+              <a:buNone/>
+            </a:pPr>
+            <a:r>
+              <a:rPr lang="en-US" sz="1800" dirty="0">
+                <a:solidFill>
+                  <a:schemeClr val="tx1"/>
+                </a:solidFill>
+              </a:rPr>
+              <a:t> 分钟     法国 </a:t>
+            </a:r>
+            <a:pPr indent="0" marL="0">
+              <a:buNone/>
+            </a:pPr>
+            <a:r>
+              <a:rPr lang="en-US" sz="1800" b="1" dirty="0">
+                <a:solidFill>
+                  <a:schemeClr val="tx2"/>
+                </a:solidFill>
+              </a:rPr>
+              <a:t>26</a:t>
+            </a:r>
+            <a:pPr indent="0" marL="0">
+              <a:buNone/>
+            </a:pPr>
+            <a:r>
+              <a:rPr lang="en-US" sz="1800" dirty="0">
+                <a:solidFill>
+                  <a:schemeClr val="tx1"/>
+                </a:solidFill>
+              </a:rPr>
+              <a:t> 分钟     六国均值 </a:t>
+            </a:r>
+            <a:pPr indent="0" marL="0">
+              <a:buNone/>
+            </a:pPr>
+            <a:r>
+              <a:rPr lang="en-US" sz="1800" b="1" dirty="0">
+                <a:solidFill>
+                  <a:schemeClr val="accent3"/>
+                </a:solidFill>
+              </a:rPr>
+              <a:t>14</a:t>
+            </a:r>
+            <a:pPr indent="0" marL="0">
+              <a:buNone/>
+            </a:pPr>
+            <a:r>
+              <a:rPr lang="en-US" sz="1800" dirty="0">
+                <a:solidFill>
+                  <a:schemeClr val="tx1"/>
+                </a:solidFill>
+              </a:rPr>
+              <a:t> 分钟</a:t>
+            </a:r>
+            <a:endParaRPr lang="en-US" sz="1800" dirty="0"/>
+          </a:p>
+        </p:txBody>
+      </p:sp>
+      <p:sp>
+        <p:nvSpPr>
+          <p:cNvPr id="8" name="分隔线"/>
           <p:cNvSpPr/>
           <p:nvPr/>
         </p:nvSpPr>
@@ -13809,7 +19497,7 @@
       </p:sp>
       <p:sp>
         <p:nvSpPr>
-          <p:cNvPr id="6" name="事实标签"/>
+          <p:cNvPr id="9" name="事实标签"/>
           <p:cNvSpPr txBox="1"/>
           <p:nvPr/>
         </p:nvSpPr>
@@ -13845,7 +19533,7 @@
       </p:sp>
       <p:sp>
         <p:nvSpPr>
-          <p:cNvPr id="7" name="事实内容"/>
+          <p:cNvPr id="10" name="事实内容"/>
           <p:cNvSpPr txBox="1"/>
           <p:nvPr/>
         </p:nvSpPr>
@@ -13895,7 +19583,7 @@
       </p:sp>
       <p:sp>
         <p:nvSpPr>
-          <p:cNvPr id="8" name="分隔线"/>
+          <p:cNvPr id="11" name="分隔线"/>
           <p:cNvSpPr/>
           <p:nvPr/>
         </p:nvSpPr>
@@ -13918,7 +19606,7 @@
       </p:sp>
       <p:sp>
         <p:nvSpPr>
-          <p:cNvPr id="9" name="原因标签"/>
+          <p:cNvPr id="12" name="原因标签"/>
           <p:cNvSpPr txBox="1"/>
           <p:nvPr/>
         </p:nvSpPr>
@@ -13954,7 +19642,7 @@
       </p:sp>
       <p:sp>
         <p:nvSpPr>
-          <p:cNvPr id="10" name="原因内容"/>
+          <p:cNvPr id="13" name="原因内容"/>
           <p:cNvSpPr txBox="1"/>
           <p:nvPr/>
         </p:nvSpPr>
@@ -14004,7 +19692,7 @@
       </p:sp>
       <p:sp>
         <p:nvSpPr>
-          <p:cNvPr id="11" name="分隔线"/>
+          <p:cNvPr id="14" name="分隔线"/>
           <p:cNvSpPr/>
           <p:nvPr/>
         </p:nvSpPr>
@@ -14027,7 +19715,7 @@
       </p:sp>
       <p:sp>
         <p:nvSpPr>
-          <p:cNvPr id="12" name="影响标签"/>
+          <p:cNvPr id="15" name="影响标签"/>
           <p:cNvSpPr txBox="1"/>
           <p:nvPr/>
         </p:nvSpPr>
@@ -14063,7 +19751,7 @@
       </p:sp>
       <p:sp>
         <p:nvSpPr>
-          <p:cNvPr id="13" name="影响内容"/>
+          <p:cNvPr id="16" name="影响内容"/>
           <p:cNvSpPr txBox="1"/>
           <p:nvPr/>
         </p:nvSpPr>
@@ -14113,7 +19801,7 @@
       </p:sp>
       <p:sp>
         <p:nvSpPr>
-          <p:cNvPr id="14" name="分隔线"/>
+          <p:cNvPr id="17" name="分隔线"/>
           <p:cNvSpPr/>
           <p:nvPr/>
         </p:nvSpPr>
@@ -14136,7 +19824,7 @@
       </p:sp>
       <p:sp>
         <p:nvSpPr>
-          <p:cNvPr id="15" name="来源说明"/>
+          <p:cNvPr id="18" name="来源说明"/>
           <p:cNvSpPr txBox="1"/>
           <p:nvPr/>
         </p:nvSpPr>
@@ -14220,6 +19908,421 @@
   <p:clrMapOvr>
     <a:masterClrMapping/>
   </p:clrMapOvr>
+  <p:transition spd="med">
+    <p:fade/>
+  </p:transition>
+  <p:timing>
+    <p:tnLst>
+      <p:par>
+        <p:cTn id="1" dur="indefinite" restart="never" nodeType="tmRoot">
+          <p:childTnLst>
+            <p:seq concurrent="1" nextAc="seek">
+              <p:cTn id="2" dur="indefinite" nodeType="mainSeq">
+                <p:childTnLst>
+                  <p:par>
+                    <p:cTn id="3" fill="hold">
+                      <p:stCondLst>
+                        <p:cond delay="indefinite"/>
+                        <p:cond evt="onBegin" delay="0">
+                          <p:tn val="2"/>
+                        </p:cond>
+                      </p:stCondLst>
+                      <p:childTnLst>
+                        <p:par>
+                          <p:cTn id="34" fill="hold">
+                            <p:stCondLst>
+                              <p:cond delay="0"/>
+                            </p:stCondLst>
+                            <p:childTnLst>
+                              <p:par>
+                                <p:cTn id="4" presetID="10" presetClass="entr" presetSubtype="0" fill="hold" grpId="0" nodeType="withEffect">
+                                  <p:stCondLst>
+                                    <p:cond delay="200"/>
+                                  </p:stCondLst>
+                                  <p:childTnLst>
+                                    <p:set>
+                                      <p:cBhvr>
+                                        <p:cTn id="5" dur="1" fill="hold">
+                                          <p:stCondLst>
+                                            <p:cond delay="0"/>
+                                          </p:stCondLst>
+                                        </p:cTn>
+                                        <p:tgtEl>
+                                          <p:spTgt spid="4"/>
+                                        </p:tgtEl>
+                                        <p:attrNameLst>
+                                          <p:attrName>style.visibility</p:attrName>
+                                        </p:attrNameLst>
+                                      </p:cBhvr>
+                                      <p:to>
+                                        <p:strVal val="visible"/>
+                                      </p:to>
+                                    </p:set>
+                                    <p:animEffect transition="in" filter="fade">
+                                      <p:cBhvr>
+                                        <p:cTn id="6" dur="500"/>
+                                        <p:tgtEl>
+                                          <p:spTgt spid="4"/>
+                                        </p:tgtEl>
+                                      </p:cBhvr>
+                                    </p:animEffect>
+                                  </p:childTnLst>
+                                </p:cTn>
+                              </p:par>
+                              <p:par>
+                                <p:cTn id="7" presetID="10" presetClass="entr" presetSubtype="0" fill="hold" grpId="0" nodeType="withEffect">
+                                  <p:stCondLst>
+                                    <p:cond delay="200"/>
+                                  </p:stCondLst>
+                                  <p:childTnLst>
+                                    <p:set>
+                                      <p:cBhvr>
+                                        <p:cTn id="8" dur="1" fill="hold">
+                                          <p:stCondLst>
+                                            <p:cond delay="0"/>
+                                          </p:stCondLst>
+                                        </p:cTn>
+                                        <p:tgtEl>
+                                          <p:spTgt spid="5"/>
+                                        </p:tgtEl>
+                                        <p:attrNameLst>
+                                          <p:attrName>style.visibility</p:attrName>
+                                        </p:attrNameLst>
+                                      </p:cBhvr>
+                                      <p:to>
+                                        <p:strVal val="visible"/>
+                                      </p:to>
+                                    </p:set>
+                                    <p:animEffect transition="in" filter="fade">
+                                      <p:cBhvr>
+                                        <p:cTn id="9" dur="500"/>
+                                        <p:tgtEl>
+                                          <p:spTgt spid="5"/>
+                                        </p:tgtEl>
+                                      </p:cBhvr>
+                                    </p:animEffect>
+                                  </p:childTnLst>
+                                </p:cTn>
+                              </p:par>
+                              <p:par>
+                                <p:cTn id="10" presetID="10" presetClass="entr" presetSubtype="0" fill="hold" grpId="0" nodeType="withEffect">
+                                  <p:stCondLst>
+                                    <p:cond delay="200"/>
+                                  </p:stCondLst>
+                                  <p:childTnLst>
+                                    <p:set>
+                                      <p:cBhvr>
+                                        <p:cTn id="11" dur="1" fill="hold">
+                                          <p:stCondLst>
+                                            <p:cond delay="0"/>
+                                          </p:stCondLst>
+                                        </p:cTn>
+                                        <p:tgtEl>
+                                          <p:spTgt spid="6"/>
+                                        </p:tgtEl>
+                                        <p:attrNameLst>
+                                          <p:attrName>style.visibility</p:attrName>
+                                        </p:attrNameLst>
+                                      </p:cBhvr>
+                                      <p:to>
+                                        <p:strVal val="visible"/>
+                                      </p:to>
+                                    </p:set>
+                                    <p:animEffect transition="in" filter="fade">
+                                      <p:cBhvr>
+                                        <p:cTn id="12" dur="500"/>
+                                        <p:tgtEl>
+                                          <p:spTgt spid="6"/>
+                                        </p:tgtEl>
+                                      </p:cBhvr>
+                                    </p:animEffect>
+                                  </p:childTnLst>
+                                </p:cTn>
+                              </p:par>
+                              <p:par>
+                                <p:cTn id="13" presetID="10" presetClass="entr" presetSubtype="0" fill="hold" grpId="0" nodeType="withEffect">
+                                  <p:stCondLst>
+                                    <p:cond delay="200"/>
+                                  </p:stCondLst>
+                                  <p:childTnLst>
+                                    <p:set>
+                                      <p:cBhvr>
+                                        <p:cTn id="14" dur="1" fill="hold">
+                                          <p:stCondLst>
+                                            <p:cond delay="0"/>
+                                          </p:stCondLst>
+                                        </p:cTn>
+                                        <p:tgtEl>
+                                          <p:spTgt spid="7"/>
+                                        </p:tgtEl>
+                                        <p:attrNameLst>
+                                          <p:attrName>style.visibility</p:attrName>
+                                        </p:attrNameLst>
+                                      </p:cBhvr>
+                                      <p:to>
+                                        <p:strVal val="visible"/>
+                                      </p:to>
+                                    </p:set>
+                                    <p:animEffect transition="in" filter="fade">
+                                      <p:cBhvr>
+                                        <p:cTn id="15" dur="500"/>
+                                        <p:tgtEl>
+                                          <p:spTgt spid="7"/>
+                                        </p:tgtEl>
+                                      </p:cBhvr>
+                                    </p:animEffect>
+                                  </p:childTnLst>
+                                </p:cTn>
+                              </p:par>
+                              <p:par>
+                                <p:cTn id="16" presetID="10" presetClass="entr" presetSubtype="0" fill="hold" grpId="0" nodeType="withEffect">
+                                  <p:stCondLst>
+                                    <p:cond delay="550"/>
+                                  </p:stCondLst>
+                                  <p:childTnLst>
+                                    <p:set>
+                                      <p:cBhvr>
+                                        <p:cTn id="17" dur="1" fill="hold">
+                                          <p:stCondLst>
+                                            <p:cond delay="0"/>
+                                          </p:stCondLst>
+                                        </p:cTn>
+                                        <p:tgtEl>
+                                          <p:spTgt spid="9"/>
+                                        </p:tgtEl>
+                                        <p:attrNameLst>
+                                          <p:attrName>style.visibility</p:attrName>
+                                        </p:attrNameLst>
+                                      </p:cBhvr>
+                                      <p:to>
+                                        <p:strVal val="visible"/>
+                                      </p:to>
+                                    </p:set>
+                                    <p:animEffect transition="in" filter="fade">
+                                      <p:cBhvr>
+                                        <p:cTn id="18" dur="500"/>
+                                        <p:tgtEl>
+                                          <p:spTgt spid="9"/>
+                                        </p:tgtEl>
+                                      </p:cBhvr>
+                                    </p:animEffect>
+                                  </p:childTnLst>
+                                </p:cTn>
+                              </p:par>
+                              <p:par>
+                                <p:cTn id="19" presetID="10" presetClass="entr" presetSubtype="0" fill="hold" grpId="0" nodeType="withEffect">
+                                  <p:stCondLst>
+                                    <p:cond delay="550"/>
+                                  </p:stCondLst>
+                                  <p:childTnLst>
+                                    <p:set>
+                                      <p:cBhvr>
+                                        <p:cTn id="20" dur="1" fill="hold">
+                                          <p:stCondLst>
+                                            <p:cond delay="0"/>
+                                          </p:stCondLst>
+                                        </p:cTn>
+                                        <p:tgtEl>
+                                          <p:spTgt spid="10"/>
+                                        </p:tgtEl>
+                                        <p:attrNameLst>
+                                          <p:attrName>style.visibility</p:attrName>
+                                        </p:attrNameLst>
+                                      </p:cBhvr>
+                                      <p:to>
+                                        <p:strVal val="visible"/>
+                                      </p:to>
+                                    </p:set>
+                                    <p:animEffect transition="in" filter="fade">
+                                      <p:cBhvr>
+                                        <p:cTn id="21" dur="500"/>
+                                        <p:tgtEl>
+                                          <p:spTgt spid="10"/>
+                                        </p:tgtEl>
+                                      </p:cBhvr>
+                                    </p:animEffect>
+                                  </p:childTnLst>
+                                </p:cTn>
+                              </p:par>
+                              <p:par>
+                                <p:cTn id="22" presetID="10" presetClass="entr" presetSubtype="0" fill="hold" grpId="0" nodeType="withEffect">
+                                  <p:stCondLst>
+                                    <p:cond delay="900"/>
+                                  </p:stCondLst>
+                                  <p:childTnLst>
+                                    <p:set>
+                                      <p:cBhvr>
+                                        <p:cTn id="23" dur="1" fill="hold">
+                                          <p:stCondLst>
+                                            <p:cond delay="0"/>
+                                          </p:stCondLst>
+                                        </p:cTn>
+                                        <p:tgtEl>
+                                          <p:spTgt spid="12"/>
+                                        </p:tgtEl>
+                                        <p:attrNameLst>
+                                          <p:attrName>style.visibility</p:attrName>
+                                        </p:attrNameLst>
+                                      </p:cBhvr>
+                                      <p:to>
+                                        <p:strVal val="visible"/>
+                                      </p:to>
+                                    </p:set>
+                                    <p:animEffect transition="in" filter="fade">
+                                      <p:cBhvr>
+                                        <p:cTn id="24" dur="500"/>
+                                        <p:tgtEl>
+                                          <p:spTgt spid="12"/>
+                                        </p:tgtEl>
+                                      </p:cBhvr>
+                                    </p:animEffect>
+                                  </p:childTnLst>
+                                </p:cTn>
+                              </p:par>
+                              <p:par>
+                                <p:cTn id="25" presetID="10" presetClass="entr" presetSubtype="0" fill="hold" grpId="0" nodeType="withEffect">
+                                  <p:stCondLst>
+                                    <p:cond delay="900"/>
+                                  </p:stCondLst>
+                                  <p:childTnLst>
+                                    <p:set>
+                                      <p:cBhvr>
+                                        <p:cTn id="26" dur="1" fill="hold">
+                                          <p:stCondLst>
+                                            <p:cond delay="0"/>
+                                          </p:stCondLst>
+                                        </p:cTn>
+                                        <p:tgtEl>
+                                          <p:spTgt spid="13"/>
+                                        </p:tgtEl>
+                                        <p:attrNameLst>
+                                          <p:attrName>style.visibility</p:attrName>
+                                        </p:attrNameLst>
+                                      </p:cBhvr>
+                                      <p:to>
+                                        <p:strVal val="visible"/>
+                                      </p:to>
+                                    </p:set>
+                                    <p:animEffect transition="in" filter="fade">
+                                      <p:cBhvr>
+                                        <p:cTn id="27" dur="500"/>
+                                        <p:tgtEl>
+                                          <p:spTgt spid="13"/>
+                                        </p:tgtEl>
+                                      </p:cBhvr>
+                                    </p:animEffect>
+                                  </p:childTnLst>
+                                </p:cTn>
+                              </p:par>
+                              <p:par>
+                                <p:cTn id="28" presetID="10" presetClass="entr" presetSubtype="0" fill="hold" grpId="0" nodeType="withEffect">
+                                  <p:stCondLst>
+                                    <p:cond delay="1250"/>
+                                  </p:stCondLst>
+                                  <p:childTnLst>
+                                    <p:set>
+                                      <p:cBhvr>
+                                        <p:cTn id="29" dur="1" fill="hold">
+                                          <p:stCondLst>
+                                            <p:cond delay="0"/>
+                                          </p:stCondLst>
+                                        </p:cTn>
+                                        <p:tgtEl>
+                                          <p:spTgt spid="15"/>
+                                        </p:tgtEl>
+                                        <p:attrNameLst>
+                                          <p:attrName>style.visibility</p:attrName>
+                                        </p:attrNameLst>
+                                      </p:cBhvr>
+                                      <p:to>
+                                        <p:strVal val="visible"/>
+                                      </p:to>
+                                    </p:set>
+                                    <p:animEffect transition="in" filter="fade">
+                                      <p:cBhvr>
+                                        <p:cTn id="30" dur="500"/>
+                                        <p:tgtEl>
+                                          <p:spTgt spid="15"/>
+                                        </p:tgtEl>
+                                      </p:cBhvr>
+                                    </p:animEffect>
+                                  </p:childTnLst>
+                                </p:cTn>
+                              </p:par>
+                              <p:par>
+                                <p:cTn id="31" presetID="10" presetClass="entr" presetSubtype="0" fill="hold" grpId="0" nodeType="withEffect">
+                                  <p:stCondLst>
+                                    <p:cond delay="1250"/>
+                                  </p:stCondLst>
+                                  <p:childTnLst>
+                                    <p:set>
+                                      <p:cBhvr>
+                                        <p:cTn id="32" dur="1" fill="hold">
+                                          <p:stCondLst>
+                                            <p:cond delay="0"/>
+                                          </p:stCondLst>
+                                        </p:cTn>
+                                        <p:tgtEl>
+                                          <p:spTgt spid="16"/>
+                                        </p:tgtEl>
+                                        <p:attrNameLst>
+                                          <p:attrName>style.visibility</p:attrName>
+                                        </p:attrNameLst>
+                                      </p:cBhvr>
+                                      <p:to>
+                                        <p:strVal val="visible"/>
+                                      </p:to>
+                                    </p:set>
+                                    <p:animEffect transition="in" filter="fade">
+                                      <p:cBhvr>
+                                        <p:cTn id="33" dur="500"/>
+                                        <p:tgtEl>
+                                          <p:spTgt spid="16"/>
+                                        </p:tgtEl>
+                                      </p:cBhvr>
+                                    </p:animEffect>
+                                  </p:childTnLst>
+                                </p:cTn>
+                              </p:par>
+                            </p:childTnLst>
+                          </p:cTn>
+                        </p:par>
+                      </p:childTnLst>
+                    </p:cTn>
+                  </p:par>
+                </p:childTnLst>
+              </p:cTn>
+              <p:prevCondLst>
+                <p:cond evt="onPrev" delay="0">
+                  <p:tgtEl>
+                    <p:sldTgt/>
+                  </p:tgtEl>
+                </p:cond>
+              </p:prevCondLst>
+              <p:nextCondLst>
+                <p:cond evt="onNext" delay="0">
+                  <p:tgtEl>
+                    <p:sldTgt/>
+                  </p:tgtEl>
+                </p:cond>
+              </p:nextCondLst>
+            </p:seq>
+          </p:childTnLst>
+        </p:cTn>
+      </p:par>
+    </p:tnLst>
+    <p:bldLst>
+      <p:bldP spid="4" grpId="0" animBg="1"/>
+      <p:bldP spid="6" grpId="0" animBg="1"/>
+      <p:bldP spid="7" grpId="0" animBg="1"/>
+      <p:bldP spid="9" grpId="0" animBg="1"/>
+      <p:bldP spid="10" grpId="0" animBg="1"/>
+      <p:bldP spid="12" grpId="0" animBg="1"/>
+      <p:bldP spid="13" grpId="0" animBg="1"/>
+      <p:bldP spid="15" grpId="0" animBg="1"/>
+      <p:bldP spid="16" grpId="0" animBg="1"/>
+    </p:bldLst>
+  </p:timing>
 </p:sld>
 </file>
 

--- a/Gracenote报告解读_课堂汇报.pptx
+++ b/Gracenote报告解读_课堂汇报.pptx
@@ -120,13 +120,13 @@
   <p:extLst>
     <p:ext uri="{521415D9-36F7-43E2-AB2F-B90AF26B5E84}">
       <p14:sectionLst xmlns:p14="http://schemas.microsoft.com/office/powerpoint/2010/main">
-        <p14:section name="开场" id="{9959ab7c-4826-208a-3f8f-76541efbd0ce}">
+        <p14:section name="开场" id="{c892c26f-4b4b-8b7e-bf4a-fb5385dde84f}">
           <p14:sldIdLst>
             <p14:sldId id="256"/>
             <p14:sldId id="257"/>
           </p14:sldIdLst>
         </p14:section>
-        <p14:section name="报告介绍" id="{f55b9de3-9361-a72f-6b24-31b381687060}">
+        <p14:section name="报告介绍" id="{91f5d4b1-a4fa-f640-ec0d-7248451a6e94}">
           <p14:sldIdLst>
             <p14:sldId id="258"/>
             <p14:sldId id="259"/>
@@ -134,7 +134,7 @@
             <p14:sldId id="261"/>
           </p14:sldIdLst>
         </p14:section>
-        <p14:section name="方法评价" id="{31b874d5-82f1-013e-058a-6f3a52288bf3}">
+        <p14:section name="方法评价" id="{ecbb5f43-c550-a8f2-a0b5-15443df5637c}">
           <p14:sldIdLst>
             <p14:sldId id="262"/>
             <p14:sldId id="263"/>
@@ -143,12 +143,12 @@
             <p14:sldId id="266"/>
           </p14:sldIdLst>
         </p14:section>
-        <p14:section name="结论" id="{1846122c-dd50-fd44-a3a3-fa189c562ee0}">
+        <p14:section name="结论" id="{ba61914e-0c3e-33a6-af83-3deca6273388}">
           <p14:sldIdLst>
             <p14:sldId id="267"/>
           </p14:sldIdLst>
         </p14:section>
-        <p14:section name="附录（备问）" id="{91233d5b-ebe3-d90f-bc6f-d82a39b05f19}">
+        <p14:section name="附录（备问）" id="{731cea85-a95c-b0bd-b126-1304bf6657ac}">
           <p14:sldIdLst>
             <p14:sldId id="268"/>
             <p14:sldId id="269"/>
@@ -822,7 +822,7 @@
           <a:p>
             <a:r>
               <a:rPr lang="en-US" dirty="0"/>
-              <a:t>【约 25 秒】综上，前两个环节在 AI 用户范围内基本成立，后两个环节证据不足。报告公开了样本量、调查时间与年龄范围，数据可复核，这是其可取之处。最后提出一个问题：如何设计调查，才能检验检索困难与退订之间的因果关系？谢谢。</a:t>
+              <a:t>【约 35 秒】综上，前两个环节在 AI 用户范围内基本成立，后两个环节证据不足。报告公开了样本量、调查时间与年龄范围，数据可复核；其方向性判断也与皮尤等独立来源一致，这是可取之处，但引用精确数字时需注明口径。最后提出一个问题：如何设计调查，才能检验检索困难与退订之间的因果关系？谢谢。</a:t>
             </a:r>
             <a:endParaRPr lang="en-US" dirty="0"/>
           </a:p>
@@ -1262,7 +1262,7 @@
           <a:p>
             <a:r>
               <a:rPr lang="en-US" dirty="0"/>
-              <a:t>【约 25 秒】数据主要来自两项线上问卷。调查一于 2026 年 1 至 2 月进行，样本为 4003 名 13 至 79 岁的美国 AI 聊天机器人用户；调查二于 2025 年夏季进行，覆盖六国，每国 500 名流媒体用户。两项调查均未说明抽样方法。</a:t>
+              <a:t>【约 25 秒】报告的数据主要来自两项线上问卷。调查一于 2026 年 1 至 2 月进行，样本为 4003 名 13 至 79 岁的美国 AI 聊天机器人用户；调查二于 2025 年夏季进行，覆盖六国，每国 500 名流媒体用户。两项调查均未说明抽样方法。</a:t>
             </a:r>
             <a:endParaRPr lang="en-US" dirty="0"/>
           </a:p>
@@ -1350,7 +1350,7 @@
           <a:p>
             <a:r>
               <a:rPr lang="en-US" dirty="0"/>
-              <a:t>【约 20 秒】发现一：13 至 14 岁 AI 用户中 54% 每日使用，75% 的受访者会核对 AI 的回答。报告的解释是，AI 回答直接、可追问，使用因此增加；但可能生成错误信息，用户仍需核对。</a:t>
+              <a:t>【约 20 秒】报告的第一项结论：13 至 14 岁 AI 用户中 54% 每日使用，75% 的受访者会核对 AI 的回答。报告的解释是，AI 回答直接、可追问，使用因此增加；但可能生成错误信息，用户仍需核对。</a:t>
             </a:r>
             <a:endParaRPr lang="en-US" dirty="0"/>
           </a:p>
@@ -1438,7 +1438,7 @@
           <a:p>
             <a:r>
               <a:rPr lang="en-US" dirty="0"/>
-              <a:t>【约 20 秒】发现二：用户平均需 14 分钟检索节目，18 至 34 岁受访者中 54% 表示可能因此退订，AI 仅能正确回答约三分之二的播出平台。报告据此主张 AI 应接入可靠的行业数据。</a:t>
+              <a:t>【约 20 秒】第二项结论：用户平均需 14 分钟检索节目，18 至 34 岁受访者中 54% 表示可能因此退订，AI 仅能正确回答约三分之二的播出平台。报告据此主张 AI 应接入可靠的行业数据。</a:t>
             </a:r>
             <a:endParaRPr lang="en-US" dirty="0"/>
           </a:p>
@@ -1526,7 +1526,7 @@
           <a:p>
             <a:r>
               <a:rPr lang="en-US" dirty="0"/>
-              <a:t>【约 10 秒】报告的推论可分为四个环节。调查对象、范围、时间与方法的差异都会影响结果，以下逐项检验。</a:t>
+              <a:t>【约 20 秒】报告的推论可分为四个环节：年轻人依赖 AI，对 AI 信任不足，检索困难导致退订，AI 应接入行业数据。调查对象、范围、时间与方法的差异都会影响结果，以下逐项检验。</a:t>
             </a:r>
             <a:endParaRPr lang="en-US" dirty="0"/>
           </a:p>
@@ -2980,7 +2980,7 @@
                   <a:schemeClr val="accent3"/>
                 </a:solidFill>
               </a:rPr>
-              <a:t>04  方法评价</a:t>
+              <a:t>04  思考与评价</a:t>
             </a:r>
             <a:endParaRPr lang="en-US" sz="1400" dirty="0"/>
           </a:p>
@@ -4374,7 +4374,7 @@
                   <a:schemeClr val="accent3"/>
                 </a:solidFill>
               </a:rPr>
-              <a:t>04  方法评价</a:t>
+              <a:t>04  思考与评价</a:t>
             </a:r>
             <a:endParaRPr lang="en-US" sz="1400" dirty="0"/>
           </a:p>
@@ -6016,7 +6016,7 @@
                   <a:schemeClr val="accent4"/>
                 </a:solidFill>
               </a:rPr>
-              <a:t>05  结论</a:t>
+              <a:t>05  总体判断</a:t>
             </a:r>
             <a:endParaRPr lang="en-US" sz="1400" dirty="0"/>
           </a:p>
@@ -9975,7 +9975,7 @@
                   <a:schemeClr val="tx2"/>
                 </a:solidFill>
               </a:rPr>
-              <a:t>研究设计</a:t>
+              <a:t>研究方法</a:t>
             </a:r>
             <a:endParaRPr lang="en-US" sz="2000" dirty="0"/>
           </a:p>
@@ -10073,7 +10073,7 @@
                   <a:schemeClr val="tx2"/>
                 </a:solidFill>
               </a:rPr>
-              <a:t>报告内容</a:t>
+              <a:t>研究结论</a:t>
             </a:r>
             <a:endParaRPr lang="en-US" sz="2000" dirty="0"/>
           </a:p>
@@ -10171,7 +10171,7 @@
                   <a:schemeClr val="tx2"/>
                 </a:solidFill>
               </a:rPr>
-              <a:t>方法评价</a:t>
+              <a:t>思考与评价</a:t>
             </a:r>
             <a:endParaRPr lang="en-US" sz="2000" dirty="0"/>
           </a:p>
@@ -10269,7 +10269,7 @@
                   <a:schemeClr val="tx2"/>
                 </a:solidFill>
               </a:rPr>
-              <a:t>结论</a:t>
+              <a:t>总体判断</a:t>
             </a:r>
             <a:endParaRPr lang="en-US" sz="2000" dirty="0"/>
           </a:p>
@@ -12263,7 +12263,7 @@
                   <a:schemeClr val="accent3"/>
                 </a:solidFill>
               </a:rPr>
-              <a:t>02  研究设计</a:t>
+              <a:t>02  研究方法</a:t>
             </a:r>
             <a:endParaRPr lang="en-US" sz="1400" dirty="0"/>
           </a:p>
@@ -12301,7 +12301,7 @@
                   <a:schemeClr val="tx2"/>
                 </a:solidFill>
               </a:rPr>
-              <a:t>数据来源：两项线上问卷</a:t>
+              <a:t>研究方法：两项线上问卷</a:t>
             </a:r>
             <a:endParaRPr lang="en-US" sz="3000" dirty="0"/>
           </a:p>
@@ -12334,7 +12334,7 @@
                 <a:gridCol w="4617720"/>
                 <a:gridCol w="4617720"/>
               </a:tblGrid>
-              <a:tr h="731520">
+              <a:tr h="685800">
                 <a:tc>
                   <a:txBody>
                     <a:bodyPr/>
@@ -12457,7 +12457,7 @@
                   </a:tcPr>
                 </a:tc>
               </a:tr>
-              <a:tr h="777240">
+              <a:tr h="658368">
                 <a:tc>
                   <a:txBody>
                     <a:bodyPr/>
@@ -12588,7 +12588,7 @@
                   </a:tcPr>
                 </a:tc>
               </a:tr>
-              <a:tr h="777240">
+              <a:tr h="658368">
                 <a:tc>
                   <a:txBody>
                     <a:bodyPr/>
@@ -12719,7 +12719,7 @@
                   </a:tcPr>
                 </a:tc>
               </a:tr>
-              <a:tr h="777240">
+              <a:tr h="658368">
                 <a:tc>
                   <a:txBody>
                     <a:bodyPr/>
@@ -12850,7 +12850,138 @@
                   </a:tcPr>
                 </a:tc>
               </a:tr>
-              <a:tr h="777240">
+              <a:tr h="658368">
+                <a:tc>
+                  <a:txBody>
+                    <a:bodyPr/>
+                    <a:lstStyle/>
+                    <a:p>
+                      <a:pPr indent="0" marL="0">
+                        <a:buNone/>
+                      </a:pPr>
+                      <a:r>
+                        <a:rPr lang="en-US" sz="2000" b="1" dirty="0">
+                          <a:solidFill>
+                            <a:schemeClr val="accent5"/>
+                          </a:solidFill>
+                        </a:rPr>
+                        <a:t>抽样方式</a:t>
+                      </a:r>
+                      <a:endParaRPr lang="en-US" sz="2000" dirty="0"/>
+                    </a:p>
+                  </a:txBody>
+                  <a:tcPr marL="177800" marR="177800" marT="76200" marB="76200" anchor="ctr">
+                    <a:lnL w="0" cap="flat" cmpd="sng" algn="ctr">
+                      <a:noFill/>
+                    </a:lnL>
+                    <a:lnR w="0" cap="flat" cmpd="sng" algn="ctr">
+                      <a:noFill/>
+                    </a:lnR>
+                    <a:lnT w="0" cap="flat" cmpd="sng" algn="ctr">
+                      <a:noFill/>
+                    </a:lnT>
+                    <a:lnB w="9525" cap="flat" cmpd="sng" algn="ctr">
+                      <a:solidFill>
+                        <a:srgbClr val="D5DAE1"/>
+                      </a:solidFill>
+                      <a:prstDash val="solid"/>
+                      <a:round/>
+                      <a:headEnd type="none" w="med" len="med"/>
+                      <a:tailEnd type="none" w="med" len="med"/>
+                    </a:lnB>
+                    <a:solidFill>
+                      <a:schemeClr val="bg1"/>
+                    </a:solidFill>
+                  </a:tcPr>
+                </a:tc>
+                <a:tc>
+                  <a:txBody>
+                    <a:bodyPr/>
+                    <a:lstStyle/>
+                    <a:p>
+                      <a:pPr indent="0" marL="0">
+                        <a:buNone/>
+                      </a:pPr>
+                      <a:r>
+                        <a:rPr lang="en-US" sz="2000" b="1" dirty="0">
+                          <a:solidFill>
+                            <a:schemeClr val="accent3"/>
+                          </a:solidFill>
+                        </a:rPr>
+                        <a:t>报告未说明</a:t>
+                      </a:r>
+                      <a:endParaRPr lang="en-US" sz="2000" dirty="0"/>
+                    </a:p>
+                  </a:txBody>
+                  <a:tcPr marL="177800" marR="177800" marT="76200" marB="76200" anchor="ctr">
+                    <a:lnL w="0" cap="flat" cmpd="sng" algn="ctr">
+                      <a:noFill/>
+                    </a:lnL>
+                    <a:lnR w="0" cap="flat" cmpd="sng" algn="ctr">
+                      <a:noFill/>
+                    </a:lnR>
+                    <a:lnT w="0" cap="flat" cmpd="sng" algn="ctr">
+                      <a:noFill/>
+                    </a:lnT>
+                    <a:lnB w="9525" cap="flat" cmpd="sng" algn="ctr">
+                      <a:solidFill>
+                        <a:srgbClr val="D5DAE1"/>
+                      </a:solidFill>
+                      <a:prstDash val="solid"/>
+                      <a:round/>
+                      <a:headEnd type="none" w="med" len="med"/>
+                      <a:tailEnd type="none" w="med" len="med"/>
+                    </a:lnB>
+                    <a:solidFill>
+                      <a:schemeClr val="bg1"/>
+                    </a:solidFill>
+                  </a:tcPr>
+                </a:tc>
+                <a:tc>
+                  <a:txBody>
+                    <a:bodyPr/>
+                    <a:lstStyle/>
+                    <a:p>
+                      <a:pPr indent="0" marL="0">
+                        <a:buNone/>
+                      </a:pPr>
+                      <a:r>
+                        <a:rPr lang="en-US" sz="2000" b="1" dirty="0">
+                          <a:solidFill>
+                            <a:schemeClr val="accent3"/>
+                          </a:solidFill>
+                        </a:rPr>
+                        <a:t>报告未说明</a:t>
+                      </a:r>
+                      <a:endParaRPr lang="en-US" sz="2000" dirty="0"/>
+                    </a:p>
+                  </a:txBody>
+                  <a:tcPr marL="177800" marR="177800" marT="76200" marB="76200" anchor="ctr">
+                    <a:lnL w="0" cap="flat" cmpd="sng" algn="ctr">
+                      <a:noFill/>
+                    </a:lnL>
+                    <a:lnR w="0" cap="flat" cmpd="sng" algn="ctr">
+                      <a:noFill/>
+                    </a:lnR>
+                    <a:lnT w="0" cap="flat" cmpd="sng" algn="ctr">
+                      <a:noFill/>
+                    </a:lnT>
+                    <a:lnB w="9525" cap="flat" cmpd="sng" algn="ctr">
+                      <a:solidFill>
+                        <a:srgbClr val="D5DAE1"/>
+                      </a:solidFill>
+                      <a:prstDash val="solid"/>
+                      <a:round/>
+                      <a:headEnd type="none" w="med" len="med"/>
+                      <a:tailEnd type="none" w="med" len="med"/>
+                    </a:lnB>
+                    <a:solidFill>
+                      <a:schemeClr val="bg1"/>
+                    </a:solidFill>
+                  </a:tcPr>
+                </a:tc>
+              </a:tr>
+              <a:tr h="658368">
                 <a:tc>
                   <a:txBody>
                     <a:bodyPr/>
@@ -12993,8 +13124,8 @@
         </p:nvSpPr>
         <p:spPr>
           <a:xfrm>
-            <a:off x="548640" y="5486400"/>
-            <a:ext cx="11064240" cy="457200"/>
+            <a:off x="548640" y="5623560"/>
+            <a:ext cx="11064240" cy="411480"/>
           </a:xfrm>
           <a:prstGeom prst="rect">
             <a:avLst/>
@@ -13026,7 +13157,7 @@
                   <a:schemeClr val="tx1"/>
                 </a:solidFill>
               </a:rPr>
-              <a:t>两项调查均未说明抽样方法；另引用 11 个外部来源（见附录）。</a:t>
+              <a:t>报告另引用 11 个外部来源，其方法披露情况见附录一。</a:t>
             </a:r>
             <a:endParaRPr lang="en-US" sz="1800" dirty="0"/>
           </a:p>
@@ -13224,7 +13355,7 @@
                   <a:schemeClr val="accent3"/>
                 </a:solidFill>
               </a:rPr>
-              <a:t>03  报告内容</a:t>
+              <a:t>03  研究结论</a:t>
             </a:r>
             <a:endParaRPr lang="en-US" sz="1400" dirty="0"/>
           </a:p>
@@ -13262,7 +13393,7 @@
                   <a:schemeClr val="tx2"/>
                 </a:solidFill>
               </a:rPr>
-              <a:t>发现一：AI 使用普遍，信任有限</a:t>
+              <a:t>结论一：AI 使用普遍，信任有限</a:t>
             </a:r>
             <a:endParaRPr lang="en-US" sz="3000" dirty="0"/>
           </a:p>
@@ -14445,7 +14576,7 @@
                   <a:schemeClr val="accent3"/>
                 </a:solidFill>
               </a:rPr>
-              <a:t>03  报告内容</a:t>
+              <a:t>03  研究结论</a:t>
             </a:r>
             <a:endParaRPr lang="en-US" sz="1400" dirty="0"/>
           </a:p>
@@ -14483,7 +14614,7 @@
                   <a:schemeClr val="tx2"/>
                 </a:solidFill>
               </a:rPr>
-              <a:t>发现二：检索困难与退订风险</a:t>
+              <a:t>结论二：检索困难与退订风险</a:t>
             </a:r>
             <a:endParaRPr lang="en-US" sz="3000" dirty="0"/>
           </a:p>
@@ -16067,7 +16198,7 @@
                   <a:schemeClr val="accent3"/>
                 </a:solidFill>
               </a:rPr>
-              <a:t>04  方法评价</a:t>
+              <a:t>04  思考与评价</a:t>
             </a:r>
             <a:endParaRPr lang="en-US" sz="1400" dirty="0"/>
           </a:p>
@@ -17883,7 +18014,7 @@
                   <a:schemeClr val="accent3"/>
                 </a:solidFill>
               </a:rPr>
-              <a:t>04  方法评价</a:t>
+              <a:t>04  思考与评价</a:t>
             </a:r>
             <a:endParaRPr lang="en-US" sz="1400" dirty="0"/>
           </a:p>
@@ -19234,7 +19365,7 @@
                   <a:schemeClr val="accent3"/>
                 </a:solidFill>
               </a:rPr>
-              <a:t>04  方法评价</a:t>
+              <a:t>04  思考与评价</a:t>
             </a:r>
             <a:endParaRPr lang="en-US" sz="1400" dirty="0"/>
           </a:p>

--- a/Gracenote报告解读_课堂汇报.pptx
+++ b/Gracenote报告解读_课堂汇报.pptx
@@ -120,13 +120,13 @@
   <p:extLst>
     <p:ext uri="{521415D9-36F7-43E2-AB2F-B90AF26B5E84}">
       <p14:sectionLst xmlns:p14="http://schemas.microsoft.com/office/powerpoint/2010/main">
-        <p14:section name="开场" id="{c892c26f-4b4b-8b7e-bf4a-fb5385dde84f}">
+        <p14:section name="开场" id="{1a3512dd-4cc5-1a94-a71f-4e5d4eddf0cd}">
           <p14:sldIdLst>
             <p14:sldId id="256"/>
             <p14:sldId id="257"/>
           </p14:sldIdLst>
         </p14:section>
-        <p14:section name="报告介绍" id="{91f5d4b1-a4fa-f640-ec0d-7248451a6e94}">
+        <p14:section name="报告介绍" id="{1d80e418-b125-9717-dc20-5e158668e441}">
           <p14:sldIdLst>
             <p14:sldId id="258"/>
             <p14:sldId id="259"/>
@@ -134,7 +134,7 @@
             <p14:sldId id="261"/>
           </p14:sldIdLst>
         </p14:section>
-        <p14:section name="方法评价" id="{ecbb5f43-c550-a8f2-a0b5-15443df5637c}">
+        <p14:section name="方法评价" id="{0eca6383-ac37-7a35-06d9-b80fdacee6dd}">
           <p14:sldIdLst>
             <p14:sldId id="262"/>
             <p14:sldId id="263"/>
@@ -143,12 +143,12 @@
             <p14:sldId id="266"/>
           </p14:sldIdLst>
         </p14:section>
-        <p14:section name="结论" id="{ba61914e-0c3e-33a6-af83-3deca6273388}">
+        <p14:section name="结论" id="{030ef278-5807-bcf8-62f4-79804d5a40d4}">
           <p14:sldIdLst>
             <p14:sldId id="267"/>
           </p14:sldIdLst>
         </p14:section>
-        <p14:section name="附录（备问）" id="{731cea85-a95c-b0bd-b126-1304bf6657ac}">
+        <p14:section name="附录（备问）" id="{3a627172-b1e4-41a4-f55f-a555b8ffed76}">
           <p14:sldIdLst>
             <p14:sldId id="268"/>
             <p14:sldId id="269"/>
@@ -558,7 +558,7 @@
           <a:p>
             <a:r>
               <a:rPr lang="en-US" dirty="0"/>
-              <a:t>【约 25 秒】各位好。本次评析尼尔森旗下 Gracenote 2026 年 4 月发布的报告《AI 时代的电视搜索与内容发现》。报告称，13 至 14 岁受访者中 54% 每日使用 AI。评析从这一数据的样本构成入手。</a:t>
+              <a:t>【约 25 秒】各位老师、同学好。我汇报的是尼尔森旗下 Gracenote 公司 2026 年 4 月的报告《AI 时代的电视搜索与内容发现》。报告称，13 至 14 岁受访者中 54% 每天使用 AI。这个比例来自哪一类样本，是本次评析要看的第一点。</a:t>
             </a:r>
             <a:endParaRPr lang="en-US" dirty="0"/>
           </a:p>
@@ -646,7 +646,7 @@
           <a:p>
             <a:r>
               <a:rPr lang="en-US" dirty="0"/>
-              <a:t>【约 30 秒】调查时间与比较基准。报告以皮尤 2025 年秋的 30% 对比自身 2026 年初的 54%，称使用正在加速。但皮尤的分母是全体青少年，同为 13 至 14 岁仅 24%；本报告仅含 AI 用户。统一分母后，差距约 10 个百分点，不足以支持“加速”的判断。</a:t>
+              <a:t>【约 30 秒】第三是调查时间与比较基准。报告拿皮尤 2025 年秋天的 30%，对比自己 2026 年初的 54%，认为使用频率在加速。但皮尤的分母是全体青少年，同为 13 至 14 岁只有 24%，而本报告只统计 AI 用户。分母统一为使用者后，差距约 10 个百分点，不足以支持“加速”。</a:t>
             </a:r>
             <a:endParaRPr lang="en-US" dirty="0"/>
           </a:p>
@@ -734,7 +734,7 @@
           <a:p>
             <a:r>
               <a:rPr lang="en-US" dirty="0"/>
-              <a:t>【约 15 秒】研究方法。“检索困难导致退订”依赖退订意向、退订率、市场预测与 AI 测试四类数据，性质不一，且缺乏追踪设计，只能说明相关，不能证明因果。</a:t>
+              <a:t>【约 20 秒】第四是研究方法。“找节目困难导致退订”用到了退订意向、退订率、市场预测和 AI 测试四类数据，性质不同，也没有追踪同一批人。这样的数据只能说明两者有关联，不能证明因果。</a:t>
             </a:r>
             <a:endParaRPr lang="en-US" dirty="0"/>
           </a:p>
@@ -822,7 +822,7 @@
           <a:p>
             <a:r>
               <a:rPr lang="en-US" dirty="0"/>
-              <a:t>【约 35 秒】综上，前两个环节在 AI 用户范围内基本成立，后两个环节证据不足。报告公开了样本量、调查时间与年龄范围，数据可复核；其方向性判断也与皮尤等独立来源一致，这是可取之处，但引用精确数字时需注明口径。最后提出一个问题：如何设计调查，才能检验检索困难与退订之间的因果关系？谢谢。</a:t>
+              <a:t>【约 25 秒】综合来看，前两个环节在 AI 用户范围内基本成立，后两个环节证据不足。报告公开了样本量、调查时间和年龄范围，这是可取之处。最后留一个问题供讨论：要检验找节目困难与退订的因果关系，应怎样设计调查？谢谢大家。</a:t>
             </a:r>
             <a:endParaRPr lang="en-US" dirty="0"/>
           </a:p>
@@ -1086,7 +1086,7 @@
           <a:p>
             <a:r>
               <a:rPr lang="en-US" dirty="0"/>
-              <a:t>【约 15 秒】我的结论是：报告反映了 AI 用户的变化，具有参考价值；但样本仅限 AI 用户，结论不宜推及美国整体人群。汇报分五部分。</a:t>
+              <a:t>【约 15 秒】先说结论。这份报告反映了 AI 用户的变化，有参考价值，但样本只包括 AI 用户，结论不适合推到美国的整体人群。下面分五个部分讲。</a:t>
             </a:r>
             <a:endParaRPr lang="en-US" dirty="0"/>
           </a:p>
@@ -1174,7 +1174,7 @@
           <a:p>
             <a:r>
               <a:rPr lang="en-US" dirty="0"/>
-              <a:t>【约 25 秒】研究背景是流媒体平台增多、节目分散，用户检索成本上升，AI 成为新的检索工具。报告考察三个问题：AI 使用频率、检索难度与退订意向、对 AI 的信任。需说明，Gracenote 的主营业务即节目数据。</a:t>
+              <a:t>【约 30 秒】研究背景是，流媒体平台增多，节目分散，用户找节目的成本上升，AI 聊天机器人成了新的找节目方式。报告考察三个问题：AI 使用频率、找节目的难度与退订意向，以及对 AI 回答的信任。需要说明，Gracenote 的主要业务就是节目数据。</a:t>
             </a:r>
             <a:endParaRPr lang="en-US" dirty="0"/>
           </a:p>
@@ -1262,7 +1262,7 @@
           <a:p>
             <a:r>
               <a:rPr lang="en-US" dirty="0"/>
-              <a:t>【约 25 秒】报告的数据主要来自两项线上问卷。调查一于 2026 年 1 至 2 月进行，样本为 4003 名 13 至 79 岁的美国 AI 聊天机器人用户；调查二于 2025 年夏季进行，覆盖六国，每国 500 名流媒体用户。两项调查均未说明抽样方法。</a:t>
+              <a:t>【约 30 秒】研究方法方面，数据主要来自两项线上问卷。第一项在 2026 年 1 至 2 月进行，对象是 4003 名 13 至 79 岁的美国 AI 聊天机器人用户。第二项在 2025 年夏天进行，覆盖六国，每国 500 名流媒体用户。两项调查，报告都没有说明抽样方法。</a:t>
             </a:r>
             <a:endParaRPr lang="en-US" dirty="0"/>
           </a:p>
@@ -1350,7 +1350,7 @@
           <a:p>
             <a:r>
               <a:rPr lang="en-US" dirty="0"/>
-              <a:t>【约 20 秒】报告的第一项结论：13 至 14 岁 AI 用户中 54% 每日使用，75% 的受访者会核对 AI 的回答。报告的解释是，AI 回答直接、可追问，使用因此增加；但可能生成错误信息，用户仍需核对。</a:t>
+              <a:t>【约 20 秒】报告的第一项结论是，13 至 14 岁的 AI 用户中 54% 每天使用，75% 的受访者会核对 AI 的回答。报告解释说，AI 的回答直接，还可以追问，所以使用增加；但它可能出错，用户仍需核对。</a:t>
             </a:r>
             <a:endParaRPr lang="en-US" dirty="0"/>
           </a:p>
@@ -1438,7 +1438,7 @@
           <a:p>
             <a:r>
               <a:rPr lang="en-US" dirty="0"/>
-              <a:t>【约 20 秒】第二项结论：用户平均需 14 分钟检索节目，18 至 34 岁受访者中 54% 表示可能因此退订，AI 仅能正确回答约三分之二的播出平台。报告据此主张 AI 应接入可靠的行业数据。</a:t>
+              <a:t>【约 20 秒】第二项结论与找节目有关。用户平均要花 14 分钟找节目，18 至 34 岁的受访者中 54% 表示可能因此退订，AI 只能正确回答约三分之二的播出平台。报告据此提出，AI 需要接入可靠的行业数据。</a:t>
             </a:r>
             <a:endParaRPr lang="en-US" dirty="0"/>
           </a:p>
@@ -1526,7 +1526,7 @@
           <a:p>
             <a:r>
               <a:rPr lang="en-US" dirty="0"/>
-              <a:t>【约 20 秒】报告的推论可分为四个环节：年轻人依赖 AI，对 AI 信任不足，检索困难导致退订，AI 应接入行业数据。调查对象、范围、时间与方法的差异都会影响结果，以下逐项检验。</a:t>
+              <a:t>【约 20 秒】报告的推论共四个环节：年轻人依赖 AI，对 AI 信任不足，找节目困难导致退订，因此 AI 应接入行业数据。下面从调查对象、范围、时间和研究方法四个方面逐项检查。</a:t>
             </a:r>
             <a:endParaRPr lang="en-US" dirty="0"/>
           </a:p>
@@ -1614,7 +1614,7 @@
           <a:p>
             <a:r>
               <a:rPr lang="en-US" dirty="0"/>
-              <a:t>【约 20 秒】调查对象。4003 名受访者均为 AI 聊天机器人用户，样本以使用 AI 为筛选条件，不含非用户。线上样本的结构与总体不同，因此 54% 与 75% 仅代表 AI 用户，不能推及全体美国人。</a:t>
+              <a:t>【约 20 秒】先看调查对象。4003 名受访者都是 AI 聊天机器人用户，样本不包括不用 AI 的人。所以 54% 和 75% 只代表 AI 用户，不能当作美国人整体的情况，而报告正文有几处用了“美国人”的表述。</a:t>
             </a:r>
             <a:endParaRPr lang="en-US" dirty="0"/>
           </a:p>
@@ -1702,7 +1702,7 @@
           <a:p>
             <a:r>
               <a:rPr lang="en-US" dirty="0"/>
-              <a:t>【约 20 秒】调查范围。“平均 14 分钟”来自六国调查，为六国等权平均，法国的 26 分钟抬高了均值；美国实际为 12 分钟。报告将其置于美国收视图表中，容易造成高估。</a:t>
+              <a:t>【约 20 秒】再看调查范围。报告说平均找节目要 14 分钟，这是六国的简单平均，法国的 26 分钟拉高了均值，美国自己是 12 分钟。但这个数字被放在了美国的收视图表里，读者容易当成美国的数据，从而高估。</a:t>
             </a:r>
             <a:endParaRPr lang="en-US" dirty="0"/>
           </a:p>

--- a/Gracenote报告解读_课堂汇报.pptx
+++ b/Gracenote报告解读_课堂汇报.pptx
@@ -17,11 +17,9 @@
     <p:sldId id="265" r:id="rId11"/>
     <p:sldId id="266" r:id="rId12"/>
     <p:sldId id="267" r:id="rId13"/>
-    <p:sldId id="268" r:id="rId14"/>
-    <p:sldId id="269" r:id="rId15"/>
   </p:sldIdLst>
   <p:notesMasterIdLst>
-    <p:notesMasterId r:id="rId16"/>
+    <p:notesMasterId r:id="rId14"/>
   </p:notesMasterIdLst>
   <p:sldSz cx="12192000" cy="6858000"/>
   <p:notesSz cx="6858000" cy="12192000"/>
@@ -120,13 +118,13 @@
   <p:extLst>
     <p:ext uri="{521415D9-36F7-43E2-AB2F-B90AF26B5E84}">
       <p14:sectionLst xmlns:p14="http://schemas.microsoft.com/office/powerpoint/2010/main">
-        <p14:section name="开场" id="{1a3512dd-4cc5-1a94-a71f-4e5d4eddf0cd}">
+        <p14:section name="开场" id="{26b24f85-4d8a-11bc-a8e1-a6d71a209703}">
           <p14:sldIdLst>
             <p14:sldId id="256"/>
             <p14:sldId id="257"/>
           </p14:sldIdLst>
         </p14:section>
-        <p14:section name="报告介绍" id="{1d80e418-b125-9717-dc20-5e158668e441}">
+        <p14:section name="报告介绍" id="{5031436b-0417-bd18-f831-ab63c9b7ee6d}">
           <p14:sldIdLst>
             <p14:sldId id="258"/>
             <p14:sldId id="259"/>
@@ -134,7 +132,7 @@
             <p14:sldId id="261"/>
           </p14:sldIdLst>
         </p14:section>
-        <p14:section name="方法评价" id="{0eca6383-ac37-7a35-06d9-b80fdacee6dd}">
+        <p14:section name="方法评价" id="{5ceb1784-8add-7693-a31e-60a9102c4a07}">
           <p14:sldIdLst>
             <p14:sldId id="262"/>
             <p14:sldId id="263"/>
@@ -143,15 +141,9 @@
             <p14:sldId id="266"/>
           </p14:sldIdLst>
         </p14:section>
-        <p14:section name="结论" id="{030ef278-5807-bcf8-62f4-79804d5a40d4}">
+        <p14:section name="结论" id="{0966a616-0609-e722-7993-883bdad9d1a2}">
           <p14:sldIdLst>
             <p14:sldId id="267"/>
-          </p14:sldIdLst>
-        </p14:section>
-        <p14:section name="附录（备问）" id="{3a627172-b1e4-41a4-f55f-a555b8ffed76}">
-          <p14:sldIdLst>
-            <p14:sldId id="268"/>
-            <p14:sldId id="269"/>
           </p14:sldIdLst>
         </p14:section>
       </p14:sectionLst>
@@ -558,7 +550,7 @@
           <a:p>
             <a:r>
               <a:rPr lang="en-US" dirty="0"/>
-              <a:t>【约 25 秒】各位老师、同学好。我汇报的是尼尔森旗下 Gracenote 公司 2026 年 4 月的报告《AI 时代的电视搜索与内容发现》。报告称，13 至 14 岁受访者中 54% 每天使用 AI。这个比例来自哪一类样本，是本次评析要看的第一点。</a:t>
+              <a:t>【约 30 秒】各位老师、同学好，我是黄广润。我汇报的是尼尔森旗下 Gracenote 公司 2026 年 4 月的报告，《AI 时代的电视搜索与内容发现》。报告称，13 至 14 岁受访者中 54% 每天使用 AI。这个比例来自哪一类样本，是本次评析要看的第一点。</a:t>
             </a:r>
             <a:endParaRPr lang="en-US" dirty="0"/>
           </a:p>
@@ -822,7 +814,7 @@
           <a:p>
             <a:r>
               <a:rPr lang="en-US" dirty="0"/>
-              <a:t>【约 25 秒】综合来看，前两个环节在 AI 用户范围内基本成立，后两个环节证据不足。报告公开了样本量、调查时间和年龄范围，这是可取之处。最后留一个问题供讨论：要检验找节目困难与退订的因果关系，应怎样设计调查？谢谢大家。</a:t>
+              <a:t>【约 35 秒】总的来说，这份报告对 AI 用户的描述有参考价值，年轻人更多用 AI 找内容、AI 回答不够可靠，这两个方向与皮尤等独立来源一致。但前两个结论只适用于 AI 用户，第三个只能说明相关，第四个报告没有检验。最后留一个问题供讨论：要检验找节目困难与退订的因果关系，应怎样设计调查？谢谢大家。</a:t>
             </a:r>
             <a:endParaRPr lang="en-US" dirty="0"/>
           </a:p>
@@ -846,182 +838,6 @@
             <a:fld id="{F7021451-1387-4CA6-816F-3879F97B5CBC}" type="slidenum">
               <a:rPr lang="en-US"/>
               <a:t>12</a:t>
-            </a:fld>
-            <a:endParaRPr lang="en-US"/>
-          </a:p>
-        </p:txBody>
-      </p:sp>
-    </p:spTree>
-    <p:extLst>
-      <p:ext uri="{BB962C8B-B14F-4D97-AF65-F5344CB8AC3E}">
-        <p14:creationId xmlns:p14="http://schemas.microsoft.com/office/powerpoint/2010/main" val="1024086991"/>
-      </p:ext>
-    </p:extLst>
-  </p:cSld>
-  <p:clrMapOvr>
-    <a:masterClrMapping/>
-  </p:clrMapOvr>
-</p:notes>
-</file>
-
-<file path=ppt/notesSlides/notesSlide13.xml><?xml version="1.0" encoding="utf-8"?>
-<p:notes xmlns:a="http://schemas.openxmlformats.org/drawingml/2006/main" xmlns:r="http://schemas.openxmlformats.org/officeDocument/2006/relationships" xmlns:p="http://schemas.openxmlformats.org/presentationml/2006/main">
-  <p:cSld>
-    <p:spTree>
-      <p:nvGrpSpPr>
-        <p:cNvPr id="1" name=""/>
-        <p:cNvGrpSpPr/>
-        <p:nvPr/>
-      </p:nvGrpSpPr>
-      <p:grpSpPr>
-        <a:xfrm>
-          <a:off x="0" y="0"/>
-          <a:ext cx="0" cy="0"/>
-          <a:chOff x="0" y="0"/>
-          <a:chExt cx="0" cy="0"/>
-        </a:xfrm>
-      </p:grpSpPr>
-      <p:sp>
-        <p:nvSpPr>
-          <p:cNvPr id="2" name="Slide Image Placeholder 1"/>
-          <p:cNvSpPr>
-            <a:spLocks noGrp="1" noRot="1" noChangeAspect="1"/>
-          </p:cNvSpPr>
-          <p:nvPr>
-            <p:ph type="sldImg"/>
-          </p:nvPr>
-        </p:nvSpPr>
-        <p:spPr/>
-      </p:sp>
-      <p:sp>
-        <p:nvSpPr>
-          <p:cNvPr id="3" name="Notes Placeholder 2"/>
-          <p:cNvSpPr>
-            <a:spLocks noGrp="1"/>
-          </p:cNvSpPr>
-          <p:nvPr>
-            <p:ph type="body" idx="1"/>
-          </p:nvPr>
-        </p:nvSpPr>
-        <p:spPr/>
-        <p:txBody>
-          <a:bodyPr/>
-          <a:lstStyle/>
-          <a:p>
-            <a:r>
-              <a:rPr lang="en-US" dirty="0"/>
-              <a:t>备问用，不计入汇报时间。被问及数据来源与方法披露时使用。</a:t>
-            </a:r>
-            <a:endParaRPr lang="en-US" dirty="0"/>
-          </a:p>
-        </p:txBody>
-      </p:sp>
-      <p:sp>
-        <p:nvSpPr>
-          <p:cNvPr id="4" name="Slide Number Placeholder 3"/>
-          <p:cNvSpPr>
-            <a:spLocks noGrp="1"/>
-          </p:cNvSpPr>
-          <p:nvPr>
-            <p:ph type="sldNum" sz="quarter" idx="10"/>
-          </p:nvPr>
-        </p:nvSpPr>
-        <p:spPr/>
-        <p:txBody>
-          <a:bodyPr/>
-          <a:lstStyle/>
-          <a:p>
-            <a:fld id="{F7021451-1387-4CA6-816F-3879F97B5CBC}" type="slidenum">
-              <a:rPr lang="en-US"/>
-              <a:t>13</a:t>
-            </a:fld>
-            <a:endParaRPr lang="en-US"/>
-          </a:p>
-        </p:txBody>
-      </p:sp>
-    </p:spTree>
-    <p:extLst>
-      <p:ext uri="{BB962C8B-B14F-4D97-AF65-F5344CB8AC3E}">
-        <p14:creationId xmlns:p14="http://schemas.microsoft.com/office/powerpoint/2010/main" val="1024086991"/>
-      </p:ext>
-    </p:extLst>
-  </p:cSld>
-  <p:clrMapOvr>
-    <a:masterClrMapping/>
-  </p:clrMapOvr>
-</p:notes>
-</file>
-
-<file path=ppt/notesSlides/notesSlide14.xml><?xml version="1.0" encoding="utf-8"?>
-<p:notes xmlns:a="http://schemas.openxmlformats.org/drawingml/2006/main" xmlns:r="http://schemas.openxmlformats.org/officeDocument/2006/relationships" xmlns:p="http://schemas.openxmlformats.org/presentationml/2006/main">
-  <p:cSld>
-    <p:spTree>
-      <p:nvGrpSpPr>
-        <p:cNvPr id="1" name=""/>
-        <p:cNvGrpSpPr/>
-        <p:nvPr/>
-      </p:nvGrpSpPr>
-      <p:grpSpPr>
-        <a:xfrm>
-          <a:off x="0" y="0"/>
-          <a:ext cx="0" cy="0"/>
-          <a:chOff x="0" y="0"/>
-          <a:chExt cx="0" cy="0"/>
-        </a:xfrm>
-      </p:grpSpPr>
-      <p:sp>
-        <p:nvSpPr>
-          <p:cNvPr id="2" name="Slide Image Placeholder 1"/>
-          <p:cNvSpPr>
-            <a:spLocks noGrp="1" noRot="1" noChangeAspect="1"/>
-          </p:cNvSpPr>
-          <p:nvPr>
-            <p:ph type="sldImg"/>
-          </p:nvPr>
-        </p:nvSpPr>
-        <p:spPr/>
-      </p:sp>
-      <p:sp>
-        <p:nvSpPr>
-          <p:cNvPr id="3" name="Notes Placeholder 2"/>
-          <p:cNvSpPr>
-            <a:spLocks noGrp="1"/>
-          </p:cNvSpPr>
-          <p:nvPr>
-            <p:ph type="body" idx="1"/>
-          </p:nvPr>
-        </p:nvSpPr>
-        <p:spPr/>
-        <p:txBody>
-          <a:bodyPr/>
-          <a:lstStyle/>
-          <a:p>
-            <a:r>
-              <a:rPr lang="en-US" dirty="0"/>
-              <a:t>备问用，不计入汇报时间。被问及引用数据是否准确时使用。</a:t>
-            </a:r>
-            <a:endParaRPr lang="en-US" dirty="0"/>
-          </a:p>
-        </p:txBody>
-      </p:sp>
-      <p:sp>
-        <p:nvSpPr>
-          <p:cNvPr id="4" name="Slide Number Placeholder 3"/>
-          <p:cNvSpPr>
-            <a:spLocks noGrp="1"/>
-          </p:cNvSpPr>
-          <p:nvPr>
-            <p:ph type="sldNum" sz="quarter" idx="10"/>
-          </p:nvPr>
-        </p:nvSpPr>
-        <p:spPr/>
-        <p:txBody>
-          <a:bodyPr/>
-          <a:lstStyle/>
-          <a:p>
-            <a:fld id="{F7021451-1387-4CA6-816F-3879F97B5CBC}" type="slidenum">
-              <a:rPr lang="en-US"/>
-              <a:t>14</a:t>
             </a:fld>
             <a:endParaRPr lang="en-US"/>
           </a:p>
@@ -1526,7 +1342,7 @@
           <a:p>
             <a:r>
               <a:rPr lang="en-US" dirty="0"/>
-              <a:t>【约 20 秒】报告的推论共四个环节：年轻人依赖 AI，对 AI 信任不足，找节目困难导致退订，因此 AI 应接入行业数据。下面从调查对象、范围、时间和研究方法四个方面逐项检查。</a:t>
+              <a:t>【约 15 秒】报告的推论共四个环节：年轻人依赖 AI，对 AI 信任不足，找节目困难导致退订，因此 AI 应接入行业数据。下面从四个方面逐项检查。</a:t>
             </a:r>
             <a:endParaRPr lang="en-US" dirty="0"/>
           </a:p>
@@ -1614,7 +1430,7 @@
           <a:p>
             <a:r>
               <a:rPr lang="en-US" dirty="0"/>
-              <a:t>【约 20 秒】先看调查对象。4003 名受访者都是 AI 聊天机器人用户，样本不包括不用 AI 的人。所以 54% 和 75% 只代表 AI 用户，不能当作美国人整体的情况，而报告正文有几处用了“美国人”的表述。</a:t>
+              <a:t>【约 20 秒】先看调查对象。4003 名受访者都是 AI 聊天机器人用户，样本不包括不用 AI 的人。所以 54% 和 75% 只代表 AI 用户，不能当作美国人整体的情况，报告正文却有几处写成“美国人”。</a:t>
             </a:r>
             <a:endParaRPr lang="en-US" dirty="0"/>
           </a:p>
@@ -1702,7 +1518,7 @@
           <a:p>
             <a:r>
               <a:rPr lang="en-US" dirty="0"/>
-              <a:t>【约 20 秒】再看调查范围。报告说平均找节目要 14 分钟，这是六国的简单平均，法国的 26 分钟拉高了均值，美国自己是 12 分钟。但这个数字被放在了美国的收视图表里，读者容易当成美国的数据，从而高估。</a:t>
+              <a:t>【约 20 秒】再看调查范围。报告说平均找节目要 14 分钟，这是六国的简单平均，法国的 26 分钟拉高了均值，美国自己是 12 分钟。但它被放在美国的收视图表里，容易被当成美国的数据。</a:t>
             </a:r>
             <a:endParaRPr lang="en-US" dirty="0"/>
           </a:p>
@@ -2610,7 +2426,43 @@
       </p:sp>
       <p:sp>
         <p:nvSpPr>
-          <p:cNvPr id="6" name="封面分隔线"/>
+          <p:cNvPr id="6" name="汇报人"/>
+          <p:cNvSpPr txBox="1"/>
+          <p:nvPr/>
+        </p:nvSpPr>
+        <p:spPr>
+          <a:xfrm>
+            <a:off x="731520" y="5989320"/>
+            <a:ext cx="5394960" cy="365760"/>
+          </a:xfrm>
+          <a:prstGeom prst="rect">
+            <a:avLst/>
+          </a:prstGeom>
+          <a:noFill/>
+          <a:ln/>
+        </p:spPr>
+        <p:txBody>
+          <a:bodyPr wrap="square" lIns="0" tIns="0" rIns="0" bIns="0" rtlCol="0" anchor="ctr"/>
+          <a:lstStyle/>
+          <a:p>
+            <a:pPr indent="0" marL="0">
+              <a:buNone/>
+            </a:pPr>
+            <a:r>
+              <a:rPr lang="en-US" sz="1500" dirty="0">
+                <a:solidFill>
+                  <a:schemeClr val="accent6"/>
+                </a:solidFill>
+              </a:rPr>
+              <a:t>黄广润　524031910373</a:t>
+            </a:r>
+            <a:endParaRPr lang="en-US" sz="1500" dirty="0"/>
+          </a:p>
+        </p:txBody>
+      </p:sp>
+      <p:sp>
+        <p:nvSpPr>
+          <p:cNvPr id="7" name="封面分隔线"/>
           <p:cNvSpPr/>
           <p:nvPr/>
         </p:nvSpPr>
@@ -2633,7 +2485,7 @@
       </p:sp>
       <p:sp>
         <p:nvSpPr>
-          <p:cNvPr id="7" name="封面数字"/>
+          <p:cNvPr id="8" name="封面数字"/>
           <p:cNvSpPr txBox="1"/>
           <p:nvPr/>
         </p:nvSpPr>
@@ -2672,7 +2524,7 @@
       </p:sp>
       <p:sp>
         <p:nvSpPr>
-          <p:cNvPr id="8" name="封面问题"/>
+          <p:cNvPr id="9" name="封面问题"/>
           <p:cNvSpPr txBox="1"/>
           <p:nvPr/>
         </p:nvSpPr>
@@ -2806,7 +2658,7 @@
                                           </p:stCondLst>
                                         </p:cTn>
                                         <p:tgtEl>
-                                          <p:spTgt spid="6"/>
+                                          <p:spTgt spid="7"/>
                                         </p:tgtEl>
                                         <p:attrNameLst>
                                           <p:attrName>style.visibility</p:attrName>
@@ -2820,7 +2672,7 @@
                                       <p:cBhvr>
                                         <p:cTn id="9" dur="500"/>
                                         <p:tgtEl>
-                                          <p:spTgt spid="6"/>
+                                          <p:spTgt spid="7"/>
                                         </p:tgtEl>
                                       </p:cBhvr>
                                     </p:animEffect>
@@ -2841,7 +2693,7 @@
                                           </p:stCondLst>
                                         </p:cTn>
                                         <p:tgtEl>
-                                          <p:spTgt spid="7"/>
+                                          <p:spTgt spid="8"/>
                                         </p:tgtEl>
                                         <p:attrNameLst>
                                           <p:attrName>style.visibility</p:attrName>
@@ -2855,7 +2707,7 @@
                                       <p:cBhvr>
                                         <p:cTn id="12" dur="500"/>
                                         <p:tgtEl>
-                                          <p:spTgt spid="7"/>
+                                          <p:spTgt spid="8"/>
                                         </p:tgtEl>
                                       </p:cBhvr>
                                     </p:animEffect>
@@ -2876,7 +2728,7 @@
                                           </p:stCondLst>
                                         </p:cTn>
                                         <p:tgtEl>
-                                          <p:spTgt spid="8"/>
+                                          <p:spTgt spid="9"/>
                                         </p:tgtEl>
                                         <p:attrNameLst>
                                           <p:attrName>style.visibility</p:attrName>
@@ -2890,7 +2742,7 @@
                                       <p:cBhvr>
                                         <p:cTn id="15" dur="500"/>
                                         <p:tgtEl>
-                                          <p:spTgt spid="8"/>
+                                          <p:spTgt spid="9"/>
                                         </p:tgtEl>
                                       </p:cBhvr>
                                     </p:animEffect>
@@ -2925,9 +2777,9 @@
       </p:par>
     </p:tnLst>
     <p:bldLst>
-      <p:bldP spid="6" grpId="0" animBg="1"/>
       <p:bldP spid="7" grpId="0" animBg="1"/>
       <p:bldP spid="8" grpId="0" animBg="1"/>
+      <p:bldP spid="9" grpId="0" animBg="1"/>
     </p:bldLst>
   </p:timing>
 </p:sld>
@@ -6601,7 +6453,7 @@
                   <a:schemeClr val="accent6"/>
                 </a:solidFill>
               </a:rPr>
-              <a:t>报告公开了样本量、调查时间与年龄范围，数据可复核。</a:t>
+              <a:t>年轻人更多用 AI 找内容、AI 回答不够可靠，这两个方向与皮尤、Veed 等独立来源一致。</a:t>
             </a:r>
             <a:endParaRPr lang="en-US" sz="1600" dirty="0"/>
           </a:p>
@@ -7370,2327 +7222,6 @@
       <p:bldP spid="21" grpId="0" animBg="1"/>
     </p:bldLst>
   </p:timing>
-</p:sld>
-</file>
-
-<file path=ppt/slides/slide13.xml><?xml version="1.0" encoding="utf-8"?>
-<p:sld xmlns:a="http://schemas.openxmlformats.org/drawingml/2006/main" xmlns:r="http://schemas.openxmlformats.org/officeDocument/2006/relationships" xmlns:p="http://schemas.openxmlformats.org/presentationml/2006/main">
-  <p:cSld name="Slide 13">
-    <p:spTree>
-      <p:nvGrpSpPr>
-        <p:cNvPr id="1" name=""/>
-        <p:cNvGrpSpPr/>
-        <p:nvPr/>
-      </p:nvGrpSpPr>
-      <p:grpSpPr>
-        <a:xfrm>
-          <a:off x="0" y="0"/>
-          <a:ext cx="0" cy="0"/>
-          <a:chOff x="0" y="0"/>
-          <a:chExt cx="0" cy="0"/>
-        </a:xfrm>
-      </p:grpSpPr>
-      <p:sp>
-        <p:nvSpPr>
-          <p:cNvPr id="2" name="章节标记"/>
-          <p:cNvSpPr txBox="1"/>
-          <p:nvPr/>
-        </p:nvSpPr>
-        <p:spPr>
-          <a:xfrm>
-            <a:off x="548640" y="274320"/>
-            <a:ext cx="7315200" cy="320040"/>
-          </a:xfrm>
-          <a:prstGeom prst="rect">
-            <a:avLst/>
-          </a:prstGeom>
-          <a:noFill/>
-          <a:ln/>
-        </p:spPr>
-        <p:txBody>
-          <a:bodyPr wrap="square" lIns="0" tIns="0" rIns="0" bIns="0" rtlCol="0" anchor="ctr"/>
-          <a:lstStyle/>
-          <a:p>
-            <a:pPr indent="0" marL="0">
-              <a:buNone/>
-            </a:pPr>
-            <a:r>
-              <a:rPr lang="en-US" sz="1400" b="1" dirty="0">
-                <a:solidFill>
-                  <a:schemeClr val="accent3"/>
-                </a:solidFill>
-              </a:rPr>
-              <a:t>附录（备问）</a:t>
-            </a:r>
-            <a:endParaRPr lang="en-US" sz="1400" dirty="0"/>
-          </a:p>
-        </p:txBody>
-      </p:sp>
-      <p:sp>
-        <p:nvSpPr>
-          <p:cNvPr id="3" name="Text 0"/>
-          <p:cNvSpPr/>
-          <p:nvPr>
-            <p:ph idx="100" type="title" hasCustomPrompt="1"/>
-          </p:nvPr>
-        </p:nvSpPr>
-        <p:spPr>
-          <a:xfrm>
-            <a:off x="548640" y="640080"/>
-            <a:ext cx="11064240" cy="685800"/>
-          </a:xfrm>
-          <a:prstGeom prst="rect">
-            <a:avLst/>
-          </a:prstGeom>
-          <a:noFill/>
-          <a:ln/>
-        </p:spPr>
-        <p:txBody>
-          <a:bodyPr wrap="square" lIns="0" tIns="0" rIns="0" bIns="0" rtlCol="0" anchor="ctr"/>
-          <a:lstStyle/>
-          <a:p>
-            <a:pPr algn="l" indent="0" marL="0">
-              <a:buNone/>
-            </a:pPr>
-            <a:r>
-              <a:rPr lang="en-US" sz="3000" b="1" dirty="0">
-                <a:solidFill>
-                  <a:schemeClr val="tx2"/>
-                </a:solidFill>
-              </a:rPr>
-              <a:t>附录一：数据来源的方法披露</a:t>
-            </a:r>
-            <a:endParaRPr lang="en-US" sz="3000" dirty="0"/>
-          </a:p>
-        </p:txBody>
-      </p:sp>
-      <p:sp>
-        <p:nvSpPr>
-          <p:cNvPr id="4" name="来源卡1"/>
-          <p:cNvSpPr/>
-          <p:nvPr/>
-        </p:nvSpPr>
-        <p:spPr>
-          <a:xfrm>
-            <a:off x="548640" y="1554480"/>
-            <a:ext cx="2651760" cy="1298448"/>
-          </a:xfrm>
-          <a:prstGeom prst="roundRect">
-            <a:avLst>
-              <a:gd name="adj" fmla="val 3521"/>
-            </a:avLst>
-          </a:prstGeom>
-          <a:solidFill>
-            <a:schemeClr val="bg2"/>
-          </a:solidFill>
-          <a:ln w="12700">
-            <a:solidFill>
-              <a:schemeClr val="bg2"/>
-            </a:solidFill>
-            <a:prstDash val="solid"/>
-          </a:ln>
-        </p:spPr>
-      </p:sp>
-      <p:sp>
-        <p:nvSpPr>
-          <p:cNvPr id="5" name="来源状态1"/>
-          <p:cNvSpPr txBox="1"/>
-          <p:nvPr/>
-        </p:nvSpPr>
-        <p:spPr>
-          <a:xfrm>
-            <a:off x="731520" y="1664208"/>
-            <a:ext cx="2286000" cy="320040"/>
-          </a:xfrm>
-          <a:prstGeom prst="rect">
-            <a:avLst/>
-          </a:prstGeom>
-          <a:noFill/>
-          <a:ln/>
-        </p:spPr>
-        <p:txBody>
-          <a:bodyPr wrap="square" lIns="0" tIns="0" rIns="0" bIns="0" rtlCol="0" anchor="ctr"/>
-          <a:lstStyle/>
-          <a:p>
-            <a:pPr indent="0" marL="0">
-              <a:buNone/>
-            </a:pPr>
-            <a:r>
-              <a:rPr lang="en-US" sz="1200" b="1" dirty="0">
-                <a:solidFill>
-                  <a:schemeClr val="accent3"/>
-                </a:solidFill>
-              </a:rPr>
-              <a:t>关键信息未公开</a:t>
-            </a:r>
-            <a:endParaRPr lang="en-US" sz="1200" dirty="0"/>
-          </a:p>
-        </p:txBody>
-      </p:sp>
-      <p:sp>
-        <p:nvSpPr>
-          <p:cNvPr id="6" name="来源说明1"/>
-          <p:cNvSpPr txBox="1"/>
-          <p:nvPr/>
-        </p:nvSpPr>
-        <p:spPr>
-          <a:xfrm>
-            <a:off x="731520" y="1993392"/>
-            <a:ext cx="2377440" cy="804672"/>
-          </a:xfrm>
-          <a:prstGeom prst="rect">
-            <a:avLst/>
-          </a:prstGeom>
-          <a:noFill/>
-          <a:ln/>
-        </p:spPr>
-        <p:txBody>
-          <a:bodyPr wrap="square" lIns="0" tIns="0" rIns="0" bIns="0" rtlCol="0" anchor="t"/>
-          <a:lstStyle/>
-          <a:p>
-            <a:pPr indent="0" marL="0">
-              <a:spcAft>
-                <a:spcPts val="300"/>
-              </a:spcAft>
-              <a:buNone/>
-            </a:pPr>
-            <a:r>
-              <a:rPr lang="en-US" sz="1500" b="1" dirty="0">
-                <a:solidFill>
-                  <a:schemeClr val="tx2"/>
-                </a:solidFill>
-              </a:rPr>
-              <a:t>Gracenote 2026 AI 调查</a:t>
-            </a:r>
-            <a:endParaRPr lang="en-US" sz="1500" dirty="0"/>
-          </a:p>
-          <a:p>
-            <a:pPr indent="0" marL="0">
-              <a:spcAft>
-                <a:spcPts val="300"/>
-              </a:spcAft>
-              <a:buNone/>
-            </a:pPr>
-            <a:r>
-              <a:rPr lang="en-US" sz="1200" dirty="0">
-                <a:solidFill>
-                  <a:schemeClr val="tx1"/>
-                </a:solidFill>
-              </a:rPr>
-              <a:t>线上 · 美国 AI 用户 4,003 人</a:t>
-            </a:r>
-            <a:endParaRPr lang="en-US" sz="1500" dirty="0"/>
-          </a:p>
-        </p:txBody>
-      </p:sp>
-      <p:sp>
-        <p:nvSpPr>
-          <p:cNvPr id="7" name="来源卡2"/>
-          <p:cNvSpPr/>
-          <p:nvPr/>
-        </p:nvSpPr>
-        <p:spPr>
-          <a:xfrm>
-            <a:off x="3360420" y="1554480"/>
-            <a:ext cx="2651760" cy="1298448"/>
-          </a:xfrm>
-          <a:prstGeom prst="roundRect">
-            <a:avLst>
-              <a:gd name="adj" fmla="val 3521"/>
-            </a:avLst>
-          </a:prstGeom>
-          <a:solidFill>
-            <a:schemeClr val="bg2"/>
-          </a:solidFill>
-          <a:ln w="12700">
-            <a:solidFill>
-              <a:schemeClr val="bg2"/>
-            </a:solidFill>
-            <a:prstDash val="solid"/>
-          </a:ln>
-        </p:spPr>
-      </p:sp>
-      <p:sp>
-        <p:nvSpPr>
-          <p:cNvPr id="8" name="来源状态2"/>
-          <p:cNvSpPr txBox="1"/>
-          <p:nvPr/>
-        </p:nvSpPr>
-        <p:spPr>
-          <a:xfrm>
-            <a:off x="3543300" y="1664208"/>
-            <a:ext cx="2286000" cy="320040"/>
-          </a:xfrm>
-          <a:prstGeom prst="rect">
-            <a:avLst/>
-          </a:prstGeom>
-          <a:noFill/>
-          <a:ln/>
-        </p:spPr>
-        <p:txBody>
-          <a:bodyPr wrap="square" lIns="0" tIns="0" rIns="0" bIns="0" rtlCol="0" anchor="ctr"/>
-          <a:lstStyle/>
-          <a:p>
-            <a:pPr indent="0" marL="0">
-              <a:buNone/>
-            </a:pPr>
-            <a:r>
-              <a:rPr lang="en-US" sz="1200" b="1" dirty="0">
-                <a:solidFill>
-                  <a:schemeClr val="accent3"/>
-                </a:solidFill>
-              </a:rPr>
-              <a:t>关键信息未公开</a:t>
-            </a:r>
-            <a:endParaRPr lang="en-US" sz="1200" dirty="0"/>
-          </a:p>
-        </p:txBody>
-      </p:sp>
-      <p:sp>
-        <p:nvSpPr>
-          <p:cNvPr id="9" name="来源说明2"/>
-          <p:cNvSpPr txBox="1"/>
-          <p:nvPr/>
-        </p:nvSpPr>
-        <p:spPr>
-          <a:xfrm>
-            <a:off x="3543300" y="1993392"/>
-            <a:ext cx="2377440" cy="804672"/>
-          </a:xfrm>
-          <a:prstGeom prst="rect">
-            <a:avLst/>
-          </a:prstGeom>
-          <a:noFill/>
-          <a:ln/>
-        </p:spPr>
-        <p:txBody>
-          <a:bodyPr wrap="square" lIns="0" tIns="0" rIns="0" bIns="0" rtlCol="0" anchor="t"/>
-          <a:lstStyle/>
-          <a:p>
-            <a:pPr indent="0" marL="0">
-              <a:spcAft>
-                <a:spcPts val="300"/>
-              </a:spcAft>
-              <a:buNone/>
-            </a:pPr>
-            <a:r>
-              <a:rPr lang="en-US" sz="1500" b="1" dirty="0">
-                <a:solidFill>
-                  <a:schemeClr val="tx2"/>
-                </a:solidFill>
-              </a:rPr>
-              <a:t>Gracenote 2025 流媒体调查</a:t>
-            </a:r>
-            <a:endParaRPr lang="en-US" sz="1500" dirty="0"/>
-          </a:p>
-          <a:p>
-            <a:pPr indent="0" marL="0">
-              <a:spcAft>
-                <a:spcPts val="300"/>
-              </a:spcAft>
-              <a:buNone/>
-            </a:pPr>
-            <a:r>
-              <a:rPr lang="en-US" sz="1200" dirty="0">
-                <a:solidFill>
-                  <a:schemeClr val="tx1"/>
-                </a:solidFill>
-              </a:rPr>
-              <a:t>线上 · 六国各 500 人</a:t>
-            </a:r>
-            <a:endParaRPr lang="en-US" sz="1500" dirty="0"/>
-          </a:p>
-        </p:txBody>
-      </p:sp>
-      <p:sp>
-        <p:nvSpPr>
-          <p:cNvPr id="10" name="来源卡3"/>
-          <p:cNvSpPr/>
-          <p:nvPr/>
-        </p:nvSpPr>
-        <p:spPr>
-          <a:xfrm>
-            <a:off x="6172200" y="1554480"/>
-            <a:ext cx="2651760" cy="1298448"/>
-          </a:xfrm>
-          <a:prstGeom prst="roundRect">
-            <a:avLst>
-              <a:gd name="adj" fmla="val 3521"/>
-            </a:avLst>
-          </a:prstGeom>
-          <a:solidFill>
-            <a:schemeClr val="bg2"/>
-          </a:solidFill>
-          <a:ln w="12700">
-            <a:solidFill>
-              <a:schemeClr val="bg2"/>
-            </a:solidFill>
-            <a:prstDash val="solid"/>
-          </a:ln>
-        </p:spPr>
-      </p:sp>
-      <p:sp>
-        <p:nvSpPr>
-          <p:cNvPr id="11" name="来源状态3"/>
-          <p:cNvSpPr txBox="1"/>
-          <p:nvPr/>
-        </p:nvSpPr>
-        <p:spPr>
-          <a:xfrm>
-            <a:off x="6355080" y="1664208"/>
-            <a:ext cx="2286000" cy="320040"/>
-          </a:xfrm>
-          <a:prstGeom prst="rect">
-            <a:avLst/>
-          </a:prstGeom>
-          <a:noFill/>
-          <a:ln/>
-        </p:spPr>
-        <p:txBody>
-          <a:bodyPr wrap="square" lIns="0" tIns="0" rIns="0" bIns="0" rtlCol="0" anchor="ctr"/>
-          <a:lstStyle/>
-          <a:p>
-            <a:pPr indent="0" marL="0">
-              <a:buNone/>
-            </a:pPr>
-            <a:r>
-              <a:rPr lang="en-US" sz="1200" b="1" dirty="0">
-                <a:solidFill>
-                  <a:schemeClr val="accent1"/>
-                </a:solidFill>
-              </a:rPr>
-              <a:t>方法公开</a:t>
-            </a:r>
-            <a:endParaRPr lang="en-US" sz="1200" dirty="0"/>
-          </a:p>
-        </p:txBody>
-      </p:sp>
-      <p:sp>
-        <p:nvSpPr>
-          <p:cNvPr id="12" name="来源说明3"/>
-          <p:cNvSpPr txBox="1"/>
-          <p:nvPr/>
-        </p:nvSpPr>
-        <p:spPr>
-          <a:xfrm>
-            <a:off x="6355080" y="1993392"/>
-            <a:ext cx="2377440" cy="804672"/>
-          </a:xfrm>
-          <a:prstGeom prst="rect">
-            <a:avLst/>
-          </a:prstGeom>
-          <a:noFill/>
-          <a:ln/>
-        </p:spPr>
-        <p:txBody>
-          <a:bodyPr wrap="square" lIns="0" tIns="0" rIns="0" bIns="0" rtlCol="0" anchor="t"/>
-          <a:lstStyle/>
-          <a:p>
-            <a:pPr indent="0" marL="0">
-              <a:spcAft>
-                <a:spcPts val="300"/>
-              </a:spcAft>
-              <a:buNone/>
-            </a:pPr>
-            <a:r>
-              <a:rPr lang="en-US" sz="1500" b="1" dirty="0">
-                <a:solidFill>
-                  <a:schemeClr val="tx2"/>
-                </a:solidFill>
-              </a:rPr>
-              <a:t>皮尤研究中心青少年调查</a:t>
-            </a:r>
-            <a:endParaRPr lang="en-US" sz="1500" dirty="0"/>
-          </a:p>
-          <a:p>
-            <a:pPr indent="0" marL="0">
-              <a:spcAft>
-                <a:spcPts val="300"/>
-              </a:spcAft>
-              <a:buNone/>
-            </a:pPr>
-            <a:r>
-              <a:rPr lang="en-US" sz="1200" dirty="0">
-                <a:solidFill>
-                  <a:schemeClr val="tx1"/>
-                </a:solidFill>
-              </a:rPr>
-              <a:t>概率样本 1,458 人 · 加权</a:t>
-            </a:r>
-            <a:endParaRPr lang="en-US" sz="1500" dirty="0"/>
-          </a:p>
-        </p:txBody>
-      </p:sp>
-      <p:sp>
-        <p:nvSpPr>
-          <p:cNvPr id="13" name="来源卡4"/>
-          <p:cNvSpPr/>
-          <p:nvPr/>
-        </p:nvSpPr>
-        <p:spPr>
-          <a:xfrm>
-            <a:off x="8983980" y="1554480"/>
-            <a:ext cx="2651760" cy="1298448"/>
-          </a:xfrm>
-          <a:prstGeom prst="roundRect">
-            <a:avLst>
-              <a:gd name="adj" fmla="val 3521"/>
-            </a:avLst>
-          </a:prstGeom>
-          <a:solidFill>
-            <a:schemeClr val="bg2"/>
-          </a:solidFill>
-          <a:ln w="12700">
-            <a:solidFill>
-              <a:schemeClr val="bg2"/>
-            </a:solidFill>
-            <a:prstDash val="solid"/>
-          </a:ln>
-        </p:spPr>
-      </p:sp>
-      <p:sp>
-        <p:nvSpPr>
-          <p:cNvPr id="14" name="来源状态4"/>
-          <p:cNvSpPr txBox="1"/>
-          <p:nvPr/>
-        </p:nvSpPr>
-        <p:spPr>
-          <a:xfrm>
-            <a:off x="9166860" y="1664208"/>
-            <a:ext cx="2286000" cy="320040"/>
-          </a:xfrm>
-          <a:prstGeom prst="rect">
-            <a:avLst/>
-          </a:prstGeom>
-          <a:noFill/>
-          <a:ln/>
-        </p:spPr>
-        <p:txBody>
-          <a:bodyPr wrap="square" lIns="0" tIns="0" rIns="0" bIns="0" rtlCol="0" anchor="ctr"/>
-          <a:lstStyle/>
-          <a:p>
-            <a:pPr indent="0" marL="0">
-              <a:buNone/>
-            </a:pPr>
-            <a:r>
-              <a:rPr lang="en-US" sz="1200" b="1" dirty="0">
-                <a:solidFill>
-                  <a:schemeClr val="accent1"/>
-                </a:solidFill>
-              </a:rPr>
-              <a:t>方法公开</a:t>
-            </a:r>
-            <a:endParaRPr lang="en-US" sz="1200" dirty="0"/>
-          </a:p>
-        </p:txBody>
-      </p:sp>
-      <p:sp>
-        <p:nvSpPr>
-          <p:cNvPr id="15" name="来源说明4"/>
-          <p:cNvSpPr txBox="1"/>
-          <p:nvPr/>
-        </p:nvSpPr>
-        <p:spPr>
-          <a:xfrm>
-            <a:off x="9166860" y="1993392"/>
-            <a:ext cx="2377440" cy="804672"/>
-          </a:xfrm>
-          <a:prstGeom prst="rect">
-            <a:avLst/>
-          </a:prstGeom>
-          <a:noFill/>
-          <a:ln/>
-        </p:spPr>
-        <p:txBody>
-          <a:bodyPr wrap="square" lIns="0" tIns="0" rIns="0" bIns="0" rtlCol="0" anchor="t"/>
-          <a:lstStyle/>
-          <a:p>
-            <a:pPr indent="0" marL="0">
-              <a:spcAft>
-                <a:spcPts val="300"/>
-              </a:spcAft>
-              <a:buNone/>
-            </a:pPr>
-            <a:r>
-              <a:rPr lang="en-US" sz="1500" b="1" dirty="0">
-                <a:solidFill>
-                  <a:schemeClr val="tx2"/>
-                </a:solidFill>
-              </a:rPr>
-              <a:t>德勤数字媒体趋势调查</a:t>
-            </a:r>
-            <a:endParaRPr lang="en-US" sz="1500" dirty="0"/>
-          </a:p>
-          <a:p>
-            <a:pPr indent="0" marL="0">
-              <a:spcAft>
-                <a:spcPts val="300"/>
-              </a:spcAft>
-              <a:buNone/>
-            </a:pPr>
-            <a:r>
-              <a:rPr lang="en-US" sz="1200" dirty="0">
-                <a:solidFill>
-                  <a:schemeClr val="tx1"/>
-                </a:solidFill>
-              </a:rPr>
-              <a:t>美国 3,595 人 · 人口普查加权</a:t>
-            </a:r>
-            <a:endParaRPr lang="en-US" sz="1500" dirty="0"/>
-          </a:p>
-        </p:txBody>
-      </p:sp>
-      <p:sp>
-        <p:nvSpPr>
-          <p:cNvPr id="16" name="来源卡5"/>
-          <p:cNvSpPr/>
-          <p:nvPr/>
-        </p:nvSpPr>
-        <p:spPr>
-          <a:xfrm>
-            <a:off x="548640" y="3017520"/>
-            <a:ext cx="2651760" cy="1298448"/>
-          </a:xfrm>
-          <a:prstGeom prst="roundRect">
-            <a:avLst>
-              <a:gd name="adj" fmla="val 3521"/>
-            </a:avLst>
-          </a:prstGeom>
-          <a:solidFill>
-            <a:schemeClr val="bg2"/>
-          </a:solidFill>
-          <a:ln w="12700">
-            <a:solidFill>
-              <a:schemeClr val="bg2"/>
-            </a:solidFill>
-            <a:prstDash val="solid"/>
-          </a:ln>
-        </p:spPr>
-      </p:sp>
-      <p:sp>
-        <p:nvSpPr>
-          <p:cNvPr id="17" name="来源状态5"/>
-          <p:cNvSpPr txBox="1"/>
-          <p:nvPr/>
-        </p:nvSpPr>
-        <p:spPr>
-          <a:xfrm>
-            <a:off x="731520" y="3127248"/>
-            <a:ext cx="2286000" cy="320040"/>
-          </a:xfrm>
-          <a:prstGeom prst="rect">
-            <a:avLst/>
-          </a:prstGeom>
-          <a:noFill/>
-          <a:ln/>
-        </p:spPr>
-        <p:txBody>
-          <a:bodyPr wrap="square" lIns="0" tIns="0" rIns="0" bIns="0" rtlCol="0" anchor="ctr"/>
-          <a:lstStyle/>
-          <a:p>
-            <a:pPr indent="0" marL="0">
-              <a:buNone/>
-            </a:pPr>
-            <a:r>
-              <a:rPr lang="en-US" sz="1200" b="1" dirty="0">
-                <a:solidFill>
-                  <a:schemeClr val="accent1"/>
-                </a:solidFill>
-              </a:rPr>
-              <a:t>方法公开</a:t>
-            </a:r>
-            <a:endParaRPr lang="en-US" sz="1200" dirty="0"/>
-          </a:p>
-        </p:txBody>
-      </p:sp>
-      <p:sp>
-        <p:nvSpPr>
-          <p:cNvPr id="18" name="来源说明5"/>
-          <p:cNvSpPr txBox="1"/>
-          <p:nvPr/>
-        </p:nvSpPr>
-        <p:spPr>
-          <a:xfrm>
-            <a:off x="731520" y="3456432"/>
-            <a:ext cx="2377440" cy="804672"/>
-          </a:xfrm>
-          <a:prstGeom prst="rect">
-            <a:avLst/>
-          </a:prstGeom>
-          <a:noFill/>
-          <a:ln/>
-        </p:spPr>
-        <p:txBody>
-          <a:bodyPr wrap="square" lIns="0" tIns="0" rIns="0" bIns="0" rtlCol="0" anchor="t"/>
-          <a:lstStyle/>
-          <a:p>
-            <a:pPr indent="0" marL="0">
-              <a:spcAft>
-                <a:spcPts val="300"/>
-              </a:spcAft>
-              <a:buNone/>
-            </a:pPr>
-            <a:r>
-              <a:rPr lang="en-US" sz="1500" b="1" dirty="0">
-                <a:solidFill>
-                  <a:schemeClr val="tx2"/>
-                </a:solidFill>
-              </a:rPr>
-              <a:t>尼尔森 NPOWER</a:t>
-            </a:r>
-            <a:endParaRPr lang="en-US" sz="1500" dirty="0"/>
-          </a:p>
-          <a:p>
-            <a:pPr indent="0" marL="0">
-              <a:spcAft>
-                <a:spcPts val="300"/>
-              </a:spcAft>
-              <a:buNone/>
-            </a:pPr>
-            <a:r>
-              <a:rPr lang="en-US" sz="1200" dirty="0">
-                <a:solidFill>
-                  <a:schemeClr val="tx1"/>
-                </a:solidFill>
-              </a:rPr>
-              <a:t>测量仪样本户 + 机顶盒数据</a:t>
-            </a:r>
-            <a:endParaRPr lang="en-US" sz="1500" dirty="0"/>
-          </a:p>
-        </p:txBody>
-      </p:sp>
-      <p:sp>
-        <p:nvSpPr>
-          <p:cNvPr id="19" name="来源卡6"/>
-          <p:cNvSpPr/>
-          <p:nvPr/>
-        </p:nvSpPr>
-        <p:spPr>
-          <a:xfrm>
-            <a:off x="3360420" y="3017520"/>
-            <a:ext cx="2651760" cy="1298448"/>
-          </a:xfrm>
-          <a:prstGeom prst="roundRect">
-            <a:avLst>
-              <a:gd name="adj" fmla="val 3521"/>
-            </a:avLst>
-          </a:prstGeom>
-          <a:solidFill>
-            <a:schemeClr val="bg2"/>
-          </a:solidFill>
-          <a:ln w="12700">
-            <a:solidFill>
-              <a:schemeClr val="bg2"/>
-            </a:solidFill>
-            <a:prstDash val="solid"/>
-          </a:ln>
-        </p:spPr>
-      </p:sp>
-      <p:sp>
-        <p:nvSpPr>
-          <p:cNvPr id="20" name="来源状态6"/>
-          <p:cNvSpPr txBox="1"/>
-          <p:nvPr/>
-        </p:nvSpPr>
-        <p:spPr>
-          <a:xfrm>
-            <a:off x="3543300" y="3127248"/>
-            <a:ext cx="2286000" cy="320040"/>
-          </a:xfrm>
-          <a:prstGeom prst="rect">
-            <a:avLst/>
-          </a:prstGeom>
-          <a:noFill/>
-          <a:ln/>
-        </p:spPr>
-        <p:txBody>
-          <a:bodyPr wrap="square" lIns="0" tIns="0" rIns="0" bIns="0" rtlCol="0" anchor="ctr"/>
-          <a:lstStyle/>
-          <a:p>
-            <a:pPr indent="0" marL="0">
-              <a:buNone/>
-            </a:pPr>
-            <a:r>
-              <a:rPr lang="en-US" sz="1200" b="1" dirty="0">
-                <a:solidFill>
-                  <a:schemeClr val="accent1"/>
-                </a:solidFill>
-              </a:rPr>
-              <a:t>方法公开</a:t>
-            </a:r>
-            <a:endParaRPr lang="en-US" sz="1200" dirty="0"/>
-          </a:p>
-        </p:txBody>
-      </p:sp>
-      <p:sp>
-        <p:nvSpPr>
-          <p:cNvPr id="21" name="来源说明6"/>
-          <p:cNvSpPr txBox="1"/>
-          <p:nvPr/>
-        </p:nvSpPr>
-        <p:spPr>
-          <a:xfrm>
-            <a:off x="3543300" y="3456432"/>
-            <a:ext cx="2377440" cy="804672"/>
-          </a:xfrm>
-          <a:prstGeom prst="rect">
-            <a:avLst/>
-          </a:prstGeom>
-          <a:noFill/>
-          <a:ln/>
-        </p:spPr>
-        <p:txBody>
-          <a:bodyPr wrap="square" lIns="0" tIns="0" rIns="0" bIns="0" rtlCol="0" anchor="t"/>
-          <a:lstStyle/>
-          <a:p>
-            <a:pPr indent="0" marL="0">
-              <a:spcAft>
-                <a:spcPts val="300"/>
-              </a:spcAft>
-              <a:buNone/>
-            </a:pPr>
-            <a:r>
-              <a:rPr lang="en-US" sz="1500" b="1" dirty="0">
-                <a:solidFill>
-                  <a:schemeClr val="tx2"/>
-                </a:solidFill>
-              </a:rPr>
-              <a:t>尼尔森流媒体收视</a:t>
-            </a:r>
-            <a:endParaRPr lang="en-US" sz="1500" dirty="0"/>
-          </a:p>
-          <a:p>
-            <a:pPr indent="0" marL="0">
-              <a:spcAft>
-                <a:spcPts val="300"/>
-              </a:spcAft>
-              <a:buNone/>
-            </a:pPr>
-            <a:r>
-              <a:rPr lang="en-US" sz="1200" dirty="0">
-                <a:solidFill>
-                  <a:schemeClr val="tx1"/>
-                </a:solidFill>
-              </a:rPr>
-              <a:t>测量仪样本户，仅电视屏幕</a:t>
-            </a:r>
-            <a:endParaRPr lang="en-US" sz="1500" dirty="0"/>
-          </a:p>
-        </p:txBody>
-      </p:sp>
-      <p:sp>
-        <p:nvSpPr>
-          <p:cNvPr id="22" name="来源卡7"/>
-          <p:cNvSpPr/>
-          <p:nvPr/>
-        </p:nvSpPr>
-        <p:spPr>
-          <a:xfrm>
-            <a:off x="6172200" y="3017520"/>
-            <a:ext cx="2651760" cy="1298448"/>
-          </a:xfrm>
-          <a:prstGeom prst="roundRect">
-            <a:avLst>
-              <a:gd name="adj" fmla="val 3521"/>
-            </a:avLst>
-          </a:prstGeom>
-          <a:solidFill>
-            <a:schemeClr val="bg2"/>
-          </a:solidFill>
-          <a:ln w="12700">
-            <a:solidFill>
-              <a:schemeClr val="bg2"/>
-            </a:solidFill>
-            <a:prstDash val="solid"/>
-          </a:ln>
-        </p:spPr>
-      </p:sp>
-      <p:sp>
-        <p:nvSpPr>
-          <p:cNvPr id="23" name="来源状态7"/>
-          <p:cNvSpPr txBox="1"/>
-          <p:nvPr/>
-        </p:nvSpPr>
-        <p:spPr>
-          <a:xfrm>
-            <a:off x="6355080" y="3127248"/>
-            <a:ext cx="2286000" cy="320040"/>
-          </a:xfrm>
-          <a:prstGeom prst="rect">
-            <a:avLst/>
-          </a:prstGeom>
-          <a:noFill/>
-          <a:ln/>
-        </p:spPr>
-        <p:txBody>
-          <a:bodyPr wrap="square" lIns="0" tIns="0" rIns="0" bIns="0" rtlCol="0" anchor="ctr"/>
-          <a:lstStyle/>
-          <a:p>
-            <a:pPr indent="0" marL="0">
-              <a:buNone/>
-            </a:pPr>
-            <a:r>
-              <a:rPr lang="en-US" sz="1200" b="1" dirty="0">
-                <a:solidFill>
-                  <a:schemeClr val="accent3"/>
-                </a:solidFill>
-              </a:rPr>
-              <a:t>关键信息未公开</a:t>
-            </a:r>
-            <a:endParaRPr lang="en-US" sz="1200" dirty="0"/>
-          </a:p>
-        </p:txBody>
-      </p:sp>
-      <p:sp>
-        <p:nvSpPr>
-          <p:cNvPr id="24" name="来源说明7"/>
-          <p:cNvSpPr txBox="1"/>
-          <p:nvPr/>
-        </p:nvSpPr>
-        <p:spPr>
-          <a:xfrm>
-            <a:off x="6355080" y="3456432"/>
-            <a:ext cx="2377440" cy="804672"/>
-          </a:xfrm>
-          <a:prstGeom prst="rect">
-            <a:avLst/>
-          </a:prstGeom>
-          <a:noFill/>
-          <a:ln/>
-        </p:spPr>
-        <p:txBody>
-          <a:bodyPr wrap="square" lIns="0" tIns="0" rIns="0" bIns="0" rtlCol="0" anchor="t"/>
-          <a:lstStyle/>
-          <a:p>
-            <a:pPr indent="0" marL="0">
-              <a:spcAft>
-                <a:spcPts val="300"/>
-              </a:spcAft>
-              <a:buNone/>
-            </a:pPr>
-            <a:r>
-              <a:rPr lang="en-US" sz="1500" b="1" dirty="0">
-                <a:solidFill>
-                  <a:schemeClr val="tx2"/>
-                </a:solidFill>
-              </a:rPr>
-              <a:t>Gracenote 节目数据库</a:t>
-            </a:r>
-            <a:endParaRPr lang="en-US" sz="1500" dirty="0"/>
-          </a:p>
-          <a:p>
-            <a:pPr indent="0" marL="0">
-              <a:spcAft>
-                <a:spcPts val="300"/>
-              </a:spcAft>
-              <a:buNone/>
-            </a:pPr>
-            <a:r>
-              <a:rPr lang="en-US" sz="1200" dirty="0">
-                <a:solidFill>
-                  <a:schemeClr val="tx1"/>
-                </a:solidFill>
-              </a:rPr>
-              <a:t>企业自有数据，非抽样</a:t>
-            </a:r>
-            <a:endParaRPr lang="en-US" sz="1500" dirty="0"/>
-          </a:p>
-        </p:txBody>
-      </p:sp>
-      <p:sp>
-        <p:nvSpPr>
-          <p:cNvPr id="25" name="来源卡8"/>
-          <p:cNvSpPr/>
-          <p:nvPr/>
-        </p:nvSpPr>
-        <p:spPr>
-          <a:xfrm>
-            <a:off x="8983980" y="3017520"/>
-            <a:ext cx="2651760" cy="1298448"/>
-          </a:xfrm>
-          <a:prstGeom prst="roundRect">
-            <a:avLst>
-              <a:gd name="adj" fmla="val 3521"/>
-            </a:avLst>
-          </a:prstGeom>
-          <a:solidFill>
-            <a:schemeClr val="bg2"/>
-          </a:solidFill>
-          <a:ln w="12700">
-            <a:solidFill>
-              <a:schemeClr val="bg2"/>
-            </a:solidFill>
-            <a:prstDash val="solid"/>
-          </a:ln>
-        </p:spPr>
-      </p:sp>
-      <p:sp>
-        <p:nvSpPr>
-          <p:cNvPr id="26" name="来源状态8"/>
-          <p:cNvSpPr txBox="1"/>
-          <p:nvPr/>
-        </p:nvSpPr>
-        <p:spPr>
-          <a:xfrm>
-            <a:off x="9166860" y="3127248"/>
-            <a:ext cx="2286000" cy="320040"/>
-          </a:xfrm>
-          <a:prstGeom prst="rect">
-            <a:avLst/>
-          </a:prstGeom>
-          <a:noFill/>
-          <a:ln/>
-        </p:spPr>
-        <p:txBody>
-          <a:bodyPr wrap="square" lIns="0" tIns="0" rIns="0" bIns="0" rtlCol="0" anchor="ctr"/>
-          <a:lstStyle/>
-          <a:p>
-            <a:pPr indent="0" marL="0">
-              <a:buNone/>
-            </a:pPr>
-            <a:r>
-              <a:rPr lang="en-US" sz="1200" b="1" dirty="0">
-                <a:solidFill>
-                  <a:schemeClr val="accent5"/>
-                </a:solidFill>
-              </a:rPr>
-              <a:t>部分公开</a:t>
-            </a:r>
-            <a:endParaRPr lang="en-US" sz="1200" dirty="0"/>
-          </a:p>
-        </p:txBody>
-      </p:sp>
-      <p:sp>
-        <p:nvSpPr>
-          <p:cNvPr id="27" name="来源说明8"/>
-          <p:cNvSpPr txBox="1"/>
-          <p:nvPr/>
-        </p:nvSpPr>
-        <p:spPr>
-          <a:xfrm>
-            <a:off x="9166860" y="3456432"/>
-            <a:ext cx="2377440" cy="804672"/>
-          </a:xfrm>
-          <a:prstGeom prst="rect">
-            <a:avLst/>
-          </a:prstGeom>
-          <a:noFill/>
-          <a:ln/>
-        </p:spPr>
-        <p:txBody>
-          <a:bodyPr wrap="square" lIns="0" tIns="0" rIns="0" bIns="0" rtlCol="0" anchor="t"/>
-          <a:lstStyle/>
-          <a:p>
-            <a:pPr indent="0" marL="0">
-              <a:spcAft>
-                <a:spcPts val="300"/>
-              </a:spcAft>
-              <a:buNone/>
-            </a:pPr>
-            <a:r>
-              <a:rPr lang="en-US" sz="1500" b="1" dirty="0">
-                <a:solidFill>
-                  <a:schemeClr val="tx2"/>
-                </a:solidFill>
-              </a:rPr>
-              <a:t>普华永道展望</a:t>
-            </a:r>
-            <a:endParaRPr lang="en-US" sz="1500" dirty="0"/>
-          </a:p>
-          <a:p>
-            <a:pPr indent="0" marL="0">
-              <a:spcAft>
-                <a:spcPts val="300"/>
-              </a:spcAft>
-              <a:buNone/>
-            </a:pPr>
-            <a:r>
-              <a:rPr lang="en-US" sz="1200" dirty="0">
-                <a:solidFill>
-                  <a:schemeClr val="tx1"/>
-                </a:solidFill>
-              </a:rPr>
-              <a:t>公开数据 + 访谈 + 建模</a:t>
-            </a:r>
-            <a:endParaRPr lang="en-US" sz="1500" dirty="0"/>
-          </a:p>
-        </p:txBody>
-      </p:sp>
-      <p:sp>
-        <p:nvSpPr>
-          <p:cNvPr id="28" name="来源卡9"/>
-          <p:cNvSpPr/>
-          <p:nvPr/>
-        </p:nvSpPr>
-        <p:spPr>
-          <a:xfrm>
-            <a:off x="548640" y="4480560"/>
-            <a:ext cx="2651760" cy="1298448"/>
-          </a:xfrm>
-          <a:prstGeom prst="roundRect">
-            <a:avLst>
-              <a:gd name="adj" fmla="val 3521"/>
-            </a:avLst>
-          </a:prstGeom>
-          <a:solidFill>
-            <a:schemeClr val="bg2"/>
-          </a:solidFill>
-          <a:ln w="12700">
-            <a:solidFill>
-              <a:schemeClr val="bg2"/>
-            </a:solidFill>
-            <a:prstDash val="solid"/>
-          </a:ln>
-        </p:spPr>
-      </p:sp>
-      <p:sp>
-        <p:nvSpPr>
-          <p:cNvPr id="29" name="来源状态9"/>
-          <p:cNvSpPr txBox="1"/>
-          <p:nvPr/>
-        </p:nvSpPr>
-        <p:spPr>
-          <a:xfrm>
-            <a:off x="731520" y="4590288"/>
-            <a:ext cx="2286000" cy="320040"/>
-          </a:xfrm>
-          <a:prstGeom prst="rect">
-            <a:avLst/>
-          </a:prstGeom>
-          <a:noFill/>
-          <a:ln/>
-        </p:spPr>
-        <p:txBody>
-          <a:bodyPr wrap="square" lIns="0" tIns="0" rIns="0" bIns="0" rtlCol="0" anchor="ctr"/>
-          <a:lstStyle/>
-          <a:p>
-            <a:pPr indent="0" marL="0">
-              <a:buNone/>
-            </a:pPr>
-            <a:r>
-              <a:rPr lang="en-US" sz="1200" b="1" dirty="0">
-                <a:solidFill>
-                  <a:schemeClr val="accent3"/>
-                </a:solidFill>
-              </a:rPr>
-              <a:t>关键信息未公开</a:t>
-            </a:r>
-            <a:endParaRPr lang="en-US" sz="1200" dirty="0"/>
-          </a:p>
-        </p:txBody>
-      </p:sp>
-      <p:sp>
-        <p:nvSpPr>
-          <p:cNvPr id="30" name="来源说明9"/>
-          <p:cNvSpPr txBox="1"/>
-          <p:nvPr/>
-        </p:nvSpPr>
-        <p:spPr>
-          <a:xfrm>
-            <a:off x="731520" y="4919472"/>
-            <a:ext cx="2377440" cy="804672"/>
-          </a:xfrm>
-          <a:prstGeom prst="rect">
-            <a:avLst/>
-          </a:prstGeom>
-          <a:noFill/>
-          <a:ln/>
-        </p:spPr>
-        <p:txBody>
-          <a:bodyPr wrap="square" lIns="0" tIns="0" rIns="0" bIns="0" rtlCol="0" anchor="t"/>
-          <a:lstStyle/>
-          <a:p>
-            <a:pPr indent="0" marL="0">
-              <a:spcAft>
-                <a:spcPts val="300"/>
-              </a:spcAft>
-              <a:buNone/>
-            </a:pPr>
-            <a:r>
-              <a:rPr lang="en-US" sz="1500" b="1" dirty="0">
-                <a:solidFill>
-                  <a:schemeClr val="tx2"/>
-                </a:solidFill>
-              </a:rPr>
-              <a:t>Veed Analytics 测试</a:t>
-            </a:r>
-            <a:endParaRPr lang="en-US" sz="1500" dirty="0"/>
-          </a:p>
-          <a:p>
-            <a:pPr indent="0" marL="0">
-              <a:spcAft>
-                <a:spcPts val="300"/>
-              </a:spcAft>
-              <a:buNone/>
-            </a:pPr>
-            <a:r>
-              <a:rPr lang="en-US" sz="1200" dirty="0">
-                <a:solidFill>
-                  <a:schemeClr val="tx1"/>
-                </a:solidFill>
-              </a:rPr>
-              <a:t>六国、独播剧；题量未公开</a:t>
-            </a:r>
-            <a:endParaRPr lang="en-US" sz="1500" dirty="0"/>
-          </a:p>
-        </p:txBody>
-      </p:sp>
-      <p:sp>
-        <p:nvSpPr>
-          <p:cNvPr id="31" name="来源卡10"/>
-          <p:cNvSpPr/>
-          <p:nvPr/>
-        </p:nvSpPr>
-        <p:spPr>
-          <a:xfrm>
-            <a:off x="3360420" y="4480560"/>
-            <a:ext cx="2651760" cy="1298448"/>
-          </a:xfrm>
-          <a:prstGeom prst="roundRect">
-            <a:avLst>
-              <a:gd name="adj" fmla="val 3521"/>
-            </a:avLst>
-          </a:prstGeom>
-          <a:solidFill>
-            <a:schemeClr val="bg2"/>
-          </a:solidFill>
-          <a:ln w="12700">
-            <a:solidFill>
-              <a:schemeClr val="bg2"/>
-            </a:solidFill>
-            <a:prstDash val="solid"/>
-          </a:ln>
-        </p:spPr>
-      </p:sp>
-      <p:sp>
-        <p:nvSpPr>
-          <p:cNvPr id="32" name="来源状态10"/>
-          <p:cNvSpPr txBox="1"/>
-          <p:nvPr/>
-        </p:nvSpPr>
-        <p:spPr>
-          <a:xfrm>
-            <a:off x="3543300" y="4590288"/>
-            <a:ext cx="2286000" cy="320040"/>
-          </a:xfrm>
-          <a:prstGeom prst="rect">
-            <a:avLst/>
-          </a:prstGeom>
-          <a:noFill/>
-          <a:ln/>
-        </p:spPr>
-        <p:txBody>
-          <a:bodyPr wrap="square" lIns="0" tIns="0" rIns="0" bIns="0" rtlCol="0" anchor="ctr"/>
-          <a:lstStyle/>
-          <a:p>
-            <a:pPr indent="0" marL="0">
-              <a:buNone/>
-            </a:pPr>
-            <a:r>
-              <a:rPr lang="en-US" sz="1200" b="1" dirty="0">
-                <a:solidFill>
-                  <a:schemeClr val="accent1"/>
-                </a:solidFill>
-              </a:rPr>
-              <a:t>方法公开</a:t>
-            </a:r>
-            <a:endParaRPr lang="en-US" sz="1200" dirty="0"/>
-          </a:p>
-        </p:txBody>
-      </p:sp>
-      <p:sp>
-        <p:nvSpPr>
-          <p:cNvPr id="33" name="来源说明10"/>
-          <p:cNvSpPr txBox="1"/>
-          <p:nvPr/>
-        </p:nvSpPr>
-        <p:spPr>
-          <a:xfrm>
-            <a:off x="3543300" y="4919472"/>
-            <a:ext cx="2377440" cy="804672"/>
-          </a:xfrm>
-          <a:prstGeom prst="rect">
-            <a:avLst/>
-          </a:prstGeom>
-          <a:noFill/>
-          <a:ln/>
-        </p:spPr>
-        <p:txBody>
-          <a:bodyPr wrap="square" lIns="0" tIns="0" rIns="0" bIns="0" rtlCol="0" anchor="t"/>
-          <a:lstStyle/>
-          <a:p>
-            <a:pPr indent="0" marL="0">
-              <a:spcAft>
-                <a:spcPts val="300"/>
-              </a:spcAft>
-              <a:buNone/>
-            </a:pPr>
-            <a:r>
-              <a:rPr lang="en-US" sz="1500" b="1" dirty="0">
-                <a:solidFill>
-                  <a:schemeClr val="tx2"/>
-                </a:solidFill>
-              </a:rPr>
-              <a:t>南加州大学论文</a:t>
-            </a:r>
-            <a:endParaRPr lang="en-US" sz="1500" dirty="0"/>
-          </a:p>
-          <a:p>
-            <a:pPr indent="0" marL="0">
-              <a:spcAft>
-                <a:spcPts val="300"/>
-              </a:spcAft>
-              <a:buNone/>
-            </a:pPr>
-            <a:r>
-              <a:rPr lang="en-US" sz="1200" dirty="0">
-                <a:solidFill>
-                  <a:schemeClr val="tx1"/>
-                </a:solidFill>
-              </a:rPr>
-              <a:t>同行评审，自动分类器</a:t>
-            </a:r>
-            <a:endParaRPr lang="en-US" sz="1500" dirty="0"/>
-          </a:p>
-        </p:txBody>
-      </p:sp>
-      <p:sp>
-        <p:nvSpPr>
-          <p:cNvPr id="34" name="来源卡11"/>
-          <p:cNvSpPr/>
-          <p:nvPr/>
-        </p:nvSpPr>
-        <p:spPr>
-          <a:xfrm>
-            <a:off x="6172200" y="4480560"/>
-            <a:ext cx="2651760" cy="1298448"/>
-          </a:xfrm>
-          <a:prstGeom prst="roundRect">
-            <a:avLst>
-              <a:gd name="adj" fmla="val 3521"/>
-            </a:avLst>
-          </a:prstGeom>
-          <a:solidFill>
-            <a:schemeClr val="bg2"/>
-          </a:solidFill>
-          <a:ln w="12700">
-            <a:solidFill>
-              <a:schemeClr val="bg2"/>
-            </a:solidFill>
-            <a:prstDash val="solid"/>
-          </a:ln>
-        </p:spPr>
-      </p:sp>
-      <p:sp>
-        <p:nvSpPr>
-          <p:cNvPr id="35" name="来源状态11"/>
-          <p:cNvSpPr txBox="1"/>
-          <p:nvPr/>
-        </p:nvSpPr>
-        <p:spPr>
-          <a:xfrm>
-            <a:off x="6355080" y="4590288"/>
-            <a:ext cx="2286000" cy="320040"/>
-          </a:xfrm>
-          <a:prstGeom prst="rect">
-            <a:avLst/>
-          </a:prstGeom>
-          <a:noFill/>
-          <a:ln/>
-        </p:spPr>
-        <p:txBody>
-          <a:bodyPr wrap="square" lIns="0" tIns="0" rIns="0" bIns="0" rtlCol="0" anchor="ctr"/>
-          <a:lstStyle/>
-          <a:p>
-            <a:pPr indent="0" marL="0">
-              <a:buNone/>
-            </a:pPr>
-            <a:r>
-              <a:rPr lang="en-US" sz="1200" b="1" dirty="0">
-                <a:solidFill>
-                  <a:schemeClr val="accent3"/>
-                </a:solidFill>
-              </a:rPr>
-              <a:t>关键信息未公开</a:t>
-            </a:r>
-            <a:endParaRPr lang="en-US" sz="1200" dirty="0"/>
-          </a:p>
-        </p:txBody>
-      </p:sp>
-      <p:sp>
-        <p:nvSpPr>
-          <p:cNvPr id="36" name="来源说明11"/>
-          <p:cNvSpPr txBox="1"/>
-          <p:nvPr/>
-        </p:nvSpPr>
-        <p:spPr>
-          <a:xfrm>
-            <a:off x="6355080" y="4919472"/>
-            <a:ext cx="2377440" cy="804672"/>
-          </a:xfrm>
-          <a:prstGeom prst="rect">
-            <a:avLst/>
-          </a:prstGeom>
-          <a:noFill/>
-          <a:ln/>
-        </p:spPr>
-        <p:txBody>
-          <a:bodyPr wrap="square" lIns="0" tIns="0" rIns="0" bIns="0" rtlCol="0" anchor="t"/>
-          <a:lstStyle/>
-          <a:p>
-            <a:pPr indent="0" marL="0">
-              <a:spcAft>
-                <a:spcPts val="300"/>
-              </a:spcAft>
-              <a:buNone/>
-            </a:pPr>
-            <a:r>
-              <a:rPr lang="en-US" sz="1500" b="1" dirty="0">
-                <a:solidFill>
-                  <a:schemeClr val="tx2"/>
-                </a:solidFill>
-              </a:rPr>
-              <a:t>Fabric 退订率</a:t>
-            </a:r>
-            <a:endParaRPr lang="en-US" sz="1500" dirty="0"/>
-          </a:p>
-          <a:p>
-            <a:pPr indent="0" marL="0">
-              <a:spcAft>
-                <a:spcPts val="300"/>
-              </a:spcAft>
-              <a:buNone/>
-            </a:pPr>
-            <a:r>
-              <a:rPr lang="en-US" sz="1200" dirty="0">
-                <a:solidFill>
-                  <a:schemeClr val="tx1"/>
-                </a:solidFill>
-              </a:rPr>
-              <a:t>计算方法未公开</a:t>
-            </a:r>
-            <a:endParaRPr lang="en-US" sz="1500" dirty="0"/>
-          </a:p>
-        </p:txBody>
-      </p:sp>
-      <p:sp>
-        <p:nvSpPr>
-          <p:cNvPr id="37" name="来源说明"/>
-          <p:cNvSpPr txBox="1"/>
-          <p:nvPr/>
-        </p:nvSpPr>
-        <p:spPr>
-          <a:xfrm>
-            <a:off x="548640" y="6035040"/>
-            <a:ext cx="10332720" cy="274320"/>
-          </a:xfrm>
-          <a:prstGeom prst="rect">
-            <a:avLst/>
-          </a:prstGeom>
-          <a:noFill/>
-          <a:ln/>
-        </p:spPr>
-        <p:txBody>
-          <a:bodyPr wrap="square" lIns="0" tIns="0" rIns="0" bIns="0" rtlCol="0" anchor="ctr"/>
-          <a:lstStyle/>
-          <a:p>
-            <a:pPr indent="0" marL="0">
-              <a:buNone/>
-            </a:pPr>
-            <a:r>
-              <a:rPr lang="en-US" sz="1100" dirty="0">
-                <a:solidFill>
-                  <a:schemeClr val="accent5"/>
-                </a:solidFill>
-              </a:rPr>
-              <a:t>详见《Gracenote报告_数据来源与采集方式核查.md》。</a:t>
-            </a:r>
-            <a:endParaRPr lang="en-US" sz="1100" dirty="0"/>
-          </a:p>
-        </p:txBody>
-      </p:sp>
-      <p:sp>
-        <p:nvSpPr>
-          <p:cNvPr id="25" name="Slide Number Placeholder 0"/>
-          <p:cNvSpPr>
-            <a:spLocks noGrp="1"/>
-          </p:cNvSpPr>
-          <p:nvPr>
-            <p:ph type="sldNum" sz="quarter" idx="4294967295"/>
-          </p:nvPr>
-        </p:nvSpPr>
-        <p:spPr>
-          <a:xfrm>
-            <a:off x="11064240" y="6355080"/>
-            <a:ext cx="548640" cy="274320"/>
-          </a:xfrm>
-          <a:prstGeom prst="rect">
-            <a:avLst/>
-          </a:prstGeom>
-          <a:extLst>
-            <a:ext uri="{C572A759-6A51-4108-AA02-DFA0A04FC94B}">
-              <ma14:wrappingTextBoxFlag xmlns:ma14="http://schemas.microsoft.com/office/mac/drawingml/2011/main" val="0"/>
-            </a:ext>
-          </a:extLst>
-        </p:spPr>
-        <p:txBody>
-          <a:bodyPr/>
-          <a:lstStyle>
-            <a:lvl1pPr>
-              <a:defRPr sz="1000">
-                <a:solidFill>
-                  <a:schemeClr val="accent5"/>
-                </a:solidFill>
-              </a:defRPr>
-            </a:lvl1pPr>
-          </a:lstStyle>
-          <a:p>
-            <a:pPr algn="r"/>
-            <a:fld id="{F7021451-1387-4CA6-816F-3879F97B5CBC}" type="slidenum">
-              <a:rPr b="0" lang="en-US"/>
-              <a:t>13</a:t>
-            </a:fld>
-            <a:endParaRPr lang="en-US"/>
-          </a:p>
-        </p:txBody>
-      </p:sp>
-    </p:spTree>
-  </p:cSld>
-  <p:clrMapOvr>
-    <a:masterClrMapping/>
-  </p:clrMapOvr>
-  <p:transition spd="med">
-    <p:fade/>
-  </p:transition>
-</p:sld>
-</file>
-
-<file path=ppt/slides/slide14.xml><?xml version="1.0" encoding="utf-8"?>
-<p:sld xmlns:a="http://schemas.openxmlformats.org/drawingml/2006/main" xmlns:r="http://schemas.openxmlformats.org/officeDocument/2006/relationships" xmlns:p="http://schemas.openxmlformats.org/presentationml/2006/main">
-  <p:cSld name="Slide 14">
-    <p:spTree>
-      <p:nvGrpSpPr>
-        <p:cNvPr id="1" name=""/>
-        <p:cNvGrpSpPr/>
-        <p:nvPr/>
-      </p:nvGrpSpPr>
-      <p:grpSpPr>
-        <a:xfrm>
-          <a:off x="0" y="0"/>
-          <a:ext cx="0" cy="0"/>
-          <a:chOff x="0" y="0"/>
-          <a:chExt cx="0" cy="0"/>
-        </a:xfrm>
-      </p:grpSpPr>
-      <p:sp>
-        <p:nvSpPr>
-          <p:cNvPr id="2" name="章节标记"/>
-          <p:cNvSpPr txBox="1"/>
-          <p:nvPr/>
-        </p:nvSpPr>
-        <p:spPr>
-          <a:xfrm>
-            <a:off x="548640" y="274320"/>
-            <a:ext cx="7315200" cy="320040"/>
-          </a:xfrm>
-          <a:prstGeom prst="rect">
-            <a:avLst/>
-          </a:prstGeom>
-          <a:noFill/>
-          <a:ln/>
-        </p:spPr>
-        <p:txBody>
-          <a:bodyPr wrap="square" lIns="0" tIns="0" rIns="0" bIns="0" rtlCol="0" anchor="ctr"/>
-          <a:lstStyle/>
-          <a:p>
-            <a:pPr indent="0" marL="0">
-              <a:buNone/>
-            </a:pPr>
-            <a:r>
-              <a:rPr lang="en-US" sz="1400" b="1" dirty="0">
-                <a:solidFill>
-                  <a:schemeClr val="accent3"/>
-                </a:solidFill>
-              </a:rPr>
-              <a:t>附录（备问）</a:t>
-            </a:r>
-            <a:endParaRPr lang="en-US" sz="1400" dirty="0"/>
-          </a:p>
-        </p:txBody>
-      </p:sp>
-      <p:sp>
-        <p:nvSpPr>
-          <p:cNvPr id="3" name="Text 0"/>
-          <p:cNvSpPr/>
-          <p:nvPr>
-            <p:ph idx="100" type="title" hasCustomPrompt="1"/>
-          </p:nvPr>
-        </p:nvSpPr>
-        <p:spPr>
-          <a:xfrm>
-            <a:off x="548640" y="640080"/>
-            <a:ext cx="11064240" cy="685800"/>
-          </a:xfrm>
-          <a:prstGeom prst="rect">
-            <a:avLst/>
-          </a:prstGeom>
-          <a:noFill/>
-          <a:ln/>
-        </p:spPr>
-        <p:txBody>
-          <a:bodyPr wrap="square" lIns="0" tIns="0" rIns="0" bIns="0" rtlCol="0" anchor="ctr"/>
-          <a:lstStyle/>
-          <a:p>
-            <a:pPr algn="l" indent="0" marL="0">
-              <a:buNone/>
-            </a:pPr>
-            <a:r>
-              <a:rPr lang="en-US" sz="3000" b="1" dirty="0">
-                <a:solidFill>
-                  <a:schemeClr val="tx2"/>
-                </a:solidFill>
-              </a:rPr>
-              <a:t>附录二：引用与原始来源比对</a:t>
-            </a:r>
-            <a:endParaRPr lang="en-US" sz="3000" dirty="0"/>
-          </a:p>
-        </p:txBody>
-      </p:sp>
-      <p:graphicFrame>
-        <p:nvGraphicFramePr>
-          <p:cNvPr id="15" name="引用比对表"/>
-          <p:cNvGraphicFramePr>
-            <a:graphicFrameLocks noGrp="1"/>
-          </p:cNvGraphicFramePr>
-          <p:nvPr>
-            <p:extLst>
-              <p:ext uri="{D42A27DB-BD31-4B8C-83A1-F6EECF244321}">
-                <p14:modId xmlns:p14="http://schemas.microsoft.com/office/powerpoint/2010/main" val="1579011935"/>
-              </p:ext>
-            </p:extLst>
-          </p:nvPr>
-        </p:nvGraphicFramePr>
-        <p:xfrm>
-          <a:off x="548640" y="1554480"/>
-          <a:ext cx="11064240" cy="914400"/>
-        </p:xfrm>
-        <a:graphic>
-          <a:graphicData uri="http://schemas.openxmlformats.org/drawingml/2006/table">
-            <a:tbl>
-              <a:tblPr/>
-              <a:tblGrid>
-                <a:gridCol w="5120640"/>
-                <a:gridCol w="5943600"/>
-              </a:tblGrid>
-              <a:tr h="502920">
-                <a:tc>
-                  <a:txBody>
-                    <a:bodyPr/>
-                    <a:lstStyle/>
-                    <a:p>
-                      <a:pPr indent="0" marL="0">
-                        <a:buNone/>
-                      </a:pPr>
-                      <a:r>
-                        <a:rPr lang="en-US" sz="1600" b="1" dirty="0">
-                          <a:solidFill>
-                            <a:schemeClr val="bg1"/>
-                          </a:solidFill>
-                        </a:rPr>
-                        <a:t>报告表述</a:t>
-                      </a:r>
-                      <a:endParaRPr lang="en-US" sz="1600" dirty="0"/>
-                    </a:p>
-                  </a:txBody>
-                  <a:tcPr marL="152400" marR="152400" marT="50800" marB="50800" anchor="ctr">
-                    <a:lnL w="0" cap="flat" cmpd="sng" algn="ctr">
-                      <a:noFill/>
-                    </a:lnL>
-                    <a:lnR w="0" cap="flat" cmpd="sng" algn="ctr">
-                      <a:noFill/>
-                    </a:lnR>
-                    <a:lnT w="0" cap="flat" cmpd="sng" algn="ctr">
-                      <a:noFill/>
-                    </a:lnT>
-                    <a:lnB w="9525" cap="flat" cmpd="sng" algn="ctr">
-                      <a:solidFill>
-                        <a:srgbClr val="D5DAE1"/>
-                      </a:solidFill>
-                      <a:prstDash val="solid"/>
-                      <a:round/>
-                      <a:headEnd type="none" w="med" len="med"/>
-                      <a:tailEnd type="none" w="med" len="med"/>
-                    </a:lnB>
-                    <a:solidFill>
-                      <a:schemeClr val="tx2"/>
-                    </a:solidFill>
-                  </a:tcPr>
-                </a:tc>
-                <a:tc>
-                  <a:txBody>
-                    <a:bodyPr/>
-                    <a:lstStyle/>
-                    <a:p>
-                      <a:pPr indent="0" marL="0">
-                        <a:buNone/>
-                      </a:pPr>
-                      <a:r>
-                        <a:rPr lang="en-US" sz="1600" b="1" dirty="0">
-                          <a:solidFill>
-                            <a:schemeClr val="bg1"/>
-                          </a:solidFill>
-                        </a:rPr>
-                        <a:t>原始来源</a:t>
-                      </a:r>
-                      <a:endParaRPr lang="en-US" sz="1600" dirty="0"/>
-                    </a:p>
-                  </a:txBody>
-                  <a:tcPr marL="152400" marR="152400" marT="50800" marB="50800" anchor="ctr">
-                    <a:lnL w="0" cap="flat" cmpd="sng" algn="ctr">
-                      <a:noFill/>
-                    </a:lnL>
-                    <a:lnR w="0" cap="flat" cmpd="sng" algn="ctr">
-                      <a:noFill/>
-                    </a:lnR>
-                    <a:lnT w="0" cap="flat" cmpd="sng" algn="ctr">
-                      <a:noFill/>
-                    </a:lnT>
-                    <a:lnB w="9525" cap="flat" cmpd="sng" algn="ctr">
-                      <a:solidFill>
-                        <a:srgbClr val="D5DAE1"/>
-                      </a:solidFill>
-                      <a:prstDash val="solid"/>
-                      <a:round/>
-                      <a:headEnd type="none" w="med" len="med"/>
-                      <a:tailEnd type="none" w="med" len="med"/>
-                    </a:lnB>
-                    <a:solidFill>
-                      <a:schemeClr val="tx2"/>
-                    </a:solidFill>
-                  </a:tcPr>
-                </a:tc>
-              </a:tr>
-              <a:tr h="566928">
-                <a:tc>
-                  <a:txBody>
-                    <a:bodyPr/>
-                    <a:lstStyle/>
-                    <a:p>
-                      <a:pPr indent="0" marL="0">
-                        <a:buNone/>
-                      </a:pPr>
-                      <a:r>
-                        <a:rPr lang="en-US" sz="1600" dirty="0">
-                          <a:solidFill>
-                            <a:schemeClr val="tx1"/>
-                          </a:solidFill>
-                        </a:rPr>
-                        <a:t>皮尤：30% 的青少年每日使用</a:t>
-                      </a:r>
-                      <a:endParaRPr lang="en-US" sz="1600" dirty="0"/>
-                    </a:p>
-                  </a:txBody>
-                  <a:tcPr marL="152400" marR="152400" marT="50800" marB="50800" anchor="ctr">
-                    <a:lnL w="0" cap="flat" cmpd="sng" algn="ctr">
-                      <a:noFill/>
-                    </a:lnL>
-                    <a:lnR w="0" cap="flat" cmpd="sng" algn="ctr">
-                      <a:noFill/>
-                    </a:lnR>
-                    <a:lnT w="0" cap="flat" cmpd="sng" algn="ctr">
-                      <a:noFill/>
-                    </a:lnT>
-                    <a:lnB w="9525" cap="flat" cmpd="sng" algn="ctr">
-                      <a:solidFill>
-                        <a:srgbClr val="D5DAE1"/>
-                      </a:solidFill>
-                      <a:prstDash val="solid"/>
-                      <a:round/>
-                      <a:headEnd type="none" w="med" len="med"/>
-                      <a:tailEnd type="none" w="med" len="med"/>
-                    </a:lnB>
-                    <a:solidFill>
-                      <a:schemeClr val="bg1"/>
-                    </a:solidFill>
-                  </a:tcPr>
-                </a:tc>
-                <a:tc>
-                  <a:txBody>
-                    <a:bodyPr/>
-                    <a:lstStyle/>
-                    <a:p>
-                      <a:pPr indent="0" marL="0">
-                        <a:buNone/>
-                      </a:pPr>
-                      <a:r>
-                        <a:rPr lang="en-US" sz="1600" dirty="0">
-                          <a:solidFill>
-                            <a:schemeClr val="tx1"/>
-                          </a:solidFill>
-                        </a:rPr>
-                        <a:t>精确值 28%；13–14 岁为 24%</a:t>
-                      </a:r>
-                      <a:endParaRPr lang="en-US" sz="1600" dirty="0"/>
-                    </a:p>
-                  </a:txBody>
-                  <a:tcPr marL="152400" marR="152400" marT="50800" marB="50800" anchor="ctr">
-                    <a:lnL w="0" cap="flat" cmpd="sng" algn="ctr">
-                      <a:noFill/>
-                    </a:lnL>
-                    <a:lnR w="0" cap="flat" cmpd="sng" algn="ctr">
-                      <a:noFill/>
-                    </a:lnR>
-                    <a:lnT w="0" cap="flat" cmpd="sng" algn="ctr">
-                      <a:noFill/>
-                    </a:lnT>
-                    <a:lnB w="9525" cap="flat" cmpd="sng" algn="ctr">
-                      <a:solidFill>
-                        <a:srgbClr val="D5DAE1"/>
-                      </a:solidFill>
-                      <a:prstDash val="solid"/>
-                      <a:round/>
-                      <a:headEnd type="none" w="med" len="med"/>
-                      <a:tailEnd type="none" w="med" len="med"/>
-                    </a:lnB>
-                    <a:solidFill>
-                      <a:schemeClr val="bg1"/>
-                    </a:solidFill>
-                  </a:tcPr>
-                </a:tc>
-              </a:tr>
-              <a:tr h="566928">
-                <a:tc>
-                  <a:txBody>
-                    <a:bodyPr/>
-                    <a:lstStyle/>
-                    <a:p>
-                      <a:pPr indent="0" marL="0">
-                        <a:buNone/>
-                      </a:pPr>
-                      <a:r>
-                        <a:rPr lang="en-US" sz="1600" dirty="0">
-                          <a:solidFill>
-                            <a:schemeClr val="tx1"/>
-                          </a:solidFill>
-                        </a:rPr>
-                        <a:t>南加州大学：“高达 38%”数据有偏差</a:t>
-                      </a:r>
-                      <a:endParaRPr lang="en-US" sz="1600" dirty="0"/>
-                    </a:p>
-                  </a:txBody>
-                  <a:tcPr marL="152400" marR="152400" marT="50800" marB="50800" anchor="ctr">
-                    <a:lnL w="0" cap="flat" cmpd="sng" algn="ctr">
-                      <a:noFill/>
-                    </a:lnL>
-                    <a:lnR w="0" cap="flat" cmpd="sng" algn="ctr">
-                      <a:noFill/>
-                    </a:lnR>
-                    <a:lnT w="0" cap="flat" cmpd="sng" algn="ctr">
-                      <a:noFill/>
-                    </a:lnT>
-                    <a:lnB w="9525" cap="flat" cmpd="sng" algn="ctr">
-                      <a:solidFill>
-                        <a:srgbClr val="D5DAE1"/>
-                      </a:solidFill>
-                      <a:prstDash val="solid"/>
-                      <a:round/>
-                      <a:headEnd type="none" w="med" len="med"/>
-                      <a:tailEnd type="none" w="med" len="med"/>
-                    </a:lnB>
-                    <a:solidFill>
-                      <a:schemeClr val="bg1"/>
-                    </a:solidFill>
-                  </a:tcPr>
-                </a:tc>
-                <a:tc>
-                  <a:txBody>
-                    <a:bodyPr/>
-                    <a:lstStyle/>
-                    <a:p>
-                      <a:pPr indent="0" marL="0">
-                        <a:buNone/>
-                      </a:pPr>
-                      <a:r>
-                        <a:rPr lang="en-US" sz="1600" dirty="0">
-                          <a:solidFill>
-                            <a:schemeClr val="tx1"/>
-                          </a:solidFill>
-                        </a:rPr>
-                        <a:t>仅为单一知识库、单一自动指标的结果</a:t>
-                      </a:r>
-                      <a:endParaRPr lang="en-US" sz="1600" dirty="0"/>
-                    </a:p>
-                  </a:txBody>
-                  <a:tcPr marL="152400" marR="152400" marT="50800" marB="50800" anchor="ctr">
-                    <a:lnL w="0" cap="flat" cmpd="sng" algn="ctr">
-                      <a:noFill/>
-                    </a:lnL>
-                    <a:lnR w="0" cap="flat" cmpd="sng" algn="ctr">
-                      <a:noFill/>
-                    </a:lnR>
-                    <a:lnT w="0" cap="flat" cmpd="sng" algn="ctr">
-                      <a:noFill/>
-                    </a:lnT>
-                    <a:lnB w="9525" cap="flat" cmpd="sng" algn="ctr">
-                      <a:solidFill>
-                        <a:srgbClr val="D5DAE1"/>
-                      </a:solidFill>
-                      <a:prstDash val="solid"/>
-                      <a:round/>
-                      <a:headEnd type="none" w="med" len="med"/>
-                      <a:tailEnd type="none" w="med" len="med"/>
-                    </a:lnB>
-                    <a:solidFill>
-                      <a:schemeClr val="bg1"/>
-                    </a:solidFill>
-                  </a:tcPr>
-                </a:tc>
-              </a:tr>
-              <a:tr h="566928">
-                <a:tc>
-                  <a:txBody>
-                    <a:bodyPr/>
-                    <a:lstStyle/>
-                    <a:p>
-                      <a:pPr indent="0" marL="0">
-                        <a:buNone/>
-                      </a:pPr>
-                      <a:r>
-                        <a:rPr lang="en-US" sz="1600" dirty="0">
-                          <a:solidFill>
-                            <a:schemeClr val="tx1"/>
-                          </a:solidFill>
-                        </a:rPr>
-                        <a:t>德勤：41% 的“订户”认为不值</a:t>
-                      </a:r>
-                      <a:endParaRPr lang="en-US" sz="1600" dirty="0"/>
-                    </a:p>
-                  </a:txBody>
-                  <a:tcPr marL="152400" marR="152400" marT="50800" marB="50800" anchor="ctr">
-                    <a:lnL w="0" cap="flat" cmpd="sng" algn="ctr">
-                      <a:noFill/>
-                    </a:lnL>
-                    <a:lnR w="0" cap="flat" cmpd="sng" algn="ctr">
-                      <a:noFill/>
-                    </a:lnR>
-                    <a:lnT w="0" cap="flat" cmpd="sng" algn="ctr">
-                      <a:noFill/>
-                    </a:lnT>
-                    <a:lnB w="9525" cap="flat" cmpd="sng" algn="ctr">
-                      <a:solidFill>
-                        <a:srgbClr val="D5DAE1"/>
-                      </a:solidFill>
-                      <a:prstDash val="solid"/>
-                      <a:round/>
-                      <a:headEnd type="none" w="med" len="med"/>
-                      <a:tailEnd type="none" w="med" len="med"/>
-                    </a:lnB>
-                    <a:solidFill>
-                      <a:schemeClr val="bg1"/>
-                    </a:solidFill>
-                  </a:tcPr>
-                </a:tc>
-                <a:tc>
-                  <a:txBody>
-                    <a:bodyPr/>
-                    <a:lstStyle/>
-                    <a:p>
-                      <a:pPr indent="0" marL="0">
-                        <a:buNone/>
-                      </a:pPr>
-                      <a:r>
-                        <a:rPr lang="en-US" sz="1600" dirty="0">
-                          <a:solidFill>
-                            <a:schemeClr val="tx1"/>
-                          </a:solidFill>
-                        </a:rPr>
-                        <a:t>原文分母为全体消费者</a:t>
-                      </a:r>
-                      <a:endParaRPr lang="en-US" sz="1600" dirty="0"/>
-                    </a:p>
-                  </a:txBody>
-                  <a:tcPr marL="152400" marR="152400" marT="50800" marB="50800" anchor="ctr">
-                    <a:lnL w="0" cap="flat" cmpd="sng" algn="ctr">
-                      <a:noFill/>
-                    </a:lnL>
-                    <a:lnR w="0" cap="flat" cmpd="sng" algn="ctr">
-                      <a:noFill/>
-                    </a:lnR>
-                    <a:lnT w="0" cap="flat" cmpd="sng" algn="ctr">
-                      <a:noFill/>
-                    </a:lnT>
-                    <a:lnB w="9525" cap="flat" cmpd="sng" algn="ctr">
-                      <a:solidFill>
-                        <a:srgbClr val="D5DAE1"/>
-                      </a:solidFill>
-                      <a:prstDash val="solid"/>
-                      <a:round/>
-                      <a:headEnd type="none" w="med" len="med"/>
-                      <a:tailEnd type="none" w="med" len="med"/>
-                    </a:lnB>
-                    <a:solidFill>
-                      <a:schemeClr val="bg1"/>
-                    </a:solidFill>
-                  </a:tcPr>
-                </a:tc>
-              </a:tr>
-              <a:tr h="566928">
-                <a:tc>
-                  <a:txBody>
-                    <a:bodyPr/>
-                    <a:lstStyle/>
-                    <a:p>
-                      <a:pPr indent="0" marL="0">
-                        <a:buNone/>
-                      </a:pPr>
-                      <a:r>
-                        <a:rPr lang="en-US" sz="1600" dirty="0">
-                          <a:solidFill>
-                            <a:schemeClr val="tx1"/>
-                          </a:solidFill>
-                        </a:rPr>
-                        <a:t>普华永道：2029 年支出 3,185 亿美元</a:t>
-                      </a:r>
-                      <a:endParaRPr lang="en-US" sz="1600" dirty="0"/>
-                    </a:p>
-                  </a:txBody>
-                  <a:tcPr marL="152400" marR="152400" marT="50800" marB="50800" anchor="ctr">
-                    <a:lnL w="0" cap="flat" cmpd="sng" algn="ctr">
-                      <a:noFill/>
-                    </a:lnL>
-                    <a:lnR w="0" cap="flat" cmpd="sng" algn="ctr">
-                      <a:noFill/>
-                    </a:lnR>
-                    <a:lnT w="0" cap="flat" cmpd="sng" algn="ctr">
-                      <a:noFill/>
-                    </a:lnT>
-                    <a:lnB w="9525" cap="flat" cmpd="sng" algn="ctr">
-                      <a:solidFill>
-                        <a:srgbClr val="D5DAE1"/>
-                      </a:solidFill>
-                      <a:prstDash val="solid"/>
-                      <a:round/>
-                      <a:headEnd type="none" w="med" len="med"/>
-                      <a:tailEnd type="none" w="med" len="med"/>
-                    </a:lnB>
-                    <a:solidFill>
-                      <a:schemeClr val="bg1"/>
-                    </a:solidFill>
-                  </a:tcPr>
-                </a:tc>
-                <a:tc>
-                  <a:txBody>
-                    <a:bodyPr/>
-                    <a:lstStyle/>
-                    <a:p>
-                      <a:pPr indent="0" marL="0">
-                        <a:buNone/>
-                      </a:pPr>
-                      <a:r>
-                        <a:rPr lang="en-US" sz="1600" dirty="0">
-                          <a:solidFill>
-                            <a:schemeClr val="tx1"/>
-                          </a:solidFill>
-                        </a:rPr>
-                        <a:t>全球数据，非美国</a:t>
-                      </a:r>
-                      <a:endParaRPr lang="en-US" sz="1600" dirty="0"/>
-                    </a:p>
-                  </a:txBody>
-                  <a:tcPr marL="152400" marR="152400" marT="50800" marB="50800" anchor="ctr">
-                    <a:lnL w="0" cap="flat" cmpd="sng" algn="ctr">
-                      <a:noFill/>
-                    </a:lnL>
-                    <a:lnR w="0" cap="flat" cmpd="sng" algn="ctr">
-                      <a:noFill/>
-                    </a:lnR>
-                    <a:lnT w="0" cap="flat" cmpd="sng" algn="ctr">
-                      <a:noFill/>
-                    </a:lnT>
-                    <a:lnB w="9525" cap="flat" cmpd="sng" algn="ctr">
-                      <a:solidFill>
-                        <a:srgbClr val="D5DAE1"/>
-                      </a:solidFill>
-                      <a:prstDash val="solid"/>
-                      <a:round/>
-                      <a:headEnd type="none" w="med" len="med"/>
-                      <a:tailEnd type="none" w="med" len="med"/>
-                    </a:lnB>
-                    <a:solidFill>
-                      <a:schemeClr val="bg1"/>
-                    </a:solidFill>
-                  </a:tcPr>
-                </a:tc>
-              </a:tr>
-              <a:tr h="566928">
-                <a:tc>
-                  <a:txBody>
-                    <a:bodyPr/>
-                    <a:lstStyle/>
-                    <a:p>
-                      <a:pPr indent="0" marL="0">
-                        <a:buNone/>
-                      </a:pPr>
-                      <a:r>
-                        <a:rPr lang="en-US" sz="1600" dirty="0">
-                          <a:solidFill>
-                            <a:schemeClr val="tx1"/>
-                          </a:solidFill>
-                        </a:rPr>
-                        <a:t>摘要：54% 的 18–34 岁“会取消”</a:t>
-                      </a:r>
-                      <a:endParaRPr lang="en-US" sz="1600" dirty="0"/>
-                    </a:p>
-                  </a:txBody>
-                  <a:tcPr marL="152400" marR="152400" marT="50800" marB="50800" anchor="ctr">
-                    <a:lnL w="0" cap="flat" cmpd="sng" algn="ctr">
-                      <a:noFill/>
-                    </a:lnL>
-                    <a:lnR w="0" cap="flat" cmpd="sng" algn="ctr">
-                      <a:noFill/>
-                    </a:lnR>
-                    <a:lnT w="0" cap="flat" cmpd="sng" algn="ctr">
-                      <a:noFill/>
-                    </a:lnT>
-                    <a:lnB w="9525" cap="flat" cmpd="sng" algn="ctr">
-                      <a:solidFill>
-                        <a:srgbClr val="D5DAE1"/>
-                      </a:solidFill>
-                      <a:prstDash val="solid"/>
-                      <a:round/>
-                      <a:headEnd type="none" w="med" len="med"/>
-                      <a:tailEnd type="none" w="med" len="med"/>
-                    </a:lnB>
-                    <a:solidFill>
-                      <a:schemeClr val="bg1"/>
-                    </a:solidFill>
-                  </a:tcPr>
-                </a:tc>
-                <a:tc>
-                  <a:txBody>
-                    <a:bodyPr/>
-                    <a:lstStyle/>
-                    <a:p>
-                      <a:pPr indent="0" marL="0">
-                        <a:buNone/>
-                      </a:pPr>
-                      <a:r>
-                        <a:rPr lang="en-US" sz="1600" dirty="0">
-                          <a:solidFill>
-                            <a:schemeClr val="tx1"/>
-                          </a:solidFill>
-                        </a:rPr>
-                        <a:t>原题为“可能取消”，且为六国数据</a:t>
-                      </a:r>
-                      <a:endParaRPr lang="en-US" sz="1600" dirty="0"/>
-                    </a:p>
-                  </a:txBody>
-                  <a:tcPr marL="152400" marR="152400" marT="50800" marB="50800" anchor="ctr">
-                    <a:lnL w="0" cap="flat" cmpd="sng" algn="ctr">
-                      <a:noFill/>
-                    </a:lnL>
-                    <a:lnR w="0" cap="flat" cmpd="sng" algn="ctr">
-                      <a:noFill/>
-                    </a:lnR>
-                    <a:lnT w="0" cap="flat" cmpd="sng" algn="ctr">
-                      <a:noFill/>
-                    </a:lnT>
-                    <a:lnB w="9525" cap="flat" cmpd="sng" algn="ctr">
-                      <a:solidFill>
-                        <a:srgbClr val="D5DAE1"/>
-                      </a:solidFill>
-                      <a:prstDash val="solid"/>
-                      <a:round/>
-                      <a:headEnd type="none" w="med" len="med"/>
-                      <a:tailEnd type="none" w="med" len="med"/>
-                    </a:lnB>
-                    <a:solidFill>
-                      <a:schemeClr val="bg1"/>
-                    </a:solidFill>
-                  </a:tcPr>
-                </a:tc>
-              </a:tr>
-              <a:tr h="566928">
-                <a:tc>
-                  <a:txBody>
-                    <a:bodyPr/>
-                    <a:lstStyle/>
-                    <a:p>
-                      <a:pPr indent="0" marL="0">
-                        <a:buNone/>
-                      </a:pPr>
-                      <a:r>
-                        <a:rPr lang="en-US" sz="1600" dirty="0">
-                          <a:solidFill>
-                            <a:schemeClr val="tx1"/>
-                          </a:solidFill>
-                        </a:rPr>
-                        <a:t>“26% 的美国人找不到想看的”</a:t>
-                      </a:r>
-                      <a:endParaRPr lang="en-US" sz="1600" dirty="0"/>
-                    </a:p>
-                  </a:txBody>
-                  <a:tcPr marL="152400" marR="152400" marT="50800" marB="50800" anchor="ctr">
-                    <a:lnL w="0" cap="flat" cmpd="sng" algn="ctr">
-                      <a:noFill/>
-                    </a:lnL>
-                    <a:lnR w="0" cap="flat" cmpd="sng" algn="ctr">
-                      <a:noFill/>
-                    </a:lnR>
-                    <a:lnT w="0" cap="flat" cmpd="sng" algn="ctr">
-                      <a:noFill/>
-                    </a:lnT>
-                    <a:lnB w="9525" cap="flat" cmpd="sng" algn="ctr">
-                      <a:solidFill>
-                        <a:srgbClr val="D5DAE1"/>
-                      </a:solidFill>
-                      <a:prstDash val="solid"/>
-                      <a:round/>
-                      <a:headEnd type="none" w="med" len="med"/>
-                      <a:tailEnd type="none" w="med" len="med"/>
-                    </a:lnB>
-                    <a:solidFill>
-                      <a:schemeClr val="bg1"/>
-                    </a:solidFill>
-                  </a:tcPr>
-                </a:tc>
-                <a:tc>
-                  <a:txBody>
-                    <a:bodyPr/>
-                    <a:lstStyle/>
-                    <a:p>
-                      <a:pPr indent="0" marL="0">
-                        <a:buNone/>
-                      </a:pPr>
-                      <a:r>
-                        <a:rPr lang="en-US" sz="1600" dirty="0">
-                          <a:solidFill>
-                            <a:schemeClr val="tx1"/>
-                          </a:solidFill>
-                        </a:rPr>
-                        <a:t>未找到出处</a:t>
-                      </a:r>
-                      <a:endParaRPr lang="en-US" sz="1600" dirty="0"/>
-                    </a:p>
-                  </a:txBody>
-                  <a:tcPr marL="152400" marR="152400" marT="50800" marB="50800" anchor="ctr">
-                    <a:lnL w="0" cap="flat" cmpd="sng" algn="ctr">
-                      <a:noFill/>
-                    </a:lnL>
-                    <a:lnR w="0" cap="flat" cmpd="sng" algn="ctr">
-                      <a:noFill/>
-                    </a:lnR>
-                    <a:lnT w="0" cap="flat" cmpd="sng" algn="ctr">
-                      <a:noFill/>
-                    </a:lnT>
-                    <a:lnB w="9525" cap="flat" cmpd="sng" algn="ctr">
-                      <a:solidFill>
-                        <a:srgbClr val="D5DAE1"/>
-                      </a:solidFill>
-                      <a:prstDash val="solid"/>
-                      <a:round/>
-                      <a:headEnd type="none" w="med" len="med"/>
-                      <a:tailEnd type="none" w="med" len="med"/>
-                    </a:lnB>
-                    <a:solidFill>
-                      <a:schemeClr val="bg1"/>
-                    </a:solidFill>
-                  </a:tcPr>
-                </a:tc>
-              </a:tr>
-            </a:tbl>
-          </a:graphicData>
-        </a:graphic>
-      </p:graphicFrame>
-      <p:sp>
-        <p:nvSpPr>
-          <p:cNvPr id="5" name="来源说明"/>
-          <p:cNvSpPr txBox="1"/>
-          <p:nvPr/>
-        </p:nvSpPr>
-        <p:spPr>
-          <a:xfrm>
-            <a:off x="548640" y="6035040"/>
-            <a:ext cx="10332720" cy="274320"/>
-          </a:xfrm>
-          <a:prstGeom prst="rect">
-            <a:avLst/>
-          </a:prstGeom>
-          <a:noFill/>
-          <a:ln/>
-        </p:spPr>
-        <p:txBody>
-          <a:bodyPr wrap="square" lIns="0" tIns="0" rIns="0" bIns="0" rtlCol="0" anchor="ctr"/>
-          <a:lstStyle/>
-          <a:p>
-            <a:pPr indent="0" marL="0">
-              <a:buNone/>
-            </a:pPr>
-            <a:r>
-              <a:rPr lang="en-US" sz="1100" dirty="0">
-                <a:solidFill>
-                  <a:schemeClr val="accent5"/>
-                </a:solidFill>
-              </a:rPr>
-              <a:t>来源：Gracenote 报告；皮尤、南加州大学、德勤、普华永道原文。</a:t>
-            </a:r>
-            <a:endParaRPr lang="en-US" sz="1100" dirty="0"/>
-          </a:p>
-        </p:txBody>
-      </p:sp>
-      <p:sp>
-        <p:nvSpPr>
-          <p:cNvPr id="25" name="Slide Number Placeholder 0"/>
-          <p:cNvSpPr>
-            <a:spLocks noGrp="1"/>
-          </p:cNvSpPr>
-          <p:nvPr>
-            <p:ph type="sldNum" sz="quarter" idx="4294967295"/>
-          </p:nvPr>
-        </p:nvSpPr>
-        <p:spPr>
-          <a:xfrm>
-            <a:off x="11064240" y="6355080"/>
-            <a:ext cx="548640" cy="274320"/>
-          </a:xfrm>
-          <a:prstGeom prst="rect">
-            <a:avLst/>
-          </a:prstGeom>
-          <a:extLst>
-            <a:ext uri="{C572A759-6A51-4108-AA02-DFA0A04FC94B}">
-              <ma14:wrappingTextBoxFlag xmlns:ma14="http://schemas.microsoft.com/office/mac/drawingml/2011/main" val="0"/>
-            </a:ext>
-          </a:extLst>
-        </p:spPr>
-        <p:txBody>
-          <a:bodyPr/>
-          <a:lstStyle>
-            <a:lvl1pPr>
-              <a:defRPr sz="1000">
-                <a:solidFill>
-                  <a:schemeClr val="accent5"/>
-                </a:solidFill>
-              </a:defRPr>
-            </a:lvl1pPr>
-          </a:lstStyle>
-          <a:p>
-            <a:pPr algn="r"/>
-            <a:fld id="{F7021451-1387-4CA6-816F-3879F97B5CBC}" type="slidenum">
-              <a:rPr b="0" lang="en-US"/>
-              <a:t>14</a:t>
-            </a:fld>
-            <a:endParaRPr lang="en-US"/>
-          </a:p>
-        </p:txBody>
-      </p:sp>
-    </p:spTree>
-  </p:cSld>
-  <p:clrMapOvr>
-    <a:masterClrMapping/>
-  </p:clrMapOvr>
-  <p:transition spd="med">
-    <p:fade/>
-  </p:transition>
 </p:sld>
 </file>
 
@@ -13157,7 +10688,7 @@
                   <a:schemeClr val="tx1"/>
                 </a:solidFill>
               </a:rPr>
-              <a:t>报告另引用 11 个外部来源，其方法披露情况见附录一。</a:t>
+              <a:t>报告另引用尼尔森、皮尤、德勤、普华永道等 11 个外部来源。</a:t>
             </a:r>
             <a:endParaRPr lang="en-US" sz="1800" dirty="0"/>
           </a:p>

--- a/Gracenote报告解读_课堂汇报.pptx
+++ b/Gracenote报告解读_课堂汇报.pptx
@@ -118,13 +118,13 @@
   <p:extLst>
     <p:ext uri="{521415D9-36F7-43E2-AB2F-B90AF26B5E84}">
       <p14:sectionLst xmlns:p14="http://schemas.microsoft.com/office/powerpoint/2010/main">
-        <p14:section name="开场" id="{26b24f85-4d8a-11bc-a8e1-a6d71a209703}">
+        <p14:section name="开场" id="{fe75d69b-876a-d7e7-2ea7-380695486c0f}">
           <p14:sldIdLst>
             <p14:sldId id="256"/>
             <p14:sldId id="257"/>
           </p14:sldIdLst>
         </p14:section>
-        <p14:section name="报告介绍" id="{5031436b-0417-bd18-f831-ab63c9b7ee6d}">
+        <p14:section name="报告介绍" id="{cd12fdbc-b093-04e4-7a26-4ad4c4075a60}">
           <p14:sldIdLst>
             <p14:sldId id="258"/>
             <p14:sldId id="259"/>
@@ -132,7 +132,7 @@
             <p14:sldId id="261"/>
           </p14:sldIdLst>
         </p14:section>
-        <p14:section name="方法评价" id="{5ceb1784-8add-7693-a31e-60a9102c4a07}">
+        <p14:section name="方法评价" id="{dcf53db5-4ea7-6b7c-a8a1-4aa4e6013faf}">
           <p14:sldIdLst>
             <p14:sldId id="262"/>
             <p14:sldId id="263"/>
@@ -141,7 +141,7 @@
             <p14:sldId id="266"/>
           </p14:sldIdLst>
         </p14:section>
-        <p14:section name="结论" id="{0966a616-0609-e722-7993-883bdad9d1a2}">
+        <p14:section name="总结" id="{ee22bd34-6e42-ccd2-c9df-0a803be7b0a0}">
           <p14:sldIdLst>
             <p14:sldId id="267"/>
           </p14:sldIdLst>
@@ -550,7 +550,7 @@
           <a:p>
             <a:r>
               <a:rPr lang="en-US" dirty="0"/>
-              <a:t>【约 30 秒】各位老师、同学好，我是黄广润。我汇报的是尼尔森旗下 Gracenote 公司 2026 年 4 月的报告，《AI 时代的电视搜索与内容发现》。报告称，13 至 14 岁受访者中 54% 每天使用 AI。这个比例来自哪一类样本，是本次评析要看的第一点。</a:t>
+              <a:t>【约 20 秒】各位老师、同学好，我是黄广润。今天分享的是我对一份市场研究报告的阅读和评价。汇报按报告本身的顺序：先讲背景和问题，再讲方法和结论，最后做评价。</a:t>
             </a:r>
             <a:endParaRPr lang="en-US" dirty="0"/>
           </a:p>
@@ -638,7 +638,7 @@
           <a:p>
             <a:r>
               <a:rPr lang="en-US" dirty="0"/>
-              <a:t>【约 30 秒】第三是调查时间与比较基准。报告拿皮尤 2025 年秋天的 30%，对比自己 2026 年初的 54%，认为使用频率在加速。但皮尤的分母是全体青少年，同为 13 至 14 岁只有 24%，而本报告只统计 AI 用户。分母统一为使用者后，差距约 10 个百分点，不足以支持“加速”。</a:t>
+              <a:t>【约 30 秒】第三看调查时间。报告拿皮尤 2025 年秋天的 30%，对比自己 2026 年初的 54%，认为使用在加速。但皮尤以全体青少年为分母，13 至 14 岁只有 24%，本报告只统计 AI 用户。换成使用者，皮尤是 44%，仍差约 10 个百分点，还不能判断是否在加速。</a:t>
             </a:r>
             <a:endParaRPr lang="en-US" dirty="0"/>
           </a:p>
@@ -726,7 +726,7 @@
           <a:p>
             <a:r>
               <a:rPr lang="en-US" dirty="0"/>
-              <a:t>【约 20 秒】第四是研究方法。“找节目困难导致退订”用到了退订意向、退订率、市场预测和 AI 测试四类数据，性质不同，也没有追踪同一批人。这样的数据只能说明两者有关联，不能证明因果。</a:t>
+              <a:t>【约 25 秒】最后看研究方法。支撑“难找导致退订”的，有退订意向、行业流失率、市场预测和 AI 测试四类数据。它们来自不同人群，没有追踪同一批人，也没有对照，只能说明几件事同时存在，不足以证明因果。</a:t>
             </a:r>
             <a:endParaRPr lang="en-US" dirty="0"/>
           </a:p>
@@ -814,7 +814,7 @@
           <a:p>
             <a:r>
               <a:rPr lang="en-US" dirty="0"/>
-              <a:t>【约 35 秒】总的来说，这份报告对 AI 用户的描述有参考价值，年轻人更多用 AI 找内容、AI 回答不够可靠，这两个方向与皮尤等独立来源一致。但前两个结论只适用于 AI 用户，第三个只能说明相关，第四个报告没有检验。最后留一个问题供讨论：要检验找节目困难与退订的因果关系，应怎样设计调查？谢谢大家。</a:t>
+              <a:t>【约 30 秒】最后总结。这份报告有参考价值，皮尤等独立来源也指向同样的方向。但结论超出了样本所能支持的范围：前两项只适用于 AI 用户，第三项只能说明相关，第四项没有检验。重新设计时，可以采用概率样本，纳入不用 AI 的人，追踪同一批人，并公开抽样方法。谢谢大家。</a:t>
             </a:r>
             <a:endParaRPr lang="en-US" dirty="0"/>
           </a:p>
@@ -902,7 +902,7 @@
           <a:p>
             <a:r>
               <a:rPr lang="en-US" dirty="0"/>
-              <a:t>【约 15 秒】先说结论。这份报告反映了 AI 用户的变化，有参考价值，但样本只包括 AI 用户，结论不适合推到美国的整体人群。下面分五个部分讲。</a:t>
+              <a:t>【约 25 秒】我选的是 Gracenote 在 2026 年 4 月发布的报告，《AI 时代的电视搜索与内容发现》。Gracenote 是尼尔森旗下的公司，做电视和流媒体的节目数据。视频软件里的节目指南，背后常常就是这类数据。</a:t>
             </a:r>
             <a:endParaRPr lang="en-US" dirty="0"/>
           </a:p>
@@ -990,7 +990,7 @@
           <a:p>
             <a:r>
               <a:rPr lang="en-US" dirty="0"/>
-              <a:t>【约 30 秒】研究背景是，流媒体平台增多，节目分散，用户找节目的成本上升，AI 聊天机器人成了新的找节目方式。报告考察三个问题：AI 使用频率、找节目的难度与退订意向，以及对 AI 回答的信任。需要说明，Gracenote 的主要业务就是节目数据。</a:t>
+              <a:t>【约 30 秒】先看研究背景。流媒体平台越来越多，节目分散，找想看的内容更费劲，AI 聊天机器人成了新的找节目方式。报告由此提出三个问题：AI 的使用频率，找节目的难度与退订意向，以及对 AI 回答的信任。需要留意，报告建议 AI 接入行业数据，这正是 Gracenote 的业务。</a:t>
             </a:r>
             <a:endParaRPr lang="en-US" dirty="0"/>
           </a:p>
@@ -1166,7 +1166,7 @@
           <a:p>
             <a:r>
               <a:rPr lang="en-US" dirty="0"/>
-              <a:t>【约 20 秒】报告的第一项结论是，13 至 14 岁的 AI 用户中 54% 每天使用，75% 的受访者会核对 AI 的回答。报告解释说，AI 的回答直接，还可以追问，所以使用增加；但它可能出错，用户仍需核对。</a:t>
+              <a:t>【约 20 秒】再看研究结论，共四项。第一项，年轻人越来越依赖 AI：13 至 14 岁受访者中，80% 说使用增加，54% 每天使用。第二项，信任有限：75% 的受访者会核对 AI 的结果，因为 AI 可能出错。</a:t>
             </a:r>
             <a:endParaRPr lang="en-US" dirty="0"/>
           </a:p>
@@ -1254,7 +1254,7 @@
           <a:p>
             <a:r>
               <a:rPr lang="en-US" dirty="0"/>
-              <a:t>【约 20 秒】第二项结论与找节目有关。用户平均要花 14 分钟找节目，18 至 34 岁的受访者中 54% 表示可能因此退订，AI 只能正确回答约三分之二的播出平台。报告据此提出，AI 需要接入可靠的行业数据。</a:t>
+              <a:t>【约 25 秒】第三项，内容难找可能导致退订。受访者平均要花 14 分钟找节目，18 至 34 岁的受访者中 54% 表示可能因此退订，AI 也只能正确回答约三分之二的播出平台。第四项，因此 AI 需要接入可靠的行业数据。</a:t>
             </a:r>
             <a:endParaRPr lang="en-US" dirty="0"/>
           </a:p>
@@ -1342,7 +1342,7 @@
           <a:p>
             <a:r>
               <a:rPr lang="en-US" dirty="0"/>
-              <a:t>【约 15 秒】报告的推论共四个环节：年轻人依赖 AI，对 AI 信任不足，找节目困难导致退订，因此 AI 应接入行业数据。下面从四个方面逐项检查。</a:t>
+              <a:t>【约 15 秒】接下来评价。报告的推论是一条链：依赖 AI，信任有限，难找导致退订，所以要接入行业数据。我从调查对象、范围、时间和研究方法四个方面逐项检查。</a:t>
             </a:r>
             <a:endParaRPr lang="en-US" dirty="0"/>
           </a:p>
@@ -1430,7 +1430,7 @@
           <a:p>
             <a:r>
               <a:rPr lang="en-US" dirty="0"/>
-              <a:t>【约 20 秒】先看调查对象。4003 名受访者都是 AI 聊天机器人用户，样本不包括不用 AI 的人。所以 54% 和 75% 只代表 AI 用户，不能当作美国人整体的情况，报告正文却有几处写成“美国人”。</a:t>
+              <a:t>【约 20 秒】先看调查对象。4003 名受访者都是 AI 聊天机器人用户，不包括不用 AI 的人。所以 54% 和 75% 只代表 AI 用户，报告正文却有几处写成“美国人”。</a:t>
             </a:r>
             <a:endParaRPr lang="en-US" dirty="0"/>
           </a:p>
@@ -1518,7 +1518,7 @@
           <a:p>
             <a:r>
               <a:rPr lang="en-US" dirty="0"/>
-              <a:t>【约 20 秒】再看调查范围。报告说平均找节目要 14 分钟，这是六国的简单平均，法国的 26 分钟拉高了均值，美国自己是 12 分钟。但它被放在美国的收视图表里，容易被当成美国的数据。</a:t>
+              <a:t>【约 20 秒】再看调查范围。报告说平均找节目 14 分钟，其实是六国的简单平均，法国的 26 分钟拉高了均值，美国本身是 12 分钟。这个数字还被放在美国的收视图表里，容易被当成美国的数据。</a:t>
             </a:r>
             <a:endParaRPr lang="en-US" dirty="0"/>
           </a:p>
@@ -2485,14 +2485,14 @@
       </p:sp>
       <p:sp>
         <p:nvSpPr>
-          <p:cNvPr id="8" name="封面数字"/>
+          <p:cNvPr id="8" name="封面目录"/>
           <p:cNvSpPr txBox="1"/>
           <p:nvPr/>
         </p:nvSpPr>
         <p:spPr>
           <a:xfrm>
-            <a:off x="731520" y="4343400"/>
-            <a:ext cx="1828800" cy="914400"/>
+            <a:off x="731520" y="4389120"/>
+            <a:ext cx="5394960" cy="914400"/>
           </a:xfrm>
           <a:prstGeom prst="rect">
             <a:avLst/>
@@ -2505,47 +2505,25 @@
           <a:lstStyle/>
           <a:p>
             <a:pPr indent="0" marL="0">
-              <a:buNone/>
-            </a:pPr>
-            <a:r>
-              <a:rPr lang="en-US" sz="4800" b="1" dirty="0">
-                <a:solidFill>
-                  <a:schemeClr val="accent4"/>
-                </a:solidFill>
-                <a:latin typeface="Arial" pitchFamily="34" charset="0"/>
-                <a:ea typeface="Arial" pitchFamily="34" charset="-122"/>
-                <a:cs typeface="Arial" pitchFamily="34" charset="-120"/>
-              </a:rPr>
-              <a:t>54%</a:t>
-            </a:r>
-            <a:endParaRPr lang="en-US" sz="4800" dirty="0"/>
-          </a:p>
-        </p:txBody>
-      </p:sp>
-      <p:sp>
-        <p:nvSpPr>
-          <p:cNvPr id="9" name="封面问题"/>
-          <p:cNvSpPr txBox="1"/>
-          <p:nvPr/>
-        </p:nvSpPr>
-        <p:spPr>
-          <a:xfrm>
-            <a:off x="2651760" y="4343400"/>
-            <a:ext cx="3291840" cy="914400"/>
-          </a:xfrm>
-          <a:prstGeom prst="rect">
-            <a:avLst/>
-          </a:prstGeom>
-          <a:noFill/>
-          <a:ln/>
-        </p:spPr>
-        <p:txBody>
-          <a:bodyPr wrap="square" lIns="0" tIns="0" rIns="0" bIns="0" rtlCol="0" anchor="ctr"/>
-          <a:lstStyle/>
+              <a:spcAft>
+                <a:spcPts val="600"/>
+              </a:spcAft>
+              <a:buNone/>
+            </a:pPr>
+            <a:r>
+              <a:rPr lang="en-US" sz="1600" dirty="0">
+                <a:solidFill>
+                  <a:schemeClr val="bg1"/>
+                </a:solidFill>
+              </a:rPr>
+              <a:t>01  研究背景与问题　　02  研究方法</a:t>
+            </a:r>
+            <a:endParaRPr lang="en-US" sz="1600" dirty="0"/>
+          </a:p>
           <a:p>
             <a:pPr indent="0" marL="0">
               <a:spcAft>
-                <a:spcPts val="400"/>
+                <a:spcPts val="600"/>
               </a:spcAft>
               <a:buNone/>
             </a:pPr>
@@ -2555,24 +2533,7 @@
                   <a:schemeClr val="bg1"/>
                 </a:solidFill>
               </a:rPr>
-              <a:t>13–14 岁受访者每日使用 AI</a:t>
-            </a:r>
-            <a:endParaRPr lang="en-US" sz="1600" dirty="0"/>
-          </a:p>
-          <a:p>
-            <a:pPr indent="0" marL="0">
-              <a:spcAft>
-                <a:spcPts val="400"/>
-              </a:spcAft>
-              <a:buNone/>
-            </a:pPr>
-            <a:r>
-              <a:rPr lang="en-US" sz="1600" dirty="0">
-                <a:solidFill>
-                  <a:schemeClr val="accent6"/>
-                </a:solidFill>
-              </a:rPr>
-              <a:t>该比例来自哪类样本？</a:t>
+              <a:t>03  研究结论　　　　　04  思考与评价</a:t>
             </a:r>
             <a:endParaRPr lang="en-US" sz="1600" dirty="0"/>
           </a:p>
@@ -2604,7 +2565,7 @@
                       </p:stCondLst>
                       <p:childTnLst>
                         <p:par>
-                          <p:cTn id="16" fill="hold">
+                          <p:cTn id="13" fill="hold">
                             <p:stCondLst>
                               <p:cond delay="0"/>
                             </p:stCondLst>
@@ -2708,41 +2669,6 @@
                                         <p:cTn id="12" dur="500"/>
                                         <p:tgtEl>
                                           <p:spTgt spid="8"/>
-                                        </p:tgtEl>
-                                      </p:cBhvr>
-                                    </p:animEffect>
-                                  </p:childTnLst>
-                                </p:cTn>
-                              </p:par>
-                              <p:par>
-                                <p:cTn id="13" presetID="10" presetClass="entr" presetSubtype="0" fill="hold" grpId="0" nodeType="withEffect">
-                                  <p:stCondLst>
-                                    <p:cond delay="550"/>
-                                  </p:stCondLst>
-                                  <p:childTnLst>
-                                    <p:set>
-                                      <p:cBhvr>
-                                        <p:cTn id="14" dur="1" fill="hold">
-                                          <p:stCondLst>
-                                            <p:cond delay="0"/>
-                                          </p:stCondLst>
-                                        </p:cTn>
-                                        <p:tgtEl>
-                                          <p:spTgt spid="9"/>
-                                        </p:tgtEl>
-                                        <p:attrNameLst>
-                                          <p:attrName>style.visibility</p:attrName>
-                                        </p:attrNameLst>
-                                      </p:cBhvr>
-                                      <p:to>
-                                        <p:strVal val="visible"/>
-                                      </p:to>
-                                    </p:set>
-                                    <p:animEffect transition="in" filter="fade">
-                                      <p:cBhvr>
-                                        <p:cTn id="15" dur="500"/>
-                                        <p:tgtEl>
-                                          <p:spTgt spid="9"/>
                                         </p:tgtEl>
                                       </p:cBhvr>
                                     </p:animEffect>
@@ -2779,7 +2705,6 @@
     <p:bldLst>
       <p:bldP spid="7" grpId="0" animBg="1"/>
       <p:bldP spid="8" grpId="0" animBg="1"/>
-      <p:bldP spid="9" grpId="0" animBg="1"/>
     </p:bldLst>
   </p:timing>
 </p:sld>
@@ -3487,7 +3412,7 @@
                   <a:schemeClr val="tx1"/>
                 </a:solidFill>
               </a:rPr>
-              <a:t>统一分母后差距约 10 个百分点，</a:t>
+              <a:t>统一分母后仍差约 10 个百分点，</a:t>
             </a:r>
             <a:endParaRPr lang="en-US" sz="1800" dirty="0"/>
           </a:p>
@@ -3501,7 +3426,7 @@
                   <a:schemeClr val="tx1"/>
                 </a:solidFill>
               </a:rPr>
-              <a:t>“加速”不成立</a:t>
+              <a:t>还不能判断“加速”</a:t>
             </a:r>
             <a:endParaRPr lang="en-US" sz="1800" dirty="0"/>
           </a:p>
@@ -4890,7 +4815,7 @@
                   <a:schemeClr val="tx1"/>
                 </a:solidFill>
               </a:rPr>
-              <a:t>且无追踪设计</a:t>
+              <a:t>无追踪、无对照</a:t>
             </a:r>
             <a:endParaRPr lang="en-US" sz="1800" dirty="0"/>
           </a:p>
@@ -4985,7 +4910,7 @@
                   <a:schemeClr val="tx1"/>
                 </a:solidFill>
               </a:rPr>
-              <a:t>仅能说明相关，</a:t>
+              <a:t>只能说明同时存在，</a:t>
             </a:r>
             <a:endParaRPr lang="en-US" sz="1800" dirty="0"/>
           </a:p>
@@ -4999,7 +4924,7 @@
                   <a:schemeClr val="tx1"/>
                 </a:solidFill>
               </a:rPr>
-              <a:t>不能证明因果</a:t>
+              <a:t>不足以证明因果</a:t>
             </a:r>
             <a:endParaRPr lang="en-US" sz="1800" dirty="0"/>
           </a:p>
@@ -5868,7 +5793,7 @@
                   <a:schemeClr val="accent4"/>
                 </a:solidFill>
               </a:rPr>
-              <a:t>05  总体判断</a:t>
+              <a:t>05  总结</a:t>
             </a:r>
             <a:endParaRPr lang="en-US" sz="1400" dirty="0"/>
           </a:p>
@@ -5906,7 +5831,7 @@
                   <a:schemeClr val="bg1"/>
                 </a:solidFill>
               </a:rPr>
-              <a:t>结论适用于 AI 用户，不宜外推</a:t>
+              <a:t>有参考价值，但结论超出样本所能支持的范围</a:t>
             </a:r>
             <a:endParaRPr lang="en-US" sz="3000" dirty="0"/>
           </a:p>
@@ -5920,7 +5845,7 @@
         </p:nvSpPr>
         <p:spPr>
           <a:xfrm>
-            <a:off x="731520" y="1783080"/>
+            <a:off x="731520" y="1600200"/>
             <a:ext cx="6675120" cy="0"/>
           </a:xfrm>
           <a:prstGeom prst="line">
@@ -5943,8 +5868,8 @@
         </p:nvSpPr>
         <p:spPr>
           <a:xfrm>
-            <a:off x="731520" y="1783080"/>
-            <a:ext cx="4389120" cy="868680"/>
+            <a:off x="731520" y="1600200"/>
+            <a:ext cx="4754880" cy="822960"/>
           </a:xfrm>
           <a:prstGeom prst="rect">
             <a:avLst/>
@@ -5965,7 +5890,7 @@
                   <a:schemeClr val="bg1"/>
                 </a:solidFill>
               </a:rPr>
-              <a:t>① 依赖 AI</a:t>
+              <a:t>① 年轻人依赖 AI</a:t>
             </a:r>
             <a:endParaRPr lang="en-US" sz="2000" dirty="0"/>
           </a:p>
@@ -5979,8 +5904,8 @@
         </p:nvSpPr>
         <p:spPr>
           <a:xfrm>
-            <a:off x="5806440" y="2002536"/>
-            <a:ext cx="1600200" cy="429768"/>
+            <a:off x="5577840" y="1792224"/>
+            <a:ext cx="1828800" cy="429768"/>
           </a:xfrm>
           <a:prstGeom prst="roundRect">
             <a:avLst>
@@ -6006,8 +5931,8 @@
         </p:nvSpPr>
         <p:spPr>
           <a:xfrm>
-            <a:off x="5806440" y="2002536"/>
-            <a:ext cx="1600200" cy="429768"/>
+            <a:off x="5577840" y="1792224"/>
+            <a:ext cx="1828800" cy="429768"/>
           </a:xfrm>
           <a:prstGeom prst="rect">
             <a:avLst/>
@@ -6028,7 +5953,7 @@
                   <a:schemeClr val="bg1"/>
                 </a:solidFill>
               </a:rPr>
-              <a:t>部分成立</a:t>
+              <a:t>仅限 AI 用户</a:t>
             </a:r>
             <a:endParaRPr lang="en-US" sz="1500" dirty="0"/>
           </a:p>
@@ -6042,7 +5967,7 @@
         </p:nvSpPr>
         <p:spPr>
           <a:xfrm>
-            <a:off x="731520" y="2651760"/>
+            <a:off x="731520" y="2423160"/>
             <a:ext cx="6675120" cy="0"/>
           </a:xfrm>
           <a:prstGeom prst="line">
@@ -6065,8 +5990,8 @@
         </p:nvSpPr>
         <p:spPr>
           <a:xfrm>
-            <a:off x="731520" y="2651760"/>
-            <a:ext cx="4389120" cy="868680"/>
+            <a:off x="731520" y="2423160"/>
+            <a:ext cx="4754880" cy="822960"/>
           </a:xfrm>
           <a:prstGeom prst="rect">
             <a:avLst/>
@@ -6087,7 +6012,7 @@
                   <a:schemeClr val="bg1"/>
                 </a:solidFill>
               </a:rPr>
-              <a:t>② 信任不足</a:t>
+              <a:t>② 信任有限</a:t>
             </a:r>
             <a:endParaRPr lang="en-US" sz="2000" dirty="0"/>
           </a:p>
@@ -6101,8 +6026,8 @@
         </p:nvSpPr>
         <p:spPr>
           <a:xfrm>
-            <a:off x="5806440" y="2871216"/>
-            <a:ext cx="1600200" cy="429768"/>
+            <a:off x="5577840" y="2615184"/>
+            <a:ext cx="1828800" cy="429768"/>
           </a:xfrm>
           <a:prstGeom prst="roundRect">
             <a:avLst>
@@ -6128,8 +6053,8 @@
         </p:nvSpPr>
         <p:spPr>
           <a:xfrm>
-            <a:off x="5806440" y="2871216"/>
-            <a:ext cx="1600200" cy="429768"/>
+            <a:off x="5577840" y="2615184"/>
+            <a:ext cx="1828800" cy="429768"/>
           </a:xfrm>
           <a:prstGeom prst="rect">
             <a:avLst/>
@@ -6150,7 +6075,7 @@
                   <a:schemeClr val="bg1"/>
                 </a:solidFill>
               </a:rPr>
-              <a:t>部分成立</a:t>
+              <a:t>仅限 AI 用户</a:t>
             </a:r>
             <a:endParaRPr lang="en-US" sz="1500" dirty="0"/>
           </a:p>
@@ -6164,7 +6089,7 @@
         </p:nvSpPr>
         <p:spPr>
           <a:xfrm>
-            <a:off x="731520" y="3520440"/>
+            <a:off x="731520" y="3246120"/>
             <a:ext cx="6675120" cy="0"/>
           </a:xfrm>
           <a:prstGeom prst="line">
@@ -6187,8 +6112,8 @@
         </p:nvSpPr>
         <p:spPr>
           <a:xfrm>
-            <a:off x="731520" y="3520440"/>
-            <a:ext cx="4389120" cy="868680"/>
+            <a:off x="731520" y="3246120"/>
+            <a:ext cx="4754880" cy="822960"/>
           </a:xfrm>
           <a:prstGeom prst="rect">
             <a:avLst/>
@@ -6223,8 +6148,8 @@
         </p:nvSpPr>
         <p:spPr>
           <a:xfrm>
-            <a:off x="5806440" y="3739896"/>
-            <a:ext cx="1600200" cy="429768"/>
+            <a:off x="5577840" y="3438144"/>
+            <a:ext cx="1828800" cy="429768"/>
           </a:xfrm>
           <a:prstGeom prst="roundRect">
             <a:avLst>
@@ -6250,8 +6175,8 @@
         </p:nvSpPr>
         <p:spPr>
           <a:xfrm>
-            <a:off x="5806440" y="3739896"/>
-            <a:ext cx="1600200" cy="429768"/>
+            <a:off x="5577840" y="3438144"/>
+            <a:ext cx="1828800" cy="429768"/>
           </a:xfrm>
           <a:prstGeom prst="rect">
             <a:avLst/>
@@ -6272,7 +6197,7 @@
                   <a:schemeClr val="bg1"/>
                 </a:solidFill>
               </a:rPr>
-              <a:t>证据不足</a:t>
+              <a:t>只能说相关</a:t>
             </a:r>
             <a:endParaRPr lang="en-US" sz="1500" dirty="0"/>
           </a:p>
@@ -6286,7 +6211,7 @@
         </p:nvSpPr>
         <p:spPr>
           <a:xfrm>
-            <a:off x="731520" y="4389120"/>
+            <a:off x="731520" y="4069080"/>
             <a:ext cx="6675120" cy="0"/>
           </a:xfrm>
           <a:prstGeom prst="line">
@@ -6309,8 +6234,8 @@
         </p:nvSpPr>
         <p:spPr>
           <a:xfrm>
-            <a:off x="731520" y="4389120"/>
-            <a:ext cx="4389120" cy="868680"/>
+            <a:off x="731520" y="4069080"/>
+            <a:ext cx="4754880" cy="822960"/>
           </a:xfrm>
           <a:prstGeom prst="rect">
             <a:avLst/>
@@ -6345,8 +6270,8 @@
         </p:nvSpPr>
         <p:spPr>
           <a:xfrm>
-            <a:off x="5806440" y="4608576"/>
-            <a:ext cx="1600200" cy="429768"/>
+            <a:off x="5577840" y="4261104"/>
+            <a:ext cx="1828800" cy="429768"/>
           </a:xfrm>
           <a:prstGeom prst="roundRect">
             <a:avLst>
@@ -6372,8 +6297,8 @@
         </p:nvSpPr>
         <p:spPr>
           <a:xfrm>
-            <a:off x="5806440" y="4608576"/>
-            <a:ext cx="1600200" cy="429768"/>
+            <a:off x="5577840" y="4261104"/>
+            <a:ext cx="1828800" cy="429768"/>
           </a:xfrm>
           <a:prstGeom prst="rect">
             <a:avLst/>
@@ -6408,7 +6333,7 @@
         </p:nvSpPr>
         <p:spPr>
           <a:xfrm>
-            <a:off x="731520" y="5257800"/>
+            <a:off x="731520" y="4892040"/>
             <a:ext cx="6675120" cy="0"/>
           </a:xfrm>
           <a:prstGeom prst="line">
@@ -6425,14 +6350,14 @@
       </p:sp>
       <p:sp>
         <p:nvSpPr>
-          <p:cNvPr id="21" name="可取之处"/>
+          <p:cNvPr id="21" name="参考价值"/>
           <p:cNvSpPr txBox="1"/>
           <p:nvPr/>
         </p:nvSpPr>
         <p:spPr>
           <a:xfrm>
-            <a:off x="731520" y="5440680"/>
-            <a:ext cx="10698480" cy="411480"/>
+            <a:off x="731520" y="4983480"/>
+            <a:ext cx="6675120" cy="731520"/>
           </a:xfrm>
           <a:prstGeom prst="rect">
             <a:avLst/>
@@ -6453,7 +6378,7 @@
                   <a:schemeClr val="accent6"/>
                 </a:solidFill>
               </a:rPr>
-              <a:t>年轻人更多用 AI 找内容、AI 回答不够可靠，这两个方向与皮尤、Veed 等独立来源一致。</a:t>
+              <a:t>皮尤、Veed 等独立来源也指向同样两个方向：年轻人更多用 AI 找内容，AI 回答“在哪看”不够可靠。</a:t>
             </a:r>
             <a:endParaRPr lang="en-US" sz="1600" dirty="0"/>
           </a:p>
@@ -6461,18 +6386,18 @@
       </p:sp>
       <p:sp>
         <p:nvSpPr>
-          <p:cNvPr id="22" name="讨论卡"/>
+          <p:cNvPr id="22" name="改进卡"/>
           <p:cNvSpPr/>
           <p:nvPr/>
         </p:nvSpPr>
         <p:spPr>
           <a:xfrm>
-            <a:off x="7955280" y="1783080"/>
-            <a:ext cx="3520440" cy="3474720"/>
+            <a:off x="7726680" y="1600200"/>
+            <a:ext cx="3749040" cy="4114800"/>
           </a:xfrm>
           <a:prstGeom prst="roundRect">
             <a:avLst>
-              <a:gd name="adj" fmla="val 1316"/>
+              <a:gd name="adj" fmla="val 1220"/>
             </a:avLst>
           </a:prstGeom>
           <a:solidFill>
@@ -6488,14 +6413,14 @@
       </p:sp>
       <p:sp>
         <p:nvSpPr>
-          <p:cNvPr id="23" name="讨论问题"/>
+          <p:cNvPr id="23" name="改进内容"/>
           <p:cNvSpPr txBox="1"/>
           <p:nvPr/>
         </p:nvSpPr>
         <p:spPr>
           <a:xfrm>
-            <a:off x="8275320" y="1920240"/>
-            <a:ext cx="2926080" cy="3200400"/>
+            <a:off x="8001000" y="1783080"/>
+            <a:ext cx="3291840" cy="3749040"/>
           </a:xfrm>
           <a:prstGeom prst="rect">
             <a:avLst/>
@@ -6519,7 +6444,7 @@
                   <a:schemeClr val="accent3"/>
                 </a:solidFill>
               </a:rPr>
-              <a:t>讨论</a:t>
+              <a:t>改进方向</a:t>
             </a:r>
             <a:endParaRPr lang="en-US" sz="1500" dirty="0"/>
           </a:p>
@@ -6531,12 +6456,12 @@
               <a:buNone/>
             </a:pPr>
             <a:r>
-              <a:rPr lang="en-US" sz="2200" b="1" dirty="0">
+              <a:rPr lang="en-US" sz="1700" b="1" dirty="0">
                 <a:solidFill>
                   <a:schemeClr val="tx2"/>
                 </a:solidFill>
               </a:rPr>
-              <a:t>如何设计调查，</a:t>
+              <a:t>采用概率样本，含非 AI 用户</a:t>
             </a:r>
             <a:endParaRPr lang="en-US" sz="1500" dirty="0"/>
           </a:p>
@@ -6548,12 +6473,12 @@
               <a:buNone/>
             </a:pPr>
             <a:r>
-              <a:rPr lang="en-US" sz="2200" b="1" dirty="0">
+              <a:rPr lang="en-US" sz="1700" b="1" dirty="0">
                 <a:solidFill>
                   <a:schemeClr val="tx2"/>
                 </a:solidFill>
               </a:rPr>
-              <a:t>检验检索困难与</a:t>
+              <a:t>同一问卷问困难与退订，追踪同一批人</a:t>
             </a:r>
             <a:endParaRPr lang="en-US" sz="1500" dirty="0"/>
           </a:p>
@@ -6565,14 +6490,50 @@
               <a:buNone/>
             </a:pPr>
             <a:r>
-              <a:rPr lang="en-US" sz="2200" b="1" dirty="0">
+              <a:rPr lang="en-US" sz="1700" b="1" dirty="0">
                 <a:solidFill>
                   <a:schemeClr val="tx2"/>
                 </a:solidFill>
               </a:rPr>
-              <a:t>退订的因果关系？</a:t>
+              <a:t>公开招募、配额、加权、回收率</a:t>
             </a:r>
             <a:endParaRPr lang="en-US" sz="1500" dirty="0"/>
+          </a:p>
+        </p:txBody>
+      </p:sp>
+      <p:sp>
+        <p:nvSpPr>
+          <p:cNvPr id="24" name="局限"/>
+          <p:cNvSpPr txBox="1"/>
+          <p:nvPr/>
+        </p:nvSpPr>
+        <p:spPr>
+          <a:xfrm>
+            <a:off x="731520" y="5943600"/>
+            <a:ext cx="10698480" cy="365760"/>
+          </a:xfrm>
+          <a:prstGeom prst="rect">
+            <a:avLst/>
+          </a:prstGeom>
+          <a:noFill/>
+          <a:ln/>
+        </p:spPr>
+        <p:txBody>
+          <a:bodyPr wrap="square" lIns="0" tIns="0" rIns="0" bIns="0" rtlCol="0" anchor="ctr"/>
+          <a:lstStyle/>
+          <a:p>
+            <a:pPr indent="0" marL="0">
+              <a:buNone/>
+            </a:pPr>
+            <a:r>
+              <a:rPr lang="en-US" sz="1300" dirty="0">
+                <a:solidFill>
+                  <a:schemeClr val="accent6"/>
+                </a:solidFill>
+              </a:rPr>
+              <a:t>局限：评价依据公开资料；个别来源只有媒体转述，如 Fabric 的流失率。</a:t>
+            </a:r>
+            <a:endParaRPr lang="en-US" sz="1300" dirty="0"/>
           </a:p>
         </p:txBody>
       </p:sp>
@@ -6647,7 +6608,7 @@
                       </p:stCondLst>
                       <p:childTnLst>
                         <p:par>
-                          <p:cTn id="49" fill="hold">
+                          <p:cTn id="52" fill="hold">
                             <p:stCondLst>
                               <p:cond delay="0"/>
                             </p:stCondLst>
@@ -7086,7 +7047,7 @@
                                           </p:stCondLst>
                                         </p:cTn>
                                         <p:tgtEl>
-                                          <p:spTgt spid="22"/>
+                                          <p:spTgt spid="21"/>
                                         </p:tgtEl>
                                         <p:attrNameLst>
                                           <p:attrName>style.visibility</p:attrName>
@@ -7100,7 +7061,7 @@
                                       <p:cBhvr>
                                         <p:cTn id="42" dur="500"/>
                                         <p:tgtEl>
-                                          <p:spTgt spid="22"/>
+                                          <p:spTgt spid="21"/>
                                         </p:tgtEl>
                                       </p:cBhvr>
                                     </p:animEffect>
@@ -7110,7 +7071,7 @@
                               <p:par>
                                 <p:cTn id="43" presetID="10" presetClass="entr" presetSubtype="0" fill="hold" grpId="0" nodeType="withEffect">
                                   <p:stCondLst>
-                                    <p:cond delay="1600"/>
+                                    <p:cond delay="1950"/>
                                   </p:stCondLst>
                                   <p:childTnLst>
                                     <p:set>
@@ -7121,7 +7082,7 @@
                                           </p:stCondLst>
                                         </p:cTn>
                                         <p:tgtEl>
-                                          <p:spTgt spid="23"/>
+                                          <p:spTgt spid="22"/>
                                         </p:tgtEl>
                                         <p:attrNameLst>
                                           <p:attrName>style.visibility</p:attrName>
@@ -7135,7 +7096,7 @@
                                       <p:cBhvr>
                                         <p:cTn id="45" dur="500"/>
                                         <p:tgtEl>
-                                          <p:spTgt spid="23"/>
+                                          <p:spTgt spid="22"/>
                                         </p:tgtEl>
                                       </p:cBhvr>
                                     </p:animEffect>
@@ -7156,7 +7117,7 @@
                                           </p:stCondLst>
                                         </p:cTn>
                                         <p:tgtEl>
-                                          <p:spTgt spid="21"/>
+                                          <p:spTgt spid="23"/>
                                         </p:tgtEl>
                                         <p:attrNameLst>
                                           <p:attrName>style.visibility</p:attrName>
@@ -7170,7 +7131,42 @@
                                       <p:cBhvr>
                                         <p:cTn id="48" dur="500"/>
                                         <p:tgtEl>
-                                          <p:spTgt spid="21"/>
+                                          <p:spTgt spid="23"/>
+                                        </p:tgtEl>
+                                      </p:cBhvr>
+                                    </p:animEffect>
+                                  </p:childTnLst>
+                                </p:cTn>
+                              </p:par>
+                              <p:par>
+                                <p:cTn id="49" presetID="10" presetClass="entr" presetSubtype="0" fill="hold" grpId="0" nodeType="withEffect">
+                                  <p:stCondLst>
+                                    <p:cond delay="2300"/>
+                                  </p:stCondLst>
+                                  <p:childTnLst>
+                                    <p:set>
+                                      <p:cBhvr>
+                                        <p:cTn id="50" dur="1" fill="hold">
+                                          <p:stCondLst>
+                                            <p:cond delay="0"/>
+                                          </p:stCondLst>
+                                        </p:cTn>
+                                        <p:tgtEl>
+                                          <p:spTgt spid="24"/>
+                                        </p:tgtEl>
+                                        <p:attrNameLst>
+                                          <p:attrName>style.visibility</p:attrName>
+                                        </p:attrNameLst>
+                                      </p:cBhvr>
+                                      <p:to>
+                                        <p:strVal val="visible"/>
+                                      </p:to>
+                                    </p:set>
+                                    <p:animEffect transition="in" filter="fade">
+                                      <p:cBhvr>
+                                        <p:cTn id="51" dur="500"/>
+                                        <p:tgtEl>
+                                          <p:spTgt spid="24"/>
                                         </p:tgtEl>
                                       </p:cBhvr>
                                     </p:animEffect>
@@ -7217,9 +7213,10 @@
       <p:bldP spid="17" grpId="0" animBg="1"/>
       <p:bldP spid="18" grpId="0" animBg="1"/>
       <p:bldP spid="19" grpId="0" animBg="1"/>
+      <p:bldP spid="21" grpId="0" animBg="1"/>
       <p:bldP spid="22" grpId="0" animBg="1"/>
       <p:bldP spid="23" grpId="0" animBg="1"/>
-      <p:bldP spid="21" grpId="0" animBg="1"/>
+      <p:bldP spid="24" grpId="0" animBg="1"/>
     </p:bldLst>
   </p:timing>
 </p:sld>
@@ -7272,7 +7269,7 @@
                   <a:schemeClr val="accent3"/>
                 </a:solidFill>
               </a:rPr>
-              <a:t>汇报框架</a:t>
+              <a:t>选题</a:t>
             </a:r>
             <a:endParaRPr lang="en-US" sz="1400" dirty="0"/>
           </a:p>
@@ -7310,7 +7307,7 @@
                   <a:schemeClr val="tx2"/>
                 </a:solidFill>
               </a:rPr>
-              <a:t>报告结论的适用范围小于其表述</a:t>
+              <a:t>选取对象：Gracenote 2026 年 4 月的报告</a:t>
             </a:r>
             <a:endParaRPr lang="en-US" sz="3000" dirty="0"/>
           </a:p>
@@ -7325,7 +7322,7 @@
         <p:spPr>
           <a:xfrm>
             <a:off x="548640" y="1645920"/>
-            <a:ext cx="5486400" cy="0"/>
+            <a:ext cx="6583680" cy="0"/>
           </a:xfrm>
           <a:prstGeom prst="line">
             <a:avLst/>
@@ -7341,14 +7338,14 @@
       </p:sp>
       <p:sp>
         <p:nvSpPr>
-          <p:cNvPr id="5" name="序号1"/>
+          <p:cNvPr id="5" name="选题标签1"/>
           <p:cNvSpPr txBox="1"/>
           <p:nvPr/>
         </p:nvSpPr>
         <p:spPr>
           <a:xfrm>
             <a:off x="548640" y="1645920"/>
-            <a:ext cx="822960" cy="822960"/>
+            <a:ext cx="914400" cy="1024128"/>
           </a:xfrm>
           <a:prstGeom prst="rect">
             <a:avLst/>
@@ -7364,30 +7361,27 @@
               <a:buNone/>
             </a:pPr>
             <a:r>
-              <a:rPr lang="en-US" sz="2000" b="1" dirty="0">
-                <a:solidFill>
-                  <a:schemeClr val="accent5"/>
-                </a:solidFill>
-                <a:latin typeface="Arial" pitchFamily="34" charset="0"/>
-                <a:ea typeface="Arial" pitchFamily="34" charset="-122"/>
-                <a:cs typeface="Arial" pitchFamily="34" charset="-120"/>
-              </a:rPr>
-              <a:t>01</a:t>
-            </a:r>
-            <a:endParaRPr lang="en-US" sz="2000" dirty="0"/>
-          </a:p>
-        </p:txBody>
-      </p:sp>
-      <p:sp>
-        <p:nvSpPr>
-          <p:cNvPr id="6" name="框架名1"/>
+              <a:rPr lang="en-US" sz="1500" b="1" dirty="0">
+                <a:solidFill>
+                  <a:schemeClr val="accent3"/>
+                </a:solidFill>
+              </a:rPr>
+              <a:t>报告</a:t>
+            </a:r>
+            <a:endParaRPr lang="en-US" sz="1500" dirty="0"/>
+          </a:p>
+        </p:txBody>
+      </p:sp>
+      <p:sp>
+        <p:nvSpPr>
+          <p:cNvPr id="6" name="选题内容1"/>
           <p:cNvSpPr txBox="1"/>
           <p:nvPr/>
         </p:nvSpPr>
         <p:spPr>
           <a:xfrm>
-            <a:off x="1371600" y="1645920"/>
-            <a:ext cx="4572000" cy="822960"/>
+            <a:off x="1554480" y="1645920"/>
+            <a:ext cx="5577840" cy="1024128"/>
           </a:xfrm>
           <a:prstGeom prst="rect">
             <a:avLst/>
@@ -7403,14 +7397,28 @@
               <a:buNone/>
             </a:pPr>
             <a:r>
-              <a:rPr lang="en-US" sz="2000" dirty="0">
+              <a:rPr lang="en-US" sz="2200" b="1" dirty="0">
                 <a:solidFill>
                   <a:schemeClr val="tx2"/>
                 </a:solidFill>
               </a:rPr>
-              <a:t>研究背景与问题</a:t>
-            </a:r>
-            <a:endParaRPr lang="en-US" sz="2000" dirty="0"/>
+              <a:t>AI 时代的电视搜索与内容发现</a:t>
+            </a:r>
+            <a:endParaRPr lang="en-US" sz="2200" dirty="0"/>
+          </a:p>
+          <a:p>
+            <a:pPr indent="0" marL="0">
+              <a:buNone/>
+            </a:pPr>
+            <a:r>
+              <a:rPr lang="en-US" sz="1300" dirty="0">
+                <a:solidFill>
+                  <a:schemeClr val="accent5"/>
+                </a:solidFill>
+              </a:rPr>
+              <a:t>TV Search and Discovery in the AI Era，2026 年 4 月</a:t>
+            </a:r>
+            <a:endParaRPr lang="en-US" sz="2200" dirty="0"/>
           </a:p>
         </p:txBody>
       </p:sp>
@@ -7422,8 +7430,8 @@
         </p:nvSpPr>
         <p:spPr>
           <a:xfrm>
-            <a:off x="548640" y="2468880"/>
-            <a:ext cx="5486400" cy="0"/>
+            <a:off x="548640" y="2670048"/>
+            <a:ext cx="6583680" cy="0"/>
           </a:xfrm>
           <a:prstGeom prst="line">
             <a:avLst/>
@@ -7439,14 +7447,14 @@
       </p:sp>
       <p:sp>
         <p:nvSpPr>
-          <p:cNvPr id="8" name="序号2"/>
+          <p:cNvPr id="8" name="选题标签2"/>
           <p:cNvSpPr txBox="1"/>
           <p:nvPr/>
         </p:nvSpPr>
         <p:spPr>
           <a:xfrm>
-            <a:off x="548640" y="2468880"/>
-            <a:ext cx="822960" cy="822960"/>
+            <a:off x="548640" y="2670048"/>
+            <a:ext cx="914400" cy="1024128"/>
           </a:xfrm>
           <a:prstGeom prst="rect">
             <a:avLst/>
@@ -7462,30 +7470,27 @@
               <a:buNone/>
             </a:pPr>
             <a:r>
-              <a:rPr lang="en-US" sz="2000" b="1" dirty="0">
-                <a:solidFill>
-                  <a:schemeClr val="accent5"/>
-                </a:solidFill>
-                <a:latin typeface="Arial" pitchFamily="34" charset="0"/>
-                <a:ea typeface="Arial" pitchFamily="34" charset="-122"/>
-                <a:cs typeface="Arial" pitchFamily="34" charset="-120"/>
-              </a:rPr>
-              <a:t>02</a:t>
-            </a:r>
-            <a:endParaRPr lang="en-US" sz="2000" dirty="0"/>
-          </a:p>
-        </p:txBody>
-      </p:sp>
-      <p:sp>
-        <p:nvSpPr>
-          <p:cNvPr id="9" name="框架名2"/>
+              <a:rPr lang="en-US" sz="1500" b="1" dirty="0">
+                <a:solidFill>
+                  <a:schemeClr val="accent3"/>
+                </a:solidFill>
+              </a:rPr>
+              <a:t>机构</a:t>
+            </a:r>
+            <a:endParaRPr lang="en-US" sz="1500" dirty="0"/>
+          </a:p>
+        </p:txBody>
+      </p:sp>
+      <p:sp>
+        <p:nvSpPr>
+          <p:cNvPr id="9" name="选题内容2"/>
           <p:cNvSpPr txBox="1"/>
           <p:nvPr/>
         </p:nvSpPr>
         <p:spPr>
           <a:xfrm>
-            <a:off x="1371600" y="2468880"/>
-            <a:ext cx="4572000" cy="822960"/>
+            <a:off x="1554480" y="2670048"/>
+            <a:ext cx="5577840" cy="1024128"/>
           </a:xfrm>
           <a:prstGeom prst="rect">
             <a:avLst/>
@@ -7503,10 +7508,10 @@
             <a:r>
               <a:rPr lang="en-US" sz="2000" dirty="0">
                 <a:solidFill>
-                  <a:schemeClr val="tx2"/>
-                </a:solidFill>
-              </a:rPr>
-              <a:t>研究方法</a:t>
+                  <a:schemeClr val="tx1"/>
+                </a:solidFill>
+              </a:rPr>
+              <a:t>Gracenote，尼尔森旗下公司</a:t>
             </a:r>
             <a:endParaRPr lang="en-US" sz="2000" dirty="0"/>
           </a:p>
@@ -7520,8 +7525,8 @@
         </p:nvSpPr>
         <p:spPr>
           <a:xfrm>
-            <a:off x="548640" y="3291840"/>
-            <a:ext cx="5486400" cy="0"/>
+            <a:off x="548640" y="3694176"/>
+            <a:ext cx="6583680" cy="0"/>
           </a:xfrm>
           <a:prstGeom prst="line">
             <a:avLst/>
@@ -7537,14 +7542,14 @@
       </p:sp>
       <p:sp>
         <p:nvSpPr>
-          <p:cNvPr id="11" name="序号3"/>
+          <p:cNvPr id="11" name="选题标签3"/>
           <p:cNvSpPr txBox="1"/>
           <p:nvPr/>
         </p:nvSpPr>
         <p:spPr>
           <a:xfrm>
-            <a:off x="548640" y="3291840"/>
-            <a:ext cx="822960" cy="822960"/>
+            <a:off x="548640" y="3694176"/>
+            <a:ext cx="914400" cy="1024128"/>
           </a:xfrm>
           <a:prstGeom prst="rect">
             <a:avLst/>
@@ -7560,30 +7565,27 @@
               <a:buNone/>
             </a:pPr>
             <a:r>
-              <a:rPr lang="en-US" sz="2000" b="1" dirty="0">
-                <a:solidFill>
-                  <a:schemeClr val="accent5"/>
-                </a:solidFill>
-                <a:latin typeface="Arial" pitchFamily="34" charset="0"/>
-                <a:ea typeface="Arial" pitchFamily="34" charset="-122"/>
-                <a:cs typeface="Arial" pitchFamily="34" charset="-120"/>
-              </a:rPr>
-              <a:t>03</a:t>
-            </a:r>
-            <a:endParaRPr lang="en-US" sz="2000" dirty="0"/>
-          </a:p>
-        </p:txBody>
-      </p:sp>
-      <p:sp>
-        <p:nvSpPr>
-          <p:cNvPr id="12" name="框架名3"/>
+              <a:rPr lang="en-US" sz="1500" b="1" dirty="0">
+                <a:solidFill>
+                  <a:schemeClr val="accent3"/>
+                </a:solidFill>
+              </a:rPr>
+              <a:t>业务</a:t>
+            </a:r>
+            <a:endParaRPr lang="en-US" sz="1500" dirty="0"/>
+          </a:p>
+        </p:txBody>
+      </p:sp>
+      <p:sp>
+        <p:nvSpPr>
+          <p:cNvPr id="12" name="选题内容3"/>
           <p:cNvSpPr txBox="1"/>
           <p:nvPr/>
         </p:nvSpPr>
         <p:spPr>
           <a:xfrm>
-            <a:off x="1371600" y="3291840"/>
-            <a:ext cx="4572000" cy="822960"/>
+            <a:off x="1554480" y="3694176"/>
+            <a:ext cx="5577840" cy="1024128"/>
           </a:xfrm>
           <a:prstGeom prst="rect">
             <a:avLst/>
@@ -7601,10 +7603,24 @@
             <a:r>
               <a:rPr lang="en-US" sz="2000" dirty="0">
                 <a:solidFill>
-                  <a:schemeClr val="tx2"/>
-                </a:solidFill>
-              </a:rPr>
-              <a:t>研究结论</a:t>
+                  <a:schemeClr val="tx1"/>
+                </a:solidFill>
+              </a:rPr>
+              <a:t>电视与流媒体的节目数据</a:t>
+            </a:r>
+            <a:endParaRPr lang="en-US" sz="2000" dirty="0"/>
+          </a:p>
+          <a:p>
+            <a:pPr indent="0" marL="0">
+              <a:buNone/>
+            </a:pPr>
+            <a:r>
+              <a:rPr lang="en-US" sz="1400" dirty="0">
+                <a:solidFill>
+                  <a:schemeClr val="accent5"/>
+                </a:solidFill>
+              </a:rPr>
+              <a:t>名称、简介、播出平台、节目表</a:t>
             </a:r>
             <a:endParaRPr lang="en-US" sz="2000" dirty="0"/>
           </a:p>
@@ -7618,8 +7634,8 @@
         </p:nvSpPr>
         <p:spPr>
           <a:xfrm>
-            <a:off x="548640" y="4114800"/>
-            <a:ext cx="5486400" cy="0"/>
+            <a:off x="548640" y="4718304"/>
+            <a:ext cx="6583680" cy="0"/>
           </a:xfrm>
           <a:prstGeom prst="line">
             <a:avLst/>
@@ -7635,14 +7651,14 @@
       </p:sp>
       <p:sp>
         <p:nvSpPr>
-          <p:cNvPr id="14" name="序号4"/>
+          <p:cNvPr id="14" name="选题标签4"/>
           <p:cNvSpPr txBox="1"/>
           <p:nvPr/>
         </p:nvSpPr>
         <p:spPr>
           <a:xfrm>
-            <a:off x="548640" y="4114800"/>
-            <a:ext cx="822960" cy="822960"/>
+            <a:off x="548640" y="4718304"/>
+            <a:ext cx="914400" cy="1024128"/>
           </a:xfrm>
           <a:prstGeom prst="rect">
             <a:avLst/>
@@ -7658,30 +7674,27 @@
               <a:buNone/>
             </a:pPr>
             <a:r>
-              <a:rPr lang="en-US" sz="2000" b="1" dirty="0">
+              <a:rPr lang="en-US" sz="1500" b="1" dirty="0">
                 <a:solidFill>
                   <a:schemeClr val="accent3"/>
                 </a:solidFill>
-                <a:latin typeface="Arial" pitchFamily="34" charset="0"/>
-                <a:ea typeface="Arial" pitchFamily="34" charset="-122"/>
-                <a:cs typeface="Arial" pitchFamily="34" charset="-120"/>
-              </a:rPr>
-              <a:t>04</a:t>
-            </a:r>
-            <a:endParaRPr lang="en-US" sz="2000" dirty="0"/>
-          </a:p>
-        </p:txBody>
-      </p:sp>
-      <p:sp>
-        <p:nvSpPr>
-          <p:cNvPr id="15" name="框架名4"/>
+              </a:rPr>
+              <a:t>关联</a:t>
+            </a:r>
+            <a:endParaRPr lang="en-US" sz="1500" dirty="0"/>
+          </a:p>
+        </p:txBody>
+      </p:sp>
+      <p:sp>
+        <p:nvSpPr>
+          <p:cNvPr id="15" name="选题内容4"/>
           <p:cNvSpPr txBox="1"/>
           <p:nvPr/>
         </p:nvSpPr>
         <p:spPr>
           <a:xfrm>
-            <a:off x="1371600" y="4114800"/>
-            <a:ext cx="4572000" cy="822960"/>
+            <a:off x="1554480" y="4718304"/>
+            <a:ext cx="5577840" cy="1024128"/>
           </a:xfrm>
           <a:prstGeom prst="rect">
             <a:avLst/>
@@ -7697,12 +7710,12 @@
               <a:buNone/>
             </a:pPr>
             <a:r>
-              <a:rPr lang="en-US" sz="2000" b="1" dirty="0">
-                <a:solidFill>
-                  <a:schemeClr val="tx2"/>
-                </a:solidFill>
-              </a:rPr>
-              <a:t>思考与评价</a:t>
+              <a:rPr lang="en-US" sz="2000" dirty="0">
+                <a:solidFill>
+                  <a:schemeClr val="tx1"/>
+                </a:solidFill>
+              </a:rPr>
+              <a:t>视频软件里的节目指南，背后常常就是这类数据</a:t>
             </a:r>
             <a:endParaRPr lang="en-US" sz="2000" dirty="0"/>
           </a:p>
@@ -7716,8 +7729,8 @@
         </p:nvSpPr>
         <p:spPr>
           <a:xfrm>
-            <a:off x="548640" y="4937760"/>
-            <a:ext cx="5486400" cy="0"/>
+            <a:off x="548640" y="5742432"/>
+            <a:ext cx="6583680" cy="0"/>
           </a:xfrm>
           <a:prstGeom prst="line">
             <a:avLst/>
@@ -7733,139 +7746,70 @@
       </p:sp>
       <p:sp>
         <p:nvSpPr>
-          <p:cNvPr id="17" name="序号5"/>
-          <p:cNvSpPr txBox="1"/>
-          <p:nvPr/>
-        </p:nvSpPr>
-        <p:spPr>
-          <a:xfrm>
-            <a:off x="548640" y="4937760"/>
-            <a:ext cx="822960" cy="822960"/>
+          <p:cNvPr id="17" name="报告封面阴影"/>
+          <p:cNvSpPr/>
+          <p:nvPr/>
+        </p:nvSpPr>
+        <p:spPr>
+          <a:xfrm>
+            <a:off x="7635240" y="2240280"/>
+            <a:ext cx="3977640" cy="2414016"/>
           </a:xfrm>
           <a:prstGeom prst="rect">
             <a:avLst/>
           </a:prstGeom>
-          <a:noFill/>
-          <a:ln/>
-        </p:spPr>
-        <p:txBody>
-          <a:bodyPr wrap="square" lIns="0" tIns="0" rIns="0" bIns="0" rtlCol="0" anchor="ctr"/>
-          <a:lstStyle/>
-          <a:p>
-            <a:pPr indent="0" marL="0">
-              <a:buNone/>
-            </a:pPr>
-            <a:r>
-              <a:rPr lang="en-US" sz="2000" b="1" dirty="0">
-                <a:solidFill>
-                  <a:schemeClr val="accent5"/>
-                </a:solidFill>
-                <a:latin typeface="Arial" pitchFamily="34" charset="0"/>
-                <a:ea typeface="Arial" pitchFamily="34" charset="-122"/>
-                <a:cs typeface="Arial" pitchFamily="34" charset="-120"/>
-              </a:rPr>
-              <a:t>05</a:t>
-            </a:r>
-            <a:endParaRPr lang="en-US" sz="2000" dirty="0"/>
-          </a:p>
-        </p:txBody>
-      </p:sp>
-      <p:sp>
-        <p:nvSpPr>
-          <p:cNvPr id="18" name="框架名5"/>
-          <p:cNvSpPr txBox="1"/>
-          <p:nvPr/>
-        </p:nvSpPr>
-        <p:spPr>
-          <a:xfrm>
-            <a:off x="1371600" y="4937760"/>
-            <a:ext cx="4572000" cy="822960"/>
-          </a:xfrm>
-          <a:prstGeom prst="rect">
-            <a:avLst/>
-          </a:prstGeom>
-          <a:noFill/>
-          <a:ln/>
-        </p:spPr>
-        <p:txBody>
-          <a:bodyPr wrap="square" lIns="0" tIns="0" rIns="0" bIns="0" rtlCol="0" anchor="ctr"/>
-          <a:lstStyle/>
-          <a:p>
-            <a:pPr indent="0" marL="0">
-              <a:buNone/>
-            </a:pPr>
-            <a:r>
-              <a:rPr lang="en-US" sz="2000" dirty="0">
-                <a:solidFill>
-                  <a:schemeClr val="tx2"/>
-                </a:solidFill>
-              </a:rPr>
-              <a:t>总体判断</a:t>
-            </a:r>
-            <a:endParaRPr lang="en-US" sz="2000" dirty="0"/>
-          </a:p>
-        </p:txBody>
-      </p:sp>
-      <p:sp>
-        <p:nvSpPr>
-          <p:cNvPr id="19" name="分隔线"/>
-          <p:cNvSpPr/>
-          <p:nvPr/>
-        </p:nvSpPr>
-        <p:spPr>
-          <a:xfrm>
-            <a:off x="548640" y="5760720"/>
-            <a:ext cx="5486400" cy="0"/>
-          </a:xfrm>
-          <a:prstGeom prst="line">
-            <a:avLst/>
-          </a:prstGeom>
-          <a:noFill/>
-          <a:ln w="9525">
+          <a:solidFill>
+            <a:srgbClr val="FFFFFF"/>
+          </a:solidFill>
+          <a:ln w="6350">
             <a:solidFill>
-              <a:srgbClr val="D5DAE1"/>
+              <a:srgbClr val="E3E7EC"/>
             </a:solidFill>
             <a:prstDash val="solid"/>
           </a:ln>
-        </p:spPr>
-      </p:sp>
-      <p:sp>
-        <p:nvSpPr>
-          <p:cNvPr id="20" name="结论卡"/>
-          <p:cNvSpPr/>
-          <p:nvPr/>
-        </p:nvSpPr>
-        <p:spPr>
-          <a:xfrm>
-            <a:off x="6583680" y="1645920"/>
-            <a:ext cx="5029200" cy="4114800"/>
-          </a:xfrm>
-          <a:prstGeom prst="roundRect">
-            <a:avLst>
-              <a:gd name="adj" fmla="val 1111"/>
-            </a:avLst>
-          </a:prstGeom>
-          <a:solidFill>
-            <a:schemeClr val="tx2"/>
-          </a:solidFill>
-          <a:ln w="12700">
-            <a:solidFill>
-              <a:schemeClr val="tx2"/>
-            </a:solidFill>
-            <a:prstDash val="solid"/>
-          </a:ln>
-        </p:spPr>
-      </p:sp>
-      <p:sp>
-        <p:nvSpPr>
-          <p:cNvPr id="21" name="结论"/>
+          <a:effectLst>
+            <a:outerShdw sx="100000" sy="100000" kx="0" ky="0" algn="bl" rotWithShape="0" blurRad="177800" dist="50800" dir="5400000">
+              <a:srgbClr val="1F2A44">
+                <a:alpha val="18000"/>
+              </a:srgbClr>
+            </a:outerShdw>
+          </a:effectLst>
+        </p:spPr>
+      </p:sp>
+      <p:pic>
+        <p:nvPicPr>
+          <p:cNvPr id="18" name="报告封面" descr="/home/user/ppt/build/assets/report_cover.jpg">    </p:cNvPr>
+          <p:cNvPicPr>
+            <a:picLocks noChangeAspect="1"/>
+          </p:cNvPicPr>
+          <p:nvPr/>
+        </p:nvPicPr>
+        <p:blipFill>
+          <a:blip r:embed="rId1"/>
+          <a:stretch>
+            <a:fillRect/>
+          </a:stretch>
+        </p:blipFill>
+        <p:spPr>
+          <a:xfrm>
+            <a:off x="7635240" y="2240280"/>
+            <a:ext cx="3977640" cy="2414016"/>
+          </a:xfrm>
+          <a:prstGeom prst="rect">
+            <a:avLst/>
+          </a:prstGeom>
+        </p:spPr>
+      </p:pic>
+      <p:sp>
+        <p:nvSpPr>
+          <p:cNvPr id="19" name="封面图注"/>
           <p:cNvSpPr txBox="1"/>
           <p:nvPr/>
         </p:nvSpPr>
         <p:spPr>
           <a:xfrm>
-            <a:off x="6949440" y="1828800"/>
-            <a:ext cx="4297680" cy="3749040"/>
+            <a:off x="7635240" y="4800600"/>
+            <a:ext cx="3977640" cy="320040"/>
           </a:xfrm>
           <a:prstGeom prst="rect">
             <a:avLst/>
@@ -7878,37 +7822,17 @@
           <a:lstStyle/>
           <a:p>
             <a:pPr indent="0" marL="0">
-              <a:spcAft>
-                <a:spcPts val="1600"/>
-              </a:spcAft>
-              <a:buNone/>
-            </a:pPr>
-            <a:r>
-              <a:rPr lang="en-US" sz="1500" b="1" dirty="0">
-                <a:solidFill>
-                  <a:schemeClr val="accent4"/>
-                </a:solidFill>
-              </a:rPr>
-              <a:t>结论</a:t>
-            </a:r>
-            <a:endParaRPr lang="en-US" sz="1500" dirty="0"/>
-          </a:p>
-          <a:p>
-            <a:pPr indent="0" marL="0">
-              <a:spcAft>
-                <a:spcPts val="1600"/>
-              </a:spcAft>
-              <a:buNone/>
-            </a:pPr>
-            <a:r>
-              <a:rPr lang="en-US" sz="2200" b="1" dirty="0">
-                <a:solidFill>
-                  <a:schemeClr val="bg1"/>
-                </a:solidFill>
-              </a:rPr>
-              <a:t>报告反映了 AI 用户的变化，具有参考价值；但样本仅限 AI 用户，结论不宜推及美国整体人群。</a:t>
-            </a:r>
-            <a:endParaRPr lang="en-US" sz="1500" dirty="0"/>
+              <a:buNone/>
+            </a:pPr>
+            <a:r>
+              <a:rPr lang="en-US" sz="1300" dirty="0">
+                <a:solidFill>
+                  <a:schemeClr val="accent5"/>
+                </a:solidFill>
+              </a:rPr>
+              <a:t>报告封面</a:t>
+            </a:r>
+            <a:endParaRPr lang="en-US" sz="1300" dirty="0"/>
           </a:p>
         </p:txBody>
       </p:sp>
@@ -7983,7 +7907,7 @@
                       </p:stCondLst>
                       <p:childTnLst>
                         <p:par>
-                          <p:cTn id="40" fill="hold">
+                          <p:cTn id="37" fill="hold">
                             <p:stCondLst>
                               <p:cond delay="0"/>
                             </p:stCondLst>
@@ -8341,7 +8265,7 @@
                               <p:par>
                                 <p:cTn id="34" presetID="10" presetClass="entr" presetSubtype="0" fill="hold" grpId="0" nodeType="withEffect">
                                   <p:stCondLst>
-                                    <p:cond delay="1950"/>
+                                    <p:cond delay="1600"/>
                                   </p:stCondLst>
                                   <p:childTnLst>
                                     <p:set>
@@ -8352,7 +8276,7 @@
                                           </p:stCondLst>
                                         </p:cTn>
                                         <p:tgtEl>
-                                          <p:spTgt spid="20"/>
+                                          <p:spTgt spid="19"/>
                                         </p:tgtEl>
                                         <p:attrNameLst>
                                           <p:attrName>style.visibility</p:attrName>
@@ -8366,42 +8290,7 @@
                                       <p:cBhvr>
                                         <p:cTn id="36" dur="500"/>
                                         <p:tgtEl>
-                                          <p:spTgt spid="20"/>
-                                        </p:tgtEl>
-                                      </p:cBhvr>
-                                    </p:animEffect>
-                                  </p:childTnLst>
-                                </p:cTn>
-                              </p:par>
-                              <p:par>
-                                <p:cTn id="37" presetID="10" presetClass="entr" presetSubtype="0" fill="hold" grpId="0" nodeType="withEffect">
-                                  <p:stCondLst>
-                                    <p:cond delay="1950"/>
-                                  </p:stCondLst>
-                                  <p:childTnLst>
-                                    <p:set>
-                                      <p:cBhvr>
-                                        <p:cTn id="38" dur="1" fill="hold">
-                                          <p:stCondLst>
-                                            <p:cond delay="0"/>
-                                          </p:stCondLst>
-                                        </p:cTn>
-                                        <p:tgtEl>
-                                          <p:spTgt spid="21"/>
-                                        </p:tgtEl>
-                                        <p:attrNameLst>
-                                          <p:attrName>style.visibility</p:attrName>
-                                        </p:attrNameLst>
-                                      </p:cBhvr>
-                                      <p:to>
-                                        <p:strVal val="visible"/>
-                                      </p:to>
-                                    </p:set>
-                                    <p:animEffect transition="in" filter="fade">
-                                      <p:cBhvr>
-                                        <p:cTn id="39" dur="500"/>
-                                        <p:tgtEl>
-                                          <p:spTgt spid="21"/>
+                                          <p:spTgt spid="19"/>
                                         </p:tgtEl>
                                       </p:cBhvr>
                                     </p:animEffect>
@@ -8445,9 +8334,7 @@
       <p:bldP spid="14" grpId="0" animBg="1"/>
       <p:bldP spid="15" grpId="0" animBg="1"/>
       <p:bldP spid="17" grpId="0" animBg="1"/>
-      <p:bldP spid="18" grpId="0" animBg="1"/>
-      <p:bldP spid="20" grpId="0" animBg="1"/>
-      <p:bldP spid="21" grpId="0" animBg="1"/>
+      <p:bldP spid="19" grpId="0" animBg="1"/>
     </p:bldLst>
   </p:timing>
 </p:sld>
@@ -8538,7 +8425,7 @@
                   <a:schemeClr val="tx2"/>
                 </a:solidFill>
               </a:rPr>
-              <a:t>研究问题：AI 如何改变节目检索</a:t>
+              <a:t>研究背景：节目分散，找节目更费劲</a:t>
             </a:r>
             <a:endParaRPr lang="en-US" sz="3000" dirty="0"/>
           </a:p>
@@ -8552,8 +8439,8 @@
         </p:nvSpPr>
         <p:spPr>
           <a:xfrm>
-            <a:off x="548640" y="1554480"/>
-            <a:ext cx="6583680" cy="731520"/>
+            <a:off x="548640" y="1508760"/>
+            <a:ext cx="11064240" cy="457200"/>
           </a:xfrm>
           <a:prstGeom prst="rect">
             <a:avLst/>
@@ -8574,7 +8461,7 @@
                   <a:schemeClr val="tx1"/>
                 </a:solidFill>
               </a:rPr>
-              <a:t>背景：流媒体平台增多，节目分散，检索成本上升；AI 聊天机器人成为新的检索工具。</a:t>
+              <a:t>流媒体平台增多，节目分散；AI 聊天机器人成为新的找节目方式。</a:t>
             </a:r>
             <a:endParaRPr lang="en-US" sz="1800" dirty="0"/>
           </a:p>
@@ -8582,14 +8469,356 @@
       </p:sp>
       <p:sp>
         <p:nvSpPr>
-          <p:cNvPr id="5" name="分隔线"/>
+          <p:cNvPr id="5" name="背景卡1"/>
           <p:cNvSpPr/>
           <p:nvPr/>
         </p:nvSpPr>
         <p:spPr>
           <a:xfrm>
-            <a:off x="548640" y="2514600"/>
-            <a:ext cx="6583680" cy="0"/>
+            <a:off x="548640" y="2103120"/>
+            <a:ext cx="3566160" cy="1097280"/>
+          </a:xfrm>
+          <a:prstGeom prst="roundRect">
+            <a:avLst>
+              <a:gd name="adj" fmla="val 4167"/>
+            </a:avLst>
+          </a:prstGeom>
+          <a:solidFill>
+            <a:schemeClr val="bg2"/>
+          </a:solidFill>
+          <a:ln w="12700">
+            <a:solidFill>
+              <a:schemeClr val="bg2"/>
+            </a:solidFill>
+            <a:prstDash val="solid"/>
+          </a:ln>
+        </p:spPr>
+      </p:sp>
+      <p:sp>
+        <p:nvSpPr>
+          <p:cNvPr id="6" name="背景数字1"/>
+          <p:cNvSpPr txBox="1"/>
+          <p:nvPr/>
+        </p:nvSpPr>
+        <p:spPr>
+          <a:xfrm>
+            <a:off x="822960" y="2103120"/>
+            <a:ext cx="2103120" cy="1097280"/>
+          </a:xfrm>
+          <a:prstGeom prst="rect">
+            <a:avLst/>
+          </a:prstGeom>
+          <a:noFill/>
+          <a:ln/>
+        </p:spPr>
+        <p:txBody>
+          <a:bodyPr wrap="square" lIns="0" tIns="0" rIns="0" bIns="0" rtlCol="0" anchor="ctr"/>
+          <a:lstStyle/>
+          <a:p>
+            <a:pPr indent="0" marL="0">
+              <a:buNone/>
+            </a:pPr>
+            <a:r>
+              <a:rPr lang="en-US" sz="2400" b="1" dirty="0">
+                <a:solidFill>
+                  <a:schemeClr val="accent1"/>
+                </a:solidFill>
+                <a:latin typeface="Arial" pitchFamily="34" charset="0"/>
+                <a:ea typeface="Arial" pitchFamily="34" charset="-122"/>
+                <a:cs typeface="Arial" pitchFamily="34" charset="-120"/>
+              </a:rPr>
+              <a:t>近 350 个</a:t>
+            </a:r>
+            <a:endParaRPr lang="en-US" sz="2400" dirty="0"/>
+          </a:p>
+        </p:txBody>
+      </p:sp>
+      <p:sp>
+        <p:nvSpPr>
+          <p:cNvPr id="7" name="背景说明1"/>
+          <p:cNvSpPr txBox="1"/>
+          <p:nvPr/>
+        </p:nvSpPr>
+        <p:spPr>
+          <a:xfrm>
+            <a:off x="2926080" y="2103120"/>
+            <a:ext cx="1097280" cy="1097280"/>
+          </a:xfrm>
+          <a:prstGeom prst="rect">
+            <a:avLst/>
+          </a:prstGeom>
+          <a:noFill/>
+          <a:ln/>
+        </p:spPr>
+        <p:txBody>
+          <a:bodyPr wrap="square" lIns="0" tIns="0" rIns="0" bIns="0" rtlCol="0" anchor="ctr"/>
+          <a:lstStyle/>
+          <a:p>
+            <a:pPr indent="0" marL="0">
+              <a:buNone/>
+            </a:pPr>
+            <a:r>
+              <a:rPr lang="en-US" sz="1500" dirty="0">
+                <a:solidFill>
+                  <a:schemeClr val="tx1"/>
+                </a:solidFill>
+              </a:rPr>
+              <a:t>点播片库</a:t>
+            </a:r>
+            <a:endParaRPr lang="en-US" sz="1500" dirty="0"/>
+          </a:p>
+        </p:txBody>
+      </p:sp>
+      <p:sp>
+        <p:nvSpPr>
+          <p:cNvPr id="8" name="背景卡2"/>
+          <p:cNvSpPr/>
+          <p:nvPr/>
+        </p:nvSpPr>
+        <p:spPr>
+          <a:xfrm>
+            <a:off x="4297680" y="2103120"/>
+            <a:ext cx="3566160" cy="1097280"/>
+          </a:xfrm>
+          <a:prstGeom prst="roundRect">
+            <a:avLst>
+              <a:gd name="adj" fmla="val 4167"/>
+            </a:avLst>
+          </a:prstGeom>
+          <a:solidFill>
+            <a:schemeClr val="bg2"/>
+          </a:solidFill>
+          <a:ln w="12700">
+            <a:solidFill>
+              <a:schemeClr val="bg2"/>
+            </a:solidFill>
+            <a:prstDash val="solid"/>
+          </a:ln>
+        </p:spPr>
+      </p:sp>
+      <p:sp>
+        <p:nvSpPr>
+          <p:cNvPr id="9" name="背景数字2"/>
+          <p:cNvSpPr txBox="1"/>
+          <p:nvPr/>
+        </p:nvSpPr>
+        <p:spPr>
+          <a:xfrm>
+            <a:off x="4572000" y="2103120"/>
+            <a:ext cx="2103120" cy="1097280"/>
+          </a:xfrm>
+          <a:prstGeom prst="rect">
+            <a:avLst/>
+          </a:prstGeom>
+          <a:noFill/>
+          <a:ln/>
+        </p:spPr>
+        <p:txBody>
+          <a:bodyPr wrap="square" lIns="0" tIns="0" rIns="0" bIns="0" rtlCol="0" anchor="ctr"/>
+          <a:lstStyle/>
+          <a:p>
+            <a:pPr indent="0" marL="0">
+              <a:buNone/>
+            </a:pPr>
+            <a:r>
+              <a:rPr lang="en-US" sz="2400" b="1" dirty="0">
+                <a:solidFill>
+                  <a:schemeClr val="accent1"/>
+                </a:solidFill>
+                <a:latin typeface="Arial" pitchFamily="34" charset="0"/>
+                <a:ea typeface="Arial" pitchFamily="34" charset="-122"/>
+                <a:cs typeface="Arial" pitchFamily="34" charset="-120"/>
+              </a:rPr>
+              <a:t>约 180 万个</a:t>
+            </a:r>
+            <a:endParaRPr lang="en-US" sz="2400" dirty="0"/>
+          </a:p>
+        </p:txBody>
+      </p:sp>
+      <p:sp>
+        <p:nvSpPr>
+          <p:cNvPr id="10" name="背景说明2"/>
+          <p:cNvSpPr txBox="1"/>
+          <p:nvPr/>
+        </p:nvSpPr>
+        <p:spPr>
+          <a:xfrm>
+            <a:off x="6675120" y="2103120"/>
+            <a:ext cx="1097280" cy="1097280"/>
+          </a:xfrm>
+          <a:prstGeom prst="rect">
+            <a:avLst/>
+          </a:prstGeom>
+          <a:noFill/>
+          <a:ln/>
+        </p:spPr>
+        <p:txBody>
+          <a:bodyPr wrap="square" lIns="0" tIns="0" rIns="0" bIns="0" rtlCol="0" anchor="ctr"/>
+          <a:lstStyle/>
+          <a:p>
+            <a:pPr indent="0" marL="0">
+              <a:buNone/>
+            </a:pPr>
+            <a:r>
+              <a:rPr lang="en-US" sz="1500" dirty="0">
+                <a:solidFill>
+                  <a:schemeClr val="tx1"/>
+                </a:solidFill>
+              </a:rPr>
+              <a:t>节目</a:t>
+            </a:r>
+            <a:endParaRPr lang="en-US" sz="1500" dirty="0"/>
+          </a:p>
+        </p:txBody>
+      </p:sp>
+      <p:sp>
+        <p:nvSpPr>
+          <p:cNvPr id="11" name="背景卡3"/>
+          <p:cNvSpPr/>
+          <p:nvPr/>
+        </p:nvSpPr>
+        <p:spPr>
+          <a:xfrm>
+            <a:off x="8046720" y="2103120"/>
+            <a:ext cx="3566160" cy="1097280"/>
+          </a:xfrm>
+          <a:prstGeom prst="roundRect">
+            <a:avLst>
+              <a:gd name="adj" fmla="val 4167"/>
+            </a:avLst>
+          </a:prstGeom>
+          <a:solidFill>
+            <a:schemeClr val="bg2"/>
+          </a:solidFill>
+          <a:ln w="12700">
+            <a:solidFill>
+              <a:schemeClr val="bg2"/>
+            </a:solidFill>
+            <a:prstDash val="solid"/>
+          </a:ln>
+        </p:spPr>
+      </p:sp>
+      <p:sp>
+        <p:nvSpPr>
+          <p:cNvPr id="12" name="背景数字3"/>
+          <p:cNvSpPr txBox="1"/>
+          <p:nvPr/>
+        </p:nvSpPr>
+        <p:spPr>
+          <a:xfrm>
+            <a:off x="8321040" y="2103120"/>
+            <a:ext cx="2103120" cy="1097280"/>
+          </a:xfrm>
+          <a:prstGeom prst="rect">
+            <a:avLst/>
+          </a:prstGeom>
+          <a:noFill/>
+          <a:ln/>
+        </p:spPr>
+        <p:txBody>
+          <a:bodyPr wrap="square" lIns="0" tIns="0" rIns="0" bIns="0" rtlCol="0" anchor="ctr"/>
+          <a:lstStyle/>
+          <a:p>
+            <a:pPr indent="0" marL="0">
+              <a:buNone/>
+            </a:pPr>
+            <a:r>
+              <a:rPr lang="en-US" sz="2400" b="1" dirty="0">
+                <a:solidFill>
+                  <a:schemeClr val="accent1"/>
+                </a:solidFill>
+                <a:latin typeface="Arial" pitchFamily="34" charset="0"/>
+                <a:ea typeface="Arial" pitchFamily="34" charset="-122"/>
+                <a:cs typeface="Arial" pitchFamily="34" charset="-120"/>
+              </a:rPr>
+              <a:t>近 2,100 个</a:t>
+            </a:r>
+            <a:endParaRPr lang="en-US" sz="2400" dirty="0"/>
+          </a:p>
+        </p:txBody>
+      </p:sp>
+      <p:sp>
+        <p:nvSpPr>
+          <p:cNvPr id="13" name="背景说明3"/>
+          <p:cNvSpPr txBox="1"/>
+          <p:nvPr/>
+        </p:nvSpPr>
+        <p:spPr>
+          <a:xfrm>
+            <a:off x="10424160" y="2103120"/>
+            <a:ext cx="1097280" cy="1097280"/>
+          </a:xfrm>
+          <a:prstGeom prst="rect">
+            <a:avLst/>
+          </a:prstGeom>
+          <a:noFill/>
+          <a:ln/>
+        </p:spPr>
+        <p:txBody>
+          <a:bodyPr wrap="square" lIns="0" tIns="0" rIns="0" bIns="0" rtlCol="0" anchor="ctr"/>
+          <a:lstStyle/>
+          <a:p>
+            <a:pPr indent="0" marL="0">
+              <a:buNone/>
+            </a:pPr>
+            <a:r>
+              <a:rPr lang="en-US" sz="1500" dirty="0">
+                <a:solidFill>
+                  <a:schemeClr val="tx1"/>
+                </a:solidFill>
+              </a:rPr>
+              <a:t>免费频道</a:t>
+            </a:r>
+            <a:endParaRPr lang="en-US" sz="1500" dirty="0"/>
+          </a:p>
+        </p:txBody>
+      </p:sp>
+      <p:sp>
+        <p:nvSpPr>
+          <p:cNvPr id="14" name="背景注"/>
+          <p:cNvSpPr txBox="1"/>
+          <p:nvPr/>
+        </p:nvSpPr>
+        <p:spPr>
+          <a:xfrm>
+            <a:off x="548640" y="3246120"/>
+            <a:ext cx="7315200" cy="274320"/>
+          </a:xfrm>
+          <a:prstGeom prst="rect">
+            <a:avLst/>
+          </a:prstGeom>
+          <a:noFill/>
+          <a:ln/>
+        </p:spPr>
+        <p:txBody>
+          <a:bodyPr wrap="square" lIns="0" tIns="0" rIns="0" bIns="0" rtlCol="0" anchor="ctr"/>
+          <a:lstStyle/>
+          <a:p>
+            <a:pPr indent="0" marL="0">
+              <a:buNone/>
+            </a:pPr>
+            <a:r>
+              <a:rPr lang="en-US" sz="1200" dirty="0">
+                <a:solidFill>
+                  <a:schemeClr val="accent5"/>
+                </a:solidFill>
+              </a:rPr>
+              <a:t>截至 2026 年 2 月，Gracenote 记录的数量（点播指 SVOD，免费频道指 FAST）</a:t>
+            </a:r>
+            <a:endParaRPr lang="en-US" sz="1200" dirty="0"/>
+          </a:p>
+        </p:txBody>
+      </p:sp>
+      <p:sp>
+        <p:nvSpPr>
+          <p:cNvPr id="15" name="分隔线"/>
+          <p:cNvSpPr/>
+          <p:nvPr/>
+        </p:nvSpPr>
+        <p:spPr>
+          <a:xfrm>
+            <a:off x="548640" y="3657600"/>
+            <a:ext cx="11064240" cy="0"/>
           </a:xfrm>
           <a:prstGeom prst="line">
             <a:avLst/>
@@ -8605,14 +8834,14 @@
       </p:sp>
       <p:sp>
         <p:nvSpPr>
-          <p:cNvPr id="6" name="问题编号1"/>
+          <p:cNvPr id="16" name="问题编号1"/>
           <p:cNvSpPr txBox="1"/>
           <p:nvPr/>
         </p:nvSpPr>
         <p:spPr>
           <a:xfrm>
-            <a:off x="548640" y="2514600"/>
-            <a:ext cx="914400" cy="777240"/>
+            <a:off x="548640" y="3657600"/>
+            <a:ext cx="1097280" cy="566928"/>
           </a:xfrm>
           <a:prstGeom prst="rect">
             <a:avLst/>
@@ -8641,14 +8870,14 @@
       </p:sp>
       <p:sp>
         <p:nvSpPr>
-          <p:cNvPr id="7" name="问题名1"/>
+          <p:cNvPr id="17" name="问题名1"/>
           <p:cNvSpPr txBox="1"/>
           <p:nvPr/>
         </p:nvSpPr>
         <p:spPr>
           <a:xfrm>
-            <a:off x="1508760" y="2514600"/>
-            <a:ext cx="2011680" cy="777240"/>
+            <a:off x="1737360" y="3657600"/>
+            <a:ext cx="2194560" cy="566928"/>
           </a:xfrm>
           <a:prstGeom prst="rect">
             <a:avLst/>
@@ -8664,27 +8893,27 @@
               <a:buNone/>
             </a:pPr>
             <a:r>
-              <a:rPr lang="en-US" sz="2100" b="1" dirty="0">
+              <a:rPr lang="en-US" sz="2000" b="1" dirty="0">
                 <a:solidFill>
                   <a:schemeClr val="tx2"/>
                 </a:solidFill>
               </a:rPr>
               <a:t>使用频率</a:t>
             </a:r>
-            <a:endParaRPr lang="en-US" sz="2100" dirty="0"/>
-          </a:p>
-        </p:txBody>
-      </p:sp>
-      <p:sp>
-        <p:nvSpPr>
-          <p:cNvPr id="8" name="问题内容1"/>
+            <a:endParaRPr lang="en-US" sz="2000" dirty="0"/>
+          </a:p>
+        </p:txBody>
+      </p:sp>
+      <p:sp>
+        <p:nvSpPr>
+          <p:cNvPr id="18" name="问题内容1"/>
           <p:cNvSpPr txBox="1"/>
           <p:nvPr/>
         </p:nvSpPr>
         <p:spPr>
           <a:xfrm>
-            <a:off x="3611880" y="2514600"/>
-            <a:ext cx="3520440" cy="777240"/>
+            <a:off x="4114800" y="3657600"/>
+            <a:ext cx="7498080" cy="566928"/>
           </a:xfrm>
           <a:prstGeom prst="rect">
             <a:avLst/>
@@ -8705,7 +8934,7 @@
                   <a:schemeClr val="tx1"/>
                 </a:solidFill>
               </a:rPr>
-              <a:t>各年龄层 AI 使用频率</a:t>
+              <a:t>各年龄段使用 AI 的频率</a:t>
             </a:r>
             <a:endParaRPr lang="en-US" sz="1800" dirty="0"/>
           </a:p>
@@ -8713,14 +8942,14 @@
       </p:sp>
       <p:sp>
         <p:nvSpPr>
-          <p:cNvPr id="9" name="分隔线"/>
+          <p:cNvPr id="19" name="分隔线"/>
           <p:cNvSpPr/>
           <p:nvPr/>
         </p:nvSpPr>
         <p:spPr>
           <a:xfrm>
-            <a:off x="548640" y="3291840"/>
-            <a:ext cx="6583680" cy="0"/>
+            <a:off x="548640" y="4224528"/>
+            <a:ext cx="11064240" cy="0"/>
           </a:xfrm>
           <a:prstGeom prst="line">
             <a:avLst/>
@@ -8736,14 +8965,14 @@
       </p:sp>
       <p:sp>
         <p:nvSpPr>
-          <p:cNvPr id="10" name="问题编号2"/>
+          <p:cNvPr id="20" name="问题编号2"/>
           <p:cNvSpPr txBox="1"/>
           <p:nvPr/>
         </p:nvSpPr>
         <p:spPr>
           <a:xfrm>
-            <a:off x="548640" y="3291840"/>
-            <a:ext cx="914400" cy="777240"/>
+            <a:off x="548640" y="4224528"/>
+            <a:ext cx="1097280" cy="566928"/>
           </a:xfrm>
           <a:prstGeom prst="rect">
             <a:avLst/>
@@ -8772,14 +9001,14 @@
       </p:sp>
       <p:sp>
         <p:nvSpPr>
-          <p:cNvPr id="11" name="问题名2"/>
+          <p:cNvPr id="21" name="问题名2"/>
           <p:cNvSpPr txBox="1"/>
           <p:nvPr/>
         </p:nvSpPr>
         <p:spPr>
           <a:xfrm>
-            <a:off x="1508760" y="3291840"/>
-            <a:ext cx="2011680" cy="777240"/>
+            <a:off x="1737360" y="4224528"/>
+            <a:ext cx="2194560" cy="566928"/>
           </a:xfrm>
           <a:prstGeom prst="rect">
             <a:avLst/>
@@ -8795,27 +9024,27 @@
               <a:buNone/>
             </a:pPr>
             <a:r>
-              <a:rPr lang="en-US" sz="2100" b="1" dirty="0">
+              <a:rPr lang="en-US" sz="2000" b="1" dirty="0">
                 <a:solidFill>
                   <a:schemeClr val="tx2"/>
                 </a:solidFill>
               </a:rPr>
               <a:t>检索难度</a:t>
             </a:r>
-            <a:endParaRPr lang="en-US" sz="2100" dirty="0"/>
-          </a:p>
-        </p:txBody>
-      </p:sp>
-      <p:sp>
-        <p:nvSpPr>
-          <p:cNvPr id="12" name="问题内容2"/>
+            <a:endParaRPr lang="en-US" sz="2000" dirty="0"/>
+          </a:p>
+        </p:txBody>
+      </p:sp>
+      <p:sp>
+        <p:nvSpPr>
+          <p:cNvPr id="22" name="问题内容2"/>
           <p:cNvSpPr txBox="1"/>
           <p:nvPr/>
         </p:nvSpPr>
         <p:spPr>
           <a:xfrm>
-            <a:off x="3611880" y="3291840"/>
-            <a:ext cx="3520440" cy="777240"/>
+            <a:off x="4114800" y="4224528"/>
+            <a:ext cx="7498080" cy="566928"/>
           </a:xfrm>
           <a:prstGeom prst="rect">
             <a:avLst/>
@@ -8836,7 +9065,7 @@
                   <a:schemeClr val="tx1"/>
                 </a:solidFill>
               </a:rPr>
-              <a:t>检索耗时与退订意向</a:t>
+              <a:t>找节目的难度与退订意向</a:t>
             </a:r>
             <a:endParaRPr lang="en-US" sz="1800" dirty="0"/>
           </a:p>
@@ -8844,14 +9073,14 @@
       </p:sp>
       <p:sp>
         <p:nvSpPr>
-          <p:cNvPr id="13" name="分隔线"/>
+          <p:cNvPr id="23" name="分隔线"/>
           <p:cNvSpPr/>
           <p:nvPr/>
         </p:nvSpPr>
         <p:spPr>
           <a:xfrm>
-            <a:off x="548640" y="4069080"/>
-            <a:ext cx="6583680" cy="0"/>
+            <a:off x="548640" y="4791456"/>
+            <a:ext cx="11064240" cy="0"/>
           </a:xfrm>
           <a:prstGeom prst="line">
             <a:avLst/>
@@ -8867,14 +9096,14 @@
       </p:sp>
       <p:sp>
         <p:nvSpPr>
-          <p:cNvPr id="14" name="问题编号3"/>
+          <p:cNvPr id="24" name="问题编号3"/>
           <p:cNvSpPr txBox="1"/>
           <p:nvPr/>
         </p:nvSpPr>
         <p:spPr>
           <a:xfrm>
-            <a:off x="548640" y="4069080"/>
-            <a:ext cx="914400" cy="777240"/>
+            <a:off x="548640" y="4791456"/>
+            <a:ext cx="1097280" cy="566928"/>
           </a:xfrm>
           <a:prstGeom prst="rect">
             <a:avLst/>
@@ -8903,14 +9132,14 @@
       </p:sp>
       <p:sp>
         <p:nvSpPr>
-          <p:cNvPr id="15" name="问题名3"/>
+          <p:cNvPr id="25" name="问题名3"/>
           <p:cNvSpPr txBox="1"/>
           <p:nvPr/>
         </p:nvSpPr>
         <p:spPr>
           <a:xfrm>
-            <a:off x="1508760" y="4069080"/>
-            <a:ext cx="2011680" cy="777240"/>
+            <a:off x="1737360" y="4791456"/>
+            <a:ext cx="2194560" cy="566928"/>
           </a:xfrm>
           <a:prstGeom prst="rect">
             <a:avLst/>
@@ -8926,27 +9155,27 @@
               <a:buNone/>
             </a:pPr>
             <a:r>
-              <a:rPr lang="en-US" sz="2100" b="1" dirty="0">
+              <a:rPr lang="en-US" sz="2000" b="1" dirty="0">
                 <a:solidFill>
                   <a:schemeClr val="tx2"/>
                 </a:solidFill>
               </a:rPr>
               <a:t>信任程度</a:t>
             </a:r>
-            <a:endParaRPr lang="en-US" sz="2100" dirty="0"/>
-          </a:p>
-        </p:txBody>
-      </p:sp>
-      <p:sp>
-        <p:nvSpPr>
-          <p:cNvPr id="16" name="问题内容3"/>
+            <a:endParaRPr lang="en-US" sz="2000" dirty="0"/>
+          </a:p>
+        </p:txBody>
+      </p:sp>
+      <p:sp>
+        <p:nvSpPr>
+          <p:cNvPr id="26" name="问题内容3"/>
           <p:cNvSpPr txBox="1"/>
           <p:nvPr/>
         </p:nvSpPr>
         <p:spPr>
           <a:xfrm>
-            <a:off x="3611880" y="4069080"/>
-            <a:ext cx="3520440" cy="777240"/>
+            <a:off x="4114800" y="4791456"/>
+            <a:ext cx="7498080" cy="566928"/>
           </a:xfrm>
           <a:prstGeom prst="rect">
             <a:avLst/>
@@ -8967,7 +9196,7 @@
                   <a:schemeClr val="tx1"/>
                 </a:solidFill>
               </a:rPr>
-              <a:t>对 AI 回答的核查</a:t>
+              <a:t>对 AI 回答的信任</a:t>
             </a:r>
             <a:endParaRPr lang="en-US" sz="1800" dirty="0"/>
           </a:p>
@@ -8975,14 +9204,14 @@
       </p:sp>
       <p:sp>
         <p:nvSpPr>
-          <p:cNvPr id="17" name="分隔线"/>
+          <p:cNvPr id="27" name="分隔线"/>
           <p:cNvSpPr/>
           <p:nvPr/>
         </p:nvSpPr>
         <p:spPr>
           <a:xfrm>
-            <a:off x="548640" y="4846320"/>
-            <a:ext cx="6583680" cy="0"/>
+            <a:off x="548640" y="5358384"/>
+            <a:ext cx="11064240" cy="0"/>
           </a:xfrm>
           <a:prstGeom prst="line">
             <a:avLst/>
@@ -8998,14 +9227,14 @@
       </p:sp>
       <p:sp>
         <p:nvSpPr>
-          <p:cNvPr id="18" name="研究机构"/>
+          <p:cNvPr id="28" name="建议说明"/>
           <p:cNvSpPr txBox="1"/>
           <p:nvPr/>
         </p:nvSpPr>
         <p:spPr>
           <a:xfrm>
-            <a:off x="548640" y="4983480"/>
-            <a:ext cx="6583680" cy="777240"/>
+            <a:off x="548640" y="5440680"/>
+            <a:ext cx="11064240" cy="548640"/>
           </a:xfrm>
           <a:prstGeom prst="rect">
             <a:avLst/>
@@ -9021,117 +9250,25 @@
               <a:buNone/>
             </a:pPr>
             <a:r>
-              <a:rPr lang="en-US" sz="1700" b="1" dirty="0">
+              <a:rPr lang="en-US" sz="1800" b="1" dirty="0">
                 <a:solidFill>
                   <a:schemeClr val="accent3"/>
                 </a:solidFill>
               </a:rPr>
-              <a:t>研究机构  </a:t>
+              <a:t>留意  </a:t>
             </a:r>
             <a:pPr indent="0" marL="0">
               <a:buNone/>
             </a:pPr>
             <a:r>
-              <a:rPr lang="en-US" sz="1700" dirty="0">
+              <a:rPr lang="en-US" sz="1800" dirty="0">
                 <a:solidFill>
                   <a:schemeClr val="tx1"/>
                 </a:solidFill>
               </a:rPr>
-              <a:t>Gracenote，尼尔森旗下节目数据公司。报告建议接入的行业数据，即其主营业务。</a:t>
-            </a:r>
-            <a:endParaRPr lang="en-US" sz="1700" dirty="0"/>
-          </a:p>
-        </p:txBody>
-      </p:sp>
-      <p:sp>
-        <p:nvSpPr>
-          <p:cNvPr id="19" name="报告封面阴影"/>
-          <p:cNvSpPr/>
-          <p:nvPr/>
-        </p:nvSpPr>
-        <p:spPr>
-          <a:xfrm>
-            <a:off x="7635240" y="2514600"/>
-            <a:ext cx="3977640" cy="2414016"/>
-          </a:xfrm>
-          <a:prstGeom prst="rect">
-            <a:avLst/>
-          </a:prstGeom>
-          <a:solidFill>
-            <a:srgbClr val="FFFFFF"/>
-          </a:solidFill>
-          <a:ln w="6350">
-            <a:solidFill>
-              <a:srgbClr val="E3E7EC"/>
-            </a:solidFill>
-            <a:prstDash val="solid"/>
-          </a:ln>
-          <a:effectLst>
-            <a:outerShdw sx="100000" sy="100000" kx="0" ky="0" algn="bl" rotWithShape="0" blurRad="177800" dist="50800" dir="5400000">
-              <a:srgbClr val="1F2A44">
-                <a:alpha val="18000"/>
-              </a:srgbClr>
-            </a:outerShdw>
-          </a:effectLst>
-        </p:spPr>
-      </p:sp>
-      <p:pic>
-        <p:nvPicPr>
-          <p:cNvPr id="20" name="报告封面" descr="/home/user/ppt/build/assets/report_cover.jpg">    </p:cNvPr>
-          <p:cNvPicPr>
-            <a:picLocks noChangeAspect="1"/>
-          </p:cNvPicPr>
-          <p:nvPr/>
-        </p:nvPicPr>
-        <p:blipFill>
-          <a:blip r:embed="rId1"/>
-          <a:stretch>
-            <a:fillRect/>
-          </a:stretch>
-        </p:blipFill>
-        <p:spPr>
-          <a:xfrm>
-            <a:off x="7635240" y="2514600"/>
-            <a:ext cx="3977640" cy="2414016"/>
-          </a:xfrm>
-          <a:prstGeom prst="rect">
-            <a:avLst/>
-          </a:prstGeom>
-        </p:spPr>
-      </p:pic>
-      <p:sp>
-        <p:nvSpPr>
-          <p:cNvPr id="21" name="封面图注"/>
-          <p:cNvSpPr txBox="1"/>
-          <p:nvPr/>
-        </p:nvSpPr>
-        <p:spPr>
-          <a:xfrm>
-            <a:off x="7635240" y="5074920"/>
-            <a:ext cx="3977640" cy="320040"/>
-          </a:xfrm>
-          <a:prstGeom prst="rect">
-            <a:avLst/>
-          </a:prstGeom>
-          <a:noFill/>
-          <a:ln/>
-        </p:spPr>
-        <p:txBody>
-          <a:bodyPr wrap="square" lIns="0" tIns="0" rIns="0" bIns="0" rtlCol="0" anchor="ctr"/>
-          <a:lstStyle/>
-          <a:p>
-            <a:pPr indent="0" marL="0">
-              <a:buNone/>
-            </a:pPr>
-            <a:r>
-              <a:rPr lang="en-US" sz="1300" dirty="0">
-                <a:solidFill>
-                  <a:schemeClr val="accent5"/>
-                </a:solidFill>
-              </a:rPr>
-              <a:t>报告封面 · Gracenote，2026 年 4 月</a:t>
-            </a:r>
-            <a:endParaRPr lang="en-US" sz="1300" dirty="0"/>
+              <a:t>报告建议 AI 接入行业数据，而提供行业数据正是 Gracenote 的业务。</a:t>
+            </a:r>
+            <a:endParaRPr lang="en-US" sz="1800" dirty="0"/>
           </a:p>
         </p:txBody>
       </p:sp>
@@ -9206,7 +9343,7 @@
                       </p:stCondLst>
                       <p:childTnLst>
                         <p:par>
-                          <p:cTn id="46" fill="hold">
+                          <p:cTn id="67" fill="hold">
                             <p:stCondLst>
                               <p:cond delay="0"/>
                             </p:stCondLst>
@@ -9260,7 +9397,7 @@
                                           </p:stCondLst>
                                         </p:cTn>
                                         <p:tgtEl>
-                                          <p:spTgt spid="6"/>
+                                          <p:spTgt spid="5"/>
                                         </p:tgtEl>
                                         <p:attrNameLst>
                                           <p:attrName>style.visibility</p:attrName>
@@ -9274,7 +9411,7 @@
                                       <p:cBhvr>
                                         <p:cTn id="9" dur="500"/>
                                         <p:tgtEl>
-                                          <p:spTgt spid="6"/>
+                                          <p:spTgt spid="5"/>
                                         </p:tgtEl>
                                       </p:cBhvr>
                                     </p:animEffect>
@@ -9295,7 +9432,7 @@
                                           </p:stCondLst>
                                         </p:cTn>
                                         <p:tgtEl>
-                                          <p:spTgt spid="7"/>
+                                          <p:spTgt spid="6"/>
                                         </p:tgtEl>
                                         <p:attrNameLst>
                                           <p:attrName>style.visibility</p:attrName>
@@ -9309,7 +9446,7 @@
                                       <p:cBhvr>
                                         <p:cTn id="12" dur="500"/>
                                         <p:tgtEl>
-                                          <p:spTgt spid="7"/>
+                                          <p:spTgt spid="6"/>
                                         </p:tgtEl>
                                       </p:cBhvr>
                                     </p:animEffect>
@@ -9330,7 +9467,7 @@
                                           </p:stCondLst>
                                         </p:cTn>
                                         <p:tgtEl>
-                                          <p:spTgt spid="8"/>
+                                          <p:spTgt spid="7"/>
                                         </p:tgtEl>
                                         <p:attrNameLst>
                                           <p:attrName>style.visibility</p:attrName>
@@ -9344,7 +9481,7 @@
                                       <p:cBhvr>
                                         <p:cTn id="15" dur="500"/>
                                         <p:tgtEl>
-                                          <p:spTgt spid="8"/>
+                                          <p:spTgt spid="7"/>
                                         </p:tgtEl>
                                       </p:cBhvr>
                                     </p:animEffect>
@@ -9365,7 +9502,7 @@
                                           </p:stCondLst>
                                         </p:cTn>
                                         <p:tgtEl>
-                                          <p:spTgt spid="10"/>
+                                          <p:spTgt spid="8"/>
                                         </p:tgtEl>
                                         <p:attrNameLst>
                                           <p:attrName>style.visibility</p:attrName>
@@ -9379,7 +9516,7 @@
                                       <p:cBhvr>
                                         <p:cTn id="18" dur="500"/>
                                         <p:tgtEl>
-                                          <p:spTgt spid="10"/>
+                                          <p:spTgt spid="8"/>
                                         </p:tgtEl>
                                       </p:cBhvr>
                                     </p:animEffect>
@@ -9400,7 +9537,7 @@
                                           </p:stCondLst>
                                         </p:cTn>
                                         <p:tgtEl>
-                                          <p:spTgt spid="11"/>
+                                          <p:spTgt spid="9"/>
                                         </p:tgtEl>
                                         <p:attrNameLst>
                                           <p:attrName>style.visibility</p:attrName>
@@ -9414,7 +9551,7 @@
                                       <p:cBhvr>
                                         <p:cTn id="21" dur="500"/>
                                         <p:tgtEl>
-                                          <p:spTgt spid="11"/>
+                                          <p:spTgt spid="9"/>
                                         </p:tgtEl>
                                       </p:cBhvr>
                                     </p:animEffect>
@@ -9435,7 +9572,7 @@
                                           </p:stCondLst>
                                         </p:cTn>
                                         <p:tgtEl>
-                                          <p:spTgt spid="12"/>
+                                          <p:spTgt spid="10"/>
                                         </p:tgtEl>
                                         <p:attrNameLst>
                                           <p:attrName>style.visibility</p:attrName>
@@ -9449,7 +9586,7 @@
                                       <p:cBhvr>
                                         <p:cTn id="24" dur="500"/>
                                         <p:tgtEl>
-                                          <p:spTgt spid="12"/>
+                                          <p:spTgt spid="10"/>
                                         </p:tgtEl>
                                       </p:cBhvr>
                                     </p:animEffect>
@@ -9470,7 +9607,7 @@
                                           </p:stCondLst>
                                         </p:cTn>
                                         <p:tgtEl>
-                                          <p:spTgt spid="14"/>
+                                          <p:spTgt spid="11"/>
                                         </p:tgtEl>
                                         <p:attrNameLst>
                                           <p:attrName>style.visibility</p:attrName>
@@ -9484,7 +9621,7 @@
                                       <p:cBhvr>
                                         <p:cTn id="27" dur="500"/>
                                         <p:tgtEl>
-                                          <p:spTgt spid="14"/>
+                                          <p:spTgt spid="11"/>
                                         </p:tgtEl>
                                       </p:cBhvr>
                                     </p:animEffect>
@@ -9505,7 +9642,7 @@
                                           </p:stCondLst>
                                         </p:cTn>
                                         <p:tgtEl>
-                                          <p:spTgt spid="15"/>
+                                          <p:spTgt spid="12"/>
                                         </p:tgtEl>
                                         <p:attrNameLst>
                                           <p:attrName>style.visibility</p:attrName>
@@ -9519,7 +9656,7 @@
                                       <p:cBhvr>
                                         <p:cTn id="30" dur="500"/>
                                         <p:tgtEl>
-                                          <p:spTgt spid="15"/>
+                                          <p:spTgt spid="12"/>
                                         </p:tgtEl>
                                       </p:cBhvr>
                                     </p:animEffect>
@@ -9540,7 +9677,7 @@
                                           </p:stCondLst>
                                         </p:cTn>
                                         <p:tgtEl>
-                                          <p:spTgt spid="16"/>
+                                          <p:spTgt spid="13"/>
                                         </p:tgtEl>
                                         <p:attrNameLst>
                                           <p:attrName>style.visibility</p:attrName>
@@ -9554,7 +9691,7 @@
                                       <p:cBhvr>
                                         <p:cTn id="33" dur="500"/>
                                         <p:tgtEl>
-                                          <p:spTgt spid="16"/>
+                                          <p:spTgt spid="13"/>
                                         </p:tgtEl>
                                       </p:cBhvr>
                                     </p:animEffect>
@@ -9575,7 +9712,7 @@
                                           </p:stCondLst>
                                         </p:cTn>
                                         <p:tgtEl>
-                                          <p:spTgt spid="19"/>
+                                          <p:spTgt spid="14"/>
                                         </p:tgtEl>
                                         <p:attrNameLst>
                                           <p:attrName>style.visibility</p:attrName>
@@ -9589,7 +9726,7 @@
                                       <p:cBhvr>
                                         <p:cTn id="36" dur="500"/>
                                         <p:tgtEl>
-                                          <p:spTgt spid="19"/>
+                                          <p:spTgt spid="14"/>
                                         </p:tgtEl>
                                       </p:cBhvr>
                                     </p:animEffect>
@@ -9599,7 +9736,7 @@
                               <p:par>
                                 <p:cTn id="37" presetID="10" presetClass="entr" presetSubtype="0" fill="hold" grpId="0" nodeType="withEffect">
                                   <p:stCondLst>
-                                    <p:cond delay="1600"/>
+                                    <p:cond delay="1950"/>
                                   </p:stCondLst>
                                   <p:childTnLst>
                                     <p:set>
@@ -9610,7 +9747,7 @@
                                           </p:stCondLst>
                                         </p:cTn>
                                         <p:tgtEl>
-                                          <p:spTgt spid="20"/>
+                                          <p:spTgt spid="16"/>
                                         </p:tgtEl>
                                         <p:attrNameLst>
                                           <p:attrName>style.visibility</p:attrName>
@@ -9624,7 +9761,7 @@
                                       <p:cBhvr>
                                         <p:cTn id="39" dur="500"/>
                                         <p:tgtEl>
-                                          <p:spTgt spid="20"/>
+                                          <p:spTgt spid="16"/>
                                         </p:tgtEl>
                                       </p:cBhvr>
                                     </p:animEffect>
@@ -9634,7 +9771,7 @@
                               <p:par>
                                 <p:cTn id="40" presetID="10" presetClass="entr" presetSubtype="0" fill="hold" grpId="0" nodeType="withEffect">
                                   <p:stCondLst>
-                                    <p:cond delay="1600"/>
+                                    <p:cond delay="1950"/>
                                   </p:stCondLst>
                                   <p:childTnLst>
                                     <p:set>
@@ -9645,7 +9782,7 @@
                                           </p:stCondLst>
                                         </p:cTn>
                                         <p:tgtEl>
-                                          <p:spTgt spid="21"/>
+                                          <p:spTgt spid="17"/>
                                         </p:tgtEl>
                                         <p:attrNameLst>
                                           <p:attrName>style.visibility</p:attrName>
@@ -9659,7 +9796,7 @@
                                       <p:cBhvr>
                                         <p:cTn id="42" dur="500"/>
                                         <p:tgtEl>
-                                          <p:spTgt spid="21"/>
+                                          <p:spTgt spid="17"/>
                                         </p:tgtEl>
                                       </p:cBhvr>
                                     </p:animEffect>
@@ -9695,6 +9832,251 @@
                                         <p:cTn id="45" dur="500"/>
                                         <p:tgtEl>
                                           <p:spTgt spid="18"/>
+                                        </p:tgtEl>
+                                      </p:cBhvr>
+                                    </p:animEffect>
+                                  </p:childTnLst>
+                                </p:cTn>
+                              </p:par>
+                              <p:par>
+                                <p:cTn id="46" presetID="10" presetClass="entr" presetSubtype="0" fill="hold" grpId="0" nodeType="withEffect">
+                                  <p:stCondLst>
+                                    <p:cond delay="2300"/>
+                                  </p:stCondLst>
+                                  <p:childTnLst>
+                                    <p:set>
+                                      <p:cBhvr>
+                                        <p:cTn id="47" dur="1" fill="hold">
+                                          <p:stCondLst>
+                                            <p:cond delay="0"/>
+                                          </p:stCondLst>
+                                        </p:cTn>
+                                        <p:tgtEl>
+                                          <p:spTgt spid="20"/>
+                                        </p:tgtEl>
+                                        <p:attrNameLst>
+                                          <p:attrName>style.visibility</p:attrName>
+                                        </p:attrNameLst>
+                                      </p:cBhvr>
+                                      <p:to>
+                                        <p:strVal val="visible"/>
+                                      </p:to>
+                                    </p:set>
+                                    <p:animEffect transition="in" filter="fade">
+                                      <p:cBhvr>
+                                        <p:cTn id="48" dur="500"/>
+                                        <p:tgtEl>
+                                          <p:spTgt spid="20"/>
+                                        </p:tgtEl>
+                                      </p:cBhvr>
+                                    </p:animEffect>
+                                  </p:childTnLst>
+                                </p:cTn>
+                              </p:par>
+                              <p:par>
+                                <p:cTn id="49" presetID="10" presetClass="entr" presetSubtype="0" fill="hold" grpId="0" nodeType="withEffect">
+                                  <p:stCondLst>
+                                    <p:cond delay="2300"/>
+                                  </p:stCondLst>
+                                  <p:childTnLst>
+                                    <p:set>
+                                      <p:cBhvr>
+                                        <p:cTn id="50" dur="1" fill="hold">
+                                          <p:stCondLst>
+                                            <p:cond delay="0"/>
+                                          </p:stCondLst>
+                                        </p:cTn>
+                                        <p:tgtEl>
+                                          <p:spTgt spid="21"/>
+                                        </p:tgtEl>
+                                        <p:attrNameLst>
+                                          <p:attrName>style.visibility</p:attrName>
+                                        </p:attrNameLst>
+                                      </p:cBhvr>
+                                      <p:to>
+                                        <p:strVal val="visible"/>
+                                      </p:to>
+                                    </p:set>
+                                    <p:animEffect transition="in" filter="fade">
+                                      <p:cBhvr>
+                                        <p:cTn id="51" dur="500"/>
+                                        <p:tgtEl>
+                                          <p:spTgt spid="21"/>
+                                        </p:tgtEl>
+                                      </p:cBhvr>
+                                    </p:animEffect>
+                                  </p:childTnLst>
+                                </p:cTn>
+                              </p:par>
+                              <p:par>
+                                <p:cTn id="52" presetID="10" presetClass="entr" presetSubtype="0" fill="hold" grpId="0" nodeType="withEffect">
+                                  <p:stCondLst>
+                                    <p:cond delay="2300"/>
+                                  </p:stCondLst>
+                                  <p:childTnLst>
+                                    <p:set>
+                                      <p:cBhvr>
+                                        <p:cTn id="53" dur="1" fill="hold">
+                                          <p:stCondLst>
+                                            <p:cond delay="0"/>
+                                          </p:stCondLst>
+                                        </p:cTn>
+                                        <p:tgtEl>
+                                          <p:spTgt spid="22"/>
+                                        </p:tgtEl>
+                                        <p:attrNameLst>
+                                          <p:attrName>style.visibility</p:attrName>
+                                        </p:attrNameLst>
+                                      </p:cBhvr>
+                                      <p:to>
+                                        <p:strVal val="visible"/>
+                                      </p:to>
+                                    </p:set>
+                                    <p:animEffect transition="in" filter="fade">
+                                      <p:cBhvr>
+                                        <p:cTn id="54" dur="500"/>
+                                        <p:tgtEl>
+                                          <p:spTgt spid="22"/>
+                                        </p:tgtEl>
+                                      </p:cBhvr>
+                                    </p:animEffect>
+                                  </p:childTnLst>
+                                </p:cTn>
+                              </p:par>
+                              <p:par>
+                                <p:cTn id="55" presetID="10" presetClass="entr" presetSubtype="0" fill="hold" grpId="0" nodeType="withEffect">
+                                  <p:stCondLst>
+                                    <p:cond delay="2650"/>
+                                  </p:stCondLst>
+                                  <p:childTnLst>
+                                    <p:set>
+                                      <p:cBhvr>
+                                        <p:cTn id="56" dur="1" fill="hold">
+                                          <p:stCondLst>
+                                            <p:cond delay="0"/>
+                                          </p:stCondLst>
+                                        </p:cTn>
+                                        <p:tgtEl>
+                                          <p:spTgt spid="24"/>
+                                        </p:tgtEl>
+                                        <p:attrNameLst>
+                                          <p:attrName>style.visibility</p:attrName>
+                                        </p:attrNameLst>
+                                      </p:cBhvr>
+                                      <p:to>
+                                        <p:strVal val="visible"/>
+                                      </p:to>
+                                    </p:set>
+                                    <p:animEffect transition="in" filter="fade">
+                                      <p:cBhvr>
+                                        <p:cTn id="57" dur="500"/>
+                                        <p:tgtEl>
+                                          <p:spTgt spid="24"/>
+                                        </p:tgtEl>
+                                      </p:cBhvr>
+                                    </p:animEffect>
+                                  </p:childTnLst>
+                                </p:cTn>
+                              </p:par>
+                              <p:par>
+                                <p:cTn id="58" presetID="10" presetClass="entr" presetSubtype="0" fill="hold" grpId="0" nodeType="withEffect">
+                                  <p:stCondLst>
+                                    <p:cond delay="2650"/>
+                                  </p:stCondLst>
+                                  <p:childTnLst>
+                                    <p:set>
+                                      <p:cBhvr>
+                                        <p:cTn id="59" dur="1" fill="hold">
+                                          <p:stCondLst>
+                                            <p:cond delay="0"/>
+                                          </p:stCondLst>
+                                        </p:cTn>
+                                        <p:tgtEl>
+                                          <p:spTgt spid="25"/>
+                                        </p:tgtEl>
+                                        <p:attrNameLst>
+                                          <p:attrName>style.visibility</p:attrName>
+                                        </p:attrNameLst>
+                                      </p:cBhvr>
+                                      <p:to>
+                                        <p:strVal val="visible"/>
+                                      </p:to>
+                                    </p:set>
+                                    <p:animEffect transition="in" filter="fade">
+                                      <p:cBhvr>
+                                        <p:cTn id="60" dur="500"/>
+                                        <p:tgtEl>
+                                          <p:spTgt spid="25"/>
+                                        </p:tgtEl>
+                                      </p:cBhvr>
+                                    </p:animEffect>
+                                  </p:childTnLst>
+                                </p:cTn>
+                              </p:par>
+                              <p:par>
+                                <p:cTn id="61" presetID="10" presetClass="entr" presetSubtype="0" fill="hold" grpId="0" nodeType="withEffect">
+                                  <p:stCondLst>
+                                    <p:cond delay="2650"/>
+                                  </p:stCondLst>
+                                  <p:childTnLst>
+                                    <p:set>
+                                      <p:cBhvr>
+                                        <p:cTn id="62" dur="1" fill="hold">
+                                          <p:stCondLst>
+                                            <p:cond delay="0"/>
+                                          </p:stCondLst>
+                                        </p:cTn>
+                                        <p:tgtEl>
+                                          <p:spTgt spid="26"/>
+                                        </p:tgtEl>
+                                        <p:attrNameLst>
+                                          <p:attrName>style.visibility</p:attrName>
+                                        </p:attrNameLst>
+                                      </p:cBhvr>
+                                      <p:to>
+                                        <p:strVal val="visible"/>
+                                      </p:to>
+                                    </p:set>
+                                    <p:animEffect transition="in" filter="fade">
+                                      <p:cBhvr>
+                                        <p:cTn id="63" dur="500"/>
+                                        <p:tgtEl>
+                                          <p:spTgt spid="26"/>
+                                        </p:tgtEl>
+                                      </p:cBhvr>
+                                    </p:animEffect>
+                                  </p:childTnLst>
+                                </p:cTn>
+                              </p:par>
+                              <p:par>
+                                <p:cTn id="64" presetID="10" presetClass="entr" presetSubtype="0" fill="hold" grpId="0" nodeType="withEffect">
+                                  <p:stCondLst>
+                                    <p:cond delay="3000"/>
+                                  </p:stCondLst>
+                                  <p:childTnLst>
+                                    <p:set>
+                                      <p:cBhvr>
+                                        <p:cTn id="65" dur="1" fill="hold">
+                                          <p:stCondLst>
+                                            <p:cond delay="0"/>
+                                          </p:stCondLst>
+                                        </p:cTn>
+                                        <p:tgtEl>
+                                          <p:spTgt spid="28"/>
+                                        </p:tgtEl>
+                                        <p:attrNameLst>
+                                          <p:attrName>style.visibility</p:attrName>
+                                        </p:attrNameLst>
+                                      </p:cBhvr>
+                                      <p:to>
+                                        <p:strVal val="visible"/>
+                                      </p:to>
+                                    </p:set>
+                                    <p:animEffect transition="in" filter="fade">
+                                      <p:cBhvr>
+                                        <p:cTn id="66" dur="500"/>
+                                        <p:tgtEl>
+                                          <p:spTgt spid="28"/>
                                         </p:tgtEl>
                                       </p:cBhvr>
                                     </p:animEffect>
@@ -9730,18 +10112,26 @@
     </p:tnLst>
     <p:bldLst>
       <p:bldP spid="4" grpId="0" animBg="1"/>
+      <p:bldP spid="5" grpId="0" animBg="1"/>
       <p:bldP spid="6" grpId="0" animBg="1"/>
       <p:bldP spid="7" grpId="0" animBg="1"/>
       <p:bldP spid="8" grpId="0" animBg="1"/>
+      <p:bldP spid="9" grpId="0" animBg="1"/>
       <p:bldP spid="10" grpId="0" animBg="1"/>
       <p:bldP spid="11" grpId="0" animBg="1"/>
       <p:bldP spid="12" grpId="0" animBg="1"/>
+      <p:bldP spid="13" grpId="0" animBg="1"/>
       <p:bldP spid="14" grpId="0" animBg="1"/>
-      <p:bldP spid="15" grpId="0" animBg="1"/>
       <p:bldP spid="16" grpId="0" animBg="1"/>
-      <p:bldP spid="19" grpId="0" animBg="1"/>
+      <p:bldP spid="17" grpId="0" animBg="1"/>
+      <p:bldP spid="18" grpId="0" animBg="1"/>
+      <p:bldP spid="20" grpId="0" animBg="1"/>
       <p:bldP spid="21" grpId="0" animBg="1"/>
-      <p:bldP spid="18" grpId="0" animBg="1"/>
+      <p:bldP spid="22" grpId="0" animBg="1"/>
+      <p:bldP spid="24" grpId="0" animBg="1"/>
+      <p:bldP spid="25" grpId="0" animBg="1"/>
+      <p:bldP spid="26" grpId="0" animBg="1"/>
+      <p:bldP spid="28" grpId="0" animBg="1"/>
     </p:bldLst>
   </p:timing>
 </p:sld>
@@ -10924,7 +11314,7 @@
                   <a:schemeClr val="tx2"/>
                 </a:solidFill>
               </a:rPr>
-              <a:t>结论一：AI 使用普遍，信任有限</a:t>
+              <a:t>结论一、二：年轻人依赖 AI，但信任有限</a:t>
             </a:r>
             <a:endParaRPr lang="en-US" sz="3000" dirty="0"/>
           </a:p>
@@ -11026,7 +11416,7 @@
                   <a:schemeClr val="tx1"/>
                 </a:solidFill>
               </a:rPr>
-              <a:t>13–14 岁 AI 用户</a:t>
+              <a:t>13–14 岁受访者</a:t>
             </a:r>
             <a:endParaRPr lang="en-US" sz="2000" dirty="0"/>
           </a:p>
@@ -11040,7 +11430,7 @@
                   <a:schemeClr val="tx1"/>
                 </a:solidFill>
               </a:rPr>
-              <a:t>每日使用</a:t>
+              <a:t>每日使用 AI</a:t>
             </a:r>
             <a:endParaRPr lang="en-US" sz="2000" dirty="0"/>
           </a:p>
@@ -11142,7 +11532,7 @@
                   <a:schemeClr val="tx1"/>
                 </a:solidFill>
               </a:rPr>
-              <a:t>受访者</a:t>
+              <a:t>受访者表示会</a:t>
             </a:r>
             <a:endParaRPr lang="en-US" sz="2000" dirty="0"/>
           </a:p>
@@ -11156,7 +11546,7 @@
                   <a:schemeClr val="tx1"/>
                 </a:solidFill>
               </a:rPr>
-              <a:t>核对 AI 回答</a:t>
+              <a:t>核对 AI 的结果</a:t>
             </a:r>
             <a:endParaRPr lang="en-US" sz="2000" dirty="0"/>
           </a:p>
@@ -12145,7 +12535,7 @@
                   <a:schemeClr val="tx2"/>
                 </a:solidFill>
               </a:rPr>
-              <a:t>结论二：检索困难与退订风险</a:t>
+              <a:t>结论三、四：难找导致退订，需接入行业数据</a:t>
             </a:r>
             <a:endParaRPr lang="en-US" sz="3000" dirty="0"/>
           </a:p>

--- a/Gracenote报告解读_课堂汇报.pptx
+++ b/Gracenote报告解读_课堂汇报.pptx
@@ -118,13 +118,13 @@
   <p:extLst>
     <p:ext uri="{521415D9-36F7-43E2-AB2F-B90AF26B5E84}">
       <p14:sectionLst xmlns:p14="http://schemas.microsoft.com/office/powerpoint/2010/main">
-        <p14:section name="开场" id="{fe75d69b-876a-d7e7-2ea7-380695486c0f}">
+        <p14:section name="开场" id="{6b90280c-50a2-84b1-b96d-1a5442407bf3}">
           <p14:sldIdLst>
             <p14:sldId id="256"/>
             <p14:sldId id="257"/>
           </p14:sldIdLst>
         </p14:section>
-        <p14:section name="报告介绍" id="{cd12fdbc-b093-04e4-7a26-4ad4c4075a60}">
+        <p14:section name="报告介绍" id="{ba01e77e-7d49-cbf6-6f8c-4d515afc8221}">
           <p14:sldIdLst>
             <p14:sldId id="258"/>
             <p14:sldId id="259"/>
@@ -132,7 +132,7 @@
             <p14:sldId id="261"/>
           </p14:sldIdLst>
         </p14:section>
-        <p14:section name="方法评价" id="{dcf53db5-4ea7-6b7c-a8a1-4aa4e6013faf}">
+        <p14:section name="方法评价" id="{ff142c74-d010-69cc-84df-5afdd49daaed}">
           <p14:sldIdLst>
             <p14:sldId id="262"/>
             <p14:sldId id="263"/>
@@ -141,7 +141,7 @@
             <p14:sldId id="266"/>
           </p14:sldIdLst>
         </p14:section>
-        <p14:section name="总结" id="{ee22bd34-6e42-ccd2-c9df-0a803be7b0a0}">
+        <p14:section name="总结" id="{5b630b38-04a5-d9e6-d77d-ee5366493c2c}">
           <p14:sldIdLst>
             <p14:sldId id="267"/>
           </p14:sldIdLst>
@@ -550,7 +550,7 @@
           <a:p>
             <a:r>
               <a:rPr lang="en-US" dirty="0"/>
-              <a:t>【约 20 秒】各位老师、同学好，我是黄广润。今天分享的是我对一份市场研究报告的阅读和评价。汇报按报告本身的顺序：先讲背景和问题，再讲方法和结论，最后做评价。</a:t>
+              <a:t>【约 20 秒】各位老师、同学好，我是黄广润。今天评析 Gracenote 的报告《AI 时代的电视搜索与内容发现》，分四部分：研究背景与问题、研究方法、研究结论，以及思考与评价。</a:t>
             </a:r>
             <a:endParaRPr lang="en-US" dirty="0"/>
           </a:p>
@@ -638,7 +638,7 @@
           <a:p>
             <a:r>
               <a:rPr lang="en-US" dirty="0"/>
-              <a:t>【约 30 秒】第三看调查时间。报告拿皮尤 2025 年秋天的 30%，对比自己 2026 年初的 54%，认为使用在加速。但皮尤以全体青少年为分母，13 至 14 岁只有 24%，本报告只统计 AI 用户。换成使用者，皮尤是 44%，仍差约 10 个百分点，还不能判断是否在加速。</a:t>
+              <a:t>【约 30 秒】调查时间。报告以皮尤 2025 年秋的 30%，对比自己 2026 年初的 54%，称使用在加速。但皮尤以全体青少年为分母，13 至 14 岁是 24%，本报告只统计 AI 用户。皮尤使用者中的比例是 44%，仍差约 10 个百分点，还不能判断“加速”。</a:t>
             </a:r>
             <a:endParaRPr lang="en-US" dirty="0"/>
           </a:p>
@@ -726,7 +726,7 @@
           <a:p>
             <a:r>
               <a:rPr lang="en-US" dirty="0"/>
-              <a:t>【约 25 秒】最后看研究方法。支撑“难找导致退订”的，有退订意向、行业流失率、市场预测和 AI 测试四类数据。它们来自不同人群，没有追踪同一批人，也没有对照，只能说明几件事同时存在，不足以证明因果。</a:t>
+              <a:t>【约 20 秒】研究方法。支撑“难找导致退订”的，是退订意向、退订率、市场预测和 AI 测试四类数据，并列使用。它们性质不同，没有追踪同一批人，也没有对照，只能说明几件事同时存在，不足以证明因果。</a:t>
             </a:r>
             <a:endParaRPr lang="en-US" dirty="0"/>
           </a:p>
@@ -814,7 +814,7 @@
           <a:p>
             <a:r>
               <a:rPr lang="en-US" dirty="0"/>
-              <a:t>【约 30 秒】最后总结。这份报告有参考价值，皮尤等独立来源也指向同样的方向。但结论超出了样本所能支持的范围：前两项只适用于 AI 用户，第三项只能说明相关，第四项没有检验。重新设计时，可以采用概率样本，纳入不用 AI 的人，追踪同一批人，并公开抽样方法。谢谢大家。</a:t>
+              <a:t>【约 35 秒】总结。报告有参考价值，皮尤、Veed 等独立来源也指向同样的两个方向。但结论超出了样本所能支持的范围：前两项仅限 AI 用户，第三项只能说相关，第四项未经检验。改进方向有三点：采用概率样本并纳入非 AI 用户；同一问卷询问困难与退订，追踪同一批人；公开招募、配额、加权和回收率。谢谢大家。</a:t>
             </a:r>
             <a:endParaRPr lang="en-US" dirty="0"/>
           </a:p>
@@ -902,7 +902,7 @@
           <a:p>
             <a:r>
               <a:rPr lang="en-US" dirty="0"/>
-              <a:t>【约 25 秒】我选的是 Gracenote 在 2026 年 4 月发布的报告，《AI 时代的电视搜索与内容发现》。Gracenote 是尼尔森旗下的公司，做电视和流媒体的节目数据。视频软件里的节目指南，背后常常就是这类数据。</a:t>
+              <a:t>【约 25 秒】选取的是 Gracenote 2026 年 4 月的报告。Gracenote 是尼尔森旗下的公司，做电视和流媒体的节目数据，包括名称、简介、播出平台和节目表。视频软件里的节目指南，背后常常就是这类数据。</a:t>
             </a:r>
             <a:endParaRPr lang="en-US" dirty="0"/>
           </a:p>
@@ -990,7 +990,7 @@
           <a:p>
             <a:r>
               <a:rPr lang="en-US" dirty="0"/>
-              <a:t>【约 30 秒】先看研究背景。流媒体平台越来越多，节目分散，找想看的内容更费劲，AI 聊天机器人成了新的找节目方式。报告由此提出三个问题：AI 的使用频率，找节目的难度与退订意向，以及对 AI 回答的信任。需要留意，报告建议 AI 接入行业数据，这正是 Gracenote 的业务。</a:t>
+              <a:t>【约 40 秒】流媒体平台增多，节目分散。截至 2026 年 2 月，Gracenote 记录了近 350 个点播片库、约 180 万个节目、近 2,100 个免费频道。找节目更费劲，AI 聊天机器人成了新的方式。报告提出三个问题：各年龄段使用 AI 的频率，找节目的难度与退订意向，以及对 AI 回答的信任。留意：报告建议 AI 接入行业数据，这正是 Gracenote 的业务。</a:t>
             </a:r>
             <a:endParaRPr lang="en-US" dirty="0"/>
           </a:p>
@@ -1078,7 +1078,7 @@
           <a:p>
             <a:r>
               <a:rPr lang="en-US" dirty="0"/>
-              <a:t>【约 30 秒】研究方法方面，数据主要来自两项线上问卷。第一项在 2026 年 1 至 2 月进行，对象是 4003 名 13 至 79 岁的美国 AI 聊天机器人用户。第二项在 2025 年夏天进行，覆盖六国，每国 500 名流媒体用户。两项调查，报告都没有说明抽样方法。</a:t>
+              <a:t>【约 30 秒】数据主要来自两项线上问卷。调查一在 2026 年 1 至 2 月进行，对象是美国 13 至 79 岁的 AI 聊天机器人用户，4003 人。调查二在 2025 年 7 至 8 月进行，对象是六国流媒体用户，每国 500 人。两项调查，报告都没有说明抽样方法。另外引用了 11 个外部来源。</a:t>
             </a:r>
             <a:endParaRPr lang="en-US" dirty="0"/>
           </a:p>
@@ -1166,7 +1166,7 @@
           <a:p>
             <a:r>
               <a:rPr lang="en-US" dirty="0"/>
-              <a:t>【约 20 秒】再看研究结论，共四项。第一项，年轻人越来越依赖 AI：13 至 14 岁受访者中，80% 说使用增加，54% 每天使用。第二项，信任有限：75% 的受访者会核对 AI 的结果，因为 AI 可能出错。</a:t>
+              <a:t>【约 30 秒】研究结论共四项。结论一，13 至 14 岁受访者中，80% 说近 18 个月使用增加，54% 每天使用 AI。结论二，75% 的受访者会核对 AI 的结果。报告的解释是，AI 回答直接、可以追问，所以使用增加；但可能生成错误信息，所以需要核对。</a:t>
             </a:r>
             <a:endParaRPr lang="en-US" dirty="0"/>
           </a:p>
@@ -1254,7 +1254,7 @@
           <a:p>
             <a:r>
               <a:rPr lang="en-US" dirty="0"/>
-              <a:t>【约 25 秒】第三项，内容难找可能导致退订。受访者平均要花 14 分钟找节目，18 至 34 岁的受访者中 54% 表示可能因此退订，AI 也只能正确回答约三分之二的播出平台。第四项，因此 AI 需要接入可靠的行业数据。</a:t>
+              <a:t>【约 25 秒】结论三，联网电视已占美国电视时长的 54%，用户平均要花 14 分钟找节目，18 至 34 岁受访者中 54% 表示可能因此退订。结论四，测试显示 AI 只能正确回答约三分之二的播出平台，所以报告提出，AI 需要接入可靠的行业数据。</a:t>
             </a:r>
             <a:endParaRPr lang="en-US" dirty="0"/>
           </a:p>
@@ -1342,7 +1342,7 @@
           <a:p>
             <a:r>
               <a:rPr lang="en-US" dirty="0"/>
-              <a:t>【约 15 秒】接下来评价。报告的推论是一条链：依赖 AI，信任有限，难找导致退订，所以要接入行业数据。我从调查对象、范围、时间和研究方法四个方面逐项检查。</a:t>
+              <a:t>【约 10 秒】报告的四项结论是一条推论链。下面从调查对象、调查范围、调查时间和研究方法四个方面，逐项检验。</a:t>
             </a:r>
             <a:endParaRPr lang="en-US" dirty="0"/>
           </a:p>
@@ -1430,7 +1430,7 @@
           <a:p>
             <a:r>
               <a:rPr lang="en-US" dirty="0"/>
-              <a:t>【约 20 秒】先看调查对象。4003 名受访者都是 AI 聊天机器人用户，不包括不用 AI 的人。所以 54% 和 75% 只代表 AI 用户，报告正文却有几处写成“美国人”。</a:t>
+              <a:t>【约 15 秒】调查对象。4003 名受访者均为 AI 聊天机器人用户，以使用 AI 为筛选条件，不包括非用户。所以结果只代表 AI 用户，不能推及全体美国人。</a:t>
             </a:r>
             <a:endParaRPr lang="en-US" dirty="0"/>
           </a:p>
@@ -1518,7 +1518,7 @@
           <a:p>
             <a:r>
               <a:rPr lang="en-US" dirty="0"/>
-              <a:t>【约 20 秒】再看调查范围。报告说平均找节目 14 分钟，其实是六国的简单平均，法国的 26 分钟拉高了均值，美国本身是 12 分钟。这个数字还被放在美国的收视图表里，容易被当成美国的数据。</a:t>
+              <a:t>【约 15 秒】调查范围。图中橙框里的 14 分钟，被放在美国收视图表中。它其实是六国的简单平均，法国的 26 分钟抬高了均值，美国实际是 12 分钟，容易被高估。</a:t>
             </a:r>
             <a:endParaRPr lang="en-US" dirty="0"/>
           </a:p>
@@ -11434,6 +11434,20 @@
             </a:r>
             <a:endParaRPr lang="en-US" sz="2000" dirty="0"/>
           </a:p>
+          <a:p>
+            <a:pPr indent="0" marL="0">
+              <a:buNone/>
+            </a:pPr>
+            <a:r>
+              <a:rPr lang="en-US" sz="1400" dirty="0">
+                <a:solidFill>
+                  <a:schemeClr val="accent5"/>
+                </a:solidFill>
+              </a:rPr>
+              <a:t>80% 称近 18 个月使用增加</a:t>
+            </a:r>
+            <a:endParaRPr lang="en-US" sz="2000" dirty="0"/>
+          </a:p>
         </p:txBody>
       </p:sp>
       <p:sp>
@@ -14451,7 +14465,7 @@
                   <a:schemeClr val="bg1"/>
                 </a:solidFill>
               </a:rPr>
-              <a:t>② 信任不足</a:t>
+              <a:t>② 信任有限</a:t>
             </a:r>
             <a:endParaRPr lang="en-US" sz="1900" dirty="0"/>
           </a:p>
